--- a/Bases de Datos II/Clases/Clase 10 - Control de concurrencia/Presentacion.pptx
+++ b/Bases de Datos II/Clases/Clase 10 - Control de concurrencia/Presentacion.pptx
@@ -35,6 +35,8 @@
     <p:sldId id="283" r:id="rId34"/>
     <p:sldId id="284" r:id="rId35"/>
     <p:sldId id="285" r:id="rId36"/>
+    <p:sldId id="286" r:id="rId37"/>
+    <p:sldId id="287" r:id="rId38"/>
   </p:sldIdLst>
   <p:sldSz cx="12191695" cy="6858000" type="screen4x3"/>
   <p:notesSz cx="6858000" cy="9144000"/>
@@ -3722,22 +3724,6 @@
                 </a:solidFill>
                 <a:latin typeface="Calibri"/>
               </a:rPr>
-              <a:t>–   READ COMMITTED impide la lectura sucia, porque solo se ve lo que ya fue confirmado, pero permite lectura no repetible y fantasma.</a:t>
-            </a:r>
-          </a:p>
-          <a:p>
-            <a:pPr>
-              <a:spcAft>
-                <a:spcPts val="800"/>
-              </a:spcAft>
-            </a:pPr>
-            <a:r>
-              <a:rPr sz="2000" b="0" i="0">
-                <a:solidFill>
-                  <a:srgbClr val="333333"/>
-                </a:solidFill>
-                <a:latin typeface="Calibri"/>
-              </a:rPr>
               <a:t>–   Es el nivel por omision de PostgreSQL, Oracle y SQL Server, y por lo tanto es el nivel en el que corre la enorme mayoria de los sistemas del mundo, incluido cualquier VetCare que el estudiante construya sin tocar nada.</a:t>
             </a:r>
           </a:p>
@@ -4006,22 +3992,6 @@
                 </a:solidFill>
                 <a:latin typeface="Calibri"/>
               </a:rPr>
-              <a:t>–   SERIALIZABLE impide los tres y equivale logicamente a ejecutar las transacciones una tras otra.</a:t>
-            </a:r>
-          </a:p>
-          <a:p>
-            <a:pPr>
-              <a:spcAft>
-                <a:spcPts val="800"/>
-              </a:spcAft>
-            </a:pPr>
-            <a:r>
-              <a:rPr sz="2000" b="0" i="0">
-                <a:solidFill>
-                  <a:srgbClr val="333333"/>
-                </a:solidFill>
-                <a:latin typeface="Calibri"/>
-              </a:rPr>
               <a:t>–   La sentencia para cambiarlo es SET TRANSACTION ISOLATION LEVEL SERIALIZABLE</a:t>
             </a:r>
           </a:p>
@@ -4219,7 +4189,7 @@
                 </a:solidFill>
                 <a:latin typeface="Calibri"/>
               </a:rPr>
-              <a:t>Control pesimista: SELECT ... FOR UPDATE</a:t>
+              <a:t>Control pesimista: SELECT... FOR UPDATE (1/2)</a:t>
             </a:r>
           </a:p>
         </p:txBody>
@@ -4252,13 +4222,13 @@
               </a:spcAft>
             </a:pPr>
             <a:r>
-              <a:rPr sz="1900" b="0" i="0">
+              <a:rPr sz="2000" b="0" i="0">
                 <a:solidFill>
                   <a:srgbClr val="333333"/>
                 </a:solidFill>
                 <a:latin typeface="Calibri"/>
               </a:rPr>
-              <a:t>–   El control pesimista asume que el conflicto va a ocurrir, asi que bloquea el recurso antes de tocarlo.</a:t>
+              <a:t>–   La herramienta concreta es SELECT...</a:t>
             </a:r>
           </a:p>
           <a:p>
@@ -4268,13 +4238,13 @@
               </a:spcAft>
             </a:pPr>
             <a:r>
-              <a:rPr sz="1900" b="0" i="0">
+              <a:rPr sz="2000" b="0" i="0">
                 <a:solidFill>
                   <a:srgbClr val="333333"/>
                 </a:solidFill>
                 <a:latin typeface="Calibri"/>
               </a:rPr>
-              <a:t>–   La herramienta concreta es SELECT...</a:t>
+              <a:t>–   FOR UPDATE: al leer la fila con SELECT stock FROM insumo WHERE id_insumo = 40 FOR UPDATE, el motor coloca un bloqueo exclusivo sobre esa fila</a:t>
             </a:r>
           </a:p>
           <a:p>
@@ -4284,13 +4254,13 @@
               </a:spcAft>
             </a:pPr>
             <a:r>
-              <a:rPr sz="1900" b="0" i="0">
+              <a:rPr sz="2000" b="0" i="0">
                 <a:solidFill>
                   <a:srgbClr val="333333"/>
                 </a:solidFill>
                 <a:latin typeface="Calibri"/>
               </a:rPr>
-              <a:t>–   FOR UPDATE: al leer la fila con SELECT stock FROM insumo WHERE id_insumo = 40 FOR UPDATE, el motor coloca un bloqueo exclusivo sobre esa fila</a:t>
+              <a:t>–   Y cualquier otra transaccion que intente leerla con la misma clausula queda esperando hasta el COMMIT o el ROLLBACK de la primera.</a:t>
             </a:r>
           </a:p>
           <a:p>
@@ -4300,77 +4270,13 @@
               </a:spcAft>
             </a:pPr>
             <a:r>
-              <a:rPr sz="1900" b="0" i="0">
+              <a:rPr sz="2000" b="0" i="0">
                 <a:solidFill>
                   <a:srgbClr val="333333"/>
                 </a:solidFill>
                 <a:latin typeface="Calibri"/>
               </a:rPr>
-              <a:t>–   Y cualquier otra transaccion que intente leerla con la misma clausula queda esperando hasta el COMMIT o el ROLLBACK de la primera.</a:t>
-            </a:r>
-          </a:p>
-          <a:p>
-            <a:pPr>
-              <a:spcAft>
-                <a:spcPts val="800"/>
-              </a:spcAft>
-            </a:pPr>
-            <a:r>
-              <a:rPr sz="1900" b="0" i="0">
-                <a:solidFill>
-                  <a:srgbClr val="333333"/>
-                </a:solidFill>
-                <a:latin typeface="Calibri"/>
-              </a:rPr>
               <a:t>–   Aplicado a VetCare resuelve limpiamente el doble descuento de stock: la segunda transaccion espera, y cuando por fin entra ya lee 2 y no 5, de modo que su validacion de stock suficiente funciona sobre el dato verdadero.</a:t>
-            </a:r>
-          </a:p>
-          <a:p>
-            <a:pPr>
-              <a:spcAft>
-                <a:spcPts val="800"/>
-              </a:spcAft>
-            </a:pPr>
-            <a:r>
-              <a:rPr sz="1900" b="0" i="0">
-                <a:solidFill>
-                  <a:srgbClr val="333333"/>
-                </a:solidFill>
-                <a:latin typeface="Calibri"/>
-              </a:rPr>
-              <a:t>–   Su costo es la espera, y la espera mal manejada produce un sistema que para el usuario parece caido.</a:t>
-            </a:r>
-          </a:p>
-          <a:p>
-            <a:pPr>
-              <a:spcAft>
-                <a:spcPts val="800"/>
-              </a:spcAft>
-            </a:pPr>
-            <a:r>
-              <a:rPr sz="1900" b="0" i="0">
-                <a:solidFill>
-                  <a:srgbClr val="333333"/>
-                </a:solidFill>
-                <a:latin typeface="Calibri"/>
-              </a:rPr>
-              <a:t>–   La regla de diseno asociada, y la mas importante de toda la clase, es mantener las transacciones cortas: entre el bloqueo y el COMMIT no debe haber una llamada a un servicio externo ni una pantalla esperando que el usuario confirme</a:t>
-            </a:r>
-          </a:p>
-          <a:p>
-            <a:pPr>
-              <a:spcAft>
-                <a:spcPts val="800"/>
-              </a:spcAft>
-            </a:pPr>
-            <a:r>
-              <a:rPr sz="1900" b="0" i="0">
-                <a:solidFill>
-                  <a:srgbClr val="333333"/>
-                </a:solidFill>
-                <a:latin typeface="Calibri"/>
-              </a:rPr>
-              <a:t>–   Porque mientras el usuario piensa o se va a almorzar la fila sigue bloqueada y nadie mas puede facturar ese insumo.</a:t>
             </a:r>
           </a:p>
         </p:txBody>
@@ -4551,7 +4457,7 @@
                 </a:solidFill>
                 <a:latin typeface="Calibri"/>
               </a:rPr>
-              <a:t>Control optimista: verificar unicamente al escribir (1/2)</a:t>
+              <a:t>Control pesimista: SELECT... FOR UPDATE (2/2)</a:t>
             </a:r>
           </a:p>
         </p:txBody>
@@ -4590,7 +4496,7 @@
                 </a:solidFill>
                 <a:latin typeface="Calibri"/>
               </a:rPr>
-              <a:t>–   El control optimista asume lo contrario: que los conflictos son raros, asi que no bloquea nada al leer y verifica unicamente al escribir.</a:t>
+              <a:t>–   Su costo es la espera, y la espera mal manejada produce un sistema que para el usuario parece caido.</a:t>
             </a:r>
           </a:p>
           <a:p>
@@ -4606,7 +4512,7 @@
                 </a:solidFill>
                 <a:latin typeface="Calibri"/>
               </a:rPr>
-              <a:t>–   Se implementa con una columna adicional, tipicamente llamada version, de tipo entero, o con un timestamp de ultima modificacion.</a:t>
+              <a:t>–   La regla de diseno asociada, y la mas importante de toda la clase, es mantener las transacciones cortas: entre el bloqueo y el COMMIT no debe haber una llamada a un servicio externo ni una pantalla esperando que el usuario confirme</a:t>
             </a:r>
           </a:p>
           <a:p>
@@ -4622,39 +4528,7 @@
                 </a:solidFill>
                 <a:latin typeface="Calibri"/>
               </a:rPr>
-              <a:t>–   El flujo en VetCare es este: la transaccion lee la cita 812 y obtiene version 7; el usuario edita la hora; al guardar se ejecuta UPDATE cita SET fecha_hora =..., version = 8 WHERE id_cita = 812 AND version = 7.</a:t>
-            </a:r>
-          </a:p>
-          <a:p>
-            <a:pPr>
-              <a:spcAft>
-                <a:spcPts val="800"/>
-              </a:spcAft>
-            </a:pPr>
-            <a:r>
-              <a:rPr sz="2000" b="0" i="0">
-                <a:solidFill>
-                  <a:srgbClr val="333333"/>
-                </a:solidFill>
-                <a:latin typeface="Calibri"/>
-              </a:rPr>
-              <a:t>–   Si otra transaccion ya paso por ahi, la version almacenada es 8 y la sentencia afecta cero filas.</a:t>
-            </a:r>
-          </a:p>
-          <a:p>
-            <a:pPr>
-              <a:spcAft>
-                <a:spcPts val="800"/>
-              </a:spcAft>
-            </a:pPr>
-            <a:r>
-              <a:rPr sz="2000" b="0" i="0">
-                <a:solidFill>
-                  <a:srgbClr val="333333"/>
-                </a:solidFill>
-                <a:latin typeface="Calibri"/>
-              </a:rPr>
-              <a:t>–   El numero de filas afectadas es la senal de conflicto, y con esa senal la aplicacion decide si reintenta o le avisa al usuario que el dato cambio mientras editaba.</a:t>
+              <a:t>–   Porque mientras el usuario piensa o se va a almorzar la fila sigue bloqueada y nadie mas puede facturar ese insumo.</a:t>
             </a:r>
           </a:p>
         </p:txBody>
@@ -4835,7 +4709,7 @@
                 </a:solidFill>
                 <a:latin typeface="Calibri"/>
               </a:rPr>
-              <a:t>Control optimista: verificar unicamente al escribir (2/2)</a:t>
+              <a:t>Control optimista: verificar unicamente al escribir (1/2)</a:t>
             </a:r>
           </a:p>
         </p:txBody>
@@ -4874,7 +4748,7 @@
                 </a:solidFill>
                 <a:latin typeface="Calibri"/>
               </a:rPr>
-              <a:t>–   El criterio para elegir entre los dos enfoques es la frecuencia real del conflicto, no el gusto: si dos personas pelean por la misma fila muchas veces al dia, el optimista reintenta sin parar y conviene el pesimista</a:t>
+              <a:t>–   El control optimista asume lo contrario: que los conflictos son raros, asi que no bloquea nada al leer y verifica unicamente al escribir.</a:t>
             </a:r>
           </a:p>
           <a:p>
@@ -4890,7 +4764,7 @@
                 </a:solidFill>
                 <a:latin typeface="Calibri"/>
               </a:rPr>
-              <a:t>–   Si el choque es excepcional, el optimista da mejor rendimiento porque nadie espera nunca.</a:t>
+              <a:t>–   Se implementa con una columna adicional, tipicamente llamada version, de tipo entero, o con un timestamp de ultima modificacion.</a:t>
             </a:r>
           </a:p>
           <a:p>
@@ -4906,7 +4780,39 @@
                 </a:solidFill>
                 <a:latin typeface="Calibri"/>
               </a:rPr>
-              <a:t>–   En VetCare, el stock de los insumos mas vendidos es un caso pesimista y la edicion de los datos de contacto de un dueno es un caso claramente optimista.</a:t>
+              <a:t>–   El flujo en VetCare es este: la transaccion lee la cita 812 y obtiene version 7; el usuario edita la hora; al guardar se ejecuta</a:t>
+            </a:r>
+          </a:p>
+          <a:p>
+            <a:pPr>
+              <a:spcAft>
+                <a:spcPts val="800"/>
+              </a:spcAft>
+            </a:pPr>
+            <a:r>
+              <a:rPr sz="2000" b="0" i="0">
+                <a:solidFill>
+                  <a:srgbClr val="333333"/>
+                </a:solidFill>
+                <a:latin typeface="Calibri"/>
+              </a:rPr>
+              <a:t>–   Si otra transaccion ya paso por ahi, la version almacenada es 8 y la sentencia afecta cero filas.</a:t>
+            </a:r>
+          </a:p>
+          <a:p>
+            <a:pPr>
+              <a:spcAft>
+                <a:spcPts val="800"/>
+              </a:spcAft>
+            </a:pPr>
+            <a:r>
+              <a:rPr sz="2000" b="0" i="0">
+                <a:solidFill>
+                  <a:srgbClr val="333333"/>
+                </a:solidFill>
+                <a:latin typeface="Calibri"/>
+              </a:rPr>
+              <a:t>–   El numero de filas afectadas es la senal de conflicto, y con esa senal la aplicacion decide si reintenta o le avisa al usuario que el dato cambio mientras editaba.</a:t>
             </a:r>
           </a:p>
         </p:txBody>
@@ -5087,7 +4993,7 @@
                 </a:solidFill>
                 <a:latin typeface="Calibri"/>
               </a:rPr>
-              <a:t>Deadlock: la escena de VetCare y como se evita (1/2)</a:t>
+              <a:t>Control optimista: verificar unicamente al escribir (2/2)</a:t>
             </a:r>
           </a:p>
         </p:txBody>
@@ -5126,7 +5032,7 @@
                 </a:solidFill>
                 <a:latin typeface="Calibri"/>
               </a:rPr>
-              <a:t>–   Un deadlock, o interbloqueo, ocurre cuando dos transacciones se esperan mutuamente y ninguna puede avanzar.</a:t>
+              <a:t>–   El criterio para elegir entre los dos enfoques es la frecuencia real del conflicto, no el gusto: si dos personas pelean por la misma fila muchas veces al dia, el optimista reintenta sin parar y conviene el pesimista</a:t>
             </a:r>
           </a:p>
           <a:p>
@@ -5142,7 +5048,7 @@
                 </a:solidFill>
                 <a:latin typeface="Calibri"/>
               </a:rPr>
-              <a:t>–   La escena de VetCare es concreta: el procedimiento de facturacion bloquea primero la fila de Factura y luego la de Insumo, mientras el procedimiento de devolucion bloquea primero Insumo y luego Factura.</a:t>
+              <a:t>–   Si el choque es excepcional, el optimista da mejor rendimiento porque nadie espera nunca.</a:t>
             </a:r>
           </a:p>
           <a:p>
@@ -5158,39 +5064,7 @@
                 </a:solidFill>
                 <a:latin typeface="Calibri"/>
               </a:rPr>
-              <a:t>–   Si los dos arrancan al mismo tiempo, cada uno tiene exactamente lo que el otro necesita, nadie cede y ninguna espera termina sola.</a:t>
-            </a:r>
-          </a:p>
-          <a:p>
-            <a:pPr>
-              <a:spcAft>
-                <a:spcPts val="800"/>
-              </a:spcAft>
-            </a:pPr>
-            <a:r>
-              <a:rPr sz="2000" b="0" i="0">
-                <a:solidFill>
-                  <a:srgbClr val="333333"/>
-                </a:solidFill>
-                <a:latin typeface="Calibri"/>
-              </a:rPr>
-              <a:t>–   Los motores no dejan eso colgado: mantienen internamente un grafo de esperas y, al detectar un ciclo, eligen una victima y la abortan con un error explicito.</a:t>
-            </a:r>
-          </a:p>
-          <a:p>
-            <a:pPr>
-              <a:spcAft>
-                <a:spcPts val="800"/>
-              </a:spcAft>
-            </a:pPr>
-            <a:r>
-              <a:rPr sz="2000" b="0" i="0">
-                <a:solidFill>
-                  <a:srgbClr val="333333"/>
-                </a:solidFill>
-                <a:latin typeface="Calibri"/>
-              </a:rPr>
-              <a:t>–   En Oracle es ORA-00060, en MySQL el error 1213, en PostgreSQL el codigo 40P01.</a:t>
+              <a:t>–   En VetCare, el stock de los insumos mas vendidos es un caso pesimista y la edicion de los datos de contacto de un dueno es un caso claramente optimista.</a:t>
             </a:r>
           </a:p>
         </p:txBody>
@@ -5371,21 +5245,141 @@
                 </a:solidFill>
                 <a:latin typeface="Calibri"/>
               </a:rPr>
-              <a:t>Deadlock: la escena de VetCare y como se evita (2/2)</a:t>
-            </a:r>
-          </a:p>
-        </p:txBody>
-      </p:sp>
-      <p:sp>
-        <p:nvSpPr>
-          <p:cNvPr id="5" name="TextBox 4"/>
+              <a:t>Control optimista: verificar unicamente al... — sintaxis</a:t>
+            </a:r>
+          </a:p>
+        </p:txBody>
+      </p:sp>
+      <p:sp>
+        <p:nvSpPr>
+          <p:cNvPr id="5" name="Rounded Rectangle 4"/>
+          <p:cNvSpPr/>
+          <p:nvPr/>
+        </p:nvSpPr>
+        <p:spPr>
+          <a:xfrm>
+            <a:off x="457200" y="1261872"/>
+            <a:ext cx="11277295" cy="5093208"/>
+          </a:xfrm>
+          <a:prstGeom prst="roundRect">
+            <a:avLst>
+              <a:gd name="adj" fmla="val 12000"/>
+            </a:avLst>
+          </a:prstGeom>
+          <a:solidFill>
+            <a:srgbClr val="1E2A38"/>
+          </a:solidFill>
+          <a:ln>
+            <a:noFill/>
+          </a:ln>
+        </p:spPr>
+        <p:style>
+          <a:lnRef idx="1">
+            <a:schemeClr val="accent1"/>
+          </a:lnRef>
+          <a:fillRef idx="3">
+            <a:schemeClr val="accent1"/>
+          </a:fillRef>
+          <a:effectRef idx="2">
+            <a:schemeClr val="accent1"/>
+          </a:effectRef>
+          <a:fontRef idx="minor">
+            <a:schemeClr val="lt1"/>
+          </a:fontRef>
+        </p:style>
+        <p:txBody>
+          <a:bodyPr rtlCol="0" anchor="ctr"/>
+          <a:lstStyle/>
+          <a:p>
+            <a:pPr algn="ctr"/>
+          </a:p>
+        </p:txBody>
+      </p:sp>
+      <p:sp>
+        <p:nvSpPr>
+          <p:cNvPr id="6" name="Rectangle 5"/>
+          <p:cNvSpPr/>
+          <p:nvPr/>
+        </p:nvSpPr>
+        <p:spPr>
+          <a:xfrm>
+            <a:off x="457200" y="1261872"/>
+            <a:ext cx="11277295" cy="320040"/>
+          </a:xfrm>
+          <a:prstGeom prst="rect">
+            <a:avLst/>
+          </a:prstGeom>
+          <a:solidFill>
+            <a:srgbClr val="095292"/>
+          </a:solidFill>
+          <a:ln>
+            <a:noFill/>
+          </a:ln>
+        </p:spPr>
+        <p:style>
+          <a:lnRef idx="1">
+            <a:schemeClr val="accent1"/>
+          </a:lnRef>
+          <a:fillRef idx="3">
+            <a:schemeClr val="accent1"/>
+          </a:fillRef>
+          <a:effectRef idx="2">
+            <a:schemeClr val="accent1"/>
+          </a:effectRef>
+          <a:fontRef idx="minor">
+            <a:schemeClr val="lt1"/>
+          </a:fontRef>
+        </p:style>
+        <p:txBody>
+          <a:bodyPr rtlCol="0" anchor="ctr"/>
+          <a:lstStyle/>
+          <a:p>
+            <a:pPr algn="ctr"/>
+          </a:p>
+        </p:txBody>
+      </p:sp>
+      <p:sp>
+        <p:nvSpPr>
+          <p:cNvPr id="7" name="TextBox 6"/>
           <p:cNvSpPr txBox="1"/>
           <p:nvPr/>
         </p:nvSpPr>
         <p:spPr>
           <a:xfrm>
-            <a:off x="457200" y="1170432"/>
-            <a:ext cx="11277295" cy="5230368"/>
+            <a:off x="685800" y="1307592"/>
+            <a:ext cx="10820095" cy="256032"/>
+          </a:xfrm>
+          <a:prstGeom prst="rect">
+            <a:avLst/>
+          </a:prstGeom>
+          <a:noFill/>
+        </p:spPr>
+        <p:txBody>
+          <a:bodyPr wrap="square" anchor="ctr"/>
+          <a:lstStyle/>
+          <a:p>
+            <a:r>
+              <a:rPr sz="1000" b="1" i="0">
+                <a:solidFill>
+                  <a:srgbClr val="269CCB"/>
+                </a:solidFill>
+                <a:latin typeface="Calibri"/>
+              </a:rPr>
+              <a:t>● ● ●</a:t>
+            </a:r>
+          </a:p>
+        </p:txBody>
+      </p:sp>
+      <p:sp>
+        <p:nvSpPr>
+          <p:cNvPr id="8" name="TextBox 7"/>
+          <p:cNvSpPr txBox="1"/>
+          <p:nvPr/>
+        </p:nvSpPr>
+        <p:spPr>
+          <a:xfrm>
+            <a:off x="777240" y="1719072"/>
+            <a:ext cx="10637215" cy="4453128"/>
           </a:xfrm>
           <a:prstGeom prst="rect">
             <a:avLst/>
@@ -5400,88 +5394,56 @@
           <a:p>
             <a:pPr>
               <a:spcAft>
-                <a:spcPts val="800"/>
+                <a:spcPts val="400"/>
               </a:spcAft>
             </a:pPr>
             <a:r>
-              <a:rPr sz="2000" b="0" i="0">
-                <a:solidFill>
-                  <a:srgbClr val="333333"/>
-                </a:solidFill>
-                <a:latin typeface="Calibri"/>
-              </a:rPr>
-              <a:t>–   La transaccion sobreviviente termina normal.</a:t>
+              <a:rPr sz="1400" b="0" i="0">
+                <a:solidFill>
+                  <a:srgbClr val="FFFFFF"/>
+                </a:solidFill>
+                <a:latin typeface="Calibri"/>
+              </a:rPr>
+              <a:t>UPDATE cita</a:t>
             </a:r>
           </a:p>
           <a:p>
             <a:pPr>
               <a:spcAft>
-                <a:spcPts val="800"/>
+                <a:spcPts val="400"/>
               </a:spcAft>
             </a:pPr>
             <a:r>
-              <a:rPr sz="2000" b="0" i="0">
-                <a:solidFill>
-                  <a:srgbClr val="333333"/>
-                </a:solidFill>
-                <a:latin typeface="Calibri"/>
-              </a:rPr>
-              <a:t>–   La consecuencia practica para el estudiante es que la aplicacion debe estar preparada para recibir ese error y reintentar la operacion, porque no es un defecto del sistema sino el mecanismo funcionando como debe.</a:t>
+              <a:rPr sz="1400" b="0" i="0">
+                <a:solidFill>
+                  <a:srgbClr val="FFFFFF"/>
+                </a:solidFill>
+                <a:latin typeface="Calibri"/>
+              </a:rPr>
+              <a:t>SET fecha_hora = ..., version = 8</a:t>
             </a:r>
           </a:p>
           <a:p>
             <a:pPr>
               <a:spcAft>
-                <a:spcPts val="800"/>
+                <a:spcPts val="400"/>
               </a:spcAft>
             </a:pPr>
             <a:r>
-              <a:rPr sz="2000" b="0" i="0">
-                <a:solidFill>
-                  <a:srgbClr val="333333"/>
-                </a:solidFill>
-                <a:latin typeface="Calibri"/>
-              </a:rPr>
-              <a:t>–   Y la prevencion es sorprendentemente simple y barata: acceder siempre a las tablas en el mismo orden en todos los procedimientos.</a:t>
-            </a:r>
-          </a:p>
-          <a:p>
-            <a:pPr>
-              <a:spcAft>
-                <a:spcPts val="800"/>
-              </a:spcAft>
-            </a:pPr>
-            <a:r>
-              <a:rPr sz="2000" b="0" i="0">
-                <a:solidFill>
-                  <a:srgbClr val="333333"/>
-                </a:solidFill>
-                <a:latin typeface="Calibri"/>
-              </a:rPr>
-              <a:t>–   Si todo el codigo de VetCare toca Factura antes que Insumo, el ciclo no puede formarse nunca.</a:t>
-            </a:r>
-          </a:p>
-          <a:p>
-            <a:pPr>
-              <a:spcAft>
-                <a:spcPts val="800"/>
-              </a:spcAft>
-            </a:pPr>
-            <a:r>
-              <a:rPr sz="2000" b="0" i="0">
-                <a:solidFill>
-                  <a:srgbClr val="333333"/>
-                </a:solidFill>
-                <a:latin typeface="Calibri"/>
-              </a:rPr>
-              <a:t>–   Ese acuerdo de orden canonico se escribe una vez en el documento de diseno, se respeta, y elimina la clase entera de problemas sin costo de rendimiento.</a:t>
-            </a:r>
-          </a:p>
-        </p:txBody>
-      </p:sp>
-      <p:sp>
-        <p:nvSpPr>
-          <p:cNvPr id="6" name="TextBox 5"/>
+              <a:rPr sz="1400" b="0" i="0">
+                <a:solidFill>
+                  <a:srgbClr val="FFFFFF"/>
+                </a:solidFill>
+                <a:latin typeface="Calibri"/>
+              </a:rPr>
+              <a:t>WHERE id_cita = 812 AND version = 7</a:t>
+            </a:r>
+          </a:p>
+        </p:txBody>
+      </p:sp>
+      <p:sp>
+        <p:nvSpPr>
+          <p:cNvPr id="9" name="TextBox 8"/>
           <p:cNvSpPr txBox="1"/>
           <p:nvPr/>
         </p:nvSpPr>
@@ -5655,7 +5617,7 @@
                 </a:solidFill>
                 <a:latin typeface="Calibri"/>
               </a:rPr>
-              <a:t>Antes de los niveles: la restriccion que cuesta una linea (1/2)</a:t>
+              <a:t>Deadlock: la escena de VetCare y como se evita (1/2)</a:t>
             </a:r>
           </a:p>
         </p:txBody>
@@ -5694,7 +5656,7 @@
                 </a:solidFill>
                 <a:latin typeface="Calibri"/>
               </a:rPr>
-              <a:t>–   Antes de complicarse con niveles de aislamiento hay una solucion declarativa que resuelve el caso estrella de VetCare y cuesta una sola linea: ALTER TABLE cita ADD CONSTRAINT uq_agenda UNIQUE (id_veterinario, fecha_hora).</a:t>
+              <a:t>–   La escena de VetCare es concreta: el procedimiento de facturacion bloquea primero la fila de Factura y luego la de Insumo, mientras el procedimiento de devolucion bloquea primero Insumo y luego Factura.</a:t>
             </a:r>
           </a:p>
           <a:p>
@@ -5710,7 +5672,7 @@
                 </a:solidFill>
                 <a:latin typeface="Calibri"/>
               </a:rPr>
-              <a:t>–   Con esa restriccion, cuando las dos recepcionistas insertan, el motor deja pasar la primera y rechaza la segunda con una violacion de unicidad, sin que nadie haya razonado sobre aislamiento</a:t>
+              <a:t>–   Los motores no dejan eso colgado: mantienen internamente un grafo de esperas y, al detectar un ciclo, eligen una victima y la abortan con un error explicito.</a:t>
             </a:r>
           </a:p>
           <a:p>
@@ -5726,7 +5688,7 @@
                 </a:solidFill>
                 <a:latin typeface="Calibri"/>
               </a:rPr>
-              <a:t>–   El procedimiento captura esa excepcion y devuelve «ese horario acaba de ser tomado, elija otro».</a:t>
+              <a:t>–   En Oracle es ORA-00060, en MySQL el error 1213, en PostgreSQL el codigo 40P01.</a:t>
             </a:r>
           </a:p>
           <a:p>
@@ -5742,23 +5704,7 @@
                 </a:solidFill>
                 <a:latin typeface="Calibri"/>
               </a:rPr>
-              <a:t>–   Esto conduce a la limitacion practica del dia y a la pregunta previsible: «como demuestro dos transacciones simultaneas si DB Fiddle es una sola sesion?».</a:t>
-            </a:r>
-          </a:p>
-          <a:p>
-            <a:pPr>
-              <a:spcAft>
-                <a:spcPts val="800"/>
-              </a:spcAft>
-            </a:pPr>
-            <a:r>
-              <a:rPr sz="2000" b="0" i="0">
-                <a:solidFill>
-                  <a:srgbClr val="333333"/>
-                </a:solidFill>
-                <a:latin typeface="Calibri"/>
-              </a:rPr>
-              <a:t>–   La respuesta honesta es que no se puede: los playgrounds gratuitos ejecutan un script en una unica sesion, normalmente con autocommit activo, y no permiten abrir dos conexiones para intercalarlas.</a:t>
+              <a:t>–   La consecuencia practica para el estudiante es que la aplicacion debe estar preparada para recibir ese error y reintentar la operacion, porque no es un defecto del sistema sino el mecanismo funcionando como debe.</a:t>
             </a:r>
           </a:p>
         </p:txBody>
@@ -5939,7 +5885,7 @@
                 </a:solidFill>
                 <a:latin typeface="Calibri"/>
               </a:rPr>
-              <a:t>Antes de los niveles: la restriccion que cuesta una linea (2/2)</a:t>
+              <a:t>Deadlock: la escena de VetCare y como se evita (2/2)</a:t>
             </a:r>
           </a:p>
         </p:txBody>
@@ -5978,7 +5924,7 @@
                 </a:solidFill>
                 <a:latin typeface="Calibri"/>
               </a:rPr>
-              <a:t>–   Lo que si se demuestra con evidencia ejecutable son tres cosas: la restriccion UNIQUE rechazando el segundo INSERT</a:t>
+              <a:t>–   Y la prevencion es sorprendentemente simple y barata: acceder siempre a las tablas en el mismo orden en todos los procedimientos.</a:t>
             </a:r>
           </a:p>
           <a:p>
@@ -5994,7 +5940,7 @@
                 </a:solidFill>
                 <a:latin typeface="Calibri"/>
               </a:rPr>
-              <a:t>–   El patron optimista completo con la columna version y el UPDATE que afecta cero filas, y la sintaxis de SELECT FOR UPDATE ejecutandose sin error.</a:t>
+              <a:t>–   Si todo el codigo de VetCare toca Factura antes que Insumo, el ciclo no puede formarse nunca.</a:t>
             </a:r>
           </a:p>
           <a:p>
@@ -6010,39 +5956,7 @@
                 </a:solidFill>
                 <a:latin typeface="Calibri"/>
               </a:rPr>
-              <a:t>–   Lo que no se demuestra se documenta en una tabla de linea de tiempo con columnas T1, T2 y estado de la fila, paso por paso; esa tabla es un artefacto profesional legitimo, no un premio de consolacion</a:t>
-            </a:r>
-          </a:p>
-          <a:p>
-            <a:pPr>
-              <a:spcAft>
-                <a:spcPts val="800"/>
-              </a:spcAft>
-            </a:pPr>
-            <a:r>
-              <a:rPr sz="2000" b="0" i="0">
-                <a:solidFill>
-                  <a:srgbClr val="333333"/>
-                </a:solidFill>
-                <a:latin typeface="Calibri"/>
-              </a:rPr>
-              <a:t>–   Y es exactamente como se comunican estos escenarios en un documento de diseno real.</a:t>
-            </a:r>
-          </a:p>
-          <a:p>
-            <a:pPr>
-              <a:spcAft>
-                <a:spcPts val="800"/>
-              </a:spcAft>
-            </a:pPr>
-            <a:r>
-              <a:rPr sz="2000" b="0" i="0">
-                <a:solidFill>
-                  <a:srgbClr val="333333"/>
-                </a:solidFill>
-                <a:latin typeface="Calibri"/>
-              </a:rPr>
-              <a:t>–   El informe de hoy se audita en el checkpoint de la Clase 11 y se convierte en clausula del contrato de operaciones de la Clase 12, donde cada procedimiento declara que errores puede lanzar, incluido el de horario ya tomado.</a:t>
+              <a:t>–   Ese acuerdo de orden canonico se escribe una vez en el documento de diseno, se respeta, y elimina la clase entera de problemas sin costo de rendimiento.</a:t>
             </a:r>
           </a:p>
         </p:txBody>
@@ -6117,7 +6031,7 @@
         <p:spPr>
           <a:xfrm>
             <a:off x="0" y="0"/>
-            <a:ext cx="12191695" cy="1170432"/>
+            <a:ext cx="12191695" cy="960120"/>
           </a:xfrm>
           <a:prstGeom prst="rect">
             <a:avLst/>
@@ -6159,7 +6073,7 @@
         </p:nvSpPr>
         <p:spPr>
           <a:xfrm>
-            <a:off x="0" y="1170432"/>
+            <a:off x="0" y="960120"/>
             <a:ext cx="12191695" cy="41148"/>
           </a:xfrm>
           <a:prstGeom prst="rect">
@@ -6203,7 +6117,7 @@
         <p:spPr>
           <a:xfrm>
             <a:off x="457200" y="164592"/>
-            <a:ext cx="11277295" cy="384048"/>
+            <a:ext cx="11277295" cy="502920"/>
           </a:xfrm>
           <a:prstGeom prst="rect">
             <a:avLst/>
@@ -6223,7 +6137,7 @@
                 </a:solidFill>
                 <a:latin typeface="Calibri"/>
               </a:rPr>
-              <a:t>Doble reserva sin control de concurrencia</a:t>
+              <a:t>Antes de los niveles: la restriccion que cuesta una linea</a:t>
             </a:r>
           </a:p>
         </p:txBody>
@@ -6236,8 +6150,8 @@
         </p:nvSpPr>
         <p:spPr>
           <a:xfrm>
-            <a:off x="457200" y="566928"/>
-            <a:ext cx="11277295" cy="411480"/>
+            <a:off x="457200" y="1170432"/>
+            <a:ext cx="11277295" cy="5230368"/>
           </a:xfrm>
           <a:prstGeom prst="rect">
             <a:avLst/>
@@ -6250,417 +6164,58 @@
           </a:bodyPr>
           <a:lstStyle/>
           <a:p>
-            <a:r>
-              <a:rPr sz="1400" b="0" i="0">
-                <a:solidFill>
-                  <a:srgbClr val="B8D8EE"/>
-                </a:solidFill>
-                <a:latin typeface="Calibri"/>
-              </a:rPr>
-              <a:t>Dos transacciones concurrentes leen “libre” antes de que ninguna confirme</a:t>
-            </a:r>
-          </a:p>
-        </p:txBody>
-      </p:sp>
-      <p:sp>
-        <p:nvSpPr>
-          <p:cNvPr id="6" name="Rounded Rectangle 5"/>
-          <p:cNvSpPr/>
-          <p:nvPr/>
-        </p:nvSpPr>
-        <p:spPr>
-          <a:xfrm>
-            <a:off x="731520" y="2011680"/>
-            <a:ext cx="2834640" cy="914400"/>
-          </a:xfrm>
-          <a:prstGeom prst="roundRect">
-            <a:avLst>
-              <a:gd name="adj" fmla="val 12000"/>
-            </a:avLst>
-          </a:prstGeom>
-          <a:solidFill>
-            <a:srgbClr val="095292"/>
-          </a:solidFill>
-          <a:ln>
-            <a:noFill/>
-          </a:ln>
-        </p:spPr>
-        <p:style>
-          <a:lnRef idx="1">
-            <a:schemeClr val="accent1"/>
-          </a:lnRef>
-          <a:fillRef idx="3">
-            <a:schemeClr val="accent1"/>
-          </a:fillRef>
-          <a:effectRef idx="2">
-            <a:schemeClr val="accent1"/>
-          </a:effectRef>
-          <a:fontRef idx="minor">
-            <a:schemeClr val="lt1"/>
-          </a:fontRef>
-        </p:style>
-        <p:txBody>
-          <a:bodyPr rtlCol="0" anchor="ctr" wrap="square"/>
-          <a:lstStyle/>
-          <a:p>
-            <a:pPr algn="ctr"/>
-            <a:r>
-              <a:rPr sz="1300" b="1" i="0">
-                <a:solidFill>
-                  <a:srgbClr val="FFFFFF"/>
-                </a:solidFill>
-                <a:latin typeface="Calibri"/>
-              </a:rPr>
-              <a:t>T1 (Recepción A)
-lee franja: LIBRE</a:t>
-            </a:r>
-          </a:p>
-        </p:txBody>
-      </p:sp>
-      <p:sp>
-        <p:nvSpPr>
-          <p:cNvPr id="7" name="Rounded Rectangle 6"/>
-          <p:cNvSpPr/>
-          <p:nvPr/>
-        </p:nvSpPr>
-        <p:spPr>
-          <a:xfrm>
-            <a:off x="4206240" y="2011680"/>
-            <a:ext cx="2834640" cy="914400"/>
-          </a:xfrm>
-          <a:prstGeom prst="roundRect">
-            <a:avLst>
-              <a:gd name="adj" fmla="val 12000"/>
-            </a:avLst>
-          </a:prstGeom>
-          <a:solidFill>
-            <a:srgbClr val="095292"/>
-          </a:solidFill>
-          <a:ln>
-            <a:noFill/>
-          </a:ln>
-        </p:spPr>
-        <p:style>
-          <a:lnRef idx="1">
-            <a:schemeClr val="accent1"/>
-          </a:lnRef>
-          <a:fillRef idx="3">
-            <a:schemeClr val="accent1"/>
-          </a:fillRef>
-          <a:effectRef idx="2">
-            <a:schemeClr val="accent1"/>
-          </a:effectRef>
-          <a:fontRef idx="minor">
-            <a:schemeClr val="lt1"/>
-          </a:fontRef>
-        </p:style>
-        <p:txBody>
-          <a:bodyPr rtlCol="0" anchor="ctr" wrap="square"/>
-          <a:lstStyle/>
-          <a:p>
-            <a:pPr algn="ctr"/>
-            <a:r>
-              <a:rPr sz="1300" b="1" i="0">
-                <a:solidFill>
-                  <a:srgbClr val="FFFFFF"/>
-                </a:solidFill>
-                <a:latin typeface="Calibri"/>
-              </a:rPr>
-              <a:t>T1: INSERT cita
-COMMIT → OK</a:t>
-            </a:r>
-          </a:p>
-        </p:txBody>
-      </p:sp>
-      <p:sp>
-        <p:nvSpPr>
-          <p:cNvPr id="8" name="Rounded Rectangle 7"/>
-          <p:cNvSpPr/>
-          <p:nvPr/>
-        </p:nvSpPr>
-        <p:spPr>
-          <a:xfrm>
-            <a:off x="731520" y="3383280"/>
-            <a:ext cx="2834640" cy="914400"/>
-          </a:xfrm>
-          <a:prstGeom prst="roundRect">
-            <a:avLst>
-              <a:gd name="adj" fmla="val 12000"/>
-            </a:avLst>
-          </a:prstGeom>
-          <a:solidFill>
-            <a:srgbClr val="269CCB"/>
-          </a:solidFill>
-          <a:ln>
-            <a:noFill/>
-          </a:ln>
-        </p:spPr>
-        <p:style>
-          <a:lnRef idx="1">
-            <a:schemeClr val="accent1"/>
-          </a:lnRef>
-          <a:fillRef idx="3">
-            <a:schemeClr val="accent1"/>
-          </a:fillRef>
-          <a:effectRef idx="2">
-            <a:schemeClr val="accent1"/>
-          </a:effectRef>
-          <a:fontRef idx="minor">
-            <a:schemeClr val="lt1"/>
-          </a:fontRef>
-        </p:style>
-        <p:txBody>
-          <a:bodyPr rtlCol="0" anchor="ctr" wrap="square"/>
-          <a:lstStyle/>
-          <a:p>
-            <a:pPr algn="ctr"/>
-            <a:r>
-              <a:rPr sz="1300" b="1" i="0">
-                <a:solidFill>
-                  <a:srgbClr val="FFFFFF"/>
-                </a:solidFill>
-                <a:latin typeface="Calibri"/>
-              </a:rPr>
-              <a:t>T2 (Recepción B)
-lee franja: LIBRE</a:t>
-            </a:r>
-          </a:p>
-        </p:txBody>
-      </p:sp>
-      <p:sp>
-        <p:nvSpPr>
-          <p:cNvPr id="9" name="Rounded Rectangle 8"/>
-          <p:cNvSpPr/>
-          <p:nvPr/>
-        </p:nvSpPr>
-        <p:spPr>
-          <a:xfrm>
-            <a:off x="4206240" y="3383280"/>
-            <a:ext cx="2834640" cy="914400"/>
-          </a:xfrm>
-          <a:prstGeom prst="roundRect">
-            <a:avLst>
-              <a:gd name="adj" fmla="val 12000"/>
-            </a:avLst>
-          </a:prstGeom>
-          <a:solidFill>
-            <a:srgbClr val="A02030"/>
-          </a:solidFill>
-          <a:ln>
-            <a:noFill/>
-          </a:ln>
-        </p:spPr>
-        <p:style>
-          <a:lnRef idx="1">
-            <a:schemeClr val="accent1"/>
-          </a:lnRef>
-          <a:fillRef idx="3">
-            <a:schemeClr val="accent1"/>
-          </a:fillRef>
-          <a:effectRef idx="2">
-            <a:schemeClr val="accent1"/>
-          </a:effectRef>
-          <a:fontRef idx="minor">
-            <a:schemeClr val="lt1"/>
-          </a:fontRef>
-        </p:style>
-        <p:txBody>
-          <a:bodyPr rtlCol="0" anchor="ctr" wrap="square"/>
-          <a:lstStyle/>
-          <a:p>
-            <a:pPr algn="ctr"/>
-            <a:r>
-              <a:rPr sz="1300" b="1" i="0">
-                <a:solidFill>
-                  <a:srgbClr val="FFFFFF"/>
-                </a:solidFill>
-                <a:latin typeface="Calibri"/>
-              </a:rPr>
-              <a:t>T2: INSERT cita
-COMMIT → ¡DOBLE RESERVA!</a:t>
-            </a:r>
-          </a:p>
-        </p:txBody>
-      </p:sp>
-      <p:cxnSp>
-        <p:nvCxnSpPr>
-          <p:cNvPr id="10" name="Connector 9"/>
-          <p:cNvCxnSpPr/>
-          <p:nvPr/>
-        </p:nvCxnSpPr>
-        <p:spPr>
-          <a:xfrm>
-            <a:off x="3566160" y="2468880"/>
-            <a:ext cx="640080" cy="0"/>
-          </a:xfrm>
-          <a:prstGeom prst="line">
-            <a:avLst/>
-          </a:prstGeom>
-          <a:ln w="22225">
-            <a:solidFill>
-              <a:srgbClr val="666666"/>
-            </a:solidFill>
-            <a:tailEnd type="triangle" w="med" len="med"/>
-          </a:ln>
-        </p:spPr>
-        <p:style>
-          <a:lnRef idx="2">
-            <a:schemeClr val="accent1"/>
-          </a:lnRef>
-          <a:fillRef idx="0">
-            <a:schemeClr val="accent1"/>
-          </a:fillRef>
-          <a:effectRef idx="1">
-            <a:schemeClr val="accent1"/>
-          </a:effectRef>
-          <a:fontRef idx="minor">
-            <a:schemeClr val="tx1"/>
-          </a:fontRef>
-        </p:style>
-      </p:cxnSp>
-      <p:sp>
-        <p:nvSpPr>
-          <p:cNvPr id="11" name="TextBox 10"/>
-          <p:cNvSpPr txBox="1"/>
-          <p:nvPr/>
-        </p:nvSpPr>
-        <p:spPr>
-          <a:xfrm>
-            <a:off x="3063240" y="2267712"/>
-            <a:ext cx="1645920" cy="320040"/>
-          </a:xfrm>
-          <a:prstGeom prst="rect">
-            <a:avLst/>
-          </a:prstGeom>
-          <a:noFill/>
-        </p:spPr>
-        <p:txBody>
-          <a:bodyPr wrap="square">
-            <a:spAutoFit/>
-          </a:bodyPr>
-          <a:lstStyle/>
-          <a:p>
-            <a:pPr algn="ctr"/>
-            <a:r>
-              <a:rPr sz="1000" b="0" i="1">
-                <a:solidFill>
-                  <a:srgbClr val="666666"/>
-                </a:solidFill>
-                <a:latin typeface="Calibri"/>
-              </a:rPr>
-              <a:t>tiempo →</a:t>
-            </a:r>
-          </a:p>
-        </p:txBody>
-      </p:sp>
-      <p:cxnSp>
-        <p:nvCxnSpPr>
-          <p:cNvPr id="12" name="Connector 11"/>
-          <p:cNvCxnSpPr/>
-          <p:nvPr/>
-        </p:nvCxnSpPr>
-        <p:spPr>
-          <a:xfrm>
-            <a:off x="3566160" y="3840480"/>
-            <a:ext cx="640080" cy="0"/>
-          </a:xfrm>
-          <a:prstGeom prst="line">
-            <a:avLst/>
-          </a:prstGeom>
-          <a:ln w="22225">
-            <a:solidFill>
-              <a:srgbClr val="666666"/>
-            </a:solidFill>
-            <a:tailEnd type="triangle" w="med" len="med"/>
-          </a:ln>
-        </p:spPr>
-        <p:style>
-          <a:lnRef idx="2">
-            <a:schemeClr val="accent1"/>
-          </a:lnRef>
-          <a:fillRef idx="0">
-            <a:schemeClr val="accent1"/>
-          </a:fillRef>
-          <a:effectRef idx="1">
-            <a:schemeClr val="accent1"/>
-          </a:effectRef>
-          <a:fontRef idx="minor">
-            <a:schemeClr val="tx1"/>
-          </a:fontRef>
-        </p:style>
-      </p:cxnSp>
-      <p:sp>
-        <p:nvSpPr>
-          <p:cNvPr id="13" name="TextBox 12"/>
-          <p:cNvSpPr txBox="1"/>
-          <p:nvPr/>
-        </p:nvSpPr>
-        <p:spPr>
-          <a:xfrm>
-            <a:off x="3063240" y="3639312"/>
-            <a:ext cx="1645920" cy="320040"/>
-          </a:xfrm>
-          <a:prstGeom prst="rect">
-            <a:avLst/>
-          </a:prstGeom>
-          <a:noFill/>
-        </p:spPr>
-        <p:txBody>
-          <a:bodyPr wrap="square">
-            <a:spAutoFit/>
-          </a:bodyPr>
-          <a:lstStyle/>
-          <a:p>
-            <a:pPr algn="ctr"/>
-            <a:r>
-              <a:rPr sz="1000" b="0" i="1">
-                <a:solidFill>
-                  <a:srgbClr val="666666"/>
-                </a:solidFill>
-                <a:latin typeface="Calibri"/>
-              </a:rPr>
-              <a:t>tiempo →</a:t>
-            </a:r>
-          </a:p>
-        </p:txBody>
-      </p:sp>
-      <p:sp>
-        <p:nvSpPr>
-          <p:cNvPr id="14" name="TextBox 13"/>
-          <p:cNvSpPr txBox="1"/>
-          <p:nvPr/>
-        </p:nvSpPr>
-        <p:spPr>
-          <a:xfrm>
-            <a:off x="457200" y="6263640"/>
-            <a:ext cx="11277295" cy="411480"/>
-          </a:xfrm>
-          <a:prstGeom prst="rect">
-            <a:avLst/>
-          </a:prstGeom>
-          <a:noFill/>
-        </p:spPr>
-        <p:txBody>
-          <a:bodyPr wrap="square">
-            <a:spAutoFit/>
-          </a:bodyPr>
-          <a:lstStyle/>
-          <a:p>
-            <a:r>
-              <a:rPr sz="1100" b="0" i="1">
-                <a:solidFill>
-                  <a:srgbClr val="666666"/>
-                </a:solidFill>
-                <a:latin typeface="Calibri"/>
-              </a:rPr>
-              <a:t>Mitigación: UNIQUE(id_veterinario, fecha_hora) hace que el segundo INSERT falle automáticamente en vez de crear la doble reserva.</a:t>
-            </a:r>
-          </a:p>
-        </p:txBody>
-      </p:sp>
-      <p:sp>
-        <p:nvSpPr>
-          <p:cNvPr id="15" name="TextBox 14"/>
+            <a:pPr>
+              <a:spcAft>
+                <a:spcPts val="800"/>
+              </a:spcAft>
+            </a:pPr>
+            <a:r>
+              <a:rPr sz="2000" b="0" i="0">
+                <a:solidFill>
+                  <a:srgbClr val="333333"/>
+                </a:solidFill>
+                <a:latin typeface="Calibri"/>
+              </a:rPr>
+              <a:t>–   Antes de complicarse con niveles de aislamiento hay una solucion declarativa que resuelve el caso estrella de VetCare y cuesta una sola linea:.</a:t>
+            </a:r>
+          </a:p>
+          <a:p>
+            <a:pPr>
+              <a:spcAft>
+                <a:spcPts val="800"/>
+              </a:spcAft>
+            </a:pPr>
+            <a:r>
+              <a:rPr sz="2000" b="0" i="0">
+                <a:solidFill>
+                  <a:srgbClr val="333333"/>
+                </a:solidFill>
+                <a:latin typeface="Calibri"/>
+              </a:rPr>
+              <a:t>–   Esto conduce a la limitacion practica del dia y a la pregunta previsible: «como demuestro dos transacciones simultaneas si DB Fiddle es una sola sesion?».</a:t>
+            </a:r>
+          </a:p>
+          <a:p>
+            <a:pPr>
+              <a:spcAft>
+                <a:spcPts val="800"/>
+              </a:spcAft>
+            </a:pPr>
+            <a:r>
+              <a:rPr sz="2000" b="0" i="0">
+                <a:solidFill>
+                  <a:srgbClr val="333333"/>
+                </a:solidFill>
+                <a:latin typeface="Calibri"/>
+              </a:rPr>
+              <a:t>–   El informe de hoy se audita en el checkpoint de la Clase 11 y se convierte en clausula del contrato de operaciones de la Clase 12, donde cada procedimiento declara que errores puede lanzar, incluido el de horario ya tomado.</a:t>
+            </a:r>
+          </a:p>
+        </p:txBody>
+      </p:sp>
+      <p:sp>
+        <p:nvSpPr>
+          <p:cNvPr id="6" name="TextBox 5"/>
           <p:cNvSpPr txBox="1"/>
           <p:nvPr/>
         </p:nvSpPr>
@@ -7206,7 +6761,7 @@
                 </a:solidFill>
                 <a:latin typeface="Calibri"/>
               </a:rPr>
-              <a:t>La restriccion que hace imposible la doble reserva</a:t>
+              <a:t>Antes de los niveles: la restriccion que... — sintaxis</a:t>
             </a:r>
           </a:p>
         </p:txBody>
@@ -7220,7 +6775,7 @@
         <p:spPr>
           <a:xfrm>
             <a:off x="457200" y="1261872"/>
-            <a:ext cx="11277295" cy="4773168"/>
+            <a:ext cx="11277295" cy="5093208"/>
           </a:xfrm>
           <a:prstGeom prst="roundRect">
             <a:avLst>
@@ -7340,7 +6895,7 @@
         <p:spPr>
           <a:xfrm>
             <a:off x="777240" y="1719072"/>
-            <a:ext cx="10637215" cy="4133087"/>
+            <a:ext cx="10637215" cy="4453128"/>
           </a:xfrm>
           <a:prstGeom prst="rect">
             <a:avLst/>
@@ -7365,87 +6920,7 @@
                 </a:solidFill>
                 <a:latin typeface="Calibri"/>
               </a:rPr>
-              <a:t>ALTER TABLE cita</a:t>
-            </a:r>
-          </a:p>
-          <a:p>
-            <a:pPr>
-              <a:spcAft>
-                <a:spcPts val="400"/>
-              </a:spcAft>
-            </a:pPr>
-            <a:r>
-              <a:rPr sz="1400" b="0" i="0">
-                <a:solidFill>
-                  <a:srgbClr val="FFFFFF"/>
-                </a:solidFill>
-                <a:latin typeface="Calibri"/>
-              </a:rPr>
-              <a:t>  ADD CONSTRAINT uq_cita_vet_franja</a:t>
-            </a:r>
-          </a:p>
-          <a:p>
-            <a:pPr>
-              <a:spcAft>
-                <a:spcPts val="400"/>
-              </a:spcAft>
-            </a:pPr>
-            <a:r>
-              <a:rPr sz="1400" b="0" i="0">
-                <a:solidFill>
-                  <a:srgbClr val="FFFFFF"/>
-                </a:solidFill>
-                <a:latin typeface="Calibri"/>
-              </a:rPr>
-              <a:t>  UNIQUE (id_veterinario, fecha_hora);</a:t>
-            </a:r>
-          </a:p>
-          <a:p>
-            <a:pPr>
-              <a:spcAft>
-                <a:spcPts val="400"/>
-              </a:spcAft>
-            </a:pPr>
-            <a:r>
-              <a:rPr sz="1400" b="0" i="0">
-                <a:solidFill>
-                  <a:srgbClr val="FFFFFF"/>
-                </a:solidFill>
-                <a:latin typeface="Calibri"/>
-              </a:rPr>
-              <a:t/>
-            </a:r>
-          </a:p>
-          <a:p>
-            <a:pPr>
-              <a:spcAft>
-                <a:spcPts val="400"/>
-              </a:spcAft>
-            </a:pPr>
-            <a:r>
-              <a:rPr sz="1400" b="0" i="0">
-                <a:solidFill>
-                  <a:srgbClr val="FFFFFF"/>
-                </a:solidFill>
-                <a:latin typeface="Calibri"/>
-              </a:rPr>
-              <a:t>-- T2 intenta la misma franja que T1:</a:t>
-            </a:r>
-          </a:p>
-          <a:p>
-            <a:pPr>
-              <a:spcAft>
-                <a:spcPts val="400"/>
-              </a:spcAft>
-            </a:pPr>
-            <a:r>
-              <a:rPr sz="1400" b="0" i="0">
-                <a:solidFill>
-                  <a:srgbClr val="FFFFFF"/>
-                </a:solidFill>
-                <a:latin typeface="Calibri"/>
-              </a:rPr>
-              <a:t>-- ORA-00001: unique constraint violated</a:t>
+              <a:t>ALTER TABLE cita ADD CONSTRAINT uq_agenda UNIQUE (id_veterinario, fecha_hora)</a:t>
             </a:r>
           </a:p>
         </p:txBody>
@@ -7453,41 +6928,6 @@
       <p:sp>
         <p:nvSpPr>
           <p:cNvPr id="9" name="TextBox 8"/>
-          <p:cNvSpPr txBox="1"/>
-          <p:nvPr/>
-        </p:nvSpPr>
-        <p:spPr>
-          <a:xfrm>
-            <a:off x="457200" y="6080760"/>
-            <a:ext cx="11277295" cy="320040"/>
-          </a:xfrm>
-          <a:prstGeom prst="rect">
-            <a:avLst/>
-          </a:prstGeom>
-          <a:noFill/>
-        </p:spPr>
-        <p:txBody>
-          <a:bodyPr wrap="square">
-            <a:spAutoFit/>
-          </a:bodyPr>
-          <a:lstStyle/>
-          <a:p>
-            <a:pPr algn="ctr"/>
-            <a:r>
-              <a:rPr sz="1200" b="0" i="1">
-                <a:solidFill>
-                  <a:srgbClr val="666666"/>
-                </a:solidFill>
-                <a:latin typeface="Calibri"/>
-              </a:rPr>
-              <a:t>Poner solo BEGIN/COMMIT no basta: ambas transacciones leen 'libre' antes de confirmar.</a:t>
-            </a:r>
-          </a:p>
-        </p:txBody>
-      </p:sp>
-      <p:sp>
-        <p:nvSpPr>
-          <p:cNvPr id="10" name="TextBox 9"/>
           <p:cNvSpPr txBox="1"/>
           <p:nvPr/>
         </p:nvSpPr>
@@ -7555,7 +6995,7 @@
         <p:spPr>
           <a:xfrm>
             <a:off x="0" y="0"/>
-            <a:ext cx="12191695" cy="960120"/>
+            <a:ext cx="12191695" cy="1170432"/>
           </a:xfrm>
           <a:prstGeom prst="rect">
             <a:avLst/>
@@ -7597,7 +7037,7 @@
         </p:nvSpPr>
         <p:spPr>
           <a:xfrm>
-            <a:off x="0" y="960120"/>
+            <a:off x="0" y="1170432"/>
             <a:ext cx="12191695" cy="41148"/>
           </a:xfrm>
           <a:prstGeom prst="rect">
@@ -7641,7 +7081,7 @@
         <p:spPr>
           <a:xfrm>
             <a:off x="457200" y="164592"/>
-            <a:ext cx="11277295" cy="502920"/>
+            <a:ext cx="11277295" cy="384048"/>
           </a:xfrm>
           <a:prstGeom prst="rect">
             <a:avLst/>
@@ -7661,7 +7101,7 @@
                 </a:solidFill>
                 <a:latin typeface="Calibri"/>
               </a:rPr>
-              <a:t>Demo del dia</a:t>
+              <a:t>Doble reserva sin control de concurrencia</a:t>
             </a:r>
           </a:p>
         </p:txBody>
@@ -7674,8 +7114,8 @@
         </p:nvSpPr>
         <p:spPr>
           <a:xfrm>
-            <a:off x="457200" y="1170432"/>
-            <a:ext cx="11277295" cy="5230368"/>
+            <a:off x="457200" y="566928"/>
+            <a:ext cx="11277295" cy="411480"/>
           </a:xfrm>
           <a:prstGeom prst="rect">
             <a:avLst/>
@@ -7688,110 +7128,417 @@
           </a:bodyPr>
           <a:lstStyle/>
           <a:p>
-            <a:pPr>
-              <a:spcAft>
-                <a:spcPts val="800"/>
-              </a:spcAft>
-            </a:pPr>
-            <a:r>
-              <a:rPr sz="2000" b="0" i="0">
-                <a:solidFill>
-                  <a:srgbClr val="333333"/>
-                </a:solidFill>
-                <a:latin typeface="Calibri"/>
-              </a:rPr>
-              <a:t>–   </a:t>
-            </a:r>
-            <a:r>
-              <a:rPr sz="2000" b="1" i="0">
-                <a:solidFill>
-                  <a:srgbClr val="333333"/>
-                </a:solidFill>
-                <a:latin typeface="Calibri"/>
-              </a:rPr>
-              <a:t>Herramienta:</a:t>
-            </a:r>
-            <a:r>
-              <a:rPr sz="2000" b="0" i="0">
-                <a:solidFill>
-                  <a:srgbClr val="333333"/>
-                </a:solidFill>
-                <a:latin typeface="Calibri"/>
-              </a:rPr>
-              <a:t> Google Docs + Live SQL</a:t>
-            </a:r>
-          </a:p>
-          <a:p>
-            <a:pPr>
-              <a:spcAft>
-                <a:spcPts val="800"/>
-              </a:spcAft>
-            </a:pPr>
-            <a:r>
-              <a:rPr sz="2000" b="0" i="0">
-                <a:solidFill>
-                  <a:srgbClr val="333333"/>
-                </a:solidFill>
-                <a:latin typeface="Calibri"/>
-              </a:rPr>
-              <a:t>–   </a:t>
-            </a:r>
-            <a:r>
-              <a:rPr sz="2000" b="1" i="0">
-                <a:solidFill>
-                  <a:srgbClr val="333333"/>
-                </a:solidFill>
-                <a:latin typeface="Calibri"/>
-              </a:rPr>
-              <a:t>Demo:</a:t>
-            </a:r>
-            <a:r>
-              <a:rPr sz="2000" b="0" i="0">
-                <a:solidFill>
-                  <a:srgbClr val="333333"/>
-                </a:solidFill>
-                <a:latin typeface="Calibri"/>
-              </a:rPr>
-              <a:t> Narrativa paso a paso T1/T2 sobre tabla Cita.</a:t>
-            </a:r>
-          </a:p>
-          <a:p>
-            <a:pPr>
-              <a:spcAft>
-                <a:spcPts val="800"/>
-              </a:spcAft>
-            </a:pPr>
-            <a:r>
-              <a:rPr sz="2000" b="0" i="0">
-                <a:solidFill>
-                  <a:srgbClr val="333333"/>
-                </a:solidFill>
-                <a:latin typeface="Calibri"/>
-              </a:rPr>
-              <a:t>–   Sigan el mismo dominio VetCare (no inventen otro caso).</a:t>
-            </a:r>
-          </a:p>
-          <a:p>
-            <a:pPr>
-              <a:spcAft>
-                <a:spcPts val="800"/>
-              </a:spcAft>
-            </a:pPr>
-            <a:r>
-              <a:rPr sz="2000" b="0" i="0">
-                <a:solidFill>
-                  <a:srgbClr val="333333"/>
-                </a:solidFill>
-                <a:latin typeface="Calibri"/>
-              </a:rPr>
-              <a:t>–   Al final de la demo: dejar enlace/script compartible al grupo.</a:t>
-            </a:r>
-          </a:p>
-        </p:txBody>
-      </p:sp>
-      <p:sp>
-        <p:nvSpPr>
-          <p:cNvPr id="6" name="TextBox 5"/>
+            <a:r>
+              <a:rPr sz="1400" b="0" i="0">
+                <a:solidFill>
+                  <a:srgbClr val="B8D8EE"/>
+                </a:solidFill>
+                <a:latin typeface="Calibri"/>
+              </a:rPr>
+              <a:t>Dos transacciones concurrentes leen “libre” antes de que ninguna confirme</a:t>
+            </a:r>
+          </a:p>
+        </p:txBody>
+      </p:sp>
+      <p:sp>
+        <p:nvSpPr>
+          <p:cNvPr id="6" name="Rounded Rectangle 5"/>
+          <p:cNvSpPr/>
+          <p:nvPr/>
+        </p:nvSpPr>
+        <p:spPr>
+          <a:xfrm>
+            <a:off x="731520" y="2011680"/>
+            <a:ext cx="2834640" cy="914400"/>
+          </a:xfrm>
+          <a:prstGeom prst="roundRect">
+            <a:avLst>
+              <a:gd name="adj" fmla="val 12000"/>
+            </a:avLst>
+          </a:prstGeom>
+          <a:solidFill>
+            <a:srgbClr val="095292"/>
+          </a:solidFill>
+          <a:ln>
+            <a:noFill/>
+          </a:ln>
+        </p:spPr>
+        <p:style>
+          <a:lnRef idx="1">
+            <a:schemeClr val="accent1"/>
+          </a:lnRef>
+          <a:fillRef idx="3">
+            <a:schemeClr val="accent1"/>
+          </a:fillRef>
+          <a:effectRef idx="2">
+            <a:schemeClr val="accent1"/>
+          </a:effectRef>
+          <a:fontRef idx="minor">
+            <a:schemeClr val="lt1"/>
+          </a:fontRef>
+        </p:style>
+        <p:txBody>
+          <a:bodyPr rtlCol="0" anchor="ctr" wrap="square"/>
+          <a:lstStyle/>
+          <a:p>
+            <a:pPr algn="ctr"/>
+            <a:r>
+              <a:rPr sz="1300" b="1" i="0">
+                <a:solidFill>
+                  <a:srgbClr val="FFFFFF"/>
+                </a:solidFill>
+                <a:latin typeface="Calibri"/>
+              </a:rPr>
+              <a:t>T1 (Recepción A)
+lee franja: LIBRE</a:t>
+            </a:r>
+          </a:p>
+        </p:txBody>
+      </p:sp>
+      <p:sp>
+        <p:nvSpPr>
+          <p:cNvPr id="7" name="Rounded Rectangle 6"/>
+          <p:cNvSpPr/>
+          <p:nvPr/>
+        </p:nvSpPr>
+        <p:spPr>
+          <a:xfrm>
+            <a:off x="4206240" y="2011680"/>
+            <a:ext cx="2834640" cy="914400"/>
+          </a:xfrm>
+          <a:prstGeom prst="roundRect">
+            <a:avLst>
+              <a:gd name="adj" fmla="val 12000"/>
+            </a:avLst>
+          </a:prstGeom>
+          <a:solidFill>
+            <a:srgbClr val="095292"/>
+          </a:solidFill>
+          <a:ln>
+            <a:noFill/>
+          </a:ln>
+        </p:spPr>
+        <p:style>
+          <a:lnRef idx="1">
+            <a:schemeClr val="accent1"/>
+          </a:lnRef>
+          <a:fillRef idx="3">
+            <a:schemeClr val="accent1"/>
+          </a:fillRef>
+          <a:effectRef idx="2">
+            <a:schemeClr val="accent1"/>
+          </a:effectRef>
+          <a:fontRef idx="minor">
+            <a:schemeClr val="lt1"/>
+          </a:fontRef>
+        </p:style>
+        <p:txBody>
+          <a:bodyPr rtlCol="0" anchor="ctr" wrap="square"/>
+          <a:lstStyle/>
+          <a:p>
+            <a:pPr algn="ctr"/>
+            <a:r>
+              <a:rPr sz="1300" b="1" i="0">
+                <a:solidFill>
+                  <a:srgbClr val="FFFFFF"/>
+                </a:solidFill>
+                <a:latin typeface="Calibri"/>
+              </a:rPr>
+              <a:t>T1: INSERT cita
+COMMIT → OK</a:t>
+            </a:r>
+          </a:p>
+        </p:txBody>
+      </p:sp>
+      <p:sp>
+        <p:nvSpPr>
+          <p:cNvPr id="8" name="Rounded Rectangle 7"/>
+          <p:cNvSpPr/>
+          <p:nvPr/>
+        </p:nvSpPr>
+        <p:spPr>
+          <a:xfrm>
+            <a:off x="731520" y="3383280"/>
+            <a:ext cx="2834640" cy="914400"/>
+          </a:xfrm>
+          <a:prstGeom prst="roundRect">
+            <a:avLst>
+              <a:gd name="adj" fmla="val 12000"/>
+            </a:avLst>
+          </a:prstGeom>
+          <a:solidFill>
+            <a:srgbClr val="269CCB"/>
+          </a:solidFill>
+          <a:ln>
+            <a:noFill/>
+          </a:ln>
+        </p:spPr>
+        <p:style>
+          <a:lnRef idx="1">
+            <a:schemeClr val="accent1"/>
+          </a:lnRef>
+          <a:fillRef idx="3">
+            <a:schemeClr val="accent1"/>
+          </a:fillRef>
+          <a:effectRef idx="2">
+            <a:schemeClr val="accent1"/>
+          </a:effectRef>
+          <a:fontRef idx="minor">
+            <a:schemeClr val="lt1"/>
+          </a:fontRef>
+        </p:style>
+        <p:txBody>
+          <a:bodyPr rtlCol="0" anchor="ctr" wrap="square"/>
+          <a:lstStyle/>
+          <a:p>
+            <a:pPr algn="ctr"/>
+            <a:r>
+              <a:rPr sz="1300" b="1" i="0">
+                <a:solidFill>
+                  <a:srgbClr val="FFFFFF"/>
+                </a:solidFill>
+                <a:latin typeface="Calibri"/>
+              </a:rPr>
+              <a:t>T2 (Recepción B)
+lee franja: LIBRE</a:t>
+            </a:r>
+          </a:p>
+        </p:txBody>
+      </p:sp>
+      <p:sp>
+        <p:nvSpPr>
+          <p:cNvPr id="9" name="Rounded Rectangle 8"/>
+          <p:cNvSpPr/>
+          <p:nvPr/>
+        </p:nvSpPr>
+        <p:spPr>
+          <a:xfrm>
+            <a:off x="4206240" y="3383280"/>
+            <a:ext cx="2834640" cy="914400"/>
+          </a:xfrm>
+          <a:prstGeom prst="roundRect">
+            <a:avLst>
+              <a:gd name="adj" fmla="val 12000"/>
+            </a:avLst>
+          </a:prstGeom>
+          <a:solidFill>
+            <a:srgbClr val="A02030"/>
+          </a:solidFill>
+          <a:ln>
+            <a:noFill/>
+          </a:ln>
+        </p:spPr>
+        <p:style>
+          <a:lnRef idx="1">
+            <a:schemeClr val="accent1"/>
+          </a:lnRef>
+          <a:fillRef idx="3">
+            <a:schemeClr val="accent1"/>
+          </a:fillRef>
+          <a:effectRef idx="2">
+            <a:schemeClr val="accent1"/>
+          </a:effectRef>
+          <a:fontRef idx="minor">
+            <a:schemeClr val="lt1"/>
+          </a:fontRef>
+        </p:style>
+        <p:txBody>
+          <a:bodyPr rtlCol="0" anchor="ctr" wrap="square"/>
+          <a:lstStyle/>
+          <a:p>
+            <a:pPr algn="ctr"/>
+            <a:r>
+              <a:rPr sz="1300" b="1" i="0">
+                <a:solidFill>
+                  <a:srgbClr val="FFFFFF"/>
+                </a:solidFill>
+                <a:latin typeface="Calibri"/>
+              </a:rPr>
+              <a:t>T2: INSERT cita
+COMMIT → ¡DOBLE RESERVA!</a:t>
+            </a:r>
+          </a:p>
+        </p:txBody>
+      </p:sp>
+      <p:cxnSp>
+        <p:nvCxnSpPr>
+          <p:cNvPr id="10" name="Connector 9"/>
+          <p:cNvCxnSpPr/>
+          <p:nvPr/>
+        </p:nvCxnSpPr>
+        <p:spPr>
+          <a:xfrm>
+            <a:off x="3566160" y="2468880"/>
+            <a:ext cx="640080" cy="0"/>
+          </a:xfrm>
+          <a:prstGeom prst="line">
+            <a:avLst/>
+          </a:prstGeom>
+          <a:ln w="22225">
+            <a:solidFill>
+              <a:srgbClr val="666666"/>
+            </a:solidFill>
+            <a:tailEnd type="triangle" w="med" len="med"/>
+          </a:ln>
+        </p:spPr>
+        <p:style>
+          <a:lnRef idx="2">
+            <a:schemeClr val="accent1"/>
+          </a:lnRef>
+          <a:fillRef idx="0">
+            <a:schemeClr val="accent1"/>
+          </a:fillRef>
+          <a:effectRef idx="1">
+            <a:schemeClr val="accent1"/>
+          </a:effectRef>
+          <a:fontRef idx="minor">
+            <a:schemeClr val="tx1"/>
+          </a:fontRef>
+        </p:style>
+      </p:cxnSp>
+      <p:sp>
+        <p:nvSpPr>
+          <p:cNvPr id="11" name="TextBox 10"/>
+          <p:cNvSpPr txBox="1"/>
+          <p:nvPr/>
+        </p:nvSpPr>
+        <p:spPr>
+          <a:xfrm>
+            <a:off x="3063240" y="2267712"/>
+            <a:ext cx="1645920" cy="320040"/>
+          </a:xfrm>
+          <a:prstGeom prst="rect">
+            <a:avLst/>
+          </a:prstGeom>
+          <a:noFill/>
+        </p:spPr>
+        <p:txBody>
+          <a:bodyPr wrap="square">
+            <a:spAutoFit/>
+          </a:bodyPr>
+          <a:lstStyle/>
+          <a:p>
+            <a:pPr algn="ctr"/>
+            <a:r>
+              <a:rPr sz="1000" b="0" i="1">
+                <a:solidFill>
+                  <a:srgbClr val="666666"/>
+                </a:solidFill>
+                <a:latin typeface="Calibri"/>
+              </a:rPr>
+              <a:t>tiempo →</a:t>
+            </a:r>
+          </a:p>
+        </p:txBody>
+      </p:sp>
+      <p:cxnSp>
+        <p:nvCxnSpPr>
+          <p:cNvPr id="12" name="Connector 11"/>
+          <p:cNvCxnSpPr/>
+          <p:nvPr/>
+        </p:nvCxnSpPr>
+        <p:spPr>
+          <a:xfrm>
+            <a:off x="3566160" y="3840480"/>
+            <a:ext cx="640080" cy="0"/>
+          </a:xfrm>
+          <a:prstGeom prst="line">
+            <a:avLst/>
+          </a:prstGeom>
+          <a:ln w="22225">
+            <a:solidFill>
+              <a:srgbClr val="666666"/>
+            </a:solidFill>
+            <a:tailEnd type="triangle" w="med" len="med"/>
+          </a:ln>
+        </p:spPr>
+        <p:style>
+          <a:lnRef idx="2">
+            <a:schemeClr val="accent1"/>
+          </a:lnRef>
+          <a:fillRef idx="0">
+            <a:schemeClr val="accent1"/>
+          </a:fillRef>
+          <a:effectRef idx="1">
+            <a:schemeClr val="accent1"/>
+          </a:effectRef>
+          <a:fontRef idx="minor">
+            <a:schemeClr val="tx1"/>
+          </a:fontRef>
+        </p:style>
+      </p:cxnSp>
+      <p:sp>
+        <p:nvSpPr>
+          <p:cNvPr id="13" name="TextBox 12"/>
+          <p:cNvSpPr txBox="1"/>
+          <p:nvPr/>
+        </p:nvSpPr>
+        <p:spPr>
+          <a:xfrm>
+            <a:off x="3063240" y="3639312"/>
+            <a:ext cx="1645920" cy="320040"/>
+          </a:xfrm>
+          <a:prstGeom prst="rect">
+            <a:avLst/>
+          </a:prstGeom>
+          <a:noFill/>
+        </p:spPr>
+        <p:txBody>
+          <a:bodyPr wrap="square">
+            <a:spAutoFit/>
+          </a:bodyPr>
+          <a:lstStyle/>
+          <a:p>
+            <a:pPr algn="ctr"/>
+            <a:r>
+              <a:rPr sz="1000" b="0" i="1">
+                <a:solidFill>
+                  <a:srgbClr val="666666"/>
+                </a:solidFill>
+                <a:latin typeface="Calibri"/>
+              </a:rPr>
+              <a:t>tiempo →</a:t>
+            </a:r>
+          </a:p>
+        </p:txBody>
+      </p:sp>
+      <p:sp>
+        <p:nvSpPr>
+          <p:cNvPr id="14" name="TextBox 13"/>
+          <p:cNvSpPr txBox="1"/>
+          <p:nvPr/>
+        </p:nvSpPr>
+        <p:spPr>
+          <a:xfrm>
+            <a:off x="457200" y="6263640"/>
+            <a:ext cx="11277295" cy="411480"/>
+          </a:xfrm>
+          <a:prstGeom prst="rect">
+            <a:avLst/>
+          </a:prstGeom>
+          <a:noFill/>
+        </p:spPr>
+        <p:txBody>
+          <a:bodyPr wrap="square">
+            <a:spAutoFit/>
+          </a:bodyPr>
+          <a:lstStyle/>
+          <a:p>
+            <a:r>
+              <a:rPr sz="1100" b="0" i="1">
+                <a:solidFill>
+                  <a:srgbClr val="666666"/>
+                </a:solidFill>
+                <a:latin typeface="Calibri"/>
+              </a:rPr>
+              <a:t>Mitigación: UNIQUE(id_veterinario, fecha_hora) hace que el segundo INSERT falle automáticamente en vez de crear la doble reserva.</a:t>
+            </a:r>
+          </a:p>
+        </p:txBody>
+      </p:sp>
+      <p:sp>
+        <p:nvSpPr>
+          <p:cNvPr id="15" name="TextBox 14"/>
           <p:cNvSpPr txBox="1"/>
           <p:nvPr/>
         </p:nvSpPr>
@@ -7859,7 +7606,7 @@
         <p:spPr>
           <a:xfrm>
             <a:off x="0" y="0"/>
-            <a:ext cx="12191695" cy="1170432"/>
+            <a:ext cx="12191695" cy="960120"/>
           </a:xfrm>
           <a:prstGeom prst="rect">
             <a:avLst/>
@@ -7901,7 +7648,7 @@
         </p:nvSpPr>
         <p:spPr>
           <a:xfrm>
-            <a:off x="0" y="1170432"/>
+            <a:off x="0" y="960120"/>
             <a:ext cx="12191695" cy="41148"/>
           </a:xfrm>
           <a:prstGeom prst="rect">
@@ -7945,7 +7692,7 @@
         <p:spPr>
           <a:xfrm>
             <a:off x="457200" y="164592"/>
-            <a:ext cx="11277295" cy="384048"/>
+            <a:ext cx="11277295" cy="502920"/>
           </a:xfrm>
           <a:prstGeom prst="rect">
             <a:avLst/>
@@ -7965,55 +7712,21 @@
                 </a:solidFill>
                 <a:latin typeface="Calibri"/>
               </a:rPr>
-              <a:t>Herramientas de hoy</a:t>
-            </a:r>
-          </a:p>
-        </p:txBody>
-      </p:sp>
-      <p:sp>
-        <p:nvSpPr>
-          <p:cNvPr id="5" name="TextBox 4"/>
-          <p:cNvSpPr txBox="1"/>
-          <p:nvPr/>
-        </p:nvSpPr>
-        <p:spPr>
-          <a:xfrm>
-            <a:off x="457200" y="566928"/>
-            <a:ext cx="11277295" cy="411480"/>
-          </a:xfrm>
-          <a:prstGeom prst="rect">
-            <a:avLst/>
-          </a:prstGeom>
-          <a:noFill/>
-        </p:spPr>
-        <p:txBody>
-          <a:bodyPr wrap="square">
-            <a:spAutoFit/>
-          </a:bodyPr>
-          <a:lstStyle/>
-          <a:p>
-            <a:r>
-              <a:rPr sz="1400" b="0" i="0">
-                <a:solidFill>
-                  <a:srgbClr val="B8D8EE"/>
-                </a:solidFill>
-                <a:latin typeface="Calibri"/>
-              </a:rPr>
-              <a:t>Gratis · navegador o free tier</a:t>
-            </a:r>
-          </a:p>
-        </p:txBody>
-      </p:sp>
-      <p:sp>
-        <p:nvSpPr>
-          <p:cNvPr id="6" name="Rounded Rectangle 5"/>
+              <a:t>La restriccion que hace imposible la doble reserva</a:t>
+            </a:r>
+          </a:p>
+        </p:txBody>
+      </p:sp>
+      <p:sp>
+        <p:nvSpPr>
+          <p:cNvPr id="5" name="Rounded Rectangle 4"/>
           <p:cNvSpPr/>
           <p:nvPr/>
         </p:nvSpPr>
         <p:spPr>
           <a:xfrm>
-            <a:off x="457200" y="1591056"/>
-            <a:ext cx="3624986" cy="2331720"/>
+            <a:off x="457200" y="1261872"/>
+            <a:ext cx="11277295" cy="4773168"/>
           </a:xfrm>
           <a:prstGeom prst="roundRect">
             <a:avLst>
@@ -8021,7 +7734,7 @@
             </a:avLst>
           </a:prstGeom>
           <a:solidFill>
-            <a:srgbClr val="F2F2F2"/>
+            <a:srgbClr val="1E2A38"/>
           </a:solidFill>
           <a:ln>
             <a:noFill/>
@@ -8051,14 +7764,14 @@
       </p:sp>
       <p:sp>
         <p:nvSpPr>
-          <p:cNvPr id="7" name="Rectangle 6"/>
+          <p:cNvPr id="6" name="Rectangle 5"/>
           <p:cNvSpPr/>
           <p:nvPr/>
         </p:nvSpPr>
         <p:spPr>
           <a:xfrm>
-            <a:off x="457200" y="1591056"/>
-            <a:ext cx="3624986" cy="64008"/>
+            <a:off x="457200" y="1261872"/>
+            <a:ext cx="11277295" cy="320040"/>
           </a:xfrm>
           <a:prstGeom prst="rect">
             <a:avLst/>
@@ -8094,531 +7807,193 @@
       </p:sp>
       <p:sp>
         <p:nvSpPr>
-          <p:cNvPr id="8" name="Rectangle 7"/>
-          <p:cNvSpPr/>
-          <p:nvPr/>
-        </p:nvSpPr>
-        <p:spPr>
-          <a:xfrm>
-            <a:off x="457200" y="1655064"/>
-            <a:ext cx="3624986" cy="27432"/>
-          </a:xfrm>
-          <a:prstGeom prst="rect">
-            <a:avLst/>
-          </a:prstGeom>
-          <a:solidFill>
-            <a:srgbClr val="FFD000"/>
-          </a:solidFill>
-          <a:ln>
-            <a:noFill/>
-          </a:ln>
-        </p:spPr>
-        <p:style>
-          <a:lnRef idx="1">
-            <a:schemeClr val="accent1"/>
-          </a:lnRef>
-          <a:fillRef idx="3">
-            <a:schemeClr val="accent1"/>
-          </a:fillRef>
-          <a:effectRef idx="2">
-            <a:schemeClr val="accent1"/>
-          </a:effectRef>
-          <a:fontRef idx="minor">
-            <a:schemeClr val="lt1"/>
-          </a:fontRef>
-        </p:style>
-        <p:txBody>
-          <a:bodyPr rtlCol="0" anchor="ctr"/>
+          <p:cNvPr id="7" name="TextBox 6"/>
+          <p:cNvSpPr txBox="1"/>
+          <p:nvPr/>
+        </p:nvSpPr>
+        <p:spPr>
+          <a:xfrm>
+            <a:off x="685800" y="1307592"/>
+            <a:ext cx="10820095" cy="256032"/>
+          </a:xfrm>
+          <a:prstGeom prst="rect">
+            <a:avLst/>
+          </a:prstGeom>
+          <a:noFill/>
+        </p:spPr>
+        <p:txBody>
+          <a:bodyPr wrap="square" anchor="ctr"/>
+          <a:lstStyle/>
+          <a:p>
+            <a:r>
+              <a:rPr sz="1000" b="1" i="0">
+                <a:solidFill>
+                  <a:srgbClr val="269CCB"/>
+                </a:solidFill>
+                <a:latin typeface="Calibri"/>
+              </a:rPr>
+              <a:t>● ● ●</a:t>
+            </a:r>
+          </a:p>
+        </p:txBody>
+      </p:sp>
+      <p:sp>
+        <p:nvSpPr>
+          <p:cNvPr id="8" name="TextBox 7"/>
+          <p:cNvSpPr txBox="1"/>
+          <p:nvPr/>
+        </p:nvSpPr>
+        <p:spPr>
+          <a:xfrm>
+            <a:off x="777240" y="1719072"/>
+            <a:ext cx="10637215" cy="4133087"/>
+          </a:xfrm>
+          <a:prstGeom prst="rect">
+            <a:avLst/>
+          </a:prstGeom>
+          <a:noFill/>
+        </p:spPr>
+        <p:txBody>
+          <a:bodyPr wrap="square">
+            <a:spAutoFit/>
+          </a:bodyPr>
+          <a:lstStyle/>
+          <a:p>
+            <a:pPr>
+              <a:spcAft>
+                <a:spcPts val="400"/>
+              </a:spcAft>
+            </a:pPr>
+            <a:r>
+              <a:rPr sz="1400" b="0" i="0">
+                <a:solidFill>
+                  <a:srgbClr val="FFFFFF"/>
+                </a:solidFill>
+                <a:latin typeface="Calibri"/>
+              </a:rPr>
+              <a:t>ALTER TABLE cita</a:t>
+            </a:r>
+          </a:p>
+          <a:p>
+            <a:pPr>
+              <a:spcAft>
+                <a:spcPts val="400"/>
+              </a:spcAft>
+            </a:pPr>
+            <a:r>
+              <a:rPr sz="1400" b="0" i="0">
+                <a:solidFill>
+                  <a:srgbClr val="FFFFFF"/>
+                </a:solidFill>
+                <a:latin typeface="Calibri"/>
+              </a:rPr>
+              <a:t>  ADD CONSTRAINT uq_cita_vet_franja</a:t>
+            </a:r>
+          </a:p>
+          <a:p>
+            <a:pPr>
+              <a:spcAft>
+                <a:spcPts val="400"/>
+              </a:spcAft>
+            </a:pPr>
+            <a:r>
+              <a:rPr sz="1400" b="0" i="0">
+                <a:solidFill>
+                  <a:srgbClr val="FFFFFF"/>
+                </a:solidFill>
+                <a:latin typeface="Calibri"/>
+              </a:rPr>
+              <a:t>  UNIQUE (id_veterinario, fecha_hora);</a:t>
+            </a:r>
+          </a:p>
+          <a:p>
+            <a:pPr>
+              <a:spcAft>
+                <a:spcPts val="400"/>
+              </a:spcAft>
+            </a:pPr>
+            <a:r>
+              <a:rPr sz="1400" b="0" i="0">
+                <a:solidFill>
+                  <a:srgbClr val="FFFFFF"/>
+                </a:solidFill>
+                <a:latin typeface="Calibri"/>
+              </a:rPr>
+              <a:t/>
+            </a:r>
+          </a:p>
+          <a:p>
+            <a:pPr>
+              <a:spcAft>
+                <a:spcPts val="400"/>
+              </a:spcAft>
+            </a:pPr>
+            <a:r>
+              <a:rPr sz="1400" b="0" i="0">
+                <a:solidFill>
+                  <a:srgbClr val="FFFFFF"/>
+                </a:solidFill>
+                <a:latin typeface="Calibri"/>
+              </a:rPr>
+              <a:t>-- T2 intenta la misma franja que T1:</a:t>
+            </a:r>
+          </a:p>
+          <a:p>
+            <a:pPr>
+              <a:spcAft>
+                <a:spcPts val="400"/>
+              </a:spcAft>
+            </a:pPr>
+            <a:r>
+              <a:rPr sz="1400" b="0" i="0">
+                <a:solidFill>
+                  <a:srgbClr val="FFFFFF"/>
+                </a:solidFill>
+                <a:latin typeface="Calibri"/>
+              </a:rPr>
+              <a:t>-- ORA-00001: unique constraint violated</a:t>
+            </a:r>
+          </a:p>
+        </p:txBody>
+      </p:sp>
+      <p:sp>
+        <p:nvSpPr>
+          <p:cNvPr id="9" name="TextBox 8"/>
+          <p:cNvSpPr txBox="1"/>
+          <p:nvPr/>
+        </p:nvSpPr>
+        <p:spPr>
+          <a:xfrm>
+            <a:off x="457200" y="6080760"/>
+            <a:ext cx="11277295" cy="320040"/>
+          </a:xfrm>
+          <a:prstGeom prst="rect">
+            <a:avLst/>
+          </a:prstGeom>
+          <a:noFill/>
+        </p:spPr>
+        <p:txBody>
+          <a:bodyPr wrap="square">
+            <a:spAutoFit/>
+          </a:bodyPr>
           <a:lstStyle/>
           <a:p>
             <a:pPr algn="ctr"/>
-          </a:p>
-        </p:txBody>
-      </p:sp>
-      <p:pic>
-        <p:nvPicPr>
-          <p:cNvPr id="9" name="Picture 8" descr="google_docs.png"/>
-          <p:cNvPicPr>
-            <a:picLocks noChangeAspect="1"/>
-          </p:cNvPicPr>
-          <p:nvPr/>
-        </p:nvPicPr>
-        <p:blipFill>
-          <a:blip r:embed="rId2"/>
-          <a:stretch>
-            <a:fillRect/>
-          </a:stretch>
-        </p:blipFill>
-        <p:spPr>
-          <a:xfrm>
-            <a:off x="1643329" y="1847087"/>
-            <a:ext cx="1252728" cy="1252728"/>
-          </a:xfrm>
-          <a:prstGeom prst="rect">
-            <a:avLst/>
-          </a:prstGeom>
-        </p:spPr>
-      </p:pic>
+            <a:r>
+              <a:rPr sz="1200" b="0" i="1">
+                <a:solidFill>
+                  <a:srgbClr val="666666"/>
+                </a:solidFill>
+                <a:latin typeface="Calibri"/>
+              </a:rPr>
+              <a:t>Poner solo BEGIN/COMMIT no basta: ambas transacciones leen 'libre' antes de confirmar.</a:t>
+            </a:r>
+          </a:p>
+        </p:txBody>
+      </p:sp>
       <p:sp>
         <p:nvSpPr>
           <p:cNvPr id="10" name="TextBox 9"/>
-          <p:cNvSpPr txBox="1"/>
-          <p:nvPr/>
-        </p:nvSpPr>
-        <p:spPr>
-          <a:xfrm>
-            <a:off x="530352" y="3191256"/>
-            <a:ext cx="3478682" cy="621792"/>
-          </a:xfrm>
-          <a:prstGeom prst="rect">
-            <a:avLst/>
-          </a:prstGeom>
-          <a:noFill/>
-        </p:spPr>
-        <p:txBody>
-          <a:bodyPr wrap="square" anchor="t"/>
-          <a:lstStyle/>
-          <a:p>
-            <a:pPr algn="ctr"/>
-            <a:r>
-              <a:rPr sz="1300" b="1" i="0">
-                <a:solidFill>
-                  <a:srgbClr val="095292"/>
-                </a:solidFill>
-                <a:latin typeface="Calibri"/>
-              </a:rPr>
-              <a:t>Google Docs</a:t>
-            </a:r>
-          </a:p>
-          <a:p>
-            <a:pPr algn="ctr">
-              <a:spcBef>
-                <a:spcPts val="200"/>
-              </a:spcBef>
-            </a:pPr>
-            <a:r>
-              <a:rPr sz="1000" b="0" i="0">
-                <a:solidFill>
-                  <a:srgbClr val="666666"/>
-                </a:solidFill>
-                <a:latin typeface="Calibri"/>
-              </a:rPr>
-              <a:t>Escenarios T1/T2</a:t>
-            </a:r>
-          </a:p>
-        </p:txBody>
-      </p:sp>
-      <p:sp>
-        <p:nvSpPr>
-          <p:cNvPr id="11" name="Rounded Rectangle 10"/>
-          <p:cNvSpPr/>
-          <p:nvPr/>
-        </p:nvSpPr>
-        <p:spPr>
-          <a:xfrm>
-            <a:off x="4283354" y="1591056"/>
-            <a:ext cx="3624986" cy="2331720"/>
-          </a:xfrm>
-          <a:prstGeom prst="roundRect">
-            <a:avLst>
-              <a:gd name="adj" fmla="val 12000"/>
-            </a:avLst>
-          </a:prstGeom>
-          <a:solidFill>
-            <a:srgbClr val="F2F2F2"/>
-          </a:solidFill>
-          <a:ln>
-            <a:noFill/>
-          </a:ln>
-        </p:spPr>
-        <p:style>
-          <a:lnRef idx="1">
-            <a:schemeClr val="accent1"/>
-          </a:lnRef>
-          <a:fillRef idx="3">
-            <a:schemeClr val="accent1"/>
-          </a:fillRef>
-          <a:effectRef idx="2">
-            <a:schemeClr val="accent1"/>
-          </a:effectRef>
-          <a:fontRef idx="minor">
-            <a:schemeClr val="lt1"/>
-          </a:fontRef>
-        </p:style>
-        <p:txBody>
-          <a:bodyPr rtlCol="0" anchor="ctr"/>
-          <a:lstStyle/>
-          <a:p>
-            <a:pPr algn="ctr"/>
-          </a:p>
-        </p:txBody>
-      </p:sp>
-      <p:sp>
-        <p:nvSpPr>
-          <p:cNvPr id="12" name="Rectangle 11"/>
-          <p:cNvSpPr/>
-          <p:nvPr/>
-        </p:nvSpPr>
-        <p:spPr>
-          <a:xfrm>
-            <a:off x="4283354" y="1591056"/>
-            <a:ext cx="3624986" cy="64008"/>
-          </a:xfrm>
-          <a:prstGeom prst="rect">
-            <a:avLst/>
-          </a:prstGeom>
-          <a:solidFill>
-            <a:srgbClr val="095292"/>
-          </a:solidFill>
-          <a:ln>
-            <a:noFill/>
-          </a:ln>
-        </p:spPr>
-        <p:style>
-          <a:lnRef idx="1">
-            <a:schemeClr val="accent1"/>
-          </a:lnRef>
-          <a:fillRef idx="3">
-            <a:schemeClr val="accent1"/>
-          </a:fillRef>
-          <a:effectRef idx="2">
-            <a:schemeClr val="accent1"/>
-          </a:effectRef>
-          <a:fontRef idx="minor">
-            <a:schemeClr val="lt1"/>
-          </a:fontRef>
-        </p:style>
-        <p:txBody>
-          <a:bodyPr rtlCol="0" anchor="ctr"/>
-          <a:lstStyle/>
-          <a:p>
-            <a:pPr algn="ctr"/>
-          </a:p>
-        </p:txBody>
-      </p:sp>
-      <p:sp>
-        <p:nvSpPr>
-          <p:cNvPr id="13" name="Rectangle 12"/>
-          <p:cNvSpPr/>
-          <p:nvPr/>
-        </p:nvSpPr>
-        <p:spPr>
-          <a:xfrm>
-            <a:off x="4283354" y="1655064"/>
-            <a:ext cx="3624986" cy="27432"/>
-          </a:xfrm>
-          <a:prstGeom prst="rect">
-            <a:avLst/>
-          </a:prstGeom>
-          <a:solidFill>
-            <a:srgbClr val="FFD000"/>
-          </a:solidFill>
-          <a:ln>
-            <a:noFill/>
-          </a:ln>
-        </p:spPr>
-        <p:style>
-          <a:lnRef idx="1">
-            <a:schemeClr val="accent1"/>
-          </a:lnRef>
-          <a:fillRef idx="3">
-            <a:schemeClr val="accent1"/>
-          </a:fillRef>
-          <a:effectRef idx="2">
-            <a:schemeClr val="accent1"/>
-          </a:effectRef>
-          <a:fontRef idx="minor">
-            <a:schemeClr val="lt1"/>
-          </a:fontRef>
-        </p:style>
-        <p:txBody>
-          <a:bodyPr rtlCol="0" anchor="ctr"/>
-          <a:lstStyle/>
-          <a:p>
-            <a:pPr algn="ctr"/>
-          </a:p>
-        </p:txBody>
-      </p:sp>
-      <p:pic>
-        <p:nvPicPr>
-          <p:cNvPr id="14" name="Picture 13" descr="oracle_livesql.png"/>
-          <p:cNvPicPr>
-            <a:picLocks noChangeAspect="1"/>
-          </p:cNvPicPr>
-          <p:nvPr/>
-        </p:nvPicPr>
-        <p:blipFill>
-          <a:blip r:embed="rId3"/>
-          <a:stretch>
-            <a:fillRect/>
-          </a:stretch>
-        </p:blipFill>
-        <p:spPr>
-          <a:xfrm>
-            <a:off x="5469483" y="1847087"/>
-            <a:ext cx="1252728" cy="1252728"/>
-          </a:xfrm>
-          <a:prstGeom prst="rect">
-            <a:avLst/>
-          </a:prstGeom>
-        </p:spPr>
-      </p:pic>
-      <p:sp>
-        <p:nvSpPr>
-          <p:cNvPr id="15" name="TextBox 14"/>
-          <p:cNvSpPr txBox="1"/>
-          <p:nvPr/>
-        </p:nvSpPr>
-        <p:spPr>
-          <a:xfrm>
-            <a:off x="4356506" y="3191256"/>
-            <a:ext cx="3478682" cy="621792"/>
-          </a:xfrm>
-          <a:prstGeom prst="rect">
-            <a:avLst/>
-          </a:prstGeom>
-          <a:noFill/>
-        </p:spPr>
-        <p:txBody>
-          <a:bodyPr wrap="square" anchor="t"/>
-          <a:lstStyle/>
-          <a:p>
-            <a:pPr algn="ctr"/>
-            <a:r>
-              <a:rPr sz="1300" b="1" i="0">
-                <a:solidFill>
-                  <a:srgbClr val="095292"/>
-                </a:solidFill>
-                <a:latin typeface="Calibri"/>
-              </a:rPr>
-              <a:t>Oracle Live SQL</a:t>
-            </a:r>
-          </a:p>
-          <a:p>
-            <a:pPr algn="ctr">
-              <a:spcBef>
-                <a:spcPts val="200"/>
-              </a:spcBef>
-            </a:pPr>
-            <a:r>
-              <a:rPr sz="1000" b="0" i="0">
-                <a:solidFill>
-                  <a:srgbClr val="666666"/>
-                </a:solidFill>
-                <a:latin typeface="Calibri"/>
-              </a:rPr>
-              <a:t>Demo SQL</a:t>
-            </a:r>
-          </a:p>
-        </p:txBody>
-      </p:sp>
-      <p:sp>
-        <p:nvSpPr>
-          <p:cNvPr id="16" name="Rounded Rectangle 15"/>
-          <p:cNvSpPr/>
-          <p:nvPr/>
-        </p:nvSpPr>
-        <p:spPr>
-          <a:xfrm>
-            <a:off x="8109508" y="1591056"/>
-            <a:ext cx="3624986" cy="2331720"/>
-          </a:xfrm>
-          <a:prstGeom prst="roundRect">
-            <a:avLst>
-              <a:gd name="adj" fmla="val 12000"/>
-            </a:avLst>
-          </a:prstGeom>
-          <a:solidFill>
-            <a:srgbClr val="F2F2F2"/>
-          </a:solidFill>
-          <a:ln>
-            <a:noFill/>
-          </a:ln>
-        </p:spPr>
-        <p:style>
-          <a:lnRef idx="1">
-            <a:schemeClr val="accent1"/>
-          </a:lnRef>
-          <a:fillRef idx="3">
-            <a:schemeClr val="accent1"/>
-          </a:fillRef>
-          <a:effectRef idx="2">
-            <a:schemeClr val="accent1"/>
-          </a:effectRef>
-          <a:fontRef idx="minor">
-            <a:schemeClr val="lt1"/>
-          </a:fontRef>
-        </p:style>
-        <p:txBody>
-          <a:bodyPr rtlCol="0" anchor="ctr"/>
-          <a:lstStyle/>
-          <a:p>
-            <a:pPr algn="ctr"/>
-          </a:p>
-        </p:txBody>
-      </p:sp>
-      <p:sp>
-        <p:nvSpPr>
-          <p:cNvPr id="17" name="Rectangle 16"/>
-          <p:cNvSpPr/>
-          <p:nvPr/>
-        </p:nvSpPr>
-        <p:spPr>
-          <a:xfrm>
-            <a:off x="8109508" y="1591056"/>
-            <a:ext cx="3624986" cy="64008"/>
-          </a:xfrm>
-          <a:prstGeom prst="rect">
-            <a:avLst/>
-          </a:prstGeom>
-          <a:solidFill>
-            <a:srgbClr val="095292"/>
-          </a:solidFill>
-          <a:ln>
-            <a:noFill/>
-          </a:ln>
-        </p:spPr>
-        <p:style>
-          <a:lnRef idx="1">
-            <a:schemeClr val="accent1"/>
-          </a:lnRef>
-          <a:fillRef idx="3">
-            <a:schemeClr val="accent1"/>
-          </a:fillRef>
-          <a:effectRef idx="2">
-            <a:schemeClr val="accent1"/>
-          </a:effectRef>
-          <a:fontRef idx="minor">
-            <a:schemeClr val="lt1"/>
-          </a:fontRef>
-        </p:style>
-        <p:txBody>
-          <a:bodyPr rtlCol="0" anchor="ctr"/>
-          <a:lstStyle/>
-          <a:p>
-            <a:pPr algn="ctr"/>
-          </a:p>
-        </p:txBody>
-      </p:sp>
-      <p:sp>
-        <p:nvSpPr>
-          <p:cNvPr id="18" name="Rectangle 17"/>
-          <p:cNvSpPr/>
-          <p:nvPr/>
-        </p:nvSpPr>
-        <p:spPr>
-          <a:xfrm>
-            <a:off x="8109508" y="1655064"/>
-            <a:ext cx="3624986" cy="27432"/>
-          </a:xfrm>
-          <a:prstGeom prst="rect">
-            <a:avLst/>
-          </a:prstGeom>
-          <a:solidFill>
-            <a:srgbClr val="FFD000"/>
-          </a:solidFill>
-          <a:ln>
-            <a:noFill/>
-          </a:ln>
-        </p:spPr>
-        <p:style>
-          <a:lnRef idx="1">
-            <a:schemeClr val="accent1"/>
-          </a:lnRef>
-          <a:fillRef idx="3">
-            <a:schemeClr val="accent1"/>
-          </a:fillRef>
-          <a:effectRef idx="2">
-            <a:schemeClr val="accent1"/>
-          </a:effectRef>
-          <a:fontRef idx="minor">
-            <a:schemeClr val="lt1"/>
-          </a:fontRef>
-        </p:style>
-        <p:txBody>
-          <a:bodyPr rtlCol="0" anchor="ctr"/>
-          <a:lstStyle/>
-          <a:p>
-            <a:pPr algn="ctr"/>
-          </a:p>
-        </p:txBody>
-      </p:sp>
-      <p:pic>
-        <p:nvPicPr>
-          <p:cNvPr id="19" name="Picture 18" descr="dbfiddle.png"/>
-          <p:cNvPicPr>
-            <a:picLocks noChangeAspect="1"/>
-          </p:cNvPicPr>
-          <p:nvPr/>
-        </p:nvPicPr>
-        <p:blipFill>
-          <a:blip r:embed="rId4"/>
-          <a:stretch>
-            <a:fillRect/>
-          </a:stretch>
-        </p:blipFill>
-        <p:spPr>
-          <a:xfrm>
-            <a:off x="9295638" y="1847087"/>
-            <a:ext cx="1252728" cy="1252728"/>
-          </a:xfrm>
-          <a:prstGeom prst="rect">
-            <a:avLst/>
-          </a:prstGeom>
-        </p:spPr>
-      </p:pic>
-      <p:sp>
-        <p:nvSpPr>
-          <p:cNvPr id="20" name="TextBox 19"/>
-          <p:cNvSpPr txBox="1"/>
-          <p:nvPr/>
-        </p:nvSpPr>
-        <p:spPr>
-          <a:xfrm>
-            <a:off x="8182660" y="3191256"/>
-            <a:ext cx="3478682" cy="621792"/>
-          </a:xfrm>
-          <a:prstGeom prst="rect">
-            <a:avLst/>
-          </a:prstGeom>
-          <a:noFill/>
-        </p:spPr>
-        <p:txBody>
-          <a:bodyPr wrap="square" anchor="t"/>
-          <a:lstStyle/>
-          <a:p>
-            <a:pPr algn="ctr"/>
-            <a:r>
-              <a:rPr sz="1300" b="1" i="0">
-                <a:solidFill>
-                  <a:srgbClr val="095292"/>
-                </a:solidFill>
-                <a:latin typeface="Calibri"/>
-              </a:rPr>
-              <a:t>DB Fiddle</a:t>
-            </a:r>
-          </a:p>
-          <a:p>
-            <a:pPr algn="ctr">
-              <a:spcBef>
-                <a:spcPts val="200"/>
-              </a:spcBef>
-            </a:pPr>
-            <a:r>
-              <a:rPr sz="1000" b="0" i="0">
-                <a:solidFill>
-                  <a:srgbClr val="666666"/>
-                </a:solidFill>
-                <a:latin typeface="Calibri"/>
-              </a:rPr>
-              <a:t>Pruebas</a:t>
-            </a:r>
-          </a:p>
-        </p:txBody>
-      </p:sp>
-      <p:sp>
-        <p:nvSpPr>
-          <p:cNvPr id="21" name="TextBox 20"/>
           <p:cNvSpPr txBox="1"/>
           <p:nvPr/>
         </p:nvSpPr>
@@ -8792,7 +8167,7 @@
                 </a:solidFill>
                 <a:latin typeface="Calibri"/>
               </a:rPr>
-              <a:t>Actividad autonoma — contexto / por que importa</a:t>
+              <a:t>Demo del dia</a:t>
             </a:r>
           </a:p>
         </p:txBody>
@@ -8840,7 +8215,7 @@
                 </a:solidFill>
                 <a:latin typeface="Calibri"/>
               </a:rPr>
-              <a:t>Por qué importa al PI:</a:t>
+              <a:t>Herramienta:</a:t>
             </a:r>
             <a:r>
               <a:rPr sz="2000" b="0" i="0">
@@ -8849,7 +8224,7 @@
                 </a:solidFill>
                 <a:latin typeface="Calibri"/>
               </a:rPr>
-              <a:t> doble reserva y stock negativo.</a:t>
+              <a:t> Google Docs + Live SQL</a:t>
             </a:r>
           </a:p>
           <a:p>
@@ -8865,7 +8240,57 @@
                 </a:solidFill>
                 <a:latin typeface="Calibri"/>
               </a:rPr>
-              <a:t>–   Autónoma: escenarios + mitigacion SQL.</a:t>
+              <a:t>–   </a:t>
+            </a:r>
+            <a:r>
+              <a:rPr sz="2000" b="1" i="0">
+                <a:solidFill>
+                  <a:srgbClr val="333333"/>
+                </a:solidFill>
+                <a:latin typeface="Calibri"/>
+              </a:rPr>
+              <a:t>Demo:</a:t>
+            </a:r>
+            <a:r>
+              <a:rPr sz="2000" b="0" i="0">
+                <a:solidFill>
+                  <a:srgbClr val="333333"/>
+                </a:solidFill>
+                <a:latin typeface="Calibri"/>
+              </a:rPr>
+              <a:t> Narrativa paso a paso T1/T2 sobre tabla Cita.</a:t>
+            </a:r>
+          </a:p>
+          <a:p>
+            <a:pPr>
+              <a:spcAft>
+                <a:spcPts val="800"/>
+              </a:spcAft>
+            </a:pPr>
+            <a:r>
+              <a:rPr sz="2000" b="0" i="0">
+                <a:solidFill>
+                  <a:srgbClr val="333333"/>
+                </a:solidFill>
+                <a:latin typeface="Calibri"/>
+              </a:rPr>
+              <a:t>–   Sigan el mismo dominio VetCare (no inventen otro caso).</a:t>
+            </a:r>
+          </a:p>
+          <a:p>
+            <a:pPr>
+              <a:spcAft>
+                <a:spcPts val="800"/>
+              </a:spcAft>
+            </a:pPr>
+            <a:r>
+              <a:rPr sz="2000" b="0" i="0">
+                <a:solidFill>
+                  <a:srgbClr val="333333"/>
+                </a:solidFill>
+                <a:latin typeface="Calibri"/>
+              </a:rPr>
+              <a:t>–   Al final de la demo: dejar enlace/script compartible al grupo.</a:t>
             </a:r>
           </a:p>
         </p:txBody>
@@ -8940,7 +8365,7 @@
         <p:spPr>
           <a:xfrm>
             <a:off x="0" y="0"/>
-            <a:ext cx="12191695" cy="960120"/>
+            <a:ext cx="12191695" cy="1170432"/>
           </a:xfrm>
           <a:prstGeom prst="rect">
             <a:avLst/>
@@ -8982,7 +8407,7 @@
         </p:nvSpPr>
         <p:spPr>
           <a:xfrm>
-            <a:off x="0" y="960120"/>
+            <a:off x="0" y="1170432"/>
             <a:ext cx="12191695" cy="41148"/>
           </a:xfrm>
           <a:prstGeom prst="rect">
@@ -9026,7 +8451,7 @@
         <p:spPr>
           <a:xfrm>
             <a:off x="457200" y="164592"/>
-            <a:ext cx="11277295" cy="502920"/>
+            <a:ext cx="11277295" cy="384048"/>
           </a:xfrm>
           <a:prstGeom prst="rect">
             <a:avLst/>
@@ -9046,7 +8471,7 @@
                 </a:solidFill>
                 <a:latin typeface="Calibri"/>
               </a:rPr>
-              <a:t>Actividad autonoma — objetivo y criterios</a:t>
+              <a:t>Herramientas de hoy</a:t>
             </a:r>
           </a:p>
         </p:txBody>
@@ -9059,8 +8484,8 @@
         </p:nvSpPr>
         <p:spPr>
           <a:xfrm>
-            <a:off x="457200" y="1170432"/>
-            <a:ext cx="11277295" cy="5230368"/>
+            <a:off x="457200" y="566928"/>
+            <a:ext cx="11277295" cy="411480"/>
           </a:xfrm>
           <a:prstGeom prst="rect">
             <a:avLst/>
@@ -9073,214 +8498,633 @@
           </a:bodyPr>
           <a:lstStyle/>
           <a:p>
-            <a:pPr>
-              <a:spcAft>
-                <a:spcPts val="800"/>
-              </a:spcAft>
+            <a:r>
+              <a:rPr sz="1400" b="0" i="0">
+                <a:solidFill>
+                  <a:srgbClr val="B8D8EE"/>
+                </a:solidFill>
+                <a:latin typeface="Calibri"/>
+              </a:rPr>
+              <a:t>Gratis · navegador o free tier</a:t>
+            </a:r>
+          </a:p>
+        </p:txBody>
+      </p:sp>
+      <p:sp>
+        <p:nvSpPr>
+          <p:cNvPr id="6" name="Rounded Rectangle 5"/>
+          <p:cNvSpPr/>
+          <p:nvPr/>
+        </p:nvSpPr>
+        <p:spPr>
+          <a:xfrm>
+            <a:off x="457200" y="1591056"/>
+            <a:ext cx="3624986" cy="2331720"/>
+          </a:xfrm>
+          <a:prstGeom prst="roundRect">
+            <a:avLst>
+              <a:gd name="adj" fmla="val 12000"/>
+            </a:avLst>
+          </a:prstGeom>
+          <a:solidFill>
+            <a:srgbClr val="F2F2F2"/>
+          </a:solidFill>
+          <a:ln>
+            <a:noFill/>
+          </a:ln>
+        </p:spPr>
+        <p:style>
+          <a:lnRef idx="1">
+            <a:schemeClr val="accent1"/>
+          </a:lnRef>
+          <a:fillRef idx="3">
+            <a:schemeClr val="accent1"/>
+          </a:fillRef>
+          <a:effectRef idx="2">
+            <a:schemeClr val="accent1"/>
+          </a:effectRef>
+          <a:fontRef idx="minor">
+            <a:schemeClr val="lt1"/>
+          </a:fontRef>
+        </p:style>
+        <p:txBody>
+          <a:bodyPr rtlCol="0" anchor="ctr"/>
+          <a:lstStyle/>
+          <a:p>
+            <a:pPr algn="ctr"/>
+          </a:p>
+        </p:txBody>
+      </p:sp>
+      <p:sp>
+        <p:nvSpPr>
+          <p:cNvPr id="7" name="Rectangle 6"/>
+          <p:cNvSpPr/>
+          <p:nvPr/>
+        </p:nvSpPr>
+        <p:spPr>
+          <a:xfrm>
+            <a:off x="457200" y="1591056"/>
+            <a:ext cx="3624986" cy="64008"/>
+          </a:xfrm>
+          <a:prstGeom prst="rect">
+            <a:avLst/>
+          </a:prstGeom>
+          <a:solidFill>
+            <a:srgbClr val="095292"/>
+          </a:solidFill>
+          <a:ln>
+            <a:noFill/>
+          </a:ln>
+        </p:spPr>
+        <p:style>
+          <a:lnRef idx="1">
+            <a:schemeClr val="accent1"/>
+          </a:lnRef>
+          <a:fillRef idx="3">
+            <a:schemeClr val="accent1"/>
+          </a:fillRef>
+          <a:effectRef idx="2">
+            <a:schemeClr val="accent1"/>
+          </a:effectRef>
+          <a:fontRef idx="minor">
+            <a:schemeClr val="lt1"/>
+          </a:fontRef>
+        </p:style>
+        <p:txBody>
+          <a:bodyPr rtlCol="0" anchor="ctr"/>
+          <a:lstStyle/>
+          <a:p>
+            <a:pPr algn="ctr"/>
+          </a:p>
+        </p:txBody>
+      </p:sp>
+      <p:sp>
+        <p:nvSpPr>
+          <p:cNvPr id="8" name="Rectangle 7"/>
+          <p:cNvSpPr/>
+          <p:nvPr/>
+        </p:nvSpPr>
+        <p:spPr>
+          <a:xfrm>
+            <a:off x="457200" y="1655064"/>
+            <a:ext cx="3624986" cy="27432"/>
+          </a:xfrm>
+          <a:prstGeom prst="rect">
+            <a:avLst/>
+          </a:prstGeom>
+          <a:solidFill>
+            <a:srgbClr val="FFD000"/>
+          </a:solidFill>
+          <a:ln>
+            <a:noFill/>
+          </a:ln>
+        </p:spPr>
+        <p:style>
+          <a:lnRef idx="1">
+            <a:schemeClr val="accent1"/>
+          </a:lnRef>
+          <a:fillRef idx="3">
+            <a:schemeClr val="accent1"/>
+          </a:fillRef>
+          <a:effectRef idx="2">
+            <a:schemeClr val="accent1"/>
+          </a:effectRef>
+          <a:fontRef idx="minor">
+            <a:schemeClr val="lt1"/>
+          </a:fontRef>
+        </p:style>
+        <p:txBody>
+          <a:bodyPr rtlCol="0" anchor="ctr"/>
+          <a:lstStyle/>
+          <a:p>
+            <a:pPr algn="ctr"/>
+          </a:p>
+        </p:txBody>
+      </p:sp>
+      <p:pic>
+        <p:nvPicPr>
+          <p:cNvPr id="9" name="Picture 8" descr="google_docs.png"/>
+          <p:cNvPicPr>
+            <a:picLocks noChangeAspect="1"/>
+          </p:cNvPicPr>
+          <p:nvPr/>
+        </p:nvPicPr>
+        <p:blipFill>
+          <a:blip r:embed="rId2"/>
+          <a:stretch>
+            <a:fillRect/>
+          </a:stretch>
+        </p:blipFill>
+        <p:spPr>
+          <a:xfrm>
+            <a:off x="1643329" y="1847087"/>
+            <a:ext cx="1252728" cy="1252728"/>
+          </a:xfrm>
+          <a:prstGeom prst="rect">
+            <a:avLst/>
+          </a:prstGeom>
+        </p:spPr>
+      </p:pic>
+      <p:sp>
+        <p:nvSpPr>
+          <p:cNvPr id="10" name="TextBox 9"/>
+          <p:cNvSpPr txBox="1"/>
+          <p:nvPr/>
+        </p:nvSpPr>
+        <p:spPr>
+          <a:xfrm>
+            <a:off x="530352" y="3191256"/>
+            <a:ext cx="3478682" cy="621792"/>
+          </a:xfrm>
+          <a:prstGeom prst="rect">
+            <a:avLst/>
+          </a:prstGeom>
+          <a:noFill/>
+        </p:spPr>
+        <p:txBody>
+          <a:bodyPr wrap="square" anchor="t"/>
+          <a:lstStyle/>
+          <a:p>
+            <a:pPr algn="ctr"/>
+            <a:r>
+              <a:rPr sz="1300" b="1" i="0">
+                <a:solidFill>
+                  <a:srgbClr val="095292"/>
+                </a:solidFill>
+                <a:latin typeface="Calibri"/>
+              </a:rPr>
+              <a:t>Google Docs</a:t>
+            </a:r>
+          </a:p>
+          <a:p>
+            <a:pPr algn="ctr">
+              <a:spcBef>
+                <a:spcPts val="200"/>
+              </a:spcBef>
             </a:pPr>
             <a:r>
-              <a:rPr sz="2000" b="0" i="0">
-                <a:solidFill>
-                  <a:srgbClr val="333333"/>
-                </a:solidFill>
-                <a:latin typeface="Calibri"/>
-              </a:rPr>
-              <a:t>–   </a:t>
-            </a:r>
-            <a:r>
-              <a:rPr sz="2000" b="1" i="0">
-                <a:solidFill>
-                  <a:srgbClr val="333333"/>
-                </a:solidFill>
-                <a:latin typeface="Calibri"/>
-              </a:rPr>
-              <a:t>Objetivo:</a:t>
-            </a:r>
-            <a:r>
-              <a:rPr sz="2000" b="0" i="0">
-                <a:solidFill>
-                  <a:srgbClr val="333333"/>
-                </a:solidFill>
-                <a:latin typeface="Calibri"/>
-              </a:rPr>
-              <a:t> 2 escenarios concurrencia T1/T2 + mitigacion.</a:t>
-            </a:r>
-          </a:p>
-          <a:p>
-            <a:pPr>
-              <a:spcAft>
-                <a:spcPts val="800"/>
-              </a:spcAft>
+              <a:rPr sz="1000" b="0" i="0">
+                <a:solidFill>
+                  <a:srgbClr val="666666"/>
+                </a:solidFill>
+                <a:latin typeface="Calibri"/>
+              </a:rPr>
+              <a:t>Escenarios T1/T2</a:t>
+            </a:r>
+          </a:p>
+        </p:txBody>
+      </p:sp>
+      <p:sp>
+        <p:nvSpPr>
+          <p:cNvPr id="11" name="Rounded Rectangle 10"/>
+          <p:cNvSpPr/>
+          <p:nvPr/>
+        </p:nvSpPr>
+        <p:spPr>
+          <a:xfrm>
+            <a:off x="4283354" y="1591056"/>
+            <a:ext cx="3624986" cy="2331720"/>
+          </a:xfrm>
+          <a:prstGeom prst="roundRect">
+            <a:avLst>
+              <a:gd name="adj" fmla="val 12000"/>
+            </a:avLst>
+          </a:prstGeom>
+          <a:solidFill>
+            <a:srgbClr val="F2F2F2"/>
+          </a:solidFill>
+          <a:ln>
+            <a:noFill/>
+          </a:ln>
+        </p:spPr>
+        <p:style>
+          <a:lnRef idx="1">
+            <a:schemeClr val="accent1"/>
+          </a:lnRef>
+          <a:fillRef idx="3">
+            <a:schemeClr val="accent1"/>
+          </a:fillRef>
+          <a:effectRef idx="2">
+            <a:schemeClr val="accent1"/>
+          </a:effectRef>
+          <a:fontRef idx="minor">
+            <a:schemeClr val="lt1"/>
+          </a:fontRef>
+        </p:style>
+        <p:txBody>
+          <a:bodyPr rtlCol="0" anchor="ctr"/>
+          <a:lstStyle/>
+          <a:p>
+            <a:pPr algn="ctr"/>
+          </a:p>
+        </p:txBody>
+      </p:sp>
+      <p:sp>
+        <p:nvSpPr>
+          <p:cNvPr id="12" name="Rectangle 11"/>
+          <p:cNvSpPr/>
+          <p:nvPr/>
+        </p:nvSpPr>
+        <p:spPr>
+          <a:xfrm>
+            <a:off x="4283354" y="1591056"/>
+            <a:ext cx="3624986" cy="64008"/>
+          </a:xfrm>
+          <a:prstGeom prst="rect">
+            <a:avLst/>
+          </a:prstGeom>
+          <a:solidFill>
+            <a:srgbClr val="095292"/>
+          </a:solidFill>
+          <a:ln>
+            <a:noFill/>
+          </a:ln>
+        </p:spPr>
+        <p:style>
+          <a:lnRef idx="1">
+            <a:schemeClr val="accent1"/>
+          </a:lnRef>
+          <a:fillRef idx="3">
+            <a:schemeClr val="accent1"/>
+          </a:fillRef>
+          <a:effectRef idx="2">
+            <a:schemeClr val="accent1"/>
+          </a:effectRef>
+          <a:fontRef idx="minor">
+            <a:schemeClr val="lt1"/>
+          </a:fontRef>
+        </p:style>
+        <p:txBody>
+          <a:bodyPr rtlCol="0" anchor="ctr"/>
+          <a:lstStyle/>
+          <a:p>
+            <a:pPr algn="ctr"/>
+          </a:p>
+        </p:txBody>
+      </p:sp>
+      <p:sp>
+        <p:nvSpPr>
+          <p:cNvPr id="13" name="Rectangle 12"/>
+          <p:cNvSpPr/>
+          <p:nvPr/>
+        </p:nvSpPr>
+        <p:spPr>
+          <a:xfrm>
+            <a:off x="4283354" y="1655064"/>
+            <a:ext cx="3624986" cy="27432"/>
+          </a:xfrm>
+          <a:prstGeom prst="rect">
+            <a:avLst/>
+          </a:prstGeom>
+          <a:solidFill>
+            <a:srgbClr val="FFD000"/>
+          </a:solidFill>
+          <a:ln>
+            <a:noFill/>
+          </a:ln>
+        </p:spPr>
+        <p:style>
+          <a:lnRef idx="1">
+            <a:schemeClr val="accent1"/>
+          </a:lnRef>
+          <a:fillRef idx="3">
+            <a:schemeClr val="accent1"/>
+          </a:fillRef>
+          <a:effectRef idx="2">
+            <a:schemeClr val="accent1"/>
+          </a:effectRef>
+          <a:fontRef idx="minor">
+            <a:schemeClr val="lt1"/>
+          </a:fontRef>
+        </p:style>
+        <p:txBody>
+          <a:bodyPr rtlCol="0" anchor="ctr"/>
+          <a:lstStyle/>
+          <a:p>
+            <a:pPr algn="ctr"/>
+          </a:p>
+        </p:txBody>
+      </p:sp>
+      <p:pic>
+        <p:nvPicPr>
+          <p:cNvPr id="14" name="Picture 13" descr="oracle_livesql.png"/>
+          <p:cNvPicPr>
+            <a:picLocks noChangeAspect="1"/>
+          </p:cNvPicPr>
+          <p:nvPr/>
+        </p:nvPicPr>
+        <p:blipFill>
+          <a:blip r:embed="rId3"/>
+          <a:stretch>
+            <a:fillRect/>
+          </a:stretch>
+        </p:blipFill>
+        <p:spPr>
+          <a:xfrm>
+            <a:off x="5469483" y="1847087"/>
+            <a:ext cx="1252728" cy="1252728"/>
+          </a:xfrm>
+          <a:prstGeom prst="rect">
+            <a:avLst/>
+          </a:prstGeom>
+        </p:spPr>
+      </p:pic>
+      <p:sp>
+        <p:nvSpPr>
+          <p:cNvPr id="15" name="TextBox 14"/>
+          <p:cNvSpPr txBox="1"/>
+          <p:nvPr/>
+        </p:nvSpPr>
+        <p:spPr>
+          <a:xfrm>
+            <a:off x="4356506" y="3191256"/>
+            <a:ext cx="3478682" cy="621792"/>
+          </a:xfrm>
+          <a:prstGeom prst="rect">
+            <a:avLst/>
+          </a:prstGeom>
+          <a:noFill/>
+        </p:spPr>
+        <p:txBody>
+          <a:bodyPr wrap="square" anchor="t"/>
+          <a:lstStyle/>
+          <a:p>
+            <a:pPr algn="ctr"/>
+            <a:r>
+              <a:rPr sz="1300" b="1" i="0">
+                <a:solidFill>
+                  <a:srgbClr val="095292"/>
+                </a:solidFill>
+                <a:latin typeface="Calibri"/>
+              </a:rPr>
+              <a:t>Oracle Live SQL</a:t>
+            </a:r>
+          </a:p>
+          <a:p>
+            <a:pPr algn="ctr">
+              <a:spcBef>
+                <a:spcPts val="200"/>
+              </a:spcBef>
             </a:pPr>
             <a:r>
-              <a:rPr sz="2000" b="0" i="0">
-                <a:solidFill>
-                  <a:srgbClr val="333333"/>
-                </a:solidFill>
-                <a:latin typeface="Calibri"/>
-              </a:rPr>
-              <a:t>–   </a:t>
-            </a:r>
-            <a:r>
-              <a:rPr sz="2000" b="1" i="0">
-                <a:solidFill>
-                  <a:srgbClr val="333333"/>
-                </a:solidFill>
-                <a:latin typeface="Calibri"/>
-              </a:rPr>
-              <a:t>Exito:</a:t>
-            </a:r>
-            <a:r>
-              <a:rPr sz="2000" b="0" i="0">
-                <a:solidFill>
-                  <a:srgbClr val="333333"/>
-                </a:solidFill>
-                <a:latin typeface="Calibri"/>
-              </a:rPr>
-              <a:t> Doble reserva.</a:t>
-            </a:r>
-          </a:p>
-          <a:p>
-            <a:pPr>
-              <a:spcAft>
-                <a:spcPts val="800"/>
-              </a:spcAft>
+              <a:rPr sz="1000" b="0" i="0">
+                <a:solidFill>
+                  <a:srgbClr val="666666"/>
+                </a:solidFill>
+                <a:latin typeface="Calibri"/>
+              </a:rPr>
+              <a:t>Demo SQL</a:t>
+            </a:r>
+          </a:p>
+        </p:txBody>
+      </p:sp>
+      <p:sp>
+        <p:nvSpPr>
+          <p:cNvPr id="16" name="Rounded Rectangle 15"/>
+          <p:cNvSpPr/>
+          <p:nvPr/>
+        </p:nvSpPr>
+        <p:spPr>
+          <a:xfrm>
+            <a:off x="8109508" y="1591056"/>
+            <a:ext cx="3624986" cy="2331720"/>
+          </a:xfrm>
+          <a:prstGeom prst="roundRect">
+            <a:avLst>
+              <a:gd name="adj" fmla="val 12000"/>
+            </a:avLst>
+          </a:prstGeom>
+          <a:solidFill>
+            <a:srgbClr val="F2F2F2"/>
+          </a:solidFill>
+          <a:ln>
+            <a:noFill/>
+          </a:ln>
+        </p:spPr>
+        <p:style>
+          <a:lnRef idx="1">
+            <a:schemeClr val="accent1"/>
+          </a:lnRef>
+          <a:fillRef idx="3">
+            <a:schemeClr val="accent1"/>
+          </a:fillRef>
+          <a:effectRef idx="2">
+            <a:schemeClr val="accent1"/>
+          </a:effectRef>
+          <a:fontRef idx="minor">
+            <a:schemeClr val="lt1"/>
+          </a:fontRef>
+        </p:style>
+        <p:txBody>
+          <a:bodyPr rtlCol="0" anchor="ctr"/>
+          <a:lstStyle/>
+          <a:p>
+            <a:pPr algn="ctr"/>
+          </a:p>
+        </p:txBody>
+      </p:sp>
+      <p:sp>
+        <p:nvSpPr>
+          <p:cNvPr id="17" name="Rectangle 16"/>
+          <p:cNvSpPr/>
+          <p:nvPr/>
+        </p:nvSpPr>
+        <p:spPr>
+          <a:xfrm>
+            <a:off x="8109508" y="1591056"/>
+            <a:ext cx="3624986" cy="64008"/>
+          </a:xfrm>
+          <a:prstGeom prst="rect">
+            <a:avLst/>
+          </a:prstGeom>
+          <a:solidFill>
+            <a:srgbClr val="095292"/>
+          </a:solidFill>
+          <a:ln>
+            <a:noFill/>
+          </a:ln>
+        </p:spPr>
+        <p:style>
+          <a:lnRef idx="1">
+            <a:schemeClr val="accent1"/>
+          </a:lnRef>
+          <a:fillRef idx="3">
+            <a:schemeClr val="accent1"/>
+          </a:fillRef>
+          <a:effectRef idx="2">
+            <a:schemeClr val="accent1"/>
+          </a:effectRef>
+          <a:fontRef idx="minor">
+            <a:schemeClr val="lt1"/>
+          </a:fontRef>
+        </p:style>
+        <p:txBody>
+          <a:bodyPr rtlCol="0" anchor="ctr"/>
+          <a:lstStyle/>
+          <a:p>
+            <a:pPr algn="ctr"/>
+          </a:p>
+        </p:txBody>
+      </p:sp>
+      <p:sp>
+        <p:nvSpPr>
+          <p:cNvPr id="18" name="Rectangle 17"/>
+          <p:cNvSpPr/>
+          <p:nvPr/>
+        </p:nvSpPr>
+        <p:spPr>
+          <a:xfrm>
+            <a:off x="8109508" y="1655064"/>
+            <a:ext cx="3624986" cy="27432"/>
+          </a:xfrm>
+          <a:prstGeom prst="rect">
+            <a:avLst/>
+          </a:prstGeom>
+          <a:solidFill>
+            <a:srgbClr val="FFD000"/>
+          </a:solidFill>
+          <a:ln>
+            <a:noFill/>
+          </a:ln>
+        </p:spPr>
+        <p:style>
+          <a:lnRef idx="1">
+            <a:schemeClr val="accent1"/>
+          </a:lnRef>
+          <a:fillRef idx="3">
+            <a:schemeClr val="accent1"/>
+          </a:fillRef>
+          <a:effectRef idx="2">
+            <a:schemeClr val="accent1"/>
+          </a:effectRef>
+          <a:fontRef idx="minor">
+            <a:schemeClr val="lt1"/>
+          </a:fontRef>
+        </p:style>
+        <p:txBody>
+          <a:bodyPr rtlCol="0" anchor="ctr"/>
+          <a:lstStyle/>
+          <a:p>
+            <a:pPr algn="ctr"/>
+          </a:p>
+        </p:txBody>
+      </p:sp>
+      <p:pic>
+        <p:nvPicPr>
+          <p:cNvPr id="19" name="Picture 18" descr="dbfiddle.png"/>
+          <p:cNvPicPr>
+            <a:picLocks noChangeAspect="1"/>
+          </p:cNvPicPr>
+          <p:nvPr/>
+        </p:nvPicPr>
+        <p:blipFill>
+          <a:blip r:embed="rId4"/>
+          <a:stretch>
+            <a:fillRect/>
+          </a:stretch>
+        </p:blipFill>
+        <p:spPr>
+          <a:xfrm>
+            <a:off x="9295638" y="1847087"/>
+            <a:ext cx="1252728" cy="1252728"/>
+          </a:xfrm>
+          <a:prstGeom prst="rect">
+            <a:avLst/>
+          </a:prstGeom>
+        </p:spPr>
+      </p:pic>
+      <p:sp>
+        <p:nvSpPr>
+          <p:cNvPr id="20" name="TextBox 19"/>
+          <p:cNvSpPr txBox="1"/>
+          <p:nvPr/>
+        </p:nvSpPr>
+        <p:spPr>
+          <a:xfrm>
+            <a:off x="8182660" y="3191256"/>
+            <a:ext cx="3478682" cy="621792"/>
+          </a:xfrm>
+          <a:prstGeom prst="rect">
+            <a:avLst/>
+          </a:prstGeom>
+          <a:noFill/>
+        </p:spPr>
+        <p:txBody>
+          <a:bodyPr wrap="square" anchor="t"/>
+          <a:lstStyle/>
+          <a:p>
+            <a:pPr algn="ctr"/>
+            <a:r>
+              <a:rPr sz="1300" b="1" i="0">
+                <a:solidFill>
+                  <a:srgbClr val="095292"/>
+                </a:solidFill>
+                <a:latin typeface="Calibri"/>
+              </a:rPr>
+              <a:t>DB Fiddle</a:t>
+            </a:r>
+          </a:p>
+          <a:p>
+            <a:pPr algn="ctr">
+              <a:spcBef>
+                <a:spcPts val="200"/>
+              </a:spcBef>
             </a:pPr>
             <a:r>
-              <a:rPr sz="2000" b="0" i="0">
-                <a:solidFill>
-                  <a:srgbClr val="333333"/>
-                </a:solidFill>
-                <a:latin typeface="Calibri"/>
-              </a:rPr>
-              <a:t>–   </a:t>
-            </a:r>
-            <a:r>
-              <a:rPr sz="2000" b="1" i="0">
-                <a:solidFill>
-                  <a:srgbClr val="333333"/>
-                </a:solidFill>
-                <a:latin typeface="Calibri"/>
-              </a:rPr>
-              <a:t>Exito:</a:t>
-            </a:r>
-            <a:r>
-              <a:rPr sz="2000" b="0" i="0">
-                <a:solidFill>
-                  <a:srgbClr val="333333"/>
-                </a:solidFill>
-                <a:latin typeface="Calibri"/>
-              </a:rPr>
-              <a:t> Doble stock.</a:t>
-            </a:r>
-          </a:p>
-          <a:p>
-            <a:pPr>
-              <a:spcAft>
-                <a:spcPts val="800"/>
-              </a:spcAft>
-            </a:pPr>
-            <a:r>
-              <a:rPr sz="2000" b="0" i="0">
-                <a:solidFill>
-                  <a:srgbClr val="333333"/>
-                </a:solidFill>
-                <a:latin typeface="Calibri"/>
-              </a:rPr>
-              <a:t>–   </a:t>
-            </a:r>
-            <a:r>
-              <a:rPr sz="2000" b="1" i="0">
-                <a:solidFill>
-                  <a:srgbClr val="333333"/>
-                </a:solidFill>
-                <a:latin typeface="Calibri"/>
-              </a:rPr>
-              <a:t>Exito:</a:t>
-            </a:r>
-            <a:r>
-              <a:rPr sz="2000" b="0" i="0">
-                <a:solidFill>
-                  <a:srgbClr val="333333"/>
-                </a:solidFill>
-                <a:latin typeface="Calibri"/>
-              </a:rPr>
-              <a:t> Mitigacion SQL.</a:t>
-            </a:r>
-          </a:p>
-          <a:p>
-            <a:pPr>
-              <a:spcAft>
-                <a:spcPts val="800"/>
-              </a:spcAft>
-            </a:pPr>
-            <a:r>
-              <a:rPr sz="2000" b="0" i="0">
-                <a:solidFill>
-                  <a:srgbClr val="333333"/>
-                </a:solidFill>
-                <a:latin typeface="Calibri"/>
-              </a:rPr>
-              <a:t>–   </a:t>
-            </a:r>
-            <a:r>
-              <a:rPr sz="2000" b="1" i="0">
-                <a:solidFill>
-                  <a:srgbClr val="333333"/>
-                </a:solidFill>
-                <a:latin typeface="Calibri"/>
-              </a:rPr>
-              <a:t>Exito:</a:t>
-            </a:r>
-            <a:r>
-              <a:rPr sz="2000" b="0" i="0">
-                <a:solidFill>
-                  <a:srgbClr val="333333"/>
-                </a:solidFill>
-                <a:latin typeface="Calibri"/>
-              </a:rPr>
-              <a:t> Sección informe.</a:t>
-            </a:r>
-          </a:p>
-          <a:p>
-            <a:pPr>
-              <a:spcAft>
-                <a:spcPts val="800"/>
-              </a:spcAft>
-            </a:pPr>
-            <a:r>
-              <a:rPr sz="2000" b="0" i="0">
-                <a:solidFill>
-                  <a:srgbClr val="333333"/>
-                </a:solidFill>
-                <a:latin typeface="Calibri"/>
-              </a:rPr>
-              <a:t>–   </a:t>
-            </a:r>
-            <a:r>
-              <a:rPr sz="2000" b="1" i="0">
-                <a:solidFill>
-                  <a:srgbClr val="333333"/>
-                </a:solidFill>
-                <a:latin typeface="Calibri"/>
-              </a:rPr>
-              <a:t>Exito:</a:t>
-            </a:r>
-            <a:r>
-              <a:rPr sz="2000" b="0" i="0">
-                <a:solidFill>
-                  <a:srgbClr val="333333"/>
-                </a:solidFill>
-                <a:latin typeface="Calibri"/>
-              </a:rPr>
-              <a:t> en la fecha que indique el docente.</a:t>
-            </a:r>
-          </a:p>
-        </p:txBody>
-      </p:sp>
-      <p:sp>
-        <p:nvSpPr>
-          <p:cNvPr id="6" name="TextBox 5"/>
+              <a:rPr sz="1000" b="0" i="0">
+                <a:solidFill>
+                  <a:srgbClr val="666666"/>
+                </a:solidFill>
+                <a:latin typeface="Calibri"/>
+              </a:rPr>
+              <a:t>Pruebas</a:t>
+            </a:r>
+          </a:p>
+        </p:txBody>
+      </p:sp>
+      <p:sp>
+        <p:nvSpPr>
+          <p:cNvPr id="21" name="TextBox 20"/>
           <p:cNvSpPr txBox="1"/>
           <p:nvPr/>
         </p:nvSpPr>
@@ -9454,7 +9298,7 @@
                 </a:solidFill>
                 <a:latin typeface="Calibri"/>
               </a:rPr>
-              <a:t>Actividad autonoma — escenario / datos de partida</a:t>
+              <a:t>Actividad autonoma — contexto / por que importa</a:t>
             </a:r>
           </a:p>
         </p:txBody>
@@ -9493,7 +9337,41 @@
                 </a:solidFill>
                 <a:latin typeface="Calibri"/>
               </a:rPr>
-              <a:t>–   Narrar T1/T2 sobre Cita/Insumo.</a:t>
+              <a:t>–   </a:t>
+            </a:r>
+            <a:r>
+              <a:rPr sz="2000" b="1" i="0">
+                <a:solidFill>
+                  <a:srgbClr val="333333"/>
+                </a:solidFill>
+                <a:latin typeface="Calibri"/>
+              </a:rPr>
+              <a:t>Por qué importa al PI:</a:t>
+            </a:r>
+            <a:r>
+              <a:rPr sz="2000" b="0" i="0">
+                <a:solidFill>
+                  <a:srgbClr val="333333"/>
+                </a:solidFill>
+                <a:latin typeface="Calibri"/>
+              </a:rPr>
+              <a:t> doble reserva y stock negativo.</a:t>
+            </a:r>
+          </a:p>
+          <a:p>
+            <a:pPr>
+              <a:spcAft>
+                <a:spcPts val="800"/>
+              </a:spcAft>
+            </a:pPr>
+            <a:r>
+              <a:rPr sz="2000" b="0" i="0">
+                <a:solidFill>
+                  <a:srgbClr val="333333"/>
+                </a:solidFill>
+                <a:latin typeface="Calibri"/>
+              </a:rPr>
+              <a:t>–   Autónoma: escenarios + mitigacion SQL.</a:t>
             </a:r>
           </a:p>
         </p:txBody>
@@ -9674,111 +9552,21 @@
                 </a:solidFill>
                 <a:latin typeface="Calibri"/>
               </a:rPr>
-              <a:t>Actividad autonoma — pasos guiados</a:t>
-            </a:r>
-          </a:p>
-        </p:txBody>
-      </p:sp>
-      <p:sp>
-        <p:nvSpPr>
-          <p:cNvPr id="5" name="Rounded Rectangle 4"/>
-          <p:cNvSpPr/>
-          <p:nvPr/>
-        </p:nvSpPr>
-        <p:spPr>
-          <a:xfrm>
-            <a:off x="457200" y="1554480"/>
-            <a:ext cx="11277295" cy="1051560"/>
-          </a:xfrm>
-          <a:prstGeom prst="roundRect">
-            <a:avLst>
-              <a:gd name="adj" fmla="val 12000"/>
-            </a:avLst>
-          </a:prstGeom>
-          <a:solidFill>
-            <a:srgbClr val="F2F2F2"/>
-          </a:solidFill>
-          <a:ln>
-            <a:noFill/>
-          </a:ln>
-        </p:spPr>
-        <p:style>
-          <a:lnRef idx="1">
-            <a:schemeClr val="accent1"/>
-          </a:lnRef>
-          <a:fillRef idx="3">
-            <a:schemeClr val="accent1"/>
-          </a:fillRef>
-          <a:effectRef idx="2">
-            <a:schemeClr val="accent1"/>
-          </a:effectRef>
-          <a:fontRef idx="minor">
-            <a:schemeClr val="lt1"/>
-          </a:fontRef>
-        </p:style>
-        <p:txBody>
-          <a:bodyPr rtlCol="0" anchor="ctr"/>
-          <a:lstStyle/>
-          <a:p>
-            <a:pPr algn="ctr"/>
-          </a:p>
-        </p:txBody>
-      </p:sp>
-      <p:sp>
-        <p:nvSpPr>
-          <p:cNvPr id="6" name="Rounded Rectangle 5"/>
-          <p:cNvSpPr/>
-          <p:nvPr/>
-        </p:nvSpPr>
-        <p:spPr>
-          <a:xfrm>
-            <a:off x="594360" y="1860804"/>
-            <a:ext cx="438912" cy="438912"/>
-          </a:xfrm>
-          <a:prstGeom prst="roundRect">
-            <a:avLst>
-              <a:gd name="adj" fmla="val 12000"/>
-            </a:avLst>
-          </a:prstGeom>
-          <a:solidFill>
-            <a:srgbClr val="095292"/>
-          </a:solidFill>
-          <a:ln>
-            <a:noFill/>
-          </a:ln>
-        </p:spPr>
-        <p:style>
-          <a:lnRef idx="1">
-            <a:schemeClr val="accent1"/>
-          </a:lnRef>
-          <a:fillRef idx="3">
-            <a:schemeClr val="accent1"/>
-          </a:fillRef>
-          <a:effectRef idx="2">
-            <a:schemeClr val="accent1"/>
-          </a:effectRef>
-          <a:fontRef idx="minor">
-            <a:schemeClr val="lt1"/>
-          </a:fontRef>
-        </p:style>
-        <p:txBody>
-          <a:bodyPr rtlCol="0" anchor="ctr"/>
-          <a:lstStyle/>
-          <a:p>
-            <a:pPr algn="ctr"/>
-          </a:p>
-        </p:txBody>
-      </p:sp>
-      <p:sp>
-        <p:nvSpPr>
-          <p:cNvPr id="7" name="TextBox 6"/>
+              <a:t>Actividad autonoma — objetivo y criterios</a:t>
+            </a:r>
+          </a:p>
+        </p:txBody>
+      </p:sp>
+      <p:sp>
+        <p:nvSpPr>
+          <p:cNvPr id="5" name="TextBox 4"/>
           <p:cNvSpPr txBox="1"/>
           <p:nvPr/>
         </p:nvSpPr>
         <p:spPr>
           <a:xfrm>
-            <a:off x="594360" y="1860804"/>
-            <a:ext cx="438912" cy="438912"/>
+            <a:off x="457200" y="1170432"/>
+            <a:ext cx="11277295" cy="5230368"/>
           </a:xfrm>
           <a:prstGeom prst="rect">
             <a:avLst/>
@@ -9786,522 +9574,219 @@
           <a:noFill/>
         </p:spPr>
         <p:txBody>
-          <a:bodyPr wrap="square" anchor="ctr"/>
-          <a:lstStyle/>
-          <a:p>
-            <a:pPr algn="ctr"/>
-            <a:r>
-              <a:rPr sz="1600" b="1" i="0">
-                <a:solidFill>
-                  <a:srgbClr val="FFFFFF"/>
-                </a:solidFill>
-                <a:latin typeface="Calibri"/>
-              </a:rPr>
-              <a:t>1</a:t>
-            </a:r>
-          </a:p>
-        </p:txBody>
-      </p:sp>
-      <p:sp>
-        <p:nvSpPr>
-          <p:cNvPr id="8" name="TextBox 7"/>
-          <p:cNvSpPr txBox="1"/>
-          <p:nvPr/>
-        </p:nvSpPr>
-        <p:spPr>
-          <a:xfrm>
-            <a:off x="1188720" y="1645920"/>
-            <a:ext cx="10271455" cy="886968"/>
-          </a:xfrm>
-          <a:prstGeom prst="rect">
-            <a:avLst/>
-          </a:prstGeom>
-          <a:noFill/>
-        </p:spPr>
-        <p:txBody>
-          <a:bodyPr wrap="square" anchor="ctr"/>
-          <a:lstStyle/>
-          <a:p>
-            <a:r>
-              <a:rPr sz="1500" b="1" i="0">
-                <a:solidFill>
-                  <a:srgbClr val="095292"/>
-                </a:solidFill>
-                <a:latin typeface="Calibri"/>
-              </a:rPr>
-              <a:t>Describir escenario doble reserva con tiempos T1/T2.</a:t>
-            </a:r>
-          </a:p>
-        </p:txBody>
-      </p:sp>
-      <p:sp>
-        <p:nvSpPr>
-          <p:cNvPr id="9" name="Rounded Rectangle 8"/>
-          <p:cNvSpPr/>
-          <p:nvPr/>
-        </p:nvSpPr>
-        <p:spPr>
-          <a:xfrm>
-            <a:off x="457200" y="2697480"/>
-            <a:ext cx="11277295" cy="1051560"/>
-          </a:xfrm>
-          <a:prstGeom prst="roundRect">
-            <a:avLst>
-              <a:gd name="adj" fmla="val 12000"/>
-            </a:avLst>
-          </a:prstGeom>
-          <a:solidFill>
-            <a:srgbClr val="E8F4FA"/>
-          </a:solidFill>
-          <a:ln>
-            <a:noFill/>
-          </a:ln>
-        </p:spPr>
-        <p:style>
-          <a:lnRef idx="1">
-            <a:schemeClr val="accent1"/>
-          </a:lnRef>
-          <a:fillRef idx="3">
-            <a:schemeClr val="accent1"/>
-          </a:fillRef>
-          <a:effectRef idx="2">
-            <a:schemeClr val="accent1"/>
-          </a:effectRef>
-          <a:fontRef idx="minor">
-            <a:schemeClr val="lt1"/>
-          </a:fontRef>
-        </p:style>
-        <p:txBody>
-          <a:bodyPr rtlCol="0" anchor="ctr"/>
-          <a:lstStyle/>
-          <a:p>
-            <a:pPr algn="ctr"/>
-          </a:p>
-        </p:txBody>
-      </p:sp>
-      <p:sp>
-        <p:nvSpPr>
-          <p:cNvPr id="10" name="Rounded Rectangle 9"/>
-          <p:cNvSpPr/>
-          <p:nvPr/>
-        </p:nvSpPr>
-        <p:spPr>
-          <a:xfrm>
-            <a:off x="594360" y="3003804"/>
-            <a:ext cx="438912" cy="438912"/>
-          </a:xfrm>
-          <a:prstGeom prst="roundRect">
-            <a:avLst>
-              <a:gd name="adj" fmla="val 12000"/>
-            </a:avLst>
-          </a:prstGeom>
-          <a:solidFill>
-            <a:srgbClr val="095292"/>
-          </a:solidFill>
-          <a:ln>
-            <a:noFill/>
-          </a:ln>
-        </p:spPr>
-        <p:style>
-          <a:lnRef idx="1">
-            <a:schemeClr val="accent1"/>
-          </a:lnRef>
-          <a:fillRef idx="3">
-            <a:schemeClr val="accent1"/>
-          </a:fillRef>
-          <a:effectRef idx="2">
-            <a:schemeClr val="accent1"/>
-          </a:effectRef>
-          <a:fontRef idx="minor">
-            <a:schemeClr val="lt1"/>
-          </a:fontRef>
-        </p:style>
-        <p:txBody>
-          <a:bodyPr rtlCol="0" anchor="ctr"/>
-          <a:lstStyle/>
-          <a:p>
-            <a:pPr algn="ctr"/>
-          </a:p>
-        </p:txBody>
-      </p:sp>
-      <p:sp>
-        <p:nvSpPr>
-          <p:cNvPr id="11" name="TextBox 10"/>
-          <p:cNvSpPr txBox="1"/>
-          <p:nvPr/>
-        </p:nvSpPr>
-        <p:spPr>
-          <a:xfrm>
-            <a:off x="594360" y="3003804"/>
-            <a:ext cx="438912" cy="438912"/>
-          </a:xfrm>
-          <a:prstGeom prst="rect">
-            <a:avLst/>
-          </a:prstGeom>
-          <a:noFill/>
-        </p:spPr>
-        <p:txBody>
-          <a:bodyPr wrap="square" anchor="ctr"/>
-          <a:lstStyle/>
-          <a:p>
-            <a:pPr algn="ctr"/>
-            <a:r>
-              <a:rPr sz="1600" b="1" i="0">
-                <a:solidFill>
-                  <a:srgbClr val="FFFFFF"/>
-                </a:solidFill>
-                <a:latin typeface="Calibri"/>
-              </a:rPr>
-              <a:t>2</a:t>
-            </a:r>
-          </a:p>
-        </p:txBody>
-      </p:sp>
-      <p:sp>
-        <p:nvSpPr>
-          <p:cNvPr id="12" name="TextBox 11"/>
-          <p:cNvSpPr txBox="1"/>
-          <p:nvPr/>
-        </p:nvSpPr>
-        <p:spPr>
-          <a:xfrm>
-            <a:off x="1188720" y="2788920"/>
-            <a:ext cx="10271455" cy="886968"/>
-          </a:xfrm>
-          <a:prstGeom prst="rect">
-            <a:avLst/>
-          </a:prstGeom>
-          <a:noFill/>
-        </p:spPr>
-        <p:txBody>
-          <a:bodyPr wrap="square" anchor="ctr"/>
-          <a:lstStyle/>
-          <a:p>
-            <a:r>
-              <a:rPr sz="1500" b="1" i="0">
-                <a:solidFill>
-                  <a:srgbClr val="095292"/>
-                </a:solidFill>
-                <a:latin typeface="Calibri"/>
-              </a:rPr>
-              <a:t>Describir escenario doble descuento de stock.</a:t>
-            </a:r>
-          </a:p>
-        </p:txBody>
-      </p:sp>
-      <p:sp>
-        <p:nvSpPr>
-          <p:cNvPr id="13" name="Rounded Rectangle 12"/>
-          <p:cNvSpPr/>
-          <p:nvPr/>
-        </p:nvSpPr>
-        <p:spPr>
-          <a:xfrm>
-            <a:off x="457200" y="3840480"/>
-            <a:ext cx="11277295" cy="1051560"/>
-          </a:xfrm>
-          <a:prstGeom prst="roundRect">
-            <a:avLst>
-              <a:gd name="adj" fmla="val 12000"/>
-            </a:avLst>
-          </a:prstGeom>
-          <a:solidFill>
-            <a:srgbClr val="F2F2F2"/>
-          </a:solidFill>
-          <a:ln>
-            <a:noFill/>
-          </a:ln>
-        </p:spPr>
-        <p:style>
-          <a:lnRef idx="1">
-            <a:schemeClr val="accent1"/>
-          </a:lnRef>
-          <a:fillRef idx="3">
-            <a:schemeClr val="accent1"/>
-          </a:fillRef>
-          <a:effectRef idx="2">
-            <a:schemeClr val="accent1"/>
-          </a:effectRef>
-          <a:fontRef idx="minor">
-            <a:schemeClr val="lt1"/>
-          </a:fontRef>
-        </p:style>
-        <p:txBody>
-          <a:bodyPr rtlCol="0" anchor="ctr"/>
-          <a:lstStyle/>
-          <a:p>
-            <a:pPr algn="ctr"/>
-          </a:p>
-        </p:txBody>
-      </p:sp>
-      <p:sp>
-        <p:nvSpPr>
-          <p:cNvPr id="14" name="Rounded Rectangle 13"/>
-          <p:cNvSpPr/>
-          <p:nvPr/>
-        </p:nvSpPr>
-        <p:spPr>
-          <a:xfrm>
-            <a:off x="594360" y="4146804"/>
-            <a:ext cx="438912" cy="438912"/>
-          </a:xfrm>
-          <a:prstGeom prst="roundRect">
-            <a:avLst>
-              <a:gd name="adj" fmla="val 12000"/>
-            </a:avLst>
-          </a:prstGeom>
-          <a:solidFill>
-            <a:srgbClr val="095292"/>
-          </a:solidFill>
-          <a:ln>
-            <a:noFill/>
-          </a:ln>
-        </p:spPr>
-        <p:style>
-          <a:lnRef idx="1">
-            <a:schemeClr val="accent1"/>
-          </a:lnRef>
-          <a:fillRef idx="3">
-            <a:schemeClr val="accent1"/>
-          </a:fillRef>
-          <a:effectRef idx="2">
-            <a:schemeClr val="accent1"/>
-          </a:effectRef>
-          <a:fontRef idx="minor">
-            <a:schemeClr val="lt1"/>
-          </a:fontRef>
-        </p:style>
-        <p:txBody>
-          <a:bodyPr rtlCol="0" anchor="ctr"/>
-          <a:lstStyle/>
-          <a:p>
-            <a:pPr algn="ctr"/>
-          </a:p>
-        </p:txBody>
-      </p:sp>
-      <p:sp>
-        <p:nvSpPr>
-          <p:cNvPr id="15" name="TextBox 14"/>
-          <p:cNvSpPr txBox="1"/>
-          <p:nvPr/>
-        </p:nvSpPr>
-        <p:spPr>
-          <a:xfrm>
-            <a:off x="594360" y="4146804"/>
-            <a:ext cx="438912" cy="438912"/>
-          </a:xfrm>
-          <a:prstGeom prst="rect">
-            <a:avLst/>
-          </a:prstGeom>
-          <a:noFill/>
-        </p:spPr>
-        <p:txBody>
-          <a:bodyPr wrap="square" anchor="ctr"/>
-          <a:lstStyle/>
-          <a:p>
-            <a:pPr algn="ctr"/>
-            <a:r>
-              <a:rPr sz="1600" b="1" i="0">
-                <a:solidFill>
-                  <a:srgbClr val="FFFFFF"/>
-                </a:solidFill>
-                <a:latin typeface="Calibri"/>
-              </a:rPr>
-              <a:t>3</a:t>
-            </a:r>
-          </a:p>
-        </p:txBody>
-      </p:sp>
-      <p:sp>
-        <p:nvSpPr>
-          <p:cNvPr id="16" name="TextBox 15"/>
-          <p:cNvSpPr txBox="1"/>
-          <p:nvPr/>
-        </p:nvSpPr>
-        <p:spPr>
-          <a:xfrm>
-            <a:off x="1188720" y="3931920"/>
-            <a:ext cx="10271455" cy="886968"/>
-          </a:xfrm>
-          <a:prstGeom prst="rect">
-            <a:avLst/>
-          </a:prstGeom>
-          <a:noFill/>
-        </p:spPr>
-        <p:txBody>
-          <a:bodyPr wrap="square" anchor="ctr"/>
-          <a:lstStyle/>
-          <a:p>
-            <a:r>
-              <a:rPr sz="1500" b="1" i="0">
-                <a:solidFill>
-                  <a:srgbClr val="095292"/>
-                </a:solidFill>
-                <a:latin typeface="Calibri"/>
-              </a:rPr>
-              <a:t>Proponer mitigacion SQL.</a:t>
-            </a:r>
-          </a:p>
-        </p:txBody>
-      </p:sp>
-      <p:sp>
-        <p:nvSpPr>
-          <p:cNvPr id="17" name="Rounded Rectangle 16"/>
-          <p:cNvSpPr/>
-          <p:nvPr/>
-        </p:nvSpPr>
-        <p:spPr>
-          <a:xfrm>
-            <a:off x="457200" y="4983480"/>
-            <a:ext cx="11277295" cy="1051560"/>
-          </a:xfrm>
-          <a:prstGeom prst="roundRect">
-            <a:avLst>
-              <a:gd name="adj" fmla="val 12000"/>
-            </a:avLst>
-          </a:prstGeom>
-          <a:solidFill>
-            <a:srgbClr val="E8F4FA"/>
-          </a:solidFill>
-          <a:ln>
-            <a:noFill/>
-          </a:ln>
-        </p:spPr>
-        <p:style>
-          <a:lnRef idx="1">
-            <a:schemeClr val="accent1"/>
-          </a:lnRef>
-          <a:fillRef idx="3">
-            <a:schemeClr val="accent1"/>
-          </a:fillRef>
-          <a:effectRef idx="2">
-            <a:schemeClr val="accent1"/>
-          </a:effectRef>
-          <a:fontRef idx="minor">
-            <a:schemeClr val="lt1"/>
-          </a:fontRef>
-        </p:style>
-        <p:txBody>
-          <a:bodyPr rtlCol="0" anchor="ctr"/>
-          <a:lstStyle/>
-          <a:p>
-            <a:pPr algn="ctr"/>
-          </a:p>
-        </p:txBody>
-      </p:sp>
-      <p:sp>
-        <p:nvSpPr>
-          <p:cNvPr id="18" name="Rounded Rectangle 17"/>
-          <p:cNvSpPr/>
-          <p:nvPr/>
-        </p:nvSpPr>
-        <p:spPr>
-          <a:xfrm>
-            <a:off x="594360" y="5289804"/>
-            <a:ext cx="438912" cy="438912"/>
-          </a:xfrm>
-          <a:prstGeom prst="roundRect">
-            <a:avLst>
-              <a:gd name="adj" fmla="val 12000"/>
-            </a:avLst>
-          </a:prstGeom>
-          <a:solidFill>
-            <a:srgbClr val="095292"/>
-          </a:solidFill>
-          <a:ln>
-            <a:noFill/>
-          </a:ln>
-        </p:spPr>
-        <p:style>
-          <a:lnRef idx="1">
-            <a:schemeClr val="accent1"/>
-          </a:lnRef>
-          <a:fillRef idx="3">
-            <a:schemeClr val="accent1"/>
-          </a:fillRef>
-          <a:effectRef idx="2">
-            <a:schemeClr val="accent1"/>
-          </a:effectRef>
-          <a:fontRef idx="minor">
-            <a:schemeClr val="lt1"/>
-          </a:fontRef>
-        </p:style>
-        <p:txBody>
-          <a:bodyPr rtlCol="0" anchor="ctr"/>
-          <a:lstStyle/>
-          <a:p>
-            <a:pPr algn="ctr"/>
-          </a:p>
-        </p:txBody>
-      </p:sp>
-      <p:sp>
-        <p:nvSpPr>
-          <p:cNvPr id="19" name="TextBox 18"/>
-          <p:cNvSpPr txBox="1"/>
-          <p:nvPr/>
-        </p:nvSpPr>
-        <p:spPr>
-          <a:xfrm>
-            <a:off x="594360" y="5289804"/>
-            <a:ext cx="438912" cy="438912"/>
-          </a:xfrm>
-          <a:prstGeom prst="rect">
-            <a:avLst/>
-          </a:prstGeom>
-          <a:noFill/>
-        </p:spPr>
-        <p:txBody>
-          <a:bodyPr wrap="square" anchor="ctr"/>
-          <a:lstStyle/>
-          <a:p>
-            <a:pPr algn="ctr"/>
-            <a:r>
-              <a:rPr sz="1600" b="1" i="0">
-                <a:solidFill>
-                  <a:srgbClr val="FFFFFF"/>
-                </a:solidFill>
-                <a:latin typeface="Calibri"/>
-              </a:rPr>
-              <a:t>4</a:t>
-            </a:r>
-          </a:p>
-        </p:txBody>
-      </p:sp>
-      <p:sp>
-        <p:nvSpPr>
-          <p:cNvPr id="20" name="TextBox 19"/>
-          <p:cNvSpPr txBox="1"/>
-          <p:nvPr/>
-        </p:nvSpPr>
-        <p:spPr>
-          <a:xfrm>
-            <a:off x="1188720" y="5074920"/>
-            <a:ext cx="10271455" cy="886968"/>
-          </a:xfrm>
-          <a:prstGeom prst="rect">
-            <a:avLst/>
-          </a:prstGeom>
-          <a:noFill/>
-        </p:spPr>
-        <p:txBody>
-          <a:bodyPr wrap="square" anchor="ctr"/>
-          <a:lstStyle/>
-          <a:p>
-            <a:r>
-              <a:rPr sz="1500" b="1" i="0">
-                <a:solidFill>
-                  <a:srgbClr val="095292"/>
-                </a:solidFill>
-                <a:latin typeface="Calibri"/>
-              </a:rPr>
-              <a:t>Anadir seccion al informe PI.</a:t>
-            </a:r>
-          </a:p>
-        </p:txBody>
-      </p:sp>
-      <p:sp>
-        <p:nvSpPr>
-          <p:cNvPr id="21" name="TextBox 20"/>
+          <a:bodyPr wrap="square">
+            <a:spAutoFit/>
+          </a:bodyPr>
+          <a:lstStyle/>
+          <a:p>
+            <a:pPr>
+              <a:spcAft>
+                <a:spcPts val="800"/>
+              </a:spcAft>
+            </a:pPr>
+            <a:r>
+              <a:rPr sz="2000" b="0" i="0">
+                <a:solidFill>
+                  <a:srgbClr val="333333"/>
+                </a:solidFill>
+                <a:latin typeface="Calibri"/>
+              </a:rPr>
+              <a:t>–   </a:t>
+            </a:r>
+            <a:r>
+              <a:rPr sz="2000" b="1" i="0">
+                <a:solidFill>
+                  <a:srgbClr val="333333"/>
+                </a:solidFill>
+                <a:latin typeface="Calibri"/>
+              </a:rPr>
+              <a:t>Objetivo:</a:t>
+            </a:r>
+            <a:r>
+              <a:rPr sz="2000" b="0" i="0">
+                <a:solidFill>
+                  <a:srgbClr val="333333"/>
+                </a:solidFill>
+                <a:latin typeface="Calibri"/>
+              </a:rPr>
+              <a:t> 2 escenarios concurrencia T1/T2 + mitigacion.</a:t>
+            </a:r>
+          </a:p>
+          <a:p>
+            <a:pPr>
+              <a:spcAft>
+                <a:spcPts val="800"/>
+              </a:spcAft>
+            </a:pPr>
+            <a:r>
+              <a:rPr sz="2000" b="0" i="0">
+                <a:solidFill>
+                  <a:srgbClr val="333333"/>
+                </a:solidFill>
+                <a:latin typeface="Calibri"/>
+              </a:rPr>
+              <a:t>–   </a:t>
+            </a:r>
+            <a:r>
+              <a:rPr sz="2000" b="1" i="0">
+                <a:solidFill>
+                  <a:srgbClr val="333333"/>
+                </a:solidFill>
+                <a:latin typeface="Calibri"/>
+              </a:rPr>
+              <a:t>Exito:</a:t>
+            </a:r>
+            <a:r>
+              <a:rPr sz="2000" b="0" i="0">
+                <a:solidFill>
+                  <a:srgbClr val="333333"/>
+                </a:solidFill>
+                <a:latin typeface="Calibri"/>
+              </a:rPr>
+              <a:t> Doble reserva.</a:t>
+            </a:r>
+          </a:p>
+          <a:p>
+            <a:pPr>
+              <a:spcAft>
+                <a:spcPts val="800"/>
+              </a:spcAft>
+            </a:pPr>
+            <a:r>
+              <a:rPr sz="2000" b="0" i="0">
+                <a:solidFill>
+                  <a:srgbClr val="333333"/>
+                </a:solidFill>
+                <a:latin typeface="Calibri"/>
+              </a:rPr>
+              <a:t>–   </a:t>
+            </a:r>
+            <a:r>
+              <a:rPr sz="2000" b="1" i="0">
+                <a:solidFill>
+                  <a:srgbClr val="333333"/>
+                </a:solidFill>
+                <a:latin typeface="Calibri"/>
+              </a:rPr>
+              <a:t>Exito:</a:t>
+            </a:r>
+            <a:r>
+              <a:rPr sz="2000" b="0" i="0">
+                <a:solidFill>
+                  <a:srgbClr val="333333"/>
+                </a:solidFill>
+                <a:latin typeface="Calibri"/>
+              </a:rPr>
+              <a:t> Doble stock.</a:t>
+            </a:r>
+          </a:p>
+          <a:p>
+            <a:pPr>
+              <a:spcAft>
+                <a:spcPts val="800"/>
+              </a:spcAft>
+            </a:pPr>
+            <a:r>
+              <a:rPr sz="2000" b="0" i="0">
+                <a:solidFill>
+                  <a:srgbClr val="333333"/>
+                </a:solidFill>
+                <a:latin typeface="Calibri"/>
+              </a:rPr>
+              <a:t>–   </a:t>
+            </a:r>
+            <a:r>
+              <a:rPr sz="2000" b="1" i="0">
+                <a:solidFill>
+                  <a:srgbClr val="333333"/>
+                </a:solidFill>
+                <a:latin typeface="Calibri"/>
+              </a:rPr>
+              <a:t>Exito:</a:t>
+            </a:r>
+            <a:r>
+              <a:rPr sz="2000" b="0" i="0">
+                <a:solidFill>
+                  <a:srgbClr val="333333"/>
+                </a:solidFill>
+                <a:latin typeface="Calibri"/>
+              </a:rPr>
+              <a:t> Mitigacion SQL.</a:t>
+            </a:r>
+          </a:p>
+          <a:p>
+            <a:pPr>
+              <a:spcAft>
+                <a:spcPts val="800"/>
+              </a:spcAft>
+            </a:pPr>
+            <a:r>
+              <a:rPr sz="2000" b="0" i="0">
+                <a:solidFill>
+                  <a:srgbClr val="333333"/>
+                </a:solidFill>
+                <a:latin typeface="Calibri"/>
+              </a:rPr>
+              <a:t>–   </a:t>
+            </a:r>
+            <a:r>
+              <a:rPr sz="2000" b="1" i="0">
+                <a:solidFill>
+                  <a:srgbClr val="333333"/>
+                </a:solidFill>
+                <a:latin typeface="Calibri"/>
+              </a:rPr>
+              <a:t>Exito:</a:t>
+            </a:r>
+            <a:r>
+              <a:rPr sz="2000" b="0" i="0">
+                <a:solidFill>
+                  <a:srgbClr val="333333"/>
+                </a:solidFill>
+                <a:latin typeface="Calibri"/>
+              </a:rPr>
+              <a:t> Sección informe.</a:t>
+            </a:r>
+          </a:p>
+          <a:p>
+            <a:pPr>
+              <a:spcAft>
+                <a:spcPts val="800"/>
+              </a:spcAft>
+            </a:pPr>
+            <a:r>
+              <a:rPr sz="2000" b="0" i="0">
+                <a:solidFill>
+                  <a:srgbClr val="333333"/>
+                </a:solidFill>
+                <a:latin typeface="Calibri"/>
+              </a:rPr>
+              <a:t>–   </a:t>
+            </a:r>
+            <a:r>
+              <a:rPr sz="2000" b="1" i="0">
+                <a:solidFill>
+                  <a:srgbClr val="333333"/>
+                </a:solidFill>
+                <a:latin typeface="Calibri"/>
+              </a:rPr>
+              <a:t>Exito:</a:t>
+            </a:r>
+            <a:r>
+              <a:rPr sz="2000" b="0" i="0">
+                <a:solidFill>
+                  <a:srgbClr val="333333"/>
+                </a:solidFill>
+                <a:latin typeface="Calibri"/>
+              </a:rPr>
+              <a:t> en la fecha que indique el docente.</a:t>
+            </a:r>
+          </a:p>
+        </p:txBody>
+      </p:sp>
+      <p:sp>
+        <p:nvSpPr>
+          <p:cNvPr id="6" name="TextBox 5"/>
           <p:cNvSpPr txBox="1"/>
           <p:nvPr/>
         </p:nvSpPr>
@@ -10475,154 +9960,21 @@
                 </a:solidFill>
                 <a:latin typeface="Calibri"/>
               </a:rPr>
-              <a:t>Actividad autonoma — pistas (checklist vacio)</a:t>
-            </a:r>
-          </a:p>
-        </p:txBody>
-      </p:sp>
-      <p:sp>
-        <p:nvSpPr>
-          <p:cNvPr id="5" name="Rounded Rectangle 4"/>
-          <p:cNvSpPr/>
-          <p:nvPr/>
-        </p:nvSpPr>
-        <p:spPr>
-          <a:xfrm>
-            <a:off x="457200" y="1261872"/>
-            <a:ext cx="11277295" cy="566928"/>
-          </a:xfrm>
-          <a:prstGeom prst="roundRect">
-            <a:avLst>
-              <a:gd name="adj" fmla="val 12000"/>
-            </a:avLst>
-          </a:prstGeom>
-          <a:solidFill>
-            <a:srgbClr val="F2F2F2"/>
-          </a:solidFill>
-          <a:ln>
-            <a:noFill/>
-          </a:ln>
-        </p:spPr>
-        <p:style>
-          <a:lnRef idx="1">
-            <a:schemeClr val="accent1"/>
-          </a:lnRef>
-          <a:fillRef idx="3">
-            <a:schemeClr val="accent1"/>
-          </a:fillRef>
-          <a:effectRef idx="2">
-            <a:schemeClr val="accent1"/>
-          </a:effectRef>
-          <a:fontRef idx="minor">
-            <a:schemeClr val="lt1"/>
-          </a:fontRef>
-        </p:style>
-        <p:txBody>
-          <a:bodyPr rtlCol="0" anchor="ctr"/>
-          <a:lstStyle/>
-          <a:p>
-            <a:pPr algn="ctr"/>
-          </a:p>
-        </p:txBody>
-      </p:sp>
-      <p:sp>
-        <p:nvSpPr>
-          <p:cNvPr id="6" name="Rectangle 5"/>
-          <p:cNvSpPr/>
-          <p:nvPr/>
-        </p:nvSpPr>
-        <p:spPr>
-          <a:xfrm>
-            <a:off x="640080" y="1408175"/>
-            <a:ext cx="274320" cy="274320"/>
-          </a:xfrm>
-          <a:prstGeom prst="rect">
-            <a:avLst/>
-          </a:prstGeom>
-          <a:solidFill>
-            <a:srgbClr val="FFFFFF"/>
-          </a:solidFill>
-          <a:ln>
-            <a:solidFill>
-              <a:srgbClr val="333333"/>
-            </a:solidFill>
-          </a:ln>
-        </p:spPr>
-        <p:style>
-          <a:lnRef idx="1">
-            <a:schemeClr val="accent1"/>
-          </a:lnRef>
-          <a:fillRef idx="3">
-            <a:schemeClr val="accent1"/>
-          </a:fillRef>
-          <a:effectRef idx="2">
-            <a:schemeClr val="accent1"/>
-          </a:effectRef>
-          <a:fontRef idx="minor">
-            <a:schemeClr val="lt1"/>
-          </a:fontRef>
-        </p:style>
-        <p:txBody>
-          <a:bodyPr rtlCol="0" anchor="ctr"/>
-          <a:lstStyle/>
-          <a:p>
-            <a:pPr algn="ctr"/>
-          </a:p>
-        </p:txBody>
-      </p:sp>
-      <p:sp>
-        <p:nvSpPr>
-          <p:cNvPr id="7" name="Rectangle 6"/>
-          <p:cNvSpPr/>
-          <p:nvPr/>
-        </p:nvSpPr>
-        <p:spPr>
-          <a:xfrm>
-            <a:off x="640080" y="1408175"/>
-            <a:ext cx="73152" cy="274320"/>
-          </a:xfrm>
-          <a:prstGeom prst="rect">
-            <a:avLst/>
-          </a:prstGeom>
-          <a:solidFill>
-            <a:srgbClr val="269CCB"/>
-          </a:solidFill>
-          <a:ln>
-            <a:noFill/>
-          </a:ln>
-        </p:spPr>
-        <p:style>
-          <a:lnRef idx="1">
-            <a:schemeClr val="accent1"/>
-          </a:lnRef>
-          <a:fillRef idx="3">
-            <a:schemeClr val="accent1"/>
-          </a:fillRef>
-          <a:effectRef idx="2">
-            <a:schemeClr val="accent1"/>
-          </a:effectRef>
-          <a:fontRef idx="minor">
-            <a:schemeClr val="lt1"/>
-          </a:fontRef>
-        </p:style>
-        <p:txBody>
-          <a:bodyPr rtlCol="0" anchor="ctr"/>
-          <a:lstStyle/>
-          <a:p>
-            <a:pPr algn="ctr"/>
-          </a:p>
-        </p:txBody>
-      </p:sp>
-      <p:sp>
-        <p:nvSpPr>
-          <p:cNvPr id="8" name="TextBox 7"/>
+              <a:t>Actividad autonoma — escenario / datos de partida</a:t>
+            </a:r>
+          </a:p>
+        </p:txBody>
+      </p:sp>
+      <p:sp>
+        <p:nvSpPr>
+          <p:cNvPr id="5" name="TextBox 4"/>
           <p:cNvSpPr txBox="1"/>
           <p:nvPr/>
         </p:nvSpPr>
         <p:spPr>
           <a:xfrm>
-            <a:off x="1097280" y="1353312"/>
-            <a:ext cx="10362895" cy="402336"/>
+            <a:off x="457200" y="1170432"/>
+            <a:ext cx="11277295" cy="5230368"/>
           </a:xfrm>
           <a:prstGeom prst="rect">
             <a:avLst/>
@@ -10630,354 +9982,31 @@
           <a:noFill/>
         </p:spPr>
         <p:txBody>
-          <a:bodyPr wrap="square" anchor="ctr"/>
-          <a:lstStyle/>
-          <a:p>
-            <a:r>
-              <a:rPr sz="1500" b="0" i="0">
+          <a:bodyPr wrap="square">
+            <a:spAutoFit/>
+          </a:bodyPr>
+          <a:lstStyle/>
+          <a:p>
+            <a:pPr>
+              <a:spcAft>
+                <a:spcPts val="800"/>
+              </a:spcAft>
+            </a:pPr>
+            <a:r>
+              <a:rPr sz="2000" b="0" i="0">
                 <a:solidFill>
                   <a:srgbClr val="333333"/>
                 </a:solidFill>
                 <a:latin typeface="Calibri"/>
               </a:rPr>
-              <a:t>□ Tiempos claros?</a:t>
-            </a:r>
-          </a:p>
-        </p:txBody>
-      </p:sp>
-      <p:sp>
-        <p:nvSpPr>
-          <p:cNvPr id="9" name="Rounded Rectangle 8"/>
-          <p:cNvSpPr/>
-          <p:nvPr/>
-        </p:nvSpPr>
-        <p:spPr>
-          <a:xfrm>
-            <a:off x="457200" y="1938528"/>
-            <a:ext cx="11277295" cy="566928"/>
-          </a:xfrm>
-          <a:prstGeom prst="roundRect">
-            <a:avLst>
-              <a:gd name="adj" fmla="val 12000"/>
-            </a:avLst>
-          </a:prstGeom>
-          <a:solidFill>
-            <a:srgbClr val="F2F2F2"/>
-          </a:solidFill>
-          <a:ln>
-            <a:noFill/>
-          </a:ln>
-        </p:spPr>
-        <p:style>
-          <a:lnRef idx="1">
-            <a:schemeClr val="accent1"/>
-          </a:lnRef>
-          <a:fillRef idx="3">
-            <a:schemeClr val="accent1"/>
-          </a:fillRef>
-          <a:effectRef idx="2">
-            <a:schemeClr val="accent1"/>
-          </a:effectRef>
-          <a:fontRef idx="minor">
-            <a:schemeClr val="lt1"/>
-          </a:fontRef>
-        </p:style>
-        <p:txBody>
-          <a:bodyPr rtlCol="0" anchor="ctr"/>
-          <a:lstStyle/>
-          <a:p>
-            <a:pPr algn="ctr"/>
-          </a:p>
-        </p:txBody>
-      </p:sp>
-      <p:sp>
-        <p:nvSpPr>
-          <p:cNvPr id="10" name="Rectangle 9"/>
-          <p:cNvSpPr/>
-          <p:nvPr/>
-        </p:nvSpPr>
-        <p:spPr>
-          <a:xfrm>
-            <a:off x="640080" y="2084832"/>
-            <a:ext cx="274320" cy="274320"/>
-          </a:xfrm>
-          <a:prstGeom prst="rect">
-            <a:avLst/>
-          </a:prstGeom>
-          <a:solidFill>
-            <a:srgbClr val="FFFFFF"/>
-          </a:solidFill>
-          <a:ln>
-            <a:solidFill>
-              <a:srgbClr val="333333"/>
-            </a:solidFill>
-          </a:ln>
-        </p:spPr>
-        <p:style>
-          <a:lnRef idx="1">
-            <a:schemeClr val="accent1"/>
-          </a:lnRef>
-          <a:fillRef idx="3">
-            <a:schemeClr val="accent1"/>
-          </a:fillRef>
-          <a:effectRef idx="2">
-            <a:schemeClr val="accent1"/>
-          </a:effectRef>
-          <a:fontRef idx="minor">
-            <a:schemeClr val="lt1"/>
-          </a:fontRef>
-        </p:style>
-        <p:txBody>
-          <a:bodyPr rtlCol="0" anchor="ctr"/>
-          <a:lstStyle/>
-          <a:p>
-            <a:pPr algn="ctr"/>
-          </a:p>
-        </p:txBody>
-      </p:sp>
-      <p:sp>
-        <p:nvSpPr>
-          <p:cNvPr id="11" name="Rectangle 10"/>
-          <p:cNvSpPr/>
-          <p:nvPr/>
-        </p:nvSpPr>
-        <p:spPr>
-          <a:xfrm>
-            <a:off x="640080" y="2084832"/>
-            <a:ext cx="73152" cy="274320"/>
-          </a:xfrm>
-          <a:prstGeom prst="rect">
-            <a:avLst/>
-          </a:prstGeom>
-          <a:solidFill>
-            <a:srgbClr val="269CCB"/>
-          </a:solidFill>
-          <a:ln>
-            <a:noFill/>
-          </a:ln>
-        </p:spPr>
-        <p:style>
-          <a:lnRef idx="1">
-            <a:schemeClr val="accent1"/>
-          </a:lnRef>
-          <a:fillRef idx="3">
-            <a:schemeClr val="accent1"/>
-          </a:fillRef>
-          <a:effectRef idx="2">
-            <a:schemeClr val="accent1"/>
-          </a:effectRef>
-          <a:fontRef idx="minor">
-            <a:schemeClr val="lt1"/>
-          </a:fontRef>
-        </p:style>
-        <p:txBody>
-          <a:bodyPr rtlCol="0" anchor="ctr"/>
-          <a:lstStyle/>
-          <a:p>
-            <a:pPr algn="ctr"/>
-          </a:p>
-        </p:txBody>
-      </p:sp>
-      <p:sp>
-        <p:nvSpPr>
-          <p:cNvPr id="12" name="TextBox 11"/>
-          <p:cNvSpPr txBox="1"/>
-          <p:nvPr/>
-        </p:nvSpPr>
-        <p:spPr>
-          <a:xfrm>
-            <a:off x="1097280" y="2029968"/>
-            <a:ext cx="10362895" cy="402336"/>
-          </a:xfrm>
-          <a:prstGeom prst="rect">
-            <a:avLst/>
-          </a:prstGeom>
-          <a:noFill/>
-        </p:spPr>
-        <p:txBody>
-          <a:bodyPr wrap="square" anchor="ctr"/>
-          <a:lstStyle/>
-          <a:p>
-            <a:r>
-              <a:rPr sz="1500" b="0" i="0">
-                <a:solidFill>
-                  <a:srgbClr val="333333"/>
-                </a:solidFill>
-                <a:latin typeface="Calibri"/>
-              </a:rPr>
-              <a:t>□ Mitigacion SQL concreta?</a:t>
-            </a:r>
-          </a:p>
-        </p:txBody>
-      </p:sp>
-      <p:sp>
-        <p:nvSpPr>
-          <p:cNvPr id="13" name="Rounded Rectangle 12"/>
-          <p:cNvSpPr/>
-          <p:nvPr/>
-        </p:nvSpPr>
-        <p:spPr>
-          <a:xfrm>
-            <a:off x="457200" y="2615184"/>
-            <a:ext cx="11277295" cy="566928"/>
-          </a:xfrm>
-          <a:prstGeom prst="roundRect">
-            <a:avLst>
-              <a:gd name="adj" fmla="val 12000"/>
-            </a:avLst>
-          </a:prstGeom>
-          <a:solidFill>
-            <a:srgbClr val="F2F2F2"/>
-          </a:solidFill>
-          <a:ln>
-            <a:noFill/>
-          </a:ln>
-        </p:spPr>
-        <p:style>
-          <a:lnRef idx="1">
-            <a:schemeClr val="accent1"/>
-          </a:lnRef>
-          <a:fillRef idx="3">
-            <a:schemeClr val="accent1"/>
-          </a:fillRef>
-          <a:effectRef idx="2">
-            <a:schemeClr val="accent1"/>
-          </a:effectRef>
-          <a:fontRef idx="minor">
-            <a:schemeClr val="lt1"/>
-          </a:fontRef>
-        </p:style>
-        <p:txBody>
-          <a:bodyPr rtlCol="0" anchor="ctr"/>
-          <a:lstStyle/>
-          <a:p>
-            <a:pPr algn="ctr"/>
-          </a:p>
-        </p:txBody>
-      </p:sp>
-      <p:sp>
-        <p:nvSpPr>
-          <p:cNvPr id="14" name="Rectangle 13"/>
-          <p:cNvSpPr/>
-          <p:nvPr/>
-        </p:nvSpPr>
-        <p:spPr>
-          <a:xfrm>
-            <a:off x="640080" y="2761488"/>
-            <a:ext cx="274320" cy="274320"/>
-          </a:xfrm>
-          <a:prstGeom prst="rect">
-            <a:avLst/>
-          </a:prstGeom>
-          <a:solidFill>
-            <a:srgbClr val="FFFFFF"/>
-          </a:solidFill>
-          <a:ln>
-            <a:solidFill>
-              <a:srgbClr val="333333"/>
-            </a:solidFill>
-          </a:ln>
-        </p:spPr>
-        <p:style>
-          <a:lnRef idx="1">
-            <a:schemeClr val="accent1"/>
-          </a:lnRef>
-          <a:fillRef idx="3">
-            <a:schemeClr val="accent1"/>
-          </a:fillRef>
-          <a:effectRef idx="2">
-            <a:schemeClr val="accent1"/>
-          </a:effectRef>
-          <a:fontRef idx="minor">
-            <a:schemeClr val="lt1"/>
-          </a:fontRef>
-        </p:style>
-        <p:txBody>
-          <a:bodyPr rtlCol="0" anchor="ctr"/>
-          <a:lstStyle/>
-          <a:p>
-            <a:pPr algn="ctr"/>
-          </a:p>
-        </p:txBody>
-      </p:sp>
-      <p:sp>
-        <p:nvSpPr>
-          <p:cNvPr id="15" name="Rectangle 14"/>
-          <p:cNvSpPr/>
-          <p:nvPr/>
-        </p:nvSpPr>
-        <p:spPr>
-          <a:xfrm>
-            <a:off x="640080" y="2761488"/>
-            <a:ext cx="73152" cy="274320"/>
-          </a:xfrm>
-          <a:prstGeom prst="rect">
-            <a:avLst/>
-          </a:prstGeom>
-          <a:solidFill>
-            <a:srgbClr val="269CCB"/>
-          </a:solidFill>
-          <a:ln>
-            <a:noFill/>
-          </a:ln>
-        </p:spPr>
-        <p:style>
-          <a:lnRef idx="1">
-            <a:schemeClr val="accent1"/>
-          </a:lnRef>
-          <a:fillRef idx="3">
-            <a:schemeClr val="accent1"/>
-          </a:fillRef>
-          <a:effectRef idx="2">
-            <a:schemeClr val="accent1"/>
-          </a:effectRef>
-          <a:fontRef idx="minor">
-            <a:schemeClr val="lt1"/>
-          </a:fontRef>
-        </p:style>
-        <p:txBody>
-          <a:bodyPr rtlCol="0" anchor="ctr"/>
-          <a:lstStyle/>
-          <a:p>
-            <a:pPr algn="ctr"/>
-          </a:p>
-        </p:txBody>
-      </p:sp>
-      <p:sp>
-        <p:nvSpPr>
-          <p:cNvPr id="16" name="TextBox 15"/>
-          <p:cNvSpPr txBox="1"/>
-          <p:nvPr/>
-        </p:nvSpPr>
-        <p:spPr>
-          <a:xfrm>
-            <a:off x="1097280" y="2706624"/>
-            <a:ext cx="10362895" cy="402336"/>
-          </a:xfrm>
-          <a:prstGeom prst="rect">
-            <a:avLst/>
-          </a:prstGeom>
-          <a:noFill/>
-        </p:spPr>
-        <p:txBody>
-          <a:bodyPr wrap="square" anchor="ctr"/>
-          <a:lstStyle/>
-          <a:p>
-            <a:r>
-              <a:rPr sz="1500" b="0" i="0">
-                <a:solidFill>
-                  <a:srgbClr val="333333"/>
-                </a:solidFill>
-                <a:latin typeface="Calibri"/>
-              </a:rPr>
-              <a:t>□ Conecta con procs?</a:t>
-            </a:r>
-          </a:p>
-        </p:txBody>
-      </p:sp>
-      <p:sp>
-        <p:nvSpPr>
-          <p:cNvPr id="17" name="TextBox 16"/>
+              <a:t>–   Narrar T1/T2 sobre Cita/Insumo.</a:t>
+            </a:r>
+          </a:p>
+        </p:txBody>
+      </p:sp>
+      <p:sp>
+        <p:nvSpPr>
+          <p:cNvPr id="6" name="TextBox 5"/>
           <p:cNvSpPr txBox="1"/>
           <p:nvPr/>
         </p:nvSpPr>
@@ -11151,21 +10180,111 @@
                 </a:solidFill>
                 <a:latin typeface="Calibri"/>
               </a:rPr>
-              <a:t>Criterios de exito / entregable</a:t>
-            </a:r>
-          </a:p>
-        </p:txBody>
-      </p:sp>
-      <p:sp>
-        <p:nvSpPr>
-          <p:cNvPr id="5" name="TextBox 4"/>
+              <a:t>Actividad autonoma — pasos guiados</a:t>
+            </a:r>
+          </a:p>
+        </p:txBody>
+      </p:sp>
+      <p:sp>
+        <p:nvSpPr>
+          <p:cNvPr id="5" name="Rounded Rectangle 4"/>
+          <p:cNvSpPr/>
+          <p:nvPr/>
+        </p:nvSpPr>
+        <p:spPr>
+          <a:xfrm>
+            <a:off x="457200" y="1554480"/>
+            <a:ext cx="11277295" cy="1051560"/>
+          </a:xfrm>
+          <a:prstGeom prst="roundRect">
+            <a:avLst>
+              <a:gd name="adj" fmla="val 12000"/>
+            </a:avLst>
+          </a:prstGeom>
+          <a:solidFill>
+            <a:srgbClr val="F2F2F2"/>
+          </a:solidFill>
+          <a:ln>
+            <a:noFill/>
+          </a:ln>
+        </p:spPr>
+        <p:style>
+          <a:lnRef idx="1">
+            <a:schemeClr val="accent1"/>
+          </a:lnRef>
+          <a:fillRef idx="3">
+            <a:schemeClr val="accent1"/>
+          </a:fillRef>
+          <a:effectRef idx="2">
+            <a:schemeClr val="accent1"/>
+          </a:effectRef>
+          <a:fontRef idx="minor">
+            <a:schemeClr val="lt1"/>
+          </a:fontRef>
+        </p:style>
+        <p:txBody>
+          <a:bodyPr rtlCol="0" anchor="ctr"/>
+          <a:lstStyle/>
+          <a:p>
+            <a:pPr algn="ctr"/>
+          </a:p>
+        </p:txBody>
+      </p:sp>
+      <p:sp>
+        <p:nvSpPr>
+          <p:cNvPr id="6" name="Rounded Rectangle 5"/>
+          <p:cNvSpPr/>
+          <p:nvPr/>
+        </p:nvSpPr>
+        <p:spPr>
+          <a:xfrm>
+            <a:off x="594360" y="1860804"/>
+            <a:ext cx="438912" cy="438912"/>
+          </a:xfrm>
+          <a:prstGeom prst="roundRect">
+            <a:avLst>
+              <a:gd name="adj" fmla="val 12000"/>
+            </a:avLst>
+          </a:prstGeom>
+          <a:solidFill>
+            <a:srgbClr val="095292"/>
+          </a:solidFill>
+          <a:ln>
+            <a:noFill/>
+          </a:ln>
+        </p:spPr>
+        <p:style>
+          <a:lnRef idx="1">
+            <a:schemeClr val="accent1"/>
+          </a:lnRef>
+          <a:fillRef idx="3">
+            <a:schemeClr val="accent1"/>
+          </a:fillRef>
+          <a:effectRef idx="2">
+            <a:schemeClr val="accent1"/>
+          </a:effectRef>
+          <a:fontRef idx="minor">
+            <a:schemeClr val="lt1"/>
+          </a:fontRef>
+        </p:style>
+        <p:txBody>
+          <a:bodyPr rtlCol="0" anchor="ctr"/>
+          <a:lstStyle/>
+          <a:p>
+            <a:pPr algn="ctr"/>
+          </a:p>
+        </p:txBody>
+      </p:sp>
+      <p:sp>
+        <p:nvSpPr>
+          <p:cNvPr id="7" name="TextBox 6"/>
           <p:cNvSpPr txBox="1"/>
           <p:nvPr/>
         </p:nvSpPr>
         <p:spPr>
           <a:xfrm>
-            <a:off x="457200" y="1170432"/>
-            <a:ext cx="11277295" cy="5230368"/>
+            <a:off x="594360" y="1860804"/>
+            <a:ext cx="438912" cy="438912"/>
           </a:xfrm>
           <a:prstGeom prst="rect">
             <a:avLst/>
@@ -11173,131 +10292,522 @@
           <a:noFill/>
         </p:spPr>
         <p:txBody>
-          <a:bodyPr wrap="square">
-            <a:spAutoFit/>
-          </a:bodyPr>
-          <a:lstStyle/>
-          <a:p>
-            <a:pPr>
-              <a:spcAft>
-                <a:spcPts val="800"/>
-              </a:spcAft>
-            </a:pPr>
-            <a:r>
-              <a:rPr sz="2000" b="0" i="0">
-                <a:solidFill>
-                  <a:srgbClr val="333333"/>
-                </a:solidFill>
-                <a:latin typeface="Calibri"/>
-              </a:rPr>
-              <a:t>–   </a:t>
-            </a:r>
-            <a:r>
-              <a:rPr sz="2000" b="1" i="0">
-                <a:solidFill>
-                  <a:srgbClr val="333333"/>
-                </a:solidFill>
-                <a:latin typeface="Calibri"/>
-              </a:rPr>
-              <a:t>Entregable:</a:t>
-            </a:r>
-            <a:r>
-              <a:rPr sz="2000" b="0" i="0">
-                <a:solidFill>
-                  <a:srgbClr val="333333"/>
-                </a:solidFill>
-                <a:latin typeface="Calibri"/>
-              </a:rPr>
-              <a:t> Informe corto: 2 escenarios (cita doble / stock) + mitigacion</a:t>
-            </a:r>
-          </a:p>
-          <a:p>
-            <a:pPr>
-              <a:spcAft>
-                <a:spcPts val="800"/>
-              </a:spcAft>
-            </a:pPr>
-            <a:r>
-              <a:rPr sz="2000" b="0" i="0">
-                <a:solidFill>
-                  <a:srgbClr val="333333"/>
-                </a:solidFill>
-                <a:latin typeface="Calibri"/>
-              </a:rPr>
-              <a:t>–   Evidencia: el SQL y su salida quedan guardados en cada pregunta de la plataforma del curso.</a:t>
-            </a:r>
-          </a:p>
-          <a:p>
-            <a:pPr>
-              <a:spcAft>
-                <a:spcPts val="800"/>
-              </a:spcAft>
-            </a:pPr>
-            <a:r>
-              <a:rPr sz="2000" b="0" i="0">
-                <a:solidFill>
-                  <a:srgbClr val="333333"/>
-                </a:solidFill>
-                <a:latin typeface="Calibri"/>
-              </a:rPr>
-              <a:t>–   Conserva copia en tu carpeta del PI (los .sql que pide el entregable).</a:t>
-            </a:r>
-          </a:p>
-          <a:p>
-            <a:pPr>
-              <a:spcAft>
-                <a:spcPts val="800"/>
-              </a:spcAft>
-            </a:pPr>
-            <a:r>
-              <a:rPr sz="2000" b="0" i="0">
-                <a:solidFill>
-                  <a:srgbClr val="333333"/>
-                </a:solidFill>
-                <a:latin typeface="Calibri"/>
-              </a:rPr>
-              <a:t>–   Actualizar checklist PI (que criterio de rubrica avanzo).</a:t>
-            </a:r>
-          </a:p>
-          <a:p>
-            <a:pPr>
-              <a:spcAft>
-                <a:spcPts val="800"/>
-              </a:spcAft>
-            </a:pPr>
-            <a:r>
-              <a:rPr sz="2000" b="0" i="0">
-                <a:solidFill>
-                  <a:srgbClr val="333333"/>
-                </a:solidFill>
-                <a:latin typeface="Calibri"/>
-              </a:rPr>
-              <a:t>–   </a:t>
-            </a:r>
-            <a:r>
-              <a:rPr sz="2000" b="1" i="0">
-                <a:solidFill>
-                  <a:srgbClr val="333333"/>
-                </a:solidFill>
-                <a:latin typeface="Calibri"/>
-              </a:rPr>
-              <a:t>Entrega en la plataforma del curso</a:t>
-            </a:r>
-            <a:r>
-              <a:rPr sz="2000" b="0" i="0">
-                <a:solidFill>
-                  <a:srgbClr val="333333"/>
-                </a:solidFill>
-                <a:latin typeface="Calibri"/>
-              </a:rPr>
-              <a:t> — en la fecha que indique el docente.</a:t>
-            </a:r>
-          </a:p>
-        </p:txBody>
-      </p:sp>
-      <p:sp>
-        <p:nvSpPr>
-          <p:cNvPr id="6" name="TextBox 5"/>
+          <a:bodyPr wrap="square" anchor="ctr"/>
+          <a:lstStyle/>
+          <a:p>
+            <a:pPr algn="ctr"/>
+            <a:r>
+              <a:rPr sz="1600" b="1" i="0">
+                <a:solidFill>
+                  <a:srgbClr val="FFFFFF"/>
+                </a:solidFill>
+                <a:latin typeface="Calibri"/>
+              </a:rPr>
+              <a:t>1</a:t>
+            </a:r>
+          </a:p>
+        </p:txBody>
+      </p:sp>
+      <p:sp>
+        <p:nvSpPr>
+          <p:cNvPr id="8" name="TextBox 7"/>
+          <p:cNvSpPr txBox="1"/>
+          <p:nvPr/>
+        </p:nvSpPr>
+        <p:spPr>
+          <a:xfrm>
+            <a:off x="1188720" y="1645920"/>
+            <a:ext cx="10271455" cy="886968"/>
+          </a:xfrm>
+          <a:prstGeom prst="rect">
+            <a:avLst/>
+          </a:prstGeom>
+          <a:noFill/>
+        </p:spPr>
+        <p:txBody>
+          <a:bodyPr wrap="square" anchor="ctr"/>
+          <a:lstStyle/>
+          <a:p>
+            <a:r>
+              <a:rPr sz="1500" b="1" i="0">
+                <a:solidFill>
+                  <a:srgbClr val="095292"/>
+                </a:solidFill>
+                <a:latin typeface="Calibri"/>
+              </a:rPr>
+              <a:t>Describir escenario doble reserva con tiempos T1/T2.</a:t>
+            </a:r>
+          </a:p>
+        </p:txBody>
+      </p:sp>
+      <p:sp>
+        <p:nvSpPr>
+          <p:cNvPr id="9" name="Rounded Rectangle 8"/>
+          <p:cNvSpPr/>
+          <p:nvPr/>
+        </p:nvSpPr>
+        <p:spPr>
+          <a:xfrm>
+            <a:off x="457200" y="2697480"/>
+            <a:ext cx="11277295" cy="1051560"/>
+          </a:xfrm>
+          <a:prstGeom prst="roundRect">
+            <a:avLst>
+              <a:gd name="adj" fmla="val 12000"/>
+            </a:avLst>
+          </a:prstGeom>
+          <a:solidFill>
+            <a:srgbClr val="E8F4FA"/>
+          </a:solidFill>
+          <a:ln>
+            <a:noFill/>
+          </a:ln>
+        </p:spPr>
+        <p:style>
+          <a:lnRef idx="1">
+            <a:schemeClr val="accent1"/>
+          </a:lnRef>
+          <a:fillRef idx="3">
+            <a:schemeClr val="accent1"/>
+          </a:fillRef>
+          <a:effectRef idx="2">
+            <a:schemeClr val="accent1"/>
+          </a:effectRef>
+          <a:fontRef idx="minor">
+            <a:schemeClr val="lt1"/>
+          </a:fontRef>
+        </p:style>
+        <p:txBody>
+          <a:bodyPr rtlCol="0" anchor="ctr"/>
+          <a:lstStyle/>
+          <a:p>
+            <a:pPr algn="ctr"/>
+          </a:p>
+        </p:txBody>
+      </p:sp>
+      <p:sp>
+        <p:nvSpPr>
+          <p:cNvPr id="10" name="Rounded Rectangle 9"/>
+          <p:cNvSpPr/>
+          <p:nvPr/>
+        </p:nvSpPr>
+        <p:spPr>
+          <a:xfrm>
+            <a:off x="594360" y="3003804"/>
+            <a:ext cx="438912" cy="438912"/>
+          </a:xfrm>
+          <a:prstGeom prst="roundRect">
+            <a:avLst>
+              <a:gd name="adj" fmla="val 12000"/>
+            </a:avLst>
+          </a:prstGeom>
+          <a:solidFill>
+            <a:srgbClr val="095292"/>
+          </a:solidFill>
+          <a:ln>
+            <a:noFill/>
+          </a:ln>
+        </p:spPr>
+        <p:style>
+          <a:lnRef idx="1">
+            <a:schemeClr val="accent1"/>
+          </a:lnRef>
+          <a:fillRef idx="3">
+            <a:schemeClr val="accent1"/>
+          </a:fillRef>
+          <a:effectRef idx="2">
+            <a:schemeClr val="accent1"/>
+          </a:effectRef>
+          <a:fontRef idx="minor">
+            <a:schemeClr val="lt1"/>
+          </a:fontRef>
+        </p:style>
+        <p:txBody>
+          <a:bodyPr rtlCol="0" anchor="ctr"/>
+          <a:lstStyle/>
+          <a:p>
+            <a:pPr algn="ctr"/>
+          </a:p>
+        </p:txBody>
+      </p:sp>
+      <p:sp>
+        <p:nvSpPr>
+          <p:cNvPr id="11" name="TextBox 10"/>
+          <p:cNvSpPr txBox="1"/>
+          <p:nvPr/>
+        </p:nvSpPr>
+        <p:spPr>
+          <a:xfrm>
+            <a:off x="594360" y="3003804"/>
+            <a:ext cx="438912" cy="438912"/>
+          </a:xfrm>
+          <a:prstGeom prst="rect">
+            <a:avLst/>
+          </a:prstGeom>
+          <a:noFill/>
+        </p:spPr>
+        <p:txBody>
+          <a:bodyPr wrap="square" anchor="ctr"/>
+          <a:lstStyle/>
+          <a:p>
+            <a:pPr algn="ctr"/>
+            <a:r>
+              <a:rPr sz="1600" b="1" i="0">
+                <a:solidFill>
+                  <a:srgbClr val="FFFFFF"/>
+                </a:solidFill>
+                <a:latin typeface="Calibri"/>
+              </a:rPr>
+              <a:t>2</a:t>
+            </a:r>
+          </a:p>
+        </p:txBody>
+      </p:sp>
+      <p:sp>
+        <p:nvSpPr>
+          <p:cNvPr id="12" name="TextBox 11"/>
+          <p:cNvSpPr txBox="1"/>
+          <p:nvPr/>
+        </p:nvSpPr>
+        <p:spPr>
+          <a:xfrm>
+            <a:off x="1188720" y="2788920"/>
+            <a:ext cx="10271455" cy="886968"/>
+          </a:xfrm>
+          <a:prstGeom prst="rect">
+            <a:avLst/>
+          </a:prstGeom>
+          <a:noFill/>
+        </p:spPr>
+        <p:txBody>
+          <a:bodyPr wrap="square" anchor="ctr"/>
+          <a:lstStyle/>
+          <a:p>
+            <a:r>
+              <a:rPr sz="1500" b="1" i="0">
+                <a:solidFill>
+                  <a:srgbClr val="095292"/>
+                </a:solidFill>
+                <a:latin typeface="Calibri"/>
+              </a:rPr>
+              <a:t>Describir escenario doble descuento de stock.</a:t>
+            </a:r>
+          </a:p>
+        </p:txBody>
+      </p:sp>
+      <p:sp>
+        <p:nvSpPr>
+          <p:cNvPr id="13" name="Rounded Rectangle 12"/>
+          <p:cNvSpPr/>
+          <p:nvPr/>
+        </p:nvSpPr>
+        <p:spPr>
+          <a:xfrm>
+            <a:off x="457200" y="3840480"/>
+            <a:ext cx="11277295" cy="1051560"/>
+          </a:xfrm>
+          <a:prstGeom prst="roundRect">
+            <a:avLst>
+              <a:gd name="adj" fmla="val 12000"/>
+            </a:avLst>
+          </a:prstGeom>
+          <a:solidFill>
+            <a:srgbClr val="F2F2F2"/>
+          </a:solidFill>
+          <a:ln>
+            <a:noFill/>
+          </a:ln>
+        </p:spPr>
+        <p:style>
+          <a:lnRef idx="1">
+            <a:schemeClr val="accent1"/>
+          </a:lnRef>
+          <a:fillRef idx="3">
+            <a:schemeClr val="accent1"/>
+          </a:fillRef>
+          <a:effectRef idx="2">
+            <a:schemeClr val="accent1"/>
+          </a:effectRef>
+          <a:fontRef idx="minor">
+            <a:schemeClr val="lt1"/>
+          </a:fontRef>
+        </p:style>
+        <p:txBody>
+          <a:bodyPr rtlCol="0" anchor="ctr"/>
+          <a:lstStyle/>
+          <a:p>
+            <a:pPr algn="ctr"/>
+          </a:p>
+        </p:txBody>
+      </p:sp>
+      <p:sp>
+        <p:nvSpPr>
+          <p:cNvPr id="14" name="Rounded Rectangle 13"/>
+          <p:cNvSpPr/>
+          <p:nvPr/>
+        </p:nvSpPr>
+        <p:spPr>
+          <a:xfrm>
+            <a:off x="594360" y="4146804"/>
+            <a:ext cx="438912" cy="438912"/>
+          </a:xfrm>
+          <a:prstGeom prst="roundRect">
+            <a:avLst>
+              <a:gd name="adj" fmla="val 12000"/>
+            </a:avLst>
+          </a:prstGeom>
+          <a:solidFill>
+            <a:srgbClr val="095292"/>
+          </a:solidFill>
+          <a:ln>
+            <a:noFill/>
+          </a:ln>
+        </p:spPr>
+        <p:style>
+          <a:lnRef idx="1">
+            <a:schemeClr val="accent1"/>
+          </a:lnRef>
+          <a:fillRef idx="3">
+            <a:schemeClr val="accent1"/>
+          </a:fillRef>
+          <a:effectRef idx="2">
+            <a:schemeClr val="accent1"/>
+          </a:effectRef>
+          <a:fontRef idx="minor">
+            <a:schemeClr val="lt1"/>
+          </a:fontRef>
+        </p:style>
+        <p:txBody>
+          <a:bodyPr rtlCol="0" anchor="ctr"/>
+          <a:lstStyle/>
+          <a:p>
+            <a:pPr algn="ctr"/>
+          </a:p>
+        </p:txBody>
+      </p:sp>
+      <p:sp>
+        <p:nvSpPr>
+          <p:cNvPr id="15" name="TextBox 14"/>
+          <p:cNvSpPr txBox="1"/>
+          <p:nvPr/>
+        </p:nvSpPr>
+        <p:spPr>
+          <a:xfrm>
+            <a:off x="594360" y="4146804"/>
+            <a:ext cx="438912" cy="438912"/>
+          </a:xfrm>
+          <a:prstGeom prst="rect">
+            <a:avLst/>
+          </a:prstGeom>
+          <a:noFill/>
+        </p:spPr>
+        <p:txBody>
+          <a:bodyPr wrap="square" anchor="ctr"/>
+          <a:lstStyle/>
+          <a:p>
+            <a:pPr algn="ctr"/>
+            <a:r>
+              <a:rPr sz="1600" b="1" i="0">
+                <a:solidFill>
+                  <a:srgbClr val="FFFFFF"/>
+                </a:solidFill>
+                <a:latin typeface="Calibri"/>
+              </a:rPr>
+              <a:t>3</a:t>
+            </a:r>
+          </a:p>
+        </p:txBody>
+      </p:sp>
+      <p:sp>
+        <p:nvSpPr>
+          <p:cNvPr id="16" name="TextBox 15"/>
+          <p:cNvSpPr txBox="1"/>
+          <p:nvPr/>
+        </p:nvSpPr>
+        <p:spPr>
+          <a:xfrm>
+            <a:off x="1188720" y="3931920"/>
+            <a:ext cx="10271455" cy="886968"/>
+          </a:xfrm>
+          <a:prstGeom prst="rect">
+            <a:avLst/>
+          </a:prstGeom>
+          <a:noFill/>
+        </p:spPr>
+        <p:txBody>
+          <a:bodyPr wrap="square" anchor="ctr"/>
+          <a:lstStyle/>
+          <a:p>
+            <a:r>
+              <a:rPr sz="1500" b="1" i="0">
+                <a:solidFill>
+                  <a:srgbClr val="095292"/>
+                </a:solidFill>
+                <a:latin typeface="Calibri"/>
+              </a:rPr>
+              <a:t>Proponer mitigacion SQL.</a:t>
+            </a:r>
+          </a:p>
+        </p:txBody>
+      </p:sp>
+      <p:sp>
+        <p:nvSpPr>
+          <p:cNvPr id="17" name="Rounded Rectangle 16"/>
+          <p:cNvSpPr/>
+          <p:nvPr/>
+        </p:nvSpPr>
+        <p:spPr>
+          <a:xfrm>
+            <a:off x="457200" y="4983480"/>
+            <a:ext cx="11277295" cy="1051560"/>
+          </a:xfrm>
+          <a:prstGeom prst="roundRect">
+            <a:avLst>
+              <a:gd name="adj" fmla="val 12000"/>
+            </a:avLst>
+          </a:prstGeom>
+          <a:solidFill>
+            <a:srgbClr val="E8F4FA"/>
+          </a:solidFill>
+          <a:ln>
+            <a:noFill/>
+          </a:ln>
+        </p:spPr>
+        <p:style>
+          <a:lnRef idx="1">
+            <a:schemeClr val="accent1"/>
+          </a:lnRef>
+          <a:fillRef idx="3">
+            <a:schemeClr val="accent1"/>
+          </a:fillRef>
+          <a:effectRef idx="2">
+            <a:schemeClr val="accent1"/>
+          </a:effectRef>
+          <a:fontRef idx="minor">
+            <a:schemeClr val="lt1"/>
+          </a:fontRef>
+        </p:style>
+        <p:txBody>
+          <a:bodyPr rtlCol="0" anchor="ctr"/>
+          <a:lstStyle/>
+          <a:p>
+            <a:pPr algn="ctr"/>
+          </a:p>
+        </p:txBody>
+      </p:sp>
+      <p:sp>
+        <p:nvSpPr>
+          <p:cNvPr id="18" name="Rounded Rectangle 17"/>
+          <p:cNvSpPr/>
+          <p:nvPr/>
+        </p:nvSpPr>
+        <p:spPr>
+          <a:xfrm>
+            <a:off x="594360" y="5289804"/>
+            <a:ext cx="438912" cy="438912"/>
+          </a:xfrm>
+          <a:prstGeom prst="roundRect">
+            <a:avLst>
+              <a:gd name="adj" fmla="val 12000"/>
+            </a:avLst>
+          </a:prstGeom>
+          <a:solidFill>
+            <a:srgbClr val="095292"/>
+          </a:solidFill>
+          <a:ln>
+            <a:noFill/>
+          </a:ln>
+        </p:spPr>
+        <p:style>
+          <a:lnRef idx="1">
+            <a:schemeClr val="accent1"/>
+          </a:lnRef>
+          <a:fillRef idx="3">
+            <a:schemeClr val="accent1"/>
+          </a:fillRef>
+          <a:effectRef idx="2">
+            <a:schemeClr val="accent1"/>
+          </a:effectRef>
+          <a:fontRef idx="minor">
+            <a:schemeClr val="lt1"/>
+          </a:fontRef>
+        </p:style>
+        <p:txBody>
+          <a:bodyPr rtlCol="0" anchor="ctr"/>
+          <a:lstStyle/>
+          <a:p>
+            <a:pPr algn="ctr"/>
+          </a:p>
+        </p:txBody>
+      </p:sp>
+      <p:sp>
+        <p:nvSpPr>
+          <p:cNvPr id="19" name="TextBox 18"/>
+          <p:cNvSpPr txBox="1"/>
+          <p:nvPr/>
+        </p:nvSpPr>
+        <p:spPr>
+          <a:xfrm>
+            <a:off x="594360" y="5289804"/>
+            <a:ext cx="438912" cy="438912"/>
+          </a:xfrm>
+          <a:prstGeom prst="rect">
+            <a:avLst/>
+          </a:prstGeom>
+          <a:noFill/>
+        </p:spPr>
+        <p:txBody>
+          <a:bodyPr wrap="square" anchor="ctr"/>
+          <a:lstStyle/>
+          <a:p>
+            <a:pPr algn="ctr"/>
+            <a:r>
+              <a:rPr sz="1600" b="1" i="0">
+                <a:solidFill>
+                  <a:srgbClr val="FFFFFF"/>
+                </a:solidFill>
+                <a:latin typeface="Calibri"/>
+              </a:rPr>
+              <a:t>4</a:t>
+            </a:r>
+          </a:p>
+        </p:txBody>
+      </p:sp>
+      <p:sp>
+        <p:nvSpPr>
+          <p:cNvPr id="20" name="TextBox 19"/>
+          <p:cNvSpPr txBox="1"/>
+          <p:nvPr/>
+        </p:nvSpPr>
+        <p:spPr>
+          <a:xfrm>
+            <a:off x="1188720" y="5074920"/>
+            <a:ext cx="10271455" cy="886968"/>
+          </a:xfrm>
+          <a:prstGeom prst="rect">
+            <a:avLst/>
+          </a:prstGeom>
+          <a:noFill/>
+        </p:spPr>
+        <p:txBody>
+          <a:bodyPr wrap="square" anchor="ctr"/>
+          <a:lstStyle/>
+          <a:p>
+            <a:r>
+              <a:rPr sz="1500" b="1" i="0">
+                <a:solidFill>
+                  <a:srgbClr val="095292"/>
+                </a:solidFill>
+                <a:latin typeface="Calibri"/>
+              </a:rPr>
+              <a:t>Anadir seccion al informe PI.</a:t>
+            </a:r>
+          </a:p>
+        </p:txBody>
+      </p:sp>
+      <p:sp>
+        <p:nvSpPr>
+          <p:cNvPr id="21" name="TextBox 20"/>
           <p:cNvSpPr txBox="1"/>
           <p:nvPr/>
         </p:nvSpPr>
@@ -11471,7 +10981,7 @@
                 </a:solidFill>
                 <a:latin typeface="Calibri"/>
               </a:rPr>
-              <a:t>Para el PI esta semana</a:t>
+              <a:t>Actividad autonoma — pistas (checklist vacio)</a:t>
             </a:r>
           </a:p>
         </p:txBody>
@@ -11485,7 +10995,7 @@
         <p:spPr>
           <a:xfrm>
             <a:off x="457200" y="1261872"/>
-            <a:ext cx="11277295" cy="1051560"/>
+            <a:ext cx="11277295" cy="566928"/>
           </a:xfrm>
           <a:prstGeom prst="roundRect">
             <a:avLst>
@@ -11493,7 +11003,7 @@
             </a:avLst>
           </a:prstGeom>
           <a:solidFill>
-            <a:srgbClr val="E8F4FA"/>
+            <a:srgbClr val="F2F2F2"/>
           </a:solidFill>
           <a:ln>
             <a:noFill/>
@@ -11529,8 +11039,53 @@
         </p:nvSpPr>
         <p:spPr>
           <a:xfrm>
-            <a:off x="457200" y="1261872"/>
-            <a:ext cx="128016" cy="1051560"/>
+            <a:off x="640080" y="1408175"/>
+            <a:ext cx="274320" cy="274320"/>
+          </a:xfrm>
+          <a:prstGeom prst="rect">
+            <a:avLst/>
+          </a:prstGeom>
+          <a:solidFill>
+            <a:srgbClr val="FFFFFF"/>
+          </a:solidFill>
+          <a:ln>
+            <a:solidFill>
+              <a:srgbClr val="333333"/>
+            </a:solidFill>
+          </a:ln>
+        </p:spPr>
+        <p:style>
+          <a:lnRef idx="1">
+            <a:schemeClr val="accent1"/>
+          </a:lnRef>
+          <a:fillRef idx="3">
+            <a:schemeClr val="accent1"/>
+          </a:fillRef>
+          <a:effectRef idx="2">
+            <a:schemeClr val="accent1"/>
+          </a:effectRef>
+          <a:fontRef idx="minor">
+            <a:schemeClr val="lt1"/>
+          </a:fontRef>
+        </p:style>
+        <p:txBody>
+          <a:bodyPr rtlCol="0" anchor="ctr"/>
+          <a:lstStyle/>
+          <a:p>
+            <a:pPr algn="ctr"/>
+          </a:p>
+        </p:txBody>
+      </p:sp>
+      <p:sp>
+        <p:nvSpPr>
+          <p:cNvPr id="7" name="Rectangle 6"/>
+          <p:cNvSpPr/>
+          <p:nvPr/>
+        </p:nvSpPr>
+        <p:spPr>
+          <a:xfrm>
+            <a:off x="640080" y="1408175"/>
+            <a:ext cx="73152" cy="274320"/>
           </a:xfrm>
           <a:prstGeom prst="rect">
             <a:avLst/>
@@ -11566,14 +11121,14 @@
       </p:sp>
       <p:sp>
         <p:nvSpPr>
-          <p:cNvPr id="7" name="TextBox 6"/>
+          <p:cNvPr id="8" name="TextBox 7"/>
           <p:cNvSpPr txBox="1"/>
           <p:nvPr/>
         </p:nvSpPr>
         <p:spPr>
           <a:xfrm>
-            <a:off x="777240" y="1399031"/>
-            <a:ext cx="10774375" cy="822959"/>
+            <a:off x="1097280" y="1353312"/>
+            <a:ext cx="10362895" cy="402336"/>
           </a:xfrm>
           <a:prstGeom prst="rect">
             <a:avLst/>
@@ -11581,49 +11136,31 @@
           <a:noFill/>
         </p:spPr>
         <p:txBody>
-          <a:bodyPr wrap="square">
-            <a:spAutoFit/>
-          </a:bodyPr>
-          <a:lstStyle/>
-          <a:p>
-            <a:r>
-              <a:rPr sz="1200" b="1" i="0">
-                <a:solidFill>
-                  <a:srgbClr val="269CCB"/>
-                </a:solidFill>
-                <a:latin typeface="Calibri"/>
-              </a:rPr>
-              <a:t>Info</a:t>
-            </a:r>
-          </a:p>
-          <a:p>
-            <a:pPr>
-              <a:spcBef>
-                <a:spcPts val="400"/>
-              </a:spcBef>
-            </a:pPr>
-            <a:r>
-              <a:rPr sz="1400" b="0" i="0">
+          <a:bodyPr wrap="square" anchor="ctr"/>
+          <a:lstStyle/>
+          <a:p>
+            <a:r>
+              <a:rPr sz="1500" b="0" i="0">
                 <a:solidFill>
                   <a:srgbClr val="333333"/>
                 </a:solidFill>
                 <a:latin typeface="Calibri"/>
               </a:rPr>
-              <a:t>Hito: Escenarios de concurrencia del PI documentados</a:t>
-            </a:r>
-          </a:p>
-        </p:txBody>
-      </p:sp>
-      <p:sp>
-        <p:nvSpPr>
-          <p:cNvPr id="8" name="Rounded Rectangle 7"/>
+              <a:t>□ Tiempos claros?</a:t>
+            </a:r>
+          </a:p>
+        </p:txBody>
+      </p:sp>
+      <p:sp>
+        <p:nvSpPr>
+          <p:cNvPr id="9" name="Rounded Rectangle 8"/>
           <p:cNvSpPr/>
           <p:nvPr/>
         </p:nvSpPr>
         <p:spPr>
           <a:xfrm>
-            <a:off x="457200" y="2478024"/>
-            <a:ext cx="11277295" cy="1051560"/>
+            <a:off x="457200" y="1938528"/>
+            <a:ext cx="11277295" cy="566928"/>
           </a:xfrm>
           <a:prstGeom prst="roundRect">
             <a:avLst>
@@ -11631,7 +11168,7 @@
             </a:avLst>
           </a:prstGeom>
           <a:solidFill>
-            <a:srgbClr val="FFF8E1"/>
+            <a:srgbClr val="F2F2F2"/>
           </a:solidFill>
           <a:ln>
             <a:noFill/>
@@ -11661,23 +11198,25 @@
       </p:sp>
       <p:sp>
         <p:nvSpPr>
-          <p:cNvPr id="9" name="Rectangle 8"/>
+          <p:cNvPr id="10" name="Rectangle 9"/>
           <p:cNvSpPr/>
           <p:nvPr/>
         </p:nvSpPr>
         <p:spPr>
           <a:xfrm>
-            <a:off x="457200" y="2478024"/>
-            <a:ext cx="128016" cy="1051560"/>
+            <a:off x="640080" y="2084832"/>
+            <a:ext cx="274320" cy="274320"/>
           </a:xfrm>
           <a:prstGeom prst="rect">
             <a:avLst/>
           </a:prstGeom>
           <a:solidFill>
-            <a:srgbClr val="FFD000"/>
+            <a:srgbClr val="FFFFFF"/>
           </a:solidFill>
           <a:ln>
-            <a:noFill/>
+            <a:solidFill>
+              <a:srgbClr val="333333"/>
+            </a:solidFill>
           </a:ln>
         </p:spPr>
         <p:style>
@@ -11704,72 +11243,20 @@
       </p:sp>
       <p:sp>
         <p:nvSpPr>
-          <p:cNvPr id="10" name="TextBox 9"/>
-          <p:cNvSpPr txBox="1"/>
-          <p:nvPr/>
-        </p:nvSpPr>
-        <p:spPr>
-          <a:xfrm>
-            <a:off x="777240" y="2615184"/>
-            <a:ext cx="10774375" cy="822959"/>
-          </a:xfrm>
-          <a:prstGeom prst="rect">
-            <a:avLst/>
-          </a:prstGeom>
-          <a:noFill/>
-        </p:spPr>
-        <p:txBody>
-          <a:bodyPr wrap="square">
-            <a:spAutoFit/>
-          </a:bodyPr>
-          <a:lstStyle/>
-          <a:p>
-            <a:r>
-              <a:rPr sz="1200" b="1" i="0">
-                <a:solidFill>
-                  <a:srgbClr val="FFD000"/>
-                </a:solidFill>
-                <a:latin typeface="Calibri"/>
-              </a:rPr>
-              <a:t>Aclaración</a:t>
-            </a:r>
-          </a:p>
-          <a:p>
-            <a:pPr>
-              <a:spcBef>
-                <a:spcPts val="400"/>
-              </a:spcBef>
-            </a:pPr>
-            <a:r>
-              <a:rPr sz="1400" b="0" i="0">
-                <a:solidFill>
-                  <a:srgbClr val="333333"/>
-                </a:solidFill>
-                <a:latin typeface="Calibri"/>
-              </a:rPr>
-              <a:t>Enunciado completo: Clases/Proyecto Integrador/ (VetCare DB).</a:t>
-            </a:r>
-          </a:p>
-        </p:txBody>
-      </p:sp>
-      <p:sp>
-        <p:nvSpPr>
-          <p:cNvPr id="11" name="Rounded Rectangle 10"/>
+          <p:cNvPr id="11" name="Rectangle 10"/>
           <p:cNvSpPr/>
           <p:nvPr/>
         </p:nvSpPr>
         <p:spPr>
           <a:xfrm>
-            <a:off x="457200" y="3694176"/>
-            <a:ext cx="11277295" cy="1051560"/>
-          </a:xfrm>
-          <a:prstGeom prst="roundRect">
-            <a:avLst>
-              <a:gd name="adj" fmla="val 12000"/>
-            </a:avLst>
+            <a:off x="640080" y="2084832"/>
+            <a:ext cx="73152" cy="274320"/>
+          </a:xfrm>
+          <a:prstGeom prst="rect">
+            <a:avLst/>
           </a:prstGeom>
           <a:solidFill>
-            <a:srgbClr val="FBE4E4"/>
+            <a:srgbClr val="269CCB"/>
           </a:solidFill>
           <a:ln>
             <a:noFill/>
@@ -11799,20 +11286,54 @@
       </p:sp>
       <p:sp>
         <p:nvSpPr>
-          <p:cNvPr id="12" name="Rectangle 11"/>
+          <p:cNvPr id="12" name="TextBox 11"/>
+          <p:cNvSpPr txBox="1"/>
+          <p:nvPr/>
+        </p:nvSpPr>
+        <p:spPr>
+          <a:xfrm>
+            <a:off x="1097280" y="2029968"/>
+            <a:ext cx="10362895" cy="402336"/>
+          </a:xfrm>
+          <a:prstGeom prst="rect">
+            <a:avLst/>
+          </a:prstGeom>
+          <a:noFill/>
+        </p:spPr>
+        <p:txBody>
+          <a:bodyPr wrap="square" anchor="ctr"/>
+          <a:lstStyle/>
+          <a:p>
+            <a:r>
+              <a:rPr sz="1500" b="0" i="0">
+                <a:solidFill>
+                  <a:srgbClr val="333333"/>
+                </a:solidFill>
+                <a:latin typeface="Calibri"/>
+              </a:rPr>
+              <a:t>□ Mitigacion SQL concreta?</a:t>
+            </a:r>
+          </a:p>
+        </p:txBody>
+      </p:sp>
+      <p:sp>
+        <p:nvSpPr>
+          <p:cNvPr id="13" name="Rounded Rectangle 12"/>
           <p:cNvSpPr/>
           <p:nvPr/>
         </p:nvSpPr>
         <p:spPr>
           <a:xfrm>
-            <a:off x="457200" y="3694176"/>
-            <a:ext cx="128016" cy="1051560"/>
-          </a:xfrm>
-          <a:prstGeom prst="rect">
-            <a:avLst/>
+            <a:off x="457200" y="2615184"/>
+            <a:ext cx="11277295" cy="566928"/>
+          </a:xfrm>
+          <a:prstGeom prst="roundRect">
+            <a:avLst>
+              <a:gd name="adj" fmla="val 12000"/>
+            </a:avLst>
           </a:prstGeom>
           <a:solidFill>
-            <a:srgbClr val="A02030"/>
+            <a:srgbClr val="F2F2F2"/>
           </a:solidFill>
           <a:ln>
             <a:noFill/>
@@ -11842,14 +11363,102 @@
       </p:sp>
       <p:sp>
         <p:nvSpPr>
-          <p:cNvPr id="13" name="TextBox 12"/>
+          <p:cNvPr id="14" name="Rectangle 13"/>
+          <p:cNvSpPr/>
+          <p:nvPr/>
+        </p:nvSpPr>
+        <p:spPr>
+          <a:xfrm>
+            <a:off x="640080" y="2761488"/>
+            <a:ext cx="274320" cy="274320"/>
+          </a:xfrm>
+          <a:prstGeom prst="rect">
+            <a:avLst/>
+          </a:prstGeom>
+          <a:solidFill>
+            <a:srgbClr val="FFFFFF"/>
+          </a:solidFill>
+          <a:ln>
+            <a:solidFill>
+              <a:srgbClr val="333333"/>
+            </a:solidFill>
+          </a:ln>
+        </p:spPr>
+        <p:style>
+          <a:lnRef idx="1">
+            <a:schemeClr val="accent1"/>
+          </a:lnRef>
+          <a:fillRef idx="3">
+            <a:schemeClr val="accent1"/>
+          </a:fillRef>
+          <a:effectRef idx="2">
+            <a:schemeClr val="accent1"/>
+          </a:effectRef>
+          <a:fontRef idx="minor">
+            <a:schemeClr val="lt1"/>
+          </a:fontRef>
+        </p:style>
+        <p:txBody>
+          <a:bodyPr rtlCol="0" anchor="ctr"/>
+          <a:lstStyle/>
+          <a:p>
+            <a:pPr algn="ctr"/>
+          </a:p>
+        </p:txBody>
+      </p:sp>
+      <p:sp>
+        <p:nvSpPr>
+          <p:cNvPr id="15" name="Rectangle 14"/>
+          <p:cNvSpPr/>
+          <p:nvPr/>
+        </p:nvSpPr>
+        <p:spPr>
+          <a:xfrm>
+            <a:off x="640080" y="2761488"/>
+            <a:ext cx="73152" cy="274320"/>
+          </a:xfrm>
+          <a:prstGeom prst="rect">
+            <a:avLst/>
+          </a:prstGeom>
+          <a:solidFill>
+            <a:srgbClr val="269CCB"/>
+          </a:solidFill>
+          <a:ln>
+            <a:noFill/>
+          </a:ln>
+        </p:spPr>
+        <p:style>
+          <a:lnRef idx="1">
+            <a:schemeClr val="accent1"/>
+          </a:lnRef>
+          <a:fillRef idx="3">
+            <a:schemeClr val="accent1"/>
+          </a:fillRef>
+          <a:effectRef idx="2">
+            <a:schemeClr val="accent1"/>
+          </a:effectRef>
+          <a:fontRef idx="minor">
+            <a:schemeClr val="lt1"/>
+          </a:fontRef>
+        </p:style>
+        <p:txBody>
+          <a:bodyPr rtlCol="0" anchor="ctr"/>
+          <a:lstStyle/>
+          <a:p>
+            <a:pPr algn="ctr"/>
+          </a:p>
+        </p:txBody>
+      </p:sp>
+      <p:sp>
+        <p:nvSpPr>
+          <p:cNvPr id="16" name="TextBox 15"/>
           <p:cNvSpPr txBox="1"/>
           <p:nvPr/>
         </p:nvSpPr>
         <p:spPr>
           <a:xfrm>
-            <a:off x="777240" y="3831336"/>
-            <a:ext cx="10774375" cy="822959"/>
+            <a:off x="1097280" y="2706624"/>
+            <a:ext cx="10362895" cy="402336"/>
           </a:xfrm>
           <a:prstGeom prst="rect">
             <a:avLst/>
@@ -11857,42 +11466,24 @@
           <a:noFill/>
         </p:spPr>
         <p:txBody>
-          <a:bodyPr wrap="square">
-            <a:spAutoFit/>
-          </a:bodyPr>
-          <a:lstStyle/>
-          <a:p>
-            <a:r>
-              <a:rPr sz="1200" b="1" i="0">
-                <a:solidFill>
-                  <a:srgbClr val="A02030"/>
-                </a:solidFill>
-                <a:latin typeface="Calibri"/>
-              </a:rPr>
-              <a:t>Atención</a:t>
-            </a:r>
-          </a:p>
-          <a:p>
-            <a:pPr>
-              <a:spcBef>
-                <a:spcPts val="400"/>
-              </a:spcBef>
-            </a:pPr>
-            <a:r>
-              <a:rPr sz="1400" b="0" i="0">
+          <a:bodyPr wrap="square" anchor="ctr"/>
+          <a:lstStyle/>
+          <a:p>
+            <a:r>
+              <a:rPr sz="1500" b="0" i="0">
                 <a:solidFill>
                   <a:srgbClr val="333333"/>
                 </a:solidFill>
                 <a:latin typeface="Calibri"/>
               </a:rPr>
-              <a:t>Si el docente asigna taller esta semana, él indica el canal y la fecha.</a:t>
-            </a:r>
-          </a:p>
-        </p:txBody>
-      </p:sp>
-      <p:sp>
-        <p:nvSpPr>
-          <p:cNvPr id="14" name="TextBox 13"/>
+              <a:t>□ Conecta con procs?</a:t>
+            </a:r>
+          </a:p>
+        </p:txBody>
+      </p:sp>
+      <p:sp>
+        <p:nvSpPr>
+          <p:cNvPr id="17" name="TextBox 16"/>
           <p:cNvSpPr txBox="1"/>
           <p:nvPr/>
         </p:nvSpPr>
@@ -12812,6 +12403,921 @@
         <p:spPr>
           <a:xfrm>
             <a:off x="0" y="0"/>
+            <a:ext cx="12191695" cy="960120"/>
+          </a:xfrm>
+          <a:prstGeom prst="rect">
+            <a:avLst/>
+          </a:prstGeom>
+          <a:solidFill>
+            <a:srgbClr val="095292"/>
+          </a:solidFill>
+          <a:ln>
+            <a:noFill/>
+          </a:ln>
+        </p:spPr>
+        <p:style>
+          <a:lnRef idx="1">
+            <a:schemeClr val="accent1"/>
+          </a:lnRef>
+          <a:fillRef idx="3">
+            <a:schemeClr val="accent1"/>
+          </a:fillRef>
+          <a:effectRef idx="2">
+            <a:schemeClr val="accent1"/>
+          </a:effectRef>
+          <a:fontRef idx="minor">
+            <a:schemeClr val="lt1"/>
+          </a:fontRef>
+        </p:style>
+        <p:txBody>
+          <a:bodyPr rtlCol="0" anchor="ctr"/>
+          <a:lstStyle/>
+          <a:p>
+            <a:pPr algn="ctr"/>
+          </a:p>
+        </p:txBody>
+      </p:sp>
+      <p:sp>
+        <p:nvSpPr>
+          <p:cNvPr id="3" name="Rectangle 2"/>
+          <p:cNvSpPr/>
+          <p:nvPr/>
+        </p:nvSpPr>
+        <p:spPr>
+          <a:xfrm>
+            <a:off x="0" y="960120"/>
+            <a:ext cx="12191695" cy="41148"/>
+          </a:xfrm>
+          <a:prstGeom prst="rect">
+            <a:avLst/>
+          </a:prstGeom>
+          <a:solidFill>
+            <a:srgbClr val="FFD000"/>
+          </a:solidFill>
+          <a:ln>
+            <a:noFill/>
+          </a:ln>
+        </p:spPr>
+        <p:style>
+          <a:lnRef idx="1">
+            <a:schemeClr val="accent1"/>
+          </a:lnRef>
+          <a:fillRef idx="3">
+            <a:schemeClr val="accent1"/>
+          </a:fillRef>
+          <a:effectRef idx="2">
+            <a:schemeClr val="accent1"/>
+          </a:effectRef>
+          <a:fontRef idx="minor">
+            <a:schemeClr val="lt1"/>
+          </a:fontRef>
+        </p:style>
+        <p:txBody>
+          <a:bodyPr rtlCol="0" anchor="ctr"/>
+          <a:lstStyle/>
+          <a:p>
+            <a:pPr algn="ctr"/>
+          </a:p>
+        </p:txBody>
+      </p:sp>
+      <p:sp>
+        <p:nvSpPr>
+          <p:cNvPr id="4" name="TextBox 3"/>
+          <p:cNvSpPr txBox="1"/>
+          <p:nvPr/>
+        </p:nvSpPr>
+        <p:spPr>
+          <a:xfrm>
+            <a:off x="457200" y="164592"/>
+            <a:ext cx="11277295" cy="502920"/>
+          </a:xfrm>
+          <a:prstGeom prst="rect">
+            <a:avLst/>
+          </a:prstGeom>
+          <a:noFill/>
+        </p:spPr>
+        <p:txBody>
+          <a:bodyPr wrap="square">
+            <a:spAutoFit/>
+          </a:bodyPr>
+          <a:lstStyle/>
+          <a:p>
+            <a:r>
+              <a:rPr sz="2600" b="1" i="0">
+                <a:solidFill>
+                  <a:srgbClr val="FFFFFF"/>
+                </a:solidFill>
+                <a:latin typeface="Calibri"/>
+              </a:rPr>
+              <a:t>Criterios de exito / entregable</a:t>
+            </a:r>
+          </a:p>
+        </p:txBody>
+      </p:sp>
+      <p:sp>
+        <p:nvSpPr>
+          <p:cNvPr id="5" name="TextBox 4"/>
+          <p:cNvSpPr txBox="1"/>
+          <p:nvPr/>
+        </p:nvSpPr>
+        <p:spPr>
+          <a:xfrm>
+            <a:off x="457200" y="1170432"/>
+            <a:ext cx="11277295" cy="5230368"/>
+          </a:xfrm>
+          <a:prstGeom prst="rect">
+            <a:avLst/>
+          </a:prstGeom>
+          <a:noFill/>
+        </p:spPr>
+        <p:txBody>
+          <a:bodyPr wrap="square">
+            <a:spAutoFit/>
+          </a:bodyPr>
+          <a:lstStyle/>
+          <a:p>
+            <a:pPr>
+              <a:spcAft>
+                <a:spcPts val="800"/>
+              </a:spcAft>
+            </a:pPr>
+            <a:r>
+              <a:rPr sz="2000" b="0" i="0">
+                <a:solidFill>
+                  <a:srgbClr val="333333"/>
+                </a:solidFill>
+                <a:latin typeface="Calibri"/>
+              </a:rPr>
+              <a:t>–   </a:t>
+            </a:r>
+            <a:r>
+              <a:rPr sz="2000" b="1" i="0">
+                <a:solidFill>
+                  <a:srgbClr val="333333"/>
+                </a:solidFill>
+                <a:latin typeface="Calibri"/>
+              </a:rPr>
+              <a:t>Entregable:</a:t>
+            </a:r>
+            <a:r>
+              <a:rPr sz="2000" b="0" i="0">
+                <a:solidFill>
+                  <a:srgbClr val="333333"/>
+                </a:solidFill>
+                <a:latin typeface="Calibri"/>
+              </a:rPr>
+              <a:t> Informe corto: 2 escenarios (cita doble / stock) + mitigacion</a:t>
+            </a:r>
+          </a:p>
+          <a:p>
+            <a:pPr>
+              <a:spcAft>
+                <a:spcPts val="800"/>
+              </a:spcAft>
+            </a:pPr>
+            <a:r>
+              <a:rPr sz="2000" b="0" i="0">
+                <a:solidFill>
+                  <a:srgbClr val="333333"/>
+                </a:solidFill>
+                <a:latin typeface="Calibri"/>
+              </a:rPr>
+              <a:t>–   Evidencia: el SQL y su salida quedan guardados en cada pregunta de la plataforma del curso.</a:t>
+            </a:r>
+          </a:p>
+          <a:p>
+            <a:pPr>
+              <a:spcAft>
+                <a:spcPts val="800"/>
+              </a:spcAft>
+            </a:pPr>
+            <a:r>
+              <a:rPr sz="2000" b="0" i="0">
+                <a:solidFill>
+                  <a:srgbClr val="333333"/>
+                </a:solidFill>
+                <a:latin typeface="Calibri"/>
+              </a:rPr>
+              <a:t>–   Conserva copia en tu carpeta del PI (los .sql que pide el entregable).</a:t>
+            </a:r>
+          </a:p>
+          <a:p>
+            <a:pPr>
+              <a:spcAft>
+                <a:spcPts val="800"/>
+              </a:spcAft>
+            </a:pPr>
+            <a:r>
+              <a:rPr sz="2000" b="0" i="0">
+                <a:solidFill>
+                  <a:srgbClr val="333333"/>
+                </a:solidFill>
+                <a:latin typeface="Calibri"/>
+              </a:rPr>
+              <a:t>–   Actualizar checklist PI (que criterio de rubrica avanzo).</a:t>
+            </a:r>
+          </a:p>
+          <a:p>
+            <a:pPr>
+              <a:spcAft>
+                <a:spcPts val="800"/>
+              </a:spcAft>
+            </a:pPr>
+            <a:r>
+              <a:rPr sz="2000" b="0" i="0">
+                <a:solidFill>
+                  <a:srgbClr val="333333"/>
+                </a:solidFill>
+                <a:latin typeface="Calibri"/>
+              </a:rPr>
+              <a:t>–   </a:t>
+            </a:r>
+            <a:r>
+              <a:rPr sz="2000" b="1" i="0">
+                <a:solidFill>
+                  <a:srgbClr val="333333"/>
+                </a:solidFill>
+                <a:latin typeface="Calibri"/>
+              </a:rPr>
+              <a:t>Entrega en la plataforma del curso</a:t>
+            </a:r>
+            <a:r>
+              <a:rPr sz="2000" b="0" i="0">
+                <a:solidFill>
+                  <a:srgbClr val="333333"/>
+                </a:solidFill>
+                <a:latin typeface="Calibri"/>
+              </a:rPr>
+              <a:t> — en la fecha que indique el docente.</a:t>
+            </a:r>
+          </a:p>
+        </p:txBody>
+      </p:sp>
+      <p:sp>
+        <p:nvSpPr>
+          <p:cNvPr id="6" name="TextBox 5"/>
+          <p:cNvSpPr txBox="1"/>
+          <p:nvPr/>
+        </p:nvSpPr>
+        <p:spPr>
+          <a:xfrm>
+            <a:off x="11185855" y="6473952"/>
+            <a:ext cx="640080" cy="274320"/>
+          </a:xfrm>
+          <a:prstGeom prst="rect">
+            <a:avLst/>
+          </a:prstGeom>
+          <a:noFill/>
+        </p:spPr>
+        <p:txBody>
+          <a:bodyPr wrap="square">
+            <a:spAutoFit/>
+          </a:bodyPr>
+          <a:lstStyle/>
+          <a:p>
+            <a:pPr algn="r"/>
+            <a:r>
+              <a:rPr sz="1100" b="0" i="0">
+                <a:solidFill>
+                  <a:srgbClr val="666666"/>
+                </a:solidFill>
+                <a:latin typeface="Calibri"/>
+              </a:rPr>
+              <a:t>30</a:t>
+            </a:r>
+          </a:p>
+        </p:txBody>
+      </p:sp>
+    </p:spTree>
+  </p:cSld>
+  <p:clrMapOvr>
+    <a:masterClrMapping/>
+  </p:clrMapOvr>
+</p:sld>
+</file>
+
+<file path=ppt/slides/slide31.xml><?xml version="1.0" encoding="utf-8"?>
+<p:sld xmlns:a="http://schemas.openxmlformats.org/drawingml/2006/main" xmlns:p="http://schemas.openxmlformats.org/presentationml/2006/main" xmlns:r="http://schemas.openxmlformats.org/officeDocument/2006/relationships">
+  <p:cSld>
+    <p:bg>
+      <p:bgPr>
+        <a:solidFill>
+          <a:srgbClr val="FFFFFF"/>
+        </a:solidFill>
+        <a:effectLst/>
+      </p:bgPr>
+    </p:bg>
+    <p:spTree>
+      <p:nvGrpSpPr>
+        <p:cNvPr id="1" name=""/>
+        <p:cNvGrpSpPr/>
+        <p:nvPr/>
+      </p:nvGrpSpPr>
+      <p:grpSpPr/>
+      <p:sp>
+        <p:nvSpPr>
+          <p:cNvPr id="2" name="Rectangle 1"/>
+          <p:cNvSpPr/>
+          <p:nvPr/>
+        </p:nvSpPr>
+        <p:spPr>
+          <a:xfrm>
+            <a:off x="0" y="0"/>
+            <a:ext cx="12191695" cy="960120"/>
+          </a:xfrm>
+          <a:prstGeom prst="rect">
+            <a:avLst/>
+          </a:prstGeom>
+          <a:solidFill>
+            <a:srgbClr val="095292"/>
+          </a:solidFill>
+          <a:ln>
+            <a:noFill/>
+          </a:ln>
+        </p:spPr>
+        <p:style>
+          <a:lnRef idx="1">
+            <a:schemeClr val="accent1"/>
+          </a:lnRef>
+          <a:fillRef idx="3">
+            <a:schemeClr val="accent1"/>
+          </a:fillRef>
+          <a:effectRef idx="2">
+            <a:schemeClr val="accent1"/>
+          </a:effectRef>
+          <a:fontRef idx="minor">
+            <a:schemeClr val="lt1"/>
+          </a:fontRef>
+        </p:style>
+        <p:txBody>
+          <a:bodyPr rtlCol="0" anchor="ctr"/>
+          <a:lstStyle/>
+          <a:p>
+            <a:pPr algn="ctr"/>
+          </a:p>
+        </p:txBody>
+      </p:sp>
+      <p:sp>
+        <p:nvSpPr>
+          <p:cNvPr id="3" name="Rectangle 2"/>
+          <p:cNvSpPr/>
+          <p:nvPr/>
+        </p:nvSpPr>
+        <p:spPr>
+          <a:xfrm>
+            <a:off x="0" y="960120"/>
+            <a:ext cx="12191695" cy="41148"/>
+          </a:xfrm>
+          <a:prstGeom prst="rect">
+            <a:avLst/>
+          </a:prstGeom>
+          <a:solidFill>
+            <a:srgbClr val="FFD000"/>
+          </a:solidFill>
+          <a:ln>
+            <a:noFill/>
+          </a:ln>
+        </p:spPr>
+        <p:style>
+          <a:lnRef idx="1">
+            <a:schemeClr val="accent1"/>
+          </a:lnRef>
+          <a:fillRef idx="3">
+            <a:schemeClr val="accent1"/>
+          </a:fillRef>
+          <a:effectRef idx="2">
+            <a:schemeClr val="accent1"/>
+          </a:effectRef>
+          <a:fontRef idx="minor">
+            <a:schemeClr val="lt1"/>
+          </a:fontRef>
+        </p:style>
+        <p:txBody>
+          <a:bodyPr rtlCol="0" anchor="ctr"/>
+          <a:lstStyle/>
+          <a:p>
+            <a:pPr algn="ctr"/>
+          </a:p>
+        </p:txBody>
+      </p:sp>
+      <p:sp>
+        <p:nvSpPr>
+          <p:cNvPr id="4" name="TextBox 3"/>
+          <p:cNvSpPr txBox="1"/>
+          <p:nvPr/>
+        </p:nvSpPr>
+        <p:spPr>
+          <a:xfrm>
+            <a:off x="457200" y="164592"/>
+            <a:ext cx="11277295" cy="502920"/>
+          </a:xfrm>
+          <a:prstGeom prst="rect">
+            <a:avLst/>
+          </a:prstGeom>
+          <a:noFill/>
+        </p:spPr>
+        <p:txBody>
+          <a:bodyPr wrap="square">
+            <a:spAutoFit/>
+          </a:bodyPr>
+          <a:lstStyle/>
+          <a:p>
+            <a:r>
+              <a:rPr sz="2600" b="1" i="0">
+                <a:solidFill>
+                  <a:srgbClr val="FFFFFF"/>
+                </a:solidFill>
+                <a:latin typeface="Calibri"/>
+              </a:rPr>
+              <a:t>Para el PI esta semana</a:t>
+            </a:r>
+          </a:p>
+        </p:txBody>
+      </p:sp>
+      <p:sp>
+        <p:nvSpPr>
+          <p:cNvPr id="5" name="Rounded Rectangle 4"/>
+          <p:cNvSpPr/>
+          <p:nvPr/>
+        </p:nvSpPr>
+        <p:spPr>
+          <a:xfrm>
+            <a:off x="457200" y="1261872"/>
+            <a:ext cx="11277295" cy="1051560"/>
+          </a:xfrm>
+          <a:prstGeom prst="roundRect">
+            <a:avLst>
+              <a:gd name="adj" fmla="val 12000"/>
+            </a:avLst>
+          </a:prstGeom>
+          <a:solidFill>
+            <a:srgbClr val="E8F4FA"/>
+          </a:solidFill>
+          <a:ln>
+            <a:noFill/>
+          </a:ln>
+        </p:spPr>
+        <p:style>
+          <a:lnRef idx="1">
+            <a:schemeClr val="accent1"/>
+          </a:lnRef>
+          <a:fillRef idx="3">
+            <a:schemeClr val="accent1"/>
+          </a:fillRef>
+          <a:effectRef idx="2">
+            <a:schemeClr val="accent1"/>
+          </a:effectRef>
+          <a:fontRef idx="minor">
+            <a:schemeClr val="lt1"/>
+          </a:fontRef>
+        </p:style>
+        <p:txBody>
+          <a:bodyPr rtlCol="0" anchor="ctr"/>
+          <a:lstStyle/>
+          <a:p>
+            <a:pPr algn="ctr"/>
+          </a:p>
+        </p:txBody>
+      </p:sp>
+      <p:sp>
+        <p:nvSpPr>
+          <p:cNvPr id="6" name="Rectangle 5"/>
+          <p:cNvSpPr/>
+          <p:nvPr/>
+        </p:nvSpPr>
+        <p:spPr>
+          <a:xfrm>
+            <a:off x="457200" y="1261872"/>
+            <a:ext cx="128016" cy="1051560"/>
+          </a:xfrm>
+          <a:prstGeom prst="rect">
+            <a:avLst/>
+          </a:prstGeom>
+          <a:solidFill>
+            <a:srgbClr val="269CCB"/>
+          </a:solidFill>
+          <a:ln>
+            <a:noFill/>
+          </a:ln>
+        </p:spPr>
+        <p:style>
+          <a:lnRef idx="1">
+            <a:schemeClr val="accent1"/>
+          </a:lnRef>
+          <a:fillRef idx="3">
+            <a:schemeClr val="accent1"/>
+          </a:fillRef>
+          <a:effectRef idx="2">
+            <a:schemeClr val="accent1"/>
+          </a:effectRef>
+          <a:fontRef idx="minor">
+            <a:schemeClr val="lt1"/>
+          </a:fontRef>
+        </p:style>
+        <p:txBody>
+          <a:bodyPr rtlCol="0" anchor="ctr"/>
+          <a:lstStyle/>
+          <a:p>
+            <a:pPr algn="ctr"/>
+          </a:p>
+        </p:txBody>
+      </p:sp>
+      <p:sp>
+        <p:nvSpPr>
+          <p:cNvPr id="7" name="TextBox 6"/>
+          <p:cNvSpPr txBox="1"/>
+          <p:nvPr/>
+        </p:nvSpPr>
+        <p:spPr>
+          <a:xfrm>
+            <a:off x="777240" y="1399031"/>
+            <a:ext cx="10774375" cy="822959"/>
+          </a:xfrm>
+          <a:prstGeom prst="rect">
+            <a:avLst/>
+          </a:prstGeom>
+          <a:noFill/>
+        </p:spPr>
+        <p:txBody>
+          <a:bodyPr wrap="square">
+            <a:spAutoFit/>
+          </a:bodyPr>
+          <a:lstStyle/>
+          <a:p>
+            <a:r>
+              <a:rPr sz="1200" b="1" i="0">
+                <a:solidFill>
+                  <a:srgbClr val="269CCB"/>
+                </a:solidFill>
+                <a:latin typeface="Calibri"/>
+              </a:rPr>
+              <a:t>Info</a:t>
+            </a:r>
+          </a:p>
+          <a:p>
+            <a:pPr>
+              <a:spcBef>
+                <a:spcPts val="400"/>
+              </a:spcBef>
+            </a:pPr>
+            <a:r>
+              <a:rPr sz="1400" b="0" i="0">
+                <a:solidFill>
+                  <a:srgbClr val="333333"/>
+                </a:solidFill>
+                <a:latin typeface="Calibri"/>
+              </a:rPr>
+              <a:t>Hito: Escenarios de concurrencia del PI documentados</a:t>
+            </a:r>
+          </a:p>
+        </p:txBody>
+      </p:sp>
+      <p:sp>
+        <p:nvSpPr>
+          <p:cNvPr id="8" name="Rounded Rectangle 7"/>
+          <p:cNvSpPr/>
+          <p:nvPr/>
+        </p:nvSpPr>
+        <p:spPr>
+          <a:xfrm>
+            <a:off x="457200" y="2478024"/>
+            <a:ext cx="11277295" cy="1051560"/>
+          </a:xfrm>
+          <a:prstGeom prst="roundRect">
+            <a:avLst>
+              <a:gd name="adj" fmla="val 12000"/>
+            </a:avLst>
+          </a:prstGeom>
+          <a:solidFill>
+            <a:srgbClr val="FFF8E1"/>
+          </a:solidFill>
+          <a:ln>
+            <a:noFill/>
+          </a:ln>
+        </p:spPr>
+        <p:style>
+          <a:lnRef idx="1">
+            <a:schemeClr val="accent1"/>
+          </a:lnRef>
+          <a:fillRef idx="3">
+            <a:schemeClr val="accent1"/>
+          </a:fillRef>
+          <a:effectRef idx="2">
+            <a:schemeClr val="accent1"/>
+          </a:effectRef>
+          <a:fontRef idx="minor">
+            <a:schemeClr val="lt1"/>
+          </a:fontRef>
+        </p:style>
+        <p:txBody>
+          <a:bodyPr rtlCol="0" anchor="ctr"/>
+          <a:lstStyle/>
+          <a:p>
+            <a:pPr algn="ctr"/>
+          </a:p>
+        </p:txBody>
+      </p:sp>
+      <p:sp>
+        <p:nvSpPr>
+          <p:cNvPr id="9" name="Rectangle 8"/>
+          <p:cNvSpPr/>
+          <p:nvPr/>
+        </p:nvSpPr>
+        <p:spPr>
+          <a:xfrm>
+            <a:off x="457200" y="2478024"/>
+            <a:ext cx="128016" cy="1051560"/>
+          </a:xfrm>
+          <a:prstGeom prst="rect">
+            <a:avLst/>
+          </a:prstGeom>
+          <a:solidFill>
+            <a:srgbClr val="FFD000"/>
+          </a:solidFill>
+          <a:ln>
+            <a:noFill/>
+          </a:ln>
+        </p:spPr>
+        <p:style>
+          <a:lnRef idx="1">
+            <a:schemeClr val="accent1"/>
+          </a:lnRef>
+          <a:fillRef idx="3">
+            <a:schemeClr val="accent1"/>
+          </a:fillRef>
+          <a:effectRef idx="2">
+            <a:schemeClr val="accent1"/>
+          </a:effectRef>
+          <a:fontRef idx="minor">
+            <a:schemeClr val="lt1"/>
+          </a:fontRef>
+        </p:style>
+        <p:txBody>
+          <a:bodyPr rtlCol="0" anchor="ctr"/>
+          <a:lstStyle/>
+          <a:p>
+            <a:pPr algn="ctr"/>
+          </a:p>
+        </p:txBody>
+      </p:sp>
+      <p:sp>
+        <p:nvSpPr>
+          <p:cNvPr id="10" name="TextBox 9"/>
+          <p:cNvSpPr txBox="1"/>
+          <p:nvPr/>
+        </p:nvSpPr>
+        <p:spPr>
+          <a:xfrm>
+            <a:off x="777240" y="2615184"/>
+            <a:ext cx="10774375" cy="822959"/>
+          </a:xfrm>
+          <a:prstGeom prst="rect">
+            <a:avLst/>
+          </a:prstGeom>
+          <a:noFill/>
+        </p:spPr>
+        <p:txBody>
+          <a:bodyPr wrap="square">
+            <a:spAutoFit/>
+          </a:bodyPr>
+          <a:lstStyle/>
+          <a:p>
+            <a:r>
+              <a:rPr sz="1200" b="1" i="0">
+                <a:solidFill>
+                  <a:srgbClr val="FFD000"/>
+                </a:solidFill>
+                <a:latin typeface="Calibri"/>
+              </a:rPr>
+              <a:t>Aclaración</a:t>
+            </a:r>
+          </a:p>
+          <a:p>
+            <a:pPr>
+              <a:spcBef>
+                <a:spcPts val="400"/>
+              </a:spcBef>
+            </a:pPr>
+            <a:r>
+              <a:rPr sz="1400" b="0" i="0">
+                <a:solidFill>
+                  <a:srgbClr val="333333"/>
+                </a:solidFill>
+                <a:latin typeface="Calibri"/>
+              </a:rPr>
+              <a:t>Enunciado completo: Clases/Proyecto Integrador/ (VetCare DB).</a:t>
+            </a:r>
+          </a:p>
+        </p:txBody>
+      </p:sp>
+      <p:sp>
+        <p:nvSpPr>
+          <p:cNvPr id="11" name="Rounded Rectangle 10"/>
+          <p:cNvSpPr/>
+          <p:nvPr/>
+        </p:nvSpPr>
+        <p:spPr>
+          <a:xfrm>
+            <a:off x="457200" y="3694176"/>
+            <a:ext cx="11277295" cy="1051560"/>
+          </a:xfrm>
+          <a:prstGeom prst="roundRect">
+            <a:avLst>
+              <a:gd name="adj" fmla="val 12000"/>
+            </a:avLst>
+          </a:prstGeom>
+          <a:solidFill>
+            <a:srgbClr val="FBE4E4"/>
+          </a:solidFill>
+          <a:ln>
+            <a:noFill/>
+          </a:ln>
+        </p:spPr>
+        <p:style>
+          <a:lnRef idx="1">
+            <a:schemeClr val="accent1"/>
+          </a:lnRef>
+          <a:fillRef idx="3">
+            <a:schemeClr val="accent1"/>
+          </a:fillRef>
+          <a:effectRef idx="2">
+            <a:schemeClr val="accent1"/>
+          </a:effectRef>
+          <a:fontRef idx="minor">
+            <a:schemeClr val="lt1"/>
+          </a:fontRef>
+        </p:style>
+        <p:txBody>
+          <a:bodyPr rtlCol="0" anchor="ctr"/>
+          <a:lstStyle/>
+          <a:p>
+            <a:pPr algn="ctr"/>
+          </a:p>
+        </p:txBody>
+      </p:sp>
+      <p:sp>
+        <p:nvSpPr>
+          <p:cNvPr id="12" name="Rectangle 11"/>
+          <p:cNvSpPr/>
+          <p:nvPr/>
+        </p:nvSpPr>
+        <p:spPr>
+          <a:xfrm>
+            <a:off x="457200" y="3694176"/>
+            <a:ext cx="128016" cy="1051560"/>
+          </a:xfrm>
+          <a:prstGeom prst="rect">
+            <a:avLst/>
+          </a:prstGeom>
+          <a:solidFill>
+            <a:srgbClr val="A02030"/>
+          </a:solidFill>
+          <a:ln>
+            <a:noFill/>
+          </a:ln>
+        </p:spPr>
+        <p:style>
+          <a:lnRef idx="1">
+            <a:schemeClr val="accent1"/>
+          </a:lnRef>
+          <a:fillRef idx="3">
+            <a:schemeClr val="accent1"/>
+          </a:fillRef>
+          <a:effectRef idx="2">
+            <a:schemeClr val="accent1"/>
+          </a:effectRef>
+          <a:fontRef idx="minor">
+            <a:schemeClr val="lt1"/>
+          </a:fontRef>
+        </p:style>
+        <p:txBody>
+          <a:bodyPr rtlCol="0" anchor="ctr"/>
+          <a:lstStyle/>
+          <a:p>
+            <a:pPr algn="ctr"/>
+          </a:p>
+        </p:txBody>
+      </p:sp>
+      <p:sp>
+        <p:nvSpPr>
+          <p:cNvPr id="13" name="TextBox 12"/>
+          <p:cNvSpPr txBox="1"/>
+          <p:nvPr/>
+        </p:nvSpPr>
+        <p:spPr>
+          <a:xfrm>
+            <a:off x="777240" y="3831336"/>
+            <a:ext cx="10774375" cy="822959"/>
+          </a:xfrm>
+          <a:prstGeom prst="rect">
+            <a:avLst/>
+          </a:prstGeom>
+          <a:noFill/>
+        </p:spPr>
+        <p:txBody>
+          <a:bodyPr wrap="square">
+            <a:spAutoFit/>
+          </a:bodyPr>
+          <a:lstStyle/>
+          <a:p>
+            <a:r>
+              <a:rPr sz="1200" b="1" i="0">
+                <a:solidFill>
+                  <a:srgbClr val="A02030"/>
+                </a:solidFill>
+                <a:latin typeface="Calibri"/>
+              </a:rPr>
+              <a:t>Atención</a:t>
+            </a:r>
+          </a:p>
+          <a:p>
+            <a:pPr>
+              <a:spcBef>
+                <a:spcPts val="400"/>
+              </a:spcBef>
+            </a:pPr>
+            <a:r>
+              <a:rPr sz="1400" b="0" i="0">
+                <a:solidFill>
+                  <a:srgbClr val="333333"/>
+                </a:solidFill>
+                <a:latin typeface="Calibri"/>
+              </a:rPr>
+              <a:t>Si el docente asigna taller esta semana, él indica el canal y la fecha.</a:t>
+            </a:r>
+          </a:p>
+        </p:txBody>
+      </p:sp>
+      <p:sp>
+        <p:nvSpPr>
+          <p:cNvPr id="14" name="TextBox 13"/>
+          <p:cNvSpPr txBox="1"/>
+          <p:nvPr/>
+        </p:nvSpPr>
+        <p:spPr>
+          <a:xfrm>
+            <a:off x="11185855" y="6473952"/>
+            <a:ext cx="640080" cy="274320"/>
+          </a:xfrm>
+          <a:prstGeom prst="rect">
+            <a:avLst/>
+          </a:prstGeom>
+          <a:noFill/>
+        </p:spPr>
+        <p:txBody>
+          <a:bodyPr wrap="square">
+            <a:spAutoFit/>
+          </a:bodyPr>
+          <a:lstStyle/>
+          <a:p>
+            <a:pPr algn="r"/>
+            <a:r>
+              <a:rPr sz="1100" b="0" i="0">
+                <a:solidFill>
+                  <a:srgbClr val="666666"/>
+                </a:solidFill>
+                <a:latin typeface="Calibri"/>
+              </a:rPr>
+              <a:t>31</a:t>
+            </a:r>
+          </a:p>
+        </p:txBody>
+      </p:sp>
+    </p:spTree>
+  </p:cSld>
+  <p:clrMapOvr>
+    <a:masterClrMapping/>
+  </p:clrMapOvr>
+</p:sld>
+</file>
+
+<file path=ppt/slides/slide32.xml><?xml version="1.0" encoding="utf-8"?>
+<p:sld xmlns:a="http://schemas.openxmlformats.org/drawingml/2006/main" xmlns:p="http://schemas.openxmlformats.org/presentationml/2006/main" xmlns:r="http://schemas.openxmlformats.org/officeDocument/2006/relationships">
+  <p:cSld>
+    <p:bg>
+      <p:bgPr>
+        <a:solidFill>
+          <a:srgbClr val="FFFFFF"/>
+        </a:solidFill>
+        <a:effectLst/>
+      </p:bgPr>
+    </p:bg>
+    <p:spTree>
+      <p:nvGrpSpPr>
+        <p:cNvPr id="1" name=""/>
+        <p:cNvGrpSpPr/>
+        <p:nvPr/>
+      </p:nvGrpSpPr>
+      <p:grpSpPr/>
+      <p:sp>
+        <p:nvSpPr>
+          <p:cNvPr id="2" name="Rectangle 1"/>
+          <p:cNvSpPr/>
+          <p:nvPr/>
+        </p:nvSpPr>
+        <p:spPr>
+          <a:xfrm>
+            <a:off x="0" y="0"/>
             <a:ext cx="12191695" cy="164592"/>
           </a:xfrm>
           <a:prstGeom prst="rect">
@@ -13205,38 +13711,6 @@
                 </a:solidFill>
                 <a:latin typeface="Calibri"/>
               </a:rPr>
-              <a:t>–   Se abre de forma explicita o implicita y se cierra con COMMIT, que hace permanentes los cambios, o con ROLLBACK, que los deshace.</a:t>
-            </a:r>
-          </a:p>
-          <a:p>
-            <a:pPr>
-              <a:spcAft>
-                <a:spcPts val="800"/>
-              </a:spcAft>
-            </a:pPr>
-            <a:r>
-              <a:rPr sz="2000" b="0" i="0">
-                <a:solidFill>
-                  <a:srgbClr val="333333"/>
-                </a:solidFill>
-                <a:latin typeface="Calibri"/>
-              </a:rPr>
-              <a:t>–   Concurrencia significa que dos o mas transacciones estan abiertas al mismo tiempo sobre los mismos datos.</a:t>
-            </a:r>
-          </a:p>
-          <a:p>
-            <a:pPr>
-              <a:spcAft>
-                <a:spcPts val="800"/>
-              </a:spcAft>
-            </a:pPr>
-            <a:r>
-              <a:rPr sz="2000" b="0" i="0">
-                <a:solidFill>
-                  <a:srgbClr val="333333"/>
-                </a:solidFill>
-                <a:latin typeface="Calibri"/>
-              </a:rPr>
               <a:t>–   El motor no las ejecuta una despues de la otra: intercala sus operaciones para aprovechar disco y CPU, y ese intercalado es la fuente de todos los problemas de esta clase.</a:t>
             </a:r>
           </a:p>
@@ -13473,54 +13947,6 @@
                 </a:solidFill>
                 <a:latin typeface="Calibri"/>
               </a:rPr>
-              <a:t>–   Ambas consultan si la franja esta libre.</a:t>
-            </a:r>
-          </a:p>
-          <a:p>
-            <a:pPr>
-              <a:spcAft>
-                <a:spcPts val="800"/>
-              </a:spcAft>
-            </a:pPr>
-            <a:r>
-              <a:rPr sz="2000" b="0" i="0">
-                <a:solidFill>
-                  <a:srgbClr val="333333"/>
-                </a:solidFill>
-                <a:latin typeface="Calibri"/>
-              </a:rPr>
-              <a:t>–   Ambas reciben cero filas.</a:t>
-            </a:r>
-          </a:p>
-          <a:p>
-            <a:pPr>
-              <a:spcAft>
-                <a:spcPts val="800"/>
-              </a:spcAft>
-            </a:pPr>
-            <a:r>
-              <a:rPr sz="2000" b="0" i="0">
-                <a:solidFill>
-                  <a:srgbClr val="333333"/>
-                </a:solidFill>
-                <a:latin typeface="Calibri"/>
-              </a:rPr>
-              <a:t>–   Ambas insertan una cita.</a:t>
-            </a:r>
-          </a:p>
-          <a:p>
-            <a:pPr>
-              <a:spcAft>
-                <a:spcPts val="800"/>
-              </a:spcAft>
-            </a:pPr>
-            <a:r>
-              <a:rPr sz="2000" b="0" i="0">
-                <a:solidFill>
-                  <a:srgbClr val="333333"/>
-                </a:solidFill>
-                <a:latin typeface="Calibri"/>
-              </a:rPr>
               <a:t>–   El resultado son dos mascotas citadas al mismo minuto con el mismo veterinario, y ninguna de las dos sentencias fallo ni produjo un error.</a:t>
             </a:r>
           </a:p>
@@ -13805,7 +14231,7 @@
                 </a:solidFill>
                 <a:latin typeface="Calibri"/>
               </a:rPr>
-              <a:t>–   Por eso el estandar SQL no impone una sola forma de trabajar: ofrece una perilla llamada nivel de aislamiento, que permite negociar cuanta anomalia se tolera a cambio de cuanto rendimiento.</a:t>
+              <a:t>–   Aislamiento, en este contexto, es la propiedad que responde a una pregunta muy concreta: que puede ver mi transaccion de lo que estan haciendo las otras mientras esas otras todavia no terminan.</a:t>
             </a:r>
           </a:p>
         </p:txBody>
@@ -14025,22 +14451,6 @@
                 </a:solidFill>
                 <a:latin typeface="Calibri"/>
               </a:rPr>
-              <a:t>–   Aislamiento, en este contexto, es la propiedad que responde a una pregunta muy concreta: que puede ver mi transaccion de lo que estan haciendo las otras mientras esas otras todavia no terminan.</a:t>
-            </a:r>
-          </a:p>
-          <a:p>
-            <a:pPr>
-              <a:spcAft>
-                <a:spcPts val="800"/>
-              </a:spcAft>
-            </a:pPr>
-            <a:r>
-              <a:rPr sz="2000" b="0" i="0">
-                <a:solidFill>
-                  <a:srgbClr val="333333"/>
-                </a:solidFill>
-                <a:latin typeface="Calibri"/>
-              </a:rPr>
               <a:t>–   Es la I de ACID (atomicidad, consistencia, aislamiento y durabilidad) y es la unica de las cuatro propiedades que el desarrollador configura deliberadamente; las otras tres el motor las garantiza siempre.</a:t>
             </a:r>
           </a:p>
@@ -14277,22 +14687,6 @@
                 </a:solidFill>
                 <a:latin typeface="Calibri"/>
               </a:rPr>
-              <a:t>–   El estandar define tres fenomenos indeseables, y cada uno se entiende mejor con una escena de la clinica.</a:t>
-            </a:r>
-          </a:p>
-          <a:p>
-            <a:pPr>
-              <a:spcAft>
-                <a:spcPts val="800"/>
-              </a:spcAft>
-            </a:pPr>
-            <a:r>
-              <a:rPr sz="2000" b="0" i="0">
-                <a:solidFill>
-                  <a:srgbClr val="333333"/>
-                </a:solidFill>
-                <a:latin typeface="Calibri"/>
-              </a:rPr>
               <a:t>–   Lectura sucia, o dirty read: la transaccion T1 inserta la cita de las 10:00 y todavia no hace COMMIT</a:t>
             </a:r>
           </a:p>
@@ -14564,22 +14958,6 @@
             <a:spAutoFit/>
           </a:bodyPr>
           <a:lstStyle/>
-          <a:p>
-            <a:pPr>
-              <a:spcAft>
-                <a:spcPts val="800"/>
-              </a:spcAft>
-            </a:pPr>
-            <a:r>
-              <a:rPr sz="2000" b="0" i="0">
-                <a:solidFill>
-                  <a:srgbClr val="333333"/>
-                </a:solidFill>
-                <a:latin typeface="Calibri"/>
-              </a:rPr>
-              <a:t>–   La misma consulta, en la misma transaccion, devolvio dos valores distintos.</a:t>
-            </a:r>
-          </a:p>
           <a:p>
             <a:pPr>
               <a:spcAft>

--- a/Bases de Datos II/Clases/Clase 10 - Control de concurrencia/Presentacion.pptx
+++ b/Bases de Datos II/Clases/Clase 10 - Control de concurrencia/Presentacion.pptx
@@ -37,6 +37,9 @@
     <p:sldId id="285" r:id="rId36"/>
     <p:sldId id="286" r:id="rId37"/>
     <p:sldId id="287" r:id="rId38"/>
+    <p:sldId id="288" r:id="rId39"/>
+    <p:sldId id="289" r:id="rId40"/>
+    <p:sldId id="290" r:id="rId41"/>
   </p:sldIdLst>
   <p:sldSz cx="12191695" cy="6858000" type="screen4x3"/>
   <p:notesSz cx="6858000" cy="9144000"/>
@@ -6995,7 +6998,7 @@
         <p:spPr>
           <a:xfrm>
             <a:off x="0" y="0"/>
-            <a:ext cx="12191695" cy="1170432"/>
+            <a:ext cx="12191695" cy="960120"/>
           </a:xfrm>
           <a:prstGeom prst="rect">
             <a:avLst/>
@@ -7037,7 +7040,7 @@
         </p:nvSpPr>
         <p:spPr>
           <a:xfrm>
-            <a:off x="0" y="1170432"/>
+            <a:off x="0" y="960120"/>
             <a:ext cx="12191695" cy="41148"/>
           </a:xfrm>
           <a:prstGeom prst="rect">
@@ -7081,7 +7084,7 @@
         <p:spPr>
           <a:xfrm>
             <a:off x="457200" y="164592"/>
-            <a:ext cx="11277295" cy="384048"/>
+            <a:ext cx="11277295" cy="502920"/>
           </a:xfrm>
           <a:prstGeom prst="rect">
             <a:avLst/>
@@ -7101,60 +7104,69 @@
                 </a:solidFill>
                 <a:latin typeface="Calibri"/>
               </a:rPr>
-              <a:t>Doble reserva sin control de concurrencia</a:t>
-            </a:r>
-          </a:p>
-        </p:txBody>
-      </p:sp>
-      <p:sp>
-        <p:nvSpPr>
-          <p:cNvPr id="5" name="TextBox 4"/>
-          <p:cNvSpPr txBox="1"/>
-          <p:nvPr/>
-        </p:nvSpPr>
-        <p:spPr>
-          <a:xfrm>
-            <a:off x="457200" y="566928"/>
-            <a:ext cx="11277295" cy="411480"/>
-          </a:xfrm>
-          <a:prstGeom prst="rect">
-            <a:avLst/>
-          </a:prstGeom>
-          <a:noFill/>
-        </p:spPr>
-        <p:txBody>
-          <a:bodyPr wrap="square">
-            <a:spAutoFit/>
-          </a:bodyPr>
-          <a:lstStyle/>
-          <a:p>
-            <a:r>
-              <a:rPr sz="1400" b="0" i="0">
-                <a:solidFill>
-                  <a:srgbClr val="B8D8EE"/>
-                </a:solidFill>
-                <a:latin typeface="Calibri"/>
-              </a:rPr>
-              <a:t>Dos transacciones concurrentes leen “libre” antes de que ninguna confirme</a:t>
-            </a:r>
-          </a:p>
-        </p:txBody>
-      </p:sp>
-      <p:sp>
-        <p:nvSpPr>
-          <p:cNvPr id="6" name="Rounded Rectangle 5"/>
+              <a:t>La doble reserva, y la restriccion que la cierra de raiz</a:t>
+            </a:r>
+          </a:p>
+        </p:txBody>
+      </p:sp>
+      <p:sp>
+        <p:nvSpPr>
+          <p:cNvPr id="5" name="Rounded Rectangle 4"/>
           <p:cNvSpPr/>
           <p:nvPr/>
         </p:nvSpPr>
         <p:spPr>
           <a:xfrm>
-            <a:off x="731520" y="2011680"/>
-            <a:ext cx="2834640" cy="914400"/>
+            <a:off x="457200" y="1261872"/>
+            <a:ext cx="11277295" cy="5093208"/>
           </a:xfrm>
           <a:prstGeom prst="roundRect">
             <a:avLst>
               <a:gd name="adj" fmla="val 12000"/>
             </a:avLst>
+          </a:prstGeom>
+          <a:solidFill>
+            <a:srgbClr val="1E2A38"/>
+          </a:solidFill>
+          <a:ln>
+            <a:noFill/>
+          </a:ln>
+        </p:spPr>
+        <p:style>
+          <a:lnRef idx="1">
+            <a:schemeClr val="accent1"/>
+          </a:lnRef>
+          <a:fillRef idx="3">
+            <a:schemeClr val="accent1"/>
+          </a:fillRef>
+          <a:effectRef idx="2">
+            <a:schemeClr val="accent1"/>
+          </a:effectRef>
+          <a:fontRef idx="minor">
+            <a:schemeClr val="lt1"/>
+          </a:fontRef>
+        </p:style>
+        <p:txBody>
+          <a:bodyPr rtlCol="0" anchor="ctr"/>
+          <a:lstStyle/>
+          <a:p>
+            <a:pPr algn="ctr"/>
+          </a:p>
+        </p:txBody>
+      </p:sp>
+      <p:sp>
+        <p:nvSpPr>
+          <p:cNvPr id="6" name="Rectangle 5"/>
+          <p:cNvSpPr/>
+          <p:nvPr/>
+        </p:nvSpPr>
+        <p:spPr>
+          <a:xfrm>
+            <a:off x="457200" y="1261872"/>
+            <a:ext cx="11277295" cy="320040"/>
+          </a:xfrm>
+          <a:prstGeom prst="rect">
+            <a:avLst/>
           </a:prstGeom>
           <a:solidFill>
             <a:srgbClr val="095292"/>
@@ -7178,234 +7190,55 @@
           </a:fontRef>
         </p:style>
         <p:txBody>
-          <a:bodyPr rtlCol="0" anchor="ctr" wrap="square"/>
+          <a:bodyPr rtlCol="0" anchor="ctr"/>
           <a:lstStyle/>
           <a:p>
             <a:pPr algn="ctr"/>
-            <a:r>
-              <a:rPr sz="1300" b="1" i="0">
-                <a:solidFill>
-                  <a:srgbClr val="FFFFFF"/>
-                </a:solidFill>
-                <a:latin typeface="Calibri"/>
-              </a:rPr>
-              <a:t>T1 (Recepción A)
-lee franja: LIBRE</a:t>
-            </a:r>
-          </a:p>
-        </p:txBody>
-      </p:sp>
-      <p:sp>
-        <p:nvSpPr>
-          <p:cNvPr id="7" name="Rounded Rectangle 6"/>
-          <p:cNvSpPr/>
-          <p:nvPr/>
-        </p:nvSpPr>
-        <p:spPr>
-          <a:xfrm>
-            <a:off x="4206240" y="2011680"/>
-            <a:ext cx="2834640" cy="914400"/>
-          </a:xfrm>
-          <a:prstGeom prst="roundRect">
-            <a:avLst>
-              <a:gd name="adj" fmla="val 12000"/>
-            </a:avLst>
-          </a:prstGeom>
-          <a:solidFill>
-            <a:srgbClr val="095292"/>
-          </a:solidFill>
-          <a:ln>
-            <a:noFill/>
-          </a:ln>
-        </p:spPr>
-        <p:style>
-          <a:lnRef idx="1">
-            <a:schemeClr val="accent1"/>
-          </a:lnRef>
-          <a:fillRef idx="3">
-            <a:schemeClr val="accent1"/>
-          </a:fillRef>
-          <a:effectRef idx="2">
-            <a:schemeClr val="accent1"/>
-          </a:effectRef>
-          <a:fontRef idx="minor">
-            <a:schemeClr val="lt1"/>
-          </a:fontRef>
-        </p:style>
-        <p:txBody>
-          <a:bodyPr rtlCol="0" anchor="ctr" wrap="square"/>
-          <a:lstStyle/>
-          <a:p>
-            <a:pPr algn="ctr"/>
-            <a:r>
-              <a:rPr sz="1300" b="1" i="0">
-                <a:solidFill>
-                  <a:srgbClr val="FFFFFF"/>
-                </a:solidFill>
-                <a:latin typeface="Calibri"/>
-              </a:rPr>
-              <a:t>T1: INSERT cita
-COMMIT → OK</a:t>
-            </a:r>
-          </a:p>
-        </p:txBody>
-      </p:sp>
-      <p:sp>
-        <p:nvSpPr>
-          <p:cNvPr id="8" name="Rounded Rectangle 7"/>
-          <p:cNvSpPr/>
-          <p:nvPr/>
-        </p:nvSpPr>
-        <p:spPr>
-          <a:xfrm>
-            <a:off x="731520" y="3383280"/>
-            <a:ext cx="2834640" cy="914400"/>
-          </a:xfrm>
-          <a:prstGeom prst="roundRect">
-            <a:avLst>
-              <a:gd name="adj" fmla="val 12000"/>
-            </a:avLst>
-          </a:prstGeom>
-          <a:solidFill>
-            <a:srgbClr val="269CCB"/>
-          </a:solidFill>
-          <a:ln>
-            <a:noFill/>
-          </a:ln>
-        </p:spPr>
-        <p:style>
-          <a:lnRef idx="1">
-            <a:schemeClr val="accent1"/>
-          </a:lnRef>
-          <a:fillRef idx="3">
-            <a:schemeClr val="accent1"/>
-          </a:fillRef>
-          <a:effectRef idx="2">
-            <a:schemeClr val="accent1"/>
-          </a:effectRef>
-          <a:fontRef idx="minor">
-            <a:schemeClr val="lt1"/>
-          </a:fontRef>
-        </p:style>
-        <p:txBody>
-          <a:bodyPr rtlCol="0" anchor="ctr" wrap="square"/>
-          <a:lstStyle/>
-          <a:p>
-            <a:pPr algn="ctr"/>
-            <a:r>
-              <a:rPr sz="1300" b="1" i="0">
-                <a:solidFill>
-                  <a:srgbClr val="FFFFFF"/>
-                </a:solidFill>
-                <a:latin typeface="Calibri"/>
-              </a:rPr>
-              <a:t>T2 (Recepción B)
-lee franja: LIBRE</a:t>
-            </a:r>
-          </a:p>
-        </p:txBody>
-      </p:sp>
-      <p:sp>
-        <p:nvSpPr>
-          <p:cNvPr id="9" name="Rounded Rectangle 8"/>
-          <p:cNvSpPr/>
-          <p:nvPr/>
-        </p:nvSpPr>
-        <p:spPr>
-          <a:xfrm>
-            <a:off x="4206240" y="3383280"/>
-            <a:ext cx="2834640" cy="914400"/>
-          </a:xfrm>
-          <a:prstGeom prst="roundRect">
-            <a:avLst>
-              <a:gd name="adj" fmla="val 12000"/>
-            </a:avLst>
-          </a:prstGeom>
-          <a:solidFill>
-            <a:srgbClr val="A02030"/>
-          </a:solidFill>
-          <a:ln>
-            <a:noFill/>
-          </a:ln>
-        </p:spPr>
-        <p:style>
-          <a:lnRef idx="1">
-            <a:schemeClr val="accent1"/>
-          </a:lnRef>
-          <a:fillRef idx="3">
-            <a:schemeClr val="accent1"/>
-          </a:fillRef>
-          <a:effectRef idx="2">
-            <a:schemeClr val="accent1"/>
-          </a:effectRef>
-          <a:fontRef idx="minor">
-            <a:schemeClr val="lt1"/>
-          </a:fontRef>
-        </p:style>
-        <p:txBody>
-          <a:bodyPr rtlCol="0" anchor="ctr" wrap="square"/>
-          <a:lstStyle/>
-          <a:p>
-            <a:pPr algn="ctr"/>
-            <a:r>
-              <a:rPr sz="1300" b="1" i="0">
-                <a:solidFill>
-                  <a:srgbClr val="FFFFFF"/>
-                </a:solidFill>
-                <a:latin typeface="Calibri"/>
-              </a:rPr>
-              <a:t>T2: INSERT cita
-COMMIT → ¡DOBLE RESERVA!</a:t>
-            </a:r>
-          </a:p>
-        </p:txBody>
-      </p:sp>
-      <p:cxnSp>
-        <p:nvCxnSpPr>
-          <p:cNvPr id="10" name="Connector 9"/>
-          <p:cNvCxnSpPr/>
-          <p:nvPr/>
-        </p:nvCxnSpPr>
-        <p:spPr>
-          <a:xfrm>
-            <a:off x="3566160" y="2468880"/>
-            <a:ext cx="640080" cy="0"/>
-          </a:xfrm>
-          <a:prstGeom prst="line">
-            <a:avLst/>
-          </a:prstGeom>
-          <a:ln w="22225">
-            <a:solidFill>
-              <a:srgbClr val="666666"/>
-            </a:solidFill>
-            <a:tailEnd type="triangle" w="med" len="med"/>
-          </a:ln>
-        </p:spPr>
-        <p:style>
-          <a:lnRef idx="2">
-            <a:schemeClr val="accent1"/>
-          </a:lnRef>
-          <a:fillRef idx="0">
-            <a:schemeClr val="accent1"/>
-          </a:fillRef>
-          <a:effectRef idx="1">
-            <a:schemeClr val="accent1"/>
-          </a:effectRef>
-          <a:fontRef idx="minor">
-            <a:schemeClr val="tx1"/>
-          </a:fontRef>
-        </p:style>
-      </p:cxnSp>
-      <p:sp>
-        <p:nvSpPr>
-          <p:cNvPr id="11" name="TextBox 10"/>
+          </a:p>
+        </p:txBody>
+      </p:sp>
+      <p:sp>
+        <p:nvSpPr>
+          <p:cNvPr id="7" name="TextBox 6"/>
           <p:cNvSpPr txBox="1"/>
           <p:nvPr/>
         </p:nvSpPr>
         <p:spPr>
           <a:xfrm>
-            <a:off x="3063240" y="2267712"/>
-            <a:ext cx="1645920" cy="320040"/>
+            <a:off x="685800" y="1307592"/>
+            <a:ext cx="10820095" cy="256032"/>
+          </a:xfrm>
+          <a:prstGeom prst="rect">
+            <a:avLst/>
+          </a:prstGeom>
+          <a:noFill/>
+        </p:spPr>
+        <p:txBody>
+          <a:bodyPr wrap="square" anchor="ctr"/>
+          <a:lstStyle/>
+          <a:p>
+            <a:r>
+              <a:rPr sz="1000" b="1" i="0">
+                <a:solidFill>
+                  <a:srgbClr val="269CCB"/>
+                </a:solidFill>
+                <a:latin typeface="Calibri"/>
+              </a:rPr>
+              <a:t>● ● ●</a:t>
+            </a:r>
+          </a:p>
+        </p:txBody>
+      </p:sp>
+      <p:sp>
+        <p:nvSpPr>
+          <p:cNvPr id="8" name="TextBox 7"/>
+          <p:cNvSpPr txBox="1"/>
+          <p:nvPr/>
+        </p:nvSpPr>
+        <p:spPr>
+          <a:xfrm>
+            <a:off x="777240" y="1719072"/>
+            <a:ext cx="10637215" cy="4453128"/>
           </a:xfrm>
           <a:prstGeom prst="rect">
             <a:avLst/>
@@ -7418,127 +7251,170 @@
           </a:bodyPr>
           <a:lstStyle/>
           <a:p>
-            <a:pPr algn="ctr"/>
-            <a:r>
-              <a:rPr sz="1000" b="0" i="1">
-                <a:solidFill>
-                  <a:srgbClr val="666666"/>
-                </a:solidFill>
-                <a:latin typeface="Calibri"/>
-              </a:rPr>
-              <a:t>tiempo →</a:t>
-            </a:r>
-          </a:p>
-        </p:txBody>
-      </p:sp>
-      <p:cxnSp>
-        <p:nvCxnSpPr>
-          <p:cNvPr id="12" name="Connector 11"/>
-          <p:cNvCxnSpPr/>
-          <p:nvPr/>
-        </p:nvCxnSpPr>
-        <p:spPr>
-          <a:xfrm>
-            <a:off x="3566160" y="3840480"/>
-            <a:ext cx="640080" cy="0"/>
-          </a:xfrm>
-          <a:prstGeom prst="line">
-            <a:avLst/>
-          </a:prstGeom>
-          <a:ln w="22225">
-            <a:solidFill>
-              <a:srgbClr val="666666"/>
-            </a:solidFill>
-            <a:tailEnd type="triangle" w="med" len="med"/>
-          </a:ln>
-        </p:spPr>
-        <p:style>
-          <a:lnRef idx="2">
-            <a:schemeClr val="accent1"/>
-          </a:lnRef>
-          <a:fillRef idx="0">
-            <a:schemeClr val="accent1"/>
-          </a:fillRef>
-          <a:effectRef idx="1">
-            <a:schemeClr val="accent1"/>
-          </a:effectRef>
-          <a:fontRef idx="minor">
-            <a:schemeClr val="tx1"/>
-          </a:fontRef>
-        </p:style>
-      </p:cxnSp>
-      <p:sp>
-        <p:nvSpPr>
-          <p:cNvPr id="13" name="TextBox 12"/>
-          <p:cNvSpPr txBox="1"/>
-          <p:nvPr/>
-        </p:nvSpPr>
-        <p:spPr>
-          <a:xfrm>
-            <a:off x="3063240" y="3639312"/>
-            <a:ext cx="1645920" cy="320040"/>
-          </a:xfrm>
-          <a:prstGeom prst="rect">
-            <a:avLst/>
-          </a:prstGeom>
-          <a:noFill/>
-        </p:spPr>
-        <p:txBody>
-          <a:bodyPr wrap="square">
-            <a:spAutoFit/>
-          </a:bodyPr>
-          <a:lstStyle/>
-          <a:p>
-            <a:pPr algn="ctr"/>
-            <a:r>
-              <a:rPr sz="1000" b="0" i="1">
-                <a:solidFill>
-                  <a:srgbClr val="666666"/>
-                </a:solidFill>
-                <a:latin typeface="Calibri"/>
-              </a:rPr>
-              <a:t>tiempo →</a:t>
-            </a:r>
-          </a:p>
-        </p:txBody>
-      </p:sp>
-      <p:sp>
-        <p:nvSpPr>
-          <p:cNvPr id="14" name="TextBox 13"/>
-          <p:cNvSpPr txBox="1"/>
-          <p:nvPr/>
-        </p:nvSpPr>
-        <p:spPr>
-          <a:xfrm>
-            <a:off x="457200" y="6263640"/>
-            <a:ext cx="11277295" cy="411480"/>
-          </a:xfrm>
-          <a:prstGeom prst="rect">
-            <a:avLst/>
-          </a:prstGeom>
-          <a:noFill/>
-        </p:spPr>
-        <p:txBody>
-          <a:bodyPr wrap="square">
-            <a:spAutoFit/>
-          </a:bodyPr>
-          <a:lstStyle/>
-          <a:p>
-            <a:r>
-              <a:rPr sz="1100" b="0" i="1">
-                <a:solidFill>
-                  <a:srgbClr val="666666"/>
-                </a:solidFill>
-                <a:latin typeface="Calibri"/>
-              </a:rPr>
-              <a:t>Mitigación: UNIQUE(id_veterinario, fecha_hora) hace que el segundo INSERT falle automáticamente en vez de crear la doble reserva.</a:t>
-            </a:r>
-          </a:p>
-        </p:txBody>
-      </p:sp>
-      <p:sp>
-        <p:nvSpPr>
-          <p:cNvPr id="15" name="TextBox 14"/>
+            <a:pPr>
+              <a:spcAft>
+                <a:spcPts val="400"/>
+              </a:spcAft>
+            </a:pPr>
+            <a:r>
+              <a:rPr sz="1400" b="0" i="0">
+                <a:solidFill>
+                  <a:srgbClr val="FFFFFF"/>
+                </a:solidFill>
+                <a:latin typeface="Calibri"/>
+              </a:rPr>
+              <a:t>-- Dos sesiones agendan la misma franja al mismo veterinario:</a:t>
+            </a:r>
+          </a:p>
+          <a:p>
+            <a:pPr>
+              <a:spcAft>
+                <a:spcPts val="400"/>
+              </a:spcAft>
+            </a:pPr>
+            <a:r>
+              <a:rPr sz="1400" b="0" i="0">
+                <a:solidFill>
+                  <a:srgbClr val="FFFFFF"/>
+                </a:solidFill>
+                <a:latin typeface="Calibri"/>
+              </a:rPr>
+              <a:t>-- T1: SELECT COUNT(*) FROM cita WHERE id_veterinario=3 AND fecha_hora=X; -&gt; 0</a:t>
+            </a:r>
+          </a:p>
+          <a:p>
+            <a:pPr>
+              <a:spcAft>
+                <a:spcPts val="400"/>
+              </a:spcAft>
+            </a:pPr>
+            <a:r>
+              <a:rPr sz="1400" b="0" i="0">
+                <a:solidFill>
+                  <a:srgbClr val="FFFFFF"/>
+                </a:solidFill>
+                <a:latin typeface="Calibri"/>
+              </a:rPr>
+              <a:t>-- T2: SELECT COUNT(*) ... mismo resultado -&gt; 0</a:t>
+            </a:r>
+          </a:p>
+          <a:p>
+            <a:pPr>
+              <a:spcAft>
+                <a:spcPts val="400"/>
+              </a:spcAft>
+            </a:pPr>
+            <a:r>
+              <a:rPr sz="1400" b="0" i="0">
+                <a:solidFill>
+                  <a:srgbClr val="FFFFFF"/>
+                </a:solidFill>
+                <a:latin typeface="Calibri"/>
+              </a:rPr>
+              <a:t>-- T1: INSERT ... ok      T2: INSERT ... ok      -&gt; dos citas en la misma franja</a:t>
+            </a:r>
+          </a:p>
+          <a:p>
+            <a:pPr>
+              <a:spcAft>
+                <a:spcPts val="400"/>
+              </a:spcAft>
+            </a:pPr>
+            <a:r>
+              <a:rPr sz="1400" b="0" i="0">
+                <a:solidFill>
+                  <a:srgbClr val="FFFFFF"/>
+                </a:solidFill>
+                <a:latin typeface="Calibri"/>
+              </a:rPr>
+              <a:t/>
+            </a:r>
+          </a:p>
+          <a:p>
+            <a:pPr>
+              <a:spcAft>
+                <a:spcPts val="400"/>
+              </a:spcAft>
+            </a:pPr>
+            <a:r>
+              <a:rPr sz="1400" b="0" i="0">
+                <a:solidFill>
+                  <a:srgbClr val="FFFFFF"/>
+                </a:solidFill>
+                <a:latin typeface="Calibri"/>
+              </a:rPr>
+              <a:t>-- Validar leyendo NO alcanza: entre el SELECT y el INSERT cabe otra sesion.</a:t>
+            </a:r>
+          </a:p>
+          <a:p>
+            <a:pPr>
+              <a:spcAft>
+                <a:spcPts val="400"/>
+              </a:spcAft>
+            </a:pPr>
+            <a:r>
+              <a:rPr sz="1400" b="0" i="0">
+                <a:solidFill>
+                  <a:srgbClr val="FFFFFF"/>
+                </a:solidFill>
+                <a:latin typeface="Calibri"/>
+              </a:rPr>
+              <a:t>-- La unica defensa que no depende del tiempo es una restriccion:</a:t>
+            </a:r>
+          </a:p>
+          <a:p>
+            <a:pPr>
+              <a:spcAft>
+                <a:spcPts val="400"/>
+              </a:spcAft>
+            </a:pPr>
+            <a:r>
+              <a:rPr sz="1400" b="0" i="0">
+                <a:solidFill>
+                  <a:srgbClr val="FFFFFF"/>
+                </a:solidFill>
+                <a:latin typeface="Calibri"/>
+              </a:rPr>
+              <a:t>ALTER TABLE cita</a:t>
+            </a:r>
+          </a:p>
+          <a:p>
+            <a:pPr>
+              <a:spcAft>
+                <a:spcPts val="400"/>
+              </a:spcAft>
+            </a:pPr>
+            <a:r>
+              <a:rPr sz="1400" b="0" i="0">
+                <a:solidFill>
+                  <a:srgbClr val="FFFFFF"/>
+                </a:solidFill>
+                <a:latin typeface="Calibri"/>
+              </a:rPr>
+              <a:t>  ADD CONSTRAINT uq_cita_vet_franja UNIQUE (id_veterinario, fecha_hora);</a:t>
+            </a:r>
+          </a:p>
+          <a:p>
+            <a:pPr>
+              <a:spcAft>
+                <a:spcPts val="400"/>
+              </a:spcAft>
+            </a:pPr>
+            <a:r>
+              <a:rPr sz="1400" b="0" i="0">
+                <a:solidFill>
+                  <a:srgbClr val="FFFFFF"/>
+                </a:solidFill>
+                <a:latin typeface="Calibri"/>
+              </a:rPr>
+              <a:t>-- Ahora el segundo INSERT falla, sin importar el orden ni la velocidad.</a:t>
+            </a:r>
+          </a:p>
+        </p:txBody>
+      </p:sp>
+      <p:sp>
+        <p:nvSpPr>
+          <p:cNvPr id="9" name="TextBox 8"/>
           <p:cNvSpPr txBox="1"/>
           <p:nvPr/>
         </p:nvSpPr>
@@ -7712,7 +7588,7 @@
                 </a:solidFill>
                 <a:latin typeface="Calibri"/>
               </a:rPr>
-              <a:t>La restriccion que hace imposible la doble reserva</a:t>
+              <a:t>El bloqueo explicito y la actualizacion condicional</a:t>
             </a:r>
           </a:p>
         </p:txBody>
@@ -7726,7 +7602,7 @@
         <p:spPr>
           <a:xfrm>
             <a:off x="457200" y="1261872"/>
-            <a:ext cx="11277295" cy="4773168"/>
+            <a:ext cx="11277295" cy="5093208"/>
           </a:xfrm>
           <a:prstGeom prst="roundRect">
             <a:avLst>
@@ -7846,7 +7722,7 @@
         <p:spPr>
           <a:xfrm>
             <a:off x="777240" y="1719072"/>
-            <a:ext cx="10637215" cy="4133087"/>
+            <a:ext cx="10637215" cy="4453128"/>
           </a:xfrm>
           <a:prstGeom prst="rect">
             <a:avLst/>
@@ -7871,7 +7747,7 @@
                 </a:solidFill>
                 <a:latin typeface="Calibri"/>
               </a:rPr>
-              <a:t>ALTER TABLE cita</a:t>
+              <a:t>-- Opcion A: bloquear la fila y obligar a esperar</a:t>
             </a:r>
           </a:p>
           <a:p>
@@ -7887,7 +7763,7 @@
                 </a:solidFill>
                 <a:latin typeface="Calibri"/>
               </a:rPr>
-              <a:t>  ADD CONSTRAINT uq_cita_vet_franja</a:t>
+              <a:t>BEGIN;</a:t>
             </a:r>
           </a:p>
           <a:p>
@@ -7903,7 +7779,7 @@
                 </a:solidFill>
                 <a:latin typeface="Calibri"/>
               </a:rPr>
-              <a:t>  UNIQUE (id_veterinario, fecha_hora);</a:t>
+              <a:t>SELECT stock FROM insumo WHERE id_insumo = 5 FOR UPDATE;</a:t>
             </a:r>
           </a:p>
           <a:p>
@@ -7919,7 +7795,7 @@
                 </a:solidFill>
                 <a:latin typeface="Calibri"/>
               </a:rPr>
-              <a:t/>
+              <a:t>UPDATE insumo SET stock = stock - 2 WHERE id_insumo = 5;</a:t>
             </a:r>
           </a:p>
           <a:p>
@@ -7935,7 +7811,7 @@
                 </a:solidFill>
                 <a:latin typeface="Calibri"/>
               </a:rPr>
-              <a:t>-- T2 intenta la misma franja que T1:</a:t>
+              <a:t>COMMIT;</a:t>
             </a:r>
           </a:p>
           <a:p>
@@ -7951,7 +7827,71 @@
                 </a:solidFill>
                 <a:latin typeface="Calibri"/>
               </a:rPr>
-              <a:t>-- ORA-00001: unique constraint violated</a:t>
+              <a:t/>
+            </a:r>
+          </a:p>
+          <a:p>
+            <a:pPr>
+              <a:spcAft>
+                <a:spcPts val="400"/>
+              </a:spcAft>
+            </a:pPr>
+            <a:r>
+              <a:rPr sz="1400" b="0" i="0">
+                <a:solidFill>
+                  <a:srgbClr val="FFFFFF"/>
+                </a:solidFill>
+                <a:latin typeface="Calibri"/>
+              </a:rPr>
+              <a:t>-- Opcion B: sin bloqueo, poniendo la condicion DENTRO del UPDATE</a:t>
+            </a:r>
+          </a:p>
+          <a:p>
+            <a:pPr>
+              <a:spcAft>
+                <a:spcPts val="400"/>
+              </a:spcAft>
+            </a:pPr>
+            <a:r>
+              <a:rPr sz="1400" b="0" i="0">
+                <a:solidFill>
+                  <a:srgbClr val="FFFFFF"/>
+                </a:solidFill>
+                <a:latin typeface="Calibri"/>
+              </a:rPr>
+              <a:t>UPDATE insumo SET stock = stock - 2</a:t>
+            </a:r>
+          </a:p>
+          <a:p>
+            <a:pPr>
+              <a:spcAft>
+                <a:spcPts val="400"/>
+              </a:spcAft>
+            </a:pPr>
+            <a:r>
+              <a:rPr sz="1400" b="0" i="0">
+                <a:solidFill>
+                  <a:srgbClr val="FFFFFF"/>
+                </a:solidFill>
+                <a:latin typeface="Calibri"/>
+              </a:rPr>
+              <a:t>WHERE id_insumo = 5 AND stock &gt;= 2;</a:t>
+            </a:r>
+          </a:p>
+          <a:p>
+            <a:pPr>
+              <a:spcAft>
+                <a:spcPts val="400"/>
+              </a:spcAft>
+            </a:pPr>
+            <a:r>
+              <a:rPr sz="1400" b="0" i="0">
+                <a:solidFill>
+                  <a:srgbClr val="FFFFFF"/>
+                </a:solidFill>
+                <a:latin typeface="Calibri"/>
+              </a:rPr>
+              <a:t>-- Si devuelve UPDATE 0, otro llego primero. Se comprueba, no se supone.</a:t>
             </a:r>
           </a:p>
         </p:txBody>
@@ -7959,41 +7899,6 @@
       <p:sp>
         <p:nvSpPr>
           <p:cNvPr id="9" name="TextBox 8"/>
-          <p:cNvSpPr txBox="1"/>
-          <p:nvPr/>
-        </p:nvSpPr>
-        <p:spPr>
-          <a:xfrm>
-            <a:off x="457200" y="6080760"/>
-            <a:ext cx="11277295" cy="320040"/>
-          </a:xfrm>
-          <a:prstGeom prst="rect">
-            <a:avLst/>
-          </a:prstGeom>
-          <a:noFill/>
-        </p:spPr>
-        <p:txBody>
-          <a:bodyPr wrap="square">
-            <a:spAutoFit/>
-          </a:bodyPr>
-          <a:lstStyle/>
-          <a:p>
-            <a:pPr algn="ctr"/>
-            <a:r>
-              <a:rPr sz="1200" b="0" i="1">
-                <a:solidFill>
-                  <a:srgbClr val="666666"/>
-                </a:solidFill>
-                <a:latin typeface="Calibri"/>
-              </a:rPr>
-              <a:t>Poner solo BEGIN/COMMIT no basta: ambas transacciones leen 'libre' antes de confirmar.</a:t>
-            </a:r>
-          </a:p>
-        </p:txBody>
-      </p:sp>
-      <p:sp>
-        <p:nvSpPr>
-          <p:cNvPr id="10" name="TextBox 9"/>
           <p:cNvSpPr txBox="1"/>
           <p:nvPr/>
         </p:nvSpPr>
@@ -8167,21 +8072,141 @@
                 </a:solidFill>
                 <a:latin typeface="Calibri"/>
               </a:rPr>
-              <a:t>Demo del dia</a:t>
-            </a:r>
-          </a:p>
-        </p:txBody>
-      </p:sp>
-      <p:sp>
-        <p:nvSpPr>
-          <p:cNvPr id="5" name="TextBox 4"/>
+              <a:t>Niveles de aislamiento: que anomalia tapa cada uno</a:t>
+            </a:r>
+          </a:p>
+        </p:txBody>
+      </p:sp>
+      <p:sp>
+        <p:nvSpPr>
+          <p:cNvPr id="5" name="Rounded Rectangle 4"/>
+          <p:cNvSpPr/>
+          <p:nvPr/>
+        </p:nvSpPr>
+        <p:spPr>
+          <a:xfrm>
+            <a:off x="457200" y="1261872"/>
+            <a:ext cx="11277295" cy="5093208"/>
+          </a:xfrm>
+          <a:prstGeom prst="roundRect">
+            <a:avLst>
+              <a:gd name="adj" fmla="val 12000"/>
+            </a:avLst>
+          </a:prstGeom>
+          <a:solidFill>
+            <a:srgbClr val="1E2A38"/>
+          </a:solidFill>
+          <a:ln>
+            <a:noFill/>
+          </a:ln>
+        </p:spPr>
+        <p:style>
+          <a:lnRef idx="1">
+            <a:schemeClr val="accent1"/>
+          </a:lnRef>
+          <a:fillRef idx="3">
+            <a:schemeClr val="accent1"/>
+          </a:fillRef>
+          <a:effectRef idx="2">
+            <a:schemeClr val="accent1"/>
+          </a:effectRef>
+          <a:fontRef idx="minor">
+            <a:schemeClr val="lt1"/>
+          </a:fontRef>
+        </p:style>
+        <p:txBody>
+          <a:bodyPr rtlCol="0" anchor="ctr"/>
+          <a:lstStyle/>
+          <a:p>
+            <a:pPr algn="ctr"/>
+          </a:p>
+        </p:txBody>
+      </p:sp>
+      <p:sp>
+        <p:nvSpPr>
+          <p:cNvPr id="6" name="Rectangle 5"/>
+          <p:cNvSpPr/>
+          <p:nvPr/>
+        </p:nvSpPr>
+        <p:spPr>
+          <a:xfrm>
+            <a:off x="457200" y="1261872"/>
+            <a:ext cx="11277295" cy="320040"/>
+          </a:xfrm>
+          <a:prstGeom prst="rect">
+            <a:avLst/>
+          </a:prstGeom>
+          <a:solidFill>
+            <a:srgbClr val="095292"/>
+          </a:solidFill>
+          <a:ln>
+            <a:noFill/>
+          </a:ln>
+        </p:spPr>
+        <p:style>
+          <a:lnRef idx="1">
+            <a:schemeClr val="accent1"/>
+          </a:lnRef>
+          <a:fillRef idx="3">
+            <a:schemeClr val="accent1"/>
+          </a:fillRef>
+          <a:effectRef idx="2">
+            <a:schemeClr val="accent1"/>
+          </a:effectRef>
+          <a:fontRef idx="minor">
+            <a:schemeClr val="lt1"/>
+          </a:fontRef>
+        </p:style>
+        <p:txBody>
+          <a:bodyPr rtlCol="0" anchor="ctr"/>
+          <a:lstStyle/>
+          <a:p>
+            <a:pPr algn="ctr"/>
+          </a:p>
+        </p:txBody>
+      </p:sp>
+      <p:sp>
+        <p:nvSpPr>
+          <p:cNvPr id="7" name="TextBox 6"/>
           <p:cNvSpPr txBox="1"/>
           <p:nvPr/>
         </p:nvSpPr>
         <p:spPr>
           <a:xfrm>
-            <a:off x="457200" y="1170432"/>
-            <a:ext cx="11277295" cy="5230368"/>
+            <a:off x="685800" y="1307592"/>
+            <a:ext cx="10820095" cy="256032"/>
+          </a:xfrm>
+          <a:prstGeom prst="rect">
+            <a:avLst/>
+          </a:prstGeom>
+          <a:noFill/>
+        </p:spPr>
+        <p:txBody>
+          <a:bodyPr wrap="square" anchor="ctr"/>
+          <a:lstStyle/>
+          <a:p>
+            <a:r>
+              <a:rPr sz="1000" b="1" i="0">
+                <a:solidFill>
+                  <a:srgbClr val="269CCB"/>
+                </a:solidFill>
+                <a:latin typeface="Calibri"/>
+              </a:rPr>
+              <a:t>● ● ●</a:t>
+            </a:r>
+          </a:p>
+        </p:txBody>
+      </p:sp>
+      <p:sp>
+        <p:nvSpPr>
+          <p:cNvPr id="8" name="TextBox 7"/>
+          <p:cNvSpPr txBox="1"/>
+          <p:nvPr/>
+        </p:nvSpPr>
+        <p:spPr>
+          <a:xfrm>
+            <a:off x="777240" y="1719072"/>
+            <a:ext cx="10637215" cy="4453128"/>
           </a:xfrm>
           <a:prstGeom prst="rect">
             <a:avLst/>
@@ -8196,108 +8221,216 @@
           <a:p>
             <a:pPr>
               <a:spcAft>
-                <a:spcPts val="800"/>
+                <a:spcPts val="400"/>
               </a:spcAft>
             </a:pPr>
             <a:r>
-              <a:rPr sz="2000" b="0" i="0">
-                <a:solidFill>
-                  <a:srgbClr val="333333"/>
-                </a:solidFill>
-                <a:latin typeface="Calibri"/>
-              </a:rPr>
-              <a:t>–   </a:t>
-            </a:r>
-            <a:r>
-              <a:rPr sz="2000" b="1" i="0">
-                <a:solidFill>
-                  <a:srgbClr val="333333"/>
-                </a:solidFill>
-                <a:latin typeface="Calibri"/>
-              </a:rPr>
-              <a:t>Herramienta:</a:t>
-            </a:r>
-            <a:r>
-              <a:rPr sz="2000" b="0" i="0">
-                <a:solidFill>
-                  <a:srgbClr val="333333"/>
-                </a:solidFill>
-                <a:latin typeface="Calibri"/>
-              </a:rPr>
-              <a:t> Google Docs + Live SQL</a:t>
+              <a:rPr sz="1400" b="0" i="0">
+                <a:solidFill>
+                  <a:srgbClr val="FFFFFF"/>
+                </a:solidFill>
+                <a:latin typeface="Calibri"/>
+              </a:rPr>
+              <a:t>SHOW transaction_isolation;      -- en PostgreSQL: read committed</a:t>
             </a:r>
           </a:p>
           <a:p>
             <a:pPr>
               <a:spcAft>
-                <a:spcPts val="800"/>
+                <a:spcPts val="400"/>
               </a:spcAft>
             </a:pPr>
             <a:r>
-              <a:rPr sz="2000" b="0" i="0">
-                <a:solidFill>
-                  <a:srgbClr val="333333"/>
-                </a:solidFill>
-                <a:latin typeface="Calibri"/>
-              </a:rPr>
-              <a:t>–   </a:t>
-            </a:r>
-            <a:r>
-              <a:rPr sz="2000" b="1" i="0">
-                <a:solidFill>
-                  <a:srgbClr val="333333"/>
-                </a:solidFill>
-                <a:latin typeface="Calibri"/>
-              </a:rPr>
-              <a:t>Demo:</a:t>
-            </a:r>
-            <a:r>
-              <a:rPr sz="2000" b="0" i="0">
-                <a:solidFill>
-                  <a:srgbClr val="333333"/>
-                </a:solidFill>
-                <a:latin typeface="Calibri"/>
-              </a:rPr>
-              <a:t> Narrativa paso a paso T1/T2 sobre tabla Cita.</a:t>
+              <a:rPr sz="1400" b="0" i="0">
+                <a:solidFill>
+                  <a:srgbClr val="FFFFFF"/>
+                </a:solidFill>
+                <a:latin typeface="Calibri"/>
+              </a:rPr>
+              <a:t/>
             </a:r>
           </a:p>
           <a:p>
             <a:pPr>
               <a:spcAft>
-                <a:spcPts val="800"/>
+                <a:spcPts val="400"/>
               </a:spcAft>
             </a:pPr>
             <a:r>
-              <a:rPr sz="2000" b="0" i="0">
-                <a:solidFill>
-                  <a:srgbClr val="333333"/>
-                </a:solidFill>
-                <a:latin typeface="Calibri"/>
-              </a:rPr>
-              <a:t>–   Sigan el mismo dominio VetCare (no inventen otro caso).</a:t>
+              <a:rPr sz="1400" b="0" i="0">
+                <a:solidFill>
+                  <a:srgbClr val="FFFFFF"/>
+                </a:solidFill>
+                <a:latin typeface="Calibri"/>
+              </a:rPr>
+              <a:t>BEGIN ISOLATION LEVEL REPEATABLE READ;</a:t>
             </a:r>
           </a:p>
           <a:p>
             <a:pPr>
               <a:spcAft>
-                <a:spcPts val="800"/>
+                <a:spcPts val="400"/>
               </a:spcAft>
             </a:pPr>
             <a:r>
-              <a:rPr sz="2000" b="0" i="0">
-                <a:solidFill>
-                  <a:srgbClr val="333333"/>
-                </a:solidFill>
-                <a:latin typeface="Calibri"/>
-              </a:rPr>
-              <a:t>–   Al final de la demo: dejar enlace/script compartible al grupo.</a:t>
-            </a:r>
-          </a:p>
-        </p:txBody>
-      </p:sp>
-      <p:sp>
-        <p:nvSpPr>
-          <p:cNvPr id="6" name="TextBox 5"/>
+              <a:rPr sz="1400" b="0" i="0">
+                <a:solidFill>
+                  <a:srgbClr val="FFFFFF"/>
+                </a:solidFill>
+                <a:latin typeface="Calibri"/>
+              </a:rPr>
+              <a:t>  -- la misma consulta devuelve lo mismo durante toda la transaccion</a:t>
+            </a:r>
+          </a:p>
+          <a:p>
+            <a:pPr>
+              <a:spcAft>
+                <a:spcPts val="400"/>
+              </a:spcAft>
+            </a:pPr>
+            <a:r>
+              <a:rPr sz="1400" b="0" i="0">
+                <a:solidFill>
+                  <a:srgbClr val="FFFFFF"/>
+                </a:solidFill>
+                <a:latin typeface="Calibri"/>
+              </a:rPr>
+              <a:t>COMMIT;</a:t>
+            </a:r>
+          </a:p>
+          <a:p>
+            <a:pPr>
+              <a:spcAft>
+                <a:spcPts val="400"/>
+              </a:spcAft>
+            </a:pPr>
+            <a:r>
+              <a:rPr sz="1400" b="0" i="0">
+                <a:solidFill>
+                  <a:srgbClr val="FFFFFF"/>
+                </a:solidFill>
+                <a:latin typeface="Calibri"/>
+              </a:rPr>
+              <a:t/>
+            </a:r>
+          </a:p>
+          <a:p>
+            <a:pPr>
+              <a:spcAft>
+                <a:spcPts val="400"/>
+              </a:spcAft>
+            </a:pPr>
+            <a:r>
+              <a:rPr sz="1400" b="0" i="0">
+                <a:solidFill>
+                  <a:srgbClr val="FFFFFF"/>
+                </a:solidFill>
+                <a:latin typeface="Calibri"/>
+              </a:rPr>
+              <a:t>BEGIN ISOLATION LEVEL SERIALIZABLE;</a:t>
+            </a:r>
+          </a:p>
+          <a:p>
+            <a:pPr>
+              <a:spcAft>
+                <a:spcPts val="400"/>
+              </a:spcAft>
+            </a:pPr>
+            <a:r>
+              <a:rPr sz="1400" b="0" i="0">
+                <a:solidFill>
+                  <a:srgbClr val="FFFFFF"/>
+                </a:solidFill>
+                <a:latin typeface="Calibri"/>
+              </a:rPr>
+              <a:t>  -- PostgreSQL detecta el conflicto y ABORTA una de las dos:</a:t>
+            </a:r>
+          </a:p>
+          <a:p>
+            <a:pPr>
+              <a:spcAft>
+                <a:spcPts val="400"/>
+              </a:spcAft>
+            </a:pPr>
+            <a:r>
+              <a:rPr sz="1400" b="0" i="0">
+                <a:solidFill>
+                  <a:srgbClr val="FFFFFF"/>
+                </a:solidFill>
+                <a:latin typeface="Calibri"/>
+              </a:rPr>
+              <a:t>  -- ERROR: could not serialize access due to read/write dependencies</a:t>
+            </a:r>
+          </a:p>
+          <a:p>
+            <a:pPr>
+              <a:spcAft>
+                <a:spcPts val="400"/>
+              </a:spcAft>
+            </a:pPr>
+            <a:r>
+              <a:rPr sz="1400" b="0" i="0">
+                <a:solidFill>
+                  <a:srgbClr val="FFFFFF"/>
+                </a:solidFill>
+                <a:latin typeface="Calibri"/>
+              </a:rPr>
+              <a:t>COMMIT;</a:t>
+            </a:r>
+          </a:p>
+          <a:p>
+            <a:pPr>
+              <a:spcAft>
+                <a:spcPts val="400"/>
+              </a:spcAft>
+            </a:pPr>
+            <a:r>
+              <a:rPr sz="1400" b="0" i="0">
+                <a:solidFill>
+                  <a:srgbClr val="FFFFFF"/>
+                </a:solidFill>
+                <a:latin typeface="Calibri"/>
+              </a:rPr>
+              <a:t/>
+            </a:r>
+          </a:p>
+          <a:p>
+            <a:pPr>
+              <a:spcAft>
+                <a:spcPts val="400"/>
+              </a:spcAft>
+            </a:pPr>
+            <a:r>
+              <a:rPr sz="1400" b="0" i="0">
+                <a:solidFill>
+                  <a:srgbClr val="FFFFFF"/>
+                </a:solidFill>
+                <a:latin typeface="Calibri"/>
+              </a:rPr>
+              <a:t>-- PostgreSQL no tiene READ UNCOMMITTED real: se comporta como READ COMMITTED.</a:t>
+            </a:r>
+          </a:p>
+          <a:p>
+            <a:pPr>
+              <a:spcAft>
+                <a:spcPts val="400"/>
+              </a:spcAft>
+            </a:pPr>
+            <a:r>
+              <a:rPr sz="1400" b="0" i="0">
+                <a:solidFill>
+                  <a:srgbClr val="FFFFFF"/>
+                </a:solidFill>
+                <a:latin typeface="Calibri"/>
+              </a:rPr>
+              <a:t>-- Y serializable no evita el error: obliga a REINTENTAR en la aplicacion.</a:t>
+            </a:r>
+          </a:p>
+        </p:txBody>
+      </p:sp>
+      <p:sp>
+        <p:nvSpPr>
+          <p:cNvPr id="9" name="TextBox 8"/>
           <p:cNvSpPr txBox="1"/>
           <p:nvPr/>
         </p:nvSpPr>
@@ -8471,7 +8604,7 @@
                 </a:solidFill>
                 <a:latin typeface="Calibri"/>
               </a:rPr>
-              <a:t>Herramientas de hoy</a:t>
+              <a:t>Doble reserva sin control de concurrencia</a:t>
             </a:r>
           </a:p>
         </p:txBody>
@@ -8505,7 +8638,7 @@
                 </a:solidFill>
                 <a:latin typeface="Calibri"/>
               </a:rPr>
-              <a:t>Gratis · navegador o free tier</a:t>
+              <a:t>Dos transacciones concurrentes leen “libre” antes de que ninguna confirme</a:t>
             </a:r>
           </a:p>
         </p:txBody>
@@ -8518,56 +8651,13 @@
         </p:nvSpPr>
         <p:spPr>
           <a:xfrm>
-            <a:off x="457200" y="1591056"/>
-            <a:ext cx="3624986" cy="2331720"/>
+            <a:off x="731520" y="2011680"/>
+            <a:ext cx="2834640" cy="914400"/>
           </a:xfrm>
           <a:prstGeom prst="roundRect">
             <a:avLst>
               <a:gd name="adj" fmla="val 12000"/>
             </a:avLst>
-          </a:prstGeom>
-          <a:solidFill>
-            <a:srgbClr val="F2F2F2"/>
-          </a:solidFill>
-          <a:ln>
-            <a:noFill/>
-          </a:ln>
-        </p:spPr>
-        <p:style>
-          <a:lnRef idx="1">
-            <a:schemeClr val="accent1"/>
-          </a:lnRef>
-          <a:fillRef idx="3">
-            <a:schemeClr val="accent1"/>
-          </a:fillRef>
-          <a:effectRef idx="2">
-            <a:schemeClr val="accent1"/>
-          </a:effectRef>
-          <a:fontRef idx="minor">
-            <a:schemeClr val="lt1"/>
-          </a:fontRef>
-        </p:style>
-        <p:txBody>
-          <a:bodyPr rtlCol="0" anchor="ctr"/>
-          <a:lstStyle/>
-          <a:p>
-            <a:pPr algn="ctr"/>
-          </a:p>
-        </p:txBody>
-      </p:sp>
-      <p:sp>
-        <p:nvSpPr>
-          <p:cNvPr id="7" name="Rectangle 6"/>
-          <p:cNvSpPr/>
-          <p:nvPr/>
-        </p:nvSpPr>
-        <p:spPr>
-          <a:xfrm>
-            <a:off x="457200" y="1591056"/>
-            <a:ext cx="3624986" cy="64008"/>
-          </a:xfrm>
-          <a:prstGeom prst="rect">
-            <a:avLst/>
           </a:prstGeom>
           <a:solidFill>
             <a:srgbClr val="095292"/>
@@ -8591,187 +8681,38 @@
           </a:fontRef>
         </p:style>
         <p:txBody>
-          <a:bodyPr rtlCol="0" anchor="ctr"/>
+          <a:bodyPr rtlCol="0" anchor="ctr" wrap="square"/>
           <a:lstStyle/>
           <a:p>
             <a:pPr algn="ctr"/>
-          </a:p>
-        </p:txBody>
-      </p:sp>
-      <p:sp>
-        <p:nvSpPr>
-          <p:cNvPr id="8" name="Rectangle 7"/>
+            <a:r>
+              <a:rPr sz="1300" b="1" i="0">
+                <a:solidFill>
+                  <a:srgbClr val="FFFFFF"/>
+                </a:solidFill>
+                <a:latin typeface="Calibri"/>
+              </a:rPr>
+              <a:t>T1 (Recepción A)
+lee franja: LIBRE</a:t>
+            </a:r>
+          </a:p>
+        </p:txBody>
+      </p:sp>
+      <p:sp>
+        <p:nvSpPr>
+          <p:cNvPr id="7" name="Rounded Rectangle 6"/>
           <p:cNvSpPr/>
           <p:nvPr/>
         </p:nvSpPr>
         <p:spPr>
           <a:xfrm>
-            <a:off x="457200" y="1655064"/>
-            <a:ext cx="3624986" cy="27432"/>
-          </a:xfrm>
-          <a:prstGeom prst="rect">
-            <a:avLst/>
-          </a:prstGeom>
-          <a:solidFill>
-            <a:srgbClr val="FFD000"/>
-          </a:solidFill>
-          <a:ln>
-            <a:noFill/>
-          </a:ln>
-        </p:spPr>
-        <p:style>
-          <a:lnRef idx="1">
-            <a:schemeClr val="accent1"/>
-          </a:lnRef>
-          <a:fillRef idx="3">
-            <a:schemeClr val="accent1"/>
-          </a:fillRef>
-          <a:effectRef idx="2">
-            <a:schemeClr val="accent1"/>
-          </a:effectRef>
-          <a:fontRef idx="minor">
-            <a:schemeClr val="lt1"/>
-          </a:fontRef>
-        </p:style>
-        <p:txBody>
-          <a:bodyPr rtlCol="0" anchor="ctr"/>
-          <a:lstStyle/>
-          <a:p>
-            <a:pPr algn="ctr"/>
-          </a:p>
-        </p:txBody>
-      </p:sp>
-      <p:pic>
-        <p:nvPicPr>
-          <p:cNvPr id="9" name="Picture 8" descr="google_docs.png"/>
-          <p:cNvPicPr>
-            <a:picLocks noChangeAspect="1"/>
-          </p:cNvPicPr>
-          <p:nvPr/>
-        </p:nvPicPr>
-        <p:blipFill>
-          <a:blip r:embed="rId2"/>
-          <a:stretch>
-            <a:fillRect/>
-          </a:stretch>
-        </p:blipFill>
-        <p:spPr>
-          <a:xfrm>
-            <a:off x="1643329" y="1847087"/>
-            <a:ext cx="1252728" cy="1252728"/>
-          </a:xfrm>
-          <a:prstGeom prst="rect">
-            <a:avLst/>
-          </a:prstGeom>
-        </p:spPr>
-      </p:pic>
-      <p:sp>
-        <p:nvSpPr>
-          <p:cNvPr id="10" name="TextBox 9"/>
-          <p:cNvSpPr txBox="1"/>
-          <p:nvPr/>
-        </p:nvSpPr>
-        <p:spPr>
-          <a:xfrm>
-            <a:off x="530352" y="3191256"/>
-            <a:ext cx="3478682" cy="621792"/>
-          </a:xfrm>
-          <a:prstGeom prst="rect">
-            <a:avLst/>
-          </a:prstGeom>
-          <a:noFill/>
-        </p:spPr>
-        <p:txBody>
-          <a:bodyPr wrap="square" anchor="t"/>
-          <a:lstStyle/>
-          <a:p>
-            <a:pPr algn="ctr"/>
-            <a:r>
-              <a:rPr sz="1300" b="1" i="0">
-                <a:solidFill>
-                  <a:srgbClr val="095292"/>
-                </a:solidFill>
-                <a:latin typeface="Calibri"/>
-              </a:rPr>
-              <a:t>Google Docs</a:t>
-            </a:r>
-          </a:p>
-          <a:p>
-            <a:pPr algn="ctr">
-              <a:spcBef>
-                <a:spcPts val="200"/>
-              </a:spcBef>
-            </a:pPr>
-            <a:r>
-              <a:rPr sz="1000" b="0" i="0">
-                <a:solidFill>
-                  <a:srgbClr val="666666"/>
-                </a:solidFill>
-                <a:latin typeface="Calibri"/>
-              </a:rPr>
-              <a:t>Escenarios T1/T2</a:t>
-            </a:r>
-          </a:p>
-        </p:txBody>
-      </p:sp>
-      <p:sp>
-        <p:nvSpPr>
-          <p:cNvPr id="11" name="Rounded Rectangle 10"/>
-          <p:cNvSpPr/>
-          <p:nvPr/>
-        </p:nvSpPr>
-        <p:spPr>
-          <a:xfrm>
-            <a:off x="4283354" y="1591056"/>
-            <a:ext cx="3624986" cy="2331720"/>
+            <a:off x="4206240" y="2011680"/>
+            <a:ext cx="2834640" cy="914400"/>
           </a:xfrm>
           <a:prstGeom prst="roundRect">
             <a:avLst>
               <a:gd name="adj" fmla="val 12000"/>
             </a:avLst>
-          </a:prstGeom>
-          <a:solidFill>
-            <a:srgbClr val="F2F2F2"/>
-          </a:solidFill>
-          <a:ln>
-            <a:noFill/>
-          </a:ln>
-        </p:spPr>
-        <p:style>
-          <a:lnRef idx="1">
-            <a:schemeClr val="accent1"/>
-          </a:lnRef>
-          <a:fillRef idx="3">
-            <a:schemeClr val="accent1"/>
-          </a:fillRef>
-          <a:effectRef idx="2">
-            <a:schemeClr val="accent1"/>
-          </a:effectRef>
-          <a:fontRef idx="minor">
-            <a:schemeClr val="lt1"/>
-          </a:fontRef>
-        </p:style>
-        <p:txBody>
-          <a:bodyPr rtlCol="0" anchor="ctr"/>
-          <a:lstStyle/>
-          <a:p>
-            <a:pPr algn="ctr"/>
-          </a:p>
-        </p:txBody>
-      </p:sp>
-      <p:sp>
-        <p:nvSpPr>
-          <p:cNvPr id="12" name="Rectangle 11"/>
-          <p:cNvSpPr/>
-          <p:nvPr/>
-        </p:nvSpPr>
-        <p:spPr>
-          <a:xfrm>
-            <a:off x="4283354" y="1591056"/>
-            <a:ext cx="3624986" cy="64008"/>
-          </a:xfrm>
-          <a:prstGeom prst="rect">
-            <a:avLst/>
           </a:prstGeom>
           <a:solidFill>
             <a:srgbClr val="095292"/>
@@ -8795,29 +8736,41 @@
           </a:fontRef>
         </p:style>
         <p:txBody>
-          <a:bodyPr rtlCol="0" anchor="ctr"/>
+          <a:bodyPr rtlCol="0" anchor="ctr" wrap="square"/>
           <a:lstStyle/>
           <a:p>
             <a:pPr algn="ctr"/>
-          </a:p>
-        </p:txBody>
-      </p:sp>
-      <p:sp>
-        <p:nvSpPr>
-          <p:cNvPr id="13" name="Rectangle 12"/>
+            <a:r>
+              <a:rPr sz="1300" b="1" i="0">
+                <a:solidFill>
+                  <a:srgbClr val="FFFFFF"/>
+                </a:solidFill>
+                <a:latin typeface="Calibri"/>
+              </a:rPr>
+              <a:t>T1: INSERT cita
+COMMIT → OK</a:t>
+            </a:r>
+          </a:p>
+        </p:txBody>
+      </p:sp>
+      <p:sp>
+        <p:nvSpPr>
+          <p:cNvPr id="8" name="Rounded Rectangle 7"/>
           <p:cNvSpPr/>
           <p:nvPr/>
         </p:nvSpPr>
         <p:spPr>
           <a:xfrm>
-            <a:off x="4283354" y="1655064"/>
-            <a:ext cx="3624986" cy="27432"/>
-          </a:xfrm>
-          <a:prstGeom prst="rect">
-            <a:avLst/>
+            <a:off x="731520" y="3383280"/>
+            <a:ext cx="2834640" cy="914400"/>
+          </a:xfrm>
+          <a:prstGeom prst="roundRect">
+            <a:avLst>
+              <a:gd name="adj" fmla="val 12000"/>
+            </a:avLst>
           </a:prstGeom>
           <a:solidFill>
-            <a:srgbClr val="FFD000"/>
+            <a:srgbClr val="269CCB"/>
           </a:solidFill>
           <a:ln>
             <a:noFill/>
@@ -8838,96 +8791,33 @@
           </a:fontRef>
         </p:style>
         <p:txBody>
-          <a:bodyPr rtlCol="0" anchor="ctr"/>
+          <a:bodyPr rtlCol="0" anchor="ctr" wrap="square"/>
           <a:lstStyle/>
           <a:p>
             <a:pPr algn="ctr"/>
-          </a:p>
-        </p:txBody>
-      </p:sp>
-      <p:pic>
-        <p:nvPicPr>
-          <p:cNvPr id="14" name="Picture 13" descr="oracle_livesql.png"/>
-          <p:cNvPicPr>
-            <a:picLocks noChangeAspect="1"/>
-          </p:cNvPicPr>
-          <p:nvPr/>
-        </p:nvPicPr>
-        <p:blipFill>
-          <a:blip r:embed="rId3"/>
-          <a:stretch>
-            <a:fillRect/>
-          </a:stretch>
-        </p:blipFill>
-        <p:spPr>
-          <a:xfrm>
-            <a:off x="5469483" y="1847087"/>
-            <a:ext cx="1252728" cy="1252728"/>
-          </a:xfrm>
-          <a:prstGeom prst="rect">
-            <a:avLst/>
-          </a:prstGeom>
-        </p:spPr>
-      </p:pic>
-      <p:sp>
-        <p:nvSpPr>
-          <p:cNvPr id="15" name="TextBox 14"/>
-          <p:cNvSpPr txBox="1"/>
-          <p:nvPr/>
-        </p:nvSpPr>
-        <p:spPr>
-          <a:xfrm>
-            <a:off x="4356506" y="3191256"/>
-            <a:ext cx="3478682" cy="621792"/>
-          </a:xfrm>
-          <a:prstGeom prst="rect">
-            <a:avLst/>
-          </a:prstGeom>
-          <a:noFill/>
-        </p:spPr>
-        <p:txBody>
-          <a:bodyPr wrap="square" anchor="t"/>
-          <a:lstStyle/>
-          <a:p>
-            <a:pPr algn="ctr"/>
             <a:r>
               <a:rPr sz="1300" b="1" i="0">
                 <a:solidFill>
-                  <a:srgbClr val="095292"/>
-                </a:solidFill>
-                <a:latin typeface="Calibri"/>
-              </a:rPr>
-              <a:t>Oracle Live SQL</a:t>
-            </a:r>
-          </a:p>
-          <a:p>
-            <a:pPr algn="ctr">
-              <a:spcBef>
-                <a:spcPts val="200"/>
-              </a:spcBef>
-            </a:pPr>
-            <a:r>
-              <a:rPr sz="1000" b="0" i="0">
-                <a:solidFill>
-                  <a:srgbClr val="666666"/>
-                </a:solidFill>
-                <a:latin typeface="Calibri"/>
-              </a:rPr>
-              <a:t>Demo SQL</a:t>
-            </a:r>
-          </a:p>
-        </p:txBody>
-      </p:sp>
-      <p:sp>
-        <p:nvSpPr>
-          <p:cNvPr id="16" name="Rounded Rectangle 15"/>
+                  <a:srgbClr val="FFFFFF"/>
+                </a:solidFill>
+                <a:latin typeface="Calibri"/>
+              </a:rPr>
+              <a:t>T2 (Recepción B)
+lee franja: LIBRE</a:t>
+            </a:r>
+          </a:p>
+        </p:txBody>
+      </p:sp>
+      <p:sp>
+        <p:nvSpPr>
+          <p:cNvPr id="9" name="Rounded Rectangle 8"/>
           <p:cNvSpPr/>
           <p:nvPr/>
         </p:nvSpPr>
         <p:spPr>
           <a:xfrm>
-            <a:off x="8109508" y="1591056"/>
-            <a:ext cx="3624986" cy="2331720"/>
+            <a:off x="4206240" y="3383280"/>
+            <a:ext cx="2834640" cy="914400"/>
           </a:xfrm>
           <a:prstGeom prst="roundRect">
             <a:avLst>
@@ -8935,7 +8825,7 @@
             </a:avLst>
           </a:prstGeom>
           <a:solidFill>
-            <a:srgbClr val="F2F2F2"/>
+            <a:srgbClr val="A02030"/>
           </a:solidFill>
           <a:ln>
             <a:noFill/>
@@ -8956,133 +8846,175 @@
           </a:fontRef>
         </p:style>
         <p:txBody>
-          <a:bodyPr rtlCol="0" anchor="ctr"/>
+          <a:bodyPr rtlCol="0" anchor="ctr" wrap="square"/>
           <a:lstStyle/>
           <a:p>
             <a:pPr algn="ctr"/>
-          </a:p>
-        </p:txBody>
-      </p:sp>
-      <p:sp>
-        <p:nvSpPr>
-          <p:cNvPr id="17" name="Rectangle 16"/>
-          <p:cNvSpPr/>
-          <p:nvPr/>
-        </p:nvSpPr>
-        <p:spPr>
-          <a:xfrm>
-            <a:off x="8109508" y="1591056"/>
-            <a:ext cx="3624986" cy="64008"/>
-          </a:xfrm>
-          <a:prstGeom prst="rect">
-            <a:avLst/>
-          </a:prstGeom>
-          <a:solidFill>
-            <a:srgbClr val="095292"/>
-          </a:solidFill>
-          <a:ln>
-            <a:noFill/>
+            <a:r>
+              <a:rPr sz="1300" b="1" i="0">
+                <a:solidFill>
+                  <a:srgbClr val="FFFFFF"/>
+                </a:solidFill>
+                <a:latin typeface="Calibri"/>
+              </a:rPr>
+              <a:t>T2: INSERT cita
+COMMIT → ¡DOBLE RESERVA!</a:t>
+            </a:r>
+          </a:p>
+        </p:txBody>
+      </p:sp>
+      <p:cxnSp>
+        <p:nvCxnSpPr>
+          <p:cNvPr id="10" name="Connector 9"/>
+          <p:cNvCxnSpPr/>
+          <p:nvPr/>
+        </p:nvCxnSpPr>
+        <p:spPr>
+          <a:xfrm>
+            <a:off x="3566160" y="2468880"/>
+            <a:ext cx="640080" cy="0"/>
+          </a:xfrm>
+          <a:prstGeom prst="line">
+            <a:avLst/>
+          </a:prstGeom>
+          <a:ln w="22225">
+            <a:solidFill>
+              <a:srgbClr val="666666"/>
+            </a:solidFill>
+            <a:tailEnd type="triangle" w="med" len="med"/>
           </a:ln>
         </p:spPr>
         <p:style>
-          <a:lnRef idx="1">
+          <a:lnRef idx="2">
             <a:schemeClr val="accent1"/>
           </a:lnRef>
-          <a:fillRef idx="3">
+          <a:fillRef idx="0">
             <a:schemeClr val="accent1"/>
           </a:fillRef>
-          <a:effectRef idx="2">
+          <a:effectRef idx="1">
             <a:schemeClr val="accent1"/>
           </a:effectRef>
           <a:fontRef idx="minor">
-            <a:schemeClr val="lt1"/>
+            <a:schemeClr val="tx1"/>
           </a:fontRef>
         </p:style>
-        <p:txBody>
-          <a:bodyPr rtlCol="0" anchor="ctr"/>
+      </p:cxnSp>
+      <p:sp>
+        <p:nvSpPr>
+          <p:cNvPr id="11" name="TextBox 10"/>
+          <p:cNvSpPr txBox="1"/>
+          <p:nvPr/>
+        </p:nvSpPr>
+        <p:spPr>
+          <a:xfrm>
+            <a:off x="3063240" y="2267712"/>
+            <a:ext cx="1645920" cy="320040"/>
+          </a:xfrm>
+          <a:prstGeom prst="rect">
+            <a:avLst/>
+          </a:prstGeom>
+          <a:noFill/>
+        </p:spPr>
+        <p:txBody>
+          <a:bodyPr wrap="square">
+            <a:spAutoFit/>
+          </a:bodyPr>
           <a:lstStyle/>
           <a:p>
             <a:pPr algn="ctr"/>
-          </a:p>
-        </p:txBody>
-      </p:sp>
-      <p:sp>
-        <p:nvSpPr>
-          <p:cNvPr id="18" name="Rectangle 17"/>
-          <p:cNvSpPr/>
-          <p:nvPr/>
-        </p:nvSpPr>
-        <p:spPr>
-          <a:xfrm>
-            <a:off x="8109508" y="1655064"/>
-            <a:ext cx="3624986" cy="27432"/>
-          </a:xfrm>
-          <a:prstGeom prst="rect">
-            <a:avLst/>
-          </a:prstGeom>
-          <a:solidFill>
-            <a:srgbClr val="FFD000"/>
-          </a:solidFill>
-          <a:ln>
-            <a:noFill/>
+            <a:r>
+              <a:rPr sz="1000" b="0" i="1">
+                <a:solidFill>
+                  <a:srgbClr val="666666"/>
+                </a:solidFill>
+                <a:latin typeface="Calibri"/>
+              </a:rPr>
+              <a:t>tiempo →</a:t>
+            </a:r>
+          </a:p>
+        </p:txBody>
+      </p:sp>
+      <p:cxnSp>
+        <p:nvCxnSpPr>
+          <p:cNvPr id="12" name="Connector 11"/>
+          <p:cNvCxnSpPr/>
+          <p:nvPr/>
+        </p:nvCxnSpPr>
+        <p:spPr>
+          <a:xfrm>
+            <a:off x="3566160" y="3840480"/>
+            <a:ext cx="640080" cy="0"/>
+          </a:xfrm>
+          <a:prstGeom prst="line">
+            <a:avLst/>
+          </a:prstGeom>
+          <a:ln w="22225">
+            <a:solidFill>
+              <a:srgbClr val="666666"/>
+            </a:solidFill>
+            <a:tailEnd type="triangle" w="med" len="med"/>
           </a:ln>
         </p:spPr>
         <p:style>
-          <a:lnRef idx="1">
+          <a:lnRef idx="2">
             <a:schemeClr val="accent1"/>
           </a:lnRef>
-          <a:fillRef idx="3">
+          <a:fillRef idx="0">
             <a:schemeClr val="accent1"/>
           </a:fillRef>
-          <a:effectRef idx="2">
+          <a:effectRef idx="1">
             <a:schemeClr val="accent1"/>
           </a:effectRef>
           <a:fontRef idx="minor">
-            <a:schemeClr val="lt1"/>
+            <a:schemeClr val="tx1"/>
           </a:fontRef>
         </p:style>
-        <p:txBody>
-          <a:bodyPr rtlCol="0" anchor="ctr"/>
+      </p:cxnSp>
+      <p:sp>
+        <p:nvSpPr>
+          <p:cNvPr id="13" name="TextBox 12"/>
+          <p:cNvSpPr txBox="1"/>
+          <p:nvPr/>
+        </p:nvSpPr>
+        <p:spPr>
+          <a:xfrm>
+            <a:off x="3063240" y="3639312"/>
+            <a:ext cx="1645920" cy="320040"/>
+          </a:xfrm>
+          <a:prstGeom prst="rect">
+            <a:avLst/>
+          </a:prstGeom>
+          <a:noFill/>
+        </p:spPr>
+        <p:txBody>
+          <a:bodyPr wrap="square">
+            <a:spAutoFit/>
+          </a:bodyPr>
           <a:lstStyle/>
           <a:p>
             <a:pPr algn="ctr"/>
-          </a:p>
-        </p:txBody>
-      </p:sp>
-      <p:pic>
-        <p:nvPicPr>
-          <p:cNvPr id="19" name="Picture 18" descr="dbfiddle.png"/>
-          <p:cNvPicPr>
-            <a:picLocks noChangeAspect="1"/>
-          </p:cNvPicPr>
-          <p:nvPr/>
-        </p:nvPicPr>
-        <p:blipFill>
-          <a:blip r:embed="rId4"/>
-          <a:stretch>
-            <a:fillRect/>
-          </a:stretch>
-        </p:blipFill>
-        <p:spPr>
-          <a:xfrm>
-            <a:off x="9295638" y="1847087"/>
-            <a:ext cx="1252728" cy="1252728"/>
-          </a:xfrm>
-          <a:prstGeom prst="rect">
-            <a:avLst/>
-          </a:prstGeom>
-        </p:spPr>
-      </p:pic>
-      <p:sp>
-        <p:nvSpPr>
-          <p:cNvPr id="20" name="TextBox 19"/>
+            <a:r>
+              <a:rPr sz="1000" b="0" i="1">
+                <a:solidFill>
+                  <a:srgbClr val="666666"/>
+                </a:solidFill>
+                <a:latin typeface="Calibri"/>
+              </a:rPr>
+              <a:t>tiempo →</a:t>
+            </a:r>
+          </a:p>
+        </p:txBody>
+      </p:sp>
+      <p:sp>
+        <p:nvSpPr>
+          <p:cNvPr id="14" name="TextBox 13"/>
           <p:cNvSpPr txBox="1"/>
           <p:nvPr/>
         </p:nvSpPr>
         <p:spPr>
           <a:xfrm>
-            <a:off x="8182660" y="3191256"/>
-            <a:ext cx="3478682" cy="621792"/>
+            <a:off x="457200" y="6263640"/>
+            <a:ext cx="11277295" cy="411480"/>
           </a:xfrm>
           <a:prstGeom prst="rect">
             <a:avLst/>
@@ -9090,41 +9022,26 @@
           <a:noFill/>
         </p:spPr>
         <p:txBody>
-          <a:bodyPr wrap="square" anchor="t"/>
-          <a:lstStyle/>
-          <a:p>
-            <a:pPr algn="ctr"/>
-            <a:r>
-              <a:rPr sz="1300" b="1" i="0">
-                <a:solidFill>
-                  <a:srgbClr val="095292"/>
-                </a:solidFill>
-                <a:latin typeface="Calibri"/>
-              </a:rPr>
-              <a:t>DB Fiddle</a:t>
-            </a:r>
-          </a:p>
-          <a:p>
-            <a:pPr algn="ctr">
-              <a:spcBef>
-                <a:spcPts val="200"/>
-              </a:spcBef>
-            </a:pPr>
-            <a:r>
-              <a:rPr sz="1000" b="0" i="0">
+          <a:bodyPr wrap="square">
+            <a:spAutoFit/>
+          </a:bodyPr>
+          <a:lstStyle/>
+          <a:p>
+            <a:r>
+              <a:rPr sz="1100" b="0" i="1">
                 <a:solidFill>
                   <a:srgbClr val="666666"/>
                 </a:solidFill>
                 <a:latin typeface="Calibri"/>
               </a:rPr>
-              <a:t>Pruebas</a:t>
-            </a:r>
-          </a:p>
-        </p:txBody>
-      </p:sp>
-      <p:sp>
-        <p:nvSpPr>
-          <p:cNvPr id="21" name="TextBox 20"/>
+              <a:t>Mitigación: UNIQUE(id_veterinario, fecha_hora) hace que el segundo INSERT falle automáticamente en vez de crear la doble reserva.</a:t>
+            </a:r>
+          </a:p>
+        </p:txBody>
+      </p:sp>
+      <p:sp>
+        <p:nvSpPr>
+          <p:cNvPr id="15" name="TextBox 14"/>
           <p:cNvSpPr txBox="1"/>
           <p:nvPr/>
         </p:nvSpPr>
@@ -9298,21 +9215,141 @@
                 </a:solidFill>
                 <a:latin typeface="Calibri"/>
               </a:rPr>
-              <a:t>Actividad autonoma — contexto / por que importa</a:t>
-            </a:r>
-          </a:p>
-        </p:txBody>
-      </p:sp>
-      <p:sp>
-        <p:nvSpPr>
-          <p:cNvPr id="5" name="TextBox 4"/>
+              <a:t>La restriccion que hace imposible la doble reserva</a:t>
+            </a:r>
+          </a:p>
+        </p:txBody>
+      </p:sp>
+      <p:sp>
+        <p:nvSpPr>
+          <p:cNvPr id="5" name="Rounded Rectangle 4"/>
+          <p:cNvSpPr/>
+          <p:nvPr/>
+        </p:nvSpPr>
+        <p:spPr>
+          <a:xfrm>
+            <a:off x="457200" y="1261872"/>
+            <a:ext cx="11277295" cy="4773168"/>
+          </a:xfrm>
+          <a:prstGeom prst="roundRect">
+            <a:avLst>
+              <a:gd name="adj" fmla="val 12000"/>
+            </a:avLst>
+          </a:prstGeom>
+          <a:solidFill>
+            <a:srgbClr val="1E2A38"/>
+          </a:solidFill>
+          <a:ln>
+            <a:noFill/>
+          </a:ln>
+        </p:spPr>
+        <p:style>
+          <a:lnRef idx="1">
+            <a:schemeClr val="accent1"/>
+          </a:lnRef>
+          <a:fillRef idx="3">
+            <a:schemeClr val="accent1"/>
+          </a:fillRef>
+          <a:effectRef idx="2">
+            <a:schemeClr val="accent1"/>
+          </a:effectRef>
+          <a:fontRef idx="minor">
+            <a:schemeClr val="lt1"/>
+          </a:fontRef>
+        </p:style>
+        <p:txBody>
+          <a:bodyPr rtlCol="0" anchor="ctr"/>
+          <a:lstStyle/>
+          <a:p>
+            <a:pPr algn="ctr"/>
+          </a:p>
+        </p:txBody>
+      </p:sp>
+      <p:sp>
+        <p:nvSpPr>
+          <p:cNvPr id="6" name="Rectangle 5"/>
+          <p:cNvSpPr/>
+          <p:nvPr/>
+        </p:nvSpPr>
+        <p:spPr>
+          <a:xfrm>
+            <a:off x="457200" y="1261872"/>
+            <a:ext cx="11277295" cy="320040"/>
+          </a:xfrm>
+          <a:prstGeom prst="rect">
+            <a:avLst/>
+          </a:prstGeom>
+          <a:solidFill>
+            <a:srgbClr val="095292"/>
+          </a:solidFill>
+          <a:ln>
+            <a:noFill/>
+          </a:ln>
+        </p:spPr>
+        <p:style>
+          <a:lnRef idx="1">
+            <a:schemeClr val="accent1"/>
+          </a:lnRef>
+          <a:fillRef idx="3">
+            <a:schemeClr val="accent1"/>
+          </a:fillRef>
+          <a:effectRef idx="2">
+            <a:schemeClr val="accent1"/>
+          </a:effectRef>
+          <a:fontRef idx="minor">
+            <a:schemeClr val="lt1"/>
+          </a:fontRef>
+        </p:style>
+        <p:txBody>
+          <a:bodyPr rtlCol="0" anchor="ctr"/>
+          <a:lstStyle/>
+          <a:p>
+            <a:pPr algn="ctr"/>
+          </a:p>
+        </p:txBody>
+      </p:sp>
+      <p:sp>
+        <p:nvSpPr>
+          <p:cNvPr id="7" name="TextBox 6"/>
           <p:cNvSpPr txBox="1"/>
           <p:nvPr/>
         </p:nvSpPr>
         <p:spPr>
           <a:xfrm>
-            <a:off x="457200" y="1170432"/>
-            <a:ext cx="11277295" cy="5230368"/>
+            <a:off x="685800" y="1307592"/>
+            <a:ext cx="10820095" cy="256032"/>
+          </a:xfrm>
+          <a:prstGeom prst="rect">
+            <a:avLst/>
+          </a:prstGeom>
+          <a:noFill/>
+        </p:spPr>
+        <p:txBody>
+          <a:bodyPr wrap="square" anchor="ctr"/>
+          <a:lstStyle/>
+          <a:p>
+            <a:r>
+              <a:rPr sz="1000" b="1" i="0">
+                <a:solidFill>
+                  <a:srgbClr val="269CCB"/>
+                </a:solidFill>
+                <a:latin typeface="Calibri"/>
+              </a:rPr>
+              <a:t>● ● ●</a:t>
+            </a:r>
+          </a:p>
+        </p:txBody>
+      </p:sp>
+      <p:sp>
+        <p:nvSpPr>
+          <p:cNvPr id="8" name="TextBox 7"/>
+          <p:cNvSpPr txBox="1"/>
+          <p:nvPr/>
+        </p:nvSpPr>
+        <p:spPr>
+          <a:xfrm>
+            <a:off x="777240" y="1719072"/>
+            <a:ext cx="10637215" cy="4133087"/>
           </a:xfrm>
           <a:prstGeom prst="rect">
             <a:avLst/>
@@ -9327,58 +9364,139 @@
           <a:p>
             <a:pPr>
               <a:spcAft>
-                <a:spcPts val="800"/>
+                <a:spcPts val="400"/>
               </a:spcAft>
             </a:pPr>
             <a:r>
-              <a:rPr sz="2000" b="0" i="0">
-                <a:solidFill>
-                  <a:srgbClr val="333333"/>
-                </a:solidFill>
-                <a:latin typeface="Calibri"/>
-              </a:rPr>
-              <a:t>–   </a:t>
-            </a:r>
-            <a:r>
-              <a:rPr sz="2000" b="1" i="0">
-                <a:solidFill>
-                  <a:srgbClr val="333333"/>
-                </a:solidFill>
-                <a:latin typeface="Calibri"/>
-              </a:rPr>
-              <a:t>Por qué importa al PI:</a:t>
-            </a:r>
-            <a:r>
-              <a:rPr sz="2000" b="0" i="0">
-                <a:solidFill>
-                  <a:srgbClr val="333333"/>
-                </a:solidFill>
-                <a:latin typeface="Calibri"/>
-              </a:rPr>
-              <a:t> doble reserva y stock negativo.</a:t>
+              <a:rPr sz="1400" b="0" i="0">
+                <a:solidFill>
+                  <a:srgbClr val="FFFFFF"/>
+                </a:solidFill>
+                <a:latin typeface="Calibri"/>
+              </a:rPr>
+              <a:t>ALTER TABLE cita</a:t>
             </a:r>
           </a:p>
           <a:p>
             <a:pPr>
               <a:spcAft>
-                <a:spcPts val="800"/>
+                <a:spcPts val="400"/>
               </a:spcAft>
             </a:pPr>
             <a:r>
-              <a:rPr sz="2000" b="0" i="0">
-                <a:solidFill>
-                  <a:srgbClr val="333333"/>
-                </a:solidFill>
-                <a:latin typeface="Calibri"/>
-              </a:rPr>
-              <a:t>–   Autónoma: escenarios + mitigacion SQL.</a:t>
-            </a:r>
-          </a:p>
-        </p:txBody>
-      </p:sp>
-      <p:sp>
-        <p:nvSpPr>
-          <p:cNvPr id="6" name="TextBox 5"/>
+              <a:rPr sz="1400" b="0" i="0">
+                <a:solidFill>
+                  <a:srgbClr val="FFFFFF"/>
+                </a:solidFill>
+                <a:latin typeface="Calibri"/>
+              </a:rPr>
+              <a:t>  ADD CONSTRAINT uq_cita_vet_franja</a:t>
+            </a:r>
+          </a:p>
+          <a:p>
+            <a:pPr>
+              <a:spcAft>
+                <a:spcPts val="400"/>
+              </a:spcAft>
+            </a:pPr>
+            <a:r>
+              <a:rPr sz="1400" b="0" i="0">
+                <a:solidFill>
+                  <a:srgbClr val="FFFFFF"/>
+                </a:solidFill>
+                <a:latin typeface="Calibri"/>
+              </a:rPr>
+              <a:t>  UNIQUE (id_veterinario, fecha_hora);</a:t>
+            </a:r>
+          </a:p>
+          <a:p>
+            <a:pPr>
+              <a:spcAft>
+                <a:spcPts val="400"/>
+              </a:spcAft>
+            </a:pPr>
+            <a:r>
+              <a:rPr sz="1400" b="0" i="0">
+                <a:solidFill>
+                  <a:srgbClr val="FFFFFF"/>
+                </a:solidFill>
+                <a:latin typeface="Calibri"/>
+              </a:rPr>
+              <a:t/>
+            </a:r>
+          </a:p>
+          <a:p>
+            <a:pPr>
+              <a:spcAft>
+                <a:spcPts val="400"/>
+              </a:spcAft>
+            </a:pPr>
+            <a:r>
+              <a:rPr sz="1400" b="0" i="0">
+                <a:solidFill>
+                  <a:srgbClr val="FFFFFF"/>
+                </a:solidFill>
+                <a:latin typeface="Calibri"/>
+              </a:rPr>
+              <a:t>-- T2 intenta la misma franja que T1:</a:t>
+            </a:r>
+          </a:p>
+          <a:p>
+            <a:pPr>
+              <a:spcAft>
+                <a:spcPts val="400"/>
+              </a:spcAft>
+            </a:pPr>
+            <a:r>
+              <a:rPr sz="1400" b="0" i="0">
+                <a:solidFill>
+                  <a:srgbClr val="FFFFFF"/>
+                </a:solidFill>
+                <a:latin typeface="Calibri"/>
+              </a:rPr>
+              <a:t>-- ORA-00001: unique constraint violated</a:t>
+            </a:r>
+          </a:p>
+        </p:txBody>
+      </p:sp>
+      <p:sp>
+        <p:nvSpPr>
+          <p:cNvPr id="9" name="TextBox 8"/>
+          <p:cNvSpPr txBox="1"/>
+          <p:nvPr/>
+        </p:nvSpPr>
+        <p:spPr>
+          <a:xfrm>
+            <a:off x="457200" y="6080760"/>
+            <a:ext cx="11277295" cy="320040"/>
+          </a:xfrm>
+          <a:prstGeom prst="rect">
+            <a:avLst/>
+          </a:prstGeom>
+          <a:noFill/>
+        </p:spPr>
+        <p:txBody>
+          <a:bodyPr wrap="square">
+            <a:spAutoFit/>
+          </a:bodyPr>
+          <a:lstStyle/>
+          <a:p>
+            <a:pPr algn="ctr"/>
+            <a:r>
+              <a:rPr sz="1200" b="0" i="1">
+                <a:solidFill>
+                  <a:srgbClr val="666666"/>
+                </a:solidFill>
+                <a:latin typeface="Calibri"/>
+              </a:rPr>
+              <a:t>Poner solo BEGIN/COMMIT no basta: ambas transacciones leen 'libre' antes de confirmar.</a:t>
+            </a:r>
+          </a:p>
+        </p:txBody>
+      </p:sp>
+      <p:sp>
+        <p:nvSpPr>
+          <p:cNvPr id="10" name="TextBox 9"/>
           <p:cNvSpPr txBox="1"/>
           <p:nvPr/>
         </p:nvSpPr>
@@ -9552,7 +9670,7 @@
                 </a:solidFill>
                 <a:latin typeface="Calibri"/>
               </a:rPr>
-              <a:t>Actividad autonoma — objetivo y criterios</a:t>
+              <a:t>Demo del dia</a:t>
             </a:r>
           </a:p>
         </p:txBody>
@@ -9600,7 +9718,7 @@
                 </a:solidFill>
                 <a:latin typeface="Calibri"/>
               </a:rPr>
-              <a:t>Objetivo:</a:t>
+              <a:t>Herramienta:</a:t>
             </a:r>
             <a:r>
               <a:rPr sz="2000" b="0" i="0">
@@ -9609,7 +9727,7 @@
                 </a:solidFill>
                 <a:latin typeface="Calibri"/>
               </a:rPr>
-              <a:t> 2 escenarios concurrencia T1/T2 + mitigacion.</a:t>
+              <a:t> Google Docs + Live SQL</a:t>
             </a:r>
           </a:p>
           <a:p>
@@ -9634,7 +9752,7 @@
                 </a:solidFill>
                 <a:latin typeface="Calibri"/>
               </a:rPr>
-              <a:t>Exito:</a:t>
+              <a:t>Demo:</a:t>
             </a:r>
             <a:r>
               <a:rPr sz="2000" b="0" i="0">
@@ -9643,7 +9761,7 @@
                 </a:solidFill>
                 <a:latin typeface="Calibri"/>
               </a:rPr>
-              <a:t> Doble reserva.</a:t>
+              <a:t> Narrativa paso a paso T1/T2 sobre tabla Cita.</a:t>
             </a:r>
           </a:p>
           <a:p>
@@ -9659,25 +9777,7 @@
                 </a:solidFill>
                 <a:latin typeface="Calibri"/>
               </a:rPr>
-              <a:t>–   </a:t>
-            </a:r>
-            <a:r>
-              <a:rPr sz="2000" b="1" i="0">
-                <a:solidFill>
-                  <a:srgbClr val="333333"/>
-                </a:solidFill>
-                <a:latin typeface="Calibri"/>
-              </a:rPr>
-              <a:t>Exito:</a:t>
-            </a:r>
-            <a:r>
-              <a:rPr sz="2000" b="0" i="0">
-                <a:solidFill>
-                  <a:srgbClr val="333333"/>
-                </a:solidFill>
-                <a:latin typeface="Calibri"/>
-              </a:rPr>
-              <a:t> Doble stock.</a:t>
+              <a:t>–   Sigan el mismo dominio VetCare (no inventen otro caso).</a:t>
             </a:r>
           </a:p>
           <a:p>
@@ -9693,93 +9793,7 @@
                 </a:solidFill>
                 <a:latin typeface="Calibri"/>
               </a:rPr>
-              <a:t>–   </a:t>
-            </a:r>
-            <a:r>
-              <a:rPr sz="2000" b="1" i="0">
-                <a:solidFill>
-                  <a:srgbClr val="333333"/>
-                </a:solidFill>
-                <a:latin typeface="Calibri"/>
-              </a:rPr>
-              <a:t>Exito:</a:t>
-            </a:r>
-            <a:r>
-              <a:rPr sz="2000" b="0" i="0">
-                <a:solidFill>
-                  <a:srgbClr val="333333"/>
-                </a:solidFill>
-                <a:latin typeface="Calibri"/>
-              </a:rPr>
-              <a:t> Mitigacion SQL.</a:t>
-            </a:r>
-          </a:p>
-          <a:p>
-            <a:pPr>
-              <a:spcAft>
-                <a:spcPts val="800"/>
-              </a:spcAft>
-            </a:pPr>
-            <a:r>
-              <a:rPr sz="2000" b="0" i="0">
-                <a:solidFill>
-                  <a:srgbClr val="333333"/>
-                </a:solidFill>
-                <a:latin typeface="Calibri"/>
-              </a:rPr>
-              <a:t>–   </a:t>
-            </a:r>
-            <a:r>
-              <a:rPr sz="2000" b="1" i="0">
-                <a:solidFill>
-                  <a:srgbClr val="333333"/>
-                </a:solidFill>
-                <a:latin typeface="Calibri"/>
-              </a:rPr>
-              <a:t>Exito:</a:t>
-            </a:r>
-            <a:r>
-              <a:rPr sz="2000" b="0" i="0">
-                <a:solidFill>
-                  <a:srgbClr val="333333"/>
-                </a:solidFill>
-                <a:latin typeface="Calibri"/>
-              </a:rPr>
-              <a:t> Sección informe.</a:t>
-            </a:r>
-          </a:p>
-          <a:p>
-            <a:pPr>
-              <a:spcAft>
-                <a:spcPts val="800"/>
-              </a:spcAft>
-            </a:pPr>
-            <a:r>
-              <a:rPr sz="2000" b="0" i="0">
-                <a:solidFill>
-                  <a:srgbClr val="333333"/>
-                </a:solidFill>
-                <a:latin typeface="Calibri"/>
-              </a:rPr>
-              <a:t>–   </a:t>
-            </a:r>
-            <a:r>
-              <a:rPr sz="2000" b="1" i="0">
-                <a:solidFill>
-                  <a:srgbClr val="333333"/>
-                </a:solidFill>
-                <a:latin typeface="Calibri"/>
-              </a:rPr>
-              <a:t>Exito:</a:t>
-            </a:r>
-            <a:r>
-              <a:rPr sz="2000" b="0" i="0">
-                <a:solidFill>
-                  <a:srgbClr val="333333"/>
-                </a:solidFill>
-                <a:latin typeface="Calibri"/>
-              </a:rPr>
-              <a:t> en la fecha que indique el docente.</a:t>
+              <a:t>–   Al final de la demo: dejar enlace/script compartible al grupo.</a:t>
             </a:r>
           </a:p>
         </p:txBody>
@@ -9854,7 +9868,7 @@
         <p:spPr>
           <a:xfrm>
             <a:off x="0" y="0"/>
-            <a:ext cx="12191695" cy="960120"/>
+            <a:ext cx="12191695" cy="1170432"/>
           </a:xfrm>
           <a:prstGeom prst="rect">
             <a:avLst/>
@@ -9896,7 +9910,7 @@
         </p:nvSpPr>
         <p:spPr>
           <a:xfrm>
-            <a:off x="0" y="960120"/>
+            <a:off x="0" y="1170432"/>
             <a:ext cx="12191695" cy="41148"/>
           </a:xfrm>
           <a:prstGeom prst="rect">
@@ -9940,7 +9954,7 @@
         <p:spPr>
           <a:xfrm>
             <a:off x="457200" y="164592"/>
-            <a:ext cx="11277295" cy="502920"/>
+            <a:ext cx="11277295" cy="384048"/>
           </a:xfrm>
           <a:prstGeom prst="rect">
             <a:avLst/>
@@ -9960,7 +9974,7 @@
                 </a:solidFill>
                 <a:latin typeface="Calibri"/>
               </a:rPr>
-              <a:t>Actividad autonoma — escenario / datos de partida</a:t>
+              <a:t>Herramientas de hoy</a:t>
             </a:r>
           </a:p>
         </p:txBody>
@@ -9973,8 +9987,8 @@
         </p:nvSpPr>
         <p:spPr>
           <a:xfrm>
-            <a:off x="457200" y="1170432"/>
-            <a:ext cx="11277295" cy="5230368"/>
+            <a:off x="457200" y="566928"/>
+            <a:ext cx="11277295" cy="411480"/>
           </a:xfrm>
           <a:prstGeom prst="rect">
             <a:avLst/>
@@ -9987,26 +10001,633 @@
           </a:bodyPr>
           <a:lstStyle/>
           <a:p>
-            <a:pPr>
-              <a:spcAft>
-                <a:spcPts val="800"/>
-              </a:spcAft>
+            <a:r>
+              <a:rPr sz="1400" b="0" i="0">
+                <a:solidFill>
+                  <a:srgbClr val="B8D8EE"/>
+                </a:solidFill>
+                <a:latin typeface="Calibri"/>
+              </a:rPr>
+              <a:t>Gratis · navegador o free tier</a:t>
+            </a:r>
+          </a:p>
+        </p:txBody>
+      </p:sp>
+      <p:sp>
+        <p:nvSpPr>
+          <p:cNvPr id="6" name="Rounded Rectangle 5"/>
+          <p:cNvSpPr/>
+          <p:nvPr/>
+        </p:nvSpPr>
+        <p:spPr>
+          <a:xfrm>
+            <a:off x="457200" y="1591056"/>
+            <a:ext cx="3624986" cy="2331720"/>
+          </a:xfrm>
+          <a:prstGeom prst="roundRect">
+            <a:avLst>
+              <a:gd name="adj" fmla="val 12000"/>
+            </a:avLst>
+          </a:prstGeom>
+          <a:solidFill>
+            <a:srgbClr val="F2F2F2"/>
+          </a:solidFill>
+          <a:ln>
+            <a:noFill/>
+          </a:ln>
+        </p:spPr>
+        <p:style>
+          <a:lnRef idx="1">
+            <a:schemeClr val="accent1"/>
+          </a:lnRef>
+          <a:fillRef idx="3">
+            <a:schemeClr val="accent1"/>
+          </a:fillRef>
+          <a:effectRef idx="2">
+            <a:schemeClr val="accent1"/>
+          </a:effectRef>
+          <a:fontRef idx="minor">
+            <a:schemeClr val="lt1"/>
+          </a:fontRef>
+        </p:style>
+        <p:txBody>
+          <a:bodyPr rtlCol="0" anchor="ctr"/>
+          <a:lstStyle/>
+          <a:p>
+            <a:pPr algn="ctr"/>
+          </a:p>
+        </p:txBody>
+      </p:sp>
+      <p:sp>
+        <p:nvSpPr>
+          <p:cNvPr id="7" name="Rectangle 6"/>
+          <p:cNvSpPr/>
+          <p:nvPr/>
+        </p:nvSpPr>
+        <p:spPr>
+          <a:xfrm>
+            <a:off x="457200" y="1591056"/>
+            <a:ext cx="3624986" cy="64008"/>
+          </a:xfrm>
+          <a:prstGeom prst="rect">
+            <a:avLst/>
+          </a:prstGeom>
+          <a:solidFill>
+            <a:srgbClr val="095292"/>
+          </a:solidFill>
+          <a:ln>
+            <a:noFill/>
+          </a:ln>
+        </p:spPr>
+        <p:style>
+          <a:lnRef idx="1">
+            <a:schemeClr val="accent1"/>
+          </a:lnRef>
+          <a:fillRef idx="3">
+            <a:schemeClr val="accent1"/>
+          </a:fillRef>
+          <a:effectRef idx="2">
+            <a:schemeClr val="accent1"/>
+          </a:effectRef>
+          <a:fontRef idx="minor">
+            <a:schemeClr val="lt1"/>
+          </a:fontRef>
+        </p:style>
+        <p:txBody>
+          <a:bodyPr rtlCol="0" anchor="ctr"/>
+          <a:lstStyle/>
+          <a:p>
+            <a:pPr algn="ctr"/>
+          </a:p>
+        </p:txBody>
+      </p:sp>
+      <p:sp>
+        <p:nvSpPr>
+          <p:cNvPr id="8" name="Rectangle 7"/>
+          <p:cNvSpPr/>
+          <p:nvPr/>
+        </p:nvSpPr>
+        <p:spPr>
+          <a:xfrm>
+            <a:off x="457200" y="1655064"/>
+            <a:ext cx="3624986" cy="27432"/>
+          </a:xfrm>
+          <a:prstGeom prst="rect">
+            <a:avLst/>
+          </a:prstGeom>
+          <a:solidFill>
+            <a:srgbClr val="FFD000"/>
+          </a:solidFill>
+          <a:ln>
+            <a:noFill/>
+          </a:ln>
+        </p:spPr>
+        <p:style>
+          <a:lnRef idx="1">
+            <a:schemeClr val="accent1"/>
+          </a:lnRef>
+          <a:fillRef idx="3">
+            <a:schemeClr val="accent1"/>
+          </a:fillRef>
+          <a:effectRef idx="2">
+            <a:schemeClr val="accent1"/>
+          </a:effectRef>
+          <a:fontRef idx="minor">
+            <a:schemeClr val="lt1"/>
+          </a:fontRef>
+        </p:style>
+        <p:txBody>
+          <a:bodyPr rtlCol="0" anchor="ctr"/>
+          <a:lstStyle/>
+          <a:p>
+            <a:pPr algn="ctr"/>
+          </a:p>
+        </p:txBody>
+      </p:sp>
+      <p:pic>
+        <p:nvPicPr>
+          <p:cNvPr id="9" name="Picture 8" descr="google_docs.png"/>
+          <p:cNvPicPr>
+            <a:picLocks noChangeAspect="1"/>
+          </p:cNvPicPr>
+          <p:nvPr/>
+        </p:nvPicPr>
+        <p:blipFill>
+          <a:blip r:embed="rId2"/>
+          <a:stretch>
+            <a:fillRect/>
+          </a:stretch>
+        </p:blipFill>
+        <p:spPr>
+          <a:xfrm>
+            <a:off x="1643329" y="1847087"/>
+            <a:ext cx="1252728" cy="1252728"/>
+          </a:xfrm>
+          <a:prstGeom prst="rect">
+            <a:avLst/>
+          </a:prstGeom>
+        </p:spPr>
+      </p:pic>
+      <p:sp>
+        <p:nvSpPr>
+          <p:cNvPr id="10" name="TextBox 9"/>
+          <p:cNvSpPr txBox="1"/>
+          <p:nvPr/>
+        </p:nvSpPr>
+        <p:spPr>
+          <a:xfrm>
+            <a:off x="530352" y="3191256"/>
+            <a:ext cx="3478682" cy="621792"/>
+          </a:xfrm>
+          <a:prstGeom prst="rect">
+            <a:avLst/>
+          </a:prstGeom>
+          <a:noFill/>
+        </p:spPr>
+        <p:txBody>
+          <a:bodyPr wrap="square" anchor="t"/>
+          <a:lstStyle/>
+          <a:p>
+            <a:pPr algn="ctr"/>
+            <a:r>
+              <a:rPr sz="1300" b="1" i="0">
+                <a:solidFill>
+                  <a:srgbClr val="095292"/>
+                </a:solidFill>
+                <a:latin typeface="Calibri"/>
+              </a:rPr>
+              <a:t>Google Docs</a:t>
+            </a:r>
+          </a:p>
+          <a:p>
+            <a:pPr algn="ctr">
+              <a:spcBef>
+                <a:spcPts val="200"/>
+              </a:spcBef>
             </a:pPr>
             <a:r>
-              <a:rPr sz="2000" b="0" i="0">
-                <a:solidFill>
-                  <a:srgbClr val="333333"/>
-                </a:solidFill>
-                <a:latin typeface="Calibri"/>
-              </a:rPr>
-              <a:t>–   Narrar T1/T2 sobre Cita/Insumo.</a:t>
-            </a:r>
-          </a:p>
-        </p:txBody>
-      </p:sp>
-      <p:sp>
-        <p:nvSpPr>
-          <p:cNvPr id="6" name="TextBox 5"/>
+              <a:rPr sz="1000" b="0" i="0">
+                <a:solidFill>
+                  <a:srgbClr val="666666"/>
+                </a:solidFill>
+                <a:latin typeface="Calibri"/>
+              </a:rPr>
+              <a:t>Escenarios T1/T2</a:t>
+            </a:r>
+          </a:p>
+        </p:txBody>
+      </p:sp>
+      <p:sp>
+        <p:nvSpPr>
+          <p:cNvPr id="11" name="Rounded Rectangle 10"/>
+          <p:cNvSpPr/>
+          <p:nvPr/>
+        </p:nvSpPr>
+        <p:spPr>
+          <a:xfrm>
+            <a:off x="4283354" y="1591056"/>
+            <a:ext cx="3624986" cy="2331720"/>
+          </a:xfrm>
+          <a:prstGeom prst="roundRect">
+            <a:avLst>
+              <a:gd name="adj" fmla="val 12000"/>
+            </a:avLst>
+          </a:prstGeom>
+          <a:solidFill>
+            <a:srgbClr val="F2F2F2"/>
+          </a:solidFill>
+          <a:ln>
+            <a:noFill/>
+          </a:ln>
+        </p:spPr>
+        <p:style>
+          <a:lnRef idx="1">
+            <a:schemeClr val="accent1"/>
+          </a:lnRef>
+          <a:fillRef idx="3">
+            <a:schemeClr val="accent1"/>
+          </a:fillRef>
+          <a:effectRef idx="2">
+            <a:schemeClr val="accent1"/>
+          </a:effectRef>
+          <a:fontRef idx="minor">
+            <a:schemeClr val="lt1"/>
+          </a:fontRef>
+        </p:style>
+        <p:txBody>
+          <a:bodyPr rtlCol="0" anchor="ctr"/>
+          <a:lstStyle/>
+          <a:p>
+            <a:pPr algn="ctr"/>
+          </a:p>
+        </p:txBody>
+      </p:sp>
+      <p:sp>
+        <p:nvSpPr>
+          <p:cNvPr id="12" name="Rectangle 11"/>
+          <p:cNvSpPr/>
+          <p:nvPr/>
+        </p:nvSpPr>
+        <p:spPr>
+          <a:xfrm>
+            <a:off x="4283354" y="1591056"/>
+            <a:ext cx="3624986" cy="64008"/>
+          </a:xfrm>
+          <a:prstGeom prst="rect">
+            <a:avLst/>
+          </a:prstGeom>
+          <a:solidFill>
+            <a:srgbClr val="095292"/>
+          </a:solidFill>
+          <a:ln>
+            <a:noFill/>
+          </a:ln>
+        </p:spPr>
+        <p:style>
+          <a:lnRef idx="1">
+            <a:schemeClr val="accent1"/>
+          </a:lnRef>
+          <a:fillRef idx="3">
+            <a:schemeClr val="accent1"/>
+          </a:fillRef>
+          <a:effectRef idx="2">
+            <a:schemeClr val="accent1"/>
+          </a:effectRef>
+          <a:fontRef idx="minor">
+            <a:schemeClr val="lt1"/>
+          </a:fontRef>
+        </p:style>
+        <p:txBody>
+          <a:bodyPr rtlCol="0" anchor="ctr"/>
+          <a:lstStyle/>
+          <a:p>
+            <a:pPr algn="ctr"/>
+          </a:p>
+        </p:txBody>
+      </p:sp>
+      <p:sp>
+        <p:nvSpPr>
+          <p:cNvPr id="13" name="Rectangle 12"/>
+          <p:cNvSpPr/>
+          <p:nvPr/>
+        </p:nvSpPr>
+        <p:spPr>
+          <a:xfrm>
+            <a:off x="4283354" y="1655064"/>
+            <a:ext cx="3624986" cy="27432"/>
+          </a:xfrm>
+          <a:prstGeom prst="rect">
+            <a:avLst/>
+          </a:prstGeom>
+          <a:solidFill>
+            <a:srgbClr val="FFD000"/>
+          </a:solidFill>
+          <a:ln>
+            <a:noFill/>
+          </a:ln>
+        </p:spPr>
+        <p:style>
+          <a:lnRef idx="1">
+            <a:schemeClr val="accent1"/>
+          </a:lnRef>
+          <a:fillRef idx="3">
+            <a:schemeClr val="accent1"/>
+          </a:fillRef>
+          <a:effectRef idx="2">
+            <a:schemeClr val="accent1"/>
+          </a:effectRef>
+          <a:fontRef idx="minor">
+            <a:schemeClr val="lt1"/>
+          </a:fontRef>
+        </p:style>
+        <p:txBody>
+          <a:bodyPr rtlCol="0" anchor="ctr"/>
+          <a:lstStyle/>
+          <a:p>
+            <a:pPr algn="ctr"/>
+          </a:p>
+        </p:txBody>
+      </p:sp>
+      <p:pic>
+        <p:nvPicPr>
+          <p:cNvPr id="14" name="Picture 13" descr="oracle_livesql.png"/>
+          <p:cNvPicPr>
+            <a:picLocks noChangeAspect="1"/>
+          </p:cNvPicPr>
+          <p:nvPr/>
+        </p:nvPicPr>
+        <p:blipFill>
+          <a:blip r:embed="rId3"/>
+          <a:stretch>
+            <a:fillRect/>
+          </a:stretch>
+        </p:blipFill>
+        <p:spPr>
+          <a:xfrm>
+            <a:off x="5469483" y="1847087"/>
+            <a:ext cx="1252728" cy="1252728"/>
+          </a:xfrm>
+          <a:prstGeom prst="rect">
+            <a:avLst/>
+          </a:prstGeom>
+        </p:spPr>
+      </p:pic>
+      <p:sp>
+        <p:nvSpPr>
+          <p:cNvPr id="15" name="TextBox 14"/>
+          <p:cNvSpPr txBox="1"/>
+          <p:nvPr/>
+        </p:nvSpPr>
+        <p:spPr>
+          <a:xfrm>
+            <a:off x="4356506" y="3191256"/>
+            <a:ext cx="3478682" cy="621792"/>
+          </a:xfrm>
+          <a:prstGeom prst="rect">
+            <a:avLst/>
+          </a:prstGeom>
+          <a:noFill/>
+        </p:spPr>
+        <p:txBody>
+          <a:bodyPr wrap="square" anchor="t"/>
+          <a:lstStyle/>
+          <a:p>
+            <a:pPr algn="ctr"/>
+            <a:r>
+              <a:rPr sz="1300" b="1" i="0">
+                <a:solidFill>
+                  <a:srgbClr val="095292"/>
+                </a:solidFill>
+                <a:latin typeface="Calibri"/>
+              </a:rPr>
+              <a:t>Oracle Live SQL</a:t>
+            </a:r>
+          </a:p>
+          <a:p>
+            <a:pPr algn="ctr">
+              <a:spcBef>
+                <a:spcPts val="200"/>
+              </a:spcBef>
+            </a:pPr>
+            <a:r>
+              <a:rPr sz="1000" b="0" i="0">
+                <a:solidFill>
+                  <a:srgbClr val="666666"/>
+                </a:solidFill>
+                <a:latin typeface="Calibri"/>
+              </a:rPr>
+              <a:t>Demo SQL</a:t>
+            </a:r>
+          </a:p>
+        </p:txBody>
+      </p:sp>
+      <p:sp>
+        <p:nvSpPr>
+          <p:cNvPr id="16" name="Rounded Rectangle 15"/>
+          <p:cNvSpPr/>
+          <p:nvPr/>
+        </p:nvSpPr>
+        <p:spPr>
+          <a:xfrm>
+            <a:off x="8109508" y="1591056"/>
+            <a:ext cx="3624986" cy="2331720"/>
+          </a:xfrm>
+          <a:prstGeom prst="roundRect">
+            <a:avLst>
+              <a:gd name="adj" fmla="val 12000"/>
+            </a:avLst>
+          </a:prstGeom>
+          <a:solidFill>
+            <a:srgbClr val="F2F2F2"/>
+          </a:solidFill>
+          <a:ln>
+            <a:noFill/>
+          </a:ln>
+        </p:spPr>
+        <p:style>
+          <a:lnRef idx="1">
+            <a:schemeClr val="accent1"/>
+          </a:lnRef>
+          <a:fillRef idx="3">
+            <a:schemeClr val="accent1"/>
+          </a:fillRef>
+          <a:effectRef idx="2">
+            <a:schemeClr val="accent1"/>
+          </a:effectRef>
+          <a:fontRef idx="minor">
+            <a:schemeClr val="lt1"/>
+          </a:fontRef>
+        </p:style>
+        <p:txBody>
+          <a:bodyPr rtlCol="0" anchor="ctr"/>
+          <a:lstStyle/>
+          <a:p>
+            <a:pPr algn="ctr"/>
+          </a:p>
+        </p:txBody>
+      </p:sp>
+      <p:sp>
+        <p:nvSpPr>
+          <p:cNvPr id="17" name="Rectangle 16"/>
+          <p:cNvSpPr/>
+          <p:nvPr/>
+        </p:nvSpPr>
+        <p:spPr>
+          <a:xfrm>
+            <a:off x="8109508" y="1591056"/>
+            <a:ext cx="3624986" cy="64008"/>
+          </a:xfrm>
+          <a:prstGeom prst="rect">
+            <a:avLst/>
+          </a:prstGeom>
+          <a:solidFill>
+            <a:srgbClr val="095292"/>
+          </a:solidFill>
+          <a:ln>
+            <a:noFill/>
+          </a:ln>
+        </p:spPr>
+        <p:style>
+          <a:lnRef idx="1">
+            <a:schemeClr val="accent1"/>
+          </a:lnRef>
+          <a:fillRef idx="3">
+            <a:schemeClr val="accent1"/>
+          </a:fillRef>
+          <a:effectRef idx="2">
+            <a:schemeClr val="accent1"/>
+          </a:effectRef>
+          <a:fontRef idx="minor">
+            <a:schemeClr val="lt1"/>
+          </a:fontRef>
+        </p:style>
+        <p:txBody>
+          <a:bodyPr rtlCol="0" anchor="ctr"/>
+          <a:lstStyle/>
+          <a:p>
+            <a:pPr algn="ctr"/>
+          </a:p>
+        </p:txBody>
+      </p:sp>
+      <p:sp>
+        <p:nvSpPr>
+          <p:cNvPr id="18" name="Rectangle 17"/>
+          <p:cNvSpPr/>
+          <p:nvPr/>
+        </p:nvSpPr>
+        <p:spPr>
+          <a:xfrm>
+            <a:off x="8109508" y="1655064"/>
+            <a:ext cx="3624986" cy="27432"/>
+          </a:xfrm>
+          <a:prstGeom prst="rect">
+            <a:avLst/>
+          </a:prstGeom>
+          <a:solidFill>
+            <a:srgbClr val="FFD000"/>
+          </a:solidFill>
+          <a:ln>
+            <a:noFill/>
+          </a:ln>
+        </p:spPr>
+        <p:style>
+          <a:lnRef idx="1">
+            <a:schemeClr val="accent1"/>
+          </a:lnRef>
+          <a:fillRef idx="3">
+            <a:schemeClr val="accent1"/>
+          </a:fillRef>
+          <a:effectRef idx="2">
+            <a:schemeClr val="accent1"/>
+          </a:effectRef>
+          <a:fontRef idx="minor">
+            <a:schemeClr val="lt1"/>
+          </a:fontRef>
+        </p:style>
+        <p:txBody>
+          <a:bodyPr rtlCol="0" anchor="ctr"/>
+          <a:lstStyle/>
+          <a:p>
+            <a:pPr algn="ctr"/>
+          </a:p>
+        </p:txBody>
+      </p:sp>
+      <p:pic>
+        <p:nvPicPr>
+          <p:cNvPr id="19" name="Picture 18" descr="dbfiddle.png"/>
+          <p:cNvPicPr>
+            <a:picLocks noChangeAspect="1"/>
+          </p:cNvPicPr>
+          <p:nvPr/>
+        </p:nvPicPr>
+        <p:blipFill>
+          <a:blip r:embed="rId4"/>
+          <a:stretch>
+            <a:fillRect/>
+          </a:stretch>
+        </p:blipFill>
+        <p:spPr>
+          <a:xfrm>
+            <a:off x="9295638" y="1847087"/>
+            <a:ext cx="1252728" cy="1252728"/>
+          </a:xfrm>
+          <a:prstGeom prst="rect">
+            <a:avLst/>
+          </a:prstGeom>
+        </p:spPr>
+      </p:pic>
+      <p:sp>
+        <p:nvSpPr>
+          <p:cNvPr id="20" name="TextBox 19"/>
+          <p:cNvSpPr txBox="1"/>
+          <p:nvPr/>
+        </p:nvSpPr>
+        <p:spPr>
+          <a:xfrm>
+            <a:off x="8182660" y="3191256"/>
+            <a:ext cx="3478682" cy="621792"/>
+          </a:xfrm>
+          <a:prstGeom prst="rect">
+            <a:avLst/>
+          </a:prstGeom>
+          <a:noFill/>
+        </p:spPr>
+        <p:txBody>
+          <a:bodyPr wrap="square" anchor="t"/>
+          <a:lstStyle/>
+          <a:p>
+            <a:pPr algn="ctr"/>
+            <a:r>
+              <a:rPr sz="1300" b="1" i="0">
+                <a:solidFill>
+                  <a:srgbClr val="095292"/>
+                </a:solidFill>
+                <a:latin typeface="Calibri"/>
+              </a:rPr>
+              <a:t>DB Fiddle</a:t>
+            </a:r>
+          </a:p>
+          <a:p>
+            <a:pPr algn="ctr">
+              <a:spcBef>
+                <a:spcPts val="200"/>
+              </a:spcBef>
+            </a:pPr>
+            <a:r>
+              <a:rPr sz="1000" b="0" i="0">
+                <a:solidFill>
+                  <a:srgbClr val="666666"/>
+                </a:solidFill>
+                <a:latin typeface="Calibri"/>
+              </a:rPr>
+              <a:t>Pruebas</a:t>
+            </a:r>
+          </a:p>
+        </p:txBody>
+      </p:sp>
+      <p:sp>
+        <p:nvSpPr>
+          <p:cNvPr id="21" name="TextBox 20"/>
           <p:cNvSpPr txBox="1"/>
           <p:nvPr/>
         </p:nvSpPr>
@@ -10180,111 +10801,21 @@
                 </a:solidFill>
                 <a:latin typeface="Calibri"/>
               </a:rPr>
-              <a:t>Actividad autonoma — pasos guiados</a:t>
-            </a:r>
-          </a:p>
-        </p:txBody>
-      </p:sp>
-      <p:sp>
-        <p:nvSpPr>
-          <p:cNvPr id="5" name="Rounded Rectangle 4"/>
-          <p:cNvSpPr/>
-          <p:nvPr/>
-        </p:nvSpPr>
-        <p:spPr>
-          <a:xfrm>
-            <a:off x="457200" y="1554480"/>
-            <a:ext cx="11277295" cy="1051560"/>
-          </a:xfrm>
-          <a:prstGeom prst="roundRect">
-            <a:avLst>
-              <a:gd name="adj" fmla="val 12000"/>
-            </a:avLst>
-          </a:prstGeom>
-          <a:solidFill>
-            <a:srgbClr val="F2F2F2"/>
-          </a:solidFill>
-          <a:ln>
-            <a:noFill/>
-          </a:ln>
-        </p:spPr>
-        <p:style>
-          <a:lnRef idx="1">
-            <a:schemeClr val="accent1"/>
-          </a:lnRef>
-          <a:fillRef idx="3">
-            <a:schemeClr val="accent1"/>
-          </a:fillRef>
-          <a:effectRef idx="2">
-            <a:schemeClr val="accent1"/>
-          </a:effectRef>
-          <a:fontRef idx="minor">
-            <a:schemeClr val="lt1"/>
-          </a:fontRef>
-        </p:style>
-        <p:txBody>
-          <a:bodyPr rtlCol="0" anchor="ctr"/>
-          <a:lstStyle/>
-          <a:p>
-            <a:pPr algn="ctr"/>
-          </a:p>
-        </p:txBody>
-      </p:sp>
-      <p:sp>
-        <p:nvSpPr>
-          <p:cNvPr id="6" name="Rounded Rectangle 5"/>
-          <p:cNvSpPr/>
-          <p:nvPr/>
-        </p:nvSpPr>
-        <p:spPr>
-          <a:xfrm>
-            <a:off x="594360" y="1860804"/>
-            <a:ext cx="438912" cy="438912"/>
-          </a:xfrm>
-          <a:prstGeom prst="roundRect">
-            <a:avLst>
-              <a:gd name="adj" fmla="val 12000"/>
-            </a:avLst>
-          </a:prstGeom>
-          <a:solidFill>
-            <a:srgbClr val="095292"/>
-          </a:solidFill>
-          <a:ln>
-            <a:noFill/>
-          </a:ln>
-        </p:spPr>
-        <p:style>
-          <a:lnRef idx="1">
-            <a:schemeClr val="accent1"/>
-          </a:lnRef>
-          <a:fillRef idx="3">
-            <a:schemeClr val="accent1"/>
-          </a:fillRef>
-          <a:effectRef idx="2">
-            <a:schemeClr val="accent1"/>
-          </a:effectRef>
-          <a:fontRef idx="minor">
-            <a:schemeClr val="lt1"/>
-          </a:fontRef>
-        </p:style>
-        <p:txBody>
-          <a:bodyPr rtlCol="0" anchor="ctr"/>
-          <a:lstStyle/>
-          <a:p>
-            <a:pPr algn="ctr"/>
-          </a:p>
-        </p:txBody>
-      </p:sp>
-      <p:sp>
-        <p:nvSpPr>
-          <p:cNvPr id="7" name="TextBox 6"/>
+              <a:t>Actividad autonoma — contexto / por que importa</a:t>
+            </a:r>
+          </a:p>
+        </p:txBody>
+      </p:sp>
+      <p:sp>
+        <p:nvSpPr>
+          <p:cNvPr id="5" name="TextBox 4"/>
           <p:cNvSpPr txBox="1"/>
           <p:nvPr/>
         </p:nvSpPr>
         <p:spPr>
           <a:xfrm>
-            <a:off x="594360" y="1860804"/>
-            <a:ext cx="438912" cy="438912"/>
+            <a:off x="457200" y="1170432"/>
+            <a:ext cx="11277295" cy="5230368"/>
           </a:xfrm>
           <a:prstGeom prst="rect">
             <a:avLst/>
@@ -10292,522 +10823,65 @@
           <a:noFill/>
         </p:spPr>
         <p:txBody>
-          <a:bodyPr wrap="square" anchor="ctr"/>
-          <a:lstStyle/>
-          <a:p>
-            <a:pPr algn="ctr"/>
-            <a:r>
-              <a:rPr sz="1600" b="1" i="0">
-                <a:solidFill>
-                  <a:srgbClr val="FFFFFF"/>
-                </a:solidFill>
-                <a:latin typeface="Calibri"/>
-              </a:rPr>
-              <a:t>1</a:t>
-            </a:r>
-          </a:p>
-        </p:txBody>
-      </p:sp>
-      <p:sp>
-        <p:nvSpPr>
-          <p:cNvPr id="8" name="TextBox 7"/>
-          <p:cNvSpPr txBox="1"/>
-          <p:nvPr/>
-        </p:nvSpPr>
-        <p:spPr>
-          <a:xfrm>
-            <a:off x="1188720" y="1645920"/>
-            <a:ext cx="10271455" cy="886968"/>
-          </a:xfrm>
-          <a:prstGeom prst="rect">
-            <a:avLst/>
-          </a:prstGeom>
-          <a:noFill/>
-        </p:spPr>
-        <p:txBody>
-          <a:bodyPr wrap="square" anchor="ctr"/>
-          <a:lstStyle/>
-          <a:p>
-            <a:r>
-              <a:rPr sz="1500" b="1" i="0">
-                <a:solidFill>
-                  <a:srgbClr val="095292"/>
-                </a:solidFill>
-                <a:latin typeface="Calibri"/>
-              </a:rPr>
-              <a:t>Describir escenario doble reserva con tiempos T1/T2.</a:t>
-            </a:r>
-          </a:p>
-        </p:txBody>
-      </p:sp>
-      <p:sp>
-        <p:nvSpPr>
-          <p:cNvPr id="9" name="Rounded Rectangle 8"/>
-          <p:cNvSpPr/>
-          <p:nvPr/>
-        </p:nvSpPr>
-        <p:spPr>
-          <a:xfrm>
-            <a:off x="457200" y="2697480"/>
-            <a:ext cx="11277295" cy="1051560"/>
-          </a:xfrm>
-          <a:prstGeom prst="roundRect">
-            <a:avLst>
-              <a:gd name="adj" fmla="val 12000"/>
-            </a:avLst>
-          </a:prstGeom>
-          <a:solidFill>
-            <a:srgbClr val="E8F4FA"/>
-          </a:solidFill>
-          <a:ln>
-            <a:noFill/>
-          </a:ln>
-        </p:spPr>
-        <p:style>
-          <a:lnRef idx="1">
-            <a:schemeClr val="accent1"/>
-          </a:lnRef>
-          <a:fillRef idx="3">
-            <a:schemeClr val="accent1"/>
-          </a:fillRef>
-          <a:effectRef idx="2">
-            <a:schemeClr val="accent1"/>
-          </a:effectRef>
-          <a:fontRef idx="minor">
-            <a:schemeClr val="lt1"/>
-          </a:fontRef>
-        </p:style>
-        <p:txBody>
-          <a:bodyPr rtlCol="0" anchor="ctr"/>
-          <a:lstStyle/>
-          <a:p>
-            <a:pPr algn="ctr"/>
-          </a:p>
-        </p:txBody>
-      </p:sp>
-      <p:sp>
-        <p:nvSpPr>
-          <p:cNvPr id="10" name="Rounded Rectangle 9"/>
-          <p:cNvSpPr/>
-          <p:nvPr/>
-        </p:nvSpPr>
-        <p:spPr>
-          <a:xfrm>
-            <a:off x="594360" y="3003804"/>
-            <a:ext cx="438912" cy="438912"/>
-          </a:xfrm>
-          <a:prstGeom prst="roundRect">
-            <a:avLst>
-              <a:gd name="adj" fmla="val 12000"/>
-            </a:avLst>
-          </a:prstGeom>
-          <a:solidFill>
-            <a:srgbClr val="095292"/>
-          </a:solidFill>
-          <a:ln>
-            <a:noFill/>
-          </a:ln>
-        </p:spPr>
-        <p:style>
-          <a:lnRef idx="1">
-            <a:schemeClr val="accent1"/>
-          </a:lnRef>
-          <a:fillRef idx="3">
-            <a:schemeClr val="accent1"/>
-          </a:fillRef>
-          <a:effectRef idx="2">
-            <a:schemeClr val="accent1"/>
-          </a:effectRef>
-          <a:fontRef idx="minor">
-            <a:schemeClr val="lt1"/>
-          </a:fontRef>
-        </p:style>
-        <p:txBody>
-          <a:bodyPr rtlCol="0" anchor="ctr"/>
-          <a:lstStyle/>
-          <a:p>
-            <a:pPr algn="ctr"/>
-          </a:p>
-        </p:txBody>
-      </p:sp>
-      <p:sp>
-        <p:nvSpPr>
-          <p:cNvPr id="11" name="TextBox 10"/>
-          <p:cNvSpPr txBox="1"/>
-          <p:nvPr/>
-        </p:nvSpPr>
-        <p:spPr>
-          <a:xfrm>
-            <a:off x="594360" y="3003804"/>
-            <a:ext cx="438912" cy="438912"/>
-          </a:xfrm>
-          <a:prstGeom prst="rect">
-            <a:avLst/>
-          </a:prstGeom>
-          <a:noFill/>
-        </p:spPr>
-        <p:txBody>
-          <a:bodyPr wrap="square" anchor="ctr"/>
-          <a:lstStyle/>
-          <a:p>
-            <a:pPr algn="ctr"/>
-            <a:r>
-              <a:rPr sz="1600" b="1" i="0">
-                <a:solidFill>
-                  <a:srgbClr val="FFFFFF"/>
-                </a:solidFill>
-                <a:latin typeface="Calibri"/>
-              </a:rPr>
-              <a:t>2</a:t>
-            </a:r>
-          </a:p>
-        </p:txBody>
-      </p:sp>
-      <p:sp>
-        <p:nvSpPr>
-          <p:cNvPr id="12" name="TextBox 11"/>
-          <p:cNvSpPr txBox="1"/>
-          <p:nvPr/>
-        </p:nvSpPr>
-        <p:spPr>
-          <a:xfrm>
-            <a:off x="1188720" y="2788920"/>
-            <a:ext cx="10271455" cy="886968"/>
-          </a:xfrm>
-          <a:prstGeom prst="rect">
-            <a:avLst/>
-          </a:prstGeom>
-          <a:noFill/>
-        </p:spPr>
-        <p:txBody>
-          <a:bodyPr wrap="square" anchor="ctr"/>
-          <a:lstStyle/>
-          <a:p>
-            <a:r>
-              <a:rPr sz="1500" b="1" i="0">
-                <a:solidFill>
-                  <a:srgbClr val="095292"/>
-                </a:solidFill>
-                <a:latin typeface="Calibri"/>
-              </a:rPr>
-              <a:t>Describir escenario doble descuento de stock.</a:t>
-            </a:r>
-          </a:p>
-        </p:txBody>
-      </p:sp>
-      <p:sp>
-        <p:nvSpPr>
-          <p:cNvPr id="13" name="Rounded Rectangle 12"/>
-          <p:cNvSpPr/>
-          <p:nvPr/>
-        </p:nvSpPr>
-        <p:spPr>
-          <a:xfrm>
-            <a:off x="457200" y="3840480"/>
-            <a:ext cx="11277295" cy="1051560"/>
-          </a:xfrm>
-          <a:prstGeom prst="roundRect">
-            <a:avLst>
-              <a:gd name="adj" fmla="val 12000"/>
-            </a:avLst>
-          </a:prstGeom>
-          <a:solidFill>
-            <a:srgbClr val="F2F2F2"/>
-          </a:solidFill>
-          <a:ln>
-            <a:noFill/>
-          </a:ln>
-        </p:spPr>
-        <p:style>
-          <a:lnRef idx="1">
-            <a:schemeClr val="accent1"/>
-          </a:lnRef>
-          <a:fillRef idx="3">
-            <a:schemeClr val="accent1"/>
-          </a:fillRef>
-          <a:effectRef idx="2">
-            <a:schemeClr val="accent1"/>
-          </a:effectRef>
-          <a:fontRef idx="minor">
-            <a:schemeClr val="lt1"/>
-          </a:fontRef>
-        </p:style>
-        <p:txBody>
-          <a:bodyPr rtlCol="0" anchor="ctr"/>
-          <a:lstStyle/>
-          <a:p>
-            <a:pPr algn="ctr"/>
-          </a:p>
-        </p:txBody>
-      </p:sp>
-      <p:sp>
-        <p:nvSpPr>
-          <p:cNvPr id="14" name="Rounded Rectangle 13"/>
-          <p:cNvSpPr/>
-          <p:nvPr/>
-        </p:nvSpPr>
-        <p:spPr>
-          <a:xfrm>
-            <a:off x="594360" y="4146804"/>
-            <a:ext cx="438912" cy="438912"/>
-          </a:xfrm>
-          <a:prstGeom prst="roundRect">
-            <a:avLst>
-              <a:gd name="adj" fmla="val 12000"/>
-            </a:avLst>
-          </a:prstGeom>
-          <a:solidFill>
-            <a:srgbClr val="095292"/>
-          </a:solidFill>
-          <a:ln>
-            <a:noFill/>
-          </a:ln>
-        </p:spPr>
-        <p:style>
-          <a:lnRef idx="1">
-            <a:schemeClr val="accent1"/>
-          </a:lnRef>
-          <a:fillRef idx="3">
-            <a:schemeClr val="accent1"/>
-          </a:fillRef>
-          <a:effectRef idx="2">
-            <a:schemeClr val="accent1"/>
-          </a:effectRef>
-          <a:fontRef idx="minor">
-            <a:schemeClr val="lt1"/>
-          </a:fontRef>
-        </p:style>
-        <p:txBody>
-          <a:bodyPr rtlCol="0" anchor="ctr"/>
-          <a:lstStyle/>
-          <a:p>
-            <a:pPr algn="ctr"/>
-          </a:p>
-        </p:txBody>
-      </p:sp>
-      <p:sp>
-        <p:nvSpPr>
-          <p:cNvPr id="15" name="TextBox 14"/>
-          <p:cNvSpPr txBox="1"/>
-          <p:nvPr/>
-        </p:nvSpPr>
-        <p:spPr>
-          <a:xfrm>
-            <a:off x="594360" y="4146804"/>
-            <a:ext cx="438912" cy="438912"/>
-          </a:xfrm>
-          <a:prstGeom prst="rect">
-            <a:avLst/>
-          </a:prstGeom>
-          <a:noFill/>
-        </p:spPr>
-        <p:txBody>
-          <a:bodyPr wrap="square" anchor="ctr"/>
-          <a:lstStyle/>
-          <a:p>
-            <a:pPr algn="ctr"/>
-            <a:r>
-              <a:rPr sz="1600" b="1" i="0">
-                <a:solidFill>
-                  <a:srgbClr val="FFFFFF"/>
-                </a:solidFill>
-                <a:latin typeface="Calibri"/>
-              </a:rPr>
-              <a:t>3</a:t>
-            </a:r>
-          </a:p>
-        </p:txBody>
-      </p:sp>
-      <p:sp>
-        <p:nvSpPr>
-          <p:cNvPr id="16" name="TextBox 15"/>
-          <p:cNvSpPr txBox="1"/>
-          <p:nvPr/>
-        </p:nvSpPr>
-        <p:spPr>
-          <a:xfrm>
-            <a:off x="1188720" y="3931920"/>
-            <a:ext cx="10271455" cy="886968"/>
-          </a:xfrm>
-          <a:prstGeom prst="rect">
-            <a:avLst/>
-          </a:prstGeom>
-          <a:noFill/>
-        </p:spPr>
-        <p:txBody>
-          <a:bodyPr wrap="square" anchor="ctr"/>
-          <a:lstStyle/>
-          <a:p>
-            <a:r>
-              <a:rPr sz="1500" b="1" i="0">
-                <a:solidFill>
-                  <a:srgbClr val="095292"/>
-                </a:solidFill>
-                <a:latin typeface="Calibri"/>
-              </a:rPr>
-              <a:t>Proponer mitigacion SQL.</a:t>
-            </a:r>
-          </a:p>
-        </p:txBody>
-      </p:sp>
-      <p:sp>
-        <p:nvSpPr>
-          <p:cNvPr id="17" name="Rounded Rectangle 16"/>
-          <p:cNvSpPr/>
-          <p:nvPr/>
-        </p:nvSpPr>
-        <p:spPr>
-          <a:xfrm>
-            <a:off x="457200" y="4983480"/>
-            <a:ext cx="11277295" cy="1051560"/>
-          </a:xfrm>
-          <a:prstGeom prst="roundRect">
-            <a:avLst>
-              <a:gd name="adj" fmla="val 12000"/>
-            </a:avLst>
-          </a:prstGeom>
-          <a:solidFill>
-            <a:srgbClr val="E8F4FA"/>
-          </a:solidFill>
-          <a:ln>
-            <a:noFill/>
-          </a:ln>
-        </p:spPr>
-        <p:style>
-          <a:lnRef idx="1">
-            <a:schemeClr val="accent1"/>
-          </a:lnRef>
-          <a:fillRef idx="3">
-            <a:schemeClr val="accent1"/>
-          </a:fillRef>
-          <a:effectRef idx="2">
-            <a:schemeClr val="accent1"/>
-          </a:effectRef>
-          <a:fontRef idx="minor">
-            <a:schemeClr val="lt1"/>
-          </a:fontRef>
-        </p:style>
-        <p:txBody>
-          <a:bodyPr rtlCol="0" anchor="ctr"/>
-          <a:lstStyle/>
-          <a:p>
-            <a:pPr algn="ctr"/>
-          </a:p>
-        </p:txBody>
-      </p:sp>
-      <p:sp>
-        <p:nvSpPr>
-          <p:cNvPr id="18" name="Rounded Rectangle 17"/>
-          <p:cNvSpPr/>
-          <p:nvPr/>
-        </p:nvSpPr>
-        <p:spPr>
-          <a:xfrm>
-            <a:off x="594360" y="5289804"/>
-            <a:ext cx="438912" cy="438912"/>
-          </a:xfrm>
-          <a:prstGeom prst="roundRect">
-            <a:avLst>
-              <a:gd name="adj" fmla="val 12000"/>
-            </a:avLst>
-          </a:prstGeom>
-          <a:solidFill>
-            <a:srgbClr val="095292"/>
-          </a:solidFill>
-          <a:ln>
-            <a:noFill/>
-          </a:ln>
-        </p:spPr>
-        <p:style>
-          <a:lnRef idx="1">
-            <a:schemeClr val="accent1"/>
-          </a:lnRef>
-          <a:fillRef idx="3">
-            <a:schemeClr val="accent1"/>
-          </a:fillRef>
-          <a:effectRef idx="2">
-            <a:schemeClr val="accent1"/>
-          </a:effectRef>
-          <a:fontRef idx="minor">
-            <a:schemeClr val="lt1"/>
-          </a:fontRef>
-        </p:style>
-        <p:txBody>
-          <a:bodyPr rtlCol="0" anchor="ctr"/>
-          <a:lstStyle/>
-          <a:p>
-            <a:pPr algn="ctr"/>
-          </a:p>
-        </p:txBody>
-      </p:sp>
-      <p:sp>
-        <p:nvSpPr>
-          <p:cNvPr id="19" name="TextBox 18"/>
-          <p:cNvSpPr txBox="1"/>
-          <p:nvPr/>
-        </p:nvSpPr>
-        <p:spPr>
-          <a:xfrm>
-            <a:off x="594360" y="5289804"/>
-            <a:ext cx="438912" cy="438912"/>
-          </a:xfrm>
-          <a:prstGeom prst="rect">
-            <a:avLst/>
-          </a:prstGeom>
-          <a:noFill/>
-        </p:spPr>
-        <p:txBody>
-          <a:bodyPr wrap="square" anchor="ctr"/>
-          <a:lstStyle/>
-          <a:p>
-            <a:pPr algn="ctr"/>
-            <a:r>
-              <a:rPr sz="1600" b="1" i="0">
-                <a:solidFill>
-                  <a:srgbClr val="FFFFFF"/>
-                </a:solidFill>
-                <a:latin typeface="Calibri"/>
-              </a:rPr>
-              <a:t>4</a:t>
-            </a:r>
-          </a:p>
-        </p:txBody>
-      </p:sp>
-      <p:sp>
-        <p:nvSpPr>
-          <p:cNvPr id="20" name="TextBox 19"/>
-          <p:cNvSpPr txBox="1"/>
-          <p:nvPr/>
-        </p:nvSpPr>
-        <p:spPr>
-          <a:xfrm>
-            <a:off x="1188720" y="5074920"/>
-            <a:ext cx="10271455" cy="886968"/>
-          </a:xfrm>
-          <a:prstGeom prst="rect">
-            <a:avLst/>
-          </a:prstGeom>
-          <a:noFill/>
-        </p:spPr>
-        <p:txBody>
-          <a:bodyPr wrap="square" anchor="ctr"/>
-          <a:lstStyle/>
-          <a:p>
-            <a:r>
-              <a:rPr sz="1500" b="1" i="0">
-                <a:solidFill>
-                  <a:srgbClr val="095292"/>
-                </a:solidFill>
-                <a:latin typeface="Calibri"/>
-              </a:rPr>
-              <a:t>Anadir seccion al informe PI.</a:t>
-            </a:r>
-          </a:p>
-        </p:txBody>
-      </p:sp>
-      <p:sp>
-        <p:nvSpPr>
-          <p:cNvPr id="21" name="TextBox 20"/>
+          <a:bodyPr wrap="square">
+            <a:spAutoFit/>
+          </a:bodyPr>
+          <a:lstStyle/>
+          <a:p>
+            <a:pPr>
+              <a:spcAft>
+                <a:spcPts val="800"/>
+              </a:spcAft>
+            </a:pPr>
+            <a:r>
+              <a:rPr sz="2000" b="0" i="0">
+                <a:solidFill>
+                  <a:srgbClr val="333333"/>
+                </a:solidFill>
+                <a:latin typeface="Calibri"/>
+              </a:rPr>
+              <a:t>–   </a:t>
+            </a:r>
+            <a:r>
+              <a:rPr sz="2000" b="1" i="0">
+                <a:solidFill>
+                  <a:srgbClr val="333333"/>
+                </a:solidFill>
+                <a:latin typeface="Calibri"/>
+              </a:rPr>
+              <a:t>Por qué importa al PI:</a:t>
+            </a:r>
+            <a:r>
+              <a:rPr sz="2000" b="0" i="0">
+                <a:solidFill>
+                  <a:srgbClr val="333333"/>
+                </a:solidFill>
+                <a:latin typeface="Calibri"/>
+              </a:rPr>
+              <a:t> doble reserva y stock negativo.</a:t>
+            </a:r>
+          </a:p>
+          <a:p>
+            <a:pPr>
+              <a:spcAft>
+                <a:spcPts val="800"/>
+              </a:spcAft>
+            </a:pPr>
+            <a:r>
+              <a:rPr sz="2000" b="0" i="0">
+                <a:solidFill>
+                  <a:srgbClr val="333333"/>
+                </a:solidFill>
+                <a:latin typeface="Calibri"/>
+              </a:rPr>
+              <a:t>–   Autónoma: escenarios + mitigacion SQL.</a:t>
+            </a:r>
+          </a:p>
+        </p:txBody>
+      </p:sp>
+      <p:sp>
+        <p:nvSpPr>
+          <p:cNvPr id="6" name="TextBox 5"/>
           <p:cNvSpPr txBox="1"/>
           <p:nvPr/>
         </p:nvSpPr>
@@ -10981,154 +11055,21 @@
                 </a:solidFill>
                 <a:latin typeface="Calibri"/>
               </a:rPr>
-              <a:t>Actividad autonoma — pistas (checklist vacio)</a:t>
-            </a:r>
-          </a:p>
-        </p:txBody>
-      </p:sp>
-      <p:sp>
-        <p:nvSpPr>
-          <p:cNvPr id="5" name="Rounded Rectangle 4"/>
-          <p:cNvSpPr/>
-          <p:nvPr/>
-        </p:nvSpPr>
-        <p:spPr>
-          <a:xfrm>
-            <a:off x="457200" y="1261872"/>
-            <a:ext cx="11277295" cy="566928"/>
-          </a:xfrm>
-          <a:prstGeom prst="roundRect">
-            <a:avLst>
-              <a:gd name="adj" fmla="val 12000"/>
-            </a:avLst>
-          </a:prstGeom>
-          <a:solidFill>
-            <a:srgbClr val="F2F2F2"/>
-          </a:solidFill>
-          <a:ln>
-            <a:noFill/>
-          </a:ln>
-        </p:spPr>
-        <p:style>
-          <a:lnRef idx="1">
-            <a:schemeClr val="accent1"/>
-          </a:lnRef>
-          <a:fillRef idx="3">
-            <a:schemeClr val="accent1"/>
-          </a:fillRef>
-          <a:effectRef idx="2">
-            <a:schemeClr val="accent1"/>
-          </a:effectRef>
-          <a:fontRef idx="minor">
-            <a:schemeClr val="lt1"/>
-          </a:fontRef>
-        </p:style>
-        <p:txBody>
-          <a:bodyPr rtlCol="0" anchor="ctr"/>
-          <a:lstStyle/>
-          <a:p>
-            <a:pPr algn="ctr"/>
-          </a:p>
-        </p:txBody>
-      </p:sp>
-      <p:sp>
-        <p:nvSpPr>
-          <p:cNvPr id="6" name="Rectangle 5"/>
-          <p:cNvSpPr/>
-          <p:nvPr/>
-        </p:nvSpPr>
-        <p:spPr>
-          <a:xfrm>
-            <a:off x="640080" y="1408175"/>
-            <a:ext cx="274320" cy="274320"/>
-          </a:xfrm>
-          <a:prstGeom prst="rect">
-            <a:avLst/>
-          </a:prstGeom>
-          <a:solidFill>
-            <a:srgbClr val="FFFFFF"/>
-          </a:solidFill>
-          <a:ln>
-            <a:solidFill>
-              <a:srgbClr val="333333"/>
-            </a:solidFill>
-          </a:ln>
-        </p:spPr>
-        <p:style>
-          <a:lnRef idx="1">
-            <a:schemeClr val="accent1"/>
-          </a:lnRef>
-          <a:fillRef idx="3">
-            <a:schemeClr val="accent1"/>
-          </a:fillRef>
-          <a:effectRef idx="2">
-            <a:schemeClr val="accent1"/>
-          </a:effectRef>
-          <a:fontRef idx="minor">
-            <a:schemeClr val="lt1"/>
-          </a:fontRef>
-        </p:style>
-        <p:txBody>
-          <a:bodyPr rtlCol="0" anchor="ctr"/>
-          <a:lstStyle/>
-          <a:p>
-            <a:pPr algn="ctr"/>
-          </a:p>
-        </p:txBody>
-      </p:sp>
-      <p:sp>
-        <p:nvSpPr>
-          <p:cNvPr id="7" name="Rectangle 6"/>
-          <p:cNvSpPr/>
-          <p:nvPr/>
-        </p:nvSpPr>
-        <p:spPr>
-          <a:xfrm>
-            <a:off x="640080" y="1408175"/>
-            <a:ext cx="73152" cy="274320"/>
-          </a:xfrm>
-          <a:prstGeom prst="rect">
-            <a:avLst/>
-          </a:prstGeom>
-          <a:solidFill>
-            <a:srgbClr val="269CCB"/>
-          </a:solidFill>
-          <a:ln>
-            <a:noFill/>
-          </a:ln>
-        </p:spPr>
-        <p:style>
-          <a:lnRef idx="1">
-            <a:schemeClr val="accent1"/>
-          </a:lnRef>
-          <a:fillRef idx="3">
-            <a:schemeClr val="accent1"/>
-          </a:fillRef>
-          <a:effectRef idx="2">
-            <a:schemeClr val="accent1"/>
-          </a:effectRef>
-          <a:fontRef idx="minor">
-            <a:schemeClr val="lt1"/>
-          </a:fontRef>
-        </p:style>
-        <p:txBody>
-          <a:bodyPr rtlCol="0" anchor="ctr"/>
-          <a:lstStyle/>
-          <a:p>
-            <a:pPr algn="ctr"/>
-          </a:p>
-        </p:txBody>
-      </p:sp>
-      <p:sp>
-        <p:nvSpPr>
-          <p:cNvPr id="8" name="TextBox 7"/>
+              <a:t>Actividad autonoma — objetivo y criterios</a:t>
+            </a:r>
+          </a:p>
+        </p:txBody>
+      </p:sp>
+      <p:sp>
+        <p:nvSpPr>
+          <p:cNvPr id="5" name="TextBox 4"/>
           <p:cNvSpPr txBox="1"/>
           <p:nvPr/>
         </p:nvSpPr>
         <p:spPr>
           <a:xfrm>
-            <a:off x="1097280" y="1353312"/>
-            <a:ext cx="10362895" cy="402336"/>
+            <a:off x="457200" y="1170432"/>
+            <a:ext cx="11277295" cy="5230368"/>
           </a:xfrm>
           <a:prstGeom prst="rect">
             <a:avLst/>
@@ -11136,354 +11077,219 @@
           <a:noFill/>
         </p:spPr>
         <p:txBody>
-          <a:bodyPr wrap="square" anchor="ctr"/>
-          <a:lstStyle/>
-          <a:p>
-            <a:r>
-              <a:rPr sz="1500" b="0" i="0">
+          <a:bodyPr wrap="square">
+            <a:spAutoFit/>
+          </a:bodyPr>
+          <a:lstStyle/>
+          <a:p>
+            <a:pPr>
+              <a:spcAft>
+                <a:spcPts val="800"/>
+              </a:spcAft>
+            </a:pPr>
+            <a:r>
+              <a:rPr sz="2000" b="0" i="0">
                 <a:solidFill>
                   <a:srgbClr val="333333"/>
                 </a:solidFill>
                 <a:latin typeface="Calibri"/>
               </a:rPr>
-              <a:t>□ Tiempos claros?</a:t>
-            </a:r>
-          </a:p>
-        </p:txBody>
-      </p:sp>
-      <p:sp>
-        <p:nvSpPr>
-          <p:cNvPr id="9" name="Rounded Rectangle 8"/>
-          <p:cNvSpPr/>
-          <p:nvPr/>
-        </p:nvSpPr>
-        <p:spPr>
-          <a:xfrm>
-            <a:off x="457200" y="1938528"/>
-            <a:ext cx="11277295" cy="566928"/>
-          </a:xfrm>
-          <a:prstGeom prst="roundRect">
-            <a:avLst>
-              <a:gd name="adj" fmla="val 12000"/>
-            </a:avLst>
-          </a:prstGeom>
-          <a:solidFill>
-            <a:srgbClr val="F2F2F2"/>
-          </a:solidFill>
-          <a:ln>
-            <a:noFill/>
-          </a:ln>
-        </p:spPr>
-        <p:style>
-          <a:lnRef idx="1">
-            <a:schemeClr val="accent1"/>
-          </a:lnRef>
-          <a:fillRef idx="3">
-            <a:schemeClr val="accent1"/>
-          </a:fillRef>
-          <a:effectRef idx="2">
-            <a:schemeClr val="accent1"/>
-          </a:effectRef>
-          <a:fontRef idx="minor">
-            <a:schemeClr val="lt1"/>
-          </a:fontRef>
-        </p:style>
-        <p:txBody>
-          <a:bodyPr rtlCol="0" anchor="ctr"/>
-          <a:lstStyle/>
-          <a:p>
-            <a:pPr algn="ctr"/>
-          </a:p>
-        </p:txBody>
-      </p:sp>
-      <p:sp>
-        <p:nvSpPr>
-          <p:cNvPr id="10" name="Rectangle 9"/>
-          <p:cNvSpPr/>
-          <p:nvPr/>
-        </p:nvSpPr>
-        <p:spPr>
-          <a:xfrm>
-            <a:off x="640080" y="2084832"/>
-            <a:ext cx="274320" cy="274320"/>
-          </a:xfrm>
-          <a:prstGeom prst="rect">
-            <a:avLst/>
-          </a:prstGeom>
-          <a:solidFill>
-            <a:srgbClr val="FFFFFF"/>
-          </a:solidFill>
-          <a:ln>
-            <a:solidFill>
-              <a:srgbClr val="333333"/>
-            </a:solidFill>
-          </a:ln>
-        </p:spPr>
-        <p:style>
-          <a:lnRef idx="1">
-            <a:schemeClr val="accent1"/>
-          </a:lnRef>
-          <a:fillRef idx="3">
-            <a:schemeClr val="accent1"/>
-          </a:fillRef>
-          <a:effectRef idx="2">
-            <a:schemeClr val="accent1"/>
-          </a:effectRef>
-          <a:fontRef idx="minor">
-            <a:schemeClr val="lt1"/>
-          </a:fontRef>
-        </p:style>
-        <p:txBody>
-          <a:bodyPr rtlCol="0" anchor="ctr"/>
-          <a:lstStyle/>
-          <a:p>
-            <a:pPr algn="ctr"/>
-          </a:p>
-        </p:txBody>
-      </p:sp>
-      <p:sp>
-        <p:nvSpPr>
-          <p:cNvPr id="11" name="Rectangle 10"/>
-          <p:cNvSpPr/>
-          <p:nvPr/>
-        </p:nvSpPr>
-        <p:spPr>
-          <a:xfrm>
-            <a:off x="640080" y="2084832"/>
-            <a:ext cx="73152" cy="274320"/>
-          </a:xfrm>
-          <a:prstGeom prst="rect">
-            <a:avLst/>
-          </a:prstGeom>
-          <a:solidFill>
-            <a:srgbClr val="269CCB"/>
-          </a:solidFill>
-          <a:ln>
-            <a:noFill/>
-          </a:ln>
-        </p:spPr>
-        <p:style>
-          <a:lnRef idx="1">
-            <a:schemeClr val="accent1"/>
-          </a:lnRef>
-          <a:fillRef idx="3">
-            <a:schemeClr val="accent1"/>
-          </a:fillRef>
-          <a:effectRef idx="2">
-            <a:schemeClr val="accent1"/>
-          </a:effectRef>
-          <a:fontRef idx="minor">
-            <a:schemeClr val="lt1"/>
-          </a:fontRef>
-        </p:style>
-        <p:txBody>
-          <a:bodyPr rtlCol="0" anchor="ctr"/>
-          <a:lstStyle/>
-          <a:p>
-            <a:pPr algn="ctr"/>
-          </a:p>
-        </p:txBody>
-      </p:sp>
-      <p:sp>
-        <p:nvSpPr>
-          <p:cNvPr id="12" name="TextBox 11"/>
-          <p:cNvSpPr txBox="1"/>
-          <p:nvPr/>
-        </p:nvSpPr>
-        <p:spPr>
-          <a:xfrm>
-            <a:off x="1097280" y="2029968"/>
-            <a:ext cx="10362895" cy="402336"/>
-          </a:xfrm>
-          <a:prstGeom prst="rect">
-            <a:avLst/>
-          </a:prstGeom>
-          <a:noFill/>
-        </p:spPr>
-        <p:txBody>
-          <a:bodyPr wrap="square" anchor="ctr"/>
-          <a:lstStyle/>
-          <a:p>
-            <a:r>
-              <a:rPr sz="1500" b="0" i="0">
+              <a:t>–   </a:t>
+            </a:r>
+            <a:r>
+              <a:rPr sz="2000" b="1" i="0">
                 <a:solidFill>
                   <a:srgbClr val="333333"/>
                 </a:solidFill>
                 <a:latin typeface="Calibri"/>
               </a:rPr>
-              <a:t>□ Mitigacion SQL concreta?</a:t>
-            </a:r>
-          </a:p>
-        </p:txBody>
-      </p:sp>
-      <p:sp>
-        <p:nvSpPr>
-          <p:cNvPr id="13" name="Rounded Rectangle 12"/>
-          <p:cNvSpPr/>
-          <p:nvPr/>
-        </p:nvSpPr>
-        <p:spPr>
-          <a:xfrm>
-            <a:off x="457200" y="2615184"/>
-            <a:ext cx="11277295" cy="566928"/>
-          </a:xfrm>
-          <a:prstGeom prst="roundRect">
-            <a:avLst>
-              <a:gd name="adj" fmla="val 12000"/>
-            </a:avLst>
-          </a:prstGeom>
-          <a:solidFill>
-            <a:srgbClr val="F2F2F2"/>
-          </a:solidFill>
-          <a:ln>
-            <a:noFill/>
-          </a:ln>
-        </p:spPr>
-        <p:style>
-          <a:lnRef idx="1">
-            <a:schemeClr val="accent1"/>
-          </a:lnRef>
-          <a:fillRef idx="3">
-            <a:schemeClr val="accent1"/>
-          </a:fillRef>
-          <a:effectRef idx="2">
-            <a:schemeClr val="accent1"/>
-          </a:effectRef>
-          <a:fontRef idx="minor">
-            <a:schemeClr val="lt1"/>
-          </a:fontRef>
-        </p:style>
-        <p:txBody>
-          <a:bodyPr rtlCol="0" anchor="ctr"/>
-          <a:lstStyle/>
-          <a:p>
-            <a:pPr algn="ctr"/>
-          </a:p>
-        </p:txBody>
-      </p:sp>
-      <p:sp>
-        <p:nvSpPr>
-          <p:cNvPr id="14" name="Rectangle 13"/>
-          <p:cNvSpPr/>
-          <p:nvPr/>
-        </p:nvSpPr>
-        <p:spPr>
-          <a:xfrm>
-            <a:off x="640080" y="2761488"/>
-            <a:ext cx="274320" cy="274320"/>
-          </a:xfrm>
-          <a:prstGeom prst="rect">
-            <a:avLst/>
-          </a:prstGeom>
-          <a:solidFill>
-            <a:srgbClr val="FFFFFF"/>
-          </a:solidFill>
-          <a:ln>
-            <a:solidFill>
-              <a:srgbClr val="333333"/>
-            </a:solidFill>
-          </a:ln>
-        </p:spPr>
-        <p:style>
-          <a:lnRef idx="1">
-            <a:schemeClr val="accent1"/>
-          </a:lnRef>
-          <a:fillRef idx="3">
-            <a:schemeClr val="accent1"/>
-          </a:fillRef>
-          <a:effectRef idx="2">
-            <a:schemeClr val="accent1"/>
-          </a:effectRef>
-          <a:fontRef idx="minor">
-            <a:schemeClr val="lt1"/>
-          </a:fontRef>
-        </p:style>
-        <p:txBody>
-          <a:bodyPr rtlCol="0" anchor="ctr"/>
-          <a:lstStyle/>
-          <a:p>
-            <a:pPr algn="ctr"/>
-          </a:p>
-        </p:txBody>
-      </p:sp>
-      <p:sp>
-        <p:nvSpPr>
-          <p:cNvPr id="15" name="Rectangle 14"/>
-          <p:cNvSpPr/>
-          <p:nvPr/>
-        </p:nvSpPr>
-        <p:spPr>
-          <a:xfrm>
-            <a:off x="640080" y="2761488"/>
-            <a:ext cx="73152" cy="274320"/>
-          </a:xfrm>
-          <a:prstGeom prst="rect">
-            <a:avLst/>
-          </a:prstGeom>
-          <a:solidFill>
-            <a:srgbClr val="269CCB"/>
-          </a:solidFill>
-          <a:ln>
-            <a:noFill/>
-          </a:ln>
-        </p:spPr>
-        <p:style>
-          <a:lnRef idx="1">
-            <a:schemeClr val="accent1"/>
-          </a:lnRef>
-          <a:fillRef idx="3">
-            <a:schemeClr val="accent1"/>
-          </a:fillRef>
-          <a:effectRef idx="2">
-            <a:schemeClr val="accent1"/>
-          </a:effectRef>
-          <a:fontRef idx="minor">
-            <a:schemeClr val="lt1"/>
-          </a:fontRef>
-        </p:style>
-        <p:txBody>
-          <a:bodyPr rtlCol="0" anchor="ctr"/>
-          <a:lstStyle/>
-          <a:p>
-            <a:pPr algn="ctr"/>
-          </a:p>
-        </p:txBody>
-      </p:sp>
-      <p:sp>
-        <p:nvSpPr>
-          <p:cNvPr id="16" name="TextBox 15"/>
-          <p:cNvSpPr txBox="1"/>
-          <p:nvPr/>
-        </p:nvSpPr>
-        <p:spPr>
-          <a:xfrm>
-            <a:off x="1097280" y="2706624"/>
-            <a:ext cx="10362895" cy="402336"/>
-          </a:xfrm>
-          <a:prstGeom prst="rect">
-            <a:avLst/>
-          </a:prstGeom>
-          <a:noFill/>
-        </p:spPr>
-        <p:txBody>
-          <a:bodyPr wrap="square" anchor="ctr"/>
-          <a:lstStyle/>
-          <a:p>
-            <a:r>
-              <a:rPr sz="1500" b="0" i="0">
+              <a:t>Objetivo:</a:t>
+            </a:r>
+            <a:r>
+              <a:rPr sz="2000" b="0" i="0">
                 <a:solidFill>
                   <a:srgbClr val="333333"/>
                 </a:solidFill>
                 <a:latin typeface="Calibri"/>
               </a:rPr>
-              <a:t>□ Conecta con procs?</a:t>
-            </a:r>
-          </a:p>
-        </p:txBody>
-      </p:sp>
-      <p:sp>
-        <p:nvSpPr>
-          <p:cNvPr id="17" name="TextBox 16"/>
+              <a:t> 2 escenarios concurrencia T1/T2 + mitigacion.</a:t>
+            </a:r>
+          </a:p>
+          <a:p>
+            <a:pPr>
+              <a:spcAft>
+                <a:spcPts val="800"/>
+              </a:spcAft>
+            </a:pPr>
+            <a:r>
+              <a:rPr sz="2000" b="0" i="0">
+                <a:solidFill>
+                  <a:srgbClr val="333333"/>
+                </a:solidFill>
+                <a:latin typeface="Calibri"/>
+              </a:rPr>
+              <a:t>–   </a:t>
+            </a:r>
+            <a:r>
+              <a:rPr sz="2000" b="1" i="0">
+                <a:solidFill>
+                  <a:srgbClr val="333333"/>
+                </a:solidFill>
+                <a:latin typeface="Calibri"/>
+              </a:rPr>
+              <a:t>Exito:</a:t>
+            </a:r>
+            <a:r>
+              <a:rPr sz="2000" b="0" i="0">
+                <a:solidFill>
+                  <a:srgbClr val="333333"/>
+                </a:solidFill>
+                <a:latin typeface="Calibri"/>
+              </a:rPr>
+              <a:t> Doble reserva.</a:t>
+            </a:r>
+          </a:p>
+          <a:p>
+            <a:pPr>
+              <a:spcAft>
+                <a:spcPts val="800"/>
+              </a:spcAft>
+            </a:pPr>
+            <a:r>
+              <a:rPr sz="2000" b="0" i="0">
+                <a:solidFill>
+                  <a:srgbClr val="333333"/>
+                </a:solidFill>
+                <a:latin typeface="Calibri"/>
+              </a:rPr>
+              <a:t>–   </a:t>
+            </a:r>
+            <a:r>
+              <a:rPr sz="2000" b="1" i="0">
+                <a:solidFill>
+                  <a:srgbClr val="333333"/>
+                </a:solidFill>
+                <a:latin typeface="Calibri"/>
+              </a:rPr>
+              <a:t>Exito:</a:t>
+            </a:r>
+            <a:r>
+              <a:rPr sz="2000" b="0" i="0">
+                <a:solidFill>
+                  <a:srgbClr val="333333"/>
+                </a:solidFill>
+                <a:latin typeface="Calibri"/>
+              </a:rPr>
+              <a:t> Doble stock.</a:t>
+            </a:r>
+          </a:p>
+          <a:p>
+            <a:pPr>
+              <a:spcAft>
+                <a:spcPts val="800"/>
+              </a:spcAft>
+            </a:pPr>
+            <a:r>
+              <a:rPr sz="2000" b="0" i="0">
+                <a:solidFill>
+                  <a:srgbClr val="333333"/>
+                </a:solidFill>
+                <a:latin typeface="Calibri"/>
+              </a:rPr>
+              <a:t>–   </a:t>
+            </a:r>
+            <a:r>
+              <a:rPr sz="2000" b="1" i="0">
+                <a:solidFill>
+                  <a:srgbClr val="333333"/>
+                </a:solidFill>
+                <a:latin typeface="Calibri"/>
+              </a:rPr>
+              <a:t>Exito:</a:t>
+            </a:r>
+            <a:r>
+              <a:rPr sz="2000" b="0" i="0">
+                <a:solidFill>
+                  <a:srgbClr val="333333"/>
+                </a:solidFill>
+                <a:latin typeface="Calibri"/>
+              </a:rPr>
+              <a:t> Mitigacion SQL.</a:t>
+            </a:r>
+          </a:p>
+          <a:p>
+            <a:pPr>
+              <a:spcAft>
+                <a:spcPts val="800"/>
+              </a:spcAft>
+            </a:pPr>
+            <a:r>
+              <a:rPr sz="2000" b="0" i="0">
+                <a:solidFill>
+                  <a:srgbClr val="333333"/>
+                </a:solidFill>
+                <a:latin typeface="Calibri"/>
+              </a:rPr>
+              <a:t>–   </a:t>
+            </a:r>
+            <a:r>
+              <a:rPr sz="2000" b="1" i="0">
+                <a:solidFill>
+                  <a:srgbClr val="333333"/>
+                </a:solidFill>
+                <a:latin typeface="Calibri"/>
+              </a:rPr>
+              <a:t>Exito:</a:t>
+            </a:r>
+            <a:r>
+              <a:rPr sz="2000" b="0" i="0">
+                <a:solidFill>
+                  <a:srgbClr val="333333"/>
+                </a:solidFill>
+                <a:latin typeface="Calibri"/>
+              </a:rPr>
+              <a:t> Sección informe.</a:t>
+            </a:r>
+          </a:p>
+          <a:p>
+            <a:pPr>
+              <a:spcAft>
+                <a:spcPts val="800"/>
+              </a:spcAft>
+            </a:pPr>
+            <a:r>
+              <a:rPr sz="2000" b="0" i="0">
+                <a:solidFill>
+                  <a:srgbClr val="333333"/>
+                </a:solidFill>
+                <a:latin typeface="Calibri"/>
+              </a:rPr>
+              <a:t>–   </a:t>
+            </a:r>
+            <a:r>
+              <a:rPr sz="2000" b="1" i="0">
+                <a:solidFill>
+                  <a:srgbClr val="333333"/>
+                </a:solidFill>
+                <a:latin typeface="Calibri"/>
+              </a:rPr>
+              <a:t>Exito:</a:t>
+            </a:r>
+            <a:r>
+              <a:rPr sz="2000" b="0" i="0">
+                <a:solidFill>
+                  <a:srgbClr val="333333"/>
+                </a:solidFill>
+                <a:latin typeface="Calibri"/>
+              </a:rPr>
+              <a:t> en la fecha que indique el docente.</a:t>
+            </a:r>
+          </a:p>
+        </p:txBody>
+      </p:sp>
+      <p:sp>
+        <p:nvSpPr>
+          <p:cNvPr id="6" name="TextBox 5"/>
           <p:cNvSpPr txBox="1"/>
           <p:nvPr/>
         </p:nvSpPr>
@@ -12509,7 +12315,7 @@
                 </a:solidFill>
                 <a:latin typeface="Calibri"/>
               </a:rPr>
-              <a:t>Criterios de exito / entregable</a:t>
+              <a:t>Actividad autonoma — escenario / datos de partida</a:t>
             </a:r>
           </a:p>
         </p:txBody>
@@ -12548,107 +12354,7 @@
                 </a:solidFill>
                 <a:latin typeface="Calibri"/>
               </a:rPr>
-              <a:t>–   </a:t>
-            </a:r>
-            <a:r>
-              <a:rPr sz="2000" b="1" i="0">
-                <a:solidFill>
-                  <a:srgbClr val="333333"/>
-                </a:solidFill>
-                <a:latin typeface="Calibri"/>
-              </a:rPr>
-              <a:t>Entregable:</a:t>
-            </a:r>
-            <a:r>
-              <a:rPr sz="2000" b="0" i="0">
-                <a:solidFill>
-                  <a:srgbClr val="333333"/>
-                </a:solidFill>
-                <a:latin typeface="Calibri"/>
-              </a:rPr>
-              <a:t> Informe corto: 2 escenarios (cita doble / stock) + mitigacion</a:t>
-            </a:r>
-          </a:p>
-          <a:p>
-            <a:pPr>
-              <a:spcAft>
-                <a:spcPts val="800"/>
-              </a:spcAft>
-            </a:pPr>
-            <a:r>
-              <a:rPr sz="2000" b="0" i="0">
-                <a:solidFill>
-                  <a:srgbClr val="333333"/>
-                </a:solidFill>
-                <a:latin typeface="Calibri"/>
-              </a:rPr>
-              <a:t>–   Evidencia: el SQL y su salida quedan guardados en cada pregunta de la plataforma del curso.</a:t>
-            </a:r>
-          </a:p>
-          <a:p>
-            <a:pPr>
-              <a:spcAft>
-                <a:spcPts val="800"/>
-              </a:spcAft>
-            </a:pPr>
-            <a:r>
-              <a:rPr sz="2000" b="0" i="0">
-                <a:solidFill>
-                  <a:srgbClr val="333333"/>
-                </a:solidFill>
-                <a:latin typeface="Calibri"/>
-              </a:rPr>
-              <a:t>–   Conserva copia en tu carpeta del PI (los .sql que pide el entregable).</a:t>
-            </a:r>
-          </a:p>
-          <a:p>
-            <a:pPr>
-              <a:spcAft>
-                <a:spcPts val="800"/>
-              </a:spcAft>
-            </a:pPr>
-            <a:r>
-              <a:rPr sz="2000" b="0" i="0">
-                <a:solidFill>
-                  <a:srgbClr val="333333"/>
-                </a:solidFill>
-                <a:latin typeface="Calibri"/>
-              </a:rPr>
-              <a:t>–   Actualizar checklist PI (que criterio de rubrica avanzo).</a:t>
-            </a:r>
-          </a:p>
-          <a:p>
-            <a:pPr>
-              <a:spcAft>
-                <a:spcPts val="800"/>
-              </a:spcAft>
-            </a:pPr>
-            <a:r>
-              <a:rPr sz="2000" b="0" i="0">
-                <a:solidFill>
-                  <a:srgbClr val="333333"/>
-                </a:solidFill>
-                <a:latin typeface="Calibri"/>
-              </a:rPr>
-              <a:t>–   </a:t>
-            </a:r>
-            <a:r>
-              <a:rPr sz="2000" b="1" i="0">
-                <a:solidFill>
-                  <a:srgbClr val="333333"/>
-                </a:solidFill>
-                <a:latin typeface="Calibri"/>
-              </a:rPr>
-              <a:t>Entrega en la plataforma del curso</a:t>
-            </a:r>
-            <a:r>
-              <a:rPr sz="2000" b="0" i="0">
-                <a:solidFill>
-                  <a:srgbClr val="333333"/>
-                </a:solidFill>
-                <a:latin typeface="Calibri"/>
-              </a:rPr>
-              <a:t> — en la fecha que indique el docente.</a:t>
+              <a:t>–   Narrar T1/T2 sobre Cita/Insumo.</a:t>
             </a:r>
           </a:p>
         </p:txBody>
@@ -12829,7 +12535,7 @@
                 </a:solidFill>
                 <a:latin typeface="Calibri"/>
               </a:rPr>
-              <a:t>Para el PI esta semana</a:t>
+              <a:t>Actividad autonoma — pasos guiados</a:t>
             </a:r>
           </a:p>
         </p:txBody>
@@ -12842,7 +12548,162 @@
         </p:nvSpPr>
         <p:spPr>
           <a:xfrm>
-            <a:off x="457200" y="1261872"/>
+            <a:off x="457200" y="1554480"/>
+            <a:ext cx="11277295" cy="1051560"/>
+          </a:xfrm>
+          <a:prstGeom prst="roundRect">
+            <a:avLst>
+              <a:gd name="adj" fmla="val 12000"/>
+            </a:avLst>
+          </a:prstGeom>
+          <a:solidFill>
+            <a:srgbClr val="F2F2F2"/>
+          </a:solidFill>
+          <a:ln>
+            <a:noFill/>
+          </a:ln>
+        </p:spPr>
+        <p:style>
+          <a:lnRef idx="1">
+            <a:schemeClr val="accent1"/>
+          </a:lnRef>
+          <a:fillRef idx="3">
+            <a:schemeClr val="accent1"/>
+          </a:fillRef>
+          <a:effectRef idx="2">
+            <a:schemeClr val="accent1"/>
+          </a:effectRef>
+          <a:fontRef idx="minor">
+            <a:schemeClr val="lt1"/>
+          </a:fontRef>
+        </p:style>
+        <p:txBody>
+          <a:bodyPr rtlCol="0" anchor="ctr"/>
+          <a:lstStyle/>
+          <a:p>
+            <a:pPr algn="ctr"/>
+          </a:p>
+        </p:txBody>
+      </p:sp>
+      <p:sp>
+        <p:nvSpPr>
+          <p:cNvPr id="6" name="Rounded Rectangle 5"/>
+          <p:cNvSpPr/>
+          <p:nvPr/>
+        </p:nvSpPr>
+        <p:spPr>
+          <a:xfrm>
+            <a:off x="594360" y="1860804"/>
+            <a:ext cx="438912" cy="438912"/>
+          </a:xfrm>
+          <a:prstGeom prst="roundRect">
+            <a:avLst>
+              <a:gd name="adj" fmla="val 12000"/>
+            </a:avLst>
+          </a:prstGeom>
+          <a:solidFill>
+            <a:srgbClr val="095292"/>
+          </a:solidFill>
+          <a:ln>
+            <a:noFill/>
+          </a:ln>
+        </p:spPr>
+        <p:style>
+          <a:lnRef idx="1">
+            <a:schemeClr val="accent1"/>
+          </a:lnRef>
+          <a:fillRef idx="3">
+            <a:schemeClr val="accent1"/>
+          </a:fillRef>
+          <a:effectRef idx="2">
+            <a:schemeClr val="accent1"/>
+          </a:effectRef>
+          <a:fontRef idx="minor">
+            <a:schemeClr val="lt1"/>
+          </a:fontRef>
+        </p:style>
+        <p:txBody>
+          <a:bodyPr rtlCol="0" anchor="ctr"/>
+          <a:lstStyle/>
+          <a:p>
+            <a:pPr algn="ctr"/>
+          </a:p>
+        </p:txBody>
+      </p:sp>
+      <p:sp>
+        <p:nvSpPr>
+          <p:cNvPr id="7" name="TextBox 6"/>
+          <p:cNvSpPr txBox="1"/>
+          <p:nvPr/>
+        </p:nvSpPr>
+        <p:spPr>
+          <a:xfrm>
+            <a:off x="594360" y="1860804"/>
+            <a:ext cx="438912" cy="438912"/>
+          </a:xfrm>
+          <a:prstGeom prst="rect">
+            <a:avLst/>
+          </a:prstGeom>
+          <a:noFill/>
+        </p:spPr>
+        <p:txBody>
+          <a:bodyPr wrap="square" anchor="ctr"/>
+          <a:lstStyle/>
+          <a:p>
+            <a:pPr algn="ctr"/>
+            <a:r>
+              <a:rPr sz="1600" b="1" i="0">
+                <a:solidFill>
+                  <a:srgbClr val="FFFFFF"/>
+                </a:solidFill>
+                <a:latin typeface="Calibri"/>
+              </a:rPr>
+              <a:t>1</a:t>
+            </a:r>
+          </a:p>
+        </p:txBody>
+      </p:sp>
+      <p:sp>
+        <p:nvSpPr>
+          <p:cNvPr id="8" name="TextBox 7"/>
+          <p:cNvSpPr txBox="1"/>
+          <p:nvPr/>
+        </p:nvSpPr>
+        <p:spPr>
+          <a:xfrm>
+            <a:off x="1188720" y="1645920"/>
+            <a:ext cx="10271455" cy="886968"/>
+          </a:xfrm>
+          <a:prstGeom prst="rect">
+            <a:avLst/>
+          </a:prstGeom>
+          <a:noFill/>
+        </p:spPr>
+        <p:txBody>
+          <a:bodyPr wrap="square" anchor="ctr"/>
+          <a:lstStyle/>
+          <a:p>
+            <a:r>
+              <a:rPr sz="1500" b="1" i="0">
+                <a:solidFill>
+                  <a:srgbClr val="095292"/>
+                </a:solidFill>
+                <a:latin typeface="Calibri"/>
+              </a:rPr>
+              <a:t>Describir escenario doble reserva con tiempos T1/T2.</a:t>
+            </a:r>
+          </a:p>
+        </p:txBody>
+      </p:sp>
+      <p:sp>
+        <p:nvSpPr>
+          <p:cNvPr id="9" name="Rounded Rectangle 8"/>
+          <p:cNvSpPr/>
+          <p:nvPr/>
+        </p:nvSpPr>
+        <p:spPr>
+          <a:xfrm>
+            <a:off x="457200" y="2697480"/>
             <a:ext cx="11277295" cy="1051560"/>
           </a:xfrm>
           <a:prstGeom prst="roundRect">
@@ -12881,20 +12742,22 @@
       </p:sp>
       <p:sp>
         <p:nvSpPr>
-          <p:cNvPr id="6" name="Rectangle 5"/>
+          <p:cNvPr id="10" name="Rounded Rectangle 9"/>
           <p:cNvSpPr/>
           <p:nvPr/>
         </p:nvSpPr>
         <p:spPr>
           <a:xfrm>
-            <a:off x="457200" y="1261872"/>
-            <a:ext cx="128016" cy="1051560"/>
-          </a:xfrm>
-          <a:prstGeom prst="rect">
-            <a:avLst/>
+            <a:off x="594360" y="3003804"/>
+            <a:ext cx="438912" cy="438912"/>
+          </a:xfrm>
+          <a:prstGeom prst="roundRect">
+            <a:avLst>
+              <a:gd name="adj" fmla="val 12000"/>
+            </a:avLst>
           </a:prstGeom>
           <a:solidFill>
-            <a:srgbClr val="269CCB"/>
+            <a:srgbClr val="095292"/>
           </a:solidFill>
           <a:ln>
             <a:noFill/>
@@ -12924,14 +12787,14 @@
       </p:sp>
       <p:sp>
         <p:nvSpPr>
-          <p:cNvPr id="7" name="TextBox 6"/>
+          <p:cNvPr id="11" name="TextBox 10"/>
           <p:cNvSpPr txBox="1"/>
           <p:nvPr/>
         </p:nvSpPr>
         <p:spPr>
           <a:xfrm>
-            <a:off x="777240" y="1399031"/>
-            <a:ext cx="10774375" cy="822959"/>
+            <a:off x="594360" y="3003804"/>
+            <a:ext cx="438912" cy="438912"/>
           </a:xfrm>
           <a:prstGeom prst="rect">
             <a:avLst/>
@@ -12939,48 +12802,63 @@
           <a:noFill/>
         </p:spPr>
         <p:txBody>
-          <a:bodyPr wrap="square">
-            <a:spAutoFit/>
-          </a:bodyPr>
-          <a:lstStyle/>
-          <a:p>
-            <a:r>
-              <a:rPr sz="1200" b="1" i="0">
-                <a:solidFill>
-                  <a:srgbClr val="269CCB"/>
-                </a:solidFill>
-                <a:latin typeface="Calibri"/>
-              </a:rPr>
-              <a:t>Info</a:t>
-            </a:r>
-          </a:p>
-          <a:p>
-            <a:pPr>
-              <a:spcBef>
-                <a:spcPts val="400"/>
-              </a:spcBef>
-            </a:pPr>
-            <a:r>
-              <a:rPr sz="1400" b="0" i="0">
-                <a:solidFill>
-                  <a:srgbClr val="333333"/>
-                </a:solidFill>
-                <a:latin typeface="Calibri"/>
-              </a:rPr>
-              <a:t>Hito: Escenarios de concurrencia del PI documentados</a:t>
-            </a:r>
-          </a:p>
-        </p:txBody>
-      </p:sp>
-      <p:sp>
-        <p:nvSpPr>
-          <p:cNvPr id="8" name="Rounded Rectangle 7"/>
+          <a:bodyPr wrap="square" anchor="ctr"/>
+          <a:lstStyle/>
+          <a:p>
+            <a:pPr algn="ctr"/>
+            <a:r>
+              <a:rPr sz="1600" b="1" i="0">
+                <a:solidFill>
+                  <a:srgbClr val="FFFFFF"/>
+                </a:solidFill>
+                <a:latin typeface="Calibri"/>
+              </a:rPr>
+              <a:t>2</a:t>
+            </a:r>
+          </a:p>
+        </p:txBody>
+      </p:sp>
+      <p:sp>
+        <p:nvSpPr>
+          <p:cNvPr id="12" name="TextBox 11"/>
+          <p:cNvSpPr txBox="1"/>
+          <p:nvPr/>
+        </p:nvSpPr>
+        <p:spPr>
+          <a:xfrm>
+            <a:off x="1188720" y="2788920"/>
+            <a:ext cx="10271455" cy="886968"/>
+          </a:xfrm>
+          <a:prstGeom prst="rect">
+            <a:avLst/>
+          </a:prstGeom>
+          <a:noFill/>
+        </p:spPr>
+        <p:txBody>
+          <a:bodyPr wrap="square" anchor="ctr"/>
+          <a:lstStyle/>
+          <a:p>
+            <a:r>
+              <a:rPr sz="1500" b="1" i="0">
+                <a:solidFill>
+                  <a:srgbClr val="095292"/>
+                </a:solidFill>
+                <a:latin typeface="Calibri"/>
+              </a:rPr>
+              <a:t>Describir escenario doble descuento de stock.</a:t>
+            </a:r>
+          </a:p>
+        </p:txBody>
+      </p:sp>
+      <p:sp>
+        <p:nvSpPr>
+          <p:cNvPr id="13" name="Rounded Rectangle 12"/>
           <p:cNvSpPr/>
           <p:nvPr/>
         </p:nvSpPr>
         <p:spPr>
           <a:xfrm>
-            <a:off x="457200" y="2478024"/>
+            <a:off x="457200" y="3840480"/>
             <a:ext cx="11277295" cy="1051560"/>
           </a:xfrm>
           <a:prstGeom prst="roundRect">
@@ -12989,7 +12867,7 @@
             </a:avLst>
           </a:prstGeom>
           <a:solidFill>
-            <a:srgbClr val="FFF8E1"/>
+            <a:srgbClr val="F2F2F2"/>
           </a:solidFill>
           <a:ln>
             <a:noFill/>
@@ -13019,20 +12897,22 @@
       </p:sp>
       <p:sp>
         <p:nvSpPr>
-          <p:cNvPr id="9" name="Rectangle 8"/>
+          <p:cNvPr id="14" name="Rounded Rectangle 13"/>
           <p:cNvSpPr/>
           <p:nvPr/>
         </p:nvSpPr>
         <p:spPr>
           <a:xfrm>
-            <a:off x="457200" y="2478024"/>
-            <a:ext cx="128016" cy="1051560"/>
-          </a:xfrm>
-          <a:prstGeom prst="rect">
-            <a:avLst/>
+            <a:off x="594360" y="4146804"/>
+            <a:ext cx="438912" cy="438912"/>
+          </a:xfrm>
+          <a:prstGeom prst="roundRect">
+            <a:avLst>
+              <a:gd name="adj" fmla="val 12000"/>
+            </a:avLst>
           </a:prstGeom>
           <a:solidFill>
-            <a:srgbClr val="FFD000"/>
+            <a:srgbClr val="095292"/>
           </a:solidFill>
           <a:ln>
             <a:noFill/>
@@ -13062,14 +12942,14 @@
       </p:sp>
       <p:sp>
         <p:nvSpPr>
-          <p:cNvPr id="10" name="TextBox 9"/>
+          <p:cNvPr id="15" name="TextBox 14"/>
           <p:cNvSpPr txBox="1"/>
           <p:nvPr/>
         </p:nvSpPr>
         <p:spPr>
           <a:xfrm>
-            <a:off x="777240" y="2615184"/>
-            <a:ext cx="10774375" cy="822959"/>
+            <a:off x="594360" y="4146804"/>
+            <a:ext cx="438912" cy="438912"/>
           </a:xfrm>
           <a:prstGeom prst="rect">
             <a:avLst/>
@@ -13077,48 +12957,63 @@
           <a:noFill/>
         </p:spPr>
         <p:txBody>
-          <a:bodyPr wrap="square">
-            <a:spAutoFit/>
-          </a:bodyPr>
-          <a:lstStyle/>
-          <a:p>
-            <a:r>
-              <a:rPr sz="1200" b="1" i="0">
-                <a:solidFill>
-                  <a:srgbClr val="FFD000"/>
-                </a:solidFill>
-                <a:latin typeface="Calibri"/>
-              </a:rPr>
-              <a:t>Aclaración</a:t>
-            </a:r>
-          </a:p>
-          <a:p>
-            <a:pPr>
-              <a:spcBef>
-                <a:spcPts val="400"/>
-              </a:spcBef>
-            </a:pPr>
-            <a:r>
-              <a:rPr sz="1400" b="0" i="0">
-                <a:solidFill>
-                  <a:srgbClr val="333333"/>
-                </a:solidFill>
-                <a:latin typeface="Calibri"/>
-              </a:rPr>
-              <a:t>Enunciado completo: Clases/Proyecto Integrador/ (VetCare DB).</a:t>
-            </a:r>
-          </a:p>
-        </p:txBody>
-      </p:sp>
-      <p:sp>
-        <p:nvSpPr>
-          <p:cNvPr id="11" name="Rounded Rectangle 10"/>
+          <a:bodyPr wrap="square" anchor="ctr"/>
+          <a:lstStyle/>
+          <a:p>
+            <a:pPr algn="ctr"/>
+            <a:r>
+              <a:rPr sz="1600" b="1" i="0">
+                <a:solidFill>
+                  <a:srgbClr val="FFFFFF"/>
+                </a:solidFill>
+                <a:latin typeface="Calibri"/>
+              </a:rPr>
+              <a:t>3</a:t>
+            </a:r>
+          </a:p>
+        </p:txBody>
+      </p:sp>
+      <p:sp>
+        <p:nvSpPr>
+          <p:cNvPr id="16" name="TextBox 15"/>
+          <p:cNvSpPr txBox="1"/>
+          <p:nvPr/>
+        </p:nvSpPr>
+        <p:spPr>
+          <a:xfrm>
+            <a:off x="1188720" y="3931920"/>
+            <a:ext cx="10271455" cy="886968"/>
+          </a:xfrm>
+          <a:prstGeom prst="rect">
+            <a:avLst/>
+          </a:prstGeom>
+          <a:noFill/>
+        </p:spPr>
+        <p:txBody>
+          <a:bodyPr wrap="square" anchor="ctr"/>
+          <a:lstStyle/>
+          <a:p>
+            <a:r>
+              <a:rPr sz="1500" b="1" i="0">
+                <a:solidFill>
+                  <a:srgbClr val="095292"/>
+                </a:solidFill>
+                <a:latin typeface="Calibri"/>
+              </a:rPr>
+              <a:t>Proponer mitigacion SQL.</a:t>
+            </a:r>
+          </a:p>
+        </p:txBody>
+      </p:sp>
+      <p:sp>
+        <p:nvSpPr>
+          <p:cNvPr id="17" name="Rounded Rectangle 16"/>
           <p:cNvSpPr/>
           <p:nvPr/>
         </p:nvSpPr>
         <p:spPr>
           <a:xfrm>
-            <a:off x="457200" y="3694176"/>
+            <a:off x="457200" y="4983480"/>
             <a:ext cx="11277295" cy="1051560"/>
           </a:xfrm>
           <a:prstGeom prst="roundRect">
@@ -13127,7 +13022,7 @@
             </a:avLst>
           </a:prstGeom>
           <a:solidFill>
-            <a:srgbClr val="FBE4E4"/>
+            <a:srgbClr val="E8F4FA"/>
           </a:solidFill>
           <a:ln>
             <a:noFill/>
@@ -13157,20 +13052,22 @@
       </p:sp>
       <p:sp>
         <p:nvSpPr>
-          <p:cNvPr id="12" name="Rectangle 11"/>
+          <p:cNvPr id="18" name="Rounded Rectangle 17"/>
           <p:cNvSpPr/>
           <p:nvPr/>
         </p:nvSpPr>
         <p:spPr>
           <a:xfrm>
-            <a:off x="457200" y="3694176"/>
-            <a:ext cx="128016" cy="1051560"/>
-          </a:xfrm>
-          <a:prstGeom prst="rect">
-            <a:avLst/>
+            <a:off x="594360" y="5289804"/>
+            <a:ext cx="438912" cy="438912"/>
+          </a:xfrm>
+          <a:prstGeom prst="roundRect">
+            <a:avLst>
+              <a:gd name="adj" fmla="val 12000"/>
+            </a:avLst>
           </a:prstGeom>
           <a:solidFill>
-            <a:srgbClr val="A02030"/>
+            <a:srgbClr val="095292"/>
           </a:solidFill>
           <a:ln>
             <a:noFill/>
@@ -13200,14 +13097,14 @@
       </p:sp>
       <p:sp>
         <p:nvSpPr>
-          <p:cNvPr id="13" name="TextBox 12"/>
+          <p:cNvPr id="19" name="TextBox 18"/>
           <p:cNvSpPr txBox="1"/>
           <p:nvPr/>
         </p:nvSpPr>
         <p:spPr>
           <a:xfrm>
-            <a:off x="777240" y="3831336"/>
-            <a:ext cx="10774375" cy="822959"/>
+            <a:off x="594360" y="5289804"/>
+            <a:ext cx="438912" cy="438912"/>
           </a:xfrm>
           <a:prstGeom prst="rect">
             <a:avLst/>
@@ -13215,42 +13112,57 @@
           <a:noFill/>
         </p:spPr>
         <p:txBody>
-          <a:bodyPr wrap="square">
-            <a:spAutoFit/>
-          </a:bodyPr>
-          <a:lstStyle/>
-          <a:p>
-            <a:r>
-              <a:rPr sz="1200" b="1" i="0">
-                <a:solidFill>
-                  <a:srgbClr val="A02030"/>
-                </a:solidFill>
-                <a:latin typeface="Calibri"/>
-              </a:rPr>
-              <a:t>Atención</a:t>
-            </a:r>
-          </a:p>
-          <a:p>
-            <a:pPr>
-              <a:spcBef>
-                <a:spcPts val="400"/>
-              </a:spcBef>
-            </a:pPr>
-            <a:r>
-              <a:rPr sz="1400" b="0" i="0">
-                <a:solidFill>
-                  <a:srgbClr val="333333"/>
-                </a:solidFill>
-                <a:latin typeface="Calibri"/>
-              </a:rPr>
-              <a:t>Si el docente asigna taller esta semana, él indica el canal y la fecha.</a:t>
-            </a:r>
-          </a:p>
-        </p:txBody>
-      </p:sp>
-      <p:sp>
-        <p:nvSpPr>
-          <p:cNvPr id="14" name="TextBox 13"/>
+          <a:bodyPr wrap="square" anchor="ctr"/>
+          <a:lstStyle/>
+          <a:p>
+            <a:pPr algn="ctr"/>
+            <a:r>
+              <a:rPr sz="1600" b="1" i="0">
+                <a:solidFill>
+                  <a:srgbClr val="FFFFFF"/>
+                </a:solidFill>
+                <a:latin typeface="Calibri"/>
+              </a:rPr>
+              <a:t>4</a:t>
+            </a:r>
+          </a:p>
+        </p:txBody>
+      </p:sp>
+      <p:sp>
+        <p:nvSpPr>
+          <p:cNvPr id="20" name="TextBox 19"/>
+          <p:cNvSpPr txBox="1"/>
+          <p:nvPr/>
+        </p:nvSpPr>
+        <p:spPr>
+          <a:xfrm>
+            <a:off x="1188720" y="5074920"/>
+            <a:ext cx="10271455" cy="886968"/>
+          </a:xfrm>
+          <a:prstGeom prst="rect">
+            <a:avLst/>
+          </a:prstGeom>
+          <a:noFill/>
+        </p:spPr>
+        <p:txBody>
+          <a:bodyPr wrap="square" anchor="ctr"/>
+          <a:lstStyle/>
+          <a:p>
+            <a:r>
+              <a:rPr sz="1500" b="1" i="0">
+                <a:solidFill>
+                  <a:srgbClr val="095292"/>
+                </a:solidFill>
+                <a:latin typeface="Calibri"/>
+              </a:rPr>
+              <a:t>Anadir seccion al informe PI.</a:t>
+            </a:r>
+          </a:p>
+        </p:txBody>
+      </p:sp>
+      <p:sp>
+        <p:nvSpPr>
+          <p:cNvPr id="21" name="TextBox 20"/>
           <p:cNvSpPr txBox="1"/>
           <p:nvPr/>
         </p:nvSpPr>
@@ -13292,6 +13204,1597 @@
 </file>
 
 <file path=ppt/slides/slide32.xml><?xml version="1.0" encoding="utf-8"?>
+<p:sld xmlns:a="http://schemas.openxmlformats.org/drawingml/2006/main" xmlns:p="http://schemas.openxmlformats.org/presentationml/2006/main" xmlns:r="http://schemas.openxmlformats.org/officeDocument/2006/relationships">
+  <p:cSld>
+    <p:bg>
+      <p:bgPr>
+        <a:solidFill>
+          <a:srgbClr val="FFFFFF"/>
+        </a:solidFill>
+        <a:effectLst/>
+      </p:bgPr>
+    </p:bg>
+    <p:spTree>
+      <p:nvGrpSpPr>
+        <p:cNvPr id="1" name=""/>
+        <p:cNvGrpSpPr/>
+        <p:nvPr/>
+      </p:nvGrpSpPr>
+      <p:grpSpPr/>
+      <p:sp>
+        <p:nvSpPr>
+          <p:cNvPr id="2" name="Rectangle 1"/>
+          <p:cNvSpPr/>
+          <p:nvPr/>
+        </p:nvSpPr>
+        <p:spPr>
+          <a:xfrm>
+            <a:off x="0" y="0"/>
+            <a:ext cx="12191695" cy="960120"/>
+          </a:xfrm>
+          <a:prstGeom prst="rect">
+            <a:avLst/>
+          </a:prstGeom>
+          <a:solidFill>
+            <a:srgbClr val="095292"/>
+          </a:solidFill>
+          <a:ln>
+            <a:noFill/>
+          </a:ln>
+        </p:spPr>
+        <p:style>
+          <a:lnRef idx="1">
+            <a:schemeClr val="accent1"/>
+          </a:lnRef>
+          <a:fillRef idx="3">
+            <a:schemeClr val="accent1"/>
+          </a:fillRef>
+          <a:effectRef idx="2">
+            <a:schemeClr val="accent1"/>
+          </a:effectRef>
+          <a:fontRef idx="minor">
+            <a:schemeClr val="lt1"/>
+          </a:fontRef>
+        </p:style>
+        <p:txBody>
+          <a:bodyPr rtlCol="0" anchor="ctr"/>
+          <a:lstStyle/>
+          <a:p>
+            <a:pPr algn="ctr"/>
+          </a:p>
+        </p:txBody>
+      </p:sp>
+      <p:sp>
+        <p:nvSpPr>
+          <p:cNvPr id="3" name="Rectangle 2"/>
+          <p:cNvSpPr/>
+          <p:nvPr/>
+        </p:nvSpPr>
+        <p:spPr>
+          <a:xfrm>
+            <a:off x="0" y="960120"/>
+            <a:ext cx="12191695" cy="41148"/>
+          </a:xfrm>
+          <a:prstGeom prst="rect">
+            <a:avLst/>
+          </a:prstGeom>
+          <a:solidFill>
+            <a:srgbClr val="FFD000"/>
+          </a:solidFill>
+          <a:ln>
+            <a:noFill/>
+          </a:ln>
+        </p:spPr>
+        <p:style>
+          <a:lnRef idx="1">
+            <a:schemeClr val="accent1"/>
+          </a:lnRef>
+          <a:fillRef idx="3">
+            <a:schemeClr val="accent1"/>
+          </a:fillRef>
+          <a:effectRef idx="2">
+            <a:schemeClr val="accent1"/>
+          </a:effectRef>
+          <a:fontRef idx="minor">
+            <a:schemeClr val="lt1"/>
+          </a:fontRef>
+        </p:style>
+        <p:txBody>
+          <a:bodyPr rtlCol="0" anchor="ctr"/>
+          <a:lstStyle/>
+          <a:p>
+            <a:pPr algn="ctr"/>
+          </a:p>
+        </p:txBody>
+      </p:sp>
+      <p:sp>
+        <p:nvSpPr>
+          <p:cNvPr id="4" name="TextBox 3"/>
+          <p:cNvSpPr txBox="1"/>
+          <p:nvPr/>
+        </p:nvSpPr>
+        <p:spPr>
+          <a:xfrm>
+            <a:off x="457200" y="164592"/>
+            <a:ext cx="11277295" cy="502920"/>
+          </a:xfrm>
+          <a:prstGeom prst="rect">
+            <a:avLst/>
+          </a:prstGeom>
+          <a:noFill/>
+        </p:spPr>
+        <p:txBody>
+          <a:bodyPr wrap="square">
+            <a:spAutoFit/>
+          </a:bodyPr>
+          <a:lstStyle/>
+          <a:p>
+            <a:r>
+              <a:rPr sz="2600" b="1" i="0">
+                <a:solidFill>
+                  <a:srgbClr val="FFFFFF"/>
+                </a:solidFill>
+                <a:latin typeface="Calibri"/>
+              </a:rPr>
+              <a:t>Actividad autonoma — pistas (checklist vacio)</a:t>
+            </a:r>
+          </a:p>
+        </p:txBody>
+      </p:sp>
+      <p:sp>
+        <p:nvSpPr>
+          <p:cNvPr id="5" name="Rounded Rectangle 4"/>
+          <p:cNvSpPr/>
+          <p:nvPr/>
+        </p:nvSpPr>
+        <p:spPr>
+          <a:xfrm>
+            <a:off x="457200" y="1261872"/>
+            <a:ext cx="11277295" cy="566928"/>
+          </a:xfrm>
+          <a:prstGeom prst="roundRect">
+            <a:avLst>
+              <a:gd name="adj" fmla="val 12000"/>
+            </a:avLst>
+          </a:prstGeom>
+          <a:solidFill>
+            <a:srgbClr val="F2F2F2"/>
+          </a:solidFill>
+          <a:ln>
+            <a:noFill/>
+          </a:ln>
+        </p:spPr>
+        <p:style>
+          <a:lnRef idx="1">
+            <a:schemeClr val="accent1"/>
+          </a:lnRef>
+          <a:fillRef idx="3">
+            <a:schemeClr val="accent1"/>
+          </a:fillRef>
+          <a:effectRef idx="2">
+            <a:schemeClr val="accent1"/>
+          </a:effectRef>
+          <a:fontRef idx="minor">
+            <a:schemeClr val="lt1"/>
+          </a:fontRef>
+        </p:style>
+        <p:txBody>
+          <a:bodyPr rtlCol="0" anchor="ctr"/>
+          <a:lstStyle/>
+          <a:p>
+            <a:pPr algn="ctr"/>
+          </a:p>
+        </p:txBody>
+      </p:sp>
+      <p:sp>
+        <p:nvSpPr>
+          <p:cNvPr id="6" name="Rectangle 5"/>
+          <p:cNvSpPr/>
+          <p:nvPr/>
+        </p:nvSpPr>
+        <p:spPr>
+          <a:xfrm>
+            <a:off x="640080" y="1408175"/>
+            <a:ext cx="274320" cy="274320"/>
+          </a:xfrm>
+          <a:prstGeom prst="rect">
+            <a:avLst/>
+          </a:prstGeom>
+          <a:solidFill>
+            <a:srgbClr val="FFFFFF"/>
+          </a:solidFill>
+          <a:ln>
+            <a:solidFill>
+              <a:srgbClr val="333333"/>
+            </a:solidFill>
+          </a:ln>
+        </p:spPr>
+        <p:style>
+          <a:lnRef idx="1">
+            <a:schemeClr val="accent1"/>
+          </a:lnRef>
+          <a:fillRef idx="3">
+            <a:schemeClr val="accent1"/>
+          </a:fillRef>
+          <a:effectRef idx="2">
+            <a:schemeClr val="accent1"/>
+          </a:effectRef>
+          <a:fontRef idx="minor">
+            <a:schemeClr val="lt1"/>
+          </a:fontRef>
+        </p:style>
+        <p:txBody>
+          <a:bodyPr rtlCol="0" anchor="ctr"/>
+          <a:lstStyle/>
+          <a:p>
+            <a:pPr algn="ctr"/>
+          </a:p>
+        </p:txBody>
+      </p:sp>
+      <p:sp>
+        <p:nvSpPr>
+          <p:cNvPr id="7" name="Rectangle 6"/>
+          <p:cNvSpPr/>
+          <p:nvPr/>
+        </p:nvSpPr>
+        <p:spPr>
+          <a:xfrm>
+            <a:off x="640080" y="1408175"/>
+            <a:ext cx="73152" cy="274320"/>
+          </a:xfrm>
+          <a:prstGeom prst="rect">
+            <a:avLst/>
+          </a:prstGeom>
+          <a:solidFill>
+            <a:srgbClr val="269CCB"/>
+          </a:solidFill>
+          <a:ln>
+            <a:noFill/>
+          </a:ln>
+        </p:spPr>
+        <p:style>
+          <a:lnRef idx="1">
+            <a:schemeClr val="accent1"/>
+          </a:lnRef>
+          <a:fillRef idx="3">
+            <a:schemeClr val="accent1"/>
+          </a:fillRef>
+          <a:effectRef idx="2">
+            <a:schemeClr val="accent1"/>
+          </a:effectRef>
+          <a:fontRef idx="minor">
+            <a:schemeClr val="lt1"/>
+          </a:fontRef>
+        </p:style>
+        <p:txBody>
+          <a:bodyPr rtlCol="0" anchor="ctr"/>
+          <a:lstStyle/>
+          <a:p>
+            <a:pPr algn="ctr"/>
+          </a:p>
+        </p:txBody>
+      </p:sp>
+      <p:sp>
+        <p:nvSpPr>
+          <p:cNvPr id="8" name="TextBox 7"/>
+          <p:cNvSpPr txBox="1"/>
+          <p:nvPr/>
+        </p:nvSpPr>
+        <p:spPr>
+          <a:xfrm>
+            <a:off x="1097280" y="1353312"/>
+            <a:ext cx="10362895" cy="402336"/>
+          </a:xfrm>
+          <a:prstGeom prst="rect">
+            <a:avLst/>
+          </a:prstGeom>
+          <a:noFill/>
+        </p:spPr>
+        <p:txBody>
+          <a:bodyPr wrap="square" anchor="ctr"/>
+          <a:lstStyle/>
+          <a:p>
+            <a:r>
+              <a:rPr sz="1500" b="0" i="0">
+                <a:solidFill>
+                  <a:srgbClr val="333333"/>
+                </a:solidFill>
+                <a:latin typeface="Calibri"/>
+              </a:rPr>
+              <a:t>□ Tiempos claros?</a:t>
+            </a:r>
+          </a:p>
+        </p:txBody>
+      </p:sp>
+      <p:sp>
+        <p:nvSpPr>
+          <p:cNvPr id="9" name="Rounded Rectangle 8"/>
+          <p:cNvSpPr/>
+          <p:nvPr/>
+        </p:nvSpPr>
+        <p:spPr>
+          <a:xfrm>
+            <a:off x="457200" y="1938528"/>
+            <a:ext cx="11277295" cy="566928"/>
+          </a:xfrm>
+          <a:prstGeom prst="roundRect">
+            <a:avLst>
+              <a:gd name="adj" fmla="val 12000"/>
+            </a:avLst>
+          </a:prstGeom>
+          <a:solidFill>
+            <a:srgbClr val="F2F2F2"/>
+          </a:solidFill>
+          <a:ln>
+            <a:noFill/>
+          </a:ln>
+        </p:spPr>
+        <p:style>
+          <a:lnRef idx="1">
+            <a:schemeClr val="accent1"/>
+          </a:lnRef>
+          <a:fillRef idx="3">
+            <a:schemeClr val="accent1"/>
+          </a:fillRef>
+          <a:effectRef idx="2">
+            <a:schemeClr val="accent1"/>
+          </a:effectRef>
+          <a:fontRef idx="minor">
+            <a:schemeClr val="lt1"/>
+          </a:fontRef>
+        </p:style>
+        <p:txBody>
+          <a:bodyPr rtlCol="0" anchor="ctr"/>
+          <a:lstStyle/>
+          <a:p>
+            <a:pPr algn="ctr"/>
+          </a:p>
+        </p:txBody>
+      </p:sp>
+      <p:sp>
+        <p:nvSpPr>
+          <p:cNvPr id="10" name="Rectangle 9"/>
+          <p:cNvSpPr/>
+          <p:nvPr/>
+        </p:nvSpPr>
+        <p:spPr>
+          <a:xfrm>
+            <a:off x="640080" y="2084832"/>
+            <a:ext cx="274320" cy="274320"/>
+          </a:xfrm>
+          <a:prstGeom prst="rect">
+            <a:avLst/>
+          </a:prstGeom>
+          <a:solidFill>
+            <a:srgbClr val="FFFFFF"/>
+          </a:solidFill>
+          <a:ln>
+            <a:solidFill>
+              <a:srgbClr val="333333"/>
+            </a:solidFill>
+          </a:ln>
+        </p:spPr>
+        <p:style>
+          <a:lnRef idx="1">
+            <a:schemeClr val="accent1"/>
+          </a:lnRef>
+          <a:fillRef idx="3">
+            <a:schemeClr val="accent1"/>
+          </a:fillRef>
+          <a:effectRef idx="2">
+            <a:schemeClr val="accent1"/>
+          </a:effectRef>
+          <a:fontRef idx="minor">
+            <a:schemeClr val="lt1"/>
+          </a:fontRef>
+        </p:style>
+        <p:txBody>
+          <a:bodyPr rtlCol="0" anchor="ctr"/>
+          <a:lstStyle/>
+          <a:p>
+            <a:pPr algn="ctr"/>
+          </a:p>
+        </p:txBody>
+      </p:sp>
+      <p:sp>
+        <p:nvSpPr>
+          <p:cNvPr id="11" name="Rectangle 10"/>
+          <p:cNvSpPr/>
+          <p:nvPr/>
+        </p:nvSpPr>
+        <p:spPr>
+          <a:xfrm>
+            <a:off x="640080" y="2084832"/>
+            <a:ext cx="73152" cy="274320"/>
+          </a:xfrm>
+          <a:prstGeom prst="rect">
+            <a:avLst/>
+          </a:prstGeom>
+          <a:solidFill>
+            <a:srgbClr val="269CCB"/>
+          </a:solidFill>
+          <a:ln>
+            <a:noFill/>
+          </a:ln>
+        </p:spPr>
+        <p:style>
+          <a:lnRef idx="1">
+            <a:schemeClr val="accent1"/>
+          </a:lnRef>
+          <a:fillRef idx="3">
+            <a:schemeClr val="accent1"/>
+          </a:fillRef>
+          <a:effectRef idx="2">
+            <a:schemeClr val="accent1"/>
+          </a:effectRef>
+          <a:fontRef idx="minor">
+            <a:schemeClr val="lt1"/>
+          </a:fontRef>
+        </p:style>
+        <p:txBody>
+          <a:bodyPr rtlCol="0" anchor="ctr"/>
+          <a:lstStyle/>
+          <a:p>
+            <a:pPr algn="ctr"/>
+          </a:p>
+        </p:txBody>
+      </p:sp>
+      <p:sp>
+        <p:nvSpPr>
+          <p:cNvPr id="12" name="TextBox 11"/>
+          <p:cNvSpPr txBox="1"/>
+          <p:nvPr/>
+        </p:nvSpPr>
+        <p:spPr>
+          <a:xfrm>
+            <a:off x="1097280" y="2029968"/>
+            <a:ext cx="10362895" cy="402336"/>
+          </a:xfrm>
+          <a:prstGeom prst="rect">
+            <a:avLst/>
+          </a:prstGeom>
+          <a:noFill/>
+        </p:spPr>
+        <p:txBody>
+          <a:bodyPr wrap="square" anchor="ctr"/>
+          <a:lstStyle/>
+          <a:p>
+            <a:r>
+              <a:rPr sz="1500" b="0" i="0">
+                <a:solidFill>
+                  <a:srgbClr val="333333"/>
+                </a:solidFill>
+                <a:latin typeface="Calibri"/>
+              </a:rPr>
+              <a:t>□ Mitigacion SQL concreta?</a:t>
+            </a:r>
+          </a:p>
+        </p:txBody>
+      </p:sp>
+      <p:sp>
+        <p:nvSpPr>
+          <p:cNvPr id="13" name="Rounded Rectangle 12"/>
+          <p:cNvSpPr/>
+          <p:nvPr/>
+        </p:nvSpPr>
+        <p:spPr>
+          <a:xfrm>
+            <a:off x="457200" y="2615184"/>
+            <a:ext cx="11277295" cy="566928"/>
+          </a:xfrm>
+          <a:prstGeom prst="roundRect">
+            <a:avLst>
+              <a:gd name="adj" fmla="val 12000"/>
+            </a:avLst>
+          </a:prstGeom>
+          <a:solidFill>
+            <a:srgbClr val="F2F2F2"/>
+          </a:solidFill>
+          <a:ln>
+            <a:noFill/>
+          </a:ln>
+        </p:spPr>
+        <p:style>
+          <a:lnRef idx="1">
+            <a:schemeClr val="accent1"/>
+          </a:lnRef>
+          <a:fillRef idx="3">
+            <a:schemeClr val="accent1"/>
+          </a:fillRef>
+          <a:effectRef idx="2">
+            <a:schemeClr val="accent1"/>
+          </a:effectRef>
+          <a:fontRef idx="minor">
+            <a:schemeClr val="lt1"/>
+          </a:fontRef>
+        </p:style>
+        <p:txBody>
+          <a:bodyPr rtlCol="0" anchor="ctr"/>
+          <a:lstStyle/>
+          <a:p>
+            <a:pPr algn="ctr"/>
+          </a:p>
+        </p:txBody>
+      </p:sp>
+      <p:sp>
+        <p:nvSpPr>
+          <p:cNvPr id="14" name="Rectangle 13"/>
+          <p:cNvSpPr/>
+          <p:nvPr/>
+        </p:nvSpPr>
+        <p:spPr>
+          <a:xfrm>
+            <a:off x="640080" y="2761488"/>
+            <a:ext cx="274320" cy="274320"/>
+          </a:xfrm>
+          <a:prstGeom prst="rect">
+            <a:avLst/>
+          </a:prstGeom>
+          <a:solidFill>
+            <a:srgbClr val="FFFFFF"/>
+          </a:solidFill>
+          <a:ln>
+            <a:solidFill>
+              <a:srgbClr val="333333"/>
+            </a:solidFill>
+          </a:ln>
+        </p:spPr>
+        <p:style>
+          <a:lnRef idx="1">
+            <a:schemeClr val="accent1"/>
+          </a:lnRef>
+          <a:fillRef idx="3">
+            <a:schemeClr val="accent1"/>
+          </a:fillRef>
+          <a:effectRef idx="2">
+            <a:schemeClr val="accent1"/>
+          </a:effectRef>
+          <a:fontRef idx="minor">
+            <a:schemeClr val="lt1"/>
+          </a:fontRef>
+        </p:style>
+        <p:txBody>
+          <a:bodyPr rtlCol="0" anchor="ctr"/>
+          <a:lstStyle/>
+          <a:p>
+            <a:pPr algn="ctr"/>
+          </a:p>
+        </p:txBody>
+      </p:sp>
+      <p:sp>
+        <p:nvSpPr>
+          <p:cNvPr id="15" name="Rectangle 14"/>
+          <p:cNvSpPr/>
+          <p:nvPr/>
+        </p:nvSpPr>
+        <p:spPr>
+          <a:xfrm>
+            <a:off x="640080" y="2761488"/>
+            <a:ext cx="73152" cy="274320"/>
+          </a:xfrm>
+          <a:prstGeom prst="rect">
+            <a:avLst/>
+          </a:prstGeom>
+          <a:solidFill>
+            <a:srgbClr val="269CCB"/>
+          </a:solidFill>
+          <a:ln>
+            <a:noFill/>
+          </a:ln>
+        </p:spPr>
+        <p:style>
+          <a:lnRef idx="1">
+            <a:schemeClr val="accent1"/>
+          </a:lnRef>
+          <a:fillRef idx="3">
+            <a:schemeClr val="accent1"/>
+          </a:fillRef>
+          <a:effectRef idx="2">
+            <a:schemeClr val="accent1"/>
+          </a:effectRef>
+          <a:fontRef idx="minor">
+            <a:schemeClr val="lt1"/>
+          </a:fontRef>
+        </p:style>
+        <p:txBody>
+          <a:bodyPr rtlCol="0" anchor="ctr"/>
+          <a:lstStyle/>
+          <a:p>
+            <a:pPr algn="ctr"/>
+          </a:p>
+        </p:txBody>
+      </p:sp>
+      <p:sp>
+        <p:nvSpPr>
+          <p:cNvPr id="16" name="TextBox 15"/>
+          <p:cNvSpPr txBox="1"/>
+          <p:nvPr/>
+        </p:nvSpPr>
+        <p:spPr>
+          <a:xfrm>
+            <a:off x="1097280" y="2706624"/>
+            <a:ext cx="10362895" cy="402336"/>
+          </a:xfrm>
+          <a:prstGeom prst="rect">
+            <a:avLst/>
+          </a:prstGeom>
+          <a:noFill/>
+        </p:spPr>
+        <p:txBody>
+          <a:bodyPr wrap="square" anchor="ctr"/>
+          <a:lstStyle/>
+          <a:p>
+            <a:r>
+              <a:rPr sz="1500" b="0" i="0">
+                <a:solidFill>
+                  <a:srgbClr val="333333"/>
+                </a:solidFill>
+                <a:latin typeface="Calibri"/>
+              </a:rPr>
+              <a:t>□ Conecta con procs?</a:t>
+            </a:r>
+          </a:p>
+        </p:txBody>
+      </p:sp>
+      <p:sp>
+        <p:nvSpPr>
+          <p:cNvPr id="17" name="TextBox 16"/>
+          <p:cNvSpPr txBox="1"/>
+          <p:nvPr/>
+        </p:nvSpPr>
+        <p:spPr>
+          <a:xfrm>
+            <a:off x="11185855" y="6473952"/>
+            <a:ext cx="640080" cy="274320"/>
+          </a:xfrm>
+          <a:prstGeom prst="rect">
+            <a:avLst/>
+          </a:prstGeom>
+          <a:noFill/>
+        </p:spPr>
+        <p:txBody>
+          <a:bodyPr wrap="square">
+            <a:spAutoFit/>
+          </a:bodyPr>
+          <a:lstStyle/>
+          <a:p>
+            <a:pPr algn="r"/>
+            <a:r>
+              <a:rPr sz="1100" b="0" i="0">
+                <a:solidFill>
+                  <a:srgbClr val="666666"/>
+                </a:solidFill>
+                <a:latin typeface="Calibri"/>
+              </a:rPr>
+              <a:t>32</a:t>
+            </a:r>
+          </a:p>
+        </p:txBody>
+      </p:sp>
+    </p:spTree>
+  </p:cSld>
+  <p:clrMapOvr>
+    <a:masterClrMapping/>
+  </p:clrMapOvr>
+</p:sld>
+</file>
+
+<file path=ppt/slides/slide33.xml><?xml version="1.0" encoding="utf-8"?>
+<p:sld xmlns:a="http://schemas.openxmlformats.org/drawingml/2006/main" xmlns:p="http://schemas.openxmlformats.org/presentationml/2006/main" xmlns:r="http://schemas.openxmlformats.org/officeDocument/2006/relationships">
+  <p:cSld>
+    <p:bg>
+      <p:bgPr>
+        <a:solidFill>
+          <a:srgbClr val="FFFFFF"/>
+        </a:solidFill>
+        <a:effectLst/>
+      </p:bgPr>
+    </p:bg>
+    <p:spTree>
+      <p:nvGrpSpPr>
+        <p:cNvPr id="1" name=""/>
+        <p:cNvGrpSpPr/>
+        <p:nvPr/>
+      </p:nvGrpSpPr>
+      <p:grpSpPr/>
+      <p:sp>
+        <p:nvSpPr>
+          <p:cNvPr id="2" name="Rectangle 1"/>
+          <p:cNvSpPr/>
+          <p:nvPr/>
+        </p:nvSpPr>
+        <p:spPr>
+          <a:xfrm>
+            <a:off x="0" y="0"/>
+            <a:ext cx="12191695" cy="960120"/>
+          </a:xfrm>
+          <a:prstGeom prst="rect">
+            <a:avLst/>
+          </a:prstGeom>
+          <a:solidFill>
+            <a:srgbClr val="095292"/>
+          </a:solidFill>
+          <a:ln>
+            <a:noFill/>
+          </a:ln>
+        </p:spPr>
+        <p:style>
+          <a:lnRef idx="1">
+            <a:schemeClr val="accent1"/>
+          </a:lnRef>
+          <a:fillRef idx="3">
+            <a:schemeClr val="accent1"/>
+          </a:fillRef>
+          <a:effectRef idx="2">
+            <a:schemeClr val="accent1"/>
+          </a:effectRef>
+          <a:fontRef idx="minor">
+            <a:schemeClr val="lt1"/>
+          </a:fontRef>
+        </p:style>
+        <p:txBody>
+          <a:bodyPr rtlCol="0" anchor="ctr"/>
+          <a:lstStyle/>
+          <a:p>
+            <a:pPr algn="ctr"/>
+          </a:p>
+        </p:txBody>
+      </p:sp>
+      <p:sp>
+        <p:nvSpPr>
+          <p:cNvPr id="3" name="Rectangle 2"/>
+          <p:cNvSpPr/>
+          <p:nvPr/>
+        </p:nvSpPr>
+        <p:spPr>
+          <a:xfrm>
+            <a:off x="0" y="960120"/>
+            <a:ext cx="12191695" cy="41148"/>
+          </a:xfrm>
+          <a:prstGeom prst="rect">
+            <a:avLst/>
+          </a:prstGeom>
+          <a:solidFill>
+            <a:srgbClr val="FFD000"/>
+          </a:solidFill>
+          <a:ln>
+            <a:noFill/>
+          </a:ln>
+        </p:spPr>
+        <p:style>
+          <a:lnRef idx="1">
+            <a:schemeClr val="accent1"/>
+          </a:lnRef>
+          <a:fillRef idx="3">
+            <a:schemeClr val="accent1"/>
+          </a:fillRef>
+          <a:effectRef idx="2">
+            <a:schemeClr val="accent1"/>
+          </a:effectRef>
+          <a:fontRef idx="minor">
+            <a:schemeClr val="lt1"/>
+          </a:fontRef>
+        </p:style>
+        <p:txBody>
+          <a:bodyPr rtlCol="0" anchor="ctr"/>
+          <a:lstStyle/>
+          <a:p>
+            <a:pPr algn="ctr"/>
+          </a:p>
+        </p:txBody>
+      </p:sp>
+      <p:sp>
+        <p:nvSpPr>
+          <p:cNvPr id="4" name="TextBox 3"/>
+          <p:cNvSpPr txBox="1"/>
+          <p:nvPr/>
+        </p:nvSpPr>
+        <p:spPr>
+          <a:xfrm>
+            <a:off x="457200" y="164592"/>
+            <a:ext cx="11277295" cy="502920"/>
+          </a:xfrm>
+          <a:prstGeom prst="rect">
+            <a:avLst/>
+          </a:prstGeom>
+          <a:noFill/>
+        </p:spPr>
+        <p:txBody>
+          <a:bodyPr wrap="square">
+            <a:spAutoFit/>
+          </a:bodyPr>
+          <a:lstStyle/>
+          <a:p>
+            <a:r>
+              <a:rPr sz="2600" b="1" i="0">
+                <a:solidFill>
+                  <a:srgbClr val="FFFFFF"/>
+                </a:solidFill>
+                <a:latin typeface="Calibri"/>
+              </a:rPr>
+              <a:t>Criterios de exito / entregable</a:t>
+            </a:r>
+          </a:p>
+        </p:txBody>
+      </p:sp>
+      <p:sp>
+        <p:nvSpPr>
+          <p:cNvPr id="5" name="TextBox 4"/>
+          <p:cNvSpPr txBox="1"/>
+          <p:nvPr/>
+        </p:nvSpPr>
+        <p:spPr>
+          <a:xfrm>
+            <a:off x="457200" y="1170432"/>
+            <a:ext cx="11277295" cy="5230368"/>
+          </a:xfrm>
+          <a:prstGeom prst="rect">
+            <a:avLst/>
+          </a:prstGeom>
+          <a:noFill/>
+        </p:spPr>
+        <p:txBody>
+          <a:bodyPr wrap="square">
+            <a:spAutoFit/>
+          </a:bodyPr>
+          <a:lstStyle/>
+          <a:p>
+            <a:pPr>
+              <a:spcAft>
+                <a:spcPts val="800"/>
+              </a:spcAft>
+            </a:pPr>
+            <a:r>
+              <a:rPr sz="2000" b="0" i="0">
+                <a:solidFill>
+                  <a:srgbClr val="333333"/>
+                </a:solidFill>
+                <a:latin typeface="Calibri"/>
+              </a:rPr>
+              <a:t>–   </a:t>
+            </a:r>
+            <a:r>
+              <a:rPr sz="2000" b="1" i="0">
+                <a:solidFill>
+                  <a:srgbClr val="333333"/>
+                </a:solidFill>
+                <a:latin typeface="Calibri"/>
+              </a:rPr>
+              <a:t>Entregable:</a:t>
+            </a:r>
+            <a:r>
+              <a:rPr sz="2000" b="0" i="0">
+                <a:solidFill>
+                  <a:srgbClr val="333333"/>
+                </a:solidFill>
+                <a:latin typeface="Calibri"/>
+              </a:rPr>
+              <a:t> Informe corto: 2 escenarios (cita doble / stock) + mitigacion</a:t>
+            </a:r>
+          </a:p>
+          <a:p>
+            <a:pPr>
+              <a:spcAft>
+                <a:spcPts val="800"/>
+              </a:spcAft>
+            </a:pPr>
+            <a:r>
+              <a:rPr sz="2000" b="0" i="0">
+                <a:solidFill>
+                  <a:srgbClr val="333333"/>
+                </a:solidFill>
+                <a:latin typeface="Calibri"/>
+              </a:rPr>
+              <a:t>–   Evidencia: el SQL y su salida quedan guardados en cada pregunta de la plataforma del curso.</a:t>
+            </a:r>
+          </a:p>
+          <a:p>
+            <a:pPr>
+              <a:spcAft>
+                <a:spcPts val="800"/>
+              </a:spcAft>
+            </a:pPr>
+            <a:r>
+              <a:rPr sz="2000" b="0" i="0">
+                <a:solidFill>
+                  <a:srgbClr val="333333"/>
+                </a:solidFill>
+                <a:latin typeface="Calibri"/>
+              </a:rPr>
+              <a:t>–   Conserva copia en tu carpeta del PI (los .sql que pide el entregable).</a:t>
+            </a:r>
+          </a:p>
+          <a:p>
+            <a:pPr>
+              <a:spcAft>
+                <a:spcPts val="800"/>
+              </a:spcAft>
+            </a:pPr>
+            <a:r>
+              <a:rPr sz="2000" b="0" i="0">
+                <a:solidFill>
+                  <a:srgbClr val="333333"/>
+                </a:solidFill>
+                <a:latin typeface="Calibri"/>
+              </a:rPr>
+              <a:t>–   Actualizar checklist PI (que criterio de rubrica avanzo).</a:t>
+            </a:r>
+          </a:p>
+          <a:p>
+            <a:pPr>
+              <a:spcAft>
+                <a:spcPts val="800"/>
+              </a:spcAft>
+            </a:pPr>
+            <a:r>
+              <a:rPr sz="2000" b="0" i="0">
+                <a:solidFill>
+                  <a:srgbClr val="333333"/>
+                </a:solidFill>
+                <a:latin typeface="Calibri"/>
+              </a:rPr>
+              <a:t>–   </a:t>
+            </a:r>
+            <a:r>
+              <a:rPr sz="2000" b="1" i="0">
+                <a:solidFill>
+                  <a:srgbClr val="333333"/>
+                </a:solidFill>
+                <a:latin typeface="Calibri"/>
+              </a:rPr>
+              <a:t>Entrega en la plataforma del curso</a:t>
+            </a:r>
+            <a:r>
+              <a:rPr sz="2000" b="0" i="0">
+                <a:solidFill>
+                  <a:srgbClr val="333333"/>
+                </a:solidFill>
+                <a:latin typeface="Calibri"/>
+              </a:rPr>
+              <a:t> — en la fecha que indique el docente.</a:t>
+            </a:r>
+          </a:p>
+        </p:txBody>
+      </p:sp>
+      <p:sp>
+        <p:nvSpPr>
+          <p:cNvPr id="6" name="TextBox 5"/>
+          <p:cNvSpPr txBox="1"/>
+          <p:nvPr/>
+        </p:nvSpPr>
+        <p:spPr>
+          <a:xfrm>
+            <a:off x="11185855" y="6473952"/>
+            <a:ext cx="640080" cy="274320"/>
+          </a:xfrm>
+          <a:prstGeom prst="rect">
+            <a:avLst/>
+          </a:prstGeom>
+          <a:noFill/>
+        </p:spPr>
+        <p:txBody>
+          <a:bodyPr wrap="square">
+            <a:spAutoFit/>
+          </a:bodyPr>
+          <a:lstStyle/>
+          <a:p>
+            <a:pPr algn="r"/>
+            <a:r>
+              <a:rPr sz="1100" b="0" i="0">
+                <a:solidFill>
+                  <a:srgbClr val="666666"/>
+                </a:solidFill>
+                <a:latin typeface="Calibri"/>
+              </a:rPr>
+              <a:t>33</a:t>
+            </a:r>
+          </a:p>
+        </p:txBody>
+      </p:sp>
+    </p:spTree>
+  </p:cSld>
+  <p:clrMapOvr>
+    <a:masterClrMapping/>
+  </p:clrMapOvr>
+</p:sld>
+</file>
+
+<file path=ppt/slides/slide34.xml><?xml version="1.0" encoding="utf-8"?>
+<p:sld xmlns:a="http://schemas.openxmlformats.org/drawingml/2006/main" xmlns:p="http://schemas.openxmlformats.org/presentationml/2006/main" xmlns:r="http://schemas.openxmlformats.org/officeDocument/2006/relationships">
+  <p:cSld>
+    <p:bg>
+      <p:bgPr>
+        <a:solidFill>
+          <a:srgbClr val="FFFFFF"/>
+        </a:solidFill>
+        <a:effectLst/>
+      </p:bgPr>
+    </p:bg>
+    <p:spTree>
+      <p:nvGrpSpPr>
+        <p:cNvPr id="1" name=""/>
+        <p:cNvGrpSpPr/>
+        <p:nvPr/>
+      </p:nvGrpSpPr>
+      <p:grpSpPr/>
+      <p:sp>
+        <p:nvSpPr>
+          <p:cNvPr id="2" name="Rectangle 1"/>
+          <p:cNvSpPr/>
+          <p:nvPr/>
+        </p:nvSpPr>
+        <p:spPr>
+          <a:xfrm>
+            <a:off x="0" y="0"/>
+            <a:ext cx="12191695" cy="960120"/>
+          </a:xfrm>
+          <a:prstGeom prst="rect">
+            <a:avLst/>
+          </a:prstGeom>
+          <a:solidFill>
+            <a:srgbClr val="095292"/>
+          </a:solidFill>
+          <a:ln>
+            <a:noFill/>
+          </a:ln>
+        </p:spPr>
+        <p:style>
+          <a:lnRef idx="1">
+            <a:schemeClr val="accent1"/>
+          </a:lnRef>
+          <a:fillRef idx="3">
+            <a:schemeClr val="accent1"/>
+          </a:fillRef>
+          <a:effectRef idx="2">
+            <a:schemeClr val="accent1"/>
+          </a:effectRef>
+          <a:fontRef idx="minor">
+            <a:schemeClr val="lt1"/>
+          </a:fontRef>
+        </p:style>
+        <p:txBody>
+          <a:bodyPr rtlCol="0" anchor="ctr"/>
+          <a:lstStyle/>
+          <a:p>
+            <a:pPr algn="ctr"/>
+          </a:p>
+        </p:txBody>
+      </p:sp>
+      <p:sp>
+        <p:nvSpPr>
+          <p:cNvPr id="3" name="Rectangle 2"/>
+          <p:cNvSpPr/>
+          <p:nvPr/>
+        </p:nvSpPr>
+        <p:spPr>
+          <a:xfrm>
+            <a:off x="0" y="960120"/>
+            <a:ext cx="12191695" cy="41148"/>
+          </a:xfrm>
+          <a:prstGeom prst="rect">
+            <a:avLst/>
+          </a:prstGeom>
+          <a:solidFill>
+            <a:srgbClr val="FFD000"/>
+          </a:solidFill>
+          <a:ln>
+            <a:noFill/>
+          </a:ln>
+        </p:spPr>
+        <p:style>
+          <a:lnRef idx="1">
+            <a:schemeClr val="accent1"/>
+          </a:lnRef>
+          <a:fillRef idx="3">
+            <a:schemeClr val="accent1"/>
+          </a:fillRef>
+          <a:effectRef idx="2">
+            <a:schemeClr val="accent1"/>
+          </a:effectRef>
+          <a:fontRef idx="minor">
+            <a:schemeClr val="lt1"/>
+          </a:fontRef>
+        </p:style>
+        <p:txBody>
+          <a:bodyPr rtlCol="0" anchor="ctr"/>
+          <a:lstStyle/>
+          <a:p>
+            <a:pPr algn="ctr"/>
+          </a:p>
+        </p:txBody>
+      </p:sp>
+      <p:sp>
+        <p:nvSpPr>
+          <p:cNvPr id="4" name="TextBox 3"/>
+          <p:cNvSpPr txBox="1"/>
+          <p:nvPr/>
+        </p:nvSpPr>
+        <p:spPr>
+          <a:xfrm>
+            <a:off x="457200" y="164592"/>
+            <a:ext cx="11277295" cy="502920"/>
+          </a:xfrm>
+          <a:prstGeom prst="rect">
+            <a:avLst/>
+          </a:prstGeom>
+          <a:noFill/>
+        </p:spPr>
+        <p:txBody>
+          <a:bodyPr wrap="square">
+            <a:spAutoFit/>
+          </a:bodyPr>
+          <a:lstStyle/>
+          <a:p>
+            <a:r>
+              <a:rPr sz="2600" b="1" i="0">
+                <a:solidFill>
+                  <a:srgbClr val="FFFFFF"/>
+                </a:solidFill>
+                <a:latin typeface="Calibri"/>
+              </a:rPr>
+              <a:t>Para el PI esta semana</a:t>
+            </a:r>
+          </a:p>
+        </p:txBody>
+      </p:sp>
+      <p:sp>
+        <p:nvSpPr>
+          <p:cNvPr id="5" name="Rounded Rectangle 4"/>
+          <p:cNvSpPr/>
+          <p:nvPr/>
+        </p:nvSpPr>
+        <p:spPr>
+          <a:xfrm>
+            <a:off x="457200" y="1261872"/>
+            <a:ext cx="11277295" cy="1051560"/>
+          </a:xfrm>
+          <a:prstGeom prst="roundRect">
+            <a:avLst>
+              <a:gd name="adj" fmla="val 12000"/>
+            </a:avLst>
+          </a:prstGeom>
+          <a:solidFill>
+            <a:srgbClr val="E8F4FA"/>
+          </a:solidFill>
+          <a:ln>
+            <a:noFill/>
+          </a:ln>
+        </p:spPr>
+        <p:style>
+          <a:lnRef idx="1">
+            <a:schemeClr val="accent1"/>
+          </a:lnRef>
+          <a:fillRef idx="3">
+            <a:schemeClr val="accent1"/>
+          </a:fillRef>
+          <a:effectRef idx="2">
+            <a:schemeClr val="accent1"/>
+          </a:effectRef>
+          <a:fontRef idx="minor">
+            <a:schemeClr val="lt1"/>
+          </a:fontRef>
+        </p:style>
+        <p:txBody>
+          <a:bodyPr rtlCol="0" anchor="ctr"/>
+          <a:lstStyle/>
+          <a:p>
+            <a:pPr algn="ctr"/>
+          </a:p>
+        </p:txBody>
+      </p:sp>
+      <p:sp>
+        <p:nvSpPr>
+          <p:cNvPr id="6" name="Rectangle 5"/>
+          <p:cNvSpPr/>
+          <p:nvPr/>
+        </p:nvSpPr>
+        <p:spPr>
+          <a:xfrm>
+            <a:off x="457200" y="1261872"/>
+            <a:ext cx="128016" cy="1051560"/>
+          </a:xfrm>
+          <a:prstGeom prst="rect">
+            <a:avLst/>
+          </a:prstGeom>
+          <a:solidFill>
+            <a:srgbClr val="269CCB"/>
+          </a:solidFill>
+          <a:ln>
+            <a:noFill/>
+          </a:ln>
+        </p:spPr>
+        <p:style>
+          <a:lnRef idx="1">
+            <a:schemeClr val="accent1"/>
+          </a:lnRef>
+          <a:fillRef idx="3">
+            <a:schemeClr val="accent1"/>
+          </a:fillRef>
+          <a:effectRef idx="2">
+            <a:schemeClr val="accent1"/>
+          </a:effectRef>
+          <a:fontRef idx="minor">
+            <a:schemeClr val="lt1"/>
+          </a:fontRef>
+        </p:style>
+        <p:txBody>
+          <a:bodyPr rtlCol="0" anchor="ctr"/>
+          <a:lstStyle/>
+          <a:p>
+            <a:pPr algn="ctr"/>
+          </a:p>
+        </p:txBody>
+      </p:sp>
+      <p:sp>
+        <p:nvSpPr>
+          <p:cNvPr id="7" name="TextBox 6"/>
+          <p:cNvSpPr txBox="1"/>
+          <p:nvPr/>
+        </p:nvSpPr>
+        <p:spPr>
+          <a:xfrm>
+            <a:off x="777240" y="1399031"/>
+            <a:ext cx="10774375" cy="822959"/>
+          </a:xfrm>
+          <a:prstGeom prst="rect">
+            <a:avLst/>
+          </a:prstGeom>
+          <a:noFill/>
+        </p:spPr>
+        <p:txBody>
+          <a:bodyPr wrap="square">
+            <a:spAutoFit/>
+          </a:bodyPr>
+          <a:lstStyle/>
+          <a:p>
+            <a:r>
+              <a:rPr sz="1200" b="1" i="0">
+                <a:solidFill>
+                  <a:srgbClr val="269CCB"/>
+                </a:solidFill>
+                <a:latin typeface="Calibri"/>
+              </a:rPr>
+              <a:t>Info</a:t>
+            </a:r>
+          </a:p>
+          <a:p>
+            <a:pPr>
+              <a:spcBef>
+                <a:spcPts val="400"/>
+              </a:spcBef>
+            </a:pPr>
+            <a:r>
+              <a:rPr sz="1400" b="0" i="0">
+                <a:solidFill>
+                  <a:srgbClr val="333333"/>
+                </a:solidFill>
+                <a:latin typeface="Calibri"/>
+              </a:rPr>
+              <a:t>Hito: Escenarios de concurrencia del PI documentados</a:t>
+            </a:r>
+          </a:p>
+        </p:txBody>
+      </p:sp>
+      <p:sp>
+        <p:nvSpPr>
+          <p:cNvPr id="8" name="Rounded Rectangle 7"/>
+          <p:cNvSpPr/>
+          <p:nvPr/>
+        </p:nvSpPr>
+        <p:spPr>
+          <a:xfrm>
+            <a:off x="457200" y="2478024"/>
+            <a:ext cx="11277295" cy="1051560"/>
+          </a:xfrm>
+          <a:prstGeom prst="roundRect">
+            <a:avLst>
+              <a:gd name="adj" fmla="val 12000"/>
+            </a:avLst>
+          </a:prstGeom>
+          <a:solidFill>
+            <a:srgbClr val="FFF8E1"/>
+          </a:solidFill>
+          <a:ln>
+            <a:noFill/>
+          </a:ln>
+        </p:spPr>
+        <p:style>
+          <a:lnRef idx="1">
+            <a:schemeClr val="accent1"/>
+          </a:lnRef>
+          <a:fillRef idx="3">
+            <a:schemeClr val="accent1"/>
+          </a:fillRef>
+          <a:effectRef idx="2">
+            <a:schemeClr val="accent1"/>
+          </a:effectRef>
+          <a:fontRef idx="minor">
+            <a:schemeClr val="lt1"/>
+          </a:fontRef>
+        </p:style>
+        <p:txBody>
+          <a:bodyPr rtlCol="0" anchor="ctr"/>
+          <a:lstStyle/>
+          <a:p>
+            <a:pPr algn="ctr"/>
+          </a:p>
+        </p:txBody>
+      </p:sp>
+      <p:sp>
+        <p:nvSpPr>
+          <p:cNvPr id="9" name="Rectangle 8"/>
+          <p:cNvSpPr/>
+          <p:nvPr/>
+        </p:nvSpPr>
+        <p:spPr>
+          <a:xfrm>
+            <a:off x="457200" y="2478024"/>
+            <a:ext cx="128016" cy="1051560"/>
+          </a:xfrm>
+          <a:prstGeom prst="rect">
+            <a:avLst/>
+          </a:prstGeom>
+          <a:solidFill>
+            <a:srgbClr val="FFD000"/>
+          </a:solidFill>
+          <a:ln>
+            <a:noFill/>
+          </a:ln>
+        </p:spPr>
+        <p:style>
+          <a:lnRef idx="1">
+            <a:schemeClr val="accent1"/>
+          </a:lnRef>
+          <a:fillRef idx="3">
+            <a:schemeClr val="accent1"/>
+          </a:fillRef>
+          <a:effectRef idx="2">
+            <a:schemeClr val="accent1"/>
+          </a:effectRef>
+          <a:fontRef idx="minor">
+            <a:schemeClr val="lt1"/>
+          </a:fontRef>
+        </p:style>
+        <p:txBody>
+          <a:bodyPr rtlCol="0" anchor="ctr"/>
+          <a:lstStyle/>
+          <a:p>
+            <a:pPr algn="ctr"/>
+          </a:p>
+        </p:txBody>
+      </p:sp>
+      <p:sp>
+        <p:nvSpPr>
+          <p:cNvPr id="10" name="TextBox 9"/>
+          <p:cNvSpPr txBox="1"/>
+          <p:nvPr/>
+        </p:nvSpPr>
+        <p:spPr>
+          <a:xfrm>
+            <a:off x="777240" y="2615184"/>
+            <a:ext cx="10774375" cy="822959"/>
+          </a:xfrm>
+          <a:prstGeom prst="rect">
+            <a:avLst/>
+          </a:prstGeom>
+          <a:noFill/>
+        </p:spPr>
+        <p:txBody>
+          <a:bodyPr wrap="square">
+            <a:spAutoFit/>
+          </a:bodyPr>
+          <a:lstStyle/>
+          <a:p>
+            <a:r>
+              <a:rPr sz="1200" b="1" i="0">
+                <a:solidFill>
+                  <a:srgbClr val="FFD000"/>
+                </a:solidFill>
+                <a:latin typeface="Calibri"/>
+              </a:rPr>
+              <a:t>Aclaración</a:t>
+            </a:r>
+          </a:p>
+          <a:p>
+            <a:pPr>
+              <a:spcBef>
+                <a:spcPts val="400"/>
+              </a:spcBef>
+            </a:pPr>
+            <a:r>
+              <a:rPr sz="1400" b="0" i="0">
+                <a:solidFill>
+                  <a:srgbClr val="333333"/>
+                </a:solidFill>
+                <a:latin typeface="Calibri"/>
+              </a:rPr>
+              <a:t>Enunciado completo: Clases/Proyecto Integrador/ (VetCare DB).</a:t>
+            </a:r>
+          </a:p>
+        </p:txBody>
+      </p:sp>
+      <p:sp>
+        <p:nvSpPr>
+          <p:cNvPr id="11" name="Rounded Rectangle 10"/>
+          <p:cNvSpPr/>
+          <p:nvPr/>
+        </p:nvSpPr>
+        <p:spPr>
+          <a:xfrm>
+            <a:off x="457200" y="3694176"/>
+            <a:ext cx="11277295" cy="1051560"/>
+          </a:xfrm>
+          <a:prstGeom prst="roundRect">
+            <a:avLst>
+              <a:gd name="adj" fmla="val 12000"/>
+            </a:avLst>
+          </a:prstGeom>
+          <a:solidFill>
+            <a:srgbClr val="FBE4E4"/>
+          </a:solidFill>
+          <a:ln>
+            <a:noFill/>
+          </a:ln>
+        </p:spPr>
+        <p:style>
+          <a:lnRef idx="1">
+            <a:schemeClr val="accent1"/>
+          </a:lnRef>
+          <a:fillRef idx="3">
+            <a:schemeClr val="accent1"/>
+          </a:fillRef>
+          <a:effectRef idx="2">
+            <a:schemeClr val="accent1"/>
+          </a:effectRef>
+          <a:fontRef idx="minor">
+            <a:schemeClr val="lt1"/>
+          </a:fontRef>
+        </p:style>
+        <p:txBody>
+          <a:bodyPr rtlCol="0" anchor="ctr"/>
+          <a:lstStyle/>
+          <a:p>
+            <a:pPr algn="ctr"/>
+          </a:p>
+        </p:txBody>
+      </p:sp>
+      <p:sp>
+        <p:nvSpPr>
+          <p:cNvPr id="12" name="Rectangle 11"/>
+          <p:cNvSpPr/>
+          <p:nvPr/>
+        </p:nvSpPr>
+        <p:spPr>
+          <a:xfrm>
+            <a:off x="457200" y="3694176"/>
+            <a:ext cx="128016" cy="1051560"/>
+          </a:xfrm>
+          <a:prstGeom prst="rect">
+            <a:avLst/>
+          </a:prstGeom>
+          <a:solidFill>
+            <a:srgbClr val="A02030"/>
+          </a:solidFill>
+          <a:ln>
+            <a:noFill/>
+          </a:ln>
+        </p:spPr>
+        <p:style>
+          <a:lnRef idx="1">
+            <a:schemeClr val="accent1"/>
+          </a:lnRef>
+          <a:fillRef idx="3">
+            <a:schemeClr val="accent1"/>
+          </a:fillRef>
+          <a:effectRef idx="2">
+            <a:schemeClr val="accent1"/>
+          </a:effectRef>
+          <a:fontRef idx="minor">
+            <a:schemeClr val="lt1"/>
+          </a:fontRef>
+        </p:style>
+        <p:txBody>
+          <a:bodyPr rtlCol="0" anchor="ctr"/>
+          <a:lstStyle/>
+          <a:p>
+            <a:pPr algn="ctr"/>
+          </a:p>
+        </p:txBody>
+      </p:sp>
+      <p:sp>
+        <p:nvSpPr>
+          <p:cNvPr id="13" name="TextBox 12"/>
+          <p:cNvSpPr txBox="1"/>
+          <p:nvPr/>
+        </p:nvSpPr>
+        <p:spPr>
+          <a:xfrm>
+            <a:off x="777240" y="3831336"/>
+            <a:ext cx="10774375" cy="822959"/>
+          </a:xfrm>
+          <a:prstGeom prst="rect">
+            <a:avLst/>
+          </a:prstGeom>
+          <a:noFill/>
+        </p:spPr>
+        <p:txBody>
+          <a:bodyPr wrap="square">
+            <a:spAutoFit/>
+          </a:bodyPr>
+          <a:lstStyle/>
+          <a:p>
+            <a:r>
+              <a:rPr sz="1200" b="1" i="0">
+                <a:solidFill>
+                  <a:srgbClr val="A02030"/>
+                </a:solidFill>
+                <a:latin typeface="Calibri"/>
+              </a:rPr>
+              <a:t>Atención</a:t>
+            </a:r>
+          </a:p>
+          <a:p>
+            <a:pPr>
+              <a:spcBef>
+                <a:spcPts val="400"/>
+              </a:spcBef>
+            </a:pPr>
+            <a:r>
+              <a:rPr sz="1400" b="0" i="0">
+                <a:solidFill>
+                  <a:srgbClr val="333333"/>
+                </a:solidFill>
+                <a:latin typeface="Calibri"/>
+              </a:rPr>
+              <a:t>Si el docente asigna taller esta semana, él indica el canal y la fecha.</a:t>
+            </a:r>
+          </a:p>
+        </p:txBody>
+      </p:sp>
+      <p:sp>
+        <p:nvSpPr>
+          <p:cNvPr id="14" name="TextBox 13"/>
+          <p:cNvSpPr txBox="1"/>
+          <p:nvPr/>
+        </p:nvSpPr>
+        <p:spPr>
+          <a:xfrm>
+            <a:off x="11185855" y="6473952"/>
+            <a:ext cx="640080" cy="274320"/>
+          </a:xfrm>
+          <a:prstGeom prst="rect">
+            <a:avLst/>
+          </a:prstGeom>
+          <a:noFill/>
+        </p:spPr>
+        <p:txBody>
+          <a:bodyPr wrap="square">
+            <a:spAutoFit/>
+          </a:bodyPr>
+          <a:lstStyle/>
+          <a:p>
+            <a:pPr algn="r"/>
+            <a:r>
+              <a:rPr sz="1100" b="0" i="0">
+                <a:solidFill>
+                  <a:srgbClr val="666666"/>
+                </a:solidFill>
+                <a:latin typeface="Calibri"/>
+              </a:rPr>
+              <a:t>34</a:t>
+            </a:r>
+          </a:p>
+        </p:txBody>
+      </p:sp>
+    </p:spTree>
+  </p:cSld>
+  <p:clrMapOvr>
+    <a:masterClrMapping/>
+  </p:clrMapOvr>
+</p:sld>
+</file>
+
+<file path=ppt/slides/slide35.xml><?xml version="1.0" encoding="utf-8"?>
 <p:sld xmlns:a="http://schemas.openxmlformats.org/drawingml/2006/main" xmlns:p="http://schemas.openxmlformats.org/presentationml/2006/main" xmlns:r="http://schemas.openxmlformats.org/officeDocument/2006/relationships">
   <p:cSld>
     <p:bg>

--- a/Bases de Datos II/Clases/Clase 10 - Control de concurrencia/Presentacion.pptx
+++ b/Bases de Datos II/Clases/Clase 10 - Control de concurrencia/Presentacion.pptx
@@ -9,37 +9,29 @@
     <p:sldId id="257" r:id="rId8"/>
     <p:sldId id="258" r:id="rId9"/>
     <p:sldId id="259" r:id="rId10"/>
-    <p:sldId id="260" r:id="rId11"/>
-    <p:sldId id="261" r:id="rId12"/>
-    <p:sldId id="262" r:id="rId13"/>
-    <p:sldId id="263" r:id="rId14"/>
-    <p:sldId id="264" r:id="rId15"/>
-    <p:sldId id="265" r:id="rId16"/>
-    <p:sldId id="266" r:id="rId17"/>
-    <p:sldId id="267" r:id="rId18"/>
-    <p:sldId id="268" r:id="rId19"/>
-    <p:sldId id="269" r:id="rId20"/>
-    <p:sldId id="270" r:id="rId21"/>
-    <p:sldId id="271" r:id="rId22"/>
-    <p:sldId id="272" r:id="rId23"/>
-    <p:sldId id="273" r:id="rId24"/>
-    <p:sldId id="274" r:id="rId25"/>
-    <p:sldId id="275" r:id="rId26"/>
-    <p:sldId id="276" r:id="rId27"/>
-    <p:sldId id="277" r:id="rId28"/>
-    <p:sldId id="278" r:id="rId29"/>
-    <p:sldId id="279" r:id="rId30"/>
-    <p:sldId id="280" r:id="rId31"/>
-    <p:sldId id="281" r:id="rId32"/>
-    <p:sldId id="282" r:id="rId33"/>
-    <p:sldId id="283" r:id="rId34"/>
-    <p:sldId id="284" r:id="rId35"/>
-    <p:sldId id="285" r:id="rId36"/>
-    <p:sldId id="286" r:id="rId37"/>
-    <p:sldId id="287" r:id="rId38"/>
-    <p:sldId id="288" r:id="rId39"/>
-    <p:sldId id="289" r:id="rId40"/>
-    <p:sldId id="290" r:id="rId41"/>
+    <p:sldId id="260" r:id="rId12"/>
+    <p:sldId id="261" r:id="rId13"/>
+    <p:sldId id="262" r:id="rId14"/>
+    <p:sldId id="263" r:id="rId15"/>
+    <p:sldId id="264" r:id="rId16"/>
+    <p:sldId id="265" r:id="rId17"/>
+    <p:sldId id="266" r:id="rId18"/>
+    <p:sldId id="267" r:id="rId19"/>
+    <p:sldId id="268" r:id="rId20"/>
+    <p:sldId id="269" r:id="rId21"/>
+    <p:sldId id="270" r:id="rId22"/>
+    <p:sldId id="271" r:id="rId23"/>
+    <p:sldId id="272" r:id="rId24"/>
+    <p:sldId id="273" r:id="rId25"/>
+    <p:sldId id="274" r:id="rId26"/>
+    <p:sldId id="275" r:id="rId27"/>
+    <p:sldId id="276" r:id="rId28"/>
+    <p:sldId id="277" r:id="rId29"/>
+    <p:sldId id="278" r:id="rId30"/>
+    <p:sldId id="279" r:id="rId31"/>
+    <p:sldId id="280" r:id="rId32"/>
+    <p:sldId id="281" r:id="rId33"/>
+    <p:sldId id="282" r:id="rId34"/>
   </p:sldIdLst>
   <p:sldSz cx="12191695" cy="6858000" type="screen4x3"/>
   <p:notesSz cx="6858000" cy="9144000"/>
@@ -139,6 +131,911 @@
     </a:lvl9pPr>
   </p:defaultTextStyle>
 </p:presentation>
+</file>
+
+<file path=ppt/notesMasters/notesMaster1.xml><?xml version="1.0" encoding="utf-8"?>
+<p:notesMaster xmlns:a="http://schemas.openxmlformats.org/drawingml/2006/main" xmlns:p="http://schemas.openxmlformats.org/presentationml/2006/main" xmlns:r="http://schemas.openxmlformats.org/officeDocument/2006/relationships">
+  <p:cSld>
+    <p:bg>
+      <p:bgRef idx="1001">
+        <a:schemeClr val="bg1"/>
+      </p:bgRef>
+    </p:bg>
+    <p:spTree>
+      <p:nvGrpSpPr>
+        <p:cNvPr id="1" name=""/>
+        <p:cNvGrpSpPr/>
+        <p:nvPr/>
+      </p:nvGrpSpPr>
+      <p:grpSpPr>
+        <a:xfrm>
+          <a:off x="0" y="0"/>
+          <a:ext cx="0" cy="0"/>
+          <a:chOff x="0" y="0"/>
+          <a:chExt cx="0" cy="0"/>
+        </a:xfrm>
+      </p:grpSpPr>
+      <p:sp>
+        <p:nvSpPr>
+          <p:cNvPr id="2" name="Header Placeholder 1"/>
+          <p:cNvSpPr>
+            <a:spLocks noGrp="1"/>
+          </p:cNvSpPr>
+          <p:nvPr>
+            <p:ph type="hdr" sz="quarter"/>
+          </p:nvPr>
+        </p:nvSpPr>
+        <p:spPr>
+          <a:xfrm>
+            <a:off x="0" y="0"/>
+            <a:ext cx="2971800" cy="457200"/>
+          </a:xfrm>
+          <a:prstGeom prst="rect">
+            <a:avLst/>
+          </a:prstGeom>
+        </p:spPr>
+        <p:txBody>
+          <a:bodyPr vert="horz" lIns="91440" tIns="45720" rIns="91440" bIns="45720" rtlCol="0"/>
+          <a:lstStyle>
+            <a:lvl1pPr algn="l">
+              <a:defRPr sz="1200"/>
+            </a:lvl1pPr>
+          </a:lstStyle>
+          <a:p>
+            <a:endParaRPr lang="en-US"/>
+          </a:p>
+        </p:txBody>
+      </p:sp>
+      <p:sp>
+        <p:nvSpPr>
+          <p:cNvPr id="3" name="Date Placeholder 2"/>
+          <p:cNvSpPr>
+            <a:spLocks noGrp="1"/>
+          </p:cNvSpPr>
+          <p:nvPr>
+            <p:ph type="dt" idx="1"/>
+          </p:nvPr>
+        </p:nvSpPr>
+        <p:spPr>
+          <a:xfrm>
+            <a:off x="3884613" y="0"/>
+            <a:ext cx="2971800" cy="457200"/>
+          </a:xfrm>
+          <a:prstGeom prst="rect">
+            <a:avLst/>
+          </a:prstGeom>
+        </p:spPr>
+        <p:txBody>
+          <a:bodyPr vert="horz" lIns="91440" tIns="45720" rIns="91440" bIns="45720" rtlCol="0"/>
+          <a:lstStyle>
+            <a:lvl1pPr algn="r">
+              <a:defRPr sz="1200"/>
+            </a:lvl1pPr>
+          </a:lstStyle>
+          <a:p>
+            <a:fld id="{0F89C1C7-3DCD-1040-A9CF-14679D8B5DDD}" type="datetimeFigureOut">
+              <a:rPr lang="en-US" smtClean="0"/>
+              <a:t>10/17/16</a:t>
+            </a:fld>
+            <a:endParaRPr lang="en-US"/>
+          </a:p>
+        </p:txBody>
+      </p:sp>
+      <p:sp>
+        <p:nvSpPr>
+          <p:cNvPr id="4" name="Slide Image Placeholder 3"/>
+          <p:cNvSpPr>
+            <a:spLocks noGrp="1" noRot="1" noChangeAspect="1"/>
+          </p:cNvSpPr>
+          <p:nvPr>
+            <p:ph type="sldImg" idx="2"/>
+          </p:nvPr>
+        </p:nvSpPr>
+        <p:spPr>
+          <a:xfrm>
+            <a:off x="1143000" y="685800"/>
+            <a:ext cx="4572000" cy="3429000"/>
+          </a:xfrm>
+          <a:prstGeom prst="rect">
+            <a:avLst/>
+          </a:prstGeom>
+          <a:noFill/>
+          <a:ln w="12700">
+            <a:solidFill>
+              <a:prstClr val="black"/>
+            </a:solidFill>
+          </a:ln>
+        </p:spPr>
+        <p:txBody>
+          <a:bodyPr vert="horz" lIns="91440" tIns="45720" rIns="91440" bIns="45720" rtlCol="0" anchor="ctr"/>
+          <a:lstStyle/>
+          <a:p>
+            <a:endParaRPr lang="en-US"/>
+          </a:p>
+        </p:txBody>
+      </p:sp>
+      <p:sp>
+        <p:nvSpPr>
+          <p:cNvPr id="5" name="Notes Placeholder 4"/>
+          <p:cNvSpPr>
+            <a:spLocks noGrp="1"/>
+          </p:cNvSpPr>
+          <p:nvPr>
+            <p:ph type="body" sz="quarter" idx="3"/>
+          </p:nvPr>
+        </p:nvSpPr>
+        <p:spPr>
+          <a:xfrm>
+            <a:off x="685800" y="4343400"/>
+            <a:ext cx="5486400" cy="4114800"/>
+          </a:xfrm>
+          <a:prstGeom prst="rect">
+            <a:avLst/>
+          </a:prstGeom>
+        </p:spPr>
+        <p:txBody>
+          <a:bodyPr vert="horz" lIns="91440" tIns="45720" rIns="91440" bIns="45720" rtlCol="0"/>
+          <a:lstStyle/>
+          <a:p>
+            <a:pPr lvl="0"/>
+            <a:r>
+              <a:rPr lang="en-US" smtClean="0"/>
+              <a:t>Click to edit Master text styles</a:t>
+            </a:r>
+          </a:p>
+          <a:p>
+            <a:pPr lvl="1"/>
+            <a:r>
+              <a:rPr lang="en-US" smtClean="0"/>
+              <a:t>Second level</a:t>
+            </a:r>
+          </a:p>
+          <a:p>
+            <a:pPr lvl="2"/>
+            <a:r>
+              <a:rPr lang="en-US" smtClean="0"/>
+              <a:t>Third level</a:t>
+            </a:r>
+          </a:p>
+          <a:p>
+            <a:pPr lvl="3"/>
+            <a:r>
+              <a:rPr lang="en-US" smtClean="0"/>
+              <a:t>Fourth level</a:t>
+            </a:r>
+          </a:p>
+          <a:p>
+            <a:pPr lvl="4"/>
+            <a:r>
+              <a:rPr lang="en-US" smtClean="0"/>
+              <a:t>Fifth level</a:t>
+            </a:r>
+            <a:endParaRPr lang="en-US"/>
+          </a:p>
+        </p:txBody>
+      </p:sp>
+      <p:sp>
+        <p:nvSpPr>
+          <p:cNvPr id="6" name="Footer Placeholder 5"/>
+          <p:cNvSpPr>
+            <a:spLocks noGrp="1"/>
+          </p:cNvSpPr>
+          <p:nvPr>
+            <p:ph type="ftr" sz="quarter" idx="4"/>
+          </p:nvPr>
+        </p:nvSpPr>
+        <p:spPr>
+          <a:xfrm>
+            <a:off x="0" y="8685213"/>
+            <a:ext cx="2971800" cy="457200"/>
+          </a:xfrm>
+          <a:prstGeom prst="rect">
+            <a:avLst/>
+          </a:prstGeom>
+        </p:spPr>
+        <p:txBody>
+          <a:bodyPr vert="horz" lIns="91440" tIns="45720" rIns="91440" bIns="45720" rtlCol="0" anchor="b"/>
+          <a:lstStyle>
+            <a:lvl1pPr algn="l">
+              <a:defRPr sz="1200"/>
+            </a:lvl1pPr>
+          </a:lstStyle>
+          <a:p>
+            <a:endParaRPr lang="en-US"/>
+          </a:p>
+        </p:txBody>
+      </p:sp>
+      <p:sp>
+        <p:nvSpPr>
+          <p:cNvPr id="7" name="Slide Number Placeholder 6"/>
+          <p:cNvSpPr>
+            <a:spLocks noGrp="1"/>
+          </p:cNvSpPr>
+          <p:nvPr>
+            <p:ph type="sldNum" sz="quarter" idx="5"/>
+          </p:nvPr>
+        </p:nvSpPr>
+        <p:spPr>
+          <a:xfrm>
+            <a:off x="3884613" y="8685213"/>
+            <a:ext cx="2971800" cy="457200"/>
+          </a:xfrm>
+          <a:prstGeom prst="rect">
+            <a:avLst/>
+          </a:prstGeom>
+        </p:spPr>
+        <p:txBody>
+          <a:bodyPr vert="horz" lIns="91440" tIns="45720" rIns="91440" bIns="45720" rtlCol="0" anchor="b"/>
+          <a:lstStyle>
+            <a:lvl1pPr algn="r">
+              <a:defRPr sz="1200"/>
+            </a:lvl1pPr>
+          </a:lstStyle>
+          <a:p>
+            <a:fld id="{BB5E49A5-4136-284D-997B-48E1D791AD67}" type="slidenum">
+              <a:rPr lang="en-US" smtClean="0"/>
+              <a:t>‹#›</a:t>
+            </a:fld>
+            <a:endParaRPr lang="en-US"/>
+          </a:p>
+        </p:txBody>
+      </p:sp>
+    </p:spTree>
+    <p:extLst>
+      <p:ext uri="{BB962C8B-B14F-4D97-AF65-F5344CB8AC3E}">
+        <p14:creationId xmlns:p14="http://schemas.microsoft.com/office/powerpoint/2010/main" val="2623252185"/>
+      </p:ext>
+    </p:extLst>
+  </p:cSld>
+  <p:clrMap bg1="lt1" tx1="dk1" bg2="lt2" tx2="dk2" accent1="accent1" accent2="accent2" accent3="accent3" accent4="accent4" accent5="accent5" accent6="accent6" hlink="hlink" folHlink="folHlink"/>
+  <p:notesStyle>
+    <a:lvl1pPr marL="0" algn="l" defTabSz="457200" rtl="0" eaLnBrk="1" latinLnBrk="0" hangingPunct="1">
+      <a:defRPr sz="1200" kern="1200">
+        <a:solidFill>
+          <a:schemeClr val="tx1"/>
+        </a:solidFill>
+        <a:latin typeface="+mn-lt"/>
+        <a:ea typeface="+mn-ea"/>
+        <a:cs typeface="+mn-cs"/>
+      </a:defRPr>
+    </a:lvl1pPr>
+    <a:lvl2pPr marL="457200" algn="l" defTabSz="457200" rtl="0" eaLnBrk="1" latinLnBrk="0" hangingPunct="1">
+      <a:defRPr sz="1200" kern="1200">
+        <a:solidFill>
+          <a:schemeClr val="tx1"/>
+        </a:solidFill>
+        <a:latin typeface="+mn-lt"/>
+        <a:ea typeface="+mn-ea"/>
+        <a:cs typeface="+mn-cs"/>
+      </a:defRPr>
+    </a:lvl2pPr>
+    <a:lvl3pPr marL="914400" algn="l" defTabSz="457200" rtl="0" eaLnBrk="1" latinLnBrk="0" hangingPunct="1">
+      <a:defRPr sz="1200" kern="1200">
+        <a:solidFill>
+          <a:schemeClr val="tx1"/>
+        </a:solidFill>
+        <a:latin typeface="+mn-lt"/>
+        <a:ea typeface="+mn-ea"/>
+        <a:cs typeface="+mn-cs"/>
+      </a:defRPr>
+    </a:lvl3pPr>
+    <a:lvl4pPr marL="1371600" algn="l" defTabSz="457200" rtl="0" eaLnBrk="1" latinLnBrk="0" hangingPunct="1">
+      <a:defRPr sz="1200" kern="1200">
+        <a:solidFill>
+          <a:schemeClr val="tx1"/>
+        </a:solidFill>
+        <a:latin typeface="+mn-lt"/>
+        <a:ea typeface="+mn-ea"/>
+        <a:cs typeface="+mn-cs"/>
+      </a:defRPr>
+    </a:lvl4pPr>
+    <a:lvl5pPr marL="1828800" algn="l" defTabSz="457200" rtl="0" eaLnBrk="1" latinLnBrk="0" hangingPunct="1">
+      <a:defRPr sz="1200" kern="1200">
+        <a:solidFill>
+          <a:schemeClr val="tx1"/>
+        </a:solidFill>
+        <a:latin typeface="+mn-lt"/>
+        <a:ea typeface="+mn-ea"/>
+        <a:cs typeface="+mn-cs"/>
+      </a:defRPr>
+    </a:lvl5pPr>
+    <a:lvl6pPr marL="2286000" algn="l" defTabSz="457200" rtl="0" eaLnBrk="1" latinLnBrk="0" hangingPunct="1">
+      <a:defRPr sz="1200" kern="1200">
+        <a:solidFill>
+          <a:schemeClr val="tx1"/>
+        </a:solidFill>
+        <a:latin typeface="+mn-lt"/>
+        <a:ea typeface="+mn-ea"/>
+        <a:cs typeface="+mn-cs"/>
+      </a:defRPr>
+    </a:lvl6pPr>
+    <a:lvl7pPr marL="2743200" algn="l" defTabSz="457200" rtl="0" eaLnBrk="1" latinLnBrk="0" hangingPunct="1">
+      <a:defRPr sz="1200" kern="1200">
+        <a:solidFill>
+          <a:schemeClr val="tx1"/>
+        </a:solidFill>
+        <a:latin typeface="+mn-lt"/>
+        <a:ea typeface="+mn-ea"/>
+        <a:cs typeface="+mn-cs"/>
+      </a:defRPr>
+    </a:lvl7pPr>
+    <a:lvl8pPr marL="3200400" algn="l" defTabSz="457200" rtl="0" eaLnBrk="1" latinLnBrk="0" hangingPunct="1">
+      <a:defRPr sz="1200" kern="1200">
+        <a:solidFill>
+          <a:schemeClr val="tx1"/>
+        </a:solidFill>
+        <a:latin typeface="+mn-lt"/>
+        <a:ea typeface="+mn-ea"/>
+        <a:cs typeface="+mn-cs"/>
+      </a:defRPr>
+    </a:lvl8pPr>
+    <a:lvl9pPr marL="3657600" algn="l" defTabSz="457200" rtl="0" eaLnBrk="1" latinLnBrk="0" hangingPunct="1">
+      <a:defRPr sz="1200" kern="1200">
+        <a:solidFill>
+          <a:schemeClr val="tx1"/>
+        </a:solidFill>
+        <a:latin typeface="+mn-lt"/>
+        <a:ea typeface="+mn-ea"/>
+        <a:cs typeface="+mn-cs"/>
+      </a:defRPr>
+    </a:lvl9pPr>
+  </p:notesStyle>
+</p:notesMaster>
+</file>
+
+<file path=ppt/notesSlides/notesSlide1.xml><?xml version="1.0" encoding="utf-8"?>
+<p:notes xmlns:a="http://schemas.openxmlformats.org/drawingml/2006/main" xmlns:p="http://schemas.openxmlformats.org/presentationml/2006/main" xmlns:r="http://schemas.openxmlformats.org/officeDocument/2006/relationships">
+  <p:cSld>
+    <p:spTree>
+      <p:nvGrpSpPr>
+        <p:cNvPr id="1" name=""/>
+        <p:cNvGrpSpPr/>
+        <p:nvPr/>
+      </p:nvGrpSpPr>
+      <p:grpSpPr>
+        <a:xfrm>
+          <a:off x="0" y="0"/>
+          <a:ext cx="0" cy="0"/>
+          <a:chOff x="0" y="0"/>
+          <a:chExt cx="0" cy="0"/>
+        </a:xfrm>
+      </p:grpSpPr>
+      <p:sp>
+        <p:nvSpPr>
+          <p:cNvPr id="2" name="Slide Image Placeholder 1"/>
+          <p:cNvSpPr>
+            <a:spLocks noGrp="1"/>
+          </p:cNvSpPr>
+          <p:nvPr>
+            <p:ph type="sldImg" idx="2"/>
+          </p:nvPr>
+        </p:nvSpPr>
+        <p:spPr/>
+      </p:sp>
+      <p:sp>
+        <p:nvSpPr>
+          <p:cNvPr id="3" name="Notes Placeholder 2"/>
+          <p:cNvSpPr>
+            <a:spLocks noGrp="1"/>
+          </p:cNvSpPr>
+          <p:nvPr>
+            <p:ph type="body" idx="3" sz="quarter"/>
+          </p:nvPr>
+        </p:nvSpPr>
+        <p:spPr/>
+        <p:txBody>
+          <a:bodyPr/>
+          <a:lstStyle/>
+          <a:p>
+            <a:r>
+              <a:t>Se abre de forma explicita o implicita y se cierra con COMMIT, que hace permanentes los cambios, o con ROLLBACK, que los deshace.</a:t>
+            </a:r>
+          </a:p>
+          <a:p>
+            <a:r>
+              <a:t>Concurrencia significa que dos o mas transacciones estan abiertas al mismo tiempo sobre los mismos datos.</a:t>
+            </a:r>
+          </a:p>
+          <a:p>
+            <a:r>
+              <a:t>Ambas consultan si la franja esta libre.</a:t>
+            </a:r>
+          </a:p>
+          <a:p>
+            <a:r>
+              <a:t>Ambas reciben cero filas.</a:t>
+            </a:r>
+          </a:p>
+          <a:p>
+            <a:r>
+              <a:t>Ambas insertan una cita.</a:t>
+            </a:r>
+          </a:p>
+        </p:txBody>
+      </p:sp>
+      <p:sp>
+        <p:nvSpPr>
+          <p:cNvPr id="4" name="Slide Number Placeholder 3"/>
+          <p:cNvSpPr>
+            <a:spLocks noGrp="1"/>
+          </p:cNvSpPr>
+          <p:nvPr>
+            <p:ph type="sldNum" idx="5" sz="quarter"/>
+          </p:nvPr>
+        </p:nvSpPr>
+        <p:spPr/>
+      </p:sp>
+    </p:spTree>
+  </p:cSld>
+  <p:clrMapOvr>
+    <a:masterClrMapping/>
+  </p:clrMapOvr>
+</p:notes>
+</file>
+
+<file path=ppt/notesSlides/notesSlide2.xml><?xml version="1.0" encoding="utf-8"?>
+<p:notes xmlns:a="http://schemas.openxmlformats.org/drawingml/2006/main" xmlns:p="http://schemas.openxmlformats.org/presentationml/2006/main" xmlns:r="http://schemas.openxmlformats.org/officeDocument/2006/relationships">
+  <p:cSld>
+    <p:spTree>
+      <p:nvGrpSpPr>
+        <p:cNvPr id="1" name=""/>
+        <p:cNvGrpSpPr/>
+        <p:nvPr/>
+      </p:nvGrpSpPr>
+      <p:grpSpPr>
+        <a:xfrm>
+          <a:off x="0" y="0"/>
+          <a:ext cx="0" cy="0"/>
+          <a:chOff x="0" y="0"/>
+          <a:chExt cx="0" cy="0"/>
+        </a:xfrm>
+      </p:grpSpPr>
+      <p:sp>
+        <p:nvSpPr>
+          <p:cNvPr id="2" name="Slide Image Placeholder 1"/>
+          <p:cNvSpPr>
+            <a:spLocks noGrp="1"/>
+          </p:cNvSpPr>
+          <p:nvPr>
+            <p:ph type="sldImg" idx="2"/>
+          </p:nvPr>
+        </p:nvSpPr>
+        <p:spPr/>
+      </p:sp>
+      <p:sp>
+        <p:nvSpPr>
+          <p:cNvPr id="3" name="Notes Placeholder 2"/>
+          <p:cNvSpPr>
+            <a:spLocks noGrp="1"/>
+          </p:cNvSpPr>
+          <p:nvPr>
+            <p:ph type="body" idx="3" sz="quarter"/>
+          </p:nvPr>
+        </p:nvSpPr>
+        <p:spPr/>
+        <p:txBody>
+          <a:bodyPr/>
+          <a:lstStyle/>
+          <a:p>
+            <a:r>
+              <a:t>Por eso el estandar SQL no impone una sola forma de trabajar: ofrece una perilla llamada nivel de aislamiento, que permite negociar cuanta anomalia se tolera a cambio de cuanto rendimiento.</a:t>
+            </a:r>
+          </a:p>
+        </p:txBody>
+      </p:sp>
+      <p:sp>
+        <p:nvSpPr>
+          <p:cNvPr id="4" name="Slide Number Placeholder 3"/>
+          <p:cNvSpPr>
+            <a:spLocks noGrp="1"/>
+          </p:cNvSpPr>
+          <p:nvPr>
+            <p:ph type="sldNum" idx="5" sz="quarter"/>
+          </p:nvPr>
+        </p:nvSpPr>
+        <p:spPr/>
+      </p:sp>
+    </p:spTree>
+  </p:cSld>
+  <p:clrMapOvr>
+    <a:masterClrMapping/>
+  </p:clrMapOvr>
+</p:notes>
+</file>
+
+<file path=ppt/notesSlides/notesSlide3.xml><?xml version="1.0" encoding="utf-8"?>
+<p:notes xmlns:a="http://schemas.openxmlformats.org/drawingml/2006/main" xmlns:p="http://schemas.openxmlformats.org/presentationml/2006/main" xmlns:r="http://schemas.openxmlformats.org/officeDocument/2006/relationships">
+  <p:cSld>
+    <p:spTree>
+      <p:nvGrpSpPr>
+        <p:cNvPr id="1" name=""/>
+        <p:cNvGrpSpPr/>
+        <p:nvPr/>
+      </p:nvGrpSpPr>
+      <p:grpSpPr>
+        <a:xfrm>
+          <a:off x="0" y="0"/>
+          <a:ext cx="0" cy="0"/>
+          <a:chOff x="0" y="0"/>
+          <a:chExt cx="0" cy="0"/>
+        </a:xfrm>
+      </p:grpSpPr>
+      <p:sp>
+        <p:nvSpPr>
+          <p:cNvPr id="2" name="Slide Image Placeholder 1"/>
+          <p:cNvSpPr>
+            <a:spLocks noGrp="1"/>
+          </p:cNvSpPr>
+          <p:nvPr>
+            <p:ph type="sldImg" idx="2"/>
+          </p:nvPr>
+        </p:nvSpPr>
+        <p:spPr/>
+      </p:sp>
+      <p:sp>
+        <p:nvSpPr>
+          <p:cNvPr id="3" name="Notes Placeholder 2"/>
+          <p:cNvSpPr>
+            <a:spLocks noGrp="1"/>
+          </p:cNvSpPr>
+          <p:nvPr>
+            <p:ph type="body" idx="3" sz="quarter"/>
+          </p:nvPr>
+        </p:nvSpPr>
+        <p:spPr/>
+        <p:txBody>
+          <a:bodyPr/>
+          <a:lstStyle/>
+          <a:p>
+            <a:r>
+              <a:t>El estandar define tres fenomenos indeseables, y cada uno se entiende mejor con una escena de la clinica.</a:t>
+            </a:r>
+          </a:p>
+          <a:p>
+            <a:r>
+              <a:t>La misma consulta, en la misma transaccion, devolvio dos valores distintos.</a:t>
+            </a:r>
+          </a:p>
+        </p:txBody>
+      </p:sp>
+      <p:sp>
+        <p:nvSpPr>
+          <p:cNvPr id="4" name="Slide Number Placeholder 3"/>
+          <p:cNvSpPr>
+            <a:spLocks noGrp="1"/>
+          </p:cNvSpPr>
+          <p:nvPr>
+            <p:ph type="sldNum" idx="5" sz="quarter"/>
+          </p:nvPr>
+        </p:nvSpPr>
+        <p:spPr/>
+      </p:sp>
+    </p:spTree>
+  </p:cSld>
+  <p:clrMapOvr>
+    <a:masterClrMapping/>
+  </p:clrMapOvr>
+</p:notes>
+</file>
+
+<file path=ppt/notesSlides/notesSlide4.xml><?xml version="1.0" encoding="utf-8"?>
+<p:notes xmlns:a="http://schemas.openxmlformats.org/drawingml/2006/main" xmlns:p="http://schemas.openxmlformats.org/presentationml/2006/main" xmlns:r="http://schemas.openxmlformats.org/officeDocument/2006/relationships">
+  <p:cSld>
+    <p:spTree>
+      <p:nvGrpSpPr>
+        <p:cNvPr id="1" name=""/>
+        <p:cNvGrpSpPr/>
+        <p:nvPr/>
+      </p:nvGrpSpPr>
+      <p:grpSpPr>
+        <a:xfrm>
+          <a:off x="0" y="0"/>
+          <a:ext cx="0" cy="0"/>
+          <a:chOff x="0" y="0"/>
+          <a:chExt cx="0" cy="0"/>
+        </a:xfrm>
+      </p:grpSpPr>
+      <p:sp>
+        <p:nvSpPr>
+          <p:cNvPr id="2" name="Slide Image Placeholder 1"/>
+          <p:cNvSpPr>
+            <a:spLocks noGrp="1"/>
+          </p:cNvSpPr>
+          <p:nvPr>
+            <p:ph type="sldImg" idx="2"/>
+          </p:nvPr>
+        </p:nvSpPr>
+        <p:spPr/>
+      </p:sp>
+      <p:sp>
+        <p:nvSpPr>
+          <p:cNvPr id="3" name="Notes Placeholder 2"/>
+          <p:cNvSpPr>
+            <a:spLocks noGrp="1"/>
+          </p:cNvSpPr>
+          <p:nvPr>
+            <p:ph type="body" idx="3" sz="quarter"/>
+          </p:nvPr>
+        </p:nvSpPr>
+        <p:spPr/>
+        <p:txBody>
+          <a:bodyPr/>
+          <a:lstStyle/>
+          <a:p>
+            <a:r>
+              <a:t>READ COMMITTED impide la lectura sucia, porque solo se ve lo que ya fue confirmado, pero permite lectura no repetible y fantasma.</a:t>
+            </a:r>
+          </a:p>
+          <a:p>
+            <a:r>
+              <a:t>SERIALIZABLE impide los tres y equivale logicamente a ejecutar las transacciones una tras otra.</a:t>
+            </a:r>
+          </a:p>
+        </p:txBody>
+      </p:sp>
+      <p:sp>
+        <p:nvSpPr>
+          <p:cNvPr id="4" name="Slide Number Placeholder 3"/>
+          <p:cNvSpPr>
+            <a:spLocks noGrp="1"/>
+          </p:cNvSpPr>
+          <p:nvPr>
+            <p:ph type="sldNum" idx="5" sz="quarter"/>
+          </p:nvPr>
+        </p:nvSpPr>
+        <p:spPr/>
+      </p:sp>
+    </p:spTree>
+  </p:cSld>
+  <p:clrMapOvr>
+    <a:masterClrMapping/>
+  </p:clrMapOvr>
+</p:notes>
+</file>
+
+<file path=ppt/notesSlides/notesSlide5.xml><?xml version="1.0" encoding="utf-8"?>
+<p:notes xmlns:a="http://schemas.openxmlformats.org/drawingml/2006/main" xmlns:p="http://schemas.openxmlformats.org/presentationml/2006/main" xmlns:r="http://schemas.openxmlformats.org/officeDocument/2006/relationships">
+  <p:cSld>
+    <p:spTree>
+      <p:nvGrpSpPr>
+        <p:cNvPr id="1" name=""/>
+        <p:cNvGrpSpPr/>
+        <p:nvPr/>
+      </p:nvGrpSpPr>
+      <p:grpSpPr>
+        <a:xfrm>
+          <a:off x="0" y="0"/>
+          <a:ext cx="0" cy="0"/>
+          <a:chOff x="0" y="0"/>
+          <a:chExt cx="0" cy="0"/>
+        </a:xfrm>
+      </p:grpSpPr>
+      <p:sp>
+        <p:nvSpPr>
+          <p:cNvPr id="2" name="Slide Image Placeholder 1"/>
+          <p:cNvSpPr>
+            <a:spLocks noGrp="1"/>
+          </p:cNvSpPr>
+          <p:nvPr>
+            <p:ph type="sldImg" idx="2"/>
+          </p:nvPr>
+        </p:nvSpPr>
+        <p:spPr/>
+      </p:sp>
+      <p:sp>
+        <p:nvSpPr>
+          <p:cNvPr id="3" name="Notes Placeholder 2"/>
+          <p:cNvSpPr>
+            <a:spLocks noGrp="1"/>
+          </p:cNvSpPr>
+          <p:nvPr>
+            <p:ph type="body" idx="3" sz="quarter"/>
+          </p:nvPr>
+        </p:nvSpPr>
+        <p:spPr/>
+        <p:txBody>
+          <a:bodyPr/>
+          <a:lstStyle/>
+          <a:p>
+            <a:r>
+              <a:t>El control pesimista asume que el conflicto va a ocurrir, asi que bloquea el recurso antes de tocarlo.</a:t>
+            </a:r>
+          </a:p>
+          <a:p>
+            <a:r>
+              <a:t>Por eso existen variantes que el docente debe conocer: FOR UPDATE NOWAIT falla de inmediato en vez de esperar, y FOR UPDATE WAIT 5 espera cinco segundos y luego falla, lo cual permite devolver un mensaje honesto al usuario en vez de una pantalla congelada.</a:t>
+            </a:r>
+          </a:p>
+        </p:txBody>
+      </p:sp>
+      <p:sp>
+        <p:nvSpPr>
+          <p:cNvPr id="4" name="Slide Number Placeholder 3"/>
+          <p:cNvSpPr>
+            <a:spLocks noGrp="1"/>
+          </p:cNvSpPr>
+          <p:nvPr>
+            <p:ph type="sldNum" idx="5" sz="quarter"/>
+          </p:nvPr>
+        </p:nvSpPr>
+        <p:spPr/>
+      </p:sp>
+    </p:spTree>
+  </p:cSld>
+  <p:clrMapOvr>
+    <a:masterClrMapping/>
+  </p:clrMapOvr>
+</p:notes>
+</file>
+
+<file path=ppt/notesSlides/notesSlide6.xml><?xml version="1.0" encoding="utf-8"?>
+<p:notes xmlns:a="http://schemas.openxmlformats.org/drawingml/2006/main" xmlns:p="http://schemas.openxmlformats.org/presentationml/2006/main" xmlns:r="http://schemas.openxmlformats.org/officeDocument/2006/relationships">
+  <p:cSld>
+    <p:spTree>
+      <p:nvGrpSpPr>
+        <p:cNvPr id="1" name=""/>
+        <p:cNvGrpSpPr/>
+        <p:nvPr/>
+      </p:nvGrpSpPr>
+      <p:grpSpPr>
+        <a:xfrm>
+          <a:off x="0" y="0"/>
+          <a:ext cx="0" cy="0"/>
+          <a:chOff x="0" y="0"/>
+          <a:chExt cx="0" cy="0"/>
+        </a:xfrm>
+      </p:grpSpPr>
+      <p:sp>
+        <p:nvSpPr>
+          <p:cNvPr id="2" name="Slide Image Placeholder 1"/>
+          <p:cNvSpPr>
+            <a:spLocks noGrp="1"/>
+          </p:cNvSpPr>
+          <p:nvPr>
+            <p:ph type="sldImg" idx="2"/>
+          </p:nvPr>
+        </p:nvSpPr>
+        <p:spPr/>
+      </p:sp>
+      <p:sp>
+        <p:nvSpPr>
+          <p:cNvPr id="3" name="Notes Placeholder 2"/>
+          <p:cNvSpPr>
+            <a:spLocks noGrp="1"/>
+          </p:cNvSpPr>
+          <p:nvPr>
+            <p:ph type="body" idx="3" sz="quarter"/>
+          </p:nvPr>
+        </p:nvSpPr>
+        <p:spPr/>
+        <p:txBody>
+          <a:bodyPr/>
+          <a:lstStyle/>
+          <a:p>
+            <a:r>
+              <a:t>Un deadlock, o interbloqueo, ocurre cuando dos transacciones se esperan mutuamente y ninguna puede avanzar.</a:t>
+            </a:r>
+          </a:p>
+          <a:p>
+            <a:r>
+              <a:t>Si los dos arrancan al mismo tiempo, cada uno tiene exactamente lo que el otro necesita, nadie cede y ninguna espera termina sola.</a:t>
+            </a:r>
+          </a:p>
+          <a:p>
+            <a:r>
+              <a:t>La transaccion sobreviviente termina normal.</a:t>
+            </a:r>
+          </a:p>
+        </p:txBody>
+      </p:sp>
+      <p:sp>
+        <p:nvSpPr>
+          <p:cNvPr id="4" name="Slide Number Placeholder 3"/>
+          <p:cNvSpPr>
+            <a:spLocks noGrp="1"/>
+          </p:cNvSpPr>
+          <p:nvPr>
+            <p:ph type="sldNum" idx="5" sz="quarter"/>
+          </p:nvPr>
+        </p:nvSpPr>
+        <p:spPr/>
+      </p:sp>
+    </p:spTree>
+  </p:cSld>
+  <p:clrMapOvr>
+    <a:masterClrMapping/>
+  </p:clrMapOvr>
+</p:notes>
+</file>
+
+<file path=ppt/notesSlides/notesSlide7.xml><?xml version="1.0" encoding="utf-8"?>
+<p:notes xmlns:a="http://schemas.openxmlformats.org/drawingml/2006/main" xmlns:p="http://schemas.openxmlformats.org/presentationml/2006/main" xmlns:r="http://schemas.openxmlformats.org/officeDocument/2006/relationships">
+  <p:cSld>
+    <p:spTree>
+      <p:nvGrpSpPr>
+        <p:cNvPr id="1" name=""/>
+        <p:cNvGrpSpPr/>
+        <p:nvPr/>
+      </p:nvGrpSpPr>
+      <p:grpSpPr>
+        <a:xfrm>
+          <a:off x="0" y="0"/>
+          <a:ext cx="0" cy="0"/>
+          <a:chOff x="0" y="0"/>
+          <a:chExt cx="0" cy="0"/>
+        </a:xfrm>
+      </p:grpSpPr>
+      <p:sp>
+        <p:nvSpPr>
+          <p:cNvPr id="2" name="Slide Image Placeholder 1"/>
+          <p:cNvSpPr>
+            <a:spLocks noGrp="1"/>
+          </p:cNvSpPr>
+          <p:nvPr>
+            <p:ph type="sldImg" idx="2"/>
+          </p:nvPr>
+        </p:nvSpPr>
+        <p:spPr/>
+      </p:sp>
+      <p:sp>
+        <p:nvSpPr>
+          <p:cNvPr id="3" name="Notes Placeholder 2"/>
+          <p:cNvSpPr>
+            <a:spLocks noGrp="1"/>
+          </p:cNvSpPr>
+          <p:nvPr>
+            <p:ph type="body" idx="3" sz="quarter"/>
+          </p:nvPr>
+        </p:nvSpPr>
+        <p:spPr/>
+        <p:txBody>
+          <a:bodyPr/>
+          <a:lstStyle/>
+          <a:p>
+            <a:r>
+              <a:t>Con esa restriccion, cuando las dos recepcionistas insertan, el motor deja pasar la primera y rechaza la segunda con una violacion de unicidad, sin que nadie haya razonado sobre aislamiento; el procedimiento captura esa excepcion y devuelve «ese horario acaba de ser tomado, elija otro».</a:t>
+            </a:r>
+          </a:p>
+          <a:p>
+            <a:r>
+              <a:t>La leccion general que el docente debe transmitir es que una regla que se puede expresar como restriccion declarativa, es decir UNIQUE, CHECK, FOREIGN KEY o NOT NULL, es mas confiable que la misma regla escrita en codigo, porque el motor la aplica siempre: venga la escritura de la aplicacion, de un script de carga masiva o de alguien conectado con un cliente SQL a corregir un dato a mano.</a:t>
+            </a:r>
+          </a:p>
+          <a:p>
+            <a:r>
+              <a:t>La respuesta honesta es que no se puede: los playgrounds gratuitos ejecutan un script en una unica sesion, normalmente con autocommit activo, y no permiten abrir dos conexiones para intercalarlas.</a:t>
+            </a:r>
+          </a:p>
+          <a:p>
+            <a:r>
+              <a:t>Lo que si se demuestra con evidencia ejecutable son tres cosas: la restriccion UNIQUE rechazando el segundo INSERT, el patron optimista completo con la columna version y el UPDATE que afecta cero filas, y la sintaxis de SELECT FOR UPDATE ejecutandose sin error.</a:t>
+            </a:r>
+          </a:p>
+          <a:p>
+            <a:r>
+              <a:t>Lo que no se demuestra se documenta en una tabla de linea de tiempo con columnas T1, T2 y estado de la fila, paso por paso; esa tabla es un artefacto profesional legitimo, no un premio de consolacion, y es exactamente como se comunican estos escenarios en un documento de diseno real.</a:t>
+            </a:r>
+          </a:p>
+        </p:txBody>
+      </p:sp>
+      <p:sp>
+        <p:nvSpPr>
+          <p:cNvPr id="4" name="Slide Number Placeholder 3"/>
+          <p:cNvSpPr>
+            <a:spLocks noGrp="1"/>
+          </p:cNvSpPr>
+          <p:nvPr>
+            <p:ph type="sldNum" idx="5" sz="quarter"/>
+          </p:nvPr>
+        </p:nvSpPr>
+        <p:spPr/>
+      </p:sp>
+    </p:spTree>
+  </p:cSld>
+  <p:clrMapOvr>
+    <a:masterClrMapping/>
+  </p:clrMapOvr>
+</p:notes>
 </file>
 
 <file path=ppt/slideLayouts/slideLayout1.xml><?xml version="1.0" encoding="utf-8"?>
@@ -6392,7 +7289,7 @@
                 </a:solidFill>
                 <a:latin typeface="Calibri"/>
               </a:rPr>
-              <a:t>Encuadre de hoy · Objetivo PI</a:t>
+              <a:t>Encuadre de hoy · Tema y objetivo</a:t>
             </a:r>
           </a:p>
         </p:txBody>
@@ -6440,7 +7337,7 @@
                 </a:solidFill>
                 <a:latin typeface="Calibri"/>
               </a:rPr>
-              <a:t>Hoy avanzamos el PI en:</a:t>
+              <a:t>Tema de hoy:</a:t>
             </a:r>
             <a:r>
               <a:rPr sz="2000" b="0" i="0">
@@ -6449,7 +7346,7 @@
                 </a:solidFill>
                 <a:latin typeface="Calibri"/>
               </a:rPr>
-              <a:t> Escenarios de concurrencia del PI documentados</a:t>
+              <a:t> Control de concurrencia · VetCare</a:t>
             </a:r>
           </a:p>
           <a:p>
@@ -6494,15 +7391,6 @@
               </a:rPr>
               <a:t>120 min</a:t>
             </a:r>
-            <a:r>
-              <a:rPr sz="2000" b="0" i="0">
-                <a:solidFill>
-                  <a:srgbClr val="333333"/>
-                </a:solidFill>
-                <a:latin typeface="Calibri"/>
-              </a:rPr>
-              <a:t> · Teoría breve · Taller PI</a:t>
-            </a:r>
           </a:p>
           <a:p>
             <a:pPr>
@@ -6517,25 +7405,7 @@
                 </a:solidFill>
                 <a:latin typeface="Calibri"/>
               </a:rPr>
-              <a:t>–   </a:t>
-            </a:r>
-            <a:r>
-              <a:rPr sz="2000" b="1" i="0">
-                <a:solidFill>
-                  <a:srgbClr val="333333"/>
-                </a:solidFill>
-                <a:latin typeface="Calibri"/>
-              </a:rPr>
-              <a:t>Entregable de hoy:</a:t>
-            </a:r>
-            <a:r>
-              <a:rPr sz="2000" b="0" i="0">
-                <a:solidFill>
-                  <a:srgbClr val="333333"/>
-                </a:solidFill>
-                <a:latin typeface="Calibri"/>
-              </a:rPr>
-              <a:t> Informe corto: 2 escenarios (cita doble / stock) + mitigacion</a:t>
+              <a:t>–   Gratis + navegador · free tier · sin software de pago obligatorio.</a:t>
             </a:r>
           </a:p>
           <a:p>
@@ -6551,7 +7421,7 @@
                 </a:solidFill>
                 <a:latin typeface="Calibri"/>
               </a:rPr>
-              <a:t>–   Gratis + navegador · free tier · sin software de pago obligatorio.</a:t>
+              <a:t>–   Recorrido: teoría del tema, una lámina por concepto, y demo del docente sobre VetCare DB.</a:t>
             </a:r>
           </a:p>
           <a:p>
@@ -6567,23 +7437,7 @@
                 </a:solidFill>
                 <a:latin typeface="Calibri"/>
               </a:rPr>
-              <a:t>–   La teoría no es un tema aislado: alimenta evidencias de la rúbrica del PI.</a:t>
-            </a:r>
-          </a:p>
-          <a:p>
-            <a:pPr>
-              <a:spcAft>
-                <a:spcPts val="800"/>
-              </a:spcAft>
-            </a:pPr>
-            <a:r>
-              <a:rPr sz="2000" b="0" i="0">
-                <a:solidFill>
-                  <a:srgbClr val="333333"/>
-                </a:solidFill>
-                <a:latin typeface="Calibri"/>
-              </a:rPr>
-              <a:t>–   Al salir: avance concreto en su paquete VetCare.</a:t>
+              <a:t>–   Cada lámina se sostiene sola: sirve para repasar aunque hayas faltado.</a:t>
             </a:r>
           </a:p>
         </p:txBody>
@@ -9868,13 +10722,13 @@
         <p:spPr>
           <a:xfrm>
             <a:off x="0" y="0"/>
-            <a:ext cx="12191695" cy="1170432"/>
+            <a:ext cx="12191695" cy="164592"/>
           </a:xfrm>
           <a:prstGeom prst="rect">
             <a:avLst/>
           </a:prstGeom>
           <a:solidFill>
-            <a:srgbClr val="095292"/>
+            <a:srgbClr val="269CCB"/>
           </a:solidFill>
           <a:ln>
             <a:noFill/>
@@ -9902,251 +10756,9 @@
           </a:p>
         </p:txBody>
       </p:sp>
-      <p:sp>
-        <p:nvSpPr>
-          <p:cNvPr id="3" name="Rectangle 2"/>
-          <p:cNvSpPr/>
-          <p:nvPr/>
-        </p:nvSpPr>
-        <p:spPr>
-          <a:xfrm>
-            <a:off x="0" y="1170432"/>
-            <a:ext cx="12191695" cy="41148"/>
-          </a:xfrm>
-          <a:prstGeom prst="rect">
-            <a:avLst/>
-          </a:prstGeom>
-          <a:solidFill>
-            <a:srgbClr val="FFD000"/>
-          </a:solidFill>
-          <a:ln>
-            <a:noFill/>
-          </a:ln>
-        </p:spPr>
-        <p:style>
-          <a:lnRef idx="1">
-            <a:schemeClr val="accent1"/>
-          </a:lnRef>
-          <a:fillRef idx="3">
-            <a:schemeClr val="accent1"/>
-          </a:fillRef>
-          <a:effectRef idx="2">
-            <a:schemeClr val="accent1"/>
-          </a:effectRef>
-          <a:fontRef idx="minor">
-            <a:schemeClr val="lt1"/>
-          </a:fontRef>
-        </p:style>
-        <p:txBody>
-          <a:bodyPr rtlCol="0" anchor="ctr"/>
-          <a:lstStyle/>
-          <a:p>
-            <a:pPr algn="ctr"/>
-          </a:p>
-        </p:txBody>
-      </p:sp>
-      <p:sp>
-        <p:nvSpPr>
-          <p:cNvPr id="4" name="TextBox 3"/>
-          <p:cNvSpPr txBox="1"/>
-          <p:nvPr/>
-        </p:nvSpPr>
-        <p:spPr>
-          <a:xfrm>
-            <a:off x="457200" y="164592"/>
-            <a:ext cx="11277295" cy="384048"/>
-          </a:xfrm>
-          <a:prstGeom prst="rect">
-            <a:avLst/>
-          </a:prstGeom>
-          <a:noFill/>
-        </p:spPr>
-        <p:txBody>
-          <a:bodyPr wrap="square">
-            <a:spAutoFit/>
-          </a:bodyPr>
-          <a:lstStyle/>
-          <a:p>
-            <a:r>
-              <a:rPr sz="2600" b="1" i="0">
-                <a:solidFill>
-                  <a:srgbClr val="FFFFFF"/>
-                </a:solidFill>
-                <a:latin typeface="Calibri"/>
-              </a:rPr>
-              <a:t>Herramientas de hoy</a:t>
-            </a:r>
-          </a:p>
-        </p:txBody>
-      </p:sp>
-      <p:sp>
-        <p:nvSpPr>
-          <p:cNvPr id="5" name="TextBox 4"/>
-          <p:cNvSpPr txBox="1"/>
-          <p:nvPr/>
-        </p:nvSpPr>
-        <p:spPr>
-          <a:xfrm>
-            <a:off x="457200" y="566928"/>
-            <a:ext cx="11277295" cy="411480"/>
-          </a:xfrm>
-          <a:prstGeom prst="rect">
-            <a:avLst/>
-          </a:prstGeom>
-          <a:noFill/>
-        </p:spPr>
-        <p:txBody>
-          <a:bodyPr wrap="square">
-            <a:spAutoFit/>
-          </a:bodyPr>
-          <a:lstStyle/>
-          <a:p>
-            <a:r>
-              <a:rPr sz="1400" b="0" i="0">
-                <a:solidFill>
-                  <a:srgbClr val="B8D8EE"/>
-                </a:solidFill>
-                <a:latin typeface="Calibri"/>
-              </a:rPr>
-              <a:t>Gratis · navegador o free tier</a:t>
-            </a:r>
-          </a:p>
-        </p:txBody>
-      </p:sp>
-      <p:sp>
-        <p:nvSpPr>
-          <p:cNvPr id="6" name="Rounded Rectangle 5"/>
-          <p:cNvSpPr/>
-          <p:nvPr/>
-        </p:nvSpPr>
-        <p:spPr>
-          <a:xfrm>
-            <a:off x="457200" y="1591056"/>
-            <a:ext cx="3624986" cy="2331720"/>
-          </a:xfrm>
-          <a:prstGeom prst="roundRect">
-            <a:avLst>
-              <a:gd name="adj" fmla="val 12000"/>
-            </a:avLst>
-          </a:prstGeom>
-          <a:solidFill>
-            <a:srgbClr val="F2F2F2"/>
-          </a:solidFill>
-          <a:ln>
-            <a:noFill/>
-          </a:ln>
-        </p:spPr>
-        <p:style>
-          <a:lnRef idx="1">
-            <a:schemeClr val="accent1"/>
-          </a:lnRef>
-          <a:fillRef idx="3">
-            <a:schemeClr val="accent1"/>
-          </a:fillRef>
-          <a:effectRef idx="2">
-            <a:schemeClr val="accent1"/>
-          </a:effectRef>
-          <a:fontRef idx="minor">
-            <a:schemeClr val="lt1"/>
-          </a:fontRef>
-        </p:style>
-        <p:txBody>
-          <a:bodyPr rtlCol="0" anchor="ctr"/>
-          <a:lstStyle/>
-          <a:p>
-            <a:pPr algn="ctr"/>
-          </a:p>
-        </p:txBody>
-      </p:sp>
-      <p:sp>
-        <p:nvSpPr>
-          <p:cNvPr id="7" name="Rectangle 6"/>
-          <p:cNvSpPr/>
-          <p:nvPr/>
-        </p:nvSpPr>
-        <p:spPr>
-          <a:xfrm>
-            <a:off x="457200" y="1591056"/>
-            <a:ext cx="3624986" cy="64008"/>
-          </a:xfrm>
-          <a:prstGeom prst="rect">
-            <a:avLst/>
-          </a:prstGeom>
-          <a:solidFill>
-            <a:srgbClr val="095292"/>
-          </a:solidFill>
-          <a:ln>
-            <a:noFill/>
-          </a:ln>
-        </p:spPr>
-        <p:style>
-          <a:lnRef idx="1">
-            <a:schemeClr val="accent1"/>
-          </a:lnRef>
-          <a:fillRef idx="3">
-            <a:schemeClr val="accent1"/>
-          </a:fillRef>
-          <a:effectRef idx="2">
-            <a:schemeClr val="accent1"/>
-          </a:effectRef>
-          <a:fontRef idx="minor">
-            <a:schemeClr val="lt1"/>
-          </a:fontRef>
-        </p:style>
-        <p:txBody>
-          <a:bodyPr rtlCol="0" anchor="ctr"/>
-          <a:lstStyle/>
-          <a:p>
-            <a:pPr algn="ctr"/>
-          </a:p>
-        </p:txBody>
-      </p:sp>
-      <p:sp>
-        <p:nvSpPr>
-          <p:cNvPr id="8" name="Rectangle 7"/>
-          <p:cNvSpPr/>
-          <p:nvPr/>
-        </p:nvSpPr>
-        <p:spPr>
-          <a:xfrm>
-            <a:off x="457200" y="1655064"/>
-            <a:ext cx="3624986" cy="27432"/>
-          </a:xfrm>
-          <a:prstGeom prst="rect">
-            <a:avLst/>
-          </a:prstGeom>
-          <a:solidFill>
-            <a:srgbClr val="FFD000"/>
-          </a:solidFill>
-          <a:ln>
-            <a:noFill/>
-          </a:ln>
-        </p:spPr>
-        <p:style>
-          <a:lnRef idx="1">
-            <a:schemeClr val="accent1"/>
-          </a:lnRef>
-          <a:fillRef idx="3">
-            <a:schemeClr val="accent1"/>
-          </a:fillRef>
-          <a:effectRef idx="2">
-            <a:schemeClr val="accent1"/>
-          </a:effectRef>
-          <a:fontRef idx="minor">
-            <a:schemeClr val="lt1"/>
-          </a:fontRef>
-        </p:style>
-        <p:txBody>
-          <a:bodyPr rtlCol="0" anchor="ctr"/>
-          <a:lstStyle/>
-          <a:p>
-            <a:pPr algn="ctr"/>
-          </a:p>
-        </p:txBody>
-      </p:sp>
       <p:pic>
         <p:nvPicPr>
-          <p:cNvPr id="9" name="Picture 8" descr="google_docs.png"/>
+          <p:cNvPr id="3" name="Picture 2" descr="logo_uniajc_color.png"/>
           <p:cNvPicPr>
             <a:picLocks noChangeAspect="1"/>
           </p:cNvPicPr>
@@ -10160,8 +10772,8 @@
         </p:blipFill>
         <p:spPr>
           <a:xfrm>
-            <a:off x="1643329" y="1847087"/>
-            <a:ext cx="1252728" cy="1252728"/>
+            <a:off x="10271455" y="5998464"/>
+            <a:ext cx="1463040" cy="643233"/>
           </a:xfrm>
           <a:prstGeom prst="rect">
             <a:avLst/>
@@ -10170,14 +10782,14 @@
       </p:pic>
       <p:sp>
         <p:nvSpPr>
-          <p:cNvPr id="10" name="TextBox 9"/>
+          <p:cNvPr id="4" name="TextBox 3"/>
           <p:cNvSpPr txBox="1"/>
           <p:nvPr/>
         </p:nvSpPr>
         <p:spPr>
           <a:xfrm>
-            <a:off x="530352" y="3191256"/>
-            <a:ext cx="3478682" cy="621792"/>
+            <a:off x="457200" y="1737360"/>
+            <a:ext cx="11277295" cy="1097280"/>
           </a:xfrm>
           <a:prstGeom prst="rect">
             <a:avLst/>
@@ -10185,456 +10797,32 @@
           <a:noFill/>
         </p:spPr>
         <p:txBody>
-          <a:bodyPr wrap="square" anchor="t"/>
+          <a:bodyPr wrap="square" anchor="ctr"/>
           <a:lstStyle/>
           <a:p>
             <a:pPr algn="ctr"/>
             <a:r>
-              <a:rPr sz="1300" b="1" i="0">
+              <a:rPr sz="3400" b="1" i="0">
                 <a:solidFill>
                   <a:srgbClr val="095292"/>
                 </a:solidFill>
                 <a:latin typeface="Calibri"/>
               </a:rPr>
-              <a:t>Google Docs</a:t>
-            </a:r>
-          </a:p>
-          <a:p>
-            <a:pPr algn="ctr">
-              <a:spcBef>
-                <a:spcPts val="200"/>
-              </a:spcBef>
-            </a:pPr>
-            <a:r>
-              <a:rPr sz="1000" b="0" i="0">
-                <a:solidFill>
-                  <a:srgbClr val="666666"/>
-                </a:solidFill>
-                <a:latin typeface="Calibri"/>
-              </a:rPr>
-              <a:t>Escenarios T1/T2</a:t>
-            </a:r>
-          </a:p>
-        </p:txBody>
-      </p:sp>
-      <p:sp>
-        <p:nvSpPr>
-          <p:cNvPr id="11" name="Rounded Rectangle 10"/>
-          <p:cNvSpPr/>
-          <p:nvPr/>
-        </p:nvSpPr>
-        <p:spPr>
-          <a:xfrm>
-            <a:off x="4283354" y="1591056"/>
-            <a:ext cx="3624986" cy="2331720"/>
-          </a:xfrm>
-          <a:prstGeom prst="roundRect">
-            <a:avLst>
-              <a:gd name="adj" fmla="val 12000"/>
-            </a:avLst>
-          </a:prstGeom>
-          <a:solidFill>
-            <a:srgbClr val="F2F2F2"/>
-          </a:solidFill>
-          <a:ln>
-            <a:noFill/>
-          </a:ln>
-        </p:spPr>
-        <p:style>
-          <a:lnRef idx="1">
-            <a:schemeClr val="accent1"/>
-          </a:lnRef>
-          <a:fillRef idx="3">
-            <a:schemeClr val="accent1"/>
-          </a:fillRef>
-          <a:effectRef idx="2">
-            <a:schemeClr val="accent1"/>
-          </a:effectRef>
-          <a:fontRef idx="minor">
-            <a:schemeClr val="lt1"/>
-          </a:fontRef>
-        </p:style>
-        <p:txBody>
-          <a:bodyPr rtlCol="0" anchor="ctr"/>
-          <a:lstStyle/>
-          <a:p>
-            <a:pPr algn="ctr"/>
-          </a:p>
-        </p:txBody>
-      </p:sp>
-      <p:sp>
-        <p:nvSpPr>
-          <p:cNvPr id="12" name="Rectangle 11"/>
-          <p:cNvSpPr/>
-          <p:nvPr/>
-        </p:nvSpPr>
-        <p:spPr>
-          <a:xfrm>
-            <a:off x="4283354" y="1591056"/>
-            <a:ext cx="3624986" cy="64008"/>
-          </a:xfrm>
-          <a:prstGeom prst="rect">
-            <a:avLst/>
-          </a:prstGeom>
-          <a:solidFill>
-            <a:srgbClr val="095292"/>
-          </a:solidFill>
-          <a:ln>
-            <a:noFill/>
-          </a:ln>
-        </p:spPr>
-        <p:style>
-          <a:lnRef idx="1">
-            <a:schemeClr val="accent1"/>
-          </a:lnRef>
-          <a:fillRef idx="3">
-            <a:schemeClr val="accent1"/>
-          </a:fillRef>
-          <a:effectRef idx="2">
-            <a:schemeClr val="accent1"/>
-          </a:effectRef>
-          <a:fontRef idx="minor">
-            <a:schemeClr val="lt1"/>
-          </a:fontRef>
-        </p:style>
-        <p:txBody>
-          <a:bodyPr rtlCol="0" anchor="ctr"/>
-          <a:lstStyle/>
-          <a:p>
-            <a:pPr algn="ctr"/>
-          </a:p>
-        </p:txBody>
-      </p:sp>
-      <p:sp>
-        <p:nvSpPr>
-          <p:cNvPr id="13" name="Rectangle 12"/>
-          <p:cNvSpPr/>
-          <p:nvPr/>
-        </p:nvSpPr>
-        <p:spPr>
-          <a:xfrm>
-            <a:off x="4283354" y="1655064"/>
-            <a:ext cx="3624986" cy="27432"/>
-          </a:xfrm>
-          <a:prstGeom prst="rect">
-            <a:avLst/>
-          </a:prstGeom>
-          <a:solidFill>
-            <a:srgbClr val="FFD000"/>
-          </a:solidFill>
-          <a:ln>
-            <a:noFill/>
-          </a:ln>
-        </p:spPr>
-        <p:style>
-          <a:lnRef idx="1">
-            <a:schemeClr val="accent1"/>
-          </a:lnRef>
-          <a:fillRef idx="3">
-            <a:schemeClr val="accent1"/>
-          </a:fillRef>
-          <a:effectRef idx="2">
-            <a:schemeClr val="accent1"/>
-          </a:effectRef>
-          <a:fontRef idx="minor">
-            <a:schemeClr val="lt1"/>
-          </a:fontRef>
-        </p:style>
-        <p:txBody>
-          <a:bodyPr rtlCol="0" anchor="ctr"/>
-          <a:lstStyle/>
-          <a:p>
-            <a:pPr algn="ctr"/>
-          </a:p>
-        </p:txBody>
-      </p:sp>
-      <p:pic>
-        <p:nvPicPr>
-          <p:cNvPr id="14" name="Picture 13" descr="oracle_livesql.png"/>
-          <p:cNvPicPr>
-            <a:picLocks noChangeAspect="1"/>
-          </p:cNvPicPr>
-          <p:nvPr/>
-        </p:nvPicPr>
-        <p:blipFill>
-          <a:blip r:embed="rId3"/>
-          <a:stretch>
-            <a:fillRect/>
-          </a:stretch>
-        </p:blipFill>
-        <p:spPr>
-          <a:xfrm>
-            <a:off x="5469483" y="1847087"/>
-            <a:ext cx="1252728" cy="1252728"/>
-          </a:xfrm>
-          <a:prstGeom prst="rect">
-            <a:avLst/>
-          </a:prstGeom>
-        </p:spPr>
-      </p:pic>
-      <p:sp>
-        <p:nvSpPr>
-          <p:cNvPr id="15" name="TextBox 14"/>
+              <a:t>Clase 10 · Control de concurrencia · VetCare</a:t>
+            </a:r>
+          </a:p>
+        </p:txBody>
+      </p:sp>
+      <p:sp>
+        <p:nvSpPr>
+          <p:cNvPr id="5" name="TextBox 4"/>
           <p:cNvSpPr txBox="1"/>
           <p:nvPr/>
         </p:nvSpPr>
         <p:spPr>
           <a:xfrm>
-            <a:off x="4356506" y="3191256"/>
-            <a:ext cx="3478682" cy="621792"/>
-          </a:xfrm>
-          <a:prstGeom prst="rect">
-            <a:avLst/>
-          </a:prstGeom>
-          <a:noFill/>
-        </p:spPr>
-        <p:txBody>
-          <a:bodyPr wrap="square" anchor="t"/>
-          <a:lstStyle/>
-          <a:p>
-            <a:pPr algn="ctr"/>
-            <a:r>
-              <a:rPr sz="1300" b="1" i="0">
-                <a:solidFill>
-                  <a:srgbClr val="095292"/>
-                </a:solidFill>
-                <a:latin typeface="Calibri"/>
-              </a:rPr>
-              <a:t>Oracle Live SQL</a:t>
-            </a:r>
-          </a:p>
-          <a:p>
-            <a:pPr algn="ctr">
-              <a:spcBef>
-                <a:spcPts val="200"/>
-              </a:spcBef>
-            </a:pPr>
-            <a:r>
-              <a:rPr sz="1000" b="0" i="0">
-                <a:solidFill>
-                  <a:srgbClr val="666666"/>
-                </a:solidFill>
-                <a:latin typeface="Calibri"/>
-              </a:rPr>
-              <a:t>Demo SQL</a:t>
-            </a:r>
-          </a:p>
-        </p:txBody>
-      </p:sp>
-      <p:sp>
-        <p:nvSpPr>
-          <p:cNvPr id="16" name="Rounded Rectangle 15"/>
-          <p:cNvSpPr/>
-          <p:nvPr/>
-        </p:nvSpPr>
-        <p:spPr>
-          <a:xfrm>
-            <a:off x="8109508" y="1591056"/>
-            <a:ext cx="3624986" cy="2331720"/>
-          </a:xfrm>
-          <a:prstGeom prst="roundRect">
-            <a:avLst>
-              <a:gd name="adj" fmla="val 12000"/>
-            </a:avLst>
-          </a:prstGeom>
-          <a:solidFill>
-            <a:srgbClr val="F2F2F2"/>
-          </a:solidFill>
-          <a:ln>
-            <a:noFill/>
-          </a:ln>
-        </p:spPr>
-        <p:style>
-          <a:lnRef idx="1">
-            <a:schemeClr val="accent1"/>
-          </a:lnRef>
-          <a:fillRef idx="3">
-            <a:schemeClr val="accent1"/>
-          </a:fillRef>
-          <a:effectRef idx="2">
-            <a:schemeClr val="accent1"/>
-          </a:effectRef>
-          <a:fontRef idx="minor">
-            <a:schemeClr val="lt1"/>
-          </a:fontRef>
-        </p:style>
-        <p:txBody>
-          <a:bodyPr rtlCol="0" anchor="ctr"/>
-          <a:lstStyle/>
-          <a:p>
-            <a:pPr algn="ctr"/>
-          </a:p>
-        </p:txBody>
-      </p:sp>
-      <p:sp>
-        <p:nvSpPr>
-          <p:cNvPr id="17" name="Rectangle 16"/>
-          <p:cNvSpPr/>
-          <p:nvPr/>
-        </p:nvSpPr>
-        <p:spPr>
-          <a:xfrm>
-            <a:off x="8109508" y="1591056"/>
-            <a:ext cx="3624986" cy="64008"/>
-          </a:xfrm>
-          <a:prstGeom prst="rect">
-            <a:avLst/>
-          </a:prstGeom>
-          <a:solidFill>
-            <a:srgbClr val="095292"/>
-          </a:solidFill>
-          <a:ln>
-            <a:noFill/>
-          </a:ln>
-        </p:spPr>
-        <p:style>
-          <a:lnRef idx="1">
-            <a:schemeClr val="accent1"/>
-          </a:lnRef>
-          <a:fillRef idx="3">
-            <a:schemeClr val="accent1"/>
-          </a:fillRef>
-          <a:effectRef idx="2">
-            <a:schemeClr val="accent1"/>
-          </a:effectRef>
-          <a:fontRef idx="minor">
-            <a:schemeClr val="lt1"/>
-          </a:fontRef>
-        </p:style>
-        <p:txBody>
-          <a:bodyPr rtlCol="0" anchor="ctr"/>
-          <a:lstStyle/>
-          <a:p>
-            <a:pPr algn="ctr"/>
-          </a:p>
-        </p:txBody>
-      </p:sp>
-      <p:sp>
-        <p:nvSpPr>
-          <p:cNvPr id="18" name="Rectangle 17"/>
-          <p:cNvSpPr/>
-          <p:nvPr/>
-        </p:nvSpPr>
-        <p:spPr>
-          <a:xfrm>
-            <a:off x="8109508" y="1655064"/>
-            <a:ext cx="3624986" cy="27432"/>
-          </a:xfrm>
-          <a:prstGeom prst="rect">
-            <a:avLst/>
-          </a:prstGeom>
-          <a:solidFill>
-            <a:srgbClr val="FFD000"/>
-          </a:solidFill>
-          <a:ln>
-            <a:noFill/>
-          </a:ln>
-        </p:spPr>
-        <p:style>
-          <a:lnRef idx="1">
-            <a:schemeClr val="accent1"/>
-          </a:lnRef>
-          <a:fillRef idx="3">
-            <a:schemeClr val="accent1"/>
-          </a:fillRef>
-          <a:effectRef idx="2">
-            <a:schemeClr val="accent1"/>
-          </a:effectRef>
-          <a:fontRef idx="minor">
-            <a:schemeClr val="lt1"/>
-          </a:fontRef>
-        </p:style>
-        <p:txBody>
-          <a:bodyPr rtlCol="0" anchor="ctr"/>
-          <a:lstStyle/>
-          <a:p>
-            <a:pPr algn="ctr"/>
-          </a:p>
-        </p:txBody>
-      </p:sp>
-      <p:pic>
-        <p:nvPicPr>
-          <p:cNvPr id="19" name="Picture 18" descr="dbfiddle.png"/>
-          <p:cNvPicPr>
-            <a:picLocks noChangeAspect="1"/>
-          </p:cNvPicPr>
-          <p:nvPr/>
-        </p:nvPicPr>
-        <p:blipFill>
-          <a:blip r:embed="rId4"/>
-          <a:stretch>
-            <a:fillRect/>
-          </a:stretch>
-        </p:blipFill>
-        <p:spPr>
-          <a:xfrm>
-            <a:off x="9295638" y="1847087"/>
-            <a:ext cx="1252728" cy="1252728"/>
-          </a:xfrm>
-          <a:prstGeom prst="rect">
-            <a:avLst/>
-          </a:prstGeom>
-        </p:spPr>
-      </p:pic>
-      <p:sp>
-        <p:nvSpPr>
-          <p:cNvPr id="20" name="TextBox 19"/>
-          <p:cNvSpPr txBox="1"/>
-          <p:nvPr/>
-        </p:nvSpPr>
-        <p:spPr>
-          <a:xfrm>
-            <a:off x="8182660" y="3191256"/>
-            <a:ext cx="3478682" cy="621792"/>
-          </a:xfrm>
-          <a:prstGeom prst="rect">
-            <a:avLst/>
-          </a:prstGeom>
-          <a:noFill/>
-        </p:spPr>
-        <p:txBody>
-          <a:bodyPr wrap="square" anchor="t"/>
-          <a:lstStyle/>
-          <a:p>
-            <a:pPr algn="ctr"/>
-            <a:r>
-              <a:rPr sz="1300" b="1" i="0">
-                <a:solidFill>
-                  <a:srgbClr val="095292"/>
-                </a:solidFill>
-                <a:latin typeface="Calibri"/>
-              </a:rPr>
-              <a:t>DB Fiddle</a:t>
-            </a:r>
-          </a:p>
-          <a:p>
-            <a:pPr algn="ctr">
-              <a:spcBef>
-                <a:spcPts val="200"/>
-              </a:spcBef>
-            </a:pPr>
-            <a:r>
-              <a:rPr sz="1000" b="0" i="0">
-                <a:solidFill>
-                  <a:srgbClr val="666666"/>
-                </a:solidFill>
-                <a:latin typeface="Calibri"/>
-              </a:rPr>
-              <a:t>Pruebas</a:t>
-            </a:r>
-          </a:p>
-        </p:txBody>
-      </p:sp>
-      <p:sp>
-        <p:nvSpPr>
-          <p:cNvPr id="21" name="TextBox 20"/>
-          <p:cNvSpPr txBox="1"/>
-          <p:nvPr/>
-        </p:nvSpPr>
-        <p:spPr>
-          <a:xfrm>
-            <a:off x="11185855" y="6473952"/>
-            <a:ext cx="640080" cy="274320"/>
+            <a:off x="457200" y="3017520"/>
+            <a:ext cx="11277295" cy="1645920"/>
           </a:xfrm>
           <a:prstGeom prst="rect">
             <a:avLst/>
@@ -10647,141 +10835,65 @@
           </a:bodyPr>
           <a:lstStyle/>
           <a:p>
-            <a:pPr algn="r"/>
-            <a:r>
-              <a:rPr sz="1100" b="0" i="0">
-                <a:solidFill>
-                  <a:srgbClr val="666666"/>
-                </a:solidFill>
-                <a:latin typeface="Calibri"/>
-              </a:rPr>
-              <a:t>27</a:t>
-            </a:r>
-          </a:p>
-        </p:txBody>
-      </p:sp>
-    </p:spTree>
-  </p:cSld>
-  <p:clrMapOvr>
-    <a:masterClrMapping/>
-  </p:clrMapOvr>
-</p:sld>
-</file>
-
-<file path=ppt/slides/slide28.xml><?xml version="1.0" encoding="utf-8"?>
-<p:sld xmlns:a="http://schemas.openxmlformats.org/drawingml/2006/main" xmlns:p="http://schemas.openxmlformats.org/presentationml/2006/main" xmlns:r="http://schemas.openxmlformats.org/officeDocument/2006/relationships">
-  <p:cSld>
-    <p:bg>
-      <p:bgPr>
-        <a:solidFill>
-          <a:srgbClr val="FFFFFF"/>
-        </a:solidFill>
-        <a:effectLst/>
-      </p:bgPr>
-    </p:bg>
-    <p:spTree>
-      <p:nvGrpSpPr>
-        <p:cNvPr id="1" name=""/>
-        <p:cNvGrpSpPr/>
-        <p:nvPr/>
-      </p:nvGrpSpPr>
-      <p:grpSpPr/>
-      <p:sp>
-        <p:nvSpPr>
-          <p:cNvPr id="2" name="Rectangle 1"/>
-          <p:cNvSpPr/>
-          <p:nvPr/>
-        </p:nvSpPr>
-        <p:spPr>
-          <a:xfrm>
-            <a:off x="0" y="0"/>
-            <a:ext cx="12191695" cy="960120"/>
-          </a:xfrm>
-          <a:prstGeom prst="rect">
-            <a:avLst/>
-          </a:prstGeom>
-          <a:solidFill>
-            <a:srgbClr val="095292"/>
-          </a:solidFill>
-          <a:ln>
-            <a:noFill/>
-          </a:ln>
-        </p:spPr>
-        <p:style>
-          <a:lnRef idx="1">
-            <a:schemeClr val="accent1"/>
-          </a:lnRef>
-          <a:fillRef idx="3">
-            <a:schemeClr val="accent1"/>
-          </a:fillRef>
-          <a:effectRef idx="2">
-            <a:schemeClr val="accent1"/>
-          </a:effectRef>
-          <a:fontRef idx="minor">
-            <a:schemeClr val="lt1"/>
-          </a:fontRef>
-        </p:style>
-        <p:txBody>
-          <a:bodyPr rtlCol="0" anchor="ctr"/>
-          <a:lstStyle/>
-          <a:p>
-            <a:pPr algn="ctr"/>
-          </a:p>
-        </p:txBody>
-      </p:sp>
-      <p:sp>
-        <p:nvSpPr>
-          <p:cNvPr id="3" name="Rectangle 2"/>
-          <p:cNvSpPr/>
-          <p:nvPr/>
-        </p:nvSpPr>
-        <p:spPr>
-          <a:xfrm>
-            <a:off x="0" y="960120"/>
-            <a:ext cx="12191695" cy="41148"/>
-          </a:xfrm>
-          <a:prstGeom prst="rect">
-            <a:avLst/>
-          </a:prstGeom>
-          <a:solidFill>
-            <a:srgbClr val="FFD000"/>
-          </a:solidFill>
-          <a:ln>
-            <a:noFill/>
-          </a:ln>
-        </p:spPr>
-        <p:style>
-          <a:lnRef idx="1">
-            <a:schemeClr val="accent1"/>
-          </a:lnRef>
-          <a:fillRef idx="3">
-            <a:schemeClr val="accent1"/>
-          </a:fillRef>
-          <a:effectRef idx="2">
-            <a:schemeClr val="accent1"/>
-          </a:effectRef>
-          <a:fontRef idx="minor">
-            <a:schemeClr val="lt1"/>
-          </a:fontRef>
-        </p:style>
-        <p:txBody>
-          <a:bodyPr rtlCol="0" anchor="ctr"/>
-          <a:lstStyle/>
-          <a:p>
-            <a:pPr algn="ctr"/>
-          </a:p>
-        </p:txBody>
-      </p:sp>
-      <p:sp>
-        <p:nvSpPr>
-          <p:cNvPr id="4" name="TextBox 3"/>
+            <a:pPr algn="ctr">
+              <a:spcAft>
+                <a:spcPts val="600"/>
+              </a:spcAft>
+            </a:pPr>
+            <a:r>
+              <a:rPr sz="1600" b="0" i="0">
+                <a:solidFill>
+                  <a:srgbClr val="333333"/>
+                </a:solidFill>
+                <a:latin typeface="Calibri"/>
+              </a:rPr>
+              <a:t>La transaccion como unidad de todo o nada</a:t>
+            </a:r>
+          </a:p>
+          <a:p>
+            <a:pPr algn="ctr">
+              <a:spcAft>
+                <a:spcPts val="600"/>
+              </a:spcAft>
+            </a:pPr>
+            <a:r>
+              <a:rPr sz="1600" b="0" i="0">
+                <a:solidFill>
+                  <a:srgbClr val="333333"/>
+                </a:solidFill>
+                <a:latin typeface="Calibri"/>
+              </a:rPr>
+              <a:t>Serializar de verdad existe, y cuesta</a:t>
+            </a:r>
+          </a:p>
+          <a:p>
+            <a:pPr algn="ctr">
+              <a:spcAft>
+                <a:spcPts val="600"/>
+              </a:spcAft>
+            </a:pPr>
+            <a:r>
+              <a:rPr sz="1600" b="0" i="0">
+                <a:solidFill>
+                  <a:srgbClr val="333333"/>
+                </a:solidFill>
+                <a:latin typeface="Calibri"/>
+              </a:rPr>
+              <a:t>Los tres fenomenos indeseables, en escenas de la clinica</a:t>
+            </a:r>
+          </a:p>
+        </p:txBody>
+      </p:sp>
+      <p:sp>
+        <p:nvSpPr>
+          <p:cNvPr id="6" name="TextBox 5"/>
           <p:cNvSpPr txBox="1"/>
           <p:nvPr/>
         </p:nvSpPr>
         <p:spPr>
           <a:xfrm>
-            <a:off x="457200" y="164592"/>
-            <a:ext cx="11277295" cy="502920"/>
+            <a:off x="457200" y="4754880"/>
+            <a:ext cx="11277295" cy="640080"/>
           </a:xfrm>
           <a:prstGeom prst="rect">
             <a:avLst/>
@@ -10794,530 +10906,15 @@
           </a:bodyPr>
           <a:lstStyle/>
           <a:p>
-            <a:r>
-              <a:rPr sz="2600" b="1" i="0">
-                <a:solidFill>
-                  <a:srgbClr val="FFFFFF"/>
-                </a:solidFill>
-                <a:latin typeface="Calibri"/>
-              </a:rPr>
-              <a:t>Actividad autonoma — contexto / por que importa</a:t>
-            </a:r>
-          </a:p>
-        </p:txBody>
-      </p:sp>
-      <p:sp>
-        <p:nvSpPr>
-          <p:cNvPr id="5" name="TextBox 4"/>
-          <p:cNvSpPr txBox="1"/>
-          <p:nvPr/>
-        </p:nvSpPr>
-        <p:spPr>
-          <a:xfrm>
-            <a:off x="457200" y="1170432"/>
-            <a:ext cx="11277295" cy="5230368"/>
-          </a:xfrm>
-          <a:prstGeom prst="rect">
-            <a:avLst/>
-          </a:prstGeom>
-          <a:noFill/>
-        </p:spPr>
-        <p:txBody>
-          <a:bodyPr wrap="square">
-            <a:spAutoFit/>
-          </a:bodyPr>
-          <a:lstStyle/>
-          <a:p>
-            <a:pPr>
-              <a:spcAft>
-                <a:spcPts val="800"/>
-              </a:spcAft>
-            </a:pPr>
-            <a:r>
-              <a:rPr sz="2000" b="0" i="0">
-                <a:solidFill>
-                  <a:srgbClr val="333333"/>
-                </a:solidFill>
-                <a:latin typeface="Calibri"/>
-              </a:rPr>
-              <a:t>–   </a:t>
-            </a:r>
+            <a:pPr algn="ctr"/>
             <a:r>
               <a:rPr sz="2000" b="1" i="0">
                 <a:solidFill>
-                  <a:srgbClr val="333333"/>
-                </a:solidFill>
-                <a:latin typeface="Calibri"/>
-              </a:rPr>
-              <a:t>Por qué importa al PI:</a:t>
-            </a:r>
-            <a:r>
-              <a:rPr sz="2000" b="0" i="0">
-                <a:solidFill>
-                  <a:srgbClr val="333333"/>
-                </a:solidFill>
-                <a:latin typeface="Calibri"/>
-              </a:rPr>
-              <a:t> doble reserva y stock negativo.</a:t>
-            </a:r>
-          </a:p>
-          <a:p>
-            <a:pPr>
-              <a:spcAft>
-                <a:spcPts val="800"/>
-              </a:spcAft>
-            </a:pPr>
-            <a:r>
-              <a:rPr sz="2000" b="0" i="0">
-                <a:solidFill>
-                  <a:srgbClr val="333333"/>
-                </a:solidFill>
-                <a:latin typeface="Calibri"/>
-              </a:rPr>
-              <a:t>–   Autónoma: escenarios + mitigacion SQL.</a:t>
-            </a:r>
-          </a:p>
-        </p:txBody>
-      </p:sp>
-      <p:sp>
-        <p:nvSpPr>
-          <p:cNvPr id="6" name="TextBox 5"/>
-          <p:cNvSpPr txBox="1"/>
-          <p:nvPr/>
-        </p:nvSpPr>
-        <p:spPr>
-          <a:xfrm>
-            <a:off x="11185855" y="6473952"/>
-            <a:ext cx="640080" cy="274320"/>
-          </a:xfrm>
-          <a:prstGeom prst="rect">
-            <a:avLst/>
-          </a:prstGeom>
-          <a:noFill/>
-        </p:spPr>
-        <p:txBody>
-          <a:bodyPr wrap="square">
-            <a:spAutoFit/>
-          </a:bodyPr>
-          <a:lstStyle/>
-          <a:p>
-            <a:pPr algn="r"/>
-            <a:r>
-              <a:rPr sz="1100" b="0" i="0">
-                <a:solidFill>
-                  <a:srgbClr val="666666"/>
-                </a:solidFill>
-                <a:latin typeface="Calibri"/>
-              </a:rPr>
-              <a:t>28</a:t>
-            </a:r>
-          </a:p>
-        </p:txBody>
-      </p:sp>
-    </p:spTree>
-  </p:cSld>
-  <p:clrMapOvr>
-    <a:masterClrMapping/>
-  </p:clrMapOvr>
-</p:sld>
-</file>
-
-<file path=ppt/slides/slide29.xml><?xml version="1.0" encoding="utf-8"?>
-<p:sld xmlns:a="http://schemas.openxmlformats.org/drawingml/2006/main" xmlns:p="http://schemas.openxmlformats.org/presentationml/2006/main" xmlns:r="http://schemas.openxmlformats.org/officeDocument/2006/relationships">
-  <p:cSld>
-    <p:bg>
-      <p:bgPr>
-        <a:solidFill>
-          <a:srgbClr val="FFFFFF"/>
-        </a:solidFill>
-        <a:effectLst/>
-      </p:bgPr>
-    </p:bg>
-    <p:spTree>
-      <p:nvGrpSpPr>
-        <p:cNvPr id="1" name=""/>
-        <p:cNvGrpSpPr/>
-        <p:nvPr/>
-      </p:nvGrpSpPr>
-      <p:grpSpPr/>
-      <p:sp>
-        <p:nvSpPr>
-          <p:cNvPr id="2" name="Rectangle 1"/>
-          <p:cNvSpPr/>
-          <p:nvPr/>
-        </p:nvSpPr>
-        <p:spPr>
-          <a:xfrm>
-            <a:off x="0" y="0"/>
-            <a:ext cx="12191695" cy="960120"/>
-          </a:xfrm>
-          <a:prstGeom prst="rect">
-            <a:avLst/>
-          </a:prstGeom>
-          <a:solidFill>
-            <a:srgbClr val="095292"/>
-          </a:solidFill>
-          <a:ln>
-            <a:noFill/>
-          </a:ln>
-        </p:spPr>
-        <p:style>
-          <a:lnRef idx="1">
-            <a:schemeClr val="accent1"/>
-          </a:lnRef>
-          <a:fillRef idx="3">
-            <a:schemeClr val="accent1"/>
-          </a:fillRef>
-          <a:effectRef idx="2">
-            <a:schemeClr val="accent1"/>
-          </a:effectRef>
-          <a:fontRef idx="minor">
-            <a:schemeClr val="lt1"/>
-          </a:fontRef>
-        </p:style>
-        <p:txBody>
-          <a:bodyPr rtlCol="0" anchor="ctr"/>
-          <a:lstStyle/>
-          <a:p>
-            <a:pPr algn="ctr"/>
-          </a:p>
-        </p:txBody>
-      </p:sp>
-      <p:sp>
-        <p:nvSpPr>
-          <p:cNvPr id="3" name="Rectangle 2"/>
-          <p:cNvSpPr/>
-          <p:nvPr/>
-        </p:nvSpPr>
-        <p:spPr>
-          <a:xfrm>
-            <a:off x="0" y="960120"/>
-            <a:ext cx="12191695" cy="41148"/>
-          </a:xfrm>
-          <a:prstGeom prst="rect">
-            <a:avLst/>
-          </a:prstGeom>
-          <a:solidFill>
-            <a:srgbClr val="FFD000"/>
-          </a:solidFill>
-          <a:ln>
-            <a:noFill/>
-          </a:ln>
-        </p:spPr>
-        <p:style>
-          <a:lnRef idx="1">
-            <a:schemeClr val="accent1"/>
-          </a:lnRef>
-          <a:fillRef idx="3">
-            <a:schemeClr val="accent1"/>
-          </a:fillRef>
-          <a:effectRef idx="2">
-            <a:schemeClr val="accent1"/>
-          </a:effectRef>
-          <a:fontRef idx="minor">
-            <a:schemeClr val="lt1"/>
-          </a:fontRef>
-        </p:style>
-        <p:txBody>
-          <a:bodyPr rtlCol="0" anchor="ctr"/>
-          <a:lstStyle/>
-          <a:p>
-            <a:pPr algn="ctr"/>
-          </a:p>
-        </p:txBody>
-      </p:sp>
-      <p:sp>
-        <p:nvSpPr>
-          <p:cNvPr id="4" name="TextBox 3"/>
-          <p:cNvSpPr txBox="1"/>
-          <p:nvPr/>
-        </p:nvSpPr>
-        <p:spPr>
-          <a:xfrm>
-            <a:off x="457200" y="164592"/>
-            <a:ext cx="11277295" cy="502920"/>
-          </a:xfrm>
-          <a:prstGeom prst="rect">
-            <a:avLst/>
-          </a:prstGeom>
-          <a:noFill/>
-        </p:spPr>
-        <p:txBody>
-          <a:bodyPr wrap="square">
-            <a:spAutoFit/>
-          </a:bodyPr>
-          <a:lstStyle/>
-          <a:p>
-            <a:r>
-              <a:rPr sz="2600" b="1" i="0">
-                <a:solidFill>
-                  <a:srgbClr val="FFFFFF"/>
-                </a:solidFill>
-                <a:latin typeface="Calibri"/>
-              </a:rPr>
-              <a:t>Actividad autonoma — objetivo y criterios</a:t>
-            </a:r>
-          </a:p>
-        </p:txBody>
-      </p:sp>
-      <p:sp>
-        <p:nvSpPr>
-          <p:cNvPr id="5" name="TextBox 4"/>
-          <p:cNvSpPr txBox="1"/>
-          <p:nvPr/>
-        </p:nvSpPr>
-        <p:spPr>
-          <a:xfrm>
-            <a:off x="457200" y="1170432"/>
-            <a:ext cx="11277295" cy="5230368"/>
-          </a:xfrm>
-          <a:prstGeom prst="rect">
-            <a:avLst/>
-          </a:prstGeom>
-          <a:noFill/>
-        </p:spPr>
-        <p:txBody>
-          <a:bodyPr wrap="square">
-            <a:spAutoFit/>
-          </a:bodyPr>
-          <a:lstStyle/>
-          <a:p>
-            <a:pPr>
-              <a:spcAft>
-                <a:spcPts val="800"/>
-              </a:spcAft>
-            </a:pPr>
-            <a:r>
-              <a:rPr sz="2000" b="0" i="0">
-                <a:solidFill>
-                  <a:srgbClr val="333333"/>
-                </a:solidFill>
-                <a:latin typeface="Calibri"/>
-              </a:rPr>
-              <a:t>–   </a:t>
-            </a:r>
-            <a:r>
-              <a:rPr sz="2000" b="1" i="0">
-                <a:solidFill>
-                  <a:srgbClr val="333333"/>
-                </a:solidFill>
-                <a:latin typeface="Calibri"/>
-              </a:rPr>
-              <a:t>Objetivo:</a:t>
-            </a:r>
-            <a:r>
-              <a:rPr sz="2000" b="0" i="0">
-                <a:solidFill>
-                  <a:srgbClr val="333333"/>
-                </a:solidFill>
-                <a:latin typeface="Calibri"/>
-              </a:rPr>
-              <a:t> 2 escenarios concurrencia T1/T2 + mitigacion.</a:t>
-            </a:r>
-          </a:p>
-          <a:p>
-            <a:pPr>
-              <a:spcAft>
-                <a:spcPts val="800"/>
-              </a:spcAft>
-            </a:pPr>
-            <a:r>
-              <a:rPr sz="2000" b="0" i="0">
-                <a:solidFill>
-                  <a:srgbClr val="333333"/>
-                </a:solidFill>
-                <a:latin typeface="Calibri"/>
-              </a:rPr>
-              <a:t>–   </a:t>
-            </a:r>
-            <a:r>
-              <a:rPr sz="2000" b="1" i="0">
-                <a:solidFill>
-                  <a:srgbClr val="333333"/>
-                </a:solidFill>
-                <a:latin typeface="Calibri"/>
-              </a:rPr>
-              <a:t>Exito:</a:t>
-            </a:r>
-            <a:r>
-              <a:rPr sz="2000" b="0" i="0">
-                <a:solidFill>
-                  <a:srgbClr val="333333"/>
-                </a:solidFill>
-                <a:latin typeface="Calibri"/>
-              </a:rPr>
-              <a:t> Doble reserva.</a:t>
-            </a:r>
-          </a:p>
-          <a:p>
-            <a:pPr>
-              <a:spcAft>
-                <a:spcPts val="800"/>
-              </a:spcAft>
-            </a:pPr>
-            <a:r>
-              <a:rPr sz="2000" b="0" i="0">
-                <a:solidFill>
-                  <a:srgbClr val="333333"/>
-                </a:solidFill>
-                <a:latin typeface="Calibri"/>
-              </a:rPr>
-              <a:t>–   </a:t>
-            </a:r>
-            <a:r>
-              <a:rPr sz="2000" b="1" i="0">
-                <a:solidFill>
-                  <a:srgbClr val="333333"/>
-                </a:solidFill>
-                <a:latin typeface="Calibri"/>
-              </a:rPr>
-              <a:t>Exito:</a:t>
-            </a:r>
-            <a:r>
-              <a:rPr sz="2000" b="0" i="0">
-                <a:solidFill>
-                  <a:srgbClr val="333333"/>
-                </a:solidFill>
-                <a:latin typeface="Calibri"/>
-              </a:rPr>
-              <a:t> Doble stock.</a:t>
-            </a:r>
-          </a:p>
-          <a:p>
-            <a:pPr>
-              <a:spcAft>
-                <a:spcPts val="800"/>
-              </a:spcAft>
-            </a:pPr>
-            <a:r>
-              <a:rPr sz="2000" b="0" i="0">
-                <a:solidFill>
-                  <a:srgbClr val="333333"/>
-                </a:solidFill>
-                <a:latin typeface="Calibri"/>
-              </a:rPr>
-              <a:t>–   </a:t>
-            </a:r>
-            <a:r>
-              <a:rPr sz="2000" b="1" i="0">
-                <a:solidFill>
-                  <a:srgbClr val="333333"/>
-                </a:solidFill>
-                <a:latin typeface="Calibri"/>
-              </a:rPr>
-              <a:t>Exito:</a:t>
-            </a:r>
-            <a:r>
-              <a:rPr sz="2000" b="0" i="0">
-                <a:solidFill>
-                  <a:srgbClr val="333333"/>
-                </a:solidFill>
-                <a:latin typeface="Calibri"/>
-              </a:rPr>
-              <a:t> Mitigacion SQL.</a:t>
-            </a:r>
-          </a:p>
-          <a:p>
-            <a:pPr>
-              <a:spcAft>
-                <a:spcPts val="800"/>
-              </a:spcAft>
-            </a:pPr>
-            <a:r>
-              <a:rPr sz="2000" b="0" i="0">
-                <a:solidFill>
-                  <a:srgbClr val="333333"/>
-                </a:solidFill>
-                <a:latin typeface="Calibri"/>
-              </a:rPr>
-              <a:t>–   </a:t>
-            </a:r>
-            <a:r>
-              <a:rPr sz="2000" b="1" i="0">
-                <a:solidFill>
-                  <a:srgbClr val="333333"/>
-                </a:solidFill>
-                <a:latin typeface="Calibri"/>
-              </a:rPr>
-              <a:t>Exito:</a:t>
-            </a:r>
-            <a:r>
-              <a:rPr sz="2000" b="0" i="0">
-                <a:solidFill>
-                  <a:srgbClr val="333333"/>
-                </a:solidFill>
-                <a:latin typeface="Calibri"/>
-              </a:rPr>
-              <a:t> Sección informe.</a:t>
-            </a:r>
-          </a:p>
-          <a:p>
-            <a:pPr>
-              <a:spcAft>
-                <a:spcPts val="800"/>
-              </a:spcAft>
-            </a:pPr>
-            <a:r>
-              <a:rPr sz="2000" b="0" i="0">
-                <a:solidFill>
-                  <a:srgbClr val="333333"/>
-                </a:solidFill>
-                <a:latin typeface="Calibri"/>
-              </a:rPr>
-              <a:t>–   </a:t>
-            </a:r>
-            <a:r>
-              <a:rPr sz="2000" b="1" i="0">
-                <a:solidFill>
-                  <a:srgbClr val="333333"/>
-                </a:solidFill>
-                <a:latin typeface="Calibri"/>
-              </a:rPr>
-              <a:t>Exito:</a:t>
-            </a:r>
-            <a:r>
-              <a:rPr sz="2000" b="0" i="0">
-                <a:solidFill>
-                  <a:srgbClr val="333333"/>
-                </a:solidFill>
-                <a:latin typeface="Calibri"/>
-              </a:rPr>
-              <a:t> en la fecha que indique el docente.</a:t>
-            </a:r>
-          </a:p>
-        </p:txBody>
-      </p:sp>
-      <p:sp>
-        <p:nvSpPr>
-          <p:cNvPr id="6" name="TextBox 5"/>
-          <p:cNvSpPr txBox="1"/>
-          <p:nvPr/>
-        </p:nvSpPr>
-        <p:spPr>
-          <a:xfrm>
-            <a:off x="11185855" y="6473952"/>
-            <a:ext cx="640080" cy="274320"/>
-          </a:xfrm>
-          <a:prstGeom prst="rect">
-            <a:avLst/>
-          </a:prstGeom>
-          <a:noFill/>
-        </p:spPr>
-        <p:txBody>
-          <a:bodyPr wrap="square">
-            <a:spAutoFit/>
-          </a:bodyPr>
-          <a:lstStyle/>
-          <a:p>
-            <a:pPr algn="r"/>
-            <a:r>
-              <a:rPr sz="1100" b="0" i="0">
-                <a:solidFill>
-                  <a:srgbClr val="666666"/>
-                </a:solidFill>
-                <a:latin typeface="Calibri"/>
-              </a:rPr>
-              <a:t>29</a:t>
+                  <a:srgbClr val="269CCB"/>
+                </a:solidFill>
+                <a:latin typeface="Calibri"/>
+              </a:rPr>
+              <a:t>Todo lo visto queda proyectado para repasar</a:t>
             </a:r>
           </a:p>
         </p:txBody>
@@ -11966,7 +11563,7 @@
                 </a:solidFill>
                 <a:latin typeface="Calibri"/>
               </a:rPr>
-              <a:t>Taller guiado = tarea del PI</a:t>
+              <a:t>Práctica (opcional, guía en la carpeta)</a:t>
             </a:r>
           </a:p>
         </p:txBody>
@@ -12081,7 +11678,7 @@
                 </a:solidFill>
                 <a:latin typeface="Calibri"/>
               </a:rPr>
-              <a:t>Criterios de exito · cierre · dudas del PI</a:t>
+              <a:t>Cierre conceptual · dudas</a:t>
             </a:r>
           </a:p>
         </p:txBody>
@@ -12170,2850 +11767,6 @@
                 <a:latin typeface="Calibri"/>
               </a:rPr>
               <a:t>3</a:t>
-            </a:r>
-          </a:p>
-        </p:txBody>
-      </p:sp>
-    </p:spTree>
-  </p:cSld>
-  <p:clrMapOvr>
-    <a:masterClrMapping/>
-  </p:clrMapOvr>
-</p:sld>
-</file>
-
-<file path=ppt/slides/slide30.xml><?xml version="1.0" encoding="utf-8"?>
-<p:sld xmlns:a="http://schemas.openxmlformats.org/drawingml/2006/main" xmlns:p="http://schemas.openxmlformats.org/presentationml/2006/main" xmlns:r="http://schemas.openxmlformats.org/officeDocument/2006/relationships">
-  <p:cSld>
-    <p:bg>
-      <p:bgPr>
-        <a:solidFill>
-          <a:srgbClr val="FFFFFF"/>
-        </a:solidFill>
-        <a:effectLst/>
-      </p:bgPr>
-    </p:bg>
-    <p:spTree>
-      <p:nvGrpSpPr>
-        <p:cNvPr id="1" name=""/>
-        <p:cNvGrpSpPr/>
-        <p:nvPr/>
-      </p:nvGrpSpPr>
-      <p:grpSpPr/>
-      <p:sp>
-        <p:nvSpPr>
-          <p:cNvPr id="2" name="Rectangle 1"/>
-          <p:cNvSpPr/>
-          <p:nvPr/>
-        </p:nvSpPr>
-        <p:spPr>
-          <a:xfrm>
-            <a:off x="0" y="0"/>
-            <a:ext cx="12191695" cy="960120"/>
-          </a:xfrm>
-          <a:prstGeom prst="rect">
-            <a:avLst/>
-          </a:prstGeom>
-          <a:solidFill>
-            <a:srgbClr val="095292"/>
-          </a:solidFill>
-          <a:ln>
-            <a:noFill/>
-          </a:ln>
-        </p:spPr>
-        <p:style>
-          <a:lnRef idx="1">
-            <a:schemeClr val="accent1"/>
-          </a:lnRef>
-          <a:fillRef idx="3">
-            <a:schemeClr val="accent1"/>
-          </a:fillRef>
-          <a:effectRef idx="2">
-            <a:schemeClr val="accent1"/>
-          </a:effectRef>
-          <a:fontRef idx="minor">
-            <a:schemeClr val="lt1"/>
-          </a:fontRef>
-        </p:style>
-        <p:txBody>
-          <a:bodyPr rtlCol="0" anchor="ctr"/>
-          <a:lstStyle/>
-          <a:p>
-            <a:pPr algn="ctr"/>
-          </a:p>
-        </p:txBody>
-      </p:sp>
-      <p:sp>
-        <p:nvSpPr>
-          <p:cNvPr id="3" name="Rectangle 2"/>
-          <p:cNvSpPr/>
-          <p:nvPr/>
-        </p:nvSpPr>
-        <p:spPr>
-          <a:xfrm>
-            <a:off x="0" y="960120"/>
-            <a:ext cx="12191695" cy="41148"/>
-          </a:xfrm>
-          <a:prstGeom prst="rect">
-            <a:avLst/>
-          </a:prstGeom>
-          <a:solidFill>
-            <a:srgbClr val="FFD000"/>
-          </a:solidFill>
-          <a:ln>
-            <a:noFill/>
-          </a:ln>
-        </p:spPr>
-        <p:style>
-          <a:lnRef idx="1">
-            <a:schemeClr val="accent1"/>
-          </a:lnRef>
-          <a:fillRef idx="3">
-            <a:schemeClr val="accent1"/>
-          </a:fillRef>
-          <a:effectRef idx="2">
-            <a:schemeClr val="accent1"/>
-          </a:effectRef>
-          <a:fontRef idx="minor">
-            <a:schemeClr val="lt1"/>
-          </a:fontRef>
-        </p:style>
-        <p:txBody>
-          <a:bodyPr rtlCol="0" anchor="ctr"/>
-          <a:lstStyle/>
-          <a:p>
-            <a:pPr algn="ctr"/>
-          </a:p>
-        </p:txBody>
-      </p:sp>
-      <p:sp>
-        <p:nvSpPr>
-          <p:cNvPr id="4" name="TextBox 3"/>
-          <p:cNvSpPr txBox="1"/>
-          <p:nvPr/>
-        </p:nvSpPr>
-        <p:spPr>
-          <a:xfrm>
-            <a:off x="457200" y="164592"/>
-            <a:ext cx="11277295" cy="502920"/>
-          </a:xfrm>
-          <a:prstGeom prst="rect">
-            <a:avLst/>
-          </a:prstGeom>
-          <a:noFill/>
-        </p:spPr>
-        <p:txBody>
-          <a:bodyPr wrap="square">
-            <a:spAutoFit/>
-          </a:bodyPr>
-          <a:lstStyle/>
-          <a:p>
-            <a:r>
-              <a:rPr sz="2600" b="1" i="0">
-                <a:solidFill>
-                  <a:srgbClr val="FFFFFF"/>
-                </a:solidFill>
-                <a:latin typeface="Calibri"/>
-              </a:rPr>
-              <a:t>Actividad autonoma — escenario / datos de partida</a:t>
-            </a:r>
-          </a:p>
-        </p:txBody>
-      </p:sp>
-      <p:sp>
-        <p:nvSpPr>
-          <p:cNvPr id="5" name="TextBox 4"/>
-          <p:cNvSpPr txBox="1"/>
-          <p:nvPr/>
-        </p:nvSpPr>
-        <p:spPr>
-          <a:xfrm>
-            <a:off x="457200" y="1170432"/>
-            <a:ext cx="11277295" cy="5230368"/>
-          </a:xfrm>
-          <a:prstGeom prst="rect">
-            <a:avLst/>
-          </a:prstGeom>
-          <a:noFill/>
-        </p:spPr>
-        <p:txBody>
-          <a:bodyPr wrap="square">
-            <a:spAutoFit/>
-          </a:bodyPr>
-          <a:lstStyle/>
-          <a:p>
-            <a:pPr>
-              <a:spcAft>
-                <a:spcPts val="800"/>
-              </a:spcAft>
-            </a:pPr>
-            <a:r>
-              <a:rPr sz="2000" b="0" i="0">
-                <a:solidFill>
-                  <a:srgbClr val="333333"/>
-                </a:solidFill>
-                <a:latin typeface="Calibri"/>
-              </a:rPr>
-              <a:t>–   Narrar T1/T2 sobre Cita/Insumo.</a:t>
-            </a:r>
-          </a:p>
-        </p:txBody>
-      </p:sp>
-      <p:sp>
-        <p:nvSpPr>
-          <p:cNvPr id="6" name="TextBox 5"/>
-          <p:cNvSpPr txBox="1"/>
-          <p:nvPr/>
-        </p:nvSpPr>
-        <p:spPr>
-          <a:xfrm>
-            <a:off x="11185855" y="6473952"/>
-            <a:ext cx="640080" cy="274320"/>
-          </a:xfrm>
-          <a:prstGeom prst="rect">
-            <a:avLst/>
-          </a:prstGeom>
-          <a:noFill/>
-        </p:spPr>
-        <p:txBody>
-          <a:bodyPr wrap="square">
-            <a:spAutoFit/>
-          </a:bodyPr>
-          <a:lstStyle/>
-          <a:p>
-            <a:pPr algn="r"/>
-            <a:r>
-              <a:rPr sz="1100" b="0" i="0">
-                <a:solidFill>
-                  <a:srgbClr val="666666"/>
-                </a:solidFill>
-                <a:latin typeface="Calibri"/>
-              </a:rPr>
-              <a:t>30</a:t>
-            </a:r>
-          </a:p>
-        </p:txBody>
-      </p:sp>
-    </p:spTree>
-  </p:cSld>
-  <p:clrMapOvr>
-    <a:masterClrMapping/>
-  </p:clrMapOvr>
-</p:sld>
-</file>
-
-<file path=ppt/slides/slide31.xml><?xml version="1.0" encoding="utf-8"?>
-<p:sld xmlns:a="http://schemas.openxmlformats.org/drawingml/2006/main" xmlns:p="http://schemas.openxmlformats.org/presentationml/2006/main" xmlns:r="http://schemas.openxmlformats.org/officeDocument/2006/relationships">
-  <p:cSld>
-    <p:bg>
-      <p:bgPr>
-        <a:solidFill>
-          <a:srgbClr val="FFFFFF"/>
-        </a:solidFill>
-        <a:effectLst/>
-      </p:bgPr>
-    </p:bg>
-    <p:spTree>
-      <p:nvGrpSpPr>
-        <p:cNvPr id="1" name=""/>
-        <p:cNvGrpSpPr/>
-        <p:nvPr/>
-      </p:nvGrpSpPr>
-      <p:grpSpPr/>
-      <p:sp>
-        <p:nvSpPr>
-          <p:cNvPr id="2" name="Rectangle 1"/>
-          <p:cNvSpPr/>
-          <p:nvPr/>
-        </p:nvSpPr>
-        <p:spPr>
-          <a:xfrm>
-            <a:off x="0" y="0"/>
-            <a:ext cx="12191695" cy="960120"/>
-          </a:xfrm>
-          <a:prstGeom prst="rect">
-            <a:avLst/>
-          </a:prstGeom>
-          <a:solidFill>
-            <a:srgbClr val="095292"/>
-          </a:solidFill>
-          <a:ln>
-            <a:noFill/>
-          </a:ln>
-        </p:spPr>
-        <p:style>
-          <a:lnRef idx="1">
-            <a:schemeClr val="accent1"/>
-          </a:lnRef>
-          <a:fillRef idx="3">
-            <a:schemeClr val="accent1"/>
-          </a:fillRef>
-          <a:effectRef idx="2">
-            <a:schemeClr val="accent1"/>
-          </a:effectRef>
-          <a:fontRef idx="minor">
-            <a:schemeClr val="lt1"/>
-          </a:fontRef>
-        </p:style>
-        <p:txBody>
-          <a:bodyPr rtlCol="0" anchor="ctr"/>
-          <a:lstStyle/>
-          <a:p>
-            <a:pPr algn="ctr"/>
-          </a:p>
-        </p:txBody>
-      </p:sp>
-      <p:sp>
-        <p:nvSpPr>
-          <p:cNvPr id="3" name="Rectangle 2"/>
-          <p:cNvSpPr/>
-          <p:nvPr/>
-        </p:nvSpPr>
-        <p:spPr>
-          <a:xfrm>
-            <a:off x="0" y="960120"/>
-            <a:ext cx="12191695" cy="41148"/>
-          </a:xfrm>
-          <a:prstGeom prst="rect">
-            <a:avLst/>
-          </a:prstGeom>
-          <a:solidFill>
-            <a:srgbClr val="FFD000"/>
-          </a:solidFill>
-          <a:ln>
-            <a:noFill/>
-          </a:ln>
-        </p:spPr>
-        <p:style>
-          <a:lnRef idx="1">
-            <a:schemeClr val="accent1"/>
-          </a:lnRef>
-          <a:fillRef idx="3">
-            <a:schemeClr val="accent1"/>
-          </a:fillRef>
-          <a:effectRef idx="2">
-            <a:schemeClr val="accent1"/>
-          </a:effectRef>
-          <a:fontRef idx="minor">
-            <a:schemeClr val="lt1"/>
-          </a:fontRef>
-        </p:style>
-        <p:txBody>
-          <a:bodyPr rtlCol="0" anchor="ctr"/>
-          <a:lstStyle/>
-          <a:p>
-            <a:pPr algn="ctr"/>
-          </a:p>
-        </p:txBody>
-      </p:sp>
-      <p:sp>
-        <p:nvSpPr>
-          <p:cNvPr id="4" name="TextBox 3"/>
-          <p:cNvSpPr txBox="1"/>
-          <p:nvPr/>
-        </p:nvSpPr>
-        <p:spPr>
-          <a:xfrm>
-            <a:off x="457200" y="164592"/>
-            <a:ext cx="11277295" cy="502920"/>
-          </a:xfrm>
-          <a:prstGeom prst="rect">
-            <a:avLst/>
-          </a:prstGeom>
-          <a:noFill/>
-        </p:spPr>
-        <p:txBody>
-          <a:bodyPr wrap="square">
-            <a:spAutoFit/>
-          </a:bodyPr>
-          <a:lstStyle/>
-          <a:p>
-            <a:r>
-              <a:rPr sz="2600" b="1" i="0">
-                <a:solidFill>
-                  <a:srgbClr val="FFFFFF"/>
-                </a:solidFill>
-                <a:latin typeface="Calibri"/>
-              </a:rPr>
-              <a:t>Actividad autonoma — pasos guiados</a:t>
-            </a:r>
-          </a:p>
-        </p:txBody>
-      </p:sp>
-      <p:sp>
-        <p:nvSpPr>
-          <p:cNvPr id="5" name="Rounded Rectangle 4"/>
-          <p:cNvSpPr/>
-          <p:nvPr/>
-        </p:nvSpPr>
-        <p:spPr>
-          <a:xfrm>
-            <a:off x="457200" y="1554480"/>
-            <a:ext cx="11277295" cy="1051560"/>
-          </a:xfrm>
-          <a:prstGeom prst="roundRect">
-            <a:avLst>
-              <a:gd name="adj" fmla="val 12000"/>
-            </a:avLst>
-          </a:prstGeom>
-          <a:solidFill>
-            <a:srgbClr val="F2F2F2"/>
-          </a:solidFill>
-          <a:ln>
-            <a:noFill/>
-          </a:ln>
-        </p:spPr>
-        <p:style>
-          <a:lnRef idx="1">
-            <a:schemeClr val="accent1"/>
-          </a:lnRef>
-          <a:fillRef idx="3">
-            <a:schemeClr val="accent1"/>
-          </a:fillRef>
-          <a:effectRef idx="2">
-            <a:schemeClr val="accent1"/>
-          </a:effectRef>
-          <a:fontRef idx="minor">
-            <a:schemeClr val="lt1"/>
-          </a:fontRef>
-        </p:style>
-        <p:txBody>
-          <a:bodyPr rtlCol="0" anchor="ctr"/>
-          <a:lstStyle/>
-          <a:p>
-            <a:pPr algn="ctr"/>
-          </a:p>
-        </p:txBody>
-      </p:sp>
-      <p:sp>
-        <p:nvSpPr>
-          <p:cNvPr id="6" name="Rounded Rectangle 5"/>
-          <p:cNvSpPr/>
-          <p:nvPr/>
-        </p:nvSpPr>
-        <p:spPr>
-          <a:xfrm>
-            <a:off x="594360" y="1860804"/>
-            <a:ext cx="438912" cy="438912"/>
-          </a:xfrm>
-          <a:prstGeom prst="roundRect">
-            <a:avLst>
-              <a:gd name="adj" fmla="val 12000"/>
-            </a:avLst>
-          </a:prstGeom>
-          <a:solidFill>
-            <a:srgbClr val="095292"/>
-          </a:solidFill>
-          <a:ln>
-            <a:noFill/>
-          </a:ln>
-        </p:spPr>
-        <p:style>
-          <a:lnRef idx="1">
-            <a:schemeClr val="accent1"/>
-          </a:lnRef>
-          <a:fillRef idx="3">
-            <a:schemeClr val="accent1"/>
-          </a:fillRef>
-          <a:effectRef idx="2">
-            <a:schemeClr val="accent1"/>
-          </a:effectRef>
-          <a:fontRef idx="minor">
-            <a:schemeClr val="lt1"/>
-          </a:fontRef>
-        </p:style>
-        <p:txBody>
-          <a:bodyPr rtlCol="0" anchor="ctr"/>
-          <a:lstStyle/>
-          <a:p>
-            <a:pPr algn="ctr"/>
-          </a:p>
-        </p:txBody>
-      </p:sp>
-      <p:sp>
-        <p:nvSpPr>
-          <p:cNvPr id="7" name="TextBox 6"/>
-          <p:cNvSpPr txBox="1"/>
-          <p:nvPr/>
-        </p:nvSpPr>
-        <p:spPr>
-          <a:xfrm>
-            <a:off x="594360" y="1860804"/>
-            <a:ext cx="438912" cy="438912"/>
-          </a:xfrm>
-          <a:prstGeom prst="rect">
-            <a:avLst/>
-          </a:prstGeom>
-          <a:noFill/>
-        </p:spPr>
-        <p:txBody>
-          <a:bodyPr wrap="square" anchor="ctr"/>
-          <a:lstStyle/>
-          <a:p>
-            <a:pPr algn="ctr"/>
-            <a:r>
-              <a:rPr sz="1600" b="1" i="0">
-                <a:solidFill>
-                  <a:srgbClr val="FFFFFF"/>
-                </a:solidFill>
-                <a:latin typeface="Calibri"/>
-              </a:rPr>
-              <a:t>1</a:t>
-            </a:r>
-          </a:p>
-        </p:txBody>
-      </p:sp>
-      <p:sp>
-        <p:nvSpPr>
-          <p:cNvPr id="8" name="TextBox 7"/>
-          <p:cNvSpPr txBox="1"/>
-          <p:nvPr/>
-        </p:nvSpPr>
-        <p:spPr>
-          <a:xfrm>
-            <a:off x="1188720" y="1645920"/>
-            <a:ext cx="10271455" cy="886968"/>
-          </a:xfrm>
-          <a:prstGeom prst="rect">
-            <a:avLst/>
-          </a:prstGeom>
-          <a:noFill/>
-        </p:spPr>
-        <p:txBody>
-          <a:bodyPr wrap="square" anchor="ctr"/>
-          <a:lstStyle/>
-          <a:p>
-            <a:r>
-              <a:rPr sz="1500" b="1" i="0">
-                <a:solidFill>
-                  <a:srgbClr val="095292"/>
-                </a:solidFill>
-                <a:latin typeface="Calibri"/>
-              </a:rPr>
-              <a:t>Describir escenario doble reserva con tiempos T1/T2.</a:t>
-            </a:r>
-          </a:p>
-        </p:txBody>
-      </p:sp>
-      <p:sp>
-        <p:nvSpPr>
-          <p:cNvPr id="9" name="Rounded Rectangle 8"/>
-          <p:cNvSpPr/>
-          <p:nvPr/>
-        </p:nvSpPr>
-        <p:spPr>
-          <a:xfrm>
-            <a:off x="457200" y="2697480"/>
-            <a:ext cx="11277295" cy="1051560"/>
-          </a:xfrm>
-          <a:prstGeom prst="roundRect">
-            <a:avLst>
-              <a:gd name="adj" fmla="val 12000"/>
-            </a:avLst>
-          </a:prstGeom>
-          <a:solidFill>
-            <a:srgbClr val="E8F4FA"/>
-          </a:solidFill>
-          <a:ln>
-            <a:noFill/>
-          </a:ln>
-        </p:spPr>
-        <p:style>
-          <a:lnRef idx="1">
-            <a:schemeClr val="accent1"/>
-          </a:lnRef>
-          <a:fillRef idx="3">
-            <a:schemeClr val="accent1"/>
-          </a:fillRef>
-          <a:effectRef idx="2">
-            <a:schemeClr val="accent1"/>
-          </a:effectRef>
-          <a:fontRef idx="minor">
-            <a:schemeClr val="lt1"/>
-          </a:fontRef>
-        </p:style>
-        <p:txBody>
-          <a:bodyPr rtlCol="0" anchor="ctr"/>
-          <a:lstStyle/>
-          <a:p>
-            <a:pPr algn="ctr"/>
-          </a:p>
-        </p:txBody>
-      </p:sp>
-      <p:sp>
-        <p:nvSpPr>
-          <p:cNvPr id="10" name="Rounded Rectangle 9"/>
-          <p:cNvSpPr/>
-          <p:nvPr/>
-        </p:nvSpPr>
-        <p:spPr>
-          <a:xfrm>
-            <a:off x="594360" y="3003804"/>
-            <a:ext cx="438912" cy="438912"/>
-          </a:xfrm>
-          <a:prstGeom prst="roundRect">
-            <a:avLst>
-              <a:gd name="adj" fmla="val 12000"/>
-            </a:avLst>
-          </a:prstGeom>
-          <a:solidFill>
-            <a:srgbClr val="095292"/>
-          </a:solidFill>
-          <a:ln>
-            <a:noFill/>
-          </a:ln>
-        </p:spPr>
-        <p:style>
-          <a:lnRef idx="1">
-            <a:schemeClr val="accent1"/>
-          </a:lnRef>
-          <a:fillRef idx="3">
-            <a:schemeClr val="accent1"/>
-          </a:fillRef>
-          <a:effectRef idx="2">
-            <a:schemeClr val="accent1"/>
-          </a:effectRef>
-          <a:fontRef idx="minor">
-            <a:schemeClr val="lt1"/>
-          </a:fontRef>
-        </p:style>
-        <p:txBody>
-          <a:bodyPr rtlCol="0" anchor="ctr"/>
-          <a:lstStyle/>
-          <a:p>
-            <a:pPr algn="ctr"/>
-          </a:p>
-        </p:txBody>
-      </p:sp>
-      <p:sp>
-        <p:nvSpPr>
-          <p:cNvPr id="11" name="TextBox 10"/>
-          <p:cNvSpPr txBox="1"/>
-          <p:nvPr/>
-        </p:nvSpPr>
-        <p:spPr>
-          <a:xfrm>
-            <a:off x="594360" y="3003804"/>
-            <a:ext cx="438912" cy="438912"/>
-          </a:xfrm>
-          <a:prstGeom prst="rect">
-            <a:avLst/>
-          </a:prstGeom>
-          <a:noFill/>
-        </p:spPr>
-        <p:txBody>
-          <a:bodyPr wrap="square" anchor="ctr"/>
-          <a:lstStyle/>
-          <a:p>
-            <a:pPr algn="ctr"/>
-            <a:r>
-              <a:rPr sz="1600" b="1" i="0">
-                <a:solidFill>
-                  <a:srgbClr val="FFFFFF"/>
-                </a:solidFill>
-                <a:latin typeface="Calibri"/>
-              </a:rPr>
-              <a:t>2</a:t>
-            </a:r>
-          </a:p>
-        </p:txBody>
-      </p:sp>
-      <p:sp>
-        <p:nvSpPr>
-          <p:cNvPr id="12" name="TextBox 11"/>
-          <p:cNvSpPr txBox="1"/>
-          <p:nvPr/>
-        </p:nvSpPr>
-        <p:spPr>
-          <a:xfrm>
-            <a:off x="1188720" y="2788920"/>
-            <a:ext cx="10271455" cy="886968"/>
-          </a:xfrm>
-          <a:prstGeom prst="rect">
-            <a:avLst/>
-          </a:prstGeom>
-          <a:noFill/>
-        </p:spPr>
-        <p:txBody>
-          <a:bodyPr wrap="square" anchor="ctr"/>
-          <a:lstStyle/>
-          <a:p>
-            <a:r>
-              <a:rPr sz="1500" b="1" i="0">
-                <a:solidFill>
-                  <a:srgbClr val="095292"/>
-                </a:solidFill>
-                <a:latin typeface="Calibri"/>
-              </a:rPr>
-              <a:t>Describir escenario doble descuento de stock.</a:t>
-            </a:r>
-          </a:p>
-        </p:txBody>
-      </p:sp>
-      <p:sp>
-        <p:nvSpPr>
-          <p:cNvPr id="13" name="Rounded Rectangle 12"/>
-          <p:cNvSpPr/>
-          <p:nvPr/>
-        </p:nvSpPr>
-        <p:spPr>
-          <a:xfrm>
-            <a:off x="457200" y="3840480"/>
-            <a:ext cx="11277295" cy="1051560"/>
-          </a:xfrm>
-          <a:prstGeom prst="roundRect">
-            <a:avLst>
-              <a:gd name="adj" fmla="val 12000"/>
-            </a:avLst>
-          </a:prstGeom>
-          <a:solidFill>
-            <a:srgbClr val="F2F2F2"/>
-          </a:solidFill>
-          <a:ln>
-            <a:noFill/>
-          </a:ln>
-        </p:spPr>
-        <p:style>
-          <a:lnRef idx="1">
-            <a:schemeClr val="accent1"/>
-          </a:lnRef>
-          <a:fillRef idx="3">
-            <a:schemeClr val="accent1"/>
-          </a:fillRef>
-          <a:effectRef idx="2">
-            <a:schemeClr val="accent1"/>
-          </a:effectRef>
-          <a:fontRef idx="minor">
-            <a:schemeClr val="lt1"/>
-          </a:fontRef>
-        </p:style>
-        <p:txBody>
-          <a:bodyPr rtlCol="0" anchor="ctr"/>
-          <a:lstStyle/>
-          <a:p>
-            <a:pPr algn="ctr"/>
-          </a:p>
-        </p:txBody>
-      </p:sp>
-      <p:sp>
-        <p:nvSpPr>
-          <p:cNvPr id="14" name="Rounded Rectangle 13"/>
-          <p:cNvSpPr/>
-          <p:nvPr/>
-        </p:nvSpPr>
-        <p:spPr>
-          <a:xfrm>
-            <a:off x="594360" y="4146804"/>
-            <a:ext cx="438912" cy="438912"/>
-          </a:xfrm>
-          <a:prstGeom prst="roundRect">
-            <a:avLst>
-              <a:gd name="adj" fmla="val 12000"/>
-            </a:avLst>
-          </a:prstGeom>
-          <a:solidFill>
-            <a:srgbClr val="095292"/>
-          </a:solidFill>
-          <a:ln>
-            <a:noFill/>
-          </a:ln>
-        </p:spPr>
-        <p:style>
-          <a:lnRef idx="1">
-            <a:schemeClr val="accent1"/>
-          </a:lnRef>
-          <a:fillRef idx="3">
-            <a:schemeClr val="accent1"/>
-          </a:fillRef>
-          <a:effectRef idx="2">
-            <a:schemeClr val="accent1"/>
-          </a:effectRef>
-          <a:fontRef idx="minor">
-            <a:schemeClr val="lt1"/>
-          </a:fontRef>
-        </p:style>
-        <p:txBody>
-          <a:bodyPr rtlCol="0" anchor="ctr"/>
-          <a:lstStyle/>
-          <a:p>
-            <a:pPr algn="ctr"/>
-          </a:p>
-        </p:txBody>
-      </p:sp>
-      <p:sp>
-        <p:nvSpPr>
-          <p:cNvPr id="15" name="TextBox 14"/>
-          <p:cNvSpPr txBox="1"/>
-          <p:nvPr/>
-        </p:nvSpPr>
-        <p:spPr>
-          <a:xfrm>
-            <a:off x="594360" y="4146804"/>
-            <a:ext cx="438912" cy="438912"/>
-          </a:xfrm>
-          <a:prstGeom prst="rect">
-            <a:avLst/>
-          </a:prstGeom>
-          <a:noFill/>
-        </p:spPr>
-        <p:txBody>
-          <a:bodyPr wrap="square" anchor="ctr"/>
-          <a:lstStyle/>
-          <a:p>
-            <a:pPr algn="ctr"/>
-            <a:r>
-              <a:rPr sz="1600" b="1" i="0">
-                <a:solidFill>
-                  <a:srgbClr val="FFFFFF"/>
-                </a:solidFill>
-                <a:latin typeface="Calibri"/>
-              </a:rPr>
-              <a:t>3</a:t>
-            </a:r>
-          </a:p>
-        </p:txBody>
-      </p:sp>
-      <p:sp>
-        <p:nvSpPr>
-          <p:cNvPr id="16" name="TextBox 15"/>
-          <p:cNvSpPr txBox="1"/>
-          <p:nvPr/>
-        </p:nvSpPr>
-        <p:spPr>
-          <a:xfrm>
-            <a:off x="1188720" y="3931920"/>
-            <a:ext cx="10271455" cy="886968"/>
-          </a:xfrm>
-          <a:prstGeom prst="rect">
-            <a:avLst/>
-          </a:prstGeom>
-          <a:noFill/>
-        </p:spPr>
-        <p:txBody>
-          <a:bodyPr wrap="square" anchor="ctr"/>
-          <a:lstStyle/>
-          <a:p>
-            <a:r>
-              <a:rPr sz="1500" b="1" i="0">
-                <a:solidFill>
-                  <a:srgbClr val="095292"/>
-                </a:solidFill>
-                <a:latin typeface="Calibri"/>
-              </a:rPr>
-              <a:t>Proponer mitigacion SQL.</a:t>
-            </a:r>
-          </a:p>
-        </p:txBody>
-      </p:sp>
-      <p:sp>
-        <p:nvSpPr>
-          <p:cNvPr id="17" name="Rounded Rectangle 16"/>
-          <p:cNvSpPr/>
-          <p:nvPr/>
-        </p:nvSpPr>
-        <p:spPr>
-          <a:xfrm>
-            <a:off x="457200" y="4983480"/>
-            <a:ext cx="11277295" cy="1051560"/>
-          </a:xfrm>
-          <a:prstGeom prst="roundRect">
-            <a:avLst>
-              <a:gd name="adj" fmla="val 12000"/>
-            </a:avLst>
-          </a:prstGeom>
-          <a:solidFill>
-            <a:srgbClr val="E8F4FA"/>
-          </a:solidFill>
-          <a:ln>
-            <a:noFill/>
-          </a:ln>
-        </p:spPr>
-        <p:style>
-          <a:lnRef idx="1">
-            <a:schemeClr val="accent1"/>
-          </a:lnRef>
-          <a:fillRef idx="3">
-            <a:schemeClr val="accent1"/>
-          </a:fillRef>
-          <a:effectRef idx="2">
-            <a:schemeClr val="accent1"/>
-          </a:effectRef>
-          <a:fontRef idx="minor">
-            <a:schemeClr val="lt1"/>
-          </a:fontRef>
-        </p:style>
-        <p:txBody>
-          <a:bodyPr rtlCol="0" anchor="ctr"/>
-          <a:lstStyle/>
-          <a:p>
-            <a:pPr algn="ctr"/>
-          </a:p>
-        </p:txBody>
-      </p:sp>
-      <p:sp>
-        <p:nvSpPr>
-          <p:cNvPr id="18" name="Rounded Rectangle 17"/>
-          <p:cNvSpPr/>
-          <p:nvPr/>
-        </p:nvSpPr>
-        <p:spPr>
-          <a:xfrm>
-            <a:off x="594360" y="5289804"/>
-            <a:ext cx="438912" cy="438912"/>
-          </a:xfrm>
-          <a:prstGeom prst="roundRect">
-            <a:avLst>
-              <a:gd name="adj" fmla="val 12000"/>
-            </a:avLst>
-          </a:prstGeom>
-          <a:solidFill>
-            <a:srgbClr val="095292"/>
-          </a:solidFill>
-          <a:ln>
-            <a:noFill/>
-          </a:ln>
-        </p:spPr>
-        <p:style>
-          <a:lnRef idx="1">
-            <a:schemeClr val="accent1"/>
-          </a:lnRef>
-          <a:fillRef idx="3">
-            <a:schemeClr val="accent1"/>
-          </a:fillRef>
-          <a:effectRef idx="2">
-            <a:schemeClr val="accent1"/>
-          </a:effectRef>
-          <a:fontRef idx="minor">
-            <a:schemeClr val="lt1"/>
-          </a:fontRef>
-        </p:style>
-        <p:txBody>
-          <a:bodyPr rtlCol="0" anchor="ctr"/>
-          <a:lstStyle/>
-          <a:p>
-            <a:pPr algn="ctr"/>
-          </a:p>
-        </p:txBody>
-      </p:sp>
-      <p:sp>
-        <p:nvSpPr>
-          <p:cNvPr id="19" name="TextBox 18"/>
-          <p:cNvSpPr txBox="1"/>
-          <p:nvPr/>
-        </p:nvSpPr>
-        <p:spPr>
-          <a:xfrm>
-            <a:off x="594360" y="5289804"/>
-            <a:ext cx="438912" cy="438912"/>
-          </a:xfrm>
-          <a:prstGeom prst="rect">
-            <a:avLst/>
-          </a:prstGeom>
-          <a:noFill/>
-        </p:spPr>
-        <p:txBody>
-          <a:bodyPr wrap="square" anchor="ctr"/>
-          <a:lstStyle/>
-          <a:p>
-            <a:pPr algn="ctr"/>
-            <a:r>
-              <a:rPr sz="1600" b="1" i="0">
-                <a:solidFill>
-                  <a:srgbClr val="FFFFFF"/>
-                </a:solidFill>
-                <a:latin typeface="Calibri"/>
-              </a:rPr>
-              <a:t>4</a:t>
-            </a:r>
-          </a:p>
-        </p:txBody>
-      </p:sp>
-      <p:sp>
-        <p:nvSpPr>
-          <p:cNvPr id="20" name="TextBox 19"/>
-          <p:cNvSpPr txBox="1"/>
-          <p:nvPr/>
-        </p:nvSpPr>
-        <p:spPr>
-          <a:xfrm>
-            <a:off x="1188720" y="5074920"/>
-            <a:ext cx="10271455" cy="886968"/>
-          </a:xfrm>
-          <a:prstGeom prst="rect">
-            <a:avLst/>
-          </a:prstGeom>
-          <a:noFill/>
-        </p:spPr>
-        <p:txBody>
-          <a:bodyPr wrap="square" anchor="ctr"/>
-          <a:lstStyle/>
-          <a:p>
-            <a:r>
-              <a:rPr sz="1500" b="1" i="0">
-                <a:solidFill>
-                  <a:srgbClr val="095292"/>
-                </a:solidFill>
-                <a:latin typeface="Calibri"/>
-              </a:rPr>
-              <a:t>Anadir seccion al informe PI.</a:t>
-            </a:r>
-          </a:p>
-        </p:txBody>
-      </p:sp>
-      <p:sp>
-        <p:nvSpPr>
-          <p:cNvPr id="21" name="TextBox 20"/>
-          <p:cNvSpPr txBox="1"/>
-          <p:nvPr/>
-        </p:nvSpPr>
-        <p:spPr>
-          <a:xfrm>
-            <a:off x="11185855" y="6473952"/>
-            <a:ext cx="640080" cy="274320"/>
-          </a:xfrm>
-          <a:prstGeom prst="rect">
-            <a:avLst/>
-          </a:prstGeom>
-          <a:noFill/>
-        </p:spPr>
-        <p:txBody>
-          <a:bodyPr wrap="square">
-            <a:spAutoFit/>
-          </a:bodyPr>
-          <a:lstStyle/>
-          <a:p>
-            <a:pPr algn="r"/>
-            <a:r>
-              <a:rPr sz="1100" b="0" i="0">
-                <a:solidFill>
-                  <a:srgbClr val="666666"/>
-                </a:solidFill>
-                <a:latin typeface="Calibri"/>
-              </a:rPr>
-              <a:t>31</a:t>
-            </a:r>
-          </a:p>
-        </p:txBody>
-      </p:sp>
-    </p:spTree>
-  </p:cSld>
-  <p:clrMapOvr>
-    <a:masterClrMapping/>
-  </p:clrMapOvr>
-</p:sld>
-</file>
-
-<file path=ppt/slides/slide32.xml><?xml version="1.0" encoding="utf-8"?>
-<p:sld xmlns:a="http://schemas.openxmlformats.org/drawingml/2006/main" xmlns:p="http://schemas.openxmlformats.org/presentationml/2006/main" xmlns:r="http://schemas.openxmlformats.org/officeDocument/2006/relationships">
-  <p:cSld>
-    <p:bg>
-      <p:bgPr>
-        <a:solidFill>
-          <a:srgbClr val="FFFFFF"/>
-        </a:solidFill>
-        <a:effectLst/>
-      </p:bgPr>
-    </p:bg>
-    <p:spTree>
-      <p:nvGrpSpPr>
-        <p:cNvPr id="1" name=""/>
-        <p:cNvGrpSpPr/>
-        <p:nvPr/>
-      </p:nvGrpSpPr>
-      <p:grpSpPr/>
-      <p:sp>
-        <p:nvSpPr>
-          <p:cNvPr id="2" name="Rectangle 1"/>
-          <p:cNvSpPr/>
-          <p:nvPr/>
-        </p:nvSpPr>
-        <p:spPr>
-          <a:xfrm>
-            <a:off x="0" y="0"/>
-            <a:ext cx="12191695" cy="960120"/>
-          </a:xfrm>
-          <a:prstGeom prst="rect">
-            <a:avLst/>
-          </a:prstGeom>
-          <a:solidFill>
-            <a:srgbClr val="095292"/>
-          </a:solidFill>
-          <a:ln>
-            <a:noFill/>
-          </a:ln>
-        </p:spPr>
-        <p:style>
-          <a:lnRef idx="1">
-            <a:schemeClr val="accent1"/>
-          </a:lnRef>
-          <a:fillRef idx="3">
-            <a:schemeClr val="accent1"/>
-          </a:fillRef>
-          <a:effectRef idx="2">
-            <a:schemeClr val="accent1"/>
-          </a:effectRef>
-          <a:fontRef idx="minor">
-            <a:schemeClr val="lt1"/>
-          </a:fontRef>
-        </p:style>
-        <p:txBody>
-          <a:bodyPr rtlCol="0" anchor="ctr"/>
-          <a:lstStyle/>
-          <a:p>
-            <a:pPr algn="ctr"/>
-          </a:p>
-        </p:txBody>
-      </p:sp>
-      <p:sp>
-        <p:nvSpPr>
-          <p:cNvPr id="3" name="Rectangle 2"/>
-          <p:cNvSpPr/>
-          <p:nvPr/>
-        </p:nvSpPr>
-        <p:spPr>
-          <a:xfrm>
-            <a:off x="0" y="960120"/>
-            <a:ext cx="12191695" cy="41148"/>
-          </a:xfrm>
-          <a:prstGeom prst="rect">
-            <a:avLst/>
-          </a:prstGeom>
-          <a:solidFill>
-            <a:srgbClr val="FFD000"/>
-          </a:solidFill>
-          <a:ln>
-            <a:noFill/>
-          </a:ln>
-        </p:spPr>
-        <p:style>
-          <a:lnRef idx="1">
-            <a:schemeClr val="accent1"/>
-          </a:lnRef>
-          <a:fillRef idx="3">
-            <a:schemeClr val="accent1"/>
-          </a:fillRef>
-          <a:effectRef idx="2">
-            <a:schemeClr val="accent1"/>
-          </a:effectRef>
-          <a:fontRef idx="minor">
-            <a:schemeClr val="lt1"/>
-          </a:fontRef>
-        </p:style>
-        <p:txBody>
-          <a:bodyPr rtlCol="0" anchor="ctr"/>
-          <a:lstStyle/>
-          <a:p>
-            <a:pPr algn="ctr"/>
-          </a:p>
-        </p:txBody>
-      </p:sp>
-      <p:sp>
-        <p:nvSpPr>
-          <p:cNvPr id="4" name="TextBox 3"/>
-          <p:cNvSpPr txBox="1"/>
-          <p:nvPr/>
-        </p:nvSpPr>
-        <p:spPr>
-          <a:xfrm>
-            <a:off x="457200" y="164592"/>
-            <a:ext cx="11277295" cy="502920"/>
-          </a:xfrm>
-          <a:prstGeom prst="rect">
-            <a:avLst/>
-          </a:prstGeom>
-          <a:noFill/>
-        </p:spPr>
-        <p:txBody>
-          <a:bodyPr wrap="square">
-            <a:spAutoFit/>
-          </a:bodyPr>
-          <a:lstStyle/>
-          <a:p>
-            <a:r>
-              <a:rPr sz="2600" b="1" i="0">
-                <a:solidFill>
-                  <a:srgbClr val="FFFFFF"/>
-                </a:solidFill>
-                <a:latin typeface="Calibri"/>
-              </a:rPr>
-              <a:t>Actividad autonoma — pistas (checklist vacio)</a:t>
-            </a:r>
-          </a:p>
-        </p:txBody>
-      </p:sp>
-      <p:sp>
-        <p:nvSpPr>
-          <p:cNvPr id="5" name="Rounded Rectangle 4"/>
-          <p:cNvSpPr/>
-          <p:nvPr/>
-        </p:nvSpPr>
-        <p:spPr>
-          <a:xfrm>
-            <a:off x="457200" y="1261872"/>
-            <a:ext cx="11277295" cy="566928"/>
-          </a:xfrm>
-          <a:prstGeom prst="roundRect">
-            <a:avLst>
-              <a:gd name="adj" fmla="val 12000"/>
-            </a:avLst>
-          </a:prstGeom>
-          <a:solidFill>
-            <a:srgbClr val="F2F2F2"/>
-          </a:solidFill>
-          <a:ln>
-            <a:noFill/>
-          </a:ln>
-        </p:spPr>
-        <p:style>
-          <a:lnRef idx="1">
-            <a:schemeClr val="accent1"/>
-          </a:lnRef>
-          <a:fillRef idx="3">
-            <a:schemeClr val="accent1"/>
-          </a:fillRef>
-          <a:effectRef idx="2">
-            <a:schemeClr val="accent1"/>
-          </a:effectRef>
-          <a:fontRef idx="minor">
-            <a:schemeClr val="lt1"/>
-          </a:fontRef>
-        </p:style>
-        <p:txBody>
-          <a:bodyPr rtlCol="0" anchor="ctr"/>
-          <a:lstStyle/>
-          <a:p>
-            <a:pPr algn="ctr"/>
-          </a:p>
-        </p:txBody>
-      </p:sp>
-      <p:sp>
-        <p:nvSpPr>
-          <p:cNvPr id="6" name="Rectangle 5"/>
-          <p:cNvSpPr/>
-          <p:nvPr/>
-        </p:nvSpPr>
-        <p:spPr>
-          <a:xfrm>
-            <a:off x="640080" y="1408175"/>
-            <a:ext cx="274320" cy="274320"/>
-          </a:xfrm>
-          <a:prstGeom prst="rect">
-            <a:avLst/>
-          </a:prstGeom>
-          <a:solidFill>
-            <a:srgbClr val="FFFFFF"/>
-          </a:solidFill>
-          <a:ln>
-            <a:solidFill>
-              <a:srgbClr val="333333"/>
-            </a:solidFill>
-          </a:ln>
-        </p:spPr>
-        <p:style>
-          <a:lnRef idx="1">
-            <a:schemeClr val="accent1"/>
-          </a:lnRef>
-          <a:fillRef idx="3">
-            <a:schemeClr val="accent1"/>
-          </a:fillRef>
-          <a:effectRef idx="2">
-            <a:schemeClr val="accent1"/>
-          </a:effectRef>
-          <a:fontRef idx="minor">
-            <a:schemeClr val="lt1"/>
-          </a:fontRef>
-        </p:style>
-        <p:txBody>
-          <a:bodyPr rtlCol="0" anchor="ctr"/>
-          <a:lstStyle/>
-          <a:p>
-            <a:pPr algn="ctr"/>
-          </a:p>
-        </p:txBody>
-      </p:sp>
-      <p:sp>
-        <p:nvSpPr>
-          <p:cNvPr id="7" name="Rectangle 6"/>
-          <p:cNvSpPr/>
-          <p:nvPr/>
-        </p:nvSpPr>
-        <p:spPr>
-          <a:xfrm>
-            <a:off x="640080" y="1408175"/>
-            <a:ext cx="73152" cy="274320"/>
-          </a:xfrm>
-          <a:prstGeom prst="rect">
-            <a:avLst/>
-          </a:prstGeom>
-          <a:solidFill>
-            <a:srgbClr val="269CCB"/>
-          </a:solidFill>
-          <a:ln>
-            <a:noFill/>
-          </a:ln>
-        </p:spPr>
-        <p:style>
-          <a:lnRef idx="1">
-            <a:schemeClr val="accent1"/>
-          </a:lnRef>
-          <a:fillRef idx="3">
-            <a:schemeClr val="accent1"/>
-          </a:fillRef>
-          <a:effectRef idx="2">
-            <a:schemeClr val="accent1"/>
-          </a:effectRef>
-          <a:fontRef idx="minor">
-            <a:schemeClr val="lt1"/>
-          </a:fontRef>
-        </p:style>
-        <p:txBody>
-          <a:bodyPr rtlCol="0" anchor="ctr"/>
-          <a:lstStyle/>
-          <a:p>
-            <a:pPr algn="ctr"/>
-          </a:p>
-        </p:txBody>
-      </p:sp>
-      <p:sp>
-        <p:nvSpPr>
-          <p:cNvPr id="8" name="TextBox 7"/>
-          <p:cNvSpPr txBox="1"/>
-          <p:nvPr/>
-        </p:nvSpPr>
-        <p:spPr>
-          <a:xfrm>
-            <a:off x="1097280" y="1353312"/>
-            <a:ext cx="10362895" cy="402336"/>
-          </a:xfrm>
-          <a:prstGeom prst="rect">
-            <a:avLst/>
-          </a:prstGeom>
-          <a:noFill/>
-        </p:spPr>
-        <p:txBody>
-          <a:bodyPr wrap="square" anchor="ctr"/>
-          <a:lstStyle/>
-          <a:p>
-            <a:r>
-              <a:rPr sz="1500" b="0" i="0">
-                <a:solidFill>
-                  <a:srgbClr val="333333"/>
-                </a:solidFill>
-                <a:latin typeface="Calibri"/>
-              </a:rPr>
-              <a:t>□ Tiempos claros?</a:t>
-            </a:r>
-          </a:p>
-        </p:txBody>
-      </p:sp>
-      <p:sp>
-        <p:nvSpPr>
-          <p:cNvPr id="9" name="Rounded Rectangle 8"/>
-          <p:cNvSpPr/>
-          <p:nvPr/>
-        </p:nvSpPr>
-        <p:spPr>
-          <a:xfrm>
-            <a:off x="457200" y="1938528"/>
-            <a:ext cx="11277295" cy="566928"/>
-          </a:xfrm>
-          <a:prstGeom prst="roundRect">
-            <a:avLst>
-              <a:gd name="adj" fmla="val 12000"/>
-            </a:avLst>
-          </a:prstGeom>
-          <a:solidFill>
-            <a:srgbClr val="F2F2F2"/>
-          </a:solidFill>
-          <a:ln>
-            <a:noFill/>
-          </a:ln>
-        </p:spPr>
-        <p:style>
-          <a:lnRef idx="1">
-            <a:schemeClr val="accent1"/>
-          </a:lnRef>
-          <a:fillRef idx="3">
-            <a:schemeClr val="accent1"/>
-          </a:fillRef>
-          <a:effectRef idx="2">
-            <a:schemeClr val="accent1"/>
-          </a:effectRef>
-          <a:fontRef idx="minor">
-            <a:schemeClr val="lt1"/>
-          </a:fontRef>
-        </p:style>
-        <p:txBody>
-          <a:bodyPr rtlCol="0" anchor="ctr"/>
-          <a:lstStyle/>
-          <a:p>
-            <a:pPr algn="ctr"/>
-          </a:p>
-        </p:txBody>
-      </p:sp>
-      <p:sp>
-        <p:nvSpPr>
-          <p:cNvPr id="10" name="Rectangle 9"/>
-          <p:cNvSpPr/>
-          <p:nvPr/>
-        </p:nvSpPr>
-        <p:spPr>
-          <a:xfrm>
-            <a:off x="640080" y="2084832"/>
-            <a:ext cx="274320" cy="274320"/>
-          </a:xfrm>
-          <a:prstGeom prst="rect">
-            <a:avLst/>
-          </a:prstGeom>
-          <a:solidFill>
-            <a:srgbClr val="FFFFFF"/>
-          </a:solidFill>
-          <a:ln>
-            <a:solidFill>
-              <a:srgbClr val="333333"/>
-            </a:solidFill>
-          </a:ln>
-        </p:spPr>
-        <p:style>
-          <a:lnRef idx="1">
-            <a:schemeClr val="accent1"/>
-          </a:lnRef>
-          <a:fillRef idx="3">
-            <a:schemeClr val="accent1"/>
-          </a:fillRef>
-          <a:effectRef idx="2">
-            <a:schemeClr val="accent1"/>
-          </a:effectRef>
-          <a:fontRef idx="minor">
-            <a:schemeClr val="lt1"/>
-          </a:fontRef>
-        </p:style>
-        <p:txBody>
-          <a:bodyPr rtlCol="0" anchor="ctr"/>
-          <a:lstStyle/>
-          <a:p>
-            <a:pPr algn="ctr"/>
-          </a:p>
-        </p:txBody>
-      </p:sp>
-      <p:sp>
-        <p:nvSpPr>
-          <p:cNvPr id="11" name="Rectangle 10"/>
-          <p:cNvSpPr/>
-          <p:nvPr/>
-        </p:nvSpPr>
-        <p:spPr>
-          <a:xfrm>
-            <a:off x="640080" y="2084832"/>
-            <a:ext cx="73152" cy="274320"/>
-          </a:xfrm>
-          <a:prstGeom prst="rect">
-            <a:avLst/>
-          </a:prstGeom>
-          <a:solidFill>
-            <a:srgbClr val="269CCB"/>
-          </a:solidFill>
-          <a:ln>
-            <a:noFill/>
-          </a:ln>
-        </p:spPr>
-        <p:style>
-          <a:lnRef idx="1">
-            <a:schemeClr val="accent1"/>
-          </a:lnRef>
-          <a:fillRef idx="3">
-            <a:schemeClr val="accent1"/>
-          </a:fillRef>
-          <a:effectRef idx="2">
-            <a:schemeClr val="accent1"/>
-          </a:effectRef>
-          <a:fontRef idx="minor">
-            <a:schemeClr val="lt1"/>
-          </a:fontRef>
-        </p:style>
-        <p:txBody>
-          <a:bodyPr rtlCol="0" anchor="ctr"/>
-          <a:lstStyle/>
-          <a:p>
-            <a:pPr algn="ctr"/>
-          </a:p>
-        </p:txBody>
-      </p:sp>
-      <p:sp>
-        <p:nvSpPr>
-          <p:cNvPr id="12" name="TextBox 11"/>
-          <p:cNvSpPr txBox="1"/>
-          <p:nvPr/>
-        </p:nvSpPr>
-        <p:spPr>
-          <a:xfrm>
-            <a:off x="1097280" y="2029968"/>
-            <a:ext cx="10362895" cy="402336"/>
-          </a:xfrm>
-          <a:prstGeom prst="rect">
-            <a:avLst/>
-          </a:prstGeom>
-          <a:noFill/>
-        </p:spPr>
-        <p:txBody>
-          <a:bodyPr wrap="square" anchor="ctr"/>
-          <a:lstStyle/>
-          <a:p>
-            <a:r>
-              <a:rPr sz="1500" b="0" i="0">
-                <a:solidFill>
-                  <a:srgbClr val="333333"/>
-                </a:solidFill>
-                <a:latin typeface="Calibri"/>
-              </a:rPr>
-              <a:t>□ Mitigacion SQL concreta?</a:t>
-            </a:r>
-          </a:p>
-        </p:txBody>
-      </p:sp>
-      <p:sp>
-        <p:nvSpPr>
-          <p:cNvPr id="13" name="Rounded Rectangle 12"/>
-          <p:cNvSpPr/>
-          <p:nvPr/>
-        </p:nvSpPr>
-        <p:spPr>
-          <a:xfrm>
-            <a:off x="457200" y="2615184"/>
-            <a:ext cx="11277295" cy="566928"/>
-          </a:xfrm>
-          <a:prstGeom prst="roundRect">
-            <a:avLst>
-              <a:gd name="adj" fmla="val 12000"/>
-            </a:avLst>
-          </a:prstGeom>
-          <a:solidFill>
-            <a:srgbClr val="F2F2F2"/>
-          </a:solidFill>
-          <a:ln>
-            <a:noFill/>
-          </a:ln>
-        </p:spPr>
-        <p:style>
-          <a:lnRef idx="1">
-            <a:schemeClr val="accent1"/>
-          </a:lnRef>
-          <a:fillRef idx="3">
-            <a:schemeClr val="accent1"/>
-          </a:fillRef>
-          <a:effectRef idx="2">
-            <a:schemeClr val="accent1"/>
-          </a:effectRef>
-          <a:fontRef idx="minor">
-            <a:schemeClr val="lt1"/>
-          </a:fontRef>
-        </p:style>
-        <p:txBody>
-          <a:bodyPr rtlCol="0" anchor="ctr"/>
-          <a:lstStyle/>
-          <a:p>
-            <a:pPr algn="ctr"/>
-          </a:p>
-        </p:txBody>
-      </p:sp>
-      <p:sp>
-        <p:nvSpPr>
-          <p:cNvPr id="14" name="Rectangle 13"/>
-          <p:cNvSpPr/>
-          <p:nvPr/>
-        </p:nvSpPr>
-        <p:spPr>
-          <a:xfrm>
-            <a:off x="640080" y="2761488"/>
-            <a:ext cx="274320" cy="274320"/>
-          </a:xfrm>
-          <a:prstGeom prst="rect">
-            <a:avLst/>
-          </a:prstGeom>
-          <a:solidFill>
-            <a:srgbClr val="FFFFFF"/>
-          </a:solidFill>
-          <a:ln>
-            <a:solidFill>
-              <a:srgbClr val="333333"/>
-            </a:solidFill>
-          </a:ln>
-        </p:spPr>
-        <p:style>
-          <a:lnRef idx="1">
-            <a:schemeClr val="accent1"/>
-          </a:lnRef>
-          <a:fillRef idx="3">
-            <a:schemeClr val="accent1"/>
-          </a:fillRef>
-          <a:effectRef idx="2">
-            <a:schemeClr val="accent1"/>
-          </a:effectRef>
-          <a:fontRef idx="minor">
-            <a:schemeClr val="lt1"/>
-          </a:fontRef>
-        </p:style>
-        <p:txBody>
-          <a:bodyPr rtlCol="0" anchor="ctr"/>
-          <a:lstStyle/>
-          <a:p>
-            <a:pPr algn="ctr"/>
-          </a:p>
-        </p:txBody>
-      </p:sp>
-      <p:sp>
-        <p:nvSpPr>
-          <p:cNvPr id="15" name="Rectangle 14"/>
-          <p:cNvSpPr/>
-          <p:nvPr/>
-        </p:nvSpPr>
-        <p:spPr>
-          <a:xfrm>
-            <a:off x="640080" y="2761488"/>
-            <a:ext cx="73152" cy="274320"/>
-          </a:xfrm>
-          <a:prstGeom prst="rect">
-            <a:avLst/>
-          </a:prstGeom>
-          <a:solidFill>
-            <a:srgbClr val="269CCB"/>
-          </a:solidFill>
-          <a:ln>
-            <a:noFill/>
-          </a:ln>
-        </p:spPr>
-        <p:style>
-          <a:lnRef idx="1">
-            <a:schemeClr val="accent1"/>
-          </a:lnRef>
-          <a:fillRef idx="3">
-            <a:schemeClr val="accent1"/>
-          </a:fillRef>
-          <a:effectRef idx="2">
-            <a:schemeClr val="accent1"/>
-          </a:effectRef>
-          <a:fontRef idx="minor">
-            <a:schemeClr val="lt1"/>
-          </a:fontRef>
-        </p:style>
-        <p:txBody>
-          <a:bodyPr rtlCol="0" anchor="ctr"/>
-          <a:lstStyle/>
-          <a:p>
-            <a:pPr algn="ctr"/>
-          </a:p>
-        </p:txBody>
-      </p:sp>
-      <p:sp>
-        <p:nvSpPr>
-          <p:cNvPr id="16" name="TextBox 15"/>
-          <p:cNvSpPr txBox="1"/>
-          <p:nvPr/>
-        </p:nvSpPr>
-        <p:spPr>
-          <a:xfrm>
-            <a:off x="1097280" y="2706624"/>
-            <a:ext cx="10362895" cy="402336"/>
-          </a:xfrm>
-          <a:prstGeom prst="rect">
-            <a:avLst/>
-          </a:prstGeom>
-          <a:noFill/>
-        </p:spPr>
-        <p:txBody>
-          <a:bodyPr wrap="square" anchor="ctr"/>
-          <a:lstStyle/>
-          <a:p>
-            <a:r>
-              <a:rPr sz="1500" b="0" i="0">
-                <a:solidFill>
-                  <a:srgbClr val="333333"/>
-                </a:solidFill>
-                <a:latin typeface="Calibri"/>
-              </a:rPr>
-              <a:t>□ Conecta con procs?</a:t>
-            </a:r>
-          </a:p>
-        </p:txBody>
-      </p:sp>
-      <p:sp>
-        <p:nvSpPr>
-          <p:cNvPr id="17" name="TextBox 16"/>
-          <p:cNvSpPr txBox="1"/>
-          <p:nvPr/>
-        </p:nvSpPr>
-        <p:spPr>
-          <a:xfrm>
-            <a:off x="11185855" y="6473952"/>
-            <a:ext cx="640080" cy="274320"/>
-          </a:xfrm>
-          <a:prstGeom prst="rect">
-            <a:avLst/>
-          </a:prstGeom>
-          <a:noFill/>
-        </p:spPr>
-        <p:txBody>
-          <a:bodyPr wrap="square">
-            <a:spAutoFit/>
-          </a:bodyPr>
-          <a:lstStyle/>
-          <a:p>
-            <a:pPr algn="r"/>
-            <a:r>
-              <a:rPr sz="1100" b="0" i="0">
-                <a:solidFill>
-                  <a:srgbClr val="666666"/>
-                </a:solidFill>
-                <a:latin typeface="Calibri"/>
-              </a:rPr>
-              <a:t>32</a:t>
-            </a:r>
-          </a:p>
-        </p:txBody>
-      </p:sp>
-    </p:spTree>
-  </p:cSld>
-  <p:clrMapOvr>
-    <a:masterClrMapping/>
-  </p:clrMapOvr>
-</p:sld>
-</file>
-
-<file path=ppt/slides/slide33.xml><?xml version="1.0" encoding="utf-8"?>
-<p:sld xmlns:a="http://schemas.openxmlformats.org/drawingml/2006/main" xmlns:p="http://schemas.openxmlformats.org/presentationml/2006/main" xmlns:r="http://schemas.openxmlformats.org/officeDocument/2006/relationships">
-  <p:cSld>
-    <p:bg>
-      <p:bgPr>
-        <a:solidFill>
-          <a:srgbClr val="FFFFFF"/>
-        </a:solidFill>
-        <a:effectLst/>
-      </p:bgPr>
-    </p:bg>
-    <p:spTree>
-      <p:nvGrpSpPr>
-        <p:cNvPr id="1" name=""/>
-        <p:cNvGrpSpPr/>
-        <p:nvPr/>
-      </p:nvGrpSpPr>
-      <p:grpSpPr/>
-      <p:sp>
-        <p:nvSpPr>
-          <p:cNvPr id="2" name="Rectangle 1"/>
-          <p:cNvSpPr/>
-          <p:nvPr/>
-        </p:nvSpPr>
-        <p:spPr>
-          <a:xfrm>
-            <a:off x="0" y="0"/>
-            <a:ext cx="12191695" cy="960120"/>
-          </a:xfrm>
-          <a:prstGeom prst="rect">
-            <a:avLst/>
-          </a:prstGeom>
-          <a:solidFill>
-            <a:srgbClr val="095292"/>
-          </a:solidFill>
-          <a:ln>
-            <a:noFill/>
-          </a:ln>
-        </p:spPr>
-        <p:style>
-          <a:lnRef idx="1">
-            <a:schemeClr val="accent1"/>
-          </a:lnRef>
-          <a:fillRef idx="3">
-            <a:schemeClr val="accent1"/>
-          </a:fillRef>
-          <a:effectRef idx="2">
-            <a:schemeClr val="accent1"/>
-          </a:effectRef>
-          <a:fontRef idx="minor">
-            <a:schemeClr val="lt1"/>
-          </a:fontRef>
-        </p:style>
-        <p:txBody>
-          <a:bodyPr rtlCol="0" anchor="ctr"/>
-          <a:lstStyle/>
-          <a:p>
-            <a:pPr algn="ctr"/>
-          </a:p>
-        </p:txBody>
-      </p:sp>
-      <p:sp>
-        <p:nvSpPr>
-          <p:cNvPr id="3" name="Rectangle 2"/>
-          <p:cNvSpPr/>
-          <p:nvPr/>
-        </p:nvSpPr>
-        <p:spPr>
-          <a:xfrm>
-            <a:off x="0" y="960120"/>
-            <a:ext cx="12191695" cy="41148"/>
-          </a:xfrm>
-          <a:prstGeom prst="rect">
-            <a:avLst/>
-          </a:prstGeom>
-          <a:solidFill>
-            <a:srgbClr val="FFD000"/>
-          </a:solidFill>
-          <a:ln>
-            <a:noFill/>
-          </a:ln>
-        </p:spPr>
-        <p:style>
-          <a:lnRef idx="1">
-            <a:schemeClr val="accent1"/>
-          </a:lnRef>
-          <a:fillRef idx="3">
-            <a:schemeClr val="accent1"/>
-          </a:fillRef>
-          <a:effectRef idx="2">
-            <a:schemeClr val="accent1"/>
-          </a:effectRef>
-          <a:fontRef idx="minor">
-            <a:schemeClr val="lt1"/>
-          </a:fontRef>
-        </p:style>
-        <p:txBody>
-          <a:bodyPr rtlCol="0" anchor="ctr"/>
-          <a:lstStyle/>
-          <a:p>
-            <a:pPr algn="ctr"/>
-          </a:p>
-        </p:txBody>
-      </p:sp>
-      <p:sp>
-        <p:nvSpPr>
-          <p:cNvPr id="4" name="TextBox 3"/>
-          <p:cNvSpPr txBox="1"/>
-          <p:nvPr/>
-        </p:nvSpPr>
-        <p:spPr>
-          <a:xfrm>
-            <a:off x="457200" y="164592"/>
-            <a:ext cx="11277295" cy="502920"/>
-          </a:xfrm>
-          <a:prstGeom prst="rect">
-            <a:avLst/>
-          </a:prstGeom>
-          <a:noFill/>
-        </p:spPr>
-        <p:txBody>
-          <a:bodyPr wrap="square">
-            <a:spAutoFit/>
-          </a:bodyPr>
-          <a:lstStyle/>
-          <a:p>
-            <a:r>
-              <a:rPr sz="2600" b="1" i="0">
-                <a:solidFill>
-                  <a:srgbClr val="FFFFFF"/>
-                </a:solidFill>
-                <a:latin typeface="Calibri"/>
-              </a:rPr>
-              <a:t>Criterios de exito / entregable</a:t>
-            </a:r>
-          </a:p>
-        </p:txBody>
-      </p:sp>
-      <p:sp>
-        <p:nvSpPr>
-          <p:cNvPr id="5" name="TextBox 4"/>
-          <p:cNvSpPr txBox="1"/>
-          <p:nvPr/>
-        </p:nvSpPr>
-        <p:spPr>
-          <a:xfrm>
-            <a:off x="457200" y="1170432"/>
-            <a:ext cx="11277295" cy="5230368"/>
-          </a:xfrm>
-          <a:prstGeom prst="rect">
-            <a:avLst/>
-          </a:prstGeom>
-          <a:noFill/>
-        </p:spPr>
-        <p:txBody>
-          <a:bodyPr wrap="square">
-            <a:spAutoFit/>
-          </a:bodyPr>
-          <a:lstStyle/>
-          <a:p>
-            <a:pPr>
-              <a:spcAft>
-                <a:spcPts val="800"/>
-              </a:spcAft>
-            </a:pPr>
-            <a:r>
-              <a:rPr sz="2000" b="0" i="0">
-                <a:solidFill>
-                  <a:srgbClr val="333333"/>
-                </a:solidFill>
-                <a:latin typeface="Calibri"/>
-              </a:rPr>
-              <a:t>–   </a:t>
-            </a:r>
-            <a:r>
-              <a:rPr sz="2000" b="1" i="0">
-                <a:solidFill>
-                  <a:srgbClr val="333333"/>
-                </a:solidFill>
-                <a:latin typeface="Calibri"/>
-              </a:rPr>
-              <a:t>Entregable:</a:t>
-            </a:r>
-            <a:r>
-              <a:rPr sz="2000" b="0" i="0">
-                <a:solidFill>
-                  <a:srgbClr val="333333"/>
-                </a:solidFill>
-                <a:latin typeface="Calibri"/>
-              </a:rPr>
-              <a:t> Informe corto: 2 escenarios (cita doble / stock) + mitigacion</a:t>
-            </a:r>
-          </a:p>
-          <a:p>
-            <a:pPr>
-              <a:spcAft>
-                <a:spcPts val="800"/>
-              </a:spcAft>
-            </a:pPr>
-            <a:r>
-              <a:rPr sz="2000" b="0" i="0">
-                <a:solidFill>
-                  <a:srgbClr val="333333"/>
-                </a:solidFill>
-                <a:latin typeface="Calibri"/>
-              </a:rPr>
-              <a:t>–   Evidencia: el SQL y su salida quedan guardados en cada pregunta de la plataforma del curso.</a:t>
-            </a:r>
-          </a:p>
-          <a:p>
-            <a:pPr>
-              <a:spcAft>
-                <a:spcPts val="800"/>
-              </a:spcAft>
-            </a:pPr>
-            <a:r>
-              <a:rPr sz="2000" b="0" i="0">
-                <a:solidFill>
-                  <a:srgbClr val="333333"/>
-                </a:solidFill>
-                <a:latin typeface="Calibri"/>
-              </a:rPr>
-              <a:t>–   Conserva copia en tu carpeta del PI (los .sql que pide el entregable).</a:t>
-            </a:r>
-          </a:p>
-          <a:p>
-            <a:pPr>
-              <a:spcAft>
-                <a:spcPts val="800"/>
-              </a:spcAft>
-            </a:pPr>
-            <a:r>
-              <a:rPr sz="2000" b="0" i="0">
-                <a:solidFill>
-                  <a:srgbClr val="333333"/>
-                </a:solidFill>
-                <a:latin typeface="Calibri"/>
-              </a:rPr>
-              <a:t>–   Actualizar checklist PI (que criterio de rubrica avanzo).</a:t>
-            </a:r>
-          </a:p>
-          <a:p>
-            <a:pPr>
-              <a:spcAft>
-                <a:spcPts val="800"/>
-              </a:spcAft>
-            </a:pPr>
-            <a:r>
-              <a:rPr sz="2000" b="0" i="0">
-                <a:solidFill>
-                  <a:srgbClr val="333333"/>
-                </a:solidFill>
-                <a:latin typeface="Calibri"/>
-              </a:rPr>
-              <a:t>–   </a:t>
-            </a:r>
-            <a:r>
-              <a:rPr sz="2000" b="1" i="0">
-                <a:solidFill>
-                  <a:srgbClr val="333333"/>
-                </a:solidFill>
-                <a:latin typeface="Calibri"/>
-              </a:rPr>
-              <a:t>Entrega en la plataforma del curso</a:t>
-            </a:r>
-            <a:r>
-              <a:rPr sz="2000" b="0" i="0">
-                <a:solidFill>
-                  <a:srgbClr val="333333"/>
-                </a:solidFill>
-                <a:latin typeface="Calibri"/>
-              </a:rPr>
-              <a:t> — en la fecha que indique el docente.</a:t>
-            </a:r>
-          </a:p>
-        </p:txBody>
-      </p:sp>
-      <p:sp>
-        <p:nvSpPr>
-          <p:cNvPr id="6" name="TextBox 5"/>
-          <p:cNvSpPr txBox="1"/>
-          <p:nvPr/>
-        </p:nvSpPr>
-        <p:spPr>
-          <a:xfrm>
-            <a:off x="11185855" y="6473952"/>
-            <a:ext cx="640080" cy="274320"/>
-          </a:xfrm>
-          <a:prstGeom prst="rect">
-            <a:avLst/>
-          </a:prstGeom>
-          <a:noFill/>
-        </p:spPr>
-        <p:txBody>
-          <a:bodyPr wrap="square">
-            <a:spAutoFit/>
-          </a:bodyPr>
-          <a:lstStyle/>
-          <a:p>
-            <a:pPr algn="r"/>
-            <a:r>
-              <a:rPr sz="1100" b="0" i="0">
-                <a:solidFill>
-                  <a:srgbClr val="666666"/>
-                </a:solidFill>
-                <a:latin typeface="Calibri"/>
-              </a:rPr>
-              <a:t>33</a:t>
-            </a:r>
-          </a:p>
-        </p:txBody>
-      </p:sp>
-    </p:spTree>
-  </p:cSld>
-  <p:clrMapOvr>
-    <a:masterClrMapping/>
-  </p:clrMapOvr>
-</p:sld>
-</file>
-
-<file path=ppt/slides/slide34.xml><?xml version="1.0" encoding="utf-8"?>
-<p:sld xmlns:a="http://schemas.openxmlformats.org/drawingml/2006/main" xmlns:p="http://schemas.openxmlformats.org/presentationml/2006/main" xmlns:r="http://schemas.openxmlformats.org/officeDocument/2006/relationships">
-  <p:cSld>
-    <p:bg>
-      <p:bgPr>
-        <a:solidFill>
-          <a:srgbClr val="FFFFFF"/>
-        </a:solidFill>
-        <a:effectLst/>
-      </p:bgPr>
-    </p:bg>
-    <p:spTree>
-      <p:nvGrpSpPr>
-        <p:cNvPr id="1" name=""/>
-        <p:cNvGrpSpPr/>
-        <p:nvPr/>
-      </p:nvGrpSpPr>
-      <p:grpSpPr/>
-      <p:sp>
-        <p:nvSpPr>
-          <p:cNvPr id="2" name="Rectangle 1"/>
-          <p:cNvSpPr/>
-          <p:nvPr/>
-        </p:nvSpPr>
-        <p:spPr>
-          <a:xfrm>
-            <a:off x="0" y="0"/>
-            <a:ext cx="12191695" cy="960120"/>
-          </a:xfrm>
-          <a:prstGeom prst="rect">
-            <a:avLst/>
-          </a:prstGeom>
-          <a:solidFill>
-            <a:srgbClr val="095292"/>
-          </a:solidFill>
-          <a:ln>
-            <a:noFill/>
-          </a:ln>
-        </p:spPr>
-        <p:style>
-          <a:lnRef idx="1">
-            <a:schemeClr val="accent1"/>
-          </a:lnRef>
-          <a:fillRef idx="3">
-            <a:schemeClr val="accent1"/>
-          </a:fillRef>
-          <a:effectRef idx="2">
-            <a:schemeClr val="accent1"/>
-          </a:effectRef>
-          <a:fontRef idx="minor">
-            <a:schemeClr val="lt1"/>
-          </a:fontRef>
-        </p:style>
-        <p:txBody>
-          <a:bodyPr rtlCol="0" anchor="ctr"/>
-          <a:lstStyle/>
-          <a:p>
-            <a:pPr algn="ctr"/>
-          </a:p>
-        </p:txBody>
-      </p:sp>
-      <p:sp>
-        <p:nvSpPr>
-          <p:cNvPr id="3" name="Rectangle 2"/>
-          <p:cNvSpPr/>
-          <p:nvPr/>
-        </p:nvSpPr>
-        <p:spPr>
-          <a:xfrm>
-            <a:off x="0" y="960120"/>
-            <a:ext cx="12191695" cy="41148"/>
-          </a:xfrm>
-          <a:prstGeom prst="rect">
-            <a:avLst/>
-          </a:prstGeom>
-          <a:solidFill>
-            <a:srgbClr val="FFD000"/>
-          </a:solidFill>
-          <a:ln>
-            <a:noFill/>
-          </a:ln>
-        </p:spPr>
-        <p:style>
-          <a:lnRef idx="1">
-            <a:schemeClr val="accent1"/>
-          </a:lnRef>
-          <a:fillRef idx="3">
-            <a:schemeClr val="accent1"/>
-          </a:fillRef>
-          <a:effectRef idx="2">
-            <a:schemeClr val="accent1"/>
-          </a:effectRef>
-          <a:fontRef idx="minor">
-            <a:schemeClr val="lt1"/>
-          </a:fontRef>
-        </p:style>
-        <p:txBody>
-          <a:bodyPr rtlCol="0" anchor="ctr"/>
-          <a:lstStyle/>
-          <a:p>
-            <a:pPr algn="ctr"/>
-          </a:p>
-        </p:txBody>
-      </p:sp>
-      <p:sp>
-        <p:nvSpPr>
-          <p:cNvPr id="4" name="TextBox 3"/>
-          <p:cNvSpPr txBox="1"/>
-          <p:nvPr/>
-        </p:nvSpPr>
-        <p:spPr>
-          <a:xfrm>
-            <a:off x="457200" y="164592"/>
-            <a:ext cx="11277295" cy="502920"/>
-          </a:xfrm>
-          <a:prstGeom prst="rect">
-            <a:avLst/>
-          </a:prstGeom>
-          <a:noFill/>
-        </p:spPr>
-        <p:txBody>
-          <a:bodyPr wrap="square">
-            <a:spAutoFit/>
-          </a:bodyPr>
-          <a:lstStyle/>
-          <a:p>
-            <a:r>
-              <a:rPr sz="2600" b="1" i="0">
-                <a:solidFill>
-                  <a:srgbClr val="FFFFFF"/>
-                </a:solidFill>
-                <a:latin typeface="Calibri"/>
-              </a:rPr>
-              <a:t>Para el PI esta semana</a:t>
-            </a:r>
-          </a:p>
-        </p:txBody>
-      </p:sp>
-      <p:sp>
-        <p:nvSpPr>
-          <p:cNvPr id="5" name="Rounded Rectangle 4"/>
-          <p:cNvSpPr/>
-          <p:nvPr/>
-        </p:nvSpPr>
-        <p:spPr>
-          <a:xfrm>
-            <a:off x="457200" y="1261872"/>
-            <a:ext cx="11277295" cy="1051560"/>
-          </a:xfrm>
-          <a:prstGeom prst="roundRect">
-            <a:avLst>
-              <a:gd name="adj" fmla="val 12000"/>
-            </a:avLst>
-          </a:prstGeom>
-          <a:solidFill>
-            <a:srgbClr val="E8F4FA"/>
-          </a:solidFill>
-          <a:ln>
-            <a:noFill/>
-          </a:ln>
-        </p:spPr>
-        <p:style>
-          <a:lnRef idx="1">
-            <a:schemeClr val="accent1"/>
-          </a:lnRef>
-          <a:fillRef idx="3">
-            <a:schemeClr val="accent1"/>
-          </a:fillRef>
-          <a:effectRef idx="2">
-            <a:schemeClr val="accent1"/>
-          </a:effectRef>
-          <a:fontRef idx="minor">
-            <a:schemeClr val="lt1"/>
-          </a:fontRef>
-        </p:style>
-        <p:txBody>
-          <a:bodyPr rtlCol="0" anchor="ctr"/>
-          <a:lstStyle/>
-          <a:p>
-            <a:pPr algn="ctr"/>
-          </a:p>
-        </p:txBody>
-      </p:sp>
-      <p:sp>
-        <p:nvSpPr>
-          <p:cNvPr id="6" name="Rectangle 5"/>
-          <p:cNvSpPr/>
-          <p:nvPr/>
-        </p:nvSpPr>
-        <p:spPr>
-          <a:xfrm>
-            <a:off x="457200" y="1261872"/>
-            <a:ext cx="128016" cy="1051560"/>
-          </a:xfrm>
-          <a:prstGeom prst="rect">
-            <a:avLst/>
-          </a:prstGeom>
-          <a:solidFill>
-            <a:srgbClr val="269CCB"/>
-          </a:solidFill>
-          <a:ln>
-            <a:noFill/>
-          </a:ln>
-        </p:spPr>
-        <p:style>
-          <a:lnRef idx="1">
-            <a:schemeClr val="accent1"/>
-          </a:lnRef>
-          <a:fillRef idx="3">
-            <a:schemeClr val="accent1"/>
-          </a:fillRef>
-          <a:effectRef idx="2">
-            <a:schemeClr val="accent1"/>
-          </a:effectRef>
-          <a:fontRef idx="minor">
-            <a:schemeClr val="lt1"/>
-          </a:fontRef>
-        </p:style>
-        <p:txBody>
-          <a:bodyPr rtlCol="0" anchor="ctr"/>
-          <a:lstStyle/>
-          <a:p>
-            <a:pPr algn="ctr"/>
-          </a:p>
-        </p:txBody>
-      </p:sp>
-      <p:sp>
-        <p:nvSpPr>
-          <p:cNvPr id="7" name="TextBox 6"/>
-          <p:cNvSpPr txBox="1"/>
-          <p:nvPr/>
-        </p:nvSpPr>
-        <p:spPr>
-          <a:xfrm>
-            <a:off x="777240" y="1399031"/>
-            <a:ext cx="10774375" cy="822959"/>
-          </a:xfrm>
-          <a:prstGeom prst="rect">
-            <a:avLst/>
-          </a:prstGeom>
-          <a:noFill/>
-        </p:spPr>
-        <p:txBody>
-          <a:bodyPr wrap="square">
-            <a:spAutoFit/>
-          </a:bodyPr>
-          <a:lstStyle/>
-          <a:p>
-            <a:r>
-              <a:rPr sz="1200" b="1" i="0">
-                <a:solidFill>
-                  <a:srgbClr val="269CCB"/>
-                </a:solidFill>
-                <a:latin typeface="Calibri"/>
-              </a:rPr>
-              <a:t>Info</a:t>
-            </a:r>
-          </a:p>
-          <a:p>
-            <a:pPr>
-              <a:spcBef>
-                <a:spcPts val="400"/>
-              </a:spcBef>
-            </a:pPr>
-            <a:r>
-              <a:rPr sz="1400" b="0" i="0">
-                <a:solidFill>
-                  <a:srgbClr val="333333"/>
-                </a:solidFill>
-                <a:latin typeface="Calibri"/>
-              </a:rPr>
-              <a:t>Hito: Escenarios de concurrencia del PI documentados</a:t>
-            </a:r>
-          </a:p>
-        </p:txBody>
-      </p:sp>
-      <p:sp>
-        <p:nvSpPr>
-          <p:cNvPr id="8" name="Rounded Rectangle 7"/>
-          <p:cNvSpPr/>
-          <p:nvPr/>
-        </p:nvSpPr>
-        <p:spPr>
-          <a:xfrm>
-            <a:off x="457200" y="2478024"/>
-            <a:ext cx="11277295" cy="1051560"/>
-          </a:xfrm>
-          <a:prstGeom prst="roundRect">
-            <a:avLst>
-              <a:gd name="adj" fmla="val 12000"/>
-            </a:avLst>
-          </a:prstGeom>
-          <a:solidFill>
-            <a:srgbClr val="FFF8E1"/>
-          </a:solidFill>
-          <a:ln>
-            <a:noFill/>
-          </a:ln>
-        </p:spPr>
-        <p:style>
-          <a:lnRef idx="1">
-            <a:schemeClr val="accent1"/>
-          </a:lnRef>
-          <a:fillRef idx="3">
-            <a:schemeClr val="accent1"/>
-          </a:fillRef>
-          <a:effectRef idx="2">
-            <a:schemeClr val="accent1"/>
-          </a:effectRef>
-          <a:fontRef idx="minor">
-            <a:schemeClr val="lt1"/>
-          </a:fontRef>
-        </p:style>
-        <p:txBody>
-          <a:bodyPr rtlCol="0" anchor="ctr"/>
-          <a:lstStyle/>
-          <a:p>
-            <a:pPr algn="ctr"/>
-          </a:p>
-        </p:txBody>
-      </p:sp>
-      <p:sp>
-        <p:nvSpPr>
-          <p:cNvPr id="9" name="Rectangle 8"/>
-          <p:cNvSpPr/>
-          <p:nvPr/>
-        </p:nvSpPr>
-        <p:spPr>
-          <a:xfrm>
-            <a:off x="457200" y="2478024"/>
-            <a:ext cx="128016" cy="1051560"/>
-          </a:xfrm>
-          <a:prstGeom prst="rect">
-            <a:avLst/>
-          </a:prstGeom>
-          <a:solidFill>
-            <a:srgbClr val="FFD000"/>
-          </a:solidFill>
-          <a:ln>
-            <a:noFill/>
-          </a:ln>
-        </p:spPr>
-        <p:style>
-          <a:lnRef idx="1">
-            <a:schemeClr val="accent1"/>
-          </a:lnRef>
-          <a:fillRef idx="3">
-            <a:schemeClr val="accent1"/>
-          </a:fillRef>
-          <a:effectRef idx="2">
-            <a:schemeClr val="accent1"/>
-          </a:effectRef>
-          <a:fontRef idx="minor">
-            <a:schemeClr val="lt1"/>
-          </a:fontRef>
-        </p:style>
-        <p:txBody>
-          <a:bodyPr rtlCol="0" anchor="ctr"/>
-          <a:lstStyle/>
-          <a:p>
-            <a:pPr algn="ctr"/>
-          </a:p>
-        </p:txBody>
-      </p:sp>
-      <p:sp>
-        <p:nvSpPr>
-          <p:cNvPr id="10" name="TextBox 9"/>
-          <p:cNvSpPr txBox="1"/>
-          <p:nvPr/>
-        </p:nvSpPr>
-        <p:spPr>
-          <a:xfrm>
-            <a:off x="777240" y="2615184"/>
-            <a:ext cx="10774375" cy="822959"/>
-          </a:xfrm>
-          <a:prstGeom prst="rect">
-            <a:avLst/>
-          </a:prstGeom>
-          <a:noFill/>
-        </p:spPr>
-        <p:txBody>
-          <a:bodyPr wrap="square">
-            <a:spAutoFit/>
-          </a:bodyPr>
-          <a:lstStyle/>
-          <a:p>
-            <a:r>
-              <a:rPr sz="1200" b="1" i="0">
-                <a:solidFill>
-                  <a:srgbClr val="FFD000"/>
-                </a:solidFill>
-                <a:latin typeface="Calibri"/>
-              </a:rPr>
-              <a:t>Aclaración</a:t>
-            </a:r>
-          </a:p>
-          <a:p>
-            <a:pPr>
-              <a:spcBef>
-                <a:spcPts val="400"/>
-              </a:spcBef>
-            </a:pPr>
-            <a:r>
-              <a:rPr sz="1400" b="0" i="0">
-                <a:solidFill>
-                  <a:srgbClr val="333333"/>
-                </a:solidFill>
-                <a:latin typeface="Calibri"/>
-              </a:rPr>
-              <a:t>Enunciado completo: Clases/Proyecto Integrador/ (VetCare DB).</a:t>
-            </a:r>
-          </a:p>
-        </p:txBody>
-      </p:sp>
-      <p:sp>
-        <p:nvSpPr>
-          <p:cNvPr id="11" name="Rounded Rectangle 10"/>
-          <p:cNvSpPr/>
-          <p:nvPr/>
-        </p:nvSpPr>
-        <p:spPr>
-          <a:xfrm>
-            <a:off x="457200" y="3694176"/>
-            <a:ext cx="11277295" cy="1051560"/>
-          </a:xfrm>
-          <a:prstGeom prst="roundRect">
-            <a:avLst>
-              <a:gd name="adj" fmla="val 12000"/>
-            </a:avLst>
-          </a:prstGeom>
-          <a:solidFill>
-            <a:srgbClr val="FBE4E4"/>
-          </a:solidFill>
-          <a:ln>
-            <a:noFill/>
-          </a:ln>
-        </p:spPr>
-        <p:style>
-          <a:lnRef idx="1">
-            <a:schemeClr val="accent1"/>
-          </a:lnRef>
-          <a:fillRef idx="3">
-            <a:schemeClr val="accent1"/>
-          </a:fillRef>
-          <a:effectRef idx="2">
-            <a:schemeClr val="accent1"/>
-          </a:effectRef>
-          <a:fontRef idx="minor">
-            <a:schemeClr val="lt1"/>
-          </a:fontRef>
-        </p:style>
-        <p:txBody>
-          <a:bodyPr rtlCol="0" anchor="ctr"/>
-          <a:lstStyle/>
-          <a:p>
-            <a:pPr algn="ctr"/>
-          </a:p>
-        </p:txBody>
-      </p:sp>
-      <p:sp>
-        <p:nvSpPr>
-          <p:cNvPr id="12" name="Rectangle 11"/>
-          <p:cNvSpPr/>
-          <p:nvPr/>
-        </p:nvSpPr>
-        <p:spPr>
-          <a:xfrm>
-            <a:off x="457200" y="3694176"/>
-            <a:ext cx="128016" cy="1051560"/>
-          </a:xfrm>
-          <a:prstGeom prst="rect">
-            <a:avLst/>
-          </a:prstGeom>
-          <a:solidFill>
-            <a:srgbClr val="A02030"/>
-          </a:solidFill>
-          <a:ln>
-            <a:noFill/>
-          </a:ln>
-        </p:spPr>
-        <p:style>
-          <a:lnRef idx="1">
-            <a:schemeClr val="accent1"/>
-          </a:lnRef>
-          <a:fillRef idx="3">
-            <a:schemeClr val="accent1"/>
-          </a:fillRef>
-          <a:effectRef idx="2">
-            <a:schemeClr val="accent1"/>
-          </a:effectRef>
-          <a:fontRef idx="minor">
-            <a:schemeClr val="lt1"/>
-          </a:fontRef>
-        </p:style>
-        <p:txBody>
-          <a:bodyPr rtlCol="0" anchor="ctr"/>
-          <a:lstStyle/>
-          <a:p>
-            <a:pPr algn="ctr"/>
-          </a:p>
-        </p:txBody>
-      </p:sp>
-      <p:sp>
-        <p:nvSpPr>
-          <p:cNvPr id="13" name="TextBox 12"/>
-          <p:cNvSpPr txBox="1"/>
-          <p:nvPr/>
-        </p:nvSpPr>
-        <p:spPr>
-          <a:xfrm>
-            <a:off x="777240" y="3831336"/>
-            <a:ext cx="10774375" cy="822959"/>
-          </a:xfrm>
-          <a:prstGeom prst="rect">
-            <a:avLst/>
-          </a:prstGeom>
-          <a:noFill/>
-        </p:spPr>
-        <p:txBody>
-          <a:bodyPr wrap="square">
-            <a:spAutoFit/>
-          </a:bodyPr>
-          <a:lstStyle/>
-          <a:p>
-            <a:r>
-              <a:rPr sz="1200" b="1" i="0">
-                <a:solidFill>
-                  <a:srgbClr val="A02030"/>
-                </a:solidFill>
-                <a:latin typeface="Calibri"/>
-              </a:rPr>
-              <a:t>Atención</a:t>
-            </a:r>
-          </a:p>
-          <a:p>
-            <a:pPr>
-              <a:spcBef>
-                <a:spcPts val="400"/>
-              </a:spcBef>
-            </a:pPr>
-            <a:r>
-              <a:rPr sz="1400" b="0" i="0">
-                <a:solidFill>
-                  <a:srgbClr val="333333"/>
-                </a:solidFill>
-                <a:latin typeface="Calibri"/>
-              </a:rPr>
-              <a:t>Si el docente asigna taller esta semana, él indica el canal y la fecha.</a:t>
-            </a:r>
-          </a:p>
-        </p:txBody>
-      </p:sp>
-      <p:sp>
-        <p:nvSpPr>
-          <p:cNvPr id="14" name="TextBox 13"/>
-          <p:cNvSpPr txBox="1"/>
-          <p:nvPr/>
-        </p:nvSpPr>
-        <p:spPr>
-          <a:xfrm>
-            <a:off x="11185855" y="6473952"/>
-            <a:ext cx="640080" cy="274320"/>
-          </a:xfrm>
-          <a:prstGeom prst="rect">
-            <a:avLst/>
-          </a:prstGeom>
-          <a:noFill/>
-        </p:spPr>
-        <p:txBody>
-          <a:bodyPr wrap="square">
-            <a:spAutoFit/>
-          </a:bodyPr>
-          <a:lstStyle/>
-          <a:p>
-            <a:pPr algn="r"/>
-            <a:r>
-              <a:rPr sz="1100" b="0" i="0">
-                <a:solidFill>
-                  <a:srgbClr val="666666"/>
-                </a:solidFill>
-                <a:latin typeface="Calibri"/>
-              </a:rPr>
-              <a:t>34</a:t>
-            </a:r>
-          </a:p>
-        </p:txBody>
-      </p:sp>
-    </p:spTree>
-  </p:cSld>
-  <p:clrMapOvr>
-    <a:masterClrMapping/>
-  </p:clrMapOvr>
-</p:sld>
-</file>
-
-<file path=ppt/slides/slide35.xml><?xml version="1.0" encoding="utf-8"?>
-<p:sld xmlns:a="http://schemas.openxmlformats.org/drawingml/2006/main" xmlns:p="http://schemas.openxmlformats.org/presentationml/2006/main" xmlns:r="http://schemas.openxmlformats.org/officeDocument/2006/relationships">
-  <p:cSld>
-    <p:bg>
-      <p:bgPr>
-        <a:solidFill>
-          <a:srgbClr val="FFFFFF"/>
-        </a:solidFill>
-        <a:effectLst/>
-      </p:bgPr>
-    </p:bg>
-    <p:spTree>
-      <p:nvGrpSpPr>
-        <p:cNvPr id="1" name=""/>
-        <p:cNvGrpSpPr/>
-        <p:nvPr/>
-      </p:nvGrpSpPr>
-      <p:grpSpPr/>
-      <p:sp>
-        <p:nvSpPr>
-          <p:cNvPr id="2" name="Rectangle 1"/>
-          <p:cNvSpPr/>
-          <p:nvPr/>
-        </p:nvSpPr>
-        <p:spPr>
-          <a:xfrm>
-            <a:off x="0" y="0"/>
-            <a:ext cx="12191695" cy="164592"/>
-          </a:xfrm>
-          <a:prstGeom prst="rect">
-            <a:avLst/>
-          </a:prstGeom>
-          <a:solidFill>
-            <a:srgbClr val="269CCB"/>
-          </a:solidFill>
-          <a:ln>
-            <a:noFill/>
-          </a:ln>
-        </p:spPr>
-        <p:style>
-          <a:lnRef idx="1">
-            <a:schemeClr val="accent1"/>
-          </a:lnRef>
-          <a:fillRef idx="3">
-            <a:schemeClr val="accent1"/>
-          </a:fillRef>
-          <a:effectRef idx="2">
-            <a:schemeClr val="accent1"/>
-          </a:effectRef>
-          <a:fontRef idx="minor">
-            <a:schemeClr val="lt1"/>
-          </a:fontRef>
-        </p:style>
-        <p:txBody>
-          <a:bodyPr rtlCol="0" anchor="ctr"/>
-          <a:lstStyle/>
-          <a:p>
-            <a:pPr algn="ctr"/>
-          </a:p>
-        </p:txBody>
-      </p:sp>
-      <p:pic>
-        <p:nvPicPr>
-          <p:cNvPr id="3" name="Picture 2" descr="logo_uniajc_color.png"/>
-          <p:cNvPicPr>
-            <a:picLocks noChangeAspect="1"/>
-          </p:cNvPicPr>
-          <p:nvPr/>
-        </p:nvPicPr>
-        <p:blipFill>
-          <a:blip r:embed="rId2"/>
-          <a:stretch>
-            <a:fillRect/>
-          </a:stretch>
-        </p:blipFill>
-        <p:spPr>
-          <a:xfrm>
-            <a:off x="10271455" y="5998464"/>
-            <a:ext cx="1463040" cy="643233"/>
-          </a:xfrm>
-          <a:prstGeom prst="rect">
-            <a:avLst/>
-          </a:prstGeom>
-        </p:spPr>
-      </p:pic>
-      <p:sp>
-        <p:nvSpPr>
-          <p:cNvPr id="4" name="TextBox 3"/>
-          <p:cNvSpPr txBox="1"/>
-          <p:nvPr/>
-        </p:nvSpPr>
-        <p:spPr>
-          <a:xfrm>
-            <a:off x="457200" y="1737360"/>
-            <a:ext cx="11277295" cy="1097280"/>
-          </a:xfrm>
-          <a:prstGeom prst="rect">
-            <a:avLst/>
-          </a:prstGeom>
-          <a:noFill/>
-        </p:spPr>
-        <p:txBody>
-          <a:bodyPr wrap="square" anchor="ctr"/>
-          <a:lstStyle/>
-          <a:p>
-            <a:pPr algn="ctr"/>
-            <a:r>
-              <a:rPr sz="3400" b="1" i="0">
-                <a:solidFill>
-                  <a:srgbClr val="095292"/>
-                </a:solidFill>
-                <a:latin typeface="Calibri"/>
-              </a:rPr>
-              <a:t>Clase 10 · VetCare avanza</a:t>
-            </a:r>
-          </a:p>
-        </p:txBody>
-      </p:sp>
-      <p:sp>
-        <p:nvSpPr>
-          <p:cNvPr id="5" name="TextBox 4"/>
-          <p:cNvSpPr txBox="1"/>
-          <p:nvPr/>
-        </p:nvSpPr>
-        <p:spPr>
-          <a:xfrm>
-            <a:off x="457200" y="3017520"/>
-            <a:ext cx="11277295" cy="1645920"/>
-          </a:xfrm>
-          <a:prstGeom prst="rect">
-            <a:avLst/>
-          </a:prstGeom>
-          <a:noFill/>
-        </p:spPr>
-        <p:txBody>
-          <a:bodyPr wrap="square">
-            <a:spAutoFit/>
-          </a:bodyPr>
-          <a:lstStyle/>
-          <a:p>
-            <a:pPr algn="ctr">
-              <a:spcAft>
-                <a:spcPts val="600"/>
-              </a:spcAft>
-            </a:pPr>
-            <a:r>
-              <a:rPr sz="1600" b="0" i="0">
-                <a:solidFill>
-                  <a:srgbClr val="333333"/>
-                </a:solidFill>
-                <a:latin typeface="Calibri"/>
-              </a:rPr>
-              <a:t>Escenarios de concurrencia del PI documentados</a:t>
-            </a:r>
-          </a:p>
-          <a:p>
-            <a:pPr algn="ctr">
-              <a:spcAft>
-                <a:spcPts val="600"/>
-              </a:spcAft>
-            </a:pPr>
-            <a:r>
-              <a:rPr sz="1600" b="0" i="0">
-                <a:solidFill>
-                  <a:srgbClr val="333333"/>
-                </a:solidFill>
-                <a:latin typeface="Calibri"/>
-              </a:rPr>
-              <a:t>Entregable: Informe corto: 2 escenarios (cita doble / stock) + mitigacion</a:t>
-            </a:r>
-          </a:p>
-          <a:p>
-            <a:pPr algn="ctr">
-              <a:spcAft>
-                <a:spcPts val="600"/>
-              </a:spcAft>
-            </a:pPr>
-            <a:r>
-              <a:rPr sz="1600" b="0" i="0">
-                <a:solidFill>
-                  <a:srgbClr val="333333"/>
-                </a:solidFill>
-                <a:latin typeface="Calibri"/>
-              </a:rPr>
-              <a:t>Siguiente clase: continuar el hilo del PI segun plan</a:t>
-            </a:r>
-          </a:p>
-        </p:txBody>
-      </p:sp>
-      <p:sp>
-        <p:nvSpPr>
-          <p:cNvPr id="6" name="TextBox 5"/>
-          <p:cNvSpPr txBox="1"/>
-          <p:nvPr/>
-        </p:nvSpPr>
-        <p:spPr>
-          <a:xfrm>
-            <a:off x="457200" y="4754880"/>
-            <a:ext cx="11277295" cy="640080"/>
-          </a:xfrm>
-          <a:prstGeom prst="rect">
-            <a:avLst/>
-          </a:prstGeom>
-          <a:noFill/>
-        </p:spPr>
-        <p:txBody>
-          <a:bodyPr wrap="square">
-            <a:spAutoFit/>
-          </a:bodyPr>
-          <a:lstStyle/>
-          <a:p>
-            <a:pPr algn="ctr"/>
-            <a:r>
-              <a:rPr sz="2000" b="1" i="0">
-                <a:solidFill>
-                  <a:srgbClr val="269CCB"/>
-                </a:solidFill>
-                <a:latin typeface="Calibri"/>
-              </a:rPr>
-              <a:t>Teoria breve · practica = PI</a:t>
             </a:r>
           </a:p>
         </p:txBody>
@@ -16872,4 +13625,324 @@
   </a:objectDefaults>
   <a:extraClrSchemeLst/>
 </a:theme>
+</file>
+
+<file path=ppt/theme/theme2.xml><?xml version="1.0" encoding="utf-8"?>
+<a:theme xmlns:a="http://schemas.openxmlformats.org/drawingml/2006/main" name="Office Theme">
+  <a:themeElements>
+    <a:clrScheme name="Office">
+      <a:dk1>
+        <a:sysClr val="windowText" lastClr="000000"/>
+      </a:dk1>
+      <a:lt1>
+        <a:sysClr val="window" lastClr="FFFFFF"/>
+      </a:lt1>
+      <a:dk2>
+        <a:srgbClr val="1F497D"/>
+      </a:dk2>
+      <a:lt2>
+        <a:srgbClr val="EEECE1"/>
+      </a:lt2>
+      <a:accent1>
+        <a:srgbClr val="4F81BD"/>
+      </a:accent1>
+      <a:accent2>
+        <a:srgbClr val="C0504D"/>
+      </a:accent2>
+      <a:accent3>
+        <a:srgbClr val="9BBB59"/>
+      </a:accent3>
+      <a:accent4>
+        <a:srgbClr val="8064A2"/>
+      </a:accent4>
+      <a:accent5>
+        <a:srgbClr val="4BACC6"/>
+      </a:accent5>
+      <a:accent6>
+        <a:srgbClr val="F79646"/>
+      </a:accent6>
+      <a:hlink>
+        <a:srgbClr val="0000FF"/>
+      </a:hlink>
+      <a:folHlink>
+        <a:srgbClr val="800080"/>
+      </a:folHlink>
+    </a:clrScheme>
+    <a:fontScheme name="Office">
+      <a:majorFont>
+        <a:latin typeface="Calibri"/>
+        <a:ea typeface=""/>
+        <a:cs typeface=""/>
+        <a:font script="Jpan" typeface="ＭＳ Ｐゴシック"/>
+        <a:font script="Hang" typeface="맑은 고딕"/>
+        <a:font script="Hans" typeface="宋体"/>
+        <a:font script="Hant" typeface="新細明體"/>
+        <a:font script="Arab" typeface="Times New Roman"/>
+        <a:font script="Hebr" typeface="Times New Roman"/>
+        <a:font script="Thai" typeface="Angsana New"/>
+        <a:font script="Ethi" typeface="Nyala"/>
+        <a:font script="Beng" typeface="Vrinda"/>
+        <a:font script="Gujr" typeface="Shruti"/>
+        <a:font script="Khmr" typeface="MoolBoran"/>
+        <a:font script="Knda" typeface="Tunga"/>
+        <a:font script="Guru" typeface="Raavi"/>
+        <a:font script="Cans" typeface="Euphemia"/>
+        <a:font script="Cher" typeface="Plantagenet Cherokee"/>
+        <a:font script="Yiii" typeface="Microsoft Yi Baiti"/>
+        <a:font script="Tibt" typeface="Microsoft Himalaya"/>
+        <a:font script="Thaa" typeface="MV Boli"/>
+        <a:font script="Deva" typeface="Mangal"/>
+        <a:font script="Telu" typeface="Gautami"/>
+        <a:font script="Taml" typeface="Latha"/>
+        <a:font script="Syrc" typeface="Estrangelo Edessa"/>
+        <a:font script="Orya" typeface="Kalinga"/>
+        <a:font script="Mlym" typeface="Kartika"/>
+        <a:font script="Laoo" typeface="DokChampa"/>
+        <a:font script="Sinh" typeface="Iskoola Pota"/>
+        <a:font script="Mong" typeface="Mongolian Baiti"/>
+        <a:font script="Viet" typeface="Times New Roman"/>
+        <a:font script="Uigh" typeface="Microsoft Uighur"/>
+        <a:font script="Geor" typeface="Sylfaen"/>
+      </a:majorFont>
+      <a:minorFont>
+        <a:latin typeface="Calibri"/>
+        <a:ea typeface=""/>
+        <a:cs typeface=""/>
+        <a:font script="Jpan" typeface="ＭＳ Ｐゴシック"/>
+        <a:font script="Hang" typeface="맑은 고딕"/>
+        <a:font script="Hans" typeface="宋体"/>
+        <a:font script="Hant" typeface="新細明體"/>
+        <a:font script="Arab" typeface="Arial"/>
+        <a:font script="Hebr" typeface="Arial"/>
+        <a:font script="Thai" typeface="Cordia New"/>
+        <a:font script="Ethi" typeface="Nyala"/>
+        <a:font script="Beng" typeface="Vrinda"/>
+        <a:font script="Gujr" typeface="Shruti"/>
+        <a:font script="Khmr" typeface="DaunPenh"/>
+        <a:font script="Knda" typeface="Tunga"/>
+        <a:font script="Guru" typeface="Raavi"/>
+        <a:font script="Cans" typeface="Euphemia"/>
+        <a:font script="Cher" typeface="Plantagenet Cherokee"/>
+        <a:font script="Yiii" typeface="Microsoft Yi Baiti"/>
+        <a:font script="Tibt" typeface="Microsoft Himalaya"/>
+        <a:font script="Thaa" typeface="MV Boli"/>
+        <a:font script="Deva" typeface="Mangal"/>
+        <a:font script="Telu" typeface="Gautami"/>
+        <a:font script="Taml" typeface="Latha"/>
+        <a:font script="Syrc" typeface="Estrangelo Edessa"/>
+        <a:font script="Orya" typeface="Kalinga"/>
+        <a:font script="Mlym" typeface="Kartika"/>
+        <a:font script="Laoo" typeface="DokChampa"/>
+        <a:font script="Sinh" typeface="Iskoola Pota"/>
+        <a:font script="Mong" typeface="Mongolian Baiti"/>
+        <a:font script="Viet" typeface="Arial"/>
+        <a:font script="Uigh" typeface="Microsoft Uighur"/>
+        <a:font script="Geor" typeface="Sylfaen"/>
+      </a:minorFont>
+    </a:fontScheme>
+    <a:fmtScheme name="Office">
+      <a:fillStyleLst>
+        <a:solidFill>
+          <a:schemeClr val="phClr"/>
+        </a:solidFill>
+        <a:gradFill rotWithShape="1">
+          <a:gsLst>
+            <a:gs pos="0">
+              <a:schemeClr val="phClr">
+                <a:tint val="50000"/>
+                <a:satMod val="300000"/>
+              </a:schemeClr>
+            </a:gs>
+            <a:gs pos="35000">
+              <a:schemeClr val="phClr">
+                <a:tint val="37000"/>
+                <a:satMod val="300000"/>
+              </a:schemeClr>
+            </a:gs>
+            <a:gs pos="100000">
+              <a:schemeClr val="phClr">
+                <a:tint val="15000"/>
+                <a:satMod val="350000"/>
+              </a:schemeClr>
+            </a:gs>
+          </a:gsLst>
+          <a:lin ang="16200000" scaled="1"/>
+        </a:gradFill>
+        <a:gradFill rotWithShape="1">
+          <a:gsLst>
+            <a:gs pos="0">
+              <a:schemeClr val="phClr">
+                <a:tint val="100000"/>
+                <a:shade val="100000"/>
+                <a:satMod val="130000"/>
+              </a:schemeClr>
+            </a:gs>
+            <a:gs pos="100000">
+              <a:schemeClr val="phClr">
+                <a:tint val="50000"/>
+                <a:shade val="100000"/>
+                <a:satMod val="350000"/>
+              </a:schemeClr>
+            </a:gs>
+          </a:gsLst>
+          <a:lin ang="16200000" scaled="0"/>
+        </a:gradFill>
+      </a:fillStyleLst>
+      <a:lnStyleLst>
+        <a:ln w="9525" cap="flat" cmpd="sng" algn="ctr">
+          <a:solidFill>
+            <a:schemeClr val="phClr">
+              <a:shade val="95000"/>
+              <a:satMod val="105000"/>
+            </a:schemeClr>
+          </a:solidFill>
+          <a:prstDash val="solid"/>
+        </a:ln>
+        <a:ln w="25400" cap="flat" cmpd="sng" algn="ctr">
+          <a:solidFill>
+            <a:schemeClr val="phClr"/>
+          </a:solidFill>
+          <a:prstDash val="solid"/>
+        </a:ln>
+        <a:ln w="38100" cap="flat" cmpd="sng" algn="ctr">
+          <a:solidFill>
+            <a:schemeClr val="phClr"/>
+          </a:solidFill>
+          <a:prstDash val="solid"/>
+        </a:ln>
+      </a:lnStyleLst>
+      <a:effectStyleLst>
+        <a:effectStyle>
+          <a:effectLst>
+            <a:outerShdw blurRad="40000" dist="20000" dir="5400000" rotWithShape="0">
+              <a:srgbClr val="000000">
+                <a:alpha val="38000"/>
+              </a:srgbClr>
+            </a:outerShdw>
+          </a:effectLst>
+        </a:effectStyle>
+        <a:effectStyle>
+          <a:effectLst>
+            <a:outerShdw blurRad="40000" dist="23000" dir="5400000" rotWithShape="0">
+              <a:srgbClr val="000000">
+                <a:alpha val="35000"/>
+              </a:srgbClr>
+            </a:outerShdw>
+          </a:effectLst>
+        </a:effectStyle>
+        <a:effectStyle>
+          <a:effectLst>
+            <a:outerShdw blurRad="40000" dist="23000" dir="5400000" rotWithShape="0">
+              <a:srgbClr val="000000">
+                <a:alpha val="35000"/>
+              </a:srgbClr>
+            </a:outerShdw>
+          </a:effectLst>
+          <a:scene3d>
+            <a:camera prst="orthographicFront">
+              <a:rot lat="0" lon="0" rev="0"/>
+            </a:camera>
+            <a:lightRig rig="threePt" dir="t">
+              <a:rot lat="0" lon="0" rev="1200000"/>
+            </a:lightRig>
+          </a:scene3d>
+          <a:sp3d>
+            <a:bevelT w="63500" h="25400"/>
+          </a:sp3d>
+        </a:effectStyle>
+      </a:effectStyleLst>
+      <a:bgFillStyleLst>
+        <a:solidFill>
+          <a:schemeClr val="phClr"/>
+        </a:solidFill>
+        <a:gradFill rotWithShape="1">
+          <a:gsLst>
+            <a:gs pos="0">
+              <a:schemeClr val="phClr">
+                <a:tint val="40000"/>
+                <a:satMod val="350000"/>
+              </a:schemeClr>
+            </a:gs>
+            <a:gs pos="40000">
+              <a:schemeClr val="phClr">
+                <a:tint val="45000"/>
+                <a:shade val="99000"/>
+                <a:satMod val="350000"/>
+              </a:schemeClr>
+            </a:gs>
+            <a:gs pos="100000">
+              <a:schemeClr val="phClr">
+                <a:shade val="20000"/>
+                <a:satMod val="255000"/>
+              </a:schemeClr>
+            </a:gs>
+          </a:gsLst>
+          <a:path path="circle">
+            <a:fillToRect l="50000" t="-80000" r="50000" b="180000"/>
+          </a:path>
+        </a:gradFill>
+        <a:gradFill rotWithShape="1">
+          <a:gsLst>
+            <a:gs pos="0">
+              <a:schemeClr val="phClr">
+                <a:tint val="80000"/>
+                <a:satMod val="300000"/>
+              </a:schemeClr>
+            </a:gs>
+            <a:gs pos="100000">
+              <a:schemeClr val="phClr">
+                <a:shade val="30000"/>
+                <a:satMod val="200000"/>
+              </a:schemeClr>
+            </a:gs>
+          </a:gsLst>
+          <a:path path="circle">
+            <a:fillToRect l="50000" t="50000" r="50000" b="50000"/>
+          </a:path>
+        </a:gradFill>
+      </a:bgFillStyleLst>
+    </a:fmtScheme>
+  </a:themeElements>
+  <a:objectDefaults>
+    <a:spDef>
+      <a:spPr/>
+      <a:bodyPr/>
+      <a:lstStyle/>
+      <a:style>
+        <a:lnRef idx="1">
+          <a:schemeClr val="accent1"/>
+        </a:lnRef>
+        <a:fillRef idx="3">
+          <a:schemeClr val="accent1"/>
+        </a:fillRef>
+        <a:effectRef idx="2">
+          <a:schemeClr val="accent1"/>
+        </a:effectRef>
+        <a:fontRef idx="minor">
+          <a:schemeClr val="lt1"/>
+        </a:fontRef>
+      </a:style>
+    </a:spDef>
+    <a:lnDef>
+      <a:spPr/>
+      <a:bodyPr/>
+      <a:lstStyle/>
+      <a:style>
+        <a:lnRef idx="2">
+          <a:schemeClr val="accent1"/>
+        </a:lnRef>
+        <a:fillRef idx="0">
+          <a:schemeClr val="accent1"/>
+        </a:fillRef>
+        <a:effectRef idx="1">
+          <a:schemeClr val="accent1"/>
+        </a:effectRef>
+        <a:fontRef idx="minor">
+          <a:schemeClr val="tx1"/>
+        </a:fontRef>
+      </a:style>
+    </a:lnDef>
+  </a:objectDefaults>
+  <a:extraClrSchemeLst/>
+</a:theme>
 </file>
--- a/Bases de Datos II/Clases/Clase 10 - Control de concurrencia/Presentacion.pptx
+++ b/Bases de Datos II/Clases/Clase 10 - Control de concurrencia/Presentacion.pptx
@@ -32,6 +32,7 @@
     <p:sldId id="280" r:id="rId32"/>
     <p:sldId id="281" r:id="rId33"/>
     <p:sldId id="282" r:id="rId34"/>
+    <p:sldId id="283" r:id="rId35"/>
   </p:sldIdLst>
   <p:sldSz cx="12191695" cy="6858000" type="screen4x3"/>
   <p:notesSz cx="6858000" cy="9144000"/>
@@ -4537,7 +4538,7 @@
                 </a:solidFill>
                 <a:latin typeface="Calibri"/>
               </a:rPr>
-              <a:t>Los cuatro niveles de aislamiento se definen por lo que permiten (1/2)</a:t>
+              <a:t>Los tres fenomenos indeseables, en escenas de la clinica (2/2)</a:t>
             </a:r>
           </a:p>
         </p:txBody>
@@ -4576,7 +4577,7 @@
                 </a:solidFill>
                 <a:latin typeface="Calibri"/>
               </a:rPr>
-              <a:t>–   Los cuatro niveles de aislamiento del estandar SQL se definen exactamente por cuales de esos tres fenomenos permiten, y esa es la unica forma sensata de memorizarlos.</a:t>
+              <a:t>–   Lectura fantasma, o phantom read: T1 cuenta las citas del veterinario Ruiz para el martes y obtiene 4, decide que puede agendar una quinta, y al volver a contar hay 5 porque T2 inserto una fila nueva que cumple el mismo criterio de busqueda.</a:t>
             </a:r>
           </a:p>
           <a:p>
@@ -4592,7 +4593,7 @@
                 </a:solidFill>
                 <a:latin typeface="Calibri"/>
               </a:rPr>
-              <a:t>–   READ UNCOMMITTED permite los tres: puede leer datos no confirmados.</a:t>
+              <a:t>–   La diferencia entre las dos ultimas es fina y conviene decirla de forma explicita</a:t>
             </a:r>
           </a:p>
           <a:p>
@@ -4608,39 +4609,7 @@
                 </a:solidFill>
                 <a:latin typeface="Calibri"/>
               </a:rPr>
-              <a:t>–   Es el mas rapido, practicamente no se usa en sistemas transaccionales, y Oracle ni siquiera lo implementa.</a:t>
-            </a:r>
-          </a:p>
-          <a:p>
-            <a:pPr>
-              <a:spcAft>
-                <a:spcPts val="800"/>
-              </a:spcAft>
-            </a:pPr>
-            <a:r>
-              <a:rPr sz="2000" b="0" i="0">
-                <a:solidFill>
-                  <a:srgbClr val="333333"/>
-                </a:solidFill>
-                <a:latin typeface="Calibri"/>
-              </a:rPr>
-              <a:t>–   Es el nivel por omision de PostgreSQL, Oracle y SQL Server, y por lo tanto es el nivel en el que corre la enorme mayoria de los sistemas del mundo, incluido cualquier VetCare que el estudiante construya sin tocar nada.</a:t>
-            </a:r>
-          </a:p>
-          <a:p>
-            <a:pPr>
-              <a:spcAft>
-                <a:spcPts val="800"/>
-              </a:spcAft>
-            </a:pPr>
-            <a:r>
-              <a:rPr sz="2000" b="0" i="0">
-                <a:solidFill>
-                  <a:srgbClr val="333333"/>
-                </a:solidFill>
-                <a:latin typeface="Calibri"/>
-              </a:rPr>
-              <a:t>–   REPEATABLE READ impide tambien la lectura no repetible: una fila leida dentro de la transaccion se ve igual hasta el final.</a:t>
+              <a:t>–   Porque es la pregunta de examen mas fallada: en la lectura no repetible cambio una fila que ya existia; en la fantasma aparecio o desaparecio una fila del conjunto que cumple la condicion del WHERE.</a:t>
             </a:r>
           </a:p>
         </p:txBody>
@@ -4821,7 +4790,7 @@
                 </a:solidFill>
                 <a:latin typeface="Calibri"/>
               </a:rPr>
-              <a:t>Los cuatro niveles de aislamiento se definen por lo que permiten (2/2)</a:t>
+              <a:t>Los cuatro niveles de aislamiento se definen por lo que permiten (1/2)</a:t>
             </a:r>
           </a:p>
         </p:txBody>
@@ -4860,7 +4829,7 @@
                 </a:solidFill>
                 <a:latin typeface="Calibri"/>
               </a:rPr>
-              <a:t>–   Segun el estandar todavia permite fantasmas, pero en la practica el motor InnoDB de MySQL, donde REPEATABLE READ es el nivel por omision, los bloquea usando gap locks; esa es una desviacion util del estandar y conviene aclararla</a:t>
+              <a:t>–   Los cuatro niveles de aislamiento del estandar SQL se definen exactamente por cuales de esos tres fenomenos permiten, y esa es la unica forma sensata de memorizarlos.</a:t>
             </a:r>
           </a:p>
           <a:p>
@@ -4876,7 +4845,7 @@
                 </a:solidFill>
                 <a:latin typeface="Calibri"/>
               </a:rPr>
-              <a:t>–   Porque si un estudiante prueba en DB Fiddle con MySQL no va a reproducir el fantasma y va a creer que el material esta mal.</a:t>
+              <a:t>–   READ UNCOMMITTED permite los tres: puede leer datos no confirmados.</a:t>
             </a:r>
           </a:p>
           <a:p>
@@ -4892,7 +4861,7 @@
                 </a:solidFill>
                 <a:latin typeface="Calibri"/>
               </a:rPr>
-              <a:t>–   La sentencia para cambiarlo es SET TRANSACTION ISOLATION LEVEL SERIALIZABLE</a:t>
+              <a:t>–   Es el mas rapido, practicamente no se usa en sistemas transaccionales, y Oracle ni siquiera lo implementa.</a:t>
             </a:r>
           </a:p>
           <a:p>
@@ -4908,7 +4877,23 @@
                 </a:solidFill>
                 <a:latin typeface="Calibri"/>
               </a:rPr>
-              <a:t>–   Y la regla practica que el estudiante debe recordar es que subir de nivel nunca es gratis: se paga en esperas mas largas o en transacciones abortadas que la aplicacion tiene que reintentar.</a:t>
+              <a:t>–   Es el nivel por omision de PostgreSQL, Oracle y SQL Server, y por lo tanto es el nivel en el que corre la enorme mayoria de los sistemas del mundo, incluido cualquier VetCare que el estudiante construya sin tocar nada.</a:t>
+            </a:r>
+          </a:p>
+          <a:p>
+            <a:pPr>
+              <a:spcAft>
+                <a:spcPts val="800"/>
+              </a:spcAft>
+            </a:pPr>
+            <a:r>
+              <a:rPr sz="2000" b="0" i="0">
+                <a:solidFill>
+                  <a:srgbClr val="333333"/>
+                </a:solidFill>
+                <a:latin typeface="Calibri"/>
+              </a:rPr>
+              <a:t>–   REPEATABLE READ impide tambien la lectura no repetible: una fila leida dentro de la transaccion se ve igual hasta el final.</a:t>
             </a:r>
           </a:p>
         </p:txBody>
@@ -5089,7 +5074,7 @@
                 </a:solidFill>
                 <a:latin typeface="Calibri"/>
               </a:rPr>
-              <a:t>Control pesimista: SELECT... FOR UPDATE (1/2)</a:t>
+              <a:t>Los cuatro niveles de aislamiento se definen por lo que permiten (2/2)</a:t>
             </a:r>
           </a:p>
         </p:txBody>
@@ -5128,7 +5113,7 @@
                 </a:solidFill>
                 <a:latin typeface="Calibri"/>
               </a:rPr>
-              <a:t>–   La herramienta concreta es SELECT...</a:t>
+              <a:t>–   Segun el estandar todavia permite fantasmas, pero en la practica el motor InnoDB de MySQL, donde REPEATABLE READ es el nivel por omision, los bloquea usando gap locks; esa es una desviacion util del estandar y conviene aclararla</a:t>
             </a:r>
           </a:p>
           <a:p>
@@ -5144,7 +5129,7 @@
                 </a:solidFill>
                 <a:latin typeface="Calibri"/>
               </a:rPr>
-              <a:t>–   FOR UPDATE: al leer la fila con SELECT stock FROM insumo WHERE id_insumo = 40 FOR UPDATE, el motor coloca un bloqueo exclusivo sobre esa fila</a:t>
+              <a:t>–   Porque si un estudiante prueba en DB Fiddle con MySQL no va a reproducir el fantasma y va a creer que el material esta mal.</a:t>
             </a:r>
           </a:p>
           <a:p>
@@ -5160,7 +5145,7 @@
                 </a:solidFill>
                 <a:latin typeface="Calibri"/>
               </a:rPr>
-              <a:t>–   Y cualquier otra transaccion que intente leerla con la misma clausula queda esperando hasta el COMMIT o el ROLLBACK de la primera.</a:t>
+              <a:t>–   La sentencia para cambiarlo es SET TRANSACTION ISOLATION LEVEL SERIALIZABLE</a:t>
             </a:r>
           </a:p>
           <a:p>
@@ -5176,7 +5161,7 @@
                 </a:solidFill>
                 <a:latin typeface="Calibri"/>
               </a:rPr>
-              <a:t>–   Aplicado a VetCare resuelve limpiamente el doble descuento de stock: la segunda transaccion espera, y cuando por fin entra ya lee 2 y no 5, de modo que su validacion de stock suficiente funciona sobre el dato verdadero.</a:t>
+              <a:t>–   Y la regla practica que el estudiante debe recordar es que subir de nivel nunca es gratis: se paga en esperas mas largas o en transacciones abortadas que la aplicacion tiene que reintentar.</a:t>
             </a:r>
           </a:p>
         </p:txBody>
@@ -5357,7 +5342,7 @@
                 </a:solidFill>
                 <a:latin typeface="Calibri"/>
               </a:rPr>
-              <a:t>Control pesimista: SELECT... FOR UPDATE (2/2)</a:t>
+              <a:t>Control pesimista: SELECT... FOR UPDATE (1/2)</a:t>
             </a:r>
           </a:p>
         </p:txBody>
@@ -5396,7 +5381,7 @@
                 </a:solidFill>
                 <a:latin typeface="Calibri"/>
               </a:rPr>
-              <a:t>–   Su costo es la espera, y la espera mal manejada produce un sistema que para el usuario parece caido.</a:t>
+              <a:t>–   La herramienta concreta es SELECT...</a:t>
             </a:r>
           </a:p>
           <a:p>
@@ -5412,7 +5397,7 @@
                 </a:solidFill>
                 <a:latin typeface="Calibri"/>
               </a:rPr>
-              <a:t>–   La regla de diseno asociada, y la mas importante de toda la clase, es mantener las transacciones cortas: entre el bloqueo y el COMMIT no debe haber una llamada a un servicio externo ni una pantalla esperando que el usuario confirme</a:t>
+              <a:t>–   FOR UPDATE: al leer la fila con SELECT stock FROM insumo WHERE id_insumo = 40 FOR UPDATE, el motor coloca un bloqueo exclusivo sobre esa fila</a:t>
             </a:r>
           </a:p>
           <a:p>
@@ -5428,7 +5413,23 @@
                 </a:solidFill>
                 <a:latin typeface="Calibri"/>
               </a:rPr>
-              <a:t>–   Porque mientras el usuario piensa o se va a almorzar la fila sigue bloqueada y nadie mas puede facturar ese insumo.</a:t>
+              <a:t>–   Y cualquier otra transaccion que intente leerla con la misma clausula queda esperando hasta el COMMIT o el ROLLBACK de la primera.</a:t>
+            </a:r>
+          </a:p>
+          <a:p>
+            <a:pPr>
+              <a:spcAft>
+                <a:spcPts val="800"/>
+              </a:spcAft>
+            </a:pPr>
+            <a:r>
+              <a:rPr sz="2000" b="0" i="0">
+                <a:solidFill>
+                  <a:srgbClr val="333333"/>
+                </a:solidFill>
+                <a:latin typeface="Calibri"/>
+              </a:rPr>
+              <a:t>–   Aplicado a VetCare resuelve limpiamente el doble descuento de stock: la segunda transaccion espera, y cuando por fin entra ya lee 2 y no 5, de modo que su validacion de stock suficiente funciona sobre el dato verdadero.</a:t>
             </a:r>
           </a:p>
         </p:txBody>
@@ -5609,7 +5610,7 @@
                 </a:solidFill>
                 <a:latin typeface="Calibri"/>
               </a:rPr>
-              <a:t>Control optimista: verificar unicamente al escribir (1/2)</a:t>
+              <a:t>Control pesimista: SELECT... FOR UPDATE (2/2)</a:t>
             </a:r>
           </a:p>
         </p:txBody>
@@ -5648,7 +5649,7 @@
                 </a:solidFill>
                 <a:latin typeface="Calibri"/>
               </a:rPr>
-              <a:t>–   El control optimista asume lo contrario: que los conflictos son raros, asi que no bloquea nada al leer y verifica unicamente al escribir.</a:t>
+              <a:t>–   Su costo es la espera, y la espera mal manejada produce un sistema que para el usuario parece caido.</a:t>
             </a:r>
           </a:p>
           <a:p>
@@ -5664,7 +5665,7 @@
                 </a:solidFill>
                 <a:latin typeface="Calibri"/>
               </a:rPr>
-              <a:t>–   Se implementa con una columna adicional, tipicamente llamada version, de tipo entero, o con un timestamp de ultima modificacion.</a:t>
+              <a:t>–   La regla de diseno asociada, y la mas importante de toda la clase, es mantener las transacciones cortas: entre el bloqueo y el COMMIT no debe haber una llamada a un servicio externo ni una pantalla esperando que el usuario confirme</a:t>
             </a:r>
           </a:p>
           <a:p>
@@ -5680,39 +5681,7 @@
                 </a:solidFill>
                 <a:latin typeface="Calibri"/>
               </a:rPr>
-              <a:t>–   El flujo en VetCare es este: la transaccion lee la cita 812 y obtiene version 7; el usuario edita la hora; al guardar se ejecuta</a:t>
-            </a:r>
-          </a:p>
-          <a:p>
-            <a:pPr>
-              <a:spcAft>
-                <a:spcPts val="800"/>
-              </a:spcAft>
-            </a:pPr>
-            <a:r>
-              <a:rPr sz="2000" b="0" i="0">
-                <a:solidFill>
-                  <a:srgbClr val="333333"/>
-                </a:solidFill>
-                <a:latin typeface="Calibri"/>
-              </a:rPr>
-              <a:t>–   Si otra transaccion ya paso por ahi, la version almacenada es 8 y la sentencia afecta cero filas.</a:t>
-            </a:r>
-          </a:p>
-          <a:p>
-            <a:pPr>
-              <a:spcAft>
-                <a:spcPts val="800"/>
-              </a:spcAft>
-            </a:pPr>
-            <a:r>
-              <a:rPr sz="2000" b="0" i="0">
-                <a:solidFill>
-                  <a:srgbClr val="333333"/>
-                </a:solidFill>
-                <a:latin typeface="Calibri"/>
-              </a:rPr>
-              <a:t>–   El numero de filas afectadas es la senal de conflicto, y con esa senal la aplicacion decide si reintenta o le avisa al usuario que el dato cambio mientras editaba.</a:t>
+              <a:t>–   Porque mientras el usuario piensa o se va a almorzar la fila sigue bloqueada y nadie mas puede facturar ese insumo.</a:t>
             </a:r>
           </a:p>
         </p:txBody>
@@ -5893,7 +5862,7 @@
                 </a:solidFill>
                 <a:latin typeface="Calibri"/>
               </a:rPr>
-              <a:t>Control optimista: verificar unicamente al escribir (2/2)</a:t>
+              <a:t>Control optimista: verificar unicamente al escribir (1/2)</a:t>
             </a:r>
           </a:p>
         </p:txBody>
@@ -5932,7 +5901,7 @@
                 </a:solidFill>
                 <a:latin typeface="Calibri"/>
               </a:rPr>
-              <a:t>–   El criterio para elegir entre los dos enfoques es la frecuencia real del conflicto, no el gusto: si dos personas pelean por la misma fila muchas veces al dia, el optimista reintenta sin parar y conviene el pesimista</a:t>
+              <a:t>–   El control optimista asume lo contrario: que los conflictos son raros, asi que no bloquea nada al leer y verifica unicamente al escribir.</a:t>
             </a:r>
           </a:p>
           <a:p>
@@ -5948,7 +5917,7 @@
                 </a:solidFill>
                 <a:latin typeface="Calibri"/>
               </a:rPr>
-              <a:t>–   Si el choque es excepcional, el optimista da mejor rendimiento porque nadie espera nunca.</a:t>
+              <a:t>–   Se implementa con una columna adicional, tipicamente llamada version, de tipo entero, o con un timestamp de ultima modificacion.</a:t>
             </a:r>
           </a:p>
           <a:p>
@@ -5964,7 +5933,39 @@
                 </a:solidFill>
                 <a:latin typeface="Calibri"/>
               </a:rPr>
-              <a:t>–   En VetCare, el stock de los insumos mas vendidos es un caso pesimista y la edicion de los datos de contacto de un dueno es un caso claramente optimista.</a:t>
+              <a:t>–   El flujo en VetCare es este: la transaccion lee la cita 812 y obtiene version 7; el usuario edita la hora; al guardar se ejecuta</a:t>
+            </a:r>
+          </a:p>
+          <a:p>
+            <a:pPr>
+              <a:spcAft>
+                <a:spcPts val="800"/>
+              </a:spcAft>
+            </a:pPr>
+            <a:r>
+              <a:rPr sz="2000" b="0" i="0">
+                <a:solidFill>
+                  <a:srgbClr val="333333"/>
+                </a:solidFill>
+                <a:latin typeface="Calibri"/>
+              </a:rPr>
+              <a:t>–   Si otra transaccion ya paso por ahi, la version almacenada es 8 y la sentencia afecta cero filas.</a:t>
+            </a:r>
+          </a:p>
+          <a:p>
+            <a:pPr>
+              <a:spcAft>
+                <a:spcPts val="800"/>
+              </a:spcAft>
+            </a:pPr>
+            <a:r>
+              <a:rPr sz="2000" b="0" i="0">
+                <a:solidFill>
+                  <a:srgbClr val="333333"/>
+                </a:solidFill>
+                <a:latin typeface="Calibri"/>
+              </a:rPr>
+              <a:t>–   El numero de filas afectadas es la senal de conflicto, y con esa senal la aplicacion decide si reintenta o le avisa al usuario que el dato cambio mientras editaba.</a:t>
             </a:r>
           </a:p>
         </p:txBody>
@@ -6145,141 +6146,21 @@
                 </a:solidFill>
                 <a:latin typeface="Calibri"/>
               </a:rPr>
-              <a:t>Control optimista: verificar unicamente al... — sintaxis</a:t>
-            </a:r>
-          </a:p>
-        </p:txBody>
-      </p:sp>
-      <p:sp>
-        <p:nvSpPr>
-          <p:cNvPr id="5" name="Rounded Rectangle 4"/>
-          <p:cNvSpPr/>
-          <p:nvPr/>
-        </p:nvSpPr>
-        <p:spPr>
-          <a:xfrm>
-            <a:off x="457200" y="1261872"/>
-            <a:ext cx="11277295" cy="5093208"/>
-          </a:xfrm>
-          <a:prstGeom prst="roundRect">
-            <a:avLst>
-              <a:gd name="adj" fmla="val 12000"/>
-            </a:avLst>
-          </a:prstGeom>
-          <a:solidFill>
-            <a:srgbClr val="1E2A38"/>
-          </a:solidFill>
-          <a:ln>
-            <a:noFill/>
-          </a:ln>
-        </p:spPr>
-        <p:style>
-          <a:lnRef idx="1">
-            <a:schemeClr val="accent1"/>
-          </a:lnRef>
-          <a:fillRef idx="3">
-            <a:schemeClr val="accent1"/>
-          </a:fillRef>
-          <a:effectRef idx="2">
-            <a:schemeClr val="accent1"/>
-          </a:effectRef>
-          <a:fontRef idx="minor">
-            <a:schemeClr val="lt1"/>
-          </a:fontRef>
-        </p:style>
-        <p:txBody>
-          <a:bodyPr rtlCol="0" anchor="ctr"/>
-          <a:lstStyle/>
-          <a:p>
-            <a:pPr algn="ctr"/>
-          </a:p>
-        </p:txBody>
-      </p:sp>
-      <p:sp>
-        <p:nvSpPr>
-          <p:cNvPr id="6" name="Rectangle 5"/>
-          <p:cNvSpPr/>
-          <p:nvPr/>
-        </p:nvSpPr>
-        <p:spPr>
-          <a:xfrm>
-            <a:off x="457200" y="1261872"/>
-            <a:ext cx="11277295" cy="320040"/>
-          </a:xfrm>
-          <a:prstGeom prst="rect">
-            <a:avLst/>
-          </a:prstGeom>
-          <a:solidFill>
-            <a:srgbClr val="095292"/>
-          </a:solidFill>
-          <a:ln>
-            <a:noFill/>
-          </a:ln>
-        </p:spPr>
-        <p:style>
-          <a:lnRef idx="1">
-            <a:schemeClr val="accent1"/>
-          </a:lnRef>
-          <a:fillRef idx="3">
-            <a:schemeClr val="accent1"/>
-          </a:fillRef>
-          <a:effectRef idx="2">
-            <a:schemeClr val="accent1"/>
-          </a:effectRef>
-          <a:fontRef idx="minor">
-            <a:schemeClr val="lt1"/>
-          </a:fontRef>
-        </p:style>
-        <p:txBody>
-          <a:bodyPr rtlCol="0" anchor="ctr"/>
-          <a:lstStyle/>
-          <a:p>
-            <a:pPr algn="ctr"/>
-          </a:p>
-        </p:txBody>
-      </p:sp>
-      <p:sp>
-        <p:nvSpPr>
-          <p:cNvPr id="7" name="TextBox 6"/>
+              <a:t>Control optimista: verificar unicamente al escribir (2/2)</a:t>
+            </a:r>
+          </a:p>
+        </p:txBody>
+      </p:sp>
+      <p:sp>
+        <p:nvSpPr>
+          <p:cNvPr id="5" name="TextBox 4"/>
           <p:cNvSpPr txBox="1"/>
           <p:nvPr/>
         </p:nvSpPr>
         <p:spPr>
           <a:xfrm>
-            <a:off x="685800" y="1307592"/>
-            <a:ext cx="10820095" cy="256032"/>
-          </a:xfrm>
-          <a:prstGeom prst="rect">
-            <a:avLst/>
-          </a:prstGeom>
-          <a:noFill/>
-        </p:spPr>
-        <p:txBody>
-          <a:bodyPr wrap="square" anchor="ctr"/>
-          <a:lstStyle/>
-          <a:p>
-            <a:r>
-              <a:rPr sz="1000" b="1" i="0">
-                <a:solidFill>
-                  <a:srgbClr val="269CCB"/>
-                </a:solidFill>
-                <a:latin typeface="Calibri"/>
-              </a:rPr>
-              <a:t>● ● ●</a:t>
-            </a:r>
-          </a:p>
-        </p:txBody>
-      </p:sp>
-      <p:sp>
-        <p:nvSpPr>
-          <p:cNvPr id="8" name="TextBox 7"/>
-          <p:cNvSpPr txBox="1"/>
-          <p:nvPr/>
-        </p:nvSpPr>
-        <p:spPr>
-          <a:xfrm>
-            <a:off x="777240" y="1719072"/>
-            <a:ext cx="10637215" cy="4453128"/>
+            <a:off x="457200" y="1170432"/>
+            <a:ext cx="11277295" cy="5230368"/>
           </a:xfrm>
           <a:prstGeom prst="rect">
             <a:avLst/>
@@ -6294,56 +6175,56 @@
           <a:p>
             <a:pPr>
               <a:spcAft>
-                <a:spcPts val="400"/>
+                <a:spcPts val="800"/>
               </a:spcAft>
             </a:pPr>
             <a:r>
-              <a:rPr sz="1400" b="0" i="0">
-                <a:solidFill>
-                  <a:srgbClr val="FFFFFF"/>
-                </a:solidFill>
-                <a:latin typeface="Calibri"/>
-              </a:rPr>
-              <a:t>UPDATE cita</a:t>
+              <a:rPr sz="2000" b="0" i="0">
+                <a:solidFill>
+                  <a:srgbClr val="333333"/>
+                </a:solidFill>
+                <a:latin typeface="Calibri"/>
+              </a:rPr>
+              <a:t>–   El criterio para elegir entre los dos enfoques es la frecuencia real del conflicto, no el gusto: si dos personas pelean por la misma fila muchas veces al dia, el optimista reintenta sin parar y conviene el pesimista</a:t>
             </a:r>
           </a:p>
           <a:p>
             <a:pPr>
               <a:spcAft>
-                <a:spcPts val="400"/>
+                <a:spcPts val="800"/>
               </a:spcAft>
             </a:pPr>
             <a:r>
-              <a:rPr sz="1400" b="0" i="0">
-                <a:solidFill>
-                  <a:srgbClr val="FFFFFF"/>
-                </a:solidFill>
-                <a:latin typeface="Calibri"/>
-              </a:rPr>
-              <a:t>SET fecha_hora = ..., version = 8</a:t>
+              <a:rPr sz="2000" b="0" i="0">
+                <a:solidFill>
+                  <a:srgbClr val="333333"/>
+                </a:solidFill>
+                <a:latin typeface="Calibri"/>
+              </a:rPr>
+              <a:t>–   Si el choque es excepcional, el optimista da mejor rendimiento porque nadie espera nunca.</a:t>
             </a:r>
           </a:p>
           <a:p>
             <a:pPr>
               <a:spcAft>
-                <a:spcPts val="400"/>
+                <a:spcPts val="800"/>
               </a:spcAft>
             </a:pPr>
             <a:r>
-              <a:rPr sz="1400" b="0" i="0">
-                <a:solidFill>
-                  <a:srgbClr val="FFFFFF"/>
-                </a:solidFill>
-                <a:latin typeface="Calibri"/>
-              </a:rPr>
-              <a:t>WHERE id_cita = 812 AND version = 7</a:t>
-            </a:r>
-          </a:p>
-        </p:txBody>
-      </p:sp>
-      <p:sp>
-        <p:nvSpPr>
-          <p:cNvPr id="9" name="TextBox 8"/>
+              <a:rPr sz="2000" b="0" i="0">
+                <a:solidFill>
+                  <a:srgbClr val="333333"/>
+                </a:solidFill>
+                <a:latin typeface="Calibri"/>
+              </a:rPr>
+              <a:t>–   En VetCare, el stock de los insumos mas vendidos es un caso pesimista y la edicion de los datos de contacto de un dueno es un caso claramente optimista.</a:t>
+            </a:r>
+          </a:p>
+        </p:txBody>
+      </p:sp>
+      <p:sp>
+        <p:nvSpPr>
+          <p:cNvPr id="6" name="TextBox 5"/>
           <p:cNvSpPr txBox="1"/>
           <p:nvPr/>
         </p:nvSpPr>
@@ -6517,21 +6398,141 @@
                 </a:solidFill>
                 <a:latin typeface="Calibri"/>
               </a:rPr>
-              <a:t>Deadlock: la escena de VetCare y como se evita (1/2)</a:t>
-            </a:r>
-          </a:p>
-        </p:txBody>
-      </p:sp>
-      <p:sp>
-        <p:nvSpPr>
-          <p:cNvPr id="5" name="TextBox 4"/>
+              <a:t>Control optimista: verificar unicamente al... — sintaxis</a:t>
+            </a:r>
+          </a:p>
+        </p:txBody>
+      </p:sp>
+      <p:sp>
+        <p:nvSpPr>
+          <p:cNvPr id="5" name="Rounded Rectangle 4"/>
+          <p:cNvSpPr/>
+          <p:nvPr/>
+        </p:nvSpPr>
+        <p:spPr>
+          <a:xfrm>
+            <a:off x="457200" y="1261872"/>
+            <a:ext cx="11277295" cy="5093208"/>
+          </a:xfrm>
+          <a:prstGeom prst="roundRect">
+            <a:avLst>
+              <a:gd name="adj" fmla="val 12000"/>
+            </a:avLst>
+          </a:prstGeom>
+          <a:solidFill>
+            <a:srgbClr val="1E2A38"/>
+          </a:solidFill>
+          <a:ln>
+            <a:noFill/>
+          </a:ln>
+        </p:spPr>
+        <p:style>
+          <a:lnRef idx="1">
+            <a:schemeClr val="accent1"/>
+          </a:lnRef>
+          <a:fillRef idx="3">
+            <a:schemeClr val="accent1"/>
+          </a:fillRef>
+          <a:effectRef idx="2">
+            <a:schemeClr val="accent1"/>
+          </a:effectRef>
+          <a:fontRef idx="minor">
+            <a:schemeClr val="lt1"/>
+          </a:fontRef>
+        </p:style>
+        <p:txBody>
+          <a:bodyPr rtlCol="0" anchor="ctr"/>
+          <a:lstStyle/>
+          <a:p>
+            <a:pPr algn="ctr"/>
+          </a:p>
+        </p:txBody>
+      </p:sp>
+      <p:sp>
+        <p:nvSpPr>
+          <p:cNvPr id="6" name="Rectangle 5"/>
+          <p:cNvSpPr/>
+          <p:nvPr/>
+        </p:nvSpPr>
+        <p:spPr>
+          <a:xfrm>
+            <a:off x="457200" y="1261872"/>
+            <a:ext cx="11277295" cy="320040"/>
+          </a:xfrm>
+          <a:prstGeom prst="rect">
+            <a:avLst/>
+          </a:prstGeom>
+          <a:solidFill>
+            <a:srgbClr val="095292"/>
+          </a:solidFill>
+          <a:ln>
+            <a:noFill/>
+          </a:ln>
+        </p:spPr>
+        <p:style>
+          <a:lnRef idx="1">
+            <a:schemeClr val="accent1"/>
+          </a:lnRef>
+          <a:fillRef idx="3">
+            <a:schemeClr val="accent1"/>
+          </a:fillRef>
+          <a:effectRef idx="2">
+            <a:schemeClr val="accent1"/>
+          </a:effectRef>
+          <a:fontRef idx="minor">
+            <a:schemeClr val="lt1"/>
+          </a:fontRef>
+        </p:style>
+        <p:txBody>
+          <a:bodyPr rtlCol="0" anchor="ctr"/>
+          <a:lstStyle/>
+          <a:p>
+            <a:pPr algn="ctr"/>
+          </a:p>
+        </p:txBody>
+      </p:sp>
+      <p:sp>
+        <p:nvSpPr>
+          <p:cNvPr id="7" name="TextBox 6"/>
           <p:cNvSpPr txBox="1"/>
           <p:nvPr/>
         </p:nvSpPr>
         <p:spPr>
           <a:xfrm>
-            <a:off x="457200" y="1170432"/>
-            <a:ext cx="11277295" cy="5230368"/>
+            <a:off x="685800" y="1307592"/>
+            <a:ext cx="10820095" cy="256032"/>
+          </a:xfrm>
+          <a:prstGeom prst="rect">
+            <a:avLst/>
+          </a:prstGeom>
+          <a:noFill/>
+        </p:spPr>
+        <p:txBody>
+          <a:bodyPr wrap="square" anchor="ctr"/>
+          <a:lstStyle/>
+          <a:p>
+            <a:r>
+              <a:rPr sz="1000" b="1" i="0">
+                <a:solidFill>
+                  <a:srgbClr val="269CCB"/>
+                </a:solidFill>
+                <a:latin typeface="Calibri"/>
+              </a:rPr>
+              <a:t>● ● ●</a:t>
+            </a:r>
+          </a:p>
+        </p:txBody>
+      </p:sp>
+      <p:sp>
+        <p:nvSpPr>
+          <p:cNvPr id="8" name="TextBox 7"/>
+          <p:cNvSpPr txBox="1"/>
+          <p:nvPr/>
+        </p:nvSpPr>
+        <p:spPr>
+          <a:xfrm>
+            <a:off x="777240" y="1719072"/>
+            <a:ext cx="10637215" cy="4453128"/>
           </a:xfrm>
           <a:prstGeom prst="rect">
             <a:avLst/>
@@ -6546,72 +6547,56 @@
           <a:p>
             <a:pPr>
               <a:spcAft>
-                <a:spcPts val="800"/>
+                <a:spcPts val="400"/>
               </a:spcAft>
             </a:pPr>
             <a:r>
-              <a:rPr sz="2000" b="0" i="0">
-                <a:solidFill>
-                  <a:srgbClr val="333333"/>
-                </a:solidFill>
-                <a:latin typeface="Calibri"/>
-              </a:rPr>
-              <a:t>–   La escena de VetCare es concreta: el procedimiento de facturacion bloquea primero la fila de Factura y luego la de Insumo, mientras el procedimiento de devolucion bloquea primero Insumo y luego Factura.</a:t>
+              <a:rPr sz="1400" b="0" i="0">
+                <a:solidFill>
+                  <a:srgbClr val="FFFFFF"/>
+                </a:solidFill>
+                <a:latin typeface="Calibri"/>
+              </a:rPr>
+              <a:t>UPDATE cita</a:t>
             </a:r>
           </a:p>
           <a:p>
             <a:pPr>
               <a:spcAft>
-                <a:spcPts val="800"/>
+                <a:spcPts val="400"/>
               </a:spcAft>
             </a:pPr>
             <a:r>
-              <a:rPr sz="2000" b="0" i="0">
-                <a:solidFill>
-                  <a:srgbClr val="333333"/>
-                </a:solidFill>
-                <a:latin typeface="Calibri"/>
-              </a:rPr>
-              <a:t>–   Los motores no dejan eso colgado: mantienen internamente un grafo de esperas y, al detectar un ciclo, eligen una victima y la abortan con un error explicito.</a:t>
+              <a:rPr sz="1400" b="0" i="0">
+                <a:solidFill>
+                  <a:srgbClr val="FFFFFF"/>
+                </a:solidFill>
+                <a:latin typeface="Calibri"/>
+              </a:rPr>
+              <a:t>SET fecha_hora = ..., version = 8</a:t>
             </a:r>
           </a:p>
           <a:p>
             <a:pPr>
               <a:spcAft>
-                <a:spcPts val="800"/>
+                <a:spcPts val="400"/>
               </a:spcAft>
             </a:pPr>
             <a:r>
-              <a:rPr sz="2000" b="0" i="0">
-                <a:solidFill>
-                  <a:srgbClr val="333333"/>
-                </a:solidFill>
-                <a:latin typeface="Calibri"/>
-              </a:rPr>
-              <a:t>–   En Oracle es ORA-00060, en MySQL el error 1213, en PostgreSQL el codigo 40P01.</a:t>
-            </a:r>
-          </a:p>
-          <a:p>
-            <a:pPr>
-              <a:spcAft>
-                <a:spcPts val="800"/>
-              </a:spcAft>
-            </a:pPr>
-            <a:r>
-              <a:rPr sz="2000" b="0" i="0">
-                <a:solidFill>
-                  <a:srgbClr val="333333"/>
-                </a:solidFill>
-                <a:latin typeface="Calibri"/>
-              </a:rPr>
-              <a:t>–   La consecuencia practica para el estudiante es que la aplicacion debe estar preparada para recibir ese error y reintentar la operacion, porque no es un defecto del sistema sino el mecanismo funcionando como debe.</a:t>
-            </a:r>
-          </a:p>
-        </p:txBody>
-      </p:sp>
-      <p:sp>
-        <p:nvSpPr>
-          <p:cNvPr id="6" name="TextBox 5"/>
+              <a:rPr sz="1400" b="0" i="0">
+                <a:solidFill>
+                  <a:srgbClr val="FFFFFF"/>
+                </a:solidFill>
+                <a:latin typeface="Calibri"/>
+              </a:rPr>
+              <a:t>WHERE id_cita = 812 AND version = 7</a:t>
+            </a:r>
+          </a:p>
+        </p:txBody>
+      </p:sp>
+      <p:sp>
+        <p:nvSpPr>
+          <p:cNvPr id="9" name="TextBox 8"/>
           <p:cNvSpPr txBox="1"/>
           <p:nvPr/>
         </p:nvSpPr>
@@ -6785,7 +6770,7 @@
                 </a:solidFill>
                 <a:latin typeface="Calibri"/>
               </a:rPr>
-              <a:t>Deadlock: la escena de VetCare y como se evita (2/2)</a:t>
+              <a:t>Deadlock: la escena de VetCare y como se evita (1/2)</a:t>
             </a:r>
           </a:p>
         </p:txBody>
@@ -6824,7 +6809,7 @@
                 </a:solidFill>
                 <a:latin typeface="Calibri"/>
               </a:rPr>
-              <a:t>–   Y la prevencion es sorprendentemente simple y barata: acceder siempre a las tablas en el mismo orden en todos los procedimientos.</a:t>
+              <a:t>–   La escena de VetCare es concreta: el procedimiento de facturacion bloquea primero la fila de Factura y luego la de Insumo, mientras el procedimiento de devolucion bloquea primero Insumo y luego Factura.</a:t>
             </a:r>
           </a:p>
           <a:p>
@@ -6840,7 +6825,7 @@
                 </a:solidFill>
                 <a:latin typeface="Calibri"/>
               </a:rPr>
-              <a:t>–   Si todo el codigo de VetCare toca Factura antes que Insumo, el ciclo no puede formarse nunca.</a:t>
+              <a:t>–   Los motores no dejan eso colgado: mantienen internamente un grafo de esperas y, al detectar un ciclo, eligen una victima y la abortan con un error explicito.</a:t>
             </a:r>
           </a:p>
           <a:p>
@@ -6856,7 +6841,23 @@
                 </a:solidFill>
                 <a:latin typeface="Calibri"/>
               </a:rPr>
-              <a:t>–   Ese acuerdo de orden canonico se escribe una vez en el documento de diseno, se respeta, y elimina la clase entera de problemas sin costo de rendimiento.</a:t>
+              <a:t>–   En Oracle es ORA-00060, en MySQL el error 1213, en PostgreSQL el codigo 40P01.</a:t>
+            </a:r>
+          </a:p>
+          <a:p>
+            <a:pPr>
+              <a:spcAft>
+                <a:spcPts val="800"/>
+              </a:spcAft>
+            </a:pPr>
+            <a:r>
+              <a:rPr sz="2000" b="0" i="0">
+                <a:solidFill>
+                  <a:srgbClr val="333333"/>
+                </a:solidFill>
+                <a:latin typeface="Calibri"/>
+              </a:rPr>
+              <a:t>–   La consecuencia practica para el estudiante es que la aplicacion debe estar preparada para recibir ese error y reintentar la operacion, porque no es un defecto del sistema sino el mecanismo funcionando como debe.</a:t>
             </a:r>
           </a:p>
         </p:txBody>
@@ -7037,7 +7038,7 @@
                 </a:solidFill>
                 <a:latin typeface="Calibri"/>
               </a:rPr>
-              <a:t>Antes de los niveles: la restriccion que cuesta una linea</a:t>
+              <a:t>Deadlock: la escena de VetCare y como se evita (2/2)</a:t>
             </a:r>
           </a:p>
         </p:txBody>
@@ -7076,7 +7077,7 @@
                 </a:solidFill>
                 <a:latin typeface="Calibri"/>
               </a:rPr>
-              <a:t>–   Antes de complicarse con niveles de aislamiento hay una solucion declarativa que resuelve el caso estrella de VetCare y cuesta una sola linea:.</a:t>
+              <a:t>–   Y la prevencion es sorprendentemente simple y barata: acceder siempre a las tablas en el mismo orden en todos los procedimientos.</a:t>
             </a:r>
           </a:p>
           <a:p>
@@ -7092,7 +7093,7 @@
                 </a:solidFill>
                 <a:latin typeface="Calibri"/>
               </a:rPr>
-              <a:t>–   Esto conduce a la limitacion practica del dia y a la pregunta previsible: «como demuestro dos transacciones simultaneas si DB Fiddle es una sola sesion?».</a:t>
+              <a:t>–   Si todo el codigo de VetCare toca Factura antes que Insumo, el ciclo no puede formarse nunca.</a:t>
             </a:r>
           </a:p>
           <a:p>
@@ -7108,7 +7109,23 @@
                 </a:solidFill>
                 <a:latin typeface="Calibri"/>
               </a:rPr>
-              <a:t>–   El informe de hoy se audita en el checkpoint de la Clase 11 y se convierte en clausula del contrato de operaciones de la Clase 12, donde cada procedimiento declara que errores puede lanzar, incluido el de horario ya tomado.</a:t>
+              <a:t>–   Ese acuerdo de orden canonico se escribe una vez en el documento de diseno, se respeta, y elimina la clase entera de problemas sin costo de rendimiento.</a:t>
+            </a:r>
+          </a:p>
+          <a:p>
+            <a:pPr>
+              <a:spcAft>
+                <a:spcPts val="800"/>
+              </a:spcAft>
+            </a:pPr>
+            <a:r>
+              <a:rPr sz="2000" b="0" i="0">
+                <a:solidFill>
+                  <a:srgbClr val="333333"/>
+                </a:solidFill>
+                <a:latin typeface="Calibri"/>
+              </a:rPr>
+              <a:t>–   PostgreSQL detecta el ciclo, aborta una de las dos transacciones con deadlock detected y deja seguir a la otra; la abortada debe reintentarse completa.</a:t>
             </a:r>
           </a:p>
         </p:txBody>
@@ -7440,6 +7457,40 @@
               <a:t>–   Cada lámina se sostiene sola: sirve para repasar aunque hayas faltado.</a:t>
             </a:r>
           </a:p>
+          <a:p>
+            <a:pPr>
+              <a:spcAft>
+                <a:spcPts val="800"/>
+              </a:spcAft>
+            </a:pPr>
+            <a:r>
+              <a:rPr sz="2000" b="0" i="0">
+                <a:solidFill>
+                  <a:srgbClr val="333333"/>
+                </a:solidFill>
+                <a:latin typeface="Calibri"/>
+              </a:rPr>
+              <a:t>–   </a:t>
+            </a:r>
+            <a:r>
+              <a:rPr sz="2000" b="1" i="0">
+                <a:solidFill>
+                  <a:srgbClr val="333333"/>
+                </a:solidFill>
+                <a:latin typeface="Calibri"/>
+              </a:rPr>
+              <a:t>Conceptos de hoy:</a:t>
+            </a:r>
+            <a:r>
+              <a:rPr sz="2000" b="0" i="0">
+                <a:solidFill>
+                  <a:srgbClr val="333333"/>
+                </a:solidFill>
+                <a:latin typeface="Calibri"/>
+              </a:rPr>
+              <a:t> La transaccion como unidad de todo o nada · Serializar de verdad existe, y cuesta · Los tres fenomenos indeseables, en escenas de la clinica · Los cuatro niveles de aislamiento se definen por lo que permiten.</a:t>
+            </a:r>
+          </a:p>
         </p:txBody>
       </p:sp>
       <p:sp>
@@ -7618,141 +7669,21 @@
                 </a:solidFill>
                 <a:latin typeface="Calibri"/>
               </a:rPr>
-              <a:t>Antes de los niveles: la restriccion que... — sintaxis</a:t>
-            </a:r>
-          </a:p>
-        </p:txBody>
-      </p:sp>
-      <p:sp>
-        <p:nvSpPr>
-          <p:cNvPr id="5" name="Rounded Rectangle 4"/>
-          <p:cNvSpPr/>
-          <p:nvPr/>
-        </p:nvSpPr>
-        <p:spPr>
-          <a:xfrm>
-            <a:off x="457200" y="1261872"/>
-            <a:ext cx="11277295" cy="5093208"/>
-          </a:xfrm>
-          <a:prstGeom prst="roundRect">
-            <a:avLst>
-              <a:gd name="adj" fmla="val 12000"/>
-            </a:avLst>
-          </a:prstGeom>
-          <a:solidFill>
-            <a:srgbClr val="1E2A38"/>
-          </a:solidFill>
-          <a:ln>
-            <a:noFill/>
-          </a:ln>
-        </p:spPr>
-        <p:style>
-          <a:lnRef idx="1">
-            <a:schemeClr val="accent1"/>
-          </a:lnRef>
-          <a:fillRef idx="3">
-            <a:schemeClr val="accent1"/>
-          </a:fillRef>
-          <a:effectRef idx="2">
-            <a:schemeClr val="accent1"/>
-          </a:effectRef>
-          <a:fontRef idx="minor">
-            <a:schemeClr val="lt1"/>
-          </a:fontRef>
-        </p:style>
-        <p:txBody>
-          <a:bodyPr rtlCol="0" anchor="ctr"/>
-          <a:lstStyle/>
-          <a:p>
-            <a:pPr algn="ctr"/>
-          </a:p>
-        </p:txBody>
-      </p:sp>
-      <p:sp>
-        <p:nvSpPr>
-          <p:cNvPr id="6" name="Rectangle 5"/>
-          <p:cNvSpPr/>
-          <p:nvPr/>
-        </p:nvSpPr>
-        <p:spPr>
-          <a:xfrm>
-            <a:off x="457200" y="1261872"/>
-            <a:ext cx="11277295" cy="320040"/>
-          </a:xfrm>
-          <a:prstGeom prst="rect">
-            <a:avLst/>
-          </a:prstGeom>
-          <a:solidFill>
-            <a:srgbClr val="095292"/>
-          </a:solidFill>
-          <a:ln>
-            <a:noFill/>
-          </a:ln>
-        </p:spPr>
-        <p:style>
-          <a:lnRef idx="1">
-            <a:schemeClr val="accent1"/>
-          </a:lnRef>
-          <a:fillRef idx="3">
-            <a:schemeClr val="accent1"/>
-          </a:fillRef>
-          <a:effectRef idx="2">
-            <a:schemeClr val="accent1"/>
-          </a:effectRef>
-          <a:fontRef idx="minor">
-            <a:schemeClr val="lt1"/>
-          </a:fontRef>
-        </p:style>
-        <p:txBody>
-          <a:bodyPr rtlCol="0" anchor="ctr"/>
-          <a:lstStyle/>
-          <a:p>
-            <a:pPr algn="ctr"/>
-          </a:p>
-        </p:txBody>
-      </p:sp>
-      <p:sp>
-        <p:nvSpPr>
-          <p:cNvPr id="7" name="TextBox 6"/>
+              <a:t>Antes de los niveles: la restriccion que cuesta una linea</a:t>
+            </a:r>
+          </a:p>
+        </p:txBody>
+      </p:sp>
+      <p:sp>
+        <p:nvSpPr>
+          <p:cNvPr id="5" name="TextBox 4"/>
           <p:cNvSpPr txBox="1"/>
           <p:nvPr/>
         </p:nvSpPr>
         <p:spPr>
           <a:xfrm>
-            <a:off x="685800" y="1307592"/>
-            <a:ext cx="10820095" cy="256032"/>
-          </a:xfrm>
-          <a:prstGeom prst="rect">
-            <a:avLst/>
-          </a:prstGeom>
-          <a:noFill/>
-        </p:spPr>
-        <p:txBody>
-          <a:bodyPr wrap="square" anchor="ctr"/>
-          <a:lstStyle/>
-          <a:p>
-            <a:r>
-              <a:rPr sz="1000" b="1" i="0">
-                <a:solidFill>
-                  <a:srgbClr val="269CCB"/>
-                </a:solidFill>
-                <a:latin typeface="Calibri"/>
-              </a:rPr>
-              <a:t>● ● ●</a:t>
-            </a:r>
-          </a:p>
-        </p:txBody>
-      </p:sp>
-      <p:sp>
-        <p:nvSpPr>
-          <p:cNvPr id="8" name="TextBox 7"/>
-          <p:cNvSpPr txBox="1"/>
-          <p:nvPr/>
-        </p:nvSpPr>
-        <p:spPr>
-          <a:xfrm>
-            <a:off x="777240" y="1719072"/>
-            <a:ext cx="10637215" cy="4453128"/>
+            <a:off x="457200" y="1170432"/>
+            <a:ext cx="11277295" cy="5230368"/>
           </a:xfrm>
           <a:prstGeom prst="rect">
             <a:avLst/>
@@ -7767,24 +7698,56 @@
           <a:p>
             <a:pPr>
               <a:spcAft>
-                <a:spcPts val="400"/>
+                <a:spcPts val="800"/>
               </a:spcAft>
             </a:pPr>
             <a:r>
-              <a:rPr sz="1400" b="0" i="0">
-                <a:solidFill>
-                  <a:srgbClr val="FFFFFF"/>
-                </a:solidFill>
-                <a:latin typeface="Calibri"/>
-              </a:rPr>
-              <a:t>ALTER TABLE cita ADD CONSTRAINT uq_agenda UNIQUE (id_veterinario, fecha_hora)</a:t>
-            </a:r>
-          </a:p>
-        </p:txBody>
-      </p:sp>
-      <p:sp>
-        <p:nvSpPr>
-          <p:cNvPr id="9" name="TextBox 8"/>
+              <a:rPr sz="2000" b="0" i="0">
+                <a:solidFill>
+                  <a:srgbClr val="333333"/>
+                </a:solidFill>
+                <a:latin typeface="Calibri"/>
+              </a:rPr>
+              <a:t>–   Antes de complicarse con niveles de aislamiento hay una solucion declarativa que resuelve el caso estrella de VetCare y cuesta una sola linea:.</a:t>
+            </a:r>
+          </a:p>
+          <a:p>
+            <a:pPr>
+              <a:spcAft>
+                <a:spcPts val="800"/>
+              </a:spcAft>
+            </a:pPr>
+            <a:r>
+              <a:rPr sz="2000" b="0" i="0">
+                <a:solidFill>
+                  <a:srgbClr val="333333"/>
+                </a:solidFill>
+                <a:latin typeface="Calibri"/>
+              </a:rPr>
+              <a:t>–   Esto conduce a la limitacion practica del dia y a la pregunta previsible: «como demuestro dos transacciones simultaneas si DB Fiddle es una sola sesion?».</a:t>
+            </a:r>
+          </a:p>
+          <a:p>
+            <a:pPr>
+              <a:spcAft>
+                <a:spcPts val="800"/>
+              </a:spcAft>
+            </a:pPr>
+            <a:r>
+              <a:rPr sz="2000" b="0" i="0">
+                <a:solidFill>
+                  <a:srgbClr val="333333"/>
+                </a:solidFill>
+                <a:latin typeface="Calibri"/>
+              </a:rPr>
+              <a:t>–   El informe de hoy se audita en el checkpoint de la Clase 11 y se convierte en clausula del contrato de operaciones de la Clase 12, donde cada procedimiento declara que errores puede lanzar, incluido el de horario ya tomado.</a:t>
+            </a:r>
+          </a:p>
+        </p:txBody>
+      </p:sp>
+      <p:sp>
+        <p:nvSpPr>
+          <p:cNvPr id="6" name="TextBox 5"/>
           <p:cNvSpPr txBox="1"/>
           <p:nvPr/>
         </p:nvSpPr>
@@ -7958,7 +7921,7 @@
                 </a:solidFill>
                 <a:latin typeface="Calibri"/>
               </a:rPr>
-              <a:t>La doble reserva, y la restriccion que la cierra de raiz</a:t>
+              <a:t>Antes de los niveles: la restriccion que... — sintaxis</a:t>
             </a:r>
           </a:p>
         </p:txBody>
@@ -8117,151 +8080,7 @@
                 </a:solidFill>
                 <a:latin typeface="Calibri"/>
               </a:rPr>
-              <a:t>-- Dos sesiones agendan la misma franja al mismo veterinario:</a:t>
-            </a:r>
-          </a:p>
-          <a:p>
-            <a:pPr>
-              <a:spcAft>
-                <a:spcPts val="400"/>
-              </a:spcAft>
-            </a:pPr>
-            <a:r>
-              <a:rPr sz="1400" b="0" i="0">
-                <a:solidFill>
-                  <a:srgbClr val="FFFFFF"/>
-                </a:solidFill>
-                <a:latin typeface="Calibri"/>
-              </a:rPr>
-              <a:t>-- T1: SELECT COUNT(*) FROM cita WHERE id_veterinario=3 AND fecha_hora=X; -&gt; 0</a:t>
-            </a:r>
-          </a:p>
-          <a:p>
-            <a:pPr>
-              <a:spcAft>
-                <a:spcPts val="400"/>
-              </a:spcAft>
-            </a:pPr>
-            <a:r>
-              <a:rPr sz="1400" b="0" i="0">
-                <a:solidFill>
-                  <a:srgbClr val="FFFFFF"/>
-                </a:solidFill>
-                <a:latin typeface="Calibri"/>
-              </a:rPr>
-              <a:t>-- T2: SELECT COUNT(*) ... mismo resultado -&gt; 0</a:t>
-            </a:r>
-          </a:p>
-          <a:p>
-            <a:pPr>
-              <a:spcAft>
-                <a:spcPts val="400"/>
-              </a:spcAft>
-            </a:pPr>
-            <a:r>
-              <a:rPr sz="1400" b="0" i="0">
-                <a:solidFill>
-                  <a:srgbClr val="FFFFFF"/>
-                </a:solidFill>
-                <a:latin typeface="Calibri"/>
-              </a:rPr>
-              <a:t>-- T1: INSERT ... ok      T2: INSERT ... ok      -&gt; dos citas en la misma franja</a:t>
-            </a:r>
-          </a:p>
-          <a:p>
-            <a:pPr>
-              <a:spcAft>
-                <a:spcPts val="400"/>
-              </a:spcAft>
-            </a:pPr>
-            <a:r>
-              <a:rPr sz="1400" b="0" i="0">
-                <a:solidFill>
-                  <a:srgbClr val="FFFFFF"/>
-                </a:solidFill>
-                <a:latin typeface="Calibri"/>
-              </a:rPr>
-              <a:t/>
-            </a:r>
-          </a:p>
-          <a:p>
-            <a:pPr>
-              <a:spcAft>
-                <a:spcPts val="400"/>
-              </a:spcAft>
-            </a:pPr>
-            <a:r>
-              <a:rPr sz="1400" b="0" i="0">
-                <a:solidFill>
-                  <a:srgbClr val="FFFFFF"/>
-                </a:solidFill>
-                <a:latin typeface="Calibri"/>
-              </a:rPr>
-              <a:t>-- Validar leyendo NO alcanza: entre el SELECT y el INSERT cabe otra sesion.</a:t>
-            </a:r>
-          </a:p>
-          <a:p>
-            <a:pPr>
-              <a:spcAft>
-                <a:spcPts val="400"/>
-              </a:spcAft>
-            </a:pPr>
-            <a:r>
-              <a:rPr sz="1400" b="0" i="0">
-                <a:solidFill>
-                  <a:srgbClr val="FFFFFF"/>
-                </a:solidFill>
-                <a:latin typeface="Calibri"/>
-              </a:rPr>
-              <a:t>-- La unica defensa que no depende del tiempo es una restriccion:</a:t>
-            </a:r>
-          </a:p>
-          <a:p>
-            <a:pPr>
-              <a:spcAft>
-                <a:spcPts val="400"/>
-              </a:spcAft>
-            </a:pPr>
-            <a:r>
-              <a:rPr sz="1400" b="0" i="0">
-                <a:solidFill>
-                  <a:srgbClr val="FFFFFF"/>
-                </a:solidFill>
-                <a:latin typeface="Calibri"/>
-              </a:rPr>
-              <a:t>ALTER TABLE cita</a:t>
-            </a:r>
-          </a:p>
-          <a:p>
-            <a:pPr>
-              <a:spcAft>
-                <a:spcPts val="400"/>
-              </a:spcAft>
-            </a:pPr>
-            <a:r>
-              <a:rPr sz="1400" b="0" i="0">
-                <a:solidFill>
-                  <a:srgbClr val="FFFFFF"/>
-                </a:solidFill>
-                <a:latin typeface="Calibri"/>
-              </a:rPr>
-              <a:t>  ADD CONSTRAINT uq_cita_vet_franja UNIQUE (id_veterinario, fecha_hora);</a:t>
-            </a:r>
-          </a:p>
-          <a:p>
-            <a:pPr>
-              <a:spcAft>
-                <a:spcPts val="400"/>
-              </a:spcAft>
-            </a:pPr>
-            <a:r>
-              <a:rPr sz="1400" b="0" i="0">
-                <a:solidFill>
-                  <a:srgbClr val="FFFFFF"/>
-                </a:solidFill>
-                <a:latin typeface="Calibri"/>
-              </a:rPr>
-              <a:t>-- Ahora el segundo INSERT falla, sin importar el orden ni la velocidad.</a:t>
+              <a:t>ALTER TABLE cita ADD CONSTRAINT uq_agenda UNIQUE (id_veterinario, fecha_hora)</a:t>
             </a:r>
           </a:p>
         </p:txBody>
@@ -8442,7 +8261,7 @@
                 </a:solidFill>
                 <a:latin typeface="Calibri"/>
               </a:rPr>
-              <a:t>El bloqueo explicito y la actualizacion condicional</a:t>
+              <a:t>La doble reserva, y la restriccion que la cierra de raiz</a:t>
             </a:r>
           </a:p>
         </p:txBody>
@@ -8601,7 +8420,7 @@
                 </a:solidFill>
                 <a:latin typeface="Calibri"/>
               </a:rPr>
-              <a:t>-- Opcion A: bloquear la fila y obligar a esperar</a:t>
+              <a:t>-- Dos sesiones agendan la misma franja al mismo veterinario:</a:t>
             </a:r>
           </a:p>
           <a:p>
@@ -8617,7 +8436,7 @@
                 </a:solidFill>
                 <a:latin typeface="Calibri"/>
               </a:rPr>
-              <a:t>BEGIN;</a:t>
+              <a:t>-- T1: SELECT COUNT(*) FROM cita WHERE id_veterinario=3 AND fecha_hora=X; -&gt; 0</a:t>
             </a:r>
           </a:p>
           <a:p>
@@ -8633,7 +8452,7 @@
                 </a:solidFill>
                 <a:latin typeface="Calibri"/>
               </a:rPr>
-              <a:t>SELECT stock FROM insumo WHERE id_insumo = 5 FOR UPDATE;</a:t>
+              <a:t>-- T2: SELECT COUNT(*) ... mismo resultado -&gt; 0</a:t>
             </a:r>
           </a:p>
           <a:p>
@@ -8649,7 +8468,7 @@
                 </a:solidFill>
                 <a:latin typeface="Calibri"/>
               </a:rPr>
-              <a:t>UPDATE insumo SET stock = stock - 2 WHERE id_insumo = 5;</a:t>
+              <a:t>-- T1: INSERT ... ok      T2: INSERT ... ok      -&gt; dos citas en la misma franja</a:t>
             </a:r>
           </a:p>
           <a:p>
@@ -8665,7 +8484,7 @@
                 </a:solidFill>
                 <a:latin typeface="Calibri"/>
               </a:rPr>
-              <a:t>COMMIT;</a:t>
+              <a:t/>
             </a:r>
           </a:p>
           <a:p>
@@ -8681,7 +8500,7 @@
                 </a:solidFill>
                 <a:latin typeface="Calibri"/>
               </a:rPr>
-              <a:t/>
+              <a:t>-- Validar leyendo NO alcanza: entre el SELECT y el INSERT cabe otra sesion.</a:t>
             </a:r>
           </a:p>
           <a:p>
@@ -8697,7 +8516,7 @@
                 </a:solidFill>
                 <a:latin typeface="Calibri"/>
               </a:rPr>
-              <a:t>-- Opcion B: sin bloqueo, poniendo la condicion DENTRO del UPDATE</a:t>
+              <a:t>-- La unica defensa que no depende del tiempo es una restriccion:</a:t>
             </a:r>
           </a:p>
           <a:p>
@@ -8713,7 +8532,7 @@
                 </a:solidFill>
                 <a:latin typeface="Calibri"/>
               </a:rPr>
-              <a:t>UPDATE insumo SET stock = stock - 2</a:t>
+              <a:t>ALTER TABLE cita</a:t>
             </a:r>
           </a:p>
           <a:p>
@@ -8729,7 +8548,7 @@
                 </a:solidFill>
                 <a:latin typeface="Calibri"/>
               </a:rPr>
-              <a:t>WHERE id_insumo = 5 AND stock &gt;= 2;</a:t>
+              <a:t>  ADD CONSTRAINT uq_cita_vet_franja UNIQUE (id_veterinario, fecha_hora);</a:t>
             </a:r>
           </a:p>
           <a:p>
@@ -8745,7 +8564,7 @@
                 </a:solidFill>
                 <a:latin typeface="Calibri"/>
               </a:rPr>
-              <a:t>-- Si devuelve UPDATE 0, otro llego primero. Se comprueba, no se supone.</a:t>
+              <a:t>-- Ahora el segundo INSERT falla, sin importar el orden ni la velocidad.</a:t>
             </a:r>
           </a:p>
         </p:txBody>
@@ -8926,7 +8745,7 @@
                 </a:solidFill>
                 <a:latin typeface="Calibri"/>
               </a:rPr>
-              <a:t>Niveles de aislamiento: que anomalia tapa cada uno</a:t>
+              <a:t>El bloqueo explicito y la actualizacion condicional</a:t>
             </a:r>
           </a:p>
         </p:txBody>
@@ -8940,7 +8759,7 @@
         <p:spPr>
           <a:xfrm>
             <a:off x="457200" y="1261872"/>
-            <a:ext cx="11277295" cy="5093208"/>
+            <a:ext cx="11277295" cy="4773168"/>
           </a:xfrm>
           <a:prstGeom prst="roundRect">
             <a:avLst>
@@ -9060,7 +8879,7 @@
         <p:spPr>
           <a:xfrm>
             <a:off x="777240" y="1719072"/>
-            <a:ext cx="10637215" cy="4453128"/>
+            <a:ext cx="10637215" cy="4133087"/>
           </a:xfrm>
           <a:prstGeom prst="rect">
             <a:avLst/>
@@ -9085,7 +8904,7 @@
                 </a:solidFill>
                 <a:latin typeface="Calibri"/>
               </a:rPr>
-              <a:t>SHOW transaction_isolation;      -- en PostgreSQL: read committed</a:t>
+              <a:t>-- Opcion A: bloquear la fila y obligar a esperar</a:t>
             </a:r>
           </a:p>
           <a:p>
@@ -9101,7 +8920,7 @@
                 </a:solidFill>
                 <a:latin typeface="Calibri"/>
               </a:rPr>
-              <a:t/>
+              <a:t>BEGIN;</a:t>
             </a:r>
           </a:p>
           <a:p>
@@ -9117,7 +8936,7 @@
                 </a:solidFill>
                 <a:latin typeface="Calibri"/>
               </a:rPr>
-              <a:t>BEGIN ISOLATION LEVEL REPEATABLE READ;</a:t>
+              <a:t>SELECT stock FROM insumo WHERE id_insumo = 5 FOR UPDATE;</a:t>
             </a:r>
           </a:p>
           <a:p>
@@ -9133,7 +8952,7 @@
                 </a:solidFill>
                 <a:latin typeface="Calibri"/>
               </a:rPr>
-              <a:t>  -- la misma consulta devuelve lo mismo durante toda la transaccion</a:t>
+              <a:t>UPDATE insumo SET stock = stock - 2 WHERE id_insumo = 5;</a:t>
             </a:r>
           </a:p>
           <a:p>
@@ -9181,7 +9000,7 @@
                 </a:solidFill>
                 <a:latin typeface="Calibri"/>
               </a:rPr>
-              <a:t>BEGIN ISOLATION LEVEL SERIALIZABLE;</a:t>
+              <a:t>-- Opcion B: sin bloqueo, poniendo la condicion DENTRO del UPDATE</a:t>
             </a:r>
           </a:p>
           <a:p>
@@ -9197,7 +9016,7 @@
                 </a:solidFill>
                 <a:latin typeface="Calibri"/>
               </a:rPr>
-              <a:t>  -- PostgreSQL detecta el conflicto y ABORTA una de las dos:</a:t>
+              <a:t>UPDATE insumo SET stock = stock - 2</a:t>
             </a:r>
           </a:p>
           <a:p>
@@ -9213,7 +9032,7 @@
                 </a:solidFill>
                 <a:latin typeface="Calibri"/>
               </a:rPr>
-              <a:t>  -- ERROR: could not serialize access due to read/write dependencies</a:t>
+              <a:t>WHERE id_insumo = 5 AND stock &gt;= 2;</a:t>
             </a:r>
           </a:p>
           <a:p>
@@ -9229,55 +9048,7 @@
                 </a:solidFill>
                 <a:latin typeface="Calibri"/>
               </a:rPr>
-              <a:t>COMMIT;</a:t>
-            </a:r>
-          </a:p>
-          <a:p>
-            <a:pPr>
-              <a:spcAft>
-                <a:spcPts val="400"/>
-              </a:spcAft>
-            </a:pPr>
-            <a:r>
-              <a:rPr sz="1400" b="0" i="0">
-                <a:solidFill>
-                  <a:srgbClr val="FFFFFF"/>
-                </a:solidFill>
-                <a:latin typeface="Calibri"/>
-              </a:rPr>
-              <a:t/>
-            </a:r>
-          </a:p>
-          <a:p>
-            <a:pPr>
-              <a:spcAft>
-                <a:spcPts val="400"/>
-              </a:spcAft>
-            </a:pPr>
-            <a:r>
-              <a:rPr sz="1400" b="0" i="0">
-                <a:solidFill>
-                  <a:srgbClr val="FFFFFF"/>
-                </a:solidFill>
-                <a:latin typeface="Calibri"/>
-              </a:rPr>
-              <a:t>-- PostgreSQL no tiene READ UNCOMMITTED real: se comporta como READ COMMITTED.</a:t>
-            </a:r>
-          </a:p>
-          <a:p>
-            <a:pPr>
-              <a:spcAft>
-                <a:spcPts val="400"/>
-              </a:spcAft>
-            </a:pPr>
-            <a:r>
-              <a:rPr sz="1400" b="0" i="0">
-                <a:solidFill>
-                  <a:srgbClr val="FFFFFF"/>
-                </a:solidFill>
-                <a:latin typeface="Calibri"/>
-              </a:rPr>
-              <a:t>-- Y serializable no evita el error: obliga a REINTENTAR en la aplicacion.</a:t>
+              <a:t>-- Si devuelve UPDATE 0, otro llego primero. Se comprueba, no se supone.</a:t>
             </a:r>
           </a:p>
         </p:txBody>
@@ -9285,6 +9056,41 @@
       <p:sp>
         <p:nvSpPr>
           <p:cNvPr id="9" name="TextBox 8"/>
+          <p:cNvSpPr txBox="1"/>
+          <p:nvPr/>
+        </p:nvSpPr>
+        <p:spPr>
+          <a:xfrm>
+            <a:off x="457200" y="6080760"/>
+            <a:ext cx="11277295" cy="320040"/>
+          </a:xfrm>
+          <a:prstGeom prst="rect">
+            <a:avLst/>
+          </a:prstGeom>
+          <a:noFill/>
+        </p:spPr>
+        <p:txBody>
+          <a:bodyPr wrap="square">
+            <a:spAutoFit/>
+          </a:bodyPr>
+          <a:lstStyle/>
+          <a:p>
+            <a:pPr algn="ctr"/>
+            <a:r>
+              <a:rPr sz="1200" b="0" i="1">
+                <a:solidFill>
+                  <a:srgbClr val="666666"/>
+                </a:solidFill>
+                <a:latin typeface="Calibri"/>
+              </a:rPr>
+              <a:t>FOR UPDATE bloquea la fila leida hasta el COMMIT: la segunda sesion espera en vez de decidir con un dato viejo. El UPDATE con la condicion en el WHERE logra lo mismo en una sola sentencia.</a:t>
+            </a:r>
+          </a:p>
+        </p:txBody>
+      </p:sp>
+      <p:sp>
+        <p:nvSpPr>
+          <p:cNvPr id="10" name="TextBox 9"/>
           <p:cNvSpPr txBox="1"/>
           <p:nvPr/>
         </p:nvSpPr>
@@ -9352,7 +9158,7 @@
         <p:spPr>
           <a:xfrm>
             <a:off x="0" y="0"/>
-            <a:ext cx="12191695" cy="1170432"/>
+            <a:ext cx="12191695" cy="960120"/>
           </a:xfrm>
           <a:prstGeom prst="rect">
             <a:avLst/>
@@ -9394,7 +9200,7 @@
         </p:nvSpPr>
         <p:spPr>
           <a:xfrm>
-            <a:off x="0" y="1170432"/>
+            <a:off x="0" y="960120"/>
             <a:ext cx="12191695" cy="41148"/>
           </a:xfrm>
           <a:prstGeom prst="rect">
@@ -9438,7 +9244,7 @@
         <p:spPr>
           <a:xfrm>
             <a:off x="457200" y="164592"/>
-            <a:ext cx="11277295" cy="384048"/>
+            <a:ext cx="11277295" cy="502920"/>
           </a:xfrm>
           <a:prstGeom prst="rect">
             <a:avLst/>
@@ -9458,60 +9264,69 @@
                 </a:solidFill>
                 <a:latin typeface="Calibri"/>
               </a:rPr>
-              <a:t>Doble reserva sin control de concurrencia</a:t>
-            </a:r>
-          </a:p>
-        </p:txBody>
-      </p:sp>
-      <p:sp>
-        <p:nvSpPr>
-          <p:cNvPr id="5" name="TextBox 4"/>
-          <p:cNvSpPr txBox="1"/>
-          <p:nvPr/>
-        </p:nvSpPr>
-        <p:spPr>
-          <a:xfrm>
-            <a:off x="457200" y="566928"/>
-            <a:ext cx="11277295" cy="411480"/>
-          </a:xfrm>
-          <a:prstGeom prst="rect">
-            <a:avLst/>
-          </a:prstGeom>
-          <a:noFill/>
-        </p:spPr>
-        <p:txBody>
-          <a:bodyPr wrap="square">
-            <a:spAutoFit/>
-          </a:bodyPr>
-          <a:lstStyle/>
-          <a:p>
-            <a:r>
-              <a:rPr sz="1400" b="0" i="0">
-                <a:solidFill>
-                  <a:srgbClr val="B8D8EE"/>
-                </a:solidFill>
-                <a:latin typeface="Calibri"/>
-              </a:rPr>
-              <a:t>Dos transacciones concurrentes leen “libre” antes de que ninguna confirme</a:t>
-            </a:r>
-          </a:p>
-        </p:txBody>
-      </p:sp>
-      <p:sp>
-        <p:nvSpPr>
-          <p:cNvPr id="6" name="Rounded Rectangle 5"/>
+              <a:t>Niveles de aislamiento: que anomalia tapa cada uno</a:t>
+            </a:r>
+          </a:p>
+        </p:txBody>
+      </p:sp>
+      <p:sp>
+        <p:nvSpPr>
+          <p:cNvPr id="5" name="Rounded Rectangle 4"/>
           <p:cNvSpPr/>
           <p:nvPr/>
         </p:nvSpPr>
         <p:spPr>
           <a:xfrm>
-            <a:off x="731520" y="2011680"/>
-            <a:ext cx="2834640" cy="914400"/>
+            <a:off x="457200" y="1261872"/>
+            <a:ext cx="11277295" cy="5093208"/>
           </a:xfrm>
           <a:prstGeom prst="roundRect">
             <a:avLst>
               <a:gd name="adj" fmla="val 12000"/>
             </a:avLst>
+          </a:prstGeom>
+          <a:solidFill>
+            <a:srgbClr val="1E2A38"/>
+          </a:solidFill>
+          <a:ln>
+            <a:noFill/>
+          </a:ln>
+        </p:spPr>
+        <p:style>
+          <a:lnRef idx="1">
+            <a:schemeClr val="accent1"/>
+          </a:lnRef>
+          <a:fillRef idx="3">
+            <a:schemeClr val="accent1"/>
+          </a:fillRef>
+          <a:effectRef idx="2">
+            <a:schemeClr val="accent1"/>
+          </a:effectRef>
+          <a:fontRef idx="minor">
+            <a:schemeClr val="lt1"/>
+          </a:fontRef>
+        </p:style>
+        <p:txBody>
+          <a:bodyPr rtlCol="0" anchor="ctr"/>
+          <a:lstStyle/>
+          <a:p>
+            <a:pPr algn="ctr"/>
+          </a:p>
+        </p:txBody>
+      </p:sp>
+      <p:sp>
+        <p:nvSpPr>
+          <p:cNvPr id="6" name="Rectangle 5"/>
+          <p:cNvSpPr/>
+          <p:nvPr/>
+        </p:nvSpPr>
+        <p:spPr>
+          <a:xfrm>
+            <a:off x="457200" y="1261872"/>
+            <a:ext cx="11277295" cy="320040"/>
+          </a:xfrm>
+          <a:prstGeom prst="rect">
+            <a:avLst/>
           </a:prstGeom>
           <a:solidFill>
             <a:srgbClr val="095292"/>
@@ -9535,234 +9350,55 @@
           </a:fontRef>
         </p:style>
         <p:txBody>
-          <a:bodyPr rtlCol="0" anchor="ctr" wrap="square"/>
+          <a:bodyPr rtlCol="0" anchor="ctr"/>
           <a:lstStyle/>
           <a:p>
             <a:pPr algn="ctr"/>
-            <a:r>
-              <a:rPr sz="1300" b="1" i="0">
-                <a:solidFill>
-                  <a:srgbClr val="FFFFFF"/>
-                </a:solidFill>
-                <a:latin typeface="Calibri"/>
-              </a:rPr>
-              <a:t>T1 (Recepción A)
-lee franja: LIBRE</a:t>
-            </a:r>
-          </a:p>
-        </p:txBody>
-      </p:sp>
-      <p:sp>
-        <p:nvSpPr>
-          <p:cNvPr id="7" name="Rounded Rectangle 6"/>
-          <p:cNvSpPr/>
-          <p:nvPr/>
-        </p:nvSpPr>
-        <p:spPr>
-          <a:xfrm>
-            <a:off x="4206240" y="2011680"/>
-            <a:ext cx="2834640" cy="914400"/>
-          </a:xfrm>
-          <a:prstGeom prst="roundRect">
-            <a:avLst>
-              <a:gd name="adj" fmla="val 12000"/>
-            </a:avLst>
-          </a:prstGeom>
-          <a:solidFill>
-            <a:srgbClr val="095292"/>
-          </a:solidFill>
-          <a:ln>
-            <a:noFill/>
-          </a:ln>
-        </p:spPr>
-        <p:style>
-          <a:lnRef idx="1">
-            <a:schemeClr val="accent1"/>
-          </a:lnRef>
-          <a:fillRef idx="3">
-            <a:schemeClr val="accent1"/>
-          </a:fillRef>
-          <a:effectRef idx="2">
-            <a:schemeClr val="accent1"/>
-          </a:effectRef>
-          <a:fontRef idx="minor">
-            <a:schemeClr val="lt1"/>
-          </a:fontRef>
-        </p:style>
-        <p:txBody>
-          <a:bodyPr rtlCol="0" anchor="ctr" wrap="square"/>
-          <a:lstStyle/>
-          <a:p>
-            <a:pPr algn="ctr"/>
-            <a:r>
-              <a:rPr sz="1300" b="1" i="0">
-                <a:solidFill>
-                  <a:srgbClr val="FFFFFF"/>
-                </a:solidFill>
-                <a:latin typeface="Calibri"/>
-              </a:rPr>
-              <a:t>T1: INSERT cita
-COMMIT → OK</a:t>
-            </a:r>
-          </a:p>
-        </p:txBody>
-      </p:sp>
-      <p:sp>
-        <p:nvSpPr>
-          <p:cNvPr id="8" name="Rounded Rectangle 7"/>
-          <p:cNvSpPr/>
-          <p:nvPr/>
-        </p:nvSpPr>
-        <p:spPr>
-          <a:xfrm>
-            <a:off x="731520" y="3383280"/>
-            <a:ext cx="2834640" cy="914400"/>
-          </a:xfrm>
-          <a:prstGeom prst="roundRect">
-            <a:avLst>
-              <a:gd name="adj" fmla="val 12000"/>
-            </a:avLst>
-          </a:prstGeom>
-          <a:solidFill>
-            <a:srgbClr val="269CCB"/>
-          </a:solidFill>
-          <a:ln>
-            <a:noFill/>
-          </a:ln>
-        </p:spPr>
-        <p:style>
-          <a:lnRef idx="1">
-            <a:schemeClr val="accent1"/>
-          </a:lnRef>
-          <a:fillRef idx="3">
-            <a:schemeClr val="accent1"/>
-          </a:fillRef>
-          <a:effectRef idx="2">
-            <a:schemeClr val="accent1"/>
-          </a:effectRef>
-          <a:fontRef idx="minor">
-            <a:schemeClr val="lt1"/>
-          </a:fontRef>
-        </p:style>
-        <p:txBody>
-          <a:bodyPr rtlCol="0" anchor="ctr" wrap="square"/>
-          <a:lstStyle/>
-          <a:p>
-            <a:pPr algn="ctr"/>
-            <a:r>
-              <a:rPr sz="1300" b="1" i="0">
-                <a:solidFill>
-                  <a:srgbClr val="FFFFFF"/>
-                </a:solidFill>
-                <a:latin typeface="Calibri"/>
-              </a:rPr>
-              <a:t>T2 (Recepción B)
-lee franja: LIBRE</a:t>
-            </a:r>
-          </a:p>
-        </p:txBody>
-      </p:sp>
-      <p:sp>
-        <p:nvSpPr>
-          <p:cNvPr id="9" name="Rounded Rectangle 8"/>
-          <p:cNvSpPr/>
-          <p:nvPr/>
-        </p:nvSpPr>
-        <p:spPr>
-          <a:xfrm>
-            <a:off x="4206240" y="3383280"/>
-            <a:ext cx="2834640" cy="914400"/>
-          </a:xfrm>
-          <a:prstGeom prst="roundRect">
-            <a:avLst>
-              <a:gd name="adj" fmla="val 12000"/>
-            </a:avLst>
-          </a:prstGeom>
-          <a:solidFill>
-            <a:srgbClr val="A02030"/>
-          </a:solidFill>
-          <a:ln>
-            <a:noFill/>
-          </a:ln>
-        </p:spPr>
-        <p:style>
-          <a:lnRef idx="1">
-            <a:schemeClr val="accent1"/>
-          </a:lnRef>
-          <a:fillRef idx="3">
-            <a:schemeClr val="accent1"/>
-          </a:fillRef>
-          <a:effectRef idx="2">
-            <a:schemeClr val="accent1"/>
-          </a:effectRef>
-          <a:fontRef idx="minor">
-            <a:schemeClr val="lt1"/>
-          </a:fontRef>
-        </p:style>
-        <p:txBody>
-          <a:bodyPr rtlCol="0" anchor="ctr" wrap="square"/>
-          <a:lstStyle/>
-          <a:p>
-            <a:pPr algn="ctr"/>
-            <a:r>
-              <a:rPr sz="1300" b="1" i="0">
-                <a:solidFill>
-                  <a:srgbClr val="FFFFFF"/>
-                </a:solidFill>
-                <a:latin typeface="Calibri"/>
-              </a:rPr>
-              <a:t>T2: INSERT cita
-COMMIT → ¡DOBLE RESERVA!</a:t>
-            </a:r>
-          </a:p>
-        </p:txBody>
-      </p:sp>
-      <p:cxnSp>
-        <p:nvCxnSpPr>
-          <p:cNvPr id="10" name="Connector 9"/>
-          <p:cNvCxnSpPr/>
-          <p:nvPr/>
-        </p:nvCxnSpPr>
-        <p:spPr>
-          <a:xfrm>
-            <a:off x="3566160" y="2468880"/>
-            <a:ext cx="640080" cy="0"/>
-          </a:xfrm>
-          <a:prstGeom prst="line">
-            <a:avLst/>
-          </a:prstGeom>
-          <a:ln w="22225">
-            <a:solidFill>
-              <a:srgbClr val="666666"/>
-            </a:solidFill>
-            <a:tailEnd type="triangle" w="med" len="med"/>
-          </a:ln>
-        </p:spPr>
-        <p:style>
-          <a:lnRef idx="2">
-            <a:schemeClr val="accent1"/>
-          </a:lnRef>
-          <a:fillRef idx="0">
-            <a:schemeClr val="accent1"/>
-          </a:fillRef>
-          <a:effectRef idx="1">
-            <a:schemeClr val="accent1"/>
-          </a:effectRef>
-          <a:fontRef idx="minor">
-            <a:schemeClr val="tx1"/>
-          </a:fontRef>
-        </p:style>
-      </p:cxnSp>
-      <p:sp>
-        <p:nvSpPr>
-          <p:cNvPr id="11" name="TextBox 10"/>
+          </a:p>
+        </p:txBody>
+      </p:sp>
+      <p:sp>
+        <p:nvSpPr>
+          <p:cNvPr id="7" name="TextBox 6"/>
           <p:cNvSpPr txBox="1"/>
           <p:nvPr/>
         </p:nvSpPr>
         <p:spPr>
           <a:xfrm>
-            <a:off x="3063240" y="2267712"/>
-            <a:ext cx="1645920" cy="320040"/>
+            <a:off x="685800" y="1307592"/>
+            <a:ext cx="10820095" cy="256032"/>
+          </a:xfrm>
+          <a:prstGeom prst="rect">
+            <a:avLst/>
+          </a:prstGeom>
+          <a:noFill/>
+        </p:spPr>
+        <p:txBody>
+          <a:bodyPr wrap="square" anchor="ctr"/>
+          <a:lstStyle/>
+          <a:p>
+            <a:r>
+              <a:rPr sz="1000" b="1" i="0">
+                <a:solidFill>
+                  <a:srgbClr val="269CCB"/>
+                </a:solidFill>
+                <a:latin typeface="Calibri"/>
+              </a:rPr>
+              <a:t>● ● ●</a:t>
+            </a:r>
+          </a:p>
+        </p:txBody>
+      </p:sp>
+      <p:sp>
+        <p:nvSpPr>
+          <p:cNvPr id="8" name="TextBox 7"/>
+          <p:cNvSpPr txBox="1"/>
+          <p:nvPr/>
+        </p:nvSpPr>
+        <p:spPr>
+          <a:xfrm>
+            <a:off x="777240" y="1719072"/>
+            <a:ext cx="10637215" cy="4453128"/>
           </a:xfrm>
           <a:prstGeom prst="rect">
             <a:avLst/>
@@ -9775,127 +9411,218 @@
           </a:bodyPr>
           <a:lstStyle/>
           <a:p>
-            <a:pPr algn="ctr"/>
-            <a:r>
-              <a:rPr sz="1000" b="0" i="1">
-                <a:solidFill>
-                  <a:srgbClr val="666666"/>
-                </a:solidFill>
-                <a:latin typeface="Calibri"/>
-              </a:rPr>
-              <a:t>tiempo →</a:t>
-            </a:r>
-          </a:p>
-        </p:txBody>
-      </p:sp>
-      <p:cxnSp>
-        <p:nvCxnSpPr>
-          <p:cNvPr id="12" name="Connector 11"/>
-          <p:cNvCxnSpPr/>
-          <p:nvPr/>
-        </p:nvCxnSpPr>
-        <p:spPr>
-          <a:xfrm>
-            <a:off x="3566160" y="3840480"/>
-            <a:ext cx="640080" cy="0"/>
-          </a:xfrm>
-          <a:prstGeom prst="line">
-            <a:avLst/>
-          </a:prstGeom>
-          <a:ln w="22225">
-            <a:solidFill>
-              <a:srgbClr val="666666"/>
-            </a:solidFill>
-            <a:tailEnd type="triangle" w="med" len="med"/>
-          </a:ln>
-        </p:spPr>
-        <p:style>
-          <a:lnRef idx="2">
-            <a:schemeClr val="accent1"/>
-          </a:lnRef>
-          <a:fillRef idx="0">
-            <a:schemeClr val="accent1"/>
-          </a:fillRef>
-          <a:effectRef idx="1">
-            <a:schemeClr val="accent1"/>
-          </a:effectRef>
-          <a:fontRef idx="minor">
-            <a:schemeClr val="tx1"/>
-          </a:fontRef>
-        </p:style>
-      </p:cxnSp>
-      <p:sp>
-        <p:nvSpPr>
-          <p:cNvPr id="13" name="TextBox 12"/>
-          <p:cNvSpPr txBox="1"/>
-          <p:nvPr/>
-        </p:nvSpPr>
-        <p:spPr>
-          <a:xfrm>
-            <a:off x="3063240" y="3639312"/>
-            <a:ext cx="1645920" cy="320040"/>
-          </a:xfrm>
-          <a:prstGeom prst="rect">
-            <a:avLst/>
-          </a:prstGeom>
-          <a:noFill/>
-        </p:spPr>
-        <p:txBody>
-          <a:bodyPr wrap="square">
-            <a:spAutoFit/>
-          </a:bodyPr>
-          <a:lstStyle/>
-          <a:p>
-            <a:pPr algn="ctr"/>
-            <a:r>
-              <a:rPr sz="1000" b="0" i="1">
-                <a:solidFill>
-                  <a:srgbClr val="666666"/>
-                </a:solidFill>
-                <a:latin typeface="Calibri"/>
-              </a:rPr>
-              <a:t>tiempo →</a:t>
-            </a:r>
-          </a:p>
-        </p:txBody>
-      </p:sp>
-      <p:sp>
-        <p:nvSpPr>
-          <p:cNvPr id="14" name="TextBox 13"/>
-          <p:cNvSpPr txBox="1"/>
-          <p:nvPr/>
-        </p:nvSpPr>
-        <p:spPr>
-          <a:xfrm>
-            <a:off x="457200" y="6263640"/>
-            <a:ext cx="11277295" cy="411480"/>
-          </a:xfrm>
-          <a:prstGeom prst="rect">
-            <a:avLst/>
-          </a:prstGeom>
-          <a:noFill/>
-        </p:spPr>
-        <p:txBody>
-          <a:bodyPr wrap="square">
-            <a:spAutoFit/>
-          </a:bodyPr>
-          <a:lstStyle/>
-          <a:p>
-            <a:r>
-              <a:rPr sz="1100" b="0" i="1">
-                <a:solidFill>
-                  <a:srgbClr val="666666"/>
-                </a:solidFill>
-                <a:latin typeface="Calibri"/>
-              </a:rPr>
-              <a:t>Mitigación: UNIQUE(id_veterinario, fecha_hora) hace que el segundo INSERT falle automáticamente en vez de crear la doble reserva.</a:t>
-            </a:r>
-          </a:p>
-        </p:txBody>
-      </p:sp>
-      <p:sp>
-        <p:nvSpPr>
-          <p:cNvPr id="15" name="TextBox 14"/>
+            <a:pPr>
+              <a:spcAft>
+                <a:spcPts val="400"/>
+              </a:spcAft>
+            </a:pPr>
+            <a:r>
+              <a:rPr sz="1400" b="0" i="0">
+                <a:solidFill>
+                  <a:srgbClr val="FFFFFF"/>
+                </a:solidFill>
+                <a:latin typeface="Calibri"/>
+              </a:rPr>
+              <a:t>SHOW transaction_isolation;      -- en PostgreSQL: read committed</a:t>
+            </a:r>
+          </a:p>
+          <a:p>
+            <a:pPr>
+              <a:spcAft>
+                <a:spcPts val="400"/>
+              </a:spcAft>
+            </a:pPr>
+            <a:r>
+              <a:rPr sz="1400" b="0" i="0">
+                <a:solidFill>
+                  <a:srgbClr val="FFFFFF"/>
+                </a:solidFill>
+                <a:latin typeface="Calibri"/>
+              </a:rPr>
+              <a:t/>
+            </a:r>
+          </a:p>
+          <a:p>
+            <a:pPr>
+              <a:spcAft>
+                <a:spcPts val="400"/>
+              </a:spcAft>
+            </a:pPr>
+            <a:r>
+              <a:rPr sz="1400" b="0" i="0">
+                <a:solidFill>
+                  <a:srgbClr val="FFFFFF"/>
+                </a:solidFill>
+                <a:latin typeface="Calibri"/>
+              </a:rPr>
+              <a:t>BEGIN ISOLATION LEVEL REPEATABLE READ;</a:t>
+            </a:r>
+          </a:p>
+          <a:p>
+            <a:pPr>
+              <a:spcAft>
+                <a:spcPts val="400"/>
+              </a:spcAft>
+            </a:pPr>
+            <a:r>
+              <a:rPr sz="1400" b="0" i="0">
+                <a:solidFill>
+                  <a:srgbClr val="FFFFFF"/>
+                </a:solidFill>
+                <a:latin typeface="Calibri"/>
+              </a:rPr>
+              <a:t>  -- la misma consulta devuelve lo mismo durante toda la transaccion</a:t>
+            </a:r>
+          </a:p>
+          <a:p>
+            <a:pPr>
+              <a:spcAft>
+                <a:spcPts val="400"/>
+              </a:spcAft>
+            </a:pPr>
+            <a:r>
+              <a:rPr sz="1400" b="0" i="0">
+                <a:solidFill>
+                  <a:srgbClr val="FFFFFF"/>
+                </a:solidFill>
+                <a:latin typeface="Calibri"/>
+              </a:rPr>
+              <a:t>COMMIT;</a:t>
+            </a:r>
+          </a:p>
+          <a:p>
+            <a:pPr>
+              <a:spcAft>
+                <a:spcPts val="400"/>
+              </a:spcAft>
+            </a:pPr>
+            <a:r>
+              <a:rPr sz="1400" b="0" i="0">
+                <a:solidFill>
+                  <a:srgbClr val="FFFFFF"/>
+                </a:solidFill>
+                <a:latin typeface="Calibri"/>
+              </a:rPr>
+              <a:t/>
+            </a:r>
+          </a:p>
+          <a:p>
+            <a:pPr>
+              <a:spcAft>
+                <a:spcPts val="400"/>
+              </a:spcAft>
+            </a:pPr>
+            <a:r>
+              <a:rPr sz="1400" b="0" i="0">
+                <a:solidFill>
+                  <a:srgbClr val="FFFFFF"/>
+                </a:solidFill>
+                <a:latin typeface="Calibri"/>
+              </a:rPr>
+              <a:t>BEGIN ISOLATION LEVEL SERIALIZABLE;</a:t>
+            </a:r>
+          </a:p>
+          <a:p>
+            <a:pPr>
+              <a:spcAft>
+                <a:spcPts val="400"/>
+              </a:spcAft>
+            </a:pPr>
+            <a:r>
+              <a:rPr sz="1400" b="0" i="0">
+                <a:solidFill>
+                  <a:srgbClr val="FFFFFF"/>
+                </a:solidFill>
+                <a:latin typeface="Calibri"/>
+              </a:rPr>
+              <a:t>  -- PostgreSQL detecta el conflicto y ABORTA una de las dos:</a:t>
+            </a:r>
+          </a:p>
+          <a:p>
+            <a:pPr>
+              <a:spcAft>
+                <a:spcPts val="400"/>
+              </a:spcAft>
+            </a:pPr>
+            <a:r>
+              <a:rPr sz="1400" b="0" i="0">
+                <a:solidFill>
+                  <a:srgbClr val="FFFFFF"/>
+                </a:solidFill>
+                <a:latin typeface="Calibri"/>
+              </a:rPr>
+              <a:t>  -- ERROR: could not serialize access due to read/write dependencies</a:t>
+            </a:r>
+          </a:p>
+          <a:p>
+            <a:pPr>
+              <a:spcAft>
+                <a:spcPts val="400"/>
+              </a:spcAft>
+            </a:pPr>
+            <a:r>
+              <a:rPr sz="1400" b="0" i="0">
+                <a:solidFill>
+                  <a:srgbClr val="FFFFFF"/>
+                </a:solidFill>
+                <a:latin typeface="Calibri"/>
+              </a:rPr>
+              <a:t>COMMIT;</a:t>
+            </a:r>
+          </a:p>
+          <a:p>
+            <a:pPr>
+              <a:spcAft>
+                <a:spcPts val="400"/>
+              </a:spcAft>
+            </a:pPr>
+            <a:r>
+              <a:rPr sz="1400" b="0" i="0">
+                <a:solidFill>
+                  <a:srgbClr val="FFFFFF"/>
+                </a:solidFill>
+                <a:latin typeface="Calibri"/>
+              </a:rPr>
+              <a:t/>
+            </a:r>
+          </a:p>
+          <a:p>
+            <a:pPr>
+              <a:spcAft>
+                <a:spcPts val="400"/>
+              </a:spcAft>
+            </a:pPr>
+            <a:r>
+              <a:rPr sz="1400" b="0" i="0">
+                <a:solidFill>
+                  <a:srgbClr val="FFFFFF"/>
+                </a:solidFill>
+                <a:latin typeface="Calibri"/>
+              </a:rPr>
+              <a:t>-- PostgreSQL no tiene READ UNCOMMITTED real: se comporta como READ COMMITTED.</a:t>
+            </a:r>
+          </a:p>
+          <a:p>
+            <a:pPr>
+              <a:spcAft>
+                <a:spcPts val="400"/>
+              </a:spcAft>
+            </a:pPr>
+            <a:r>
+              <a:rPr sz="1400" b="0" i="0">
+                <a:solidFill>
+                  <a:srgbClr val="FFFFFF"/>
+                </a:solidFill>
+                <a:latin typeface="Calibri"/>
+              </a:rPr>
+              <a:t>-- Y serializable no evita el error: obliga a REINTENTAR en la aplicacion.</a:t>
+            </a:r>
+          </a:p>
+        </p:txBody>
+      </p:sp>
+      <p:sp>
+        <p:nvSpPr>
+          <p:cNvPr id="9" name="TextBox 8"/>
           <p:cNvSpPr txBox="1"/>
           <p:nvPr/>
         </p:nvSpPr>
@@ -9963,7 +9690,7 @@
         <p:spPr>
           <a:xfrm>
             <a:off x="0" y="0"/>
-            <a:ext cx="12191695" cy="960120"/>
+            <a:ext cx="12191695" cy="1170432"/>
           </a:xfrm>
           <a:prstGeom prst="rect">
             <a:avLst/>
@@ -10005,7 +9732,7 @@
         </p:nvSpPr>
         <p:spPr>
           <a:xfrm>
-            <a:off x="0" y="960120"/>
+            <a:off x="0" y="1170432"/>
             <a:ext cx="12191695" cy="41148"/>
           </a:xfrm>
           <a:prstGeom prst="rect">
@@ -10049,7 +9776,7 @@
         <p:spPr>
           <a:xfrm>
             <a:off x="457200" y="164592"/>
-            <a:ext cx="11277295" cy="502920"/>
+            <a:ext cx="11277295" cy="384048"/>
           </a:xfrm>
           <a:prstGeom prst="rect">
             <a:avLst/>
@@ -10069,69 +9796,60 @@
                 </a:solidFill>
                 <a:latin typeface="Calibri"/>
               </a:rPr>
-              <a:t>La restriccion que hace imposible la doble reserva</a:t>
-            </a:r>
-          </a:p>
-        </p:txBody>
-      </p:sp>
-      <p:sp>
-        <p:nvSpPr>
-          <p:cNvPr id="5" name="Rounded Rectangle 4"/>
+              <a:t>Doble reserva sin control de concurrencia</a:t>
+            </a:r>
+          </a:p>
+        </p:txBody>
+      </p:sp>
+      <p:sp>
+        <p:nvSpPr>
+          <p:cNvPr id="5" name="TextBox 4"/>
+          <p:cNvSpPr txBox="1"/>
+          <p:nvPr/>
+        </p:nvSpPr>
+        <p:spPr>
+          <a:xfrm>
+            <a:off x="457200" y="566928"/>
+            <a:ext cx="11277295" cy="411480"/>
+          </a:xfrm>
+          <a:prstGeom prst="rect">
+            <a:avLst/>
+          </a:prstGeom>
+          <a:noFill/>
+        </p:spPr>
+        <p:txBody>
+          <a:bodyPr wrap="square">
+            <a:spAutoFit/>
+          </a:bodyPr>
+          <a:lstStyle/>
+          <a:p>
+            <a:r>
+              <a:rPr sz="1400" b="0" i="0">
+                <a:solidFill>
+                  <a:srgbClr val="B8D8EE"/>
+                </a:solidFill>
+                <a:latin typeface="Calibri"/>
+              </a:rPr>
+              <a:t>Dos transacciones concurrentes leen “libre” antes de que ninguna confirme</a:t>
+            </a:r>
+          </a:p>
+        </p:txBody>
+      </p:sp>
+      <p:sp>
+        <p:nvSpPr>
+          <p:cNvPr id="6" name="Rounded Rectangle 5"/>
           <p:cNvSpPr/>
           <p:nvPr/>
         </p:nvSpPr>
         <p:spPr>
           <a:xfrm>
-            <a:off x="457200" y="1261872"/>
-            <a:ext cx="11277295" cy="4773168"/>
+            <a:off x="731520" y="2011680"/>
+            <a:ext cx="2834640" cy="914400"/>
           </a:xfrm>
           <a:prstGeom prst="roundRect">
             <a:avLst>
               <a:gd name="adj" fmla="val 12000"/>
             </a:avLst>
-          </a:prstGeom>
-          <a:solidFill>
-            <a:srgbClr val="1E2A38"/>
-          </a:solidFill>
-          <a:ln>
-            <a:noFill/>
-          </a:ln>
-        </p:spPr>
-        <p:style>
-          <a:lnRef idx="1">
-            <a:schemeClr val="accent1"/>
-          </a:lnRef>
-          <a:fillRef idx="3">
-            <a:schemeClr val="accent1"/>
-          </a:fillRef>
-          <a:effectRef idx="2">
-            <a:schemeClr val="accent1"/>
-          </a:effectRef>
-          <a:fontRef idx="minor">
-            <a:schemeClr val="lt1"/>
-          </a:fontRef>
-        </p:style>
-        <p:txBody>
-          <a:bodyPr rtlCol="0" anchor="ctr"/>
-          <a:lstStyle/>
-          <a:p>
-            <a:pPr algn="ctr"/>
-          </a:p>
-        </p:txBody>
-      </p:sp>
-      <p:sp>
-        <p:nvSpPr>
-          <p:cNvPr id="6" name="Rectangle 5"/>
-          <p:cNvSpPr/>
-          <p:nvPr/>
-        </p:nvSpPr>
-        <p:spPr>
-          <a:xfrm>
-            <a:off x="457200" y="1261872"/>
-            <a:ext cx="11277295" cy="320040"/>
-          </a:xfrm>
-          <a:prstGeom prst="rect">
-            <a:avLst/>
           </a:prstGeom>
           <a:solidFill>
             <a:srgbClr val="095292"/>
@@ -10155,55 +9873,234 @@
           </a:fontRef>
         </p:style>
         <p:txBody>
-          <a:bodyPr rtlCol="0" anchor="ctr"/>
+          <a:bodyPr rtlCol="0" anchor="ctr" wrap="square"/>
           <a:lstStyle/>
           <a:p>
             <a:pPr algn="ctr"/>
-          </a:p>
-        </p:txBody>
-      </p:sp>
-      <p:sp>
-        <p:nvSpPr>
-          <p:cNvPr id="7" name="TextBox 6"/>
+            <a:r>
+              <a:rPr sz="1300" b="1" i="0">
+                <a:solidFill>
+                  <a:srgbClr val="FFFFFF"/>
+                </a:solidFill>
+                <a:latin typeface="Calibri"/>
+              </a:rPr>
+              <a:t>T1 (Recepción A)
+lee franja: LIBRE</a:t>
+            </a:r>
+          </a:p>
+        </p:txBody>
+      </p:sp>
+      <p:sp>
+        <p:nvSpPr>
+          <p:cNvPr id="7" name="Rounded Rectangle 6"/>
+          <p:cNvSpPr/>
+          <p:nvPr/>
+        </p:nvSpPr>
+        <p:spPr>
+          <a:xfrm>
+            <a:off x="4206240" y="2011680"/>
+            <a:ext cx="2834640" cy="914400"/>
+          </a:xfrm>
+          <a:prstGeom prst="roundRect">
+            <a:avLst>
+              <a:gd name="adj" fmla="val 12000"/>
+            </a:avLst>
+          </a:prstGeom>
+          <a:solidFill>
+            <a:srgbClr val="095292"/>
+          </a:solidFill>
+          <a:ln>
+            <a:noFill/>
+          </a:ln>
+        </p:spPr>
+        <p:style>
+          <a:lnRef idx="1">
+            <a:schemeClr val="accent1"/>
+          </a:lnRef>
+          <a:fillRef idx="3">
+            <a:schemeClr val="accent1"/>
+          </a:fillRef>
+          <a:effectRef idx="2">
+            <a:schemeClr val="accent1"/>
+          </a:effectRef>
+          <a:fontRef idx="minor">
+            <a:schemeClr val="lt1"/>
+          </a:fontRef>
+        </p:style>
+        <p:txBody>
+          <a:bodyPr rtlCol="0" anchor="ctr" wrap="square"/>
+          <a:lstStyle/>
+          <a:p>
+            <a:pPr algn="ctr"/>
+            <a:r>
+              <a:rPr sz="1300" b="1" i="0">
+                <a:solidFill>
+                  <a:srgbClr val="FFFFFF"/>
+                </a:solidFill>
+                <a:latin typeface="Calibri"/>
+              </a:rPr>
+              <a:t>T1: INSERT cita
+COMMIT → OK</a:t>
+            </a:r>
+          </a:p>
+        </p:txBody>
+      </p:sp>
+      <p:sp>
+        <p:nvSpPr>
+          <p:cNvPr id="8" name="Rounded Rectangle 7"/>
+          <p:cNvSpPr/>
+          <p:nvPr/>
+        </p:nvSpPr>
+        <p:spPr>
+          <a:xfrm>
+            <a:off x="731520" y="3383280"/>
+            <a:ext cx="2834640" cy="914400"/>
+          </a:xfrm>
+          <a:prstGeom prst="roundRect">
+            <a:avLst>
+              <a:gd name="adj" fmla="val 12000"/>
+            </a:avLst>
+          </a:prstGeom>
+          <a:solidFill>
+            <a:srgbClr val="269CCB"/>
+          </a:solidFill>
+          <a:ln>
+            <a:noFill/>
+          </a:ln>
+        </p:spPr>
+        <p:style>
+          <a:lnRef idx="1">
+            <a:schemeClr val="accent1"/>
+          </a:lnRef>
+          <a:fillRef idx="3">
+            <a:schemeClr val="accent1"/>
+          </a:fillRef>
+          <a:effectRef idx="2">
+            <a:schemeClr val="accent1"/>
+          </a:effectRef>
+          <a:fontRef idx="minor">
+            <a:schemeClr val="lt1"/>
+          </a:fontRef>
+        </p:style>
+        <p:txBody>
+          <a:bodyPr rtlCol="0" anchor="ctr" wrap="square"/>
+          <a:lstStyle/>
+          <a:p>
+            <a:pPr algn="ctr"/>
+            <a:r>
+              <a:rPr sz="1300" b="1" i="0">
+                <a:solidFill>
+                  <a:srgbClr val="FFFFFF"/>
+                </a:solidFill>
+                <a:latin typeface="Calibri"/>
+              </a:rPr>
+              <a:t>T2 (Recepción B)
+lee franja: LIBRE</a:t>
+            </a:r>
+          </a:p>
+        </p:txBody>
+      </p:sp>
+      <p:sp>
+        <p:nvSpPr>
+          <p:cNvPr id="9" name="Rounded Rectangle 8"/>
+          <p:cNvSpPr/>
+          <p:nvPr/>
+        </p:nvSpPr>
+        <p:spPr>
+          <a:xfrm>
+            <a:off x="4206240" y="3383280"/>
+            <a:ext cx="2834640" cy="914400"/>
+          </a:xfrm>
+          <a:prstGeom prst="roundRect">
+            <a:avLst>
+              <a:gd name="adj" fmla="val 12000"/>
+            </a:avLst>
+          </a:prstGeom>
+          <a:solidFill>
+            <a:srgbClr val="A02030"/>
+          </a:solidFill>
+          <a:ln>
+            <a:noFill/>
+          </a:ln>
+        </p:spPr>
+        <p:style>
+          <a:lnRef idx="1">
+            <a:schemeClr val="accent1"/>
+          </a:lnRef>
+          <a:fillRef idx="3">
+            <a:schemeClr val="accent1"/>
+          </a:fillRef>
+          <a:effectRef idx="2">
+            <a:schemeClr val="accent1"/>
+          </a:effectRef>
+          <a:fontRef idx="minor">
+            <a:schemeClr val="lt1"/>
+          </a:fontRef>
+        </p:style>
+        <p:txBody>
+          <a:bodyPr rtlCol="0" anchor="ctr" wrap="square"/>
+          <a:lstStyle/>
+          <a:p>
+            <a:pPr algn="ctr"/>
+            <a:r>
+              <a:rPr sz="1300" b="1" i="0">
+                <a:solidFill>
+                  <a:srgbClr val="FFFFFF"/>
+                </a:solidFill>
+                <a:latin typeface="Calibri"/>
+              </a:rPr>
+              <a:t>T2: INSERT cita
+COMMIT → ¡DOBLE RESERVA!</a:t>
+            </a:r>
+          </a:p>
+        </p:txBody>
+      </p:sp>
+      <p:cxnSp>
+        <p:nvCxnSpPr>
+          <p:cNvPr id="10" name="Connector 9"/>
+          <p:cNvCxnSpPr/>
+          <p:nvPr/>
+        </p:nvCxnSpPr>
+        <p:spPr>
+          <a:xfrm>
+            <a:off x="3566160" y="2468880"/>
+            <a:ext cx="640080" cy="0"/>
+          </a:xfrm>
+          <a:prstGeom prst="line">
+            <a:avLst/>
+          </a:prstGeom>
+          <a:ln w="22225">
+            <a:solidFill>
+              <a:srgbClr val="666666"/>
+            </a:solidFill>
+            <a:tailEnd type="triangle" w="med" len="med"/>
+          </a:ln>
+        </p:spPr>
+        <p:style>
+          <a:lnRef idx="2">
+            <a:schemeClr val="accent1"/>
+          </a:lnRef>
+          <a:fillRef idx="0">
+            <a:schemeClr val="accent1"/>
+          </a:fillRef>
+          <a:effectRef idx="1">
+            <a:schemeClr val="accent1"/>
+          </a:effectRef>
+          <a:fontRef idx="minor">
+            <a:schemeClr val="tx1"/>
+          </a:fontRef>
+        </p:style>
+      </p:cxnSp>
+      <p:sp>
+        <p:nvSpPr>
+          <p:cNvPr id="11" name="TextBox 10"/>
           <p:cNvSpPr txBox="1"/>
           <p:nvPr/>
         </p:nvSpPr>
         <p:spPr>
           <a:xfrm>
-            <a:off x="685800" y="1307592"/>
-            <a:ext cx="10820095" cy="256032"/>
-          </a:xfrm>
-          <a:prstGeom prst="rect">
-            <a:avLst/>
-          </a:prstGeom>
-          <a:noFill/>
-        </p:spPr>
-        <p:txBody>
-          <a:bodyPr wrap="square" anchor="ctr"/>
-          <a:lstStyle/>
-          <a:p>
-            <a:r>
-              <a:rPr sz="1000" b="1" i="0">
-                <a:solidFill>
-                  <a:srgbClr val="269CCB"/>
-                </a:solidFill>
-                <a:latin typeface="Calibri"/>
-              </a:rPr>
-              <a:t>● ● ●</a:t>
-            </a:r>
-          </a:p>
-        </p:txBody>
-      </p:sp>
-      <p:sp>
-        <p:nvSpPr>
-          <p:cNvPr id="8" name="TextBox 7"/>
-          <p:cNvSpPr txBox="1"/>
-          <p:nvPr/>
-        </p:nvSpPr>
-        <p:spPr>
-          <a:xfrm>
-            <a:off x="777240" y="1719072"/>
-            <a:ext cx="10637215" cy="4133087"/>
+            <a:off x="3063240" y="2267712"/>
+            <a:ext cx="1645920" cy="320040"/>
           </a:xfrm>
           <a:prstGeom prst="rect">
             <a:avLst/>
@@ -10216,113 +10113,65 @@
           </a:bodyPr>
           <a:lstStyle/>
           <a:p>
-            <a:pPr>
-              <a:spcAft>
-                <a:spcPts val="400"/>
-              </a:spcAft>
-            </a:pPr>
-            <a:r>
-              <a:rPr sz="1400" b="0" i="0">
-                <a:solidFill>
-                  <a:srgbClr val="FFFFFF"/>
-                </a:solidFill>
-                <a:latin typeface="Calibri"/>
-              </a:rPr>
-              <a:t>ALTER TABLE cita</a:t>
-            </a:r>
-          </a:p>
-          <a:p>
-            <a:pPr>
-              <a:spcAft>
-                <a:spcPts val="400"/>
-              </a:spcAft>
-            </a:pPr>
-            <a:r>
-              <a:rPr sz="1400" b="0" i="0">
-                <a:solidFill>
-                  <a:srgbClr val="FFFFFF"/>
-                </a:solidFill>
-                <a:latin typeface="Calibri"/>
-              </a:rPr>
-              <a:t>  ADD CONSTRAINT uq_cita_vet_franja</a:t>
-            </a:r>
-          </a:p>
-          <a:p>
-            <a:pPr>
-              <a:spcAft>
-                <a:spcPts val="400"/>
-              </a:spcAft>
-            </a:pPr>
-            <a:r>
-              <a:rPr sz="1400" b="0" i="0">
-                <a:solidFill>
-                  <a:srgbClr val="FFFFFF"/>
-                </a:solidFill>
-                <a:latin typeface="Calibri"/>
-              </a:rPr>
-              <a:t>  UNIQUE (id_veterinario, fecha_hora);</a:t>
-            </a:r>
-          </a:p>
-          <a:p>
-            <a:pPr>
-              <a:spcAft>
-                <a:spcPts val="400"/>
-              </a:spcAft>
-            </a:pPr>
-            <a:r>
-              <a:rPr sz="1400" b="0" i="0">
-                <a:solidFill>
-                  <a:srgbClr val="FFFFFF"/>
-                </a:solidFill>
-                <a:latin typeface="Calibri"/>
-              </a:rPr>
-              <a:t/>
-            </a:r>
-          </a:p>
-          <a:p>
-            <a:pPr>
-              <a:spcAft>
-                <a:spcPts val="400"/>
-              </a:spcAft>
-            </a:pPr>
-            <a:r>
-              <a:rPr sz="1400" b="0" i="0">
-                <a:solidFill>
-                  <a:srgbClr val="FFFFFF"/>
-                </a:solidFill>
-                <a:latin typeface="Calibri"/>
-              </a:rPr>
-              <a:t>-- T2 intenta la misma franja que T1:</a:t>
-            </a:r>
-          </a:p>
-          <a:p>
-            <a:pPr>
-              <a:spcAft>
-                <a:spcPts val="400"/>
-              </a:spcAft>
-            </a:pPr>
-            <a:r>
-              <a:rPr sz="1400" b="0" i="0">
-                <a:solidFill>
-                  <a:srgbClr val="FFFFFF"/>
-                </a:solidFill>
-                <a:latin typeface="Calibri"/>
-              </a:rPr>
-              <a:t>-- ORA-00001: unique constraint violated</a:t>
-            </a:r>
-          </a:p>
-        </p:txBody>
-      </p:sp>
-      <p:sp>
-        <p:nvSpPr>
-          <p:cNvPr id="9" name="TextBox 8"/>
+            <a:pPr algn="ctr"/>
+            <a:r>
+              <a:rPr sz="1000" b="0" i="1">
+                <a:solidFill>
+                  <a:srgbClr val="666666"/>
+                </a:solidFill>
+                <a:latin typeface="Calibri"/>
+              </a:rPr>
+              <a:t>tiempo →</a:t>
+            </a:r>
+          </a:p>
+        </p:txBody>
+      </p:sp>
+      <p:cxnSp>
+        <p:nvCxnSpPr>
+          <p:cNvPr id="12" name="Connector 11"/>
+          <p:cNvCxnSpPr/>
+          <p:nvPr/>
+        </p:nvCxnSpPr>
+        <p:spPr>
+          <a:xfrm>
+            <a:off x="3566160" y="3840480"/>
+            <a:ext cx="640080" cy="0"/>
+          </a:xfrm>
+          <a:prstGeom prst="line">
+            <a:avLst/>
+          </a:prstGeom>
+          <a:ln w="22225">
+            <a:solidFill>
+              <a:srgbClr val="666666"/>
+            </a:solidFill>
+            <a:tailEnd type="triangle" w="med" len="med"/>
+          </a:ln>
+        </p:spPr>
+        <p:style>
+          <a:lnRef idx="2">
+            <a:schemeClr val="accent1"/>
+          </a:lnRef>
+          <a:fillRef idx="0">
+            <a:schemeClr val="accent1"/>
+          </a:fillRef>
+          <a:effectRef idx="1">
+            <a:schemeClr val="accent1"/>
+          </a:effectRef>
+          <a:fontRef idx="minor">
+            <a:schemeClr val="tx1"/>
+          </a:fontRef>
+        </p:style>
+      </p:cxnSp>
+      <p:sp>
+        <p:nvSpPr>
+          <p:cNvPr id="13" name="TextBox 12"/>
           <p:cNvSpPr txBox="1"/>
           <p:nvPr/>
         </p:nvSpPr>
         <p:spPr>
           <a:xfrm>
-            <a:off x="457200" y="6080760"/>
-            <a:ext cx="11277295" cy="320040"/>
+            <a:off x="3063240" y="3639312"/>
+            <a:ext cx="1645920" cy="320040"/>
           </a:xfrm>
           <a:prstGeom prst="rect">
             <a:avLst/>
@@ -10337,20 +10186,54 @@
           <a:p>
             <a:pPr algn="ctr"/>
             <a:r>
-              <a:rPr sz="1200" b="0" i="1">
+              <a:rPr sz="1000" b="0" i="1">
                 <a:solidFill>
                   <a:srgbClr val="666666"/>
                 </a:solidFill>
                 <a:latin typeface="Calibri"/>
               </a:rPr>
-              <a:t>Poner solo BEGIN/COMMIT no basta: ambas transacciones leen 'libre' antes de confirmar.</a:t>
-            </a:r>
-          </a:p>
-        </p:txBody>
-      </p:sp>
-      <p:sp>
-        <p:nvSpPr>
-          <p:cNvPr id="10" name="TextBox 9"/>
+              <a:t>tiempo →</a:t>
+            </a:r>
+          </a:p>
+        </p:txBody>
+      </p:sp>
+      <p:sp>
+        <p:nvSpPr>
+          <p:cNvPr id="14" name="TextBox 13"/>
+          <p:cNvSpPr txBox="1"/>
+          <p:nvPr/>
+        </p:nvSpPr>
+        <p:spPr>
+          <a:xfrm>
+            <a:off x="457200" y="6263640"/>
+            <a:ext cx="11277295" cy="411480"/>
+          </a:xfrm>
+          <a:prstGeom prst="rect">
+            <a:avLst/>
+          </a:prstGeom>
+          <a:noFill/>
+        </p:spPr>
+        <p:txBody>
+          <a:bodyPr wrap="square">
+            <a:spAutoFit/>
+          </a:bodyPr>
+          <a:lstStyle/>
+          <a:p>
+            <a:r>
+              <a:rPr sz="1100" b="0" i="1">
+                <a:solidFill>
+                  <a:srgbClr val="666666"/>
+                </a:solidFill>
+                <a:latin typeface="Calibri"/>
+              </a:rPr>
+              <a:t>Es una condición de carrera: cada transacción tomó su decisión con un dato que la otra estaba a punto de invalidar. Mitigación: UNIQUE(id_veterinario, fecha_hora) hace que el segundo INSERT falle en vez de crear la doble reserva.</a:t>
+            </a:r>
+          </a:p>
+        </p:txBody>
+      </p:sp>
+      <p:sp>
+        <p:nvSpPr>
+          <p:cNvPr id="15" name="TextBox 14"/>
           <p:cNvSpPr txBox="1"/>
           <p:nvPr/>
         </p:nvSpPr>
@@ -10524,21 +10407,141 @@
                 </a:solidFill>
                 <a:latin typeface="Calibri"/>
               </a:rPr>
-              <a:t>Demo del dia</a:t>
-            </a:r>
-          </a:p>
-        </p:txBody>
-      </p:sp>
-      <p:sp>
-        <p:nvSpPr>
-          <p:cNvPr id="5" name="TextBox 4"/>
+              <a:t>La restriccion que hace imposible la doble reserva</a:t>
+            </a:r>
+          </a:p>
+        </p:txBody>
+      </p:sp>
+      <p:sp>
+        <p:nvSpPr>
+          <p:cNvPr id="5" name="Rounded Rectangle 4"/>
+          <p:cNvSpPr/>
+          <p:nvPr/>
+        </p:nvSpPr>
+        <p:spPr>
+          <a:xfrm>
+            <a:off x="457200" y="1261872"/>
+            <a:ext cx="11277295" cy="4773168"/>
+          </a:xfrm>
+          <a:prstGeom prst="roundRect">
+            <a:avLst>
+              <a:gd name="adj" fmla="val 12000"/>
+            </a:avLst>
+          </a:prstGeom>
+          <a:solidFill>
+            <a:srgbClr val="1E2A38"/>
+          </a:solidFill>
+          <a:ln>
+            <a:noFill/>
+          </a:ln>
+        </p:spPr>
+        <p:style>
+          <a:lnRef idx="1">
+            <a:schemeClr val="accent1"/>
+          </a:lnRef>
+          <a:fillRef idx="3">
+            <a:schemeClr val="accent1"/>
+          </a:fillRef>
+          <a:effectRef idx="2">
+            <a:schemeClr val="accent1"/>
+          </a:effectRef>
+          <a:fontRef idx="minor">
+            <a:schemeClr val="lt1"/>
+          </a:fontRef>
+        </p:style>
+        <p:txBody>
+          <a:bodyPr rtlCol="0" anchor="ctr"/>
+          <a:lstStyle/>
+          <a:p>
+            <a:pPr algn="ctr"/>
+          </a:p>
+        </p:txBody>
+      </p:sp>
+      <p:sp>
+        <p:nvSpPr>
+          <p:cNvPr id="6" name="Rectangle 5"/>
+          <p:cNvSpPr/>
+          <p:nvPr/>
+        </p:nvSpPr>
+        <p:spPr>
+          <a:xfrm>
+            <a:off x="457200" y="1261872"/>
+            <a:ext cx="11277295" cy="320040"/>
+          </a:xfrm>
+          <a:prstGeom prst="rect">
+            <a:avLst/>
+          </a:prstGeom>
+          <a:solidFill>
+            <a:srgbClr val="095292"/>
+          </a:solidFill>
+          <a:ln>
+            <a:noFill/>
+          </a:ln>
+        </p:spPr>
+        <p:style>
+          <a:lnRef idx="1">
+            <a:schemeClr val="accent1"/>
+          </a:lnRef>
+          <a:fillRef idx="3">
+            <a:schemeClr val="accent1"/>
+          </a:fillRef>
+          <a:effectRef idx="2">
+            <a:schemeClr val="accent1"/>
+          </a:effectRef>
+          <a:fontRef idx="minor">
+            <a:schemeClr val="lt1"/>
+          </a:fontRef>
+        </p:style>
+        <p:txBody>
+          <a:bodyPr rtlCol="0" anchor="ctr"/>
+          <a:lstStyle/>
+          <a:p>
+            <a:pPr algn="ctr"/>
+          </a:p>
+        </p:txBody>
+      </p:sp>
+      <p:sp>
+        <p:nvSpPr>
+          <p:cNvPr id="7" name="TextBox 6"/>
           <p:cNvSpPr txBox="1"/>
           <p:nvPr/>
         </p:nvSpPr>
         <p:spPr>
           <a:xfrm>
-            <a:off x="457200" y="1170432"/>
-            <a:ext cx="11277295" cy="5230368"/>
+            <a:off x="685800" y="1307592"/>
+            <a:ext cx="10820095" cy="256032"/>
+          </a:xfrm>
+          <a:prstGeom prst="rect">
+            <a:avLst/>
+          </a:prstGeom>
+          <a:noFill/>
+        </p:spPr>
+        <p:txBody>
+          <a:bodyPr wrap="square" anchor="ctr"/>
+          <a:lstStyle/>
+          <a:p>
+            <a:r>
+              <a:rPr sz="1000" b="1" i="0">
+                <a:solidFill>
+                  <a:srgbClr val="269CCB"/>
+                </a:solidFill>
+                <a:latin typeface="Calibri"/>
+              </a:rPr>
+              <a:t>● ● ●</a:t>
+            </a:r>
+          </a:p>
+        </p:txBody>
+      </p:sp>
+      <p:sp>
+        <p:nvSpPr>
+          <p:cNvPr id="8" name="TextBox 7"/>
+          <p:cNvSpPr txBox="1"/>
+          <p:nvPr/>
+        </p:nvSpPr>
+        <p:spPr>
+          <a:xfrm>
+            <a:off x="777240" y="1719072"/>
+            <a:ext cx="10637215" cy="4133087"/>
           </a:xfrm>
           <a:prstGeom prst="rect">
             <a:avLst/>
@@ -10553,108 +10556,187 @@
           <a:p>
             <a:pPr>
               <a:spcAft>
-                <a:spcPts val="800"/>
+                <a:spcPts val="400"/>
               </a:spcAft>
             </a:pPr>
             <a:r>
-              <a:rPr sz="2000" b="0" i="0">
-                <a:solidFill>
-                  <a:srgbClr val="333333"/>
-                </a:solidFill>
-                <a:latin typeface="Calibri"/>
-              </a:rPr>
-              <a:t>–   </a:t>
-            </a:r>
-            <a:r>
-              <a:rPr sz="2000" b="1" i="0">
-                <a:solidFill>
-                  <a:srgbClr val="333333"/>
-                </a:solidFill>
-                <a:latin typeface="Calibri"/>
-              </a:rPr>
-              <a:t>Herramienta:</a:t>
-            </a:r>
-            <a:r>
-              <a:rPr sz="2000" b="0" i="0">
-                <a:solidFill>
-                  <a:srgbClr val="333333"/>
-                </a:solidFill>
-                <a:latin typeface="Calibri"/>
-              </a:rPr>
-              <a:t> Google Docs + Live SQL</a:t>
+              <a:rPr sz="1400" b="0" i="0">
+                <a:solidFill>
+                  <a:srgbClr val="FFFFFF"/>
+                </a:solidFill>
+                <a:latin typeface="Calibri"/>
+              </a:rPr>
+              <a:t>ALTER TABLE cita</a:t>
             </a:r>
           </a:p>
           <a:p>
             <a:pPr>
               <a:spcAft>
-                <a:spcPts val="800"/>
+                <a:spcPts val="400"/>
               </a:spcAft>
             </a:pPr>
             <a:r>
-              <a:rPr sz="2000" b="0" i="0">
-                <a:solidFill>
-                  <a:srgbClr val="333333"/>
-                </a:solidFill>
-                <a:latin typeface="Calibri"/>
-              </a:rPr>
-              <a:t>–   </a:t>
-            </a:r>
-            <a:r>
-              <a:rPr sz="2000" b="1" i="0">
-                <a:solidFill>
-                  <a:srgbClr val="333333"/>
-                </a:solidFill>
-                <a:latin typeface="Calibri"/>
-              </a:rPr>
-              <a:t>Demo:</a:t>
-            </a:r>
-            <a:r>
-              <a:rPr sz="2000" b="0" i="0">
-                <a:solidFill>
-                  <a:srgbClr val="333333"/>
-                </a:solidFill>
-                <a:latin typeface="Calibri"/>
-              </a:rPr>
-              <a:t> Narrativa paso a paso T1/T2 sobre tabla Cita.</a:t>
+              <a:rPr sz="1400" b="0" i="0">
+                <a:solidFill>
+                  <a:srgbClr val="FFFFFF"/>
+                </a:solidFill>
+                <a:latin typeface="Calibri"/>
+              </a:rPr>
+              <a:t>  ADD CONSTRAINT uq_cita_vet_franja</a:t>
             </a:r>
           </a:p>
           <a:p>
             <a:pPr>
               <a:spcAft>
-                <a:spcPts val="800"/>
+                <a:spcPts val="400"/>
               </a:spcAft>
             </a:pPr>
             <a:r>
-              <a:rPr sz="2000" b="0" i="0">
-                <a:solidFill>
-                  <a:srgbClr val="333333"/>
-                </a:solidFill>
-                <a:latin typeface="Calibri"/>
-              </a:rPr>
-              <a:t>–   Sigan el mismo dominio VetCare (no inventen otro caso).</a:t>
+              <a:rPr sz="1400" b="0" i="0">
+                <a:solidFill>
+                  <a:srgbClr val="FFFFFF"/>
+                </a:solidFill>
+                <a:latin typeface="Calibri"/>
+              </a:rPr>
+              <a:t>  UNIQUE (id_veterinario, fecha_hora);</a:t>
             </a:r>
           </a:p>
           <a:p>
             <a:pPr>
               <a:spcAft>
-                <a:spcPts val="800"/>
+                <a:spcPts val="400"/>
               </a:spcAft>
             </a:pPr>
             <a:r>
-              <a:rPr sz="2000" b="0" i="0">
-                <a:solidFill>
-                  <a:srgbClr val="333333"/>
-                </a:solidFill>
-                <a:latin typeface="Calibri"/>
-              </a:rPr>
-              <a:t>–   Al final de la demo: dejar enlace/script compartible al grupo.</a:t>
-            </a:r>
-          </a:p>
-        </p:txBody>
-      </p:sp>
-      <p:sp>
-        <p:nvSpPr>
-          <p:cNvPr id="6" name="TextBox 5"/>
+              <a:rPr sz="1400" b="0" i="0">
+                <a:solidFill>
+                  <a:srgbClr val="FFFFFF"/>
+                </a:solidFill>
+                <a:latin typeface="Calibri"/>
+              </a:rPr>
+              <a:t/>
+            </a:r>
+          </a:p>
+          <a:p>
+            <a:pPr>
+              <a:spcAft>
+                <a:spcPts val="400"/>
+              </a:spcAft>
+            </a:pPr>
+            <a:r>
+              <a:rPr sz="1400" b="0" i="0">
+                <a:solidFill>
+                  <a:srgbClr val="FFFFFF"/>
+                </a:solidFill>
+                <a:latin typeface="Calibri"/>
+              </a:rPr>
+              <a:t>-- T2 intenta la misma franja que T1:</a:t>
+            </a:r>
+          </a:p>
+          <a:p>
+            <a:pPr>
+              <a:spcAft>
+                <a:spcPts val="400"/>
+              </a:spcAft>
+            </a:pPr>
+            <a:r>
+              <a:rPr sz="1400" b="0" i="0">
+                <a:solidFill>
+                  <a:srgbClr val="FFFFFF"/>
+                </a:solidFill>
+                <a:latin typeface="Calibri"/>
+              </a:rPr>
+              <a:t>INSERT INTO cita (id_mascota, id_veterinario, fecha_hora, estado)</a:t>
+            </a:r>
+          </a:p>
+          <a:p>
+            <a:pPr>
+              <a:spcAft>
+                <a:spcPts val="400"/>
+              </a:spcAft>
+            </a:pPr>
+            <a:r>
+              <a:rPr sz="1400" b="0" i="0">
+                <a:solidFill>
+                  <a:srgbClr val="FFFFFF"/>
+                </a:solidFill>
+                <a:latin typeface="Calibri"/>
+              </a:rPr>
+              <a:t>VALUES (5, 1, TIMESTAMP '2026-09-01 08:00:00', 'PROGRAMADA');</a:t>
+            </a:r>
+          </a:p>
+          <a:p>
+            <a:pPr>
+              <a:spcAft>
+                <a:spcPts val="400"/>
+              </a:spcAft>
+            </a:pPr>
+            <a:r>
+              <a:rPr sz="1400" b="0" i="0">
+                <a:solidFill>
+                  <a:srgbClr val="FFFFFF"/>
+                </a:solidFill>
+                <a:latin typeface="Calibri"/>
+              </a:rPr>
+              <a:t>-- ERROR:  duplicate key value violates unique constraint</a:t>
+            </a:r>
+          </a:p>
+          <a:p>
+            <a:pPr>
+              <a:spcAft>
+                <a:spcPts val="400"/>
+              </a:spcAft>
+            </a:pPr>
+            <a:r>
+              <a:rPr sz="1400" b="0" i="0">
+                <a:solidFill>
+                  <a:srgbClr val="FFFFFF"/>
+                </a:solidFill>
+                <a:latin typeface="Calibri"/>
+              </a:rPr>
+              <a:t>--         "uq_cita_vet_franja"</a:t>
+            </a:r>
+          </a:p>
+        </p:txBody>
+      </p:sp>
+      <p:sp>
+        <p:nvSpPr>
+          <p:cNvPr id="9" name="TextBox 8"/>
+          <p:cNvSpPr txBox="1"/>
+          <p:nvPr/>
+        </p:nvSpPr>
+        <p:spPr>
+          <a:xfrm>
+            <a:off x="457200" y="6080760"/>
+            <a:ext cx="11277295" cy="320040"/>
+          </a:xfrm>
+          <a:prstGeom prst="rect">
+            <a:avLst/>
+          </a:prstGeom>
+          <a:noFill/>
+        </p:spPr>
+        <p:txBody>
+          <a:bodyPr wrap="square">
+            <a:spAutoFit/>
+          </a:bodyPr>
+          <a:lstStyle/>
+          <a:p>
+            <a:pPr algn="ctr"/>
+            <a:r>
+              <a:rPr sz="1200" b="0" i="1">
+                <a:solidFill>
+                  <a:srgbClr val="666666"/>
+                </a:solidFill>
+                <a:latin typeface="Calibri"/>
+              </a:rPr>
+              <a:t>Poner solo BEGIN/COMMIT no basta: las dos transacciones leen «libre» antes de confirmar. El UNIQUE lo verifica el motor al escribir: la segunda reserva falla.</a:t>
+            </a:r>
+          </a:p>
+        </p:txBody>
+      </p:sp>
+      <p:sp>
+        <p:nvSpPr>
+          <p:cNvPr id="10" name="TextBox 9"/>
           <p:cNvSpPr txBox="1"/>
           <p:nvPr/>
         </p:nvSpPr>
@@ -10722,6 +10804,362 @@
         <p:spPr>
           <a:xfrm>
             <a:off x="0" y="0"/>
+            <a:ext cx="12191695" cy="960120"/>
+          </a:xfrm>
+          <a:prstGeom prst="rect">
+            <a:avLst/>
+          </a:prstGeom>
+          <a:solidFill>
+            <a:srgbClr val="095292"/>
+          </a:solidFill>
+          <a:ln>
+            <a:noFill/>
+          </a:ln>
+        </p:spPr>
+        <p:style>
+          <a:lnRef idx="1">
+            <a:schemeClr val="accent1"/>
+          </a:lnRef>
+          <a:fillRef idx="3">
+            <a:schemeClr val="accent1"/>
+          </a:fillRef>
+          <a:effectRef idx="2">
+            <a:schemeClr val="accent1"/>
+          </a:effectRef>
+          <a:fontRef idx="minor">
+            <a:schemeClr val="lt1"/>
+          </a:fontRef>
+        </p:style>
+        <p:txBody>
+          <a:bodyPr rtlCol="0" anchor="ctr"/>
+          <a:lstStyle/>
+          <a:p>
+            <a:pPr algn="ctr"/>
+          </a:p>
+        </p:txBody>
+      </p:sp>
+      <p:sp>
+        <p:nvSpPr>
+          <p:cNvPr id="3" name="Rectangle 2"/>
+          <p:cNvSpPr/>
+          <p:nvPr/>
+        </p:nvSpPr>
+        <p:spPr>
+          <a:xfrm>
+            <a:off x="0" y="960120"/>
+            <a:ext cx="12191695" cy="41148"/>
+          </a:xfrm>
+          <a:prstGeom prst="rect">
+            <a:avLst/>
+          </a:prstGeom>
+          <a:solidFill>
+            <a:srgbClr val="FFD000"/>
+          </a:solidFill>
+          <a:ln>
+            <a:noFill/>
+          </a:ln>
+        </p:spPr>
+        <p:style>
+          <a:lnRef idx="1">
+            <a:schemeClr val="accent1"/>
+          </a:lnRef>
+          <a:fillRef idx="3">
+            <a:schemeClr val="accent1"/>
+          </a:fillRef>
+          <a:effectRef idx="2">
+            <a:schemeClr val="accent1"/>
+          </a:effectRef>
+          <a:fontRef idx="minor">
+            <a:schemeClr val="lt1"/>
+          </a:fontRef>
+        </p:style>
+        <p:txBody>
+          <a:bodyPr rtlCol="0" anchor="ctr"/>
+          <a:lstStyle/>
+          <a:p>
+            <a:pPr algn="ctr"/>
+          </a:p>
+        </p:txBody>
+      </p:sp>
+      <p:sp>
+        <p:nvSpPr>
+          <p:cNvPr id="4" name="TextBox 3"/>
+          <p:cNvSpPr txBox="1"/>
+          <p:nvPr/>
+        </p:nvSpPr>
+        <p:spPr>
+          <a:xfrm>
+            <a:off x="457200" y="164592"/>
+            <a:ext cx="11277295" cy="502920"/>
+          </a:xfrm>
+          <a:prstGeom prst="rect">
+            <a:avLst/>
+          </a:prstGeom>
+          <a:noFill/>
+        </p:spPr>
+        <p:txBody>
+          <a:bodyPr wrap="square">
+            <a:spAutoFit/>
+          </a:bodyPr>
+          <a:lstStyle/>
+          <a:p>
+            <a:r>
+              <a:rPr sz="2600" b="1" i="0">
+                <a:solidFill>
+                  <a:srgbClr val="FFFFFF"/>
+                </a:solidFill>
+                <a:latin typeface="Calibri"/>
+              </a:rPr>
+              <a:t>Demo del dia</a:t>
+            </a:r>
+          </a:p>
+        </p:txBody>
+      </p:sp>
+      <p:sp>
+        <p:nvSpPr>
+          <p:cNvPr id="5" name="TextBox 4"/>
+          <p:cNvSpPr txBox="1"/>
+          <p:nvPr/>
+        </p:nvSpPr>
+        <p:spPr>
+          <a:xfrm>
+            <a:off x="457200" y="1170432"/>
+            <a:ext cx="11277295" cy="5230368"/>
+          </a:xfrm>
+          <a:prstGeom prst="rect">
+            <a:avLst/>
+          </a:prstGeom>
+          <a:noFill/>
+        </p:spPr>
+        <p:txBody>
+          <a:bodyPr wrap="square">
+            <a:spAutoFit/>
+          </a:bodyPr>
+          <a:lstStyle/>
+          <a:p>
+            <a:pPr>
+              <a:spcAft>
+                <a:spcPts val="800"/>
+              </a:spcAft>
+            </a:pPr>
+            <a:r>
+              <a:rPr sz="2000" b="0" i="0">
+                <a:solidFill>
+                  <a:srgbClr val="333333"/>
+                </a:solidFill>
+                <a:latin typeface="Calibri"/>
+              </a:rPr>
+              <a:t>–   </a:t>
+            </a:r>
+            <a:r>
+              <a:rPr sz="2000" b="1" i="0">
+                <a:solidFill>
+                  <a:srgbClr val="333333"/>
+                </a:solidFill>
+                <a:latin typeface="Calibri"/>
+              </a:rPr>
+              <a:t>Herramienta:</a:t>
+            </a:r>
+            <a:r>
+              <a:rPr sz="2000" b="0" i="0">
+                <a:solidFill>
+                  <a:srgbClr val="333333"/>
+                </a:solidFill>
+                <a:latin typeface="Calibri"/>
+              </a:rPr>
+              <a:t> Google Docs + Live SQL</a:t>
+            </a:r>
+          </a:p>
+          <a:p>
+            <a:pPr>
+              <a:spcAft>
+                <a:spcPts val="800"/>
+              </a:spcAft>
+            </a:pPr>
+            <a:r>
+              <a:rPr sz="2000" b="0" i="0">
+                <a:solidFill>
+                  <a:srgbClr val="333333"/>
+                </a:solidFill>
+                <a:latin typeface="Calibri"/>
+              </a:rPr>
+              <a:t>–   </a:t>
+            </a:r>
+            <a:r>
+              <a:rPr sz="2000" b="1" i="0">
+                <a:solidFill>
+                  <a:srgbClr val="333333"/>
+                </a:solidFill>
+                <a:latin typeface="Calibri"/>
+              </a:rPr>
+              <a:t>Demo:</a:t>
+            </a:r>
+            <a:r>
+              <a:rPr sz="2000" b="0" i="0">
+                <a:solidFill>
+                  <a:srgbClr val="333333"/>
+                </a:solidFill>
+                <a:latin typeface="Calibri"/>
+              </a:rPr>
+              <a:t> Narrativa paso a paso T1/T2 sobre tabla Cita.</a:t>
+            </a:r>
+          </a:p>
+          <a:p>
+            <a:pPr>
+              <a:spcAft>
+                <a:spcPts val="800"/>
+              </a:spcAft>
+            </a:pPr>
+            <a:r>
+              <a:rPr sz="2000" b="0" i="0">
+                <a:solidFill>
+                  <a:srgbClr val="333333"/>
+                </a:solidFill>
+                <a:latin typeface="Calibri"/>
+              </a:rPr>
+              <a:t>–   Sigan el mismo dominio VetCare (no inventen otro caso).</a:t>
+            </a:r>
+          </a:p>
+          <a:p>
+            <a:pPr>
+              <a:spcAft>
+                <a:spcPts val="800"/>
+              </a:spcAft>
+            </a:pPr>
+            <a:r>
+              <a:rPr sz="2000" b="0" i="0">
+                <a:solidFill>
+                  <a:srgbClr val="333333"/>
+                </a:solidFill>
+                <a:latin typeface="Calibri"/>
+              </a:rPr>
+              <a:t>–   </a:t>
+            </a:r>
+            <a:r>
+              <a:rPr sz="2000" b="1" i="0">
+                <a:solidFill>
+                  <a:srgbClr val="333333"/>
+                </a:solidFill>
+                <a:latin typeface="Calibri"/>
+              </a:rPr>
+              <a:t>Qué observar:</a:t>
+            </a:r>
+            <a:r>
+              <a:rPr sz="2000" b="0" i="0">
+                <a:solidFill>
+                  <a:srgbClr val="333333"/>
+                </a:solidFill>
+                <a:latin typeface="Calibri"/>
+              </a:rPr>
+              <a:t> la segunda reserva de la misma franja falla por la restriccion UNIQUE en vez de quedar guardada como doble reserva.</a:t>
+            </a:r>
+          </a:p>
+          <a:p>
+            <a:pPr>
+              <a:spcAft>
+                <a:spcPts val="800"/>
+              </a:spcAft>
+            </a:pPr>
+            <a:r>
+              <a:rPr sz="2000" b="0" i="0">
+                <a:solidFill>
+                  <a:srgbClr val="333333"/>
+                </a:solidFill>
+                <a:latin typeface="Calibri"/>
+              </a:rPr>
+              <a:t>–   </a:t>
+            </a:r>
+            <a:r>
+              <a:rPr sz="2000" b="1" i="0">
+                <a:solidFill>
+                  <a:srgbClr val="333333"/>
+                </a:solidFill>
+                <a:latin typeface="Calibri"/>
+              </a:rPr>
+              <a:t>Qué observar:</a:t>
+            </a:r>
+            <a:r>
+              <a:rPr sz="2000" b="0" i="0">
+                <a:solidFill>
+                  <a:srgbClr val="333333"/>
+                </a:solidFill>
+                <a:latin typeface="Calibri"/>
+              </a:rPr>
+              <a:t> con FOR UPDATE la segunda sesion espera a que la primera confirme, en vez de decidir con un dato que ya cambio.</a:t>
+            </a:r>
+          </a:p>
+        </p:txBody>
+      </p:sp>
+      <p:sp>
+        <p:nvSpPr>
+          <p:cNvPr id="6" name="TextBox 5"/>
+          <p:cNvSpPr txBox="1"/>
+          <p:nvPr/>
+        </p:nvSpPr>
+        <p:spPr>
+          <a:xfrm>
+            <a:off x="11185855" y="6473952"/>
+            <a:ext cx="640080" cy="274320"/>
+          </a:xfrm>
+          <a:prstGeom prst="rect">
+            <a:avLst/>
+          </a:prstGeom>
+          <a:noFill/>
+        </p:spPr>
+        <p:txBody>
+          <a:bodyPr wrap="square">
+            <a:spAutoFit/>
+          </a:bodyPr>
+          <a:lstStyle/>
+          <a:p>
+            <a:pPr algn="r"/>
+            <a:r>
+              <a:rPr sz="1100" b="0" i="0">
+                <a:solidFill>
+                  <a:srgbClr val="666666"/>
+                </a:solidFill>
+                <a:latin typeface="Calibri"/>
+              </a:rPr>
+              <a:t>27</a:t>
+            </a:r>
+          </a:p>
+        </p:txBody>
+      </p:sp>
+    </p:spTree>
+  </p:cSld>
+  <p:clrMapOvr>
+    <a:masterClrMapping/>
+  </p:clrMapOvr>
+</p:sld>
+</file>
+
+<file path=ppt/slides/slide28.xml><?xml version="1.0" encoding="utf-8"?>
+<p:sld xmlns:a="http://schemas.openxmlformats.org/drawingml/2006/main" xmlns:p="http://schemas.openxmlformats.org/presentationml/2006/main" xmlns:r="http://schemas.openxmlformats.org/officeDocument/2006/relationships">
+  <p:cSld>
+    <p:bg>
+      <p:bgPr>
+        <a:solidFill>
+          <a:srgbClr val="FFFFFF"/>
+        </a:solidFill>
+        <a:effectLst/>
+      </p:bgPr>
+    </p:bg>
+    <p:spTree>
+      <p:nvGrpSpPr>
+        <p:cNvPr id="1" name=""/>
+        <p:cNvGrpSpPr/>
+        <p:nvPr/>
+      </p:nvGrpSpPr>
+      <p:grpSpPr/>
+      <p:sp>
+        <p:nvSpPr>
+          <p:cNvPr id="2" name="Rectangle 1"/>
+          <p:cNvSpPr/>
+          <p:nvPr/>
+        </p:nvSpPr>
+        <p:spPr>
+          <a:xfrm>
+            <a:off x="0" y="0"/>
             <a:ext cx="12191695" cy="164592"/>
           </a:xfrm>
           <a:prstGeom prst="rect">
@@ -12238,6 +12676,22 @@
               <a:t>–   Todo lo que sigue son las cuatro formas de decirselo.</a:t>
             </a:r>
           </a:p>
+          <a:p>
+            <a:pPr>
+              <a:spcAft>
+                <a:spcPts val="800"/>
+              </a:spcAft>
+            </a:pPr>
+            <a:r>
+              <a:rPr sz="2000" b="0" i="0">
+                <a:solidFill>
+                  <a:srgbClr val="333333"/>
+                </a:solidFill>
+                <a:latin typeface="Calibri"/>
+              </a:rPr>
+              <a:t>–   Ejemplo VetCare: agendar la cita y descontar la vacuna son dos sentencias de un mismo hecho; si la segunda falla, la primera tampoco debe quedar.</a:t>
+            </a:r>
+          </a:p>
         </p:txBody>
       </p:sp>
       <p:sp>
@@ -12726,6 +13180,22 @@
               <a:t>–   Esto amarra directo con la Clase 8, donde se vieron transacciones, COMMIT y ROLLBACK: sin esa base, hablar de aislamiento no tiene donde apoyarse.</a:t>
             </a:r>
           </a:p>
+          <a:p>
+            <a:pPr>
+              <a:spcAft>
+                <a:spcPts val="800"/>
+              </a:spcAft>
+            </a:pPr>
+            <a:r>
+              <a:rPr sz="2000" b="0" i="0">
+                <a:solidFill>
+                  <a:srgbClr val="333333"/>
+                </a:solidFill>
+                <a:latin typeface="Calibri"/>
+              </a:rPr>
+              <a:t>–   En PostgreSQL se pide con cuando el motor detecta que dos transacciones no pueden ordenarse, aborta una con un error de serializacion y la aplicacion debe reintentarla.</a:t>
+            </a:r>
+          </a:p>
         </p:txBody>
       </p:sp>
       <p:sp>
@@ -12904,21 +13374,141 @@
                 </a:solidFill>
                 <a:latin typeface="Calibri"/>
               </a:rPr>
-              <a:t>Los tres fenomenos indeseables, en escenas de la clinica (1/2)</a:t>
-            </a:r>
-          </a:p>
-        </p:txBody>
-      </p:sp>
-      <p:sp>
-        <p:nvSpPr>
-          <p:cNvPr id="5" name="TextBox 4"/>
+              <a:t>Serializar de verdad existe, y cuesta — sintaxis</a:t>
+            </a:r>
+          </a:p>
+        </p:txBody>
+      </p:sp>
+      <p:sp>
+        <p:nvSpPr>
+          <p:cNvPr id="5" name="Rounded Rectangle 4"/>
+          <p:cNvSpPr/>
+          <p:nvPr/>
+        </p:nvSpPr>
+        <p:spPr>
+          <a:xfrm>
+            <a:off x="457200" y="1261872"/>
+            <a:ext cx="11277295" cy="5093208"/>
+          </a:xfrm>
+          <a:prstGeom prst="roundRect">
+            <a:avLst>
+              <a:gd name="adj" fmla="val 12000"/>
+            </a:avLst>
+          </a:prstGeom>
+          <a:solidFill>
+            <a:srgbClr val="1E2A38"/>
+          </a:solidFill>
+          <a:ln>
+            <a:noFill/>
+          </a:ln>
+        </p:spPr>
+        <p:style>
+          <a:lnRef idx="1">
+            <a:schemeClr val="accent1"/>
+          </a:lnRef>
+          <a:fillRef idx="3">
+            <a:schemeClr val="accent1"/>
+          </a:fillRef>
+          <a:effectRef idx="2">
+            <a:schemeClr val="accent1"/>
+          </a:effectRef>
+          <a:fontRef idx="minor">
+            <a:schemeClr val="lt1"/>
+          </a:fontRef>
+        </p:style>
+        <p:txBody>
+          <a:bodyPr rtlCol="0" anchor="ctr"/>
+          <a:lstStyle/>
+          <a:p>
+            <a:pPr algn="ctr"/>
+          </a:p>
+        </p:txBody>
+      </p:sp>
+      <p:sp>
+        <p:nvSpPr>
+          <p:cNvPr id="6" name="Rectangle 5"/>
+          <p:cNvSpPr/>
+          <p:nvPr/>
+        </p:nvSpPr>
+        <p:spPr>
+          <a:xfrm>
+            <a:off x="457200" y="1261872"/>
+            <a:ext cx="11277295" cy="320040"/>
+          </a:xfrm>
+          <a:prstGeom prst="rect">
+            <a:avLst/>
+          </a:prstGeom>
+          <a:solidFill>
+            <a:srgbClr val="095292"/>
+          </a:solidFill>
+          <a:ln>
+            <a:noFill/>
+          </a:ln>
+        </p:spPr>
+        <p:style>
+          <a:lnRef idx="1">
+            <a:schemeClr val="accent1"/>
+          </a:lnRef>
+          <a:fillRef idx="3">
+            <a:schemeClr val="accent1"/>
+          </a:fillRef>
+          <a:effectRef idx="2">
+            <a:schemeClr val="accent1"/>
+          </a:effectRef>
+          <a:fontRef idx="minor">
+            <a:schemeClr val="lt1"/>
+          </a:fontRef>
+        </p:style>
+        <p:txBody>
+          <a:bodyPr rtlCol="0" anchor="ctr"/>
+          <a:lstStyle/>
+          <a:p>
+            <a:pPr algn="ctr"/>
+          </a:p>
+        </p:txBody>
+      </p:sp>
+      <p:sp>
+        <p:nvSpPr>
+          <p:cNvPr id="7" name="TextBox 6"/>
           <p:cNvSpPr txBox="1"/>
           <p:nvPr/>
         </p:nvSpPr>
         <p:spPr>
           <a:xfrm>
-            <a:off x="457200" y="1170432"/>
-            <a:ext cx="11277295" cy="5230368"/>
+            <a:off x="685800" y="1307592"/>
+            <a:ext cx="10820095" cy="256032"/>
+          </a:xfrm>
+          <a:prstGeom prst="rect">
+            <a:avLst/>
+          </a:prstGeom>
+          <a:noFill/>
+        </p:spPr>
+        <p:txBody>
+          <a:bodyPr wrap="square" anchor="ctr"/>
+          <a:lstStyle/>
+          <a:p>
+            <a:r>
+              <a:rPr sz="1000" b="1" i="0">
+                <a:solidFill>
+                  <a:srgbClr val="269CCB"/>
+                </a:solidFill>
+                <a:latin typeface="Calibri"/>
+              </a:rPr>
+              <a:t>● ● ●</a:t>
+            </a:r>
+          </a:p>
+        </p:txBody>
+      </p:sp>
+      <p:sp>
+        <p:nvSpPr>
+          <p:cNvPr id="8" name="TextBox 7"/>
+          <p:cNvSpPr txBox="1"/>
+          <p:nvPr/>
+        </p:nvSpPr>
+        <p:spPr>
+          <a:xfrm>
+            <a:off x="777240" y="1719072"/>
+            <a:ext cx="10637215" cy="4453128"/>
           </a:xfrm>
           <a:prstGeom prst="rect">
             <a:avLst/>
@@ -12933,88 +13523,24 @@
           <a:p>
             <a:pPr>
               <a:spcAft>
-                <a:spcPts val="800"/>
+                <a:spcPts val="400"/>
               </a:spcAft>
             </a:pPr>
             <a:r>
-              <a:rPr sz="2000" b="0" i="0">
-                <a:solidFill>
-                  <a:srgbClr val="333333"/>
-                </a:solidFill>
-                <a:latin typeface="Calibri"/>
-              </a:rPr>
-              <a:t>–   Lectura sucia, o dirty read: la transaccion T1 inserta la cita de las 10:00 y todavia no hace COMMIT</a:t>
-            </a:r>
-          </a:p>
-          <a:p>
-            <a:pPr>
-              <a:spcAft>
-                <a:spcPts val="800"/>
-              </a:spcAft>
-            </a:pPr>
-            <a:r>
-              <a:rPr sz="2000" b="0" i="0">
-                <a:solidFill>
-                  <a:srgbClr val="333333"/>
-                </a:solidFill>
-                <a:latin typeface="Calibri"/>
-              </a:rPr>
-              <a:t>–   T2 consulta la agenda, ve esa cita y le dice al dueno que la franja esta ocupada; despues T1 hace ROLLBACK porque el pago no paso, y esa cita nunca existio.</a:t>
-            </a:r>
-          </a:p>
-          <a:p>
-            <a:pPr>
-              <a:spcAft>
-                <a:spcPts val="800"/>
-              </a:spcAft>
-            </a:pPr>
-            <a:r>
-              <a:rPr sz="2000" b="0" i="0">
-                <a:solidFill>
-                  <a:srgbClr val="333333"/>
-                </a:solidFill>
-                <a:latin typeface="Calibri"/>
-              </a:rPr>
-              <a:t>–   T2 tomo una decision con un dato que jamas fue real.</a:t>
-            </a:r>
-          </a:p>
-          <a:p>
-            <a:pPr>
-              <a:spcAft>
-                <a:spcPts val="800"/>
-              </a:spcAft>
-            </a:pPr>
-            <a:r>
-              <a:rPr sz="2000" b="0" i="0">
-                <a:solidFill>
-                  <a:srgbClr val="333333"/>
-                </a:solidFill>
-                <a:latin typeface="Calibri"/>
-              </a:rPr>
-              <a:t>–   Lectura no repetible, o non-repeatable read: dentro de una misma transaccion de facturacion, el procedimiento lee el stock del insumo 40 y obtiene 5 unidades</a:t>
-            </a:r>
-          </a:p>
-          <a:p>
-            <a:pPr>
-              <a:spcAft>
-                <a:spcPts val="800"/>
-              </a:spcAft>
-            </a:pPr>
-            <a:r>
-              <a:rPr sz="2000" b="0" i="0">
-                <a:solidFill>
-                  <a:srgbClr val="333333"/>
-                </a:solidFill>
-                <a:latin typeface="Calibri"/>
-              </a:rPr>
-              <a:t>–   Hace unos calculos, vuelve a leer el mismo stock y ahora obtiene 2, porque otra transaccion vendio 3 unidades y confirmo en el intervalo.</a:t>
-            </a:r>
-          </a:p>
-        </p:txBody>
-      </p:sp>
-      <p:sp>
-        <p:nvSpPr>
-          <p:cNvPr id="6" name="TextBox 5"/>
+              <a:rPr sz="1400" b="0" i="0">
+                <a:solidFill>
+                  <a:srgbClr val="FFFFFF"/>
+                </a:solidFill>
+                <a:latin typeface="Calibri"/>
+              </a:rPr>
+              <a:t>SET TRANSACTION ISOLATION LEVEL SERIALIZABLE</a:t>
+            </a:r>
+          </a:p>
+        </p:txBody>
+      </p:sp>
+      <p:sp>
+        <p:nvSpPr>
+          <p:cNvPr id="9" name="TextBox 8"/>
           <p:cNvSpPr txBox="1"/>
           <p:nvPr/>
         </p:nvSpPr>
@@ -13188,7 +13714,7 @@
                 </a:solidFill>
                 <a:latin typeface="Calibri"/>
               </a:rPr>
-              <a:t>Los tres fenomenos indeseables, en escenas de la clinica (2/2)</a:t>
+              <a:t>Los tres fenomenos indeseables, en escenas de la clinica (1/2)</a:t>
             </a:r>
           </a:p>
         </p:txBody>
@@ -13227,7 +13753,7 @@
                 </a:solidFill>
                 <a:latin typeface="Calibri"/>
               </a:rPr>
-              <a:t>–   Lectura fantasma, o phantom read: T1 cuenta las citas del veterinario Ruiz para el martes y obtiene 4, decide que puede agendar una quinta, y al volver a contar hay 5 porque T2 inserto una fila nueva que cumple el mismo criterio de busqueda.</a:t>
+              <a:t>–   Lectura sucia, o dirty read: la transaccion T1 inserta la cita de las 10:00 y todavia no hace COMMIT</a:t>
             </a:r>
           </a:p>
           <a:p>
@@ -13243,7 +13769,7 @@
                 </a:solidFill>
                 <a:latin typeface="Calibri"/>
               </a:rPr>
-              <a:t>–   La diferencia entre las dos ultimas es fina y conviene decirla de forma explicita</a:t>
+              <a:t>–   T2 consulta la agenda, ve esa cita y le dice al dueno que la franja esta ocupada; despues T1 hace ROLLBACK porque el pago no paso, y esa cita nunca existio.</a:t>
             </a:r>
           </a:p>
           <a:p>
@@ -13259,7 +13785,39 @@
                 </a:solidFill>
                 <a:latin typeface="Calibri"/>
               </a:rPr>
-              <a:t>–   Porque es la pregunta de examen mas fallada: en la lectura no repetible cambio una fila que ya existia; en la fantasma aparecio o desaparecio una fila del conjunto que cumple la condicion del WHERE.</a:t>
+              <a:t>–   T2 tomo una decision con un dato que jamas fue real.</a:t>
+            </a:r>
+          </a:p>
+          <a:p>
+            <a:pPr>
+              <a:spcAft>
+                <a:spcPts val="800"/>
+              </a:spcAft>
+            </a:pPr>
+            <a:r>
+              <a:rPr sz="2000" b="0" i="0">
+                <a:solidFill>
+                  <a:srgbClr val="333333"/>
+                </a:solidFill>
+                <a:latin typeface="Calibri"/>
+              </a:rPr>
+              <a:t>–   Lectura no repetible, o non-repeatable read: dentro de una misma transaccion de facturacion, el procedimiento lee el stock del insumo 40 y obtiene 5 unidades</a:t>
+            </a:r>
+          </a:p>
+          <a:p>
+            <a:pPr>
+              <a:spcAft>
+                <a:spcPts val="800"/>
+              </a:spcAft>
+            </a:pPr>
+            <a:r>
+              <a:rPr sz="2000" b="0" i="0">
+                <a:solidFill>
+                  <a:srgbClr val="333333"/>
+                </a:solidFill>
+                <a:latin typeface="Calibri"/>
+              </a:rPr>
+              <a:t>–   Hace unos calculos, vuelve a leer el mismo stock y ahora obtiene 2, porque otra transaccion vendio 3 unidades y confirmo en el intervalo.</a:t>
             </a:r>
           </a:p>
         </p:txBody>

--- a/Bases de Datos II/Clases/Clase 10 - Control de concurrencia/Presentacion.pptx
+++ b/Bases de Datos II/Clases/Clase 10 - Control de concurrencia/Presentacion.pptx
@@ -4279,7 +4279,7 @@
                 </a:solidFill>
                 <a:latin typeface="Calibri"/>
               </a:rPr>
-              <a:t>Control de concurrencia · VetCare</a:t>
+              <a:t>Control de concurrencia · la clínica</a:t>
             </a:r>
           </a:p>
         </p:txBody>
@@ -4877,7 +4877,7 @@
                 </a:solidFill>
                 <a:latin typeface="Calibri"/>
               </a:rPr>
-              <a:t>–   Es el nivel por omision de PostgreSQL, Oracle y SQL Server, y por lo tanto es el nivel en el que corre la enorme mayoria de los sistemas del mundo, incluido cualquier VetCare que el estudiante construya sin tocar nada.</a:t>
+              <a:t>–   Es el nivel por omision de PostgreSQL, Oracle y SQL Server, y por lo tanto es el nivel en el que corre la enorme mayoria de los sistemas del mundo, incluido cualquier la clínica que el estudiante construya sin tocar nada.</a:t>
             </a:r>
           </a:p>
           <a:p>
@@ -5429,7 +5429,7 @@
                 </a:solidFill>
                 <a:latin typeface="Calibri"/>
               </a:rPr>
-              <a:t>–   Aplicado a VetCare resuelve limpiamente el doble descuento de stock: la segunda transaccion espera, y cuando por fin entra ya lee 2 y no 5, de modo que su validacion de stock suficiente funciona sobre el dato verdadero.</a:t>
+              <a:t>–   Aplicado a la clínica resuelve limpiamente el doble descuento de stock: la segunda transaccion espera, y cuando por fin entra ya lee 2 y no 5, de modo que su validacion de stock suficiente funciona sobre el dato verdadero.</a:t>
             </a:r>
           </a:p>
         </p:txBody>
@@ -5933,7 +5933,7 @@
                 </a:solidFill>
                 <a:latin typeface="Calibri"/>
               </a:rPr>
-              <a:t>–   El flujo en VetCare es este: la transaccion lee la cita 812 y obtiene version 7; el usuario edita la hora; al guardar se ejecuta</a:t>
+              <a:t>–   El flujo en la clínica es este: la transaccion lee la cita 812 y obtiene version 7; el usuario edita la hora; al guardar se ejecuta</a:t>
             </a:r>
           </a:p>
           <a:p>
@@ -6217,7 +6217,7 @@
                 </a:solidFill>
                 <a:latin typeface="Calibri"/>
               </a:rPr>
-              <a:t>–   En VetCare, el stock de los insumos mas vendidos es un caso pesimista y la edicion de los datos de contacto de un dueno es un caso claramente optimista.</a:t>
+              <a:t>–   En la clínica, el stock de los insumos mas vendidos es un caso pesimista y la edicion de los datos de contacto de un dueno es un caso claramente optimista.</a:t>
             </a:r>
           </a:p>
         </p:txBody>
@@ -6770,7 +6770,7 @@
                 </a:solidFill>
                 <a:latin typeface="Calibri"/>
               </a:rPr>
-              <a:t>Deadlock: la escena de VetCare y como se evita (1/2)</a:t>
+              <a:t>Deadlock: la escena de la clínica y como se evita (1/2)</a:t>
             </a:r>
           </a:p>
         </p:txBody>
@@ -6809,7 +6809,7 @@
                 </a:solidFill>
                 <a:latin typeface="Calibri"/>
               </a:rPr>
-              <a:t>–   La escena de VetCare es concreta: el procedimiento de facturacion bloquea primero la fila de Factura y luego la de Insumo, mientras el procedimiento de devolucion bloquea primero Insumo y luego Factura.</a:t>
+              <a:t>–   La escena de la clínica es concreta: el procedimiento de facturacion bloquea primero la fila de Factura y luego la de Insumo, mientras el procedimiento de devolucion bloquea primero Insumo y luego Factura.</a:t>
             </a:r>
           </a:p>
           <a:p>
@@ -7038,7 +7038,7 @@
                 </a:solidFill>
                 <a:latin typeface="Calibri"/>
               </a:rPr>
-              <a:t>Deadlock: la escena de VetCare y como se evita (2/2)</a:t>
+              <a:t>Deadlock: la escena de la clínica y como se evita (2/2)</a:t>
             </a:r>
           </a:p>
         </p:txBody>
@@ -7093,7 +7093,7 @@
                 </a:solidFill>
                 <a:latin typeface="Calibri"/>
               </a:rPr>
-              <a:t>–   Si todo el codigo de VetCare toca Factura antes que Insumo, el ciclo no puede formarse nunca.</a:t>
+              <a:t>–   Si todo el codigo de la clínica toca Factura antes que Insumo, el ciclo no puede formarse nunca.</a:t>
             </a:r>
           </a:p>
           <a:p>
@@ -7363,7 +7363,7 @@
                 </a:solidFill>
                 <a:latin typeface="Calibri"/>
               </a:rPr>
-              <a:t> Control de concurrencia · VetCare</a:t>
+              <a:t> Control de concurrencia · la clínica</a:t>
             </a:r>
           </a:p>
           <a:p>
@@ -7438,7 +7438,7 @@
                 </a:solidFill>
                 <a:latin typeface="Calibri"/>
               </a:rPr>
-              <a:t>–   Recorrido: teoría del tema, una lámina por concepto, y demo del docente sobre VetCare DB.</a:t>
+              <a:t>–   Recorrido: teoría del tema, una lámina por concepto, y demo del docente sobre la base de la clínica.</a:t>
             </a:r>
           </a:p>
           <a:p>
@@ -7708,7 +7708,7 @@
                 </a:solidFill>
                 <a:latin typeface="Calibri"/>
               </a:rPr>
-              <a:t>–   Antes de complicarse con niveles de aislamiento hay una solucion declarativa que resuelve el caso estrella de VetCare y cuesta una sola linea:.</a:t>
+              <a:t>–   Antes de complicarse con niveles de aislamiento hay una solucion declarativa que resuelve el caso estrella de la clínica y cuesta una sola linea:.</a:t>
             </a:r>
           </a:p>
           <a:p>
@@ -11017,7 +11017,7 @@
                 </a:solidFill>
                 <a:latin typeface="Calibri"/>
               </a:rPr>
-              <a:t>–   Sigan el mismo dominio VetCare (no inventen otro caso).</a:t>
+              <a:t>–   Sigan el mismo dominio de la clínica (no inventen otro caso).</a:t>
             </a:r>
           </a:p>
           <a:p>
@@ -11246,7 +11246,7 @@
                 </a:solidFill>
                 <a:latin typeface="Calibri"/>
               </a:rPr>
-              <a:t>Clase 10 · Control de concurrencia · VetCare</a:t>
+              <a:t>Clase 10 · Control de concurrencia · la clínica</a:t>
             </a:r>
           </a:p>
         </p:txBody>
@@ -11656,7 +11656,7 @@
                 </a:solidFill>
                 <a:latin typeface="Calibri"/>
               </a:rPr>
-              <a:t>Encuadre · clase autonoma (festivo) · VetCare</a:t>
+              <a:t>Encuadre · clase autonoma (festivo) · la clínica</a:t>
             </a:r>
           </a:p>
         </p:txBody>
@@ -11771,7 +11771,7 @@
                 </a:solidFill>
                 <a:latin typeface="Calibri"/>
               </a:rPr>
-              <a:t>Teoría Core breve (al servicio del PI)</a:t>
+              <a:t>Teoría Core breve (al servicio del proyecto)</a:t>
             </a:r>
           </a:p>
         </p:txBody>
@@ -12421,7 +12421,7 @@
                 </a:solidFill>
                 <a:latin typeface="Calibri"/>
               </a:rPr>
-              <a:t>–   El escenario canonico de VetCare conviene tenerlo escrito en el tablero desde el minuto uno: dos recepcionistas, en dos computadores distintos, abren la agenda del veterinario Ruiz para el martes a las 10:00.</a:t>
+              <a:t>–   El escenario canonico de la clínica conviene tenerlo escrito en el tablero desde el minuto uno: dos recepcionistas, en dos computadores distintos, abren la agenda del veterinario Ruiz para el martes a las 10:00.</a:t>
             </a:r>
           </a:p>
         </p:txBody>
@@ -12689,7 +12689,7 @@
                 </a:solidFill>
                 <a:latin typeface="Calibri"/>
               </a:rPr>
-              <a:t>–   Ejemplo VetCare: agendar la cita y descontar la vacuna son dos sentencias de un mismo hecho; si la segunda falla, la primera tampoco debe quedar.</a:t>
+              <a:t>–   Ejemplo la clínica: agendar la cita y descontar la vacuna son dos sentencias de un mismo hecho; si la segunda falla, la primera tampoco debe quedar.</a:t>
             </a:r>
           </a:p>
         </p:txBody>
@@ -12925,7 +12925,7 @@
                 </a:solidFill>
                 <a:latin typeface="Calibri"/>
               </a:rPr>
-              <a:t>–   Si VetCare tiene ocho recepcionistas y cada agendamiento debe esperar a que termine el anterior, el sistema pasa de atender ocho operaciones simultaneas a una, y el tiempo que el usuario percibe frente a la pantalla se multiplica.</a:t>
+              <a:t>–   Si la clínica tiene ocho recepcionistas y cada agendamiento debe esperar a que termine el anterior, el sistema pasa de atender ocho operaciones simultaneas a una, y el tiempo que el usuario percibe frente a la pantalla se multiplica.</a:t>
             </a:r>
           </a:p>
           <a:p>

--- a/Bases de Datos II/Clases/Clase 10 - Control de concurrencia/Presentacion.pptx
+++ b/Bases de Datos II/Clases/Clase 10 - Control de concurrencia/Presentacion.pptx
@@ -7,8 +7,8 @@
   <p:sldIdLst>
     <p:sldId id="256" r:id="rId7"/>
     <p:sldId id="257" r:id="rId8"/>
-    <p:sldId id="258" r:id="rId10"/>
-    <p:sldId id="259" r:id="rId11"/>
+    <p:sldId id="258" r:id="rId9"/>
+    <p:sldId id="259" r:id="rId10"/>
     <p:sldId id="260" r:id="rId12"/>
     <p:sldId id="261" r:id="rId13"/>
     <p:sldId id="262" r:id="rId14"/>
@@ -519,143 +519,72 @@
           <a:lstStyle/>
           <a:p>
             <a:r>
-              <a:t>TEXTO COMPLETO DE LA LÁMINA (se proyecta resumido):</a:t>
-            </a:r>
-          </a:p>
-          <a:p/>
-          <a:p>
-            <a:r>
-              <a:t>Tema de hoy: Control de concurrencia · la clínica</a:t>
-            </a:r>
-          </a:p>
-          <a:p/>
-          <a:p>
-            <a:r>
-              <a:t>Herramienta: Google Docs + Live SQL · Bloque 120 min</a:t>
-            </a:r>
-          </a:p>
-          <a:p/>
-          <a:p>
-            <a:r>
-              <a:t>Gratis + navegador · free tier · sin software de pago obligatorio.</a:t>
-            </a:r>
-          </a:p>
-          <a:p/>
-          <a:p>
-            <a:r>
-              <a:t>Recorrido: teoría del tema, una lámina por concepto, y demo del docente sobre la base de la clínica.</a:t>
-            </a:r>
-          </a:p>
-          <a:p/>
-          <a:p>
-            <a:r>
-              <a:t>Cada lámina se sostiene sola: sirve para repasar aunque hayas faltado.</a:t>
-            </a:r>
-          </a:p>
-          <a:p/>
-          <a:p>
-            <a:r>
-              <a:t>Conceptos de hoy: La transaccion como unidad de todo o nada · Serializar de verdad existe, y cuesta · Los tres fenomenos indeseables, en escenas de la clinica · Los cuatro niveles de aislamiento se definen por lo que permiten.</a:t>
-            </a:r>
-          </a:p>
-        </p:txBody>
-      </p:sp>
-      <p:sp>
-        <p:nvSpPr>
-          <p:cNvPr id="4" name="Slide Number Placeholder 3"/>
-          <p:cNvSpPr>
-            <a:spLocks noGrp="1"/>
-          </p:cNvSpPr>
-          <p:nvPr>
-            <p:ph type="sldNum" idx="5" sz="quarter"/>
-          </p:nvPr>
-        </p:nvSpPr>
-        <p:spPr/>
-      </p:sp>
-    </p:spTree>
-  </p:cSld>
-  <p:clrMapOvr>
-    <a:masterClrMapping/>
-  </p:clrMapOvr>
-</p:notes>
-</file>
-
-<file path=ppt/notesSlides/notesSlide10.xml><?xml version="1.0" encoding="utf-8"?>
-<p:notes xmlns:a="http://schemas.openxmlformats.org/drawingml/2006/main" xmlns:p="http://schemas.openxmlformats.org/presentationml/2006/main" xmlns:r="http://schemas.openxmlformats.org/officeDocument/2006/relationships">
-  <p:cSld>
-    <p:spTree>
-      <p:nvGrpSpPr>
-        <p:cNvPr id="1" name=""/>
-        <p:cNvGrpSpPr/>
-        <p:nvPr/>
-      </p:nvGrpSpPr>
-      <p:grpSpPr>
-        <a:xfrm>
-          <a:off x="0" y="0"/>
-          <a:ext cx="0" cy="0"/>
-          <a:chOff x="0" y="0"/>
-          <a:chExt cx="0" cy="0"/>
-        </a:xfrm>
-      </p:grpSpPr>
-      <p:sp>
-        <p:nvSpPr>
-          <p:cNvPr id="2" name="Slide Image Placeholder 1"/>
-          <p:cNvSpPr>
-            <a:spLocks noGrp="1"/>
-          </p:cNvSpPr>
-          <p:nvPr>
-            <p:ph type="sldImg" idx="2"/>
-          </p:nvPr>
-        </p:nvSpPr>
-        <p:spPr/>
-      </p:sp>
-      <p:sp>
-        <p:nvSpPr>
-          <p:cNvPr id="3" name="Notes Placeholder 2"/>
-          <p:cNvSpPr>
-            <a:spLocks noGrp="1"/>
-          </p:cNvSpPr>
-          <p:nvPr>
-            <p:ph type="body" idx="3" sz="quarter"/>
-          </p:nvPr>
-        </p:nvSpPr>
-        <p:spPr/>
-        <p:txBody>
-          <a:bodyPr/>
-          <a:lstStyle/>
-          <a:p>
-            <a:r>
-              <a:t>TEXTO COMPLETO DE LA LÁMINA (se proyecta resumido):</a:t>
-            </a:r>
-          </a:p>
-          <a:p/>
-          <a:p>
-            <a:r>
-              <a:t>Herramienta: Google Docs + Live SQL</a:t>
-            </a:r>
-          </a:p>
-          <a:p/>
-          <a:p>
-            <a:r>
-              <a:t>Demo: Narrativa paso a paso T1/T2 sobre tabla Cita.</a:t>
-            </a:r>
-          </a:p>
-          <a:p/>
-          <a:p>
-            <a:r>
-              <a:t>Sigan el mismo dominio de la clínica (no inventen otro caso).</a:t>
-            </a:r>
-          </a:p>
-          <a:p/>
-          <a:p>
-            <a:r>
-              <a:t>Qué observar: la segunda reserva de la misma franja falla por la restriccion UNIQUE en vez de quedar guardada como doble reserva.</a:t>
-            </a:r>
-          </a:p>
-          <a:p/>
-          <a:p>
-            <a:r>
-              <a:t>Qué observar: con FOR UPDATE la segunda sesion espera a que la primera confirme, en vez de decidir con un dato que ya cambio.</a:t>
+              <a:t>DESARROLLO (para explicarlo, no se proyecta):</a:t>
+            </a:r>
+          </a:p>
+          <a:p>
+            <a:r>
+              <a:t>Una transaccion es un grupo de sentencias SQL que el motor trata como una sola unidad de todo o nada: o se aplican todas o no se aplica ninguna.</a:t>
+            </a:r>
+          </a:p>
+          <a:p>
+            <a:r>
+              <a:t>El motor no las ejecuta una despues de la otra: intercala sus operaciones para aprovechar disco y CPU, y ese intercalado es la fuente de todos los problemas de esta clase.</a:t>
+            </a:r>
+          </a:p>
+          <a:p>
+            <a:r>
+              <a:t>El resultado son dos mascotas citadas al mismo minuto con el mismo veterinario, y ninguna de las dos sentencias fallo ni produjo un error.</a:t>
+            </a:r>
+          </a:p>
+          <a:p>
+            <a:r>
+              <a:t>La base de datos no se corrompio ni tiene un defecto: cumplio dos ordenes contradictorias porque nadie le dijo que no debia.</a:t>
+            </a:r>
+          </a:p>
+          <a:p>
+            <a:r>
+              <a:t>Todo lo que sigue son las cuatro formas de decirselo.</a:t>
+            </a:r>
+          </a:p>
+          <a:p>
+            <a:r>
+              <a:t>Ejemplo la clínica: agendar la cita y descontar la vacuna son dos sentencias de un mismo hecho; si la segunda falla, la primera tampoco debe quedar.</a:t>
+            </a:r>
+          </a:p>
+          <a:p>
+            <a:r>
+              <a:t>NOTAS:</a:t>
+            </a:r>
+          </a:p>
+          <a:p>
+            <a:r>
+              <a:t>Se abre de forma explicita o implicita y se cierra con COMMIT, que hace permanentes los cambios, o con ROLLBACK, que los deshace.</a:t>
+            </a:r>
+          </a:p>
+          <a:p>
+            <a:r>
+              <a:t>Concurrencia significa que dos o mas transacciones estan abiertas al mismo tiempo sobre los mismos datos.</a:t>
+            </a:r>
+          </a:p>
+          <a:p>
+            <a:r>
+              <a:t>El escenario canonico de la clínica conviene tenerlo escrito en el tablero desde el minuto uno: dos recepcionistas, en dos computadores distintos, abren la agenda del veterinario Ruiz para el martes a las 10:00.</a:t>
+            </a:r>
+          </a:p>
+          <a:p>
+            <a:r>
+              <a:t>Ambas consultan si la franja esta libre.</a:t>
+            </a:r>
+          </a:p>
+          <a:p>
+            <a:r>
+              <a:t>Ambas reciben cero filas.</a:t>
+            </a:r>
+          </a:p>
+          <a:p>
+            <a:r>
+              <a:t>Ambas insertan una cita.</a:t>
             </a:r>
           </a:p>
         </p:txBody>
@@ -730,32 +659,27 @@
           </a:p>
           <a:p>
             <a:r>
-              <a:t>Una transaccion es un grupo de sentencias SQL que el motor trata como una sola unidad de todo o nada: o se aplican todas o no se aplica ninguna.</a:t>
-            </a:r>
-          </a:p>
-          <a:p>
-            <a:r>
-              <a:t>El motor no las ejecuta una despues de la otra: intercala sus operaciones para aprovechar disco y CPU, y ese intercalado es la fuente de todos los problemas de esta clase.</a:t>
-            </a:r>
-          </a:p>
-          <a:p>
-            <a:r>
-              <a:t>El resultado son dos mascotas citadas al mismo minuto con el mismo veterinario, y ninguna de las dos sentencias fallo ni produjo un error.</a:t>
-            </a:r>
-          </a:p>
-          <a:p>
-            <a:r>
-              <a:t>La base de datos no se corrompio ni tiene un defecto: cumplio dos ordenes contradictorias porque nadie le dijo que no debia.</a:t>
-            </a:r>
-          </a:p>
-          <a:p>
-            <a:r>
-              <a:t>Todo lo que sigue son las cuatro formas de decirselo.</a:t>
-            </a:r>
-          </a:p>
-          <a:p>
-            <a:r>
-              <a:t>Ejemplo la clínica: agendar la cita y descontar la vacuna son dos sentencias de un mismo hecho; si la segunda falla, la primera tampoco debe quedar.</a:t>
+              <a:t>Si la clínica tiene ocho recepcionistas y cada agendamiento debe esperar a que termine el anterior, el sistema pasa de atender ocho operaciones simultaneas a una, y el tiempo que el usuario percibe frente a la pantalla se multiplica.</a:t>
+            </a:r>
+          </a:p>
+          <a:p>
+            <a:r>
+              <a:t>Aislamiento, en este contexto, es la propiedad que responde a una pregunta muy concreta: que puede ver mi transaccion de lo que estan haciendo las otras mientras esas otras todavia no terminan.</a:t>
+            </a:r>
+          </a:p>
+          <a:p>
+            <a:r>
+              <a:t>Es la I de ACID (atomicidad, consistencia, aislamiento y durabilidad) y es la unica de las cuatro propiedades que el desarrollador configura deliberadamente; las otras tres el motor las garantiza siempre.</a:t>
+            </a:r>
+          </a:p>
+          <a:p>
+            <a:r>
+              <a:t>Esto amarra directo con la Clase 8, donde se vieron transacciones, COMMIT y ROLLBACK: sin esa base, hablar de aislamiento no tiene donde apoyarse.</a:t>
+            </a:r>
+          </a:p>
+          <a:p>
+            <a:r>
+              <a:t>En PostgreSQL se pide con cuando el motor detecta que dos transacciones no pueden ordenarse, aborta una con un error de serializacion y la aplicacion debe reintentarla.</a:t>
             </a:r>
           </a:p>
           <a:p>
@@ -765,32 +689,22 @@
           </a:p>
           <a:p>
             <a:r>
-              <a:t>Se abre de forma explicita o implicita y se cierra con COMMIT, que hace permanentes los cambios, o con ROLLBACK, que los deshace.</a:t>
-            </a:r>
-          </a:p>
-          <a:p>
-            <a:r>
-              <a:t>Concurrencia significa que dos o mas transacciones estan abiertas al mismo tiempo sobre los mismos datos.</a:t>
-            </a:r>
-          </a:p>
-          <a:p>
-            <a:r>
-              <a:t>El escenario canonico de la clínica conviene tenerlo escrito en el tablero desde el minuto uno: dos recepcionistas, en dos computadores distintos, abren la agenda del veterinario Ruiz para el martes a las 10:00.</a:t>
-            </a:r>
-          </a:p>
-          <a:p>
-            <a:r>
-              <a:t>Ambas consultan si la franja esta libre.</a:t>
-            </a:r>
-          </a:p>
-          <a:p>
-            <a:r>
-              <a:t>Ambas reciben cero filas.</a:t>
-            </a:r>
-          </a:p>
-          <a:p>
-            <a:r>
-              <a:t>Ambas insertan una cita.</a:t>
+              <a:t>La solucion obvia, que consiste en ejecutar las transacciones estrictamente una tras otra, existe y se llama serializacion, pero tiene un costo que hay que nombrar para que las demas opciones tengan sentido.</a:t>
+            </a:r>
+          </a:p>
+          <a:p>
+            <a:r>
+              <a:t>Por eso el estandar SQL no impone una sola forma de trabajar: ofrece una perilla llamada nivel de aislamiento, que permite negociar cuanta anomalia se tolera a cambio de cuanto rendimiento.</a:t>
+            </a:r>
+          </a:p>
+          <a:p>
+            <a:r>
+              <a:t>CÓDIGO CITADO (referencia):</a:t>
+            </a:r>
+          </a:p>
+          <a:p>
+            <a:r>
+              <a:t>SET TRANSACTION ISOLATION LEVEL SERIALIZABLE</a:t>
             </a:r>
           </a:p>
         </p:txBody>
@@ -865,27 +779,32 @@
           </a:p>
           <a:p>
             <a:r>
-              <a:t>Si la clínica tiene ocho recepcionistas y cada agendamiento debe esperar a que termine el anterior, el sistema pasa de atender ocho operaciones simultaneas a una, y el tiempo que el usuario percibe frente a la pantalla se multiplica.</a:t>
-            </a:r>
-          </a:p>
-          <a:p>
-            <a:r>
-              <a:t>Aislamiento, en este contexto, es la propiedad que responde a una pregunta muy concreta: que puede ver mi transaccion de lo que estan haciendo las otras mientras esas otras todavia no terminan.</a:t>
-            </a:r>
-          </a:p>
-          <a:p>
-            <a:r>
-              <a:t>Es la I de ACID (atomicidad, consistencia, aislamiento y durabilidad) y es la unica de las cuatro propiedades que el desarrollador configura deliberadamente; las otras tres el motor las garantiza siempre.</a:t>
-            </a:r>
-          </a:p>
-          <a:p>
-            <a:r>
-              <a:t>Esto amarra directo con la Clase 8, donde se vieron transacciones, COMMIT y ROLLBACK: sin esa base, hablar de aislamiento no tiene donde apoyarse.</a:t>
-            </a:r>
-          </a:p>
-          <a:p>
-            <a:r>
-              <a:t>En PostgreSQL se pide con cuando el motor detecta que dos transacciones no pueden ordenarse, aborta una con un error de serializacion y la aplicacion debe reintentarla.</a:t>
+              <a:t>Lectura sucia, o dirty read: la transaccion T1 inserta la cita de las 10:00 y todavia no hace COMMIT</a:t>
+            </a:r>
+          </a:p>
+          <a:p>
+            <a:r>
+              <a:t>T2 consulta la agenda, ve esa cita y le dice al dueno que la franja esta ocupada; despues T1 hace ROLLBACK porque el pago no paso, y esa cita nunca existio.</a:t>
+            </a:r>
+          </a:p>
+          <a:p>
+            <a:r>
+              <a:t>T2 tomo una decision con un dato que jamas fue real.</a:t>
+            </a:r>
+          </a:p>
+          <a:p>
+            <a:r>
+              <a:t>Lectura no repetible, o non-repeatable read: dentro de una misma transaccion de facturacion, el procedimiento lee el stock del insumo 40 y obtiene 5 unidades</a:t>
+            </a:r>
+          </a:p>
+          <a:p>
+            <a:r>
+              <a:t>Hace unos calculos, vuelve a leer el mismo stock y ahora obtiene 2, porque otra transaccion vendio 3 unidades y confirmo en el intervalo.</a:t>
+            </a:r>
+          </a:p>
+          <a:p>
+            <a:r>
+              <a:t>Lectura fantasma, o phantom read: T1 cuenta las citas del veterinario Ruiz para el martes y obtiene 4, decide que puede agendar una quinta, y al volver a contar hay 5 porque T2 inserto una fila nueva que cumple el mismo criterio de busqueda.</a:t>
             </a:r>
           </a:p>
           <a:p>
@@ -895,22 +814,17 @@
           </a:p>
           <a:p>
             <a:r>
-              <a:t>La solucion obvia, que consiste en ejecutar las transacciones estrictamente una tras otra, existe y se llama serializacion, pero tiene un costo que hay que nombrar para que las demas opciones tengan sentido.</a:t>
-            </a:r>
-          </a:p>
-          <a:p>
-            <a:r>
-              <a:t>Por eso el estandar SQL no impone una sola forma de trabajar: ofrece una perilla llamada nivel de aislamiento, que permite negociar cuanta anomalia se tolera a cambio de cuanto rendimiento.</a:t>
-            </a:r>
-          </a:p>
-          <a:p>
-            <a:r>
-              <a:t>CÓDIGO CITADO (referencia):</a:t>
-            </a:r>
-          </a:p>
-          <a:p>
-            <a:r>
-              <a:t>SET TRANSACTION ISOLATION LEVEL SERIALIZABLE</a:t>
+              <a:t>El estandar define tres fenomenos indeseables, y cada uno se entiende mejor con una escena de la clinica.</a:t>
+            </a:r>
+          </a:p>
+          <a:p>
+            <a:r>
+              <a:t>La misma consulta, en la misma transaccion, devolvio dos valores distintos.</a:t>
+            </a:r>
+          </a:p>
+          <a:p>
+            <a:r>
+              <a:t>La diferencia entre las dos ultimas es fina y conviene decirla de forma explicita, porque es la pregunta de examen mas fallada: en la lectura no repetible cambio una fila que ya existia; en la fantasma aparecio o desaparecio una fila del conjunto que cumple la condicion del WHERE.</a:t>
             </a:r>
           </a:p>
         </p:txBody>
@@ -985,32 +899,47 @@
           </a:p>
           <a:p>
             <a:r>
-              <a:t>Lectura sucia, o dirty read: la transaccion T1 inserta la cita de las 10:00 y todavia no hace COMMIT</a:t>
-            </a:r>
-          </a:p>
-          <a:p>
-            <a:r>
-              <a:t>T2 consulta la agenda, ve esa cita y le dice al dueno que la franja esta ocupada; despues T1 hace ROLLBACK porque el pago no paso, y esa cita nunca existio.</a:t>
-            </a:r>
-          </a:p>
-          <a:p>
-            <a:r>
-              <a:t>T2 tomo una decision con un dato que jamas fue real.</a:t>
-            </a:r>
-          </a:p>
-          <a:p>
-            <a:r>
-              <a:t>Lectura no repetible, o non-repeatable read: dentro de una misma transaccion de facturacion, el procedimiento lee el stock del insumo 40 y obtiene 5 unidades</a:t>
-            </a:r>
-          </a:p>
-          <a:p>
-            <a:r>
-              <a:t>Hace unos calculos, vuelve a leer el mismo stock y ahora obtiene 2, porque otra transaccion vendio 3 unidades y confirmo en el intervalo.</a:t>
-            </a:r>
-          </a:p>
-          <a:p>
-            <a:r>
-              <a:t>Lectura fantasma, o phantom read: T1 cuenta las citas del veterinario Ruiz para el martes y obtiene 4, decide que puede agendar una quinta, y al volver a contar hay 5 porque T2 inserto una fila nueva que cumple el mismo criterio de busqueda.</a:t>
+              <a:t>Los cuatro niveles de aislamiento del estandar SQL se definen exactamente por cuales de esos tres fenomenos permiten, y esa es la unica forma sensata de memorizarlos.</a:t>
+            </a:r>
+          </a:p>
+          <a:p>
+            <a:r>
+              <a:t>READ UNCOMMITTED permite los tres: puede leer datos no confirmados.</a:t>
+            </a:r>
+          </a:p>
+          <a:p>
+            <a:r>
+              <a:t>Es el mas rapido, practicamente no se usa en sistemas transaccionales, y Oracle ni siquiera lo implementa.</a:t>
+            </a:r>
+          </a:p>
+          <a:p>
+            <a:r>
+              <a:t>Es el nivel por omision de PostgreSQL, Oracle y SQL Server, y por lo tanto es el nivel en el que corre la enorme mayoria de los sistemas del mundo, incluido cualquier la clínica que el estudiante construya sin tocar nada.</a:t>
+            </a:r>
+          </a:p>
+          <a:p>
+            <a:r>
+              <a:t>REPEATABLE READ impide tambien la lectura no repetible: una fila leida dentro de la transaccion se ve igual hasta el final.</a:t>
+            </a:r>
+          </a:p>
+          <a:p>
+            <a:r>
+              <a:t>Segun el estandar todavia permite fantasmas, pero en la practica el motor InnoDB de MySQL, donde REPEATABLE READ es el nivel por omision, los bloquea usando gap locks; esa es una desviacion util del estandar y conviene aclararla</a:t>
+            </a:r>
+          </a:p>
+          <a:p>
+            <a:r>
+              <a:t>Porque si un estudiante prueba en DB Fiddle con MySQL no va a reproducir el fantasma y va a creer que el material esta mal.</a:t>
+            </a:r>
+          </a:p>
+          <a:p>
+            <a:r>
+              <a:t>La sentencia para cambiarlo es SET TRANSACTION ISOLATION LEVEL SERIALIZABLE</a:t>
+            </a:r>
+          </a:p>
+          <a:p>
+            <a:r>
+              <a:t>Y la regla practica que el estudiante debe recordar es que subir de nivel nunca es gratis: se paga en esperas mas largas o en transacciones abortadas que la aplicacion tiene que reintentar.</a:t>
             </a:r>
           </a:p>
           <a:p>
@@ -1020,17 +949,12 @@
           </a:p>
           <a:p>
             <a:r>
-              <a:t>El estandar define tres fenomenos indeseables, y cada uno se entiende mejor con una escena de la clinica.</a:t>
-            </a:r>
-          </a:p>
-          <a:p>
-            <a:r>
-              <a:t>La misma consulta, en la misma transaccion, devolvio dos valores distintos.</a:t>
-            </a:r>
-          </a:p>
-          <a:p>
-            <a:r>
-              <a:t>La diferencia entre las dos ultimas es fina y conviene decirla de forma explicita, porque es la pregunta de examen mas fallada: en la lectura no repetible cambio una fila que ya existia; en la fantasma aparecio o desaparecio una fila del conjunto que cumple la condicion del WHERE.</a:t>
+              <a:t>READ COMMITTED impide la lectura sucia, porque solo se ve lo que ya fue confirmado, pero permite lectura no repetible y fantasma.</a:t>
+            </a:r>
+          </a:p>
+          <a:p>
+            <a:r>
+              <a:t>SERIALIZABLE impide los tres y equivale logicamente a ejecutar las transacciones una tras otra.</a:t>
             </a:r>
           </a:p>
         </p:txBody>
@@ -1105,47 +1029,37 @@
           </a:p>
           <a:p>
             <a:r>
-              <a:t>Los cuatro niveles de aislamiento del estandar SQL se definen exactamente por cuales de esos tres fenomenos permiten, y esa es la unica forma sensata de memorizarlos.</a:t>
-            </a:r>
-          </a:p>
-          <a:p>
-            <a:r>
-              <a:t>READ UNCOMMITTED permite los tres: puede leer datos no confirmados.</a:t>
-            </a:r>
-          </a:p>
-          <a:p>
-            <a:r>
-              <a:t>Es el mas rapido, practicamente no se usa en sistemas transaccionales, y Oracle ni siquiera lo implementa.</a:t>
-            </a:r>
-          </a:p>
-          <a:p>
-            <a:r>
-              <a:t>Es el nivel por omision de PostgreSQL, Oracle y SQL Server, y por lo tanto es el nivel en el que corre la enorme mayoria de los sistemas del mundo, incluido cualquier la clínica que el estudiante construya sin tocar nada.</a:t>
-            </a:r>
-          </a:p>
-          <a:p>
-            <a:r>
-              <a:t>REPEATABLE READ impide tambien la lectura no repetible: una fila leida dentro de la transaccion se ve igual hasta el final.</a:t>
-            </a:r>
-          </a:p>
-          <a:p>
-            <a:r>
-              <a:t>Segun el estandar todavia permite fantasmas, pero en la practica el motor InnoDB de MySQL, donde REPEATABLE READ es el nivel por omision, los bloquea usando gap locks; esa es una desviacion util del estandar y conviene aclararla</a:t>
-            </a:r>
-          </a:p>
-          <a:p>
-            <a:r>
-              <a:t>Porque si un estudiante prueba en DB Fiddle con MySQL no va a reproducir el fantasma y va a creer que el material esta mal.</a:t>
-            </a:r>
-          </a:p>
-          <a:p>
-            <a:r>
-              <a:t>La sentencia para cambiarlo es SET TRANSACTION ISOLATION LEVEL SERIALIZABLE</a:t>
-            </a:r>
-          </a:p>
-          <a:p>
-            <a:r>
-              <a:t>Y la regla practica que el estudiante debe recordar es que subir de nivel nunca es gratis: se paga en esperas mas largas o en transacciones abortadas que la aplicacion tiene que reintentar.</a:t>
+              <a:t>La herramienta concreta es SELECT...</a:t>
+            </a:r>
+          </a:p>
+          <a:p>
+            <a:r>
+              <a:t>FOR UPDATE: al leer la fila con SELECT stock FROM insumo WHERE id_insumo = 40 FOR UPDATE, el motor coloca un bloqueo exclusivo sobre esa fila</a:t>
+            </a:r>
+          </a:p>
+          <a:p>
+            <a:r>
+              <a:t>Y cualquier otra transaccion que intente leerla con la misma clausula queda esperando hasta el COMMIT o el ROLLBACK de la primera.</a:t>
+            </a:r>
+          </a:p>
+          <a:p>
+            <a:r>
+              <a:t>Aplicado a la clínica resuelve limpiamente el doble descuento de stock: la segunda transaccion espera, y cuando por fin entra ya lee 2 y no 5, de modo que su validacion de stock suficiente funciona sobre el dato verdadero.</a:t>
+            </a:r>
+          </a:p>
+          <a:p>
+            <a:r>
+              <a:t>Su costo es la espera, y la espera mal manejada produce un sistema que para el usuario parece caido.</a:t>
+            </a:r>
+          </a:p>
+          <a:p>
+            <a:r>
+              <a:t>La regla de diseno asociada, y la mas importante de toda la clase, es mantener las transacciones cortas: entre el bloqueo y el COMMIT no debe haber una llamada a un servicio externo ni una pantalla esperando que el usuario confirme</a:t>
+            </a:r>
+          </a:p>
+          <a:p>
+            <a:r>
+              <a:t>Porque mientras el usuario piensa o se va a almorzar la fila sigue bloqueada y nadie mas puede facturar ese insumo.</a:t>
             </a:r>
           </a:p>
           <a:p>
@@ -1155,12 +1069,12 @@
           </a:p>
           <a:p>
             <a:r>
-              <a:t>READ COMMITTED impide la lectura sucia, porque solo se ve lo que ya fue confirmado, pero permite lectura no repetible y fantasma.</a:t>
-            </a:r>
-          </a:p>
-          <a:p>
-            <a:r>
-              <a:t>SERIALIZABLE impide los tres y equivale logicamente a ejecutar las transacciones una tras otra.</a:t>
+              <a:t>El control pesimista asume que el conflicto va a ocurrir, asi que bloquea el recurso antes de tocarlo.</a:t>
+            </a:r>
+          </a:p>
+          <a:p>
+            <a:r>
+              <a:t>Por eso existen variantes que el docente debe conocer: FOR UPDATE NOWAIT falla de inmediato en vez de esperar, y FOR UPDATE WAIT 5 espera cinco segundos y luego falla, lo cual permite devolver un mensaje honesto al usuario en vez de una pantalla congelada.</a:t>
             </a:r>
           </a:p>
         </p:txBody>
@@ -1235,52 +1149,52 @@
           </a:p>
           <a:p>
             <a:r>
-              <a:t>La herramienta concreta es SELECT...</a:t>
-            </a:r>
-          </a:p>
-          <a:p>
-            <a:r>
-              <a:t>FOR UPDATE: al leer la fila con SELECT stock FROM insumo WHERE id_insumo = 40 FOR UPDATE, el motor coloca un bloqueo exclusivo sobre esa fila</a:t>
-            </a:r>
-          </a:p>
-          <a:p>
-            <a:r>
-              <a:t>Y cualquier otra transaccion que intente leerla con la misma clausula queda esperando hasta el COMMIT o el ROLLBACK de la primera.</a:t>
-            </a:r>
-          </a:p>
-          <a:p>
-            <a:r>
-              <a:t>Aplicado a la clínica resuelve limpiamente el doble descuento de stock: la segunda transaccion espera, y cuando por fin entra ya lee 2 y no 5, de modo que su validacion de stock suficiente funciona sobre el dato verdadero.</a:t>
-            </a:r>
-          </a:p>
-          <a:p>
-            <a:r>
-              <a:t>Su costo es la espera, y la espera mal manejada produce un sistema que para el usuario parece caido.</a:t>
-            </a:r>
-          </a:p>
-          <a:p>
-            <a:r>
-              <a:t>La regla de diseno asociada, y la mas importante de toda la clase, es mantener las transacciones cortas: entre el bloqueo y el COMMIT no debe haber una llamada a un servicio externo ni una pantalla esperando que el usuario confirme</a:t>
-            </a:r>
-          </a:p>
-          <a:p>
-            <a:r>
-              <a:t>Porque mientras el usuario piensa o se va a almorzar la fila sigue bloqueada y nadie mas puede facturar ese insumo.</a:t>
-            </a:r>
-          </a:p>
-          <a:p>
-            <a:r>
-              <a:t>NOTAS:</a:t>
-            </a:r>
-          </a:p>
-          <a:p>
-            <a:r>
-              <a:t>El control pesimista asume que el conflicto va a ocurrir, asi que bloquea el recurso antes de tocarlo.</a:t>
-            </a:r>
-          </a:p>
-          <a:p>
-            <a:r>
-              <a:t>Por eso existen variantes que el docente debe conocer: FOR UPDATE NOWAIT falla de inmediato en vez de esperar, y FOR UPDATE WAIT 5 espera cinco segundos y luego falla, lo cual permite devolver un mensaje honesto al usuario en vez de una pantalla congelada.</a:t>
+              <a:t>El control optimista asume lo contrario: que los conflictos son raros, asi que no bloquea nada al leer y verifica unicamente al escribir.</a:t>
+            </a:r>
+          </a:p>
+          <a:p>
+            <a:r>
+              <a:t>Se implementa con una columna adicional, tipicamente llamada version, de tipo entero, o con un timestamp de ultima modificacion.</a:t>
+            </a:r>
+          </a:p>
+          <a:p>
+            <a:r>
+              <a:t>El flujo en la clínica es este: la transaccion lee la cita 812 y obtiene version 7; el usuario edita la hora; al guardar se ejecuta</a:t>
+            </a:r>
+          </a:p>
+          <a:p>
+            <a:r>
+              <a:t>Si otra transaccion ya paso por ahi, la version almacenada es 8 y la sentencia afecta cero filas.</a:t>
+            </a:r>
+          </a:p>
+          <a:p>
+            <a:r>
+              <a:t>El numero de filas afectadas es la senal de conflicto, y con esa senal la aplicacion decide si reintenta o le avisa al usuario que el dato cambio mientras editaba.</a:t>
+            </a:r>
+          </a:p>
+          <a:p>
+            <a:r>
+              <a:t>El criterio para elegir entre los dos enfoques es la frecuencia real del conflicto, no el gusto: si dos personas pelean por la misma fila muchas veces al dia, el optimista reintenta sin parar y conviene el pesimista</a:t>
+            </a:r>
+          </a:p>
+          <a:p>
+            <a:r>
+              <a:t>Si el choque es excepcional, el optimista da mejor rendimiento porque nadie espera nunca.</a:t>
+            </a:r>
+          </a:p>
+          <a:p>
+            <a:r>
+              <a:t>En la clínica, el stock de los insumos mas vendidos es un caso pesimista y la edicion de los datos de contacto de un dueno es un caso claramente optimista.</a:t>
+            </a:r>
+          </a:p>
+          <a:p>
+            <a:r>
+              <a:t>CÓDIGO CITADO (referencia):</a:t>
+            </a:r>
+          </a:p>
+          <a:p>
+            <a:r>
+              <a:t>UPDATE cita SET fecha_hora = ..., version = 8 WHERE id_cita = 812 AND version = 7</a:t>
             </a:r>
           </a:p>
         </p:txBody>
@@ -1355,52 +1269,62 @@
           </a:p>
           <a:p>
             <a:r>
-              <a:t>El control optimista asume lo contrario: que los conflictos son raros, asi que no bloquea nada al leer y verifica unicamente al escribir.</a:t>
-            </a:r>
-          </a:p>
-          <a:p>
-            <a:r>
-              <a:t>Se implementa con una columna adicional, tipicamente llamada version, de tipo entero, o con un timestamp de ultima modificacion.</a:t>
-            </a:r>
-          </a:p>
-          <a:p>
-            <a:r>
-              <a:t>El flujo en la clínica es este: la transaccion lee la cita 812 y obtiene version 7; el usuario edita la hora; al guardar se ejecuta</a:t>
-            </a:r>
-          </a:p>
-          <a:p>
-            <a:r>
-              <a:t>Si otra transaccion ya paso por ahi, la version almacenada es 8 y la sentencia afecta cero filas.</a:t>
-            </a:r>
-          </a:p>
-          <a:p>
-            <a:r>
-              <a:t>El numero de filas afectadas es la senal de conflicto, y con esa senal la aplicacion decide si reintenta o le avisa al usuario que el dato cambio mientras editaba.</a:t>
-            </a:r>
-          </a:p>
-          <a:p>
-            <a:r>
-              <a:t>El criterio para elegir entre los dos enfoques es la frecuencia real del conflicto, no el gusto: si dos personas pelean por la misma fila muchas veces al dia, el optimista reintenta sin parar y conviene el pesimista</a:t>
-            </a:r>
-          </a:p>
-          <a:p>
-            <a:r>
-              <a:t>Si el choque es excepcional, el optimista da mejor rendimiento porque nadie espera nunca.</a:t>
-            </a:r>
-          </a:p>
-          <a:p>
-            <a:r>
-              <a:t>En la clínica, el stock de los insumos mas vendidos es un caso pesimista y la edicion de los datos de contacto de un dueno es un caso claramente optimista.</a:t>
-            </a:r>
-          </a:p>
-          <a:p>
-            <a:r>
-              <a:t>CÓDIGO CITADO (referencia):</a:t>
-            </a:r>
-          </a:p>
-          <a:p>
-            <a:r>
-              <a:t>UPDATE cita SET fecha_hora = ..., version = 8 WHERE id_cita = 812 AND version = 7</a:t>
+              <a:t>La escena de la clínica es concreta: el procedimiento de facturacion bloquea primero la fila de Factura y luego la de Insumo, mientras el procedimiento de devolucion bloquea primero Insumo y luego Factura.</a:t>
+            </a:r>
+          </a:p>
+          <a:p>
+            <a:r>
+              <a:t>Los motores no dejan eso colgado: mantienen internamente un grafo de esperas y, al detectar un ciclo, eligen una victima y la abortan con un error explicito.</a:t>
+            </a:r>
+          </a:p>
+          <a:p>
+            <a:r>
+              <a:t>En Oracle es ORA-00060, en MySQL el error 1213, en PostgreSQL el codigo 40P01.</a:t>
+            </a:r>
+          </a:p>
+          <a:p>
+            <a:r>
+              <a:t>La consecuencia practica para el estudiante es que la aplicacion debe estar preparada para recibir ese error y reintentar la operacion, porque no es un defecto del sistema sino el mecanismo funcionando como debe.</a:t>
+            </a:r>
+          </a:p>
+          <a:p>
+            <a:r>
+              <a:t>Y la prevencion es sorprendentemente simple y barata: acceder siempre a las tablas en el mismo orden en todos los procedimientos.</a:t>
+            </a:r>
+          </a:p>
+          <a:p>
+            <a:r>
+              <a:t>Si todo el codigo de la clínica toca Factura antes que Insumo, el ciclo no puede formarse nunca.</a:t>
+            </a:r>
+          </a:p>
+          <a:p>
+            <a:r>
+              <a:t>Ese acuerdo de orden canonico se escribe una vez en el documento de diseno, se respeta, y elimina la clase entera de problemas sin costo de rendimiento.</a:t>
+            </a:r>
+          </a:p>
+          <a:p>
+            <a:r>
+              <a:t>PostgreSQL detecta el ciclo, aborta una de las dos transacciones con deadlock detected y deja seguir a la otra; la abortada debe reintentarse completa.</a:t>
+            </a:r>
+          </a:p>
+          <a:p>
+            <a:r>
+              <a:t>NOTAS:</a:t>
+            </a:r>
+          </a:p>
+          <a:p>
+            <a:r>
+              <a:t>Un deadlock, o interbloqueo, ocurre cuando dos transacciones se esperan mutuamente y ninguna puede avanzar.</a:t>
+            </a:r>
+          </a:p>
+          <a:p>
+            <a:r>
+              <a:t>Si los dos arrancan al mismo tiempo, cada uno tiene exactamente lo que el otro necesita, nadie cede y ninguna espera termina sola.</a:t>
+            </a:r>
+          </a:p>
+          <a:p>
+            <a:r>
+              <a:t>La transaccion sobreviviente termina normal.</a:t>
             </a:r>
           </a:p>
         </p:txBody>
@@ -1426,136 +1350,6 @@
 </file>
 
 <file path=ppt/notesSlides/notesSlide8.xml><?xml version="1.0" encoding="utf-8"?>
-<p:notes xmlns:a="http://schemas.openxmlformats.org/drawingml/2006/main" xmlns:p="http://schemas.openxmlformats.org/presentationml/2006/main" xmlns:r="http://schemas.openxmlformats.org/officeDocument/2006/relationships">
-  <p:cSld>
-    <p:spTree>
-      <p:nvGrpSpPr>
-        <p:cNvPr id="1" name=""/>
-        <p:cNvGrpSpPr/>
-        <p:nvPr/>
-      </p:nvGrpSpPr>
-      <p:grpSpPr>
-        <a:xfrm>
-          <a:off x="0" y="0"/>
-          <a:ext cx="0" cy="0"/>
-          <a:chOff x="0" y="0"/>
-          <a:chExt cx="0" cy="0"/>
-        </a:xfrm>
-      </p:grpSpPr>
-      <p:sp>
-        <p:nvSpPr>
-          <p:cNvPr id="2" name="Slide Image Placeholder 1"/>
-          <p:cNvSpPr>
-            <a:spLocks noGrp="1"/>
-          </p:cNvSpPr>
-          <p:nvPr>
-            <p:ph type="sldImg" idx="2"/>
-          </p:nvPr>
-        </p:nvSpPr>
-        <p:spPr/>
-      </p:sp>
-      <p:sp>
-        <p:nvSpPr>
-          <p:cNvPr id="3" name="Notes Placeholder 2"/>
-          <p:cNvSpPr>
-            <a:spLocks noGrp="1"/>
-          </p:cNvSpPr>
-          <p:nvPr>
-            <p:ph type="body" idx="3" sz="quarter"/>
-          </p:nvPr>
-        </p:nvSpPr>
-        <p:spPr/>
-        <p:txBody>
-          <a:bodyPr/>
-          <a:lstStyle/>
-          <a:p>
-            <a:r>
-              <a:t>DESARROLLO (para explicarlo, no se proyecta):</a:t>
-            </a:r>
-          </a:p>
-          <a:p>
-            <a:r>
-              <a:t>La escena de la clínica es concreta: el procedimiento de facturacion bloquea primero la fila de Factura y luego la de Insumo, mientras el procedimiento de devolucion bloquea primero Insumo y luego Factura.</a:t>
-            </a:r>
-          </a:p>
-          <a:p>
-            <a:r>
-              <a:t>Los motores no dejan eso colgado: mantienen internamente un grafo de esperas y, al detectar un ciclo, eligen una victima y la abortan con un error explicito.</a:t>
-            </a:r>
-          </a:p>
-          <a:p>
-            <a:r>
-              <a:t>En Oracle es ORA-00060, en MySQL el error 1213, en PostgreSQL el codigo 40P01.</a:t>
-            </a:r>
-          </a:p>
-          <a:p>
-            <a:r>
-              <a:t>La consecuencia practica para el estudiante es que la aplicacion debe estar preparada para recibir ese error y reintentar la operacion, porque no es un defecto del sistema sino el mecanismo funcionando como debe.</a:t>
-            </a:r>
-          </a:p>
-          <a:p>
-            <a:r>
-              <a:t>Y la prevencion es sorprendentemente simple y barata: acceder siempre a las tablas en el mismo orden en todos los procedimientos.</a:t>
-            </a:r>
-          </a:p>
-          <a:p>
-            <a:r>
-              <a:t>Si todo el codigo de la clínica toca Factura antes que Insumo, el ciclo no puede formarse nunca.</a:t>
-            </a:r>
-          </a:p>
-          <a:p>
-            <a:r>
-              <a:t>Ese acuerdo de orden canonico se escribe una vez en el documento de diseno, se respeta, y elimina la clase entera de problemas sin costo de rendimiento.</a:t>
-            </a:r>
-          </a:p>
-          <a:p>
-            <a:r>
-              <a:t>PostgreSQL detecta el ciclo, aborta una de las dos transacciones con deadlock detected y deja seguir a la otra; la abortada debe reintentarse completa.</a:t>
-            </a:r>
-          </a:p>
-          <a:p>
-            <a:r>
-              <a:t>NOTAS:</a:t>
-            </a:r>
-          </a:p>
-          <a:p>
-            <a:r>
-              <a:t>Un deadlock, o interbloqueo, ocurre cuando dos transacciones se esperan mutuamente y ninguna puede avanzar.</a:t>
-            </a:r>
-          </a:p>
-          <a:p>
-            <a:r>
-              <a:t>Si los dos arrancan al mismo tiempo, cada uno tiene exactamente lo que el otro necesita, nadie cede y ninguna espera termina sola.</a:t>
-            </a:r>
-          </a:p>
-          <a:p>
-            <a:r>
-              <a:t>La transaccion sobreviviente termina normal.</a:t>
-            </a:r>
-          </a:p>
-        </p:txBody>
-      </p:sp>
-      <p:sp>
-        <p:nvSpPr>
-          <p:cNvPr id="4" name="Slide Number Placeholder 3"/>
-          <p:cNvSpPr>
-            <a:spLocks noGrp="1"/>
-          </p:cNvSpPr>
-          <p:nvPr>
-            <p:ph type="sldNum" idx="5" sz="quarter"/>
-          </p:nvPr>
-        </p:nvSpPr>
-        <p:spPr/>
-      </p:sp>
-    </p:spTree>
-  </p:cSld>
-  <p:clrMapOvr>
-    <a:masterClrMapping/>
-  </p:clrMapOvr>
-</p:notes>
-</file>
-
-<file path=ppt/notesSlides/notesSlide9.xml><?xml version="1.0" encoding="utf-8"?>
 <p:notes xmlns:a="http://schemas.openxmlformats.org/drawingml/2006/main" xmlns:p="http://schemas.openxmlformats.org/presentationml/2006/main" xmlns:r="http://schemas.openxmlformats.org/officeDocument/2006/relationships">
   <p:cSld>
     <p:spTree>
@@ -11129,118 +10923,14 @@
       </p:sp>
       <p:sp>
         <p:nvSpPr>
-          <p:cNvPr id="5" name="Rounded Rectangle 4"/>
-          <p:cNvSpPr/>
-          <p:nvPr/>
-        </p:nvSpPr>
-        <p:spPr>
-          <a:xfrm>
-            <a:off x="5797149" y="1573813"/>
-            <a:ext cx="6010497" cy="4057845"/>
-          </a:xfrm>
-          <a:prstGeom prst="roundRect">
-            <a:avLst>
-              <a:gd name="adj" fmla="val 4000"/>
-            </a:avLst>
-          </a:prstGeom>
-          <a:solidFill>
-            <a:srgbClr val="E8EEF4"/>
-          </a:solidFill>
-          <a:ln>
-            <a:noFill/>
-          </a:ln>
-        </p:spPr>
-        <p:style>
-          <a:lnRef idx="1">
-            <a:schemeClr val="accent1"/>
-          </a:lnRef>
-          <a:fillRef idx="3">
-            <a:schemeClr val="accent1"/>
-          </a:fillRef>
-          <a:effectRef idx="2">
-            <a:schemeClr val="accent1"/>
-          </a:effectRef>
-          <a:fontRef idx="minor">
-            <a:schemeClr val="lt1"/>
-          </a:fontRef>
-        </p:style>
-        <p:txBody>
-          <a:bodyPr rtlCol="0" anchor="ctr"/>
-          <a:lstStyle/>
-          <a:p>
-            <a:pPr algn="ctr"/>
-          </a:p>
-        </p:txBody>
-      </p:sp>
-      <p:pic>
-        <p:nvPicPr>
-          <p:cNvPr id="6" name="Picture 5" descr="laptop-code-live-demo.jpg"/>
-          <p:cNvPicPr>
-            <a:picLocks noChangeAspect="1"/>
-          </p:cNvPicPr>
-          <p:nvPr/>
-        </p:nvPicPr>
-        <p:blipFill>
-          <a:blip r:embed="rId2"/>
-          <a:stretch>
-            <a:fillRect/>
-          </a:stretch>
-        </p:blipFill>
-        <p:spPr>
-          <a:xfrm>
-            <a:off x="5870301" y="1646965"/>
-            <a:ext cx="5864193" cy="3911541"/>
-          </a:xfrm>
-          <a:prstGeom prst="rect">
-            <a:avLst/>
-          </a:prstGeom>
-        </p:spPr>
-      </p:pic>
-      <p:sp>
-        <p:nvSpPr>
-          <p:cNvPr id="7" name="TextBox 6"/>
+          <p:cNvPr id="5" name="TextBox 4"/>
           <p:cNvSpPr txBox="1"/>
           <p:nvPr/>
         </p:nvSpPr>
         <p:spPr>
           <a:xfrm>
-            <a:off x="5870301" y="5961888"/>
-            <a:ext cx="5864193" cy="320040"/>
-          </a:xfrm>
-          <a:prstGeom prst="rect">
-            <a:avLst/>
-          </a:prstGeom>
-          <a:noFill/>
-        </p:spPr>
-        <p:txBody>
-          <a:bodyPr wrap="square">
-            <a:spAutoFit/>
-          </a:bodyPr>
-          <a:lstStyle/>
-          <a:p>
-            <a:pPr algn="ctr"/>
-            <a:r>
-              <a:rPr sz="1100" b="0" i="1">
-                <a:solidFill>
-                  <a:srgbClr val="666666"/>
-                </a:solidFill>
-                <a:latin typeface="Calibri"/>
-              </a:rPr>
-              <a:t>Foto: olia danilevich · Pexels</a:t>
-            </a:r>
-          </a:p>
-        </p:txBody>
-      </p:sp>
-      <p:sp>
-        <p:nvSpPr>
-          <p:cNvPr id="8" name="TextBox 7"/>
-          <p:cNvSpPr txBox="1"/>
-          <p:nvPr/>
-        </p:nvSpPr>
-        <p:spPr>
-          <a:xfrm>
-            <a:off x="457200" y="1353312"/>
-            <a:ext cx="5093061" cy="5047488"/>
+            <a:off x="457200" y="1170432"/>
+            <a:ext cx="11277295" cy="5230368"/>
           </a:xfrm>
           <a:prstGeom prst="rect">
             <a:avLst/>
@@ -11370,11 +11060,45 @@
               <a:t> la segunda reserva de la misma franja falla por la restriccion UNIQUE en vez de quedar guardada como doble reserva.</a:t>
             </a:r>
           </a:p>
-        </p:txBody>
-      </p:sp>
-      <p:sp>
-        <p:nvSpPr>
-          <p:cNvPr id="9" name="TextBox 8"/>
+          <a:p>
+            <a:pPr>
+              <a:spcAft>
+                <a:spcPts val="800"/>
+              </a:spcAft>
+            </a:pPr>
+            <a:r>
+              <a:rPr sz="2000" b="0" i="0">
+                <a:solidFill>
+                  <a:srgbClr val="333333"/>
+                </a:solidFill>
+                <a:latin typeface="Calibri"/>
+              </a:rPr>
+              <a:t>–   </a:t>
+            </a:r>
+            <a:r>
+              <a:rPr sz="2000" b="1" i="0">
+                <a:solidFill>
+                  <a:srgbClr val="333333"/>
+                </a:solidFill>
+                <a:latin typeface="Calibri"/>
+              </a:rPr>
+              <a:t>Qué observar:</a:t>
+            </a:r>
+            <a:r>
+              <a:rPr sz="2000" b="0" i="0">
+                <a:solidFill>
+                  <a:srgbClr val="333333"/>
+                </a:solidFill>
+                <a:latin typeface="Calibri"/>
+              </a:rPr>
+              <a:t> con FOR UPDATE la segunda sesion espera a que la primera confirme, en vez de decidir con un dato que ya cambio.</a:t>
+            </a:r>
+          </a:p>
+        </p:txBody>
+      </p:sp>
+      <p:sp>
+        <p:nvSpPr>
+          <p:cNvPr id="6" name="TextBox 5"/>
           <p:cNvSpPr txBox="1"/>
           <p:nvPr/>
         </p:nvSpPr>
@@ -11787,118 +11511,14 @@
       </p:sp>
       <p:sp>
         <p:nvSpPr>
-          <p:cNvPr id="5" name="Rounded Rectangle 4"/>
-          <p:cNvSpPr/>
-          <p:nvPr/>
-        </p:nvSpPr>
-        <p:spPr>
-          <a:xfrm>
-            <a:off x="5797149" y="1573813"/>
-            <a:ext cx="6010497" cy="4057845"/>
-          </a:xfrm>
-          <a:prstGeom prst="roundRect">
-            <a:avLst>
-              <a:gd name="adj" fmla="val 4000"/>
-            </a:avLst>
-          </a:prstGeom>
-          <a:solidFill>
-            <a:srgbClr val="E8EEF4"/>
-          </a:solidFill>
-          <a:ln>
-            <a:noFill/>
-          </a:ln>
-        </p:spPr>
-        <p:style>
-          <a:lnRef idx="1">
-            <a:schemeClr val="accent1"/>
-          </a:lnRef>
-          <a:fillRef idx="3">
-            <a:schemeClr val="accent1"/>
-          </a:fillRef>
-          <a:effectRef idx="2">
-            <a:schemeClr val="accent1"/>
-          </a:effectRef>
-          <a:fontRef idx="minor">
-            <a:schemeClr val="lt1"/>
-          </a:fontRef>
-        </p:style>
-        <p:txBody>
-          <a:bodyPr rtlCol="0" anchor="ctr"/>
-          <a:lstStyle/>
-          <a:p>
-            <a:pPr algn="ctr"/>
-          </a:p>
-        </p:txBody>
-      </p:sp>
-      <p:pic>
-        <p:nvPicPr>
-          <p:cNvPr id="6" name="Picture 5" descr="notebook-planning-desk-coffee.jpg"/>
-          <p:cNvPicPr>
-            <a:picLocks noChangeAspect="1"/>
-          </p:cNvPicPr>
-          <p:nvPr/>
-        </p:nvPicPr>
-        <p:blipFill>
-          <a:blip r:embed="rId2"/>
-          <a:stretch>
-            <a:fillRect/>
-          </a:stretch>
-        </p:blipFill>
-        <p:spPr>
-          <a:xfrm>
-            <a:off x="5870301" y="1646965"/>
-            <a:ext cx="5864193" cy="3911541"/>
-          </a:xfrm>
-          <a:prstGeom prst="rect">
-            <a:avLst/>
-          </a:prstGeom>
-        </p:spPr>
-      </p:pic>
-      <p:sp>
-        <p:nvSpPr>
-          <p:cNvPr id="7" name="TextBox 6"/>
+          <p:cNvPr id="5" name="TextBox 4"/>
           <p:cNvSpPr txBox="1"/>
           <p:nvPr/>
         </p:nvSpPr>
         <p:spPr>
           <a:xfrm>
-            <a:off x="5870301" y="5961888"/>
-            <a:ext cx="5864193" cy="320040"/>
-          </a:xfrm>
-          <a:prstGeom prst="rect">
-            <a:avLst/>
-          </a:prstGeom>
-          <a:noFill/>
-        </p:spPr>
-        <p:txBody>
-          <a:bodyPr wrap="square">
-            <a:spAutoFit/>
-          </a:bodyPr>
-          <a:lstStyle/>
-          <a:p>
-            <a:pPr algn="ctr"/>
-            <a:r>
-              <a:rPr sz="1100" b="0" i="1">
-                <a:solidFill>
-                  <a:srgbClr val="666666"/>
-                </a:solidFill>
-                <a:latin typeface="Calibri"/>
-              </a:rPr>
-              <a:t>Foto: Cup of  Couple · Pexels</a:t>
-            </a:r>
-          </a:p>
-        </p:txBody>
-      </p:sp>
-      <p:sp>
-        <p:nvSpPr>
-          <p:cNvPr id="8" name="TextBox 7"/>
-          <p:cNvSpPr txBox="1"/>
-          <p:nvPr/>
-        </p:nvSpPr>
-        <p:spPr>
-          <a:xfrm>
-            <a:off x="457200" y="1353312"/>
-            <a:ext cx="5093061" cy="5047488"/>
+            <a:off x="457200" y="1170432"/>
+            <a:ext cx="11277295" cy="5230368"/>
           </a:xfrm>
           <a:prstGeom prst="rect">
             <a:avLst/>
@@ -12019,11 +11639,61 @@
               <a:t>–   Recorrido: teoría del tema, una lámina por concepto, y demo del docente sobre la base de la clínica.</a:t>
             </a:r>
           </a:p>
-        </p:txBody>
-      </p:sp>
-      <p:sp>
-        <p:nvSpPr>
-          <p:cNvPr id="9" name="TextBox 8"/>
+          <a:p>
+            <a:pPr>
+              <a:spcAft>
+                <a:spcPts val="800"/>
+              </a:spcAft>
+            </a:pPr>
+            <a:r>
+              <a:rPr sz="2000" b="0" i="0">
+                <a:solidFill>
+                  <a:srgbClr val="333333"/>
+                </a:solidFill>
+                <a:latin typeface="Calibri"/>
+              </a:rPr>
+              <a:t>–   Cada lámina se sostiene sola: sirve para repasar aunque hayas faltado.</a:t>
+            </a:r>
+          </a:p>
+          <a:p>
+            <a:pPr>
+              <a:spcAft>
+                <a:spcPts val="800"/>
+              </a:spcAft>
+            </a:pPr>
+            <a:r>
+              <a:rPr sz="2000" b="0" i="0">
+                <a:solidFill>
+                  <a:srgbClr val="333333"/>
+                </a:solidFill>
+                <a:latin typeface="Calibri"/>
+              </a:rPr>
+              <a:t>–   </a:t>
+            </a:r>
+            <a:r>
+              <a:rPr sz="2000" b="1" i="0">
+                <a:solidFill>
+                  <a:srgbClr val="333333"/>
+                </a:solidFill>
+                <a:latin typeface="Calibri"/>
+              </a:rPr>
+              <a:t>Conceptos de hoy:</a:t>
+            </a:r>
+            <a:r>
+              <a:rPr sz="2000" b="0" i="0">
+                <a:solidFill>
+                  <a:srgbClr val="333333"/>
+                </a:solidFill>
+                <a:latin typeface="Calibri"/>
+              </a:rPr>
+              <a:t> La transaccion como unidad de todo o nada · Serializar de verdad existe, y cuesta · Los tres fenomenos indeseables, en escenas de la clinica · Los cuatro niveles de aislamiento se definen por lo que permiten.</a:t>
+            </a:r>
+          </a:p>
+        </p:txBody>
+      </p:sp>
+      <p:sp>
+        <p:nvSpPr>
+          <p:cNvPr id="6" name="TextBox 5"/>
           <p:cNvSpPr txBox="1"/>
           <p:nvPr/>
         </p:nvSpPr>

--- a/Bases de Datos II/Clases/Clase 10 - Control de concurrencia/Presentacion.pptx
+++ b/Bases de Datos II/Clases/Clase 10 - Control de concurrencia/Presentacion.pptx
@@ -519,72 +519,984 @@
           <a:lstStyle/>
           <a:p>
             <a:r>
-              <a:t>DESARROLLO (para explicarlo, no se proyecta):</a:t>
-            </a:r>
-          </a:p>
-          <a:p>
-            <a:r>
-              <a:t>Una transaccion es un grupo de sentencias SQL que el motor trata como una sola unidad de todo o nada: o se aplican todas o no se aplica ninguna.</a:t>
-            </a:r>
-          </a:p>
-          <a:p>
-            <a:r>
-              <a:t>El motor no las ejecuta una despues de la otra: intercala sus operaciones para aprovechar disco y CPU, y ese intercalado es la fuente de todos los problemas de esta clase.</a:t>
-            </a:r>
-          </a:p>
-          <a:p>
-            <a:r>
-              <a:t>El resultado son dos mascotas citadas al mismo minuto con el mismo veterinario, y ninguna de las dos sentencias fallo ni produjo un error.</a:t>
-            </a:r>
-          </a:p>
-          <a:p>
-            <a:r>
-              <a:t>La base de datos no se corrompio ni tiene un defecto: cumplio dos ordenes contradictorias porque nadie le dijo que no debia.</a:t>
-            </a:r>
-          </a:p>
-          <a:p>
-            <a:r>
-              <a:t>Todo lo que sigue son las cuatro formas de decirselo.</a:t>
-            </a:r>
-          </a:p>
-          <a:p>
-            <a:r>
-              <a:t>Ejemplo la clínica: agendar la cita y descontar la vacuna son dos sentencias de un mismo hecho; si la segunda falla, la primera tampoco debe quedar.</a:t>
-            </a:r>
-          </a:p>
-          <a:p>
-            <a:r>
-              <a:t>NOTAS:</a:t>
-            </a:r>
-          </a:p>
-          <a:p>
-            <a:r>
-              <a:t>Se abre de forma explicita o implicita y se cierra con COMMIT, que hace permanentes los cambios, o con ROLLBACK, que los deshace.</a:t>
-            </a:r>
-          </a:p>
-          <a:p>
-            <a:r>
-              <a:t>Concurrencia significa que dos o mas transacciones estan abiertas al mismo tiempo sobre los mismos datos.</a:t>
-            </a:r>
-          </a:p>
-          <a:p>
-            <a:r>
-              <a:t>El escenario canonico de la clínica conviene tenerlo escrito en el tablero desde el minuto uno: dos recepcionistas, en dos computadores distintos, abren la agenda del veterinario Ruiz para el martes a las 10:00.</a:t>
-            </a:r>
-          </a:p>
-          <a:p>
-            <a:r>
-              <a:t>Ambas consultan si la franja esta libre.</a:t>
-            </a:r>
-          </a:p>
-          <a:p>
-            <a:r>
-              <a:t>Ambas reciben cero filas.</a:t>
-            </a:r>
-          </a:p>
-          <a:p>
-            <a:r>
-              <a:t>Ambas insertan una cita.</a:t>
+              <a:t>QUÉ ES (dilo así): Una transacción es un grupo de sentencias que el motor trata como un solo hecho: o se confirman todas con COMMIT o se deshacen todas con ROLLBACK. Eso la protege de quedar a medias, pero no de otra transacción que trabaja al mismo tiempo sobre los mismos datos. Cuando hay dos a la vez, el motor intercala sus operaciones, y de ese intercalado salen todos los problemas de hoy.</a:t>
+            </a:r>
+          </a:p>
+          <a:p/>
+          <a:p>
+            <a:r>
+              <a:t>CÓMO DARLA (≈5 min):</a:t>
+            </a:r>
+          </a:p>
+          <a:p>
+            <a:r>
+              <a:t>  • Al entrar: Todo o nada: agendar la cita (INSERT INTO cita) y descontar la vacuna (UPDATE insumo) son un solo hecho. Con COMMIT quedan las dos; si la segunda falla, ROLLBACK y no queda ninguna. Pregunta: «¿qué pasa si queda la cita y no el descuento?» (el inventario miente).</a:t>
+            </a:r>
+          </a:p>
+          <a:p>
+            <a:r>
+              <a:t>  • Clic 1: Dos transacciones a la vez: la recepción A (T1) y la recepción B (T2) preguntan si la veterinaria Restrepo tiene libre las 10:00. Las dos reciben 0 filas. Subraya que las dos leen antes de que ninguna escriba.</a:t>
+            </a:r>
+          </a:p>
+          <a:p>
+            <a:r>
+              <a:t>  • Clic 2: Las dos insertan su cita (Mishi y Toby) y las dos confirman con COMMIT, sin ningún error. Cada una decidió con un dato que la otra estaba a punto de cambiar.</a:t>
+            </a:r>
+          </a:p>
+          <a:p>
+            <a:r>
+              <a:t>  • Clic 3: El resultado: dos filas en cita a las 10:00 con la misma veterinaria. La base no está dañada: cumplió dos órdenes contradictorias porque nada le dijo que no podía. El resto de la clase son las formas de decírselo.</a:t>
+            </a:r>
+          </a:p>
+          <a:p/>
+          <a:p>
+            <a:r>
+              <a:t>EJEMPLO: Con varias recepcionistas y unas 150 citas al día, que dos agenden la misma franja en el mismo segundo no es una rareza: es cuestión de tiempo.</a:t>
+            </a:r>
+          </a:p>
+          <a:p/>
+          <a:p>
+            <a:r>
+              <a:t>SI PREGUNTAN:</a:t>
+            </a:r>
+          </a:p>
+          <a:p>
+            <a:r>
+              <a:t>  • «¿Y si pongo BEGIN y COMMIT alrededor del SELECT y el INSERT?» → Sigue pasando. En READ COMMITTED, el nivel por omisión de PostgreSQL, cada transacción solo ve lo confirmado: las dos leen «libre» antes de que la otra confirme. La transacción da atomicidad, no exclusión.</a:t>
+            </a:r>
+          </a:p>
+          <a:p>
+            <a:r>
+              <a:t>  • «¿El motor no debería detectar la doble cita?» → Solo si se le dice qué es inválido, con una restricción UNIQUE sobre (id_veterinario, fecha_hora). Sin ella, dos citas a la misma hora son datos perfectamente válidos.</a:t>
+            </a:r>
+          </a:p>
+          <a:p/>
+          <a:p>
+            <a:r>
+              <a:t>CUIDADO: El error típico del docente es afirmar que «poner una transacción» resuelve la concurrencia. No la resuelve: garantiza que las sentencias de UNA transacción se apliquen juntas, nada más.</a:t>
+            </a:r>
+          </a:p>
+          <a:p/>
+          <a:p>
+            <a:r>
+              <a:t>PASA A LA SIGUIENTE: Si el problema es que se intercalan, ¿por qué no ejecutar una detrás de otra? Existe, y cuesta.</a:t>
+            </a:r>
+          </a:p>
+        </p:txBody>
+      </p:sp>
+      <p:sp>
+        <p:nvSpPr>
+          <p:cNvPr id="4" name="Slide Number Placeholder 3"/>
+          <p:cNvSpPr>
+            <a:spLocks noGrp="1"/>
+          </p:cNvSpPr>
+          <p:nvPr>
+            <p:ph type="sldNum" idx="5" sz="quarter"/>
+          </p:nvPr>
+        </p:nvSpPr>
+        <p:spPr/>
+      </p:sp>
+    </p:spTree>
+  </p:cSld>
+  <p:clrMapOvr>
+    <a:masterClrMapping/>
+  </p:clrMapOvr>
+</p:notes>
+</file>
+
+<file path=ppt/notesSlides/notesSlide10.xml><?xml version="1.0" encoding="utf-8"?>
+<p:notes xmlns:a="http://schemas.openxmlformats.org/drawingml/2006/main" xmlns:p="http://schemas.openxmlformats.org/presentationml/2006/main" xmlns:r="http://schemas.openxmlformats.org/officeDocument/2006/relationships">
+  <p:cSld>
+    <p:spTree>
+      <p:nvGrpSpPr>
+        <p:cNvPr id="1" name=""/>
+        <p:cNvGrpSpPr/>
+        <p:nvPr/>
+      </p:nvGrpSpPr>
+      <p:grpSpPr>
+        <a:xfrm>
+          <a:off x="0" y="0"/>
+          <a:ext cx="0" cy="0"/>
+          <a:chOff x="0" y="0"/>
+          <a:chExt cx="0" cy="0"/>
+        </a:xfrm>
+      </p:grpSpPr>
+      <p:sp>
+        <p:nvSpPr>
+          <p:cNvPr id="2" name="Slide Image Placeholder 1"/>
+          <p:cNvSpPr>
+            <a:spLocks noGrp="1"/>
+          </p:cNvSpPr>
+          <p:nvPr>
+            <p:ph type="sldImg" idx="2"/>
+          </p:nvPr>
+        </p:nvSpPr>
+        <p:spPr/>
+      </p:sp>
+      <p:sp>
+        <p:nvSpPr>
+          <p:cNvPr id="3" name="Notes Placeholder 2"/>
+          <p:cNvSpPr>
+            <a:spLocks noGrp="1"/>
+          </p:cNvSpPr>
+          <p:nvPr>
+            <p:ph type="body" idx="3" sz="quarter"/>
+          </p:nvPr>
+        </p:nvSpPr>
+        <p:spPr/>
+        <p:txBody>
+          <a:bodyPr/>
+          <a:lstStyle/>
+          <a:p>
+            <a:r>
+              <a:t>QUÉ ES (dilo así): El recorrido de las dos horas: teoría con una lámina por concepto, demo sobre la base de la clínica y práctica opcional.</a:t>
+            </a:r>
+          </a:p>
+          <a:p/>
+          <a:p>
+            <a:r>
+              <a:t>CÓMO DARLA (≈1 min):</a:t>
+            </a:r>
+          </a:p>
+          <a:p>
+            <a:r>
+              <a:t>  • Al entrar: Señala solo los tramos; no te detengas. La práctica está en la carpeta de la clase y es opcional.</a:t>
+            </a:r>
+          </a:p>
+        </p:txBody>
+      </p:sp>
+      <p:sp>
+        <p:nvSpPr>
+          <p:cNvPr id="4" name="Slide Number Placeholder 3"/>
+          <p:cNvSpPr>
+            <a:spLocks noGrp="1"/>
+          </p:cNvSpPr>
+          <p:nvPr>
+            <p:ph type="sldNum" idx="5" sz="quarter"/>
+          </p:nvPr>
+        </p:nvSpPr>
+        <p:spPr/>
+      </p:sp>
+    </p:spTree>
+  </p:cSld>
+  <p:clrMapOvr>
+    <a:masterClrMapping/>
+  </p:clrMapOvr>
+</p:notes>
+</file>
+
+<file path=ppt/notesSlides/notesSlide11.xml><?xml version="1.0" encoding="utf-8"?>
+<p:notes xmlns:a="http://schemas.openxmlformats.org/drawingml/2006/main" xmlns:p="http://schemas.openxmlformats.org/presentationml/2006/main" xmlns:r="http://schemas.openxmlformats.org/officeDocument/2006/relationships">
+  <p:cSld>
+    <p:spTree>
+      <p:nvGrpSpPr>
+        <p:cNvPr id="1" name=""/>
+        <p:cNvGrpSpPr/>
+        <p:nvPr/>
+      </p:nvGrpSpPr>
+      <p:grpSpPr>
+        <a:xfrm>
+          <a:off x="0" y="0"/>
+          <a:ext cx="0" cy="0"/>
+          <a:chOff x="0" y="0"/>
+          <a:chExt cx="0" cy="0"/>
+        </a:xfrm>
+      </p:grpSpPr>
+      <p:sp>
+        <p:nvSpPr>
+          <p:cNvPr id="2" name="Slide Image Placeholder 1"/>
+          <p:cNvSpPr>
+            <a:spLocks noGrp="1"/>
+          </p:cNvSpPr>
+          <p:nvPr>
+            <p:ph type="sldImg" idx="2"/>
+          </p:nvPr>
+        </p:nvSpPr>
+        <p:spPr/>
+      </p:sp>
+      <p:sp>
+        <p:nvSpPr>
+          <p:cNvPr id="3" name="Notes Placeholder 2"/>
+          <p:cNvSpPr>
+            <a:spLocks noGrp="1"/>
+          </p:cNvSpPr>
+          <p:nvPr>
+            <p:ph type="body" idx="3" sz="quarter"/>
+          </p:nvPr>
+        </p:nvSpPr>
+        <p:spPr/>
+        <p:txBody>
+          <a:bodyPr/>
+          <a:lstStyle/>
+          <a:p>
+            <a:r>
+              <a:t>QUÉ ES (dilo así): La misma doble reserva, en dos líneas de tiempo: cada transacción lee «libre», inserta y confirma. Es una condición de carrera: el resultado depende de quién llega primero, y aquí las dos llegan antes de que la otra confirme.</a:t>
+            </a:r>
+          </a:p>
+          <a:p/>
+          <a:p>
+            <a:r>
+              <a:t>CÓMO DARLA (≈2 min):</a:t>
+            </a:r>
+          </a:p>
+          <a:p>
+            <a:r>
+              <a:t>  • Al entrar: Arriba T1: lee la franja libre, inserta y su COMMIT sale bien. Abajo T2 hace exactamente lo mismo y su COMMIT deja la doble reserva. Subraya que ningún paso de T2 da error.</a:t>
+            </a:r>
+          </a:p>
+          <a:p>
+            <a:r>
+              <a:t>  • Nota inferior: Lee la mitigación: con UNIQUE (id_veterinario, fecha_hora) el segundo INSERT falla en vez de crear la doble reserva. Se ve en código al final del bloque.</a:t>
+            </a:r>
+          </a:p>
+          <a:p/>
+          <a:p>
+            <a:r>
+              <a:t>EJEMPLO: Así se documenta un escenario de concurrencia que no se puede ejecutar: una tabla con columnas paso, T1, T2 y estado de la fila, en orden de tiempo.</a:t>
+            </a:r>
+          </a:p>
+          <a:p/>
+          <a:p>
+            <a:r>
+              <a:t>SI PREGUNTAN:</a:t>
+            </a:r>
+          </a:p>
+          <a:p>
+            <a:r>
+              <a:t>  • «¿Por qué no se puede ver esto en la base del curso?» → Porque PostgreSQL en el navegador tiene una sola sesión: no hay dos transacciones abiertas a la vez. Se demuestra lo que sí se puede (que la base acepta el dato inválido y que la restricción lo rechaza) y el cruce se documenta en la línea de tiempo.</a:t>
+            </a:r>
+          </a:p>
+          <a:p/>
+          <a:p>
+            <a:r>
+              <a:t>CUIDADO: Validar con «si COUNT(*) = 0, inserto» dentro de un procedimiento tampoco lo evita: entre el SELECT y el INSERT cabe la otra transacción.</a:t>
+            </a:r>
+          </a:p>
+          <a:p/>
+          <a:p>
+            <a:r>
+              <a:t>PASA A LA SIGUIENTE: ¿Qué nivel de aislamiento tapa cada fenómeno? Los cuatro niveles.</a:t>
+            </a:r>
+          </a:p>
+        </p:txBody>
+      </p:sp>
+      <p:sp>
+        <p:nvSpPr>
+          <p:cNvPr id="4" name="Slide Number Placeholder 3"/>
+          <p:cNvSpPr>
+            <a:spLocks noGrp="1"/>
+          </p:cNvSpPr>
+          <p:nvPr>
+            <p:ph type="sldNum" idx="5" sz="quarter"/>
+          </p:nvPr>
+        </p:nvSpPr>
+        <p:spPr/>
+      </p:sp>
+    </p:spTree>
+  </p:cSld>
+  <p:clrMapOvr>
+    <a:masterClrMapping/>
+  </p:clrMapOvr>
+</p:notes>
+</file>
+
+<file path=ppt/notesSlides/notesSlide12.xml><?xml version="1.0" encoding="utf-8"?>
+<p:notes xmlns:a="http://schemas.openxmlformats.org/drawingml/2006/main" xmlns:p="http://schemas.openxmlformats.org/presentationml/2006/main" xmlns:r="http://schemas.openxmlformats.org/officeDocument/2006/relationships">
+  <p:cSld>
+    <p:spTree>
+      <p:nvGrpSpPr>
+        <p:cNvPr id="1" name=""/>
+        <p:cNvGrpSpPr/>
+        <p:nvPr/>
+      </p:nvGrpSpPr>
+      <p:grpSpPr>
+        <a:xfrm>
+          <a:off x="0" y="0"/>
+          <a:ext cx="0" cy="0"/>
+          <a:chOff x="0" y="0"/>
+          <a:chExt cx="0" cy="0"/>
+        </a:xfrm>
+      </p:grpSpPr>
+      <p:sp>
+        <p:nvSpPr>
+          <p:cNvPr id="2" name="Slide Image Placeholder 1"/>
+          <p:cNvSpPr>
+            <a:spLocks noGrp="1"/>
+          </p:cNvSpPr>
+          <p:nvPr>
+            <p:ph type="sldImg" idx="2"/>
+          </p:nvPr>
+        </p:nvSpPr>
+        <p:spPr/>
+      </p:sp>
+      <p:sp>
+        <p:nvSpPr>
+          <p:cNvPr id="3" name="Notes Placeholder 2"/>
+          <p:cNvSpPr>
+            <a:spLocks noGrp="1"/>
+          </p:cNvSpPr>
+          <p:nvPr>
+            <p:ph type="body" idx="3" sz="quarter"/>
+          </p:nvPr>
+        </p:nvSpPr>
+        <p:spPr/>
+        <p:txBody>
+          <a:bodyPr/>
+          <a:lstStyle/>
+          <a:p>
+            <a:r>
+              <a:t>QUÉ ES (dilo así): Cómo se consulta y cómo se cambia el nivel de aislamiento en PostgreSQL. El nivel se elige por transacción, al abrirla.</a:t>
+            </a:r>
+          </a:p>
+          <a:p/>
+          <a:p>
+            <a:r>
+              <a:t>CÓMO DARLA (≈3 min):</a:t>
+            </a:r>
+          </a:p>
+          <a:p>
+            <a:r>
+              <a:t>  • Línea 1: SHOW transaction_isolation responde read committed: el nivel por omisión.</a:t>
+            </a:r>
+          </a:p>
+          <a:p>
+            <a:r>
+              <a:t>  • Líneas 3-5: BEGIN ISOLATION LEVEL REPEATABLE READ abre una transacción que trabaja sobre una foto fija: la misma consulta devuelve lo mismo hasta el COMMIT.</a:t>
+            </a:r>
+          </a:p>
+          <a:p>
+            <a:r>
+              <a:t>  • Líneas 7-10: SERIALIZABLE: si dos transacciones no se pueden ordenar, PostgreSQL aborta una con «could not serialize access due to read/write dependencies among transactions» (SQLSTATE 40001).</a:t>
+            </a:r>
+          </a:p>
+          <a:p>
+            <a:r>
+              <a:t>  • Líneas 12-13: READ UNCOMMITTED existe en la sintaxis pero se comporta como READ COMMITTED. Y SERIALIZABLE no evita el error: obliga a reintentar.</a:t>
+            </a:r>
+          </a:p>
+          <a:p/>
+          <a:p>
+            <a:r>
+              <a:t>EJEMPLO: La otra forma de pedirlo: BEGIN; SET TRANSACTION ISOLATION LEVEL SERIALIZABLE; como primera sentencia de la transacción.</a:t>
+            </a:r>
+          </a:p>
+          <a:p/>
+          <a:p>
+            <a:r>
+              <a:t>SI PREGUNTAN:</a:t>
+            </a:r>
+          </a:p>
+          <a:p>
+            <a:r>
+              <a:t>  • «Si pido READ UNCOMMITTED, ¿SHOW dice read committed?» → No: SHOW transaction_isolation dice read uncommitted, porque informa lo que se pidió; lo que cambia es el comportamiento, que es el de READ COMMITTED.</a:t>
+            </a:r>
+          </a:p>
+          <a:p>
+            <a:r>
+              <a:t>  • «¿El nivel queda para toda la sesión?» → Con BEGIN ISOLATION LEVEL vale solo para esa transacción. Para la sesión: SET SESSION CHARACTERISTICS AS TRANSACTION ISOLATION LEVEL …</a:t>
+            </a:r>
+          </a:p>
+          <a:p/>
+          <a:p>
+            <a:r>
+              <a:t>CUIDADO: En una sola sesión no se ve ningún aborto de serialización: hacen falta dos transacciones concurrentes. El código corre sin error y es todo lo que se puede mostrar aquí.</a:t>
+            </a:r>
+          </a:p>
+          <a:p/>
+          <a:p>
+            <a:r>
+              <a:t>PASA A LA SIGUIENTE: Otra forma de evitar el choque: no dejar que la segunda lea. El bloqueo pesimista.</a:t>
+            </a:r>
+          </a:p>
+        </p:txBody>
+      </p:sp>
+      <p:sp>
+        <p:nvSpPr>
+          <p:cNvPr id="4" name="Slide Number Placeholder 3"/>
+          <p:cNvSpPr>
+            <a:spLocks noGrp="1"/>
+          </p:cNvSpPr>
+          <p:nvPr>
+            <p:ph type="sldNum" idx="5" sz="quarter"/>
+          </p:nvPr>
+        </p:nvSpPr>
+        <p:spPr/>
+      </p:sp>
+    </p:spTree>
+  </p:cSld>
+  <p:clrMapOvr>
+    <a:masterClrMapping/>
+  </p:clrMapOvr>
+</p:notes>
+</file>
+
+<file path=ppt/notesSlides/notesSlide13.xml><?xml version="1.0" encoding="utf-8"?>
+<p:notes xmlns:a="http://schemas.openxmlformats.org/drawingml/2006/main" xmlns:p="http://schemas.openxmlformats.org/presentationml/2006/main" xmlns:r="http://schemas.openxmlformats.org/officeDocument/2006/relationships">
+  <p:cSld>
+    <p:spTree>
+      <p:nvGrpSpPr>
+        <p:cNvPr id="1" name=""/>
+        <p:cNvGrpSpPr/>
+        <p:nvPr/>
+      </p:nvGrpSpPr>
+      <p:grpSpPr>
+        <a:xfrm>
+          <a:off x="0" y="0"/>
+          <a:ext cx="0" cy="0"/>
+          <a:chOff x="0" y="0"/>
+          <a:chExt cx="0" cy="0"/>
+        </a:xfrm>
+      </p:grpSpPr>
+      <p:sp>
+        <p:nvSpPr>
+          <p:cNvPr id="2" name="Slide Image Placeholder 1"/>
+          <p:cNvSpPr>
+            <a:spLocks noGrp="1"/>
+          </p:cNvSpPr>
+          <p:nvPr>
+            <p:ph type="sldImg" idx="2"/>
+          </p:nvPr>
+        </p:nvSpPr>
+        <p:spPr/>
+      </p:sp>
+      <p:sp>
+        <p:nvSpPr>
+          <p:cNvPr id="3" name="Notes Placeholder 2"/>
+          <p:cNvSpPr>
+            <a:spLocks noGrp="1"/>
+          </p:cNvSpPr>
+          <p:nvPr>
+            <p:ph type="body" idx="3" sz="quarter"/>
+          </p:nvPr>
+        </p:nvSpPr>
+        <p:spPr/>
+        <p:txBody>
+          <a:bodyPr/>
+          <a:lstStyle/>
+          <a:p>
+            <a:r>
+              <a:t>QUÉ ES (dilo así): Dos maneras de que el doble descuento no ocurra. La A bloquea la fila y obliga a esperar; la B no bloquea nada: mete la condición dentro del UPDATE para que comprobar y escribir sean una sola sentencia.</a:t>
+            </a:r>
+          </a:p>
+          <a:p/>
+          <a:p>
+            <a:r>
+              <a:t>CÓMO DARLA (≈3 min):</a:t>
+            </a:r>
+          </a:p>
+          <a:p>
+            <a:r>
+              <a:t>  • Líneas 1-5: Opción A: BEGIN, SELECT … FOR UPDATE (devuelve 3 y toma la fila), UPDATE que resta 3 y COMMIT, que la libera. Es la que hace falta cuando hay que leer, calcular con datos de varias tablas y después escribir.</a:t>
+            </a:r>
+          </a:p>
+          <a:p>
+            <a:r>
+              <a:t>  • Líneas 7-9: Opción B: UPDATE … WHERE id_insumo = 2 AND stock &gt;= 3. Si alcanza, resta y responde UPDATE 1; si no, no toca nada y responde UPDATE 0. Comprobar y escribir son atómicos.</a:t>
+            </a:r>
+          </a:p>
+          <a:p>
+            <a:r>
+              <a:t>  • Líneas 10-11: Ejecutadas en orden, la B responde UPDATE 0 porque la A ya dejó el stock en 0: ese 0 es la señal de que otro llegó primero. En PL/pgSQL se lee con GET DIAGNOSTICS v_filas = ROW_COUNT.</a:t>
+            </a:r>
+          </a:p>
+          <a:p/>
+          <a:p>
+            <a:r>
+              <a:t>EJEMPLO: Después de las dos: SELECT id_insumo, nombre, stock FROM insumo WHERE id_insumo = 2; → 2 | Vacuna triple felina | 0.</a:t>
+            </a:r>
+          </a:p>
+          <a:p/>
+          <a:p>
+            <a:r>
+              <a:t>SI PREGUNTAN:</a:t>
+            </a:r>
+          </a:p>
+          <a:p>
+            <a:r>
+              <a:t>  • «¿Cuál es mejor?» → Para un descuento de stock, la B: una sola sentencia y sin esperas largas. La A cuando la decisión necesita leer y calcular antes de escribir.</a:t>
+            </a:r>
+          </a:p>
+          <a:p>
+            <a:r>
+              <a:t>  • «¿El UPDATE de la B no bloquea también?» → Sí, pero solo lo que dura la sentencia: la segunda transacción que quiera la fila espera ese instante y vuelve a evaluar la condición con el valor nuevo.</a:t>
+            </a:r>
+          </a:p>
+          <a:p/>
+          <a:p>
+            <a:r>
+              <a:t>CUIDADO: En una sola sesión FOR UPDATE nunca espera, porque nadie más tiene la fila: que corra sin error no demuestra el bloqueo. La espera se explica con la línea de tiempo.</a:t>
+            </a:r>
+          </a:p>
+          <a:p/>
+          <a:p>
+            <a:r>
+              <a:t>PASA A LA SIGUIENTE: El enfoque opuesto: no bloquear nada y verificar al escribir.</a:t>
+            </a:r>
+          </a:p>
+        </p:txBody>
+      </p:sp>
+      <p:sp>
+        <p:nvSpPr>
+          <p:cNvPr id="4" name="Slide Number Placeholder 3"/>
+          <p:cNvSpPr>
+            <a:spLocks noGrp="1"/>
+          </p:cNvSpPr>
+          <p:nvPr>
+            <p:ph type="sldNum" idx="5" sz="quarter"/>
+          </p:nvPr>
+        </p:nvSpPr>
+        <p:spPr/>
+      </p:sp>
+    </p:spTree>
+  </p:cSld>
+  <p:clrMapOvr>
+    <a:masterClrMapping/>
+  </p:clrMapOvr>
+</p:notes>
+</file>
+
+<file path=ppt/notesSlides/notesSlide14.xml><?xml version="1.0" encoding="utf-8"?>
+<p:notes xmlns:a="http://schemas.openxmlformats.org/drawingml/2006/main" xmlns:p="http://schemas.openxmlformats.org/presentationml/2006/main" xmlns:r="http://schemas.openxmlformats.org/officeDocument/2006/relationships">
+  <p:cSld>
+    <p:spTree>
+      <p:nvGrpSpPr>
+        <p:cNvPr id="1" name=""/>
+        <p:cNvGrpSpPr/>
+        <p:nvPr/>
+      </p:nvGrpSpPr>
+      <p:grpSpPr>
+        <a:xfrm>
+          <a:off x="0" y="0"/>
+          <a:ext cx="0" cy="0"/>
+          <a:chOff x="0" y="0"/>
+          <a:chExt cx="0" cy="0"/>
+        </a:xfrm>
+      </p:grpSpPr>
+      <p:sp>
+        <p:nvSpPr>
+          <p:cNvPr id="2" name="Slide Image Placeholder 1"/>
+          <p:cNvSpPr>
+            <a:spLocks noGrp="1"/>
+          </p:cNvSpPr>
+          <p:nvPr>
+            <p:ph type="sldImg" idx="2"/>
+          </p:nvPr>
+        </p:nvSpPr>
+        <p:spPr/>
+      </p:sp>
+      <p:sp>
+        <p:nvSpPr>
+          <p:cNvPr id="3" name="Notes Placeholder 2"/>
+          <p:cNvSpPr>
+            <a:spLocks noGrp="1"/>
+          </p:cNvSpPr>
+          <p:nvPr>
+            <p:ph type="body" idx="3" sz="quarter"/>
+          </p:nvPr>
+        </p:nvSpPr>
+        <p:spPr/>
+        <p:txBody>
+          <a:bodyPr/>
+          <a:lstStyle/>
+          <a:p>
+            <a:r>
+              <a:t>QUÉ ES (dilo así): En una sola sesión no se pueden ver dos transacciones cruzándose, pero sí lo esencial: sin restricción, la base acepta dos citas en la misma franja sin quejarse. Esta lámina reproduce el dato inválido, lo detecta y lo limpia.</a:t>
+            </a:r>
+          </a:p>
+          <a:p/>
+          <a:p>
+            <a:r>
+              <a:t>CÓMO DARLA (≈3 min):</a:t>
+            </a:r>
+          </a:p>
+          <a:p>
+            <a:r>
+              <a:t>  • Líneas 1-4: Un INSERT con dos filas: Mishi (4) y Bobby (5), veterinario 2, 2026-09-15 10:00. Responde INSERT 0 2: las dos entran y no hay ningún error.</a:t>
+            </a:r>
+          </a:p>
+          <a:p>
+            <a:r>
+              <a:t>  • Líneas 6-11: La consulta de detección agrupa las citas vigentes por veterinario y hora y se queda con los grupos de más de una: devuelve 1 fila, veterinario 2, 2026-09-15 10:00, 2 citas. Es la que se corre antes de crear la restricción en una base que ya tiene datos.</a:t>
+            </a:r>
+          </a:p>
+          <a:p>
+            <a:r>
+              <a:t>  • Líneas 13-14: Se borra la cita de mayor id_cita, la duplicada. Si no se borra, el CREATE UNIQUE INDEX de la lámina siguiente falla con «could not create unique index "uq_cita_vet_franja"» porque la clave está repetida.</a:t>
+            </a:r>
+          </a:p>
+          <a:p/>
+          <a:p>
+            <a:r>
+              <a:t>EJEMPLO: Con los datos sembrados, antes de estos INSERT la consulta de detección devuelve 0 filas: no hay ninguna franja duplicada.</a:t>
+            </a:r>
+          </a:p>
+          <a:p/>
+          <a:p>
+            <a:r>
+              <a:t>SI PREGUNTAN:</a:t>
+            </a:r>
+          </a:p>
+          <a:p>
+            <a:r>
+              <a:t>  • «¿Por qué el WHERE estado &lt;&gt; 'CANCELADA'?» → Porque una cita cancelada no ocupa la franja: una cancelada y una vigente a la misma hora no son doble reserva.</a:t>
+            </a:r>
+          </a:p>
+          <a:p>
+            <a:r>
+              <a:t>  • «¿Borrar la de mayor id no es arbitrario?» → Sí. En una base real se decide con el negocio a quién se le reprograma; aquí sobra la segunda que entró.</a:t>
+            </a:r>
+          </a:p>
+          <a:p/>
+          <a:p>
+            <a:r>
+              <a:t>CUIDADO: SELECT MAX(id_cita) borra la última cita de toda la tabla: sirve justo después de este INSERT, no como limpieza general.</a:t>
+            </a:r>
+          </a:p>
+          <a:p/>
+          <a:p>
+            <a:r>
+              <a:t>PASA A LA SIGUIENTE: Con la tabla limpia, el índice que lo hace imposible.</a:t>
+            </a:r>
+          </a:p>
+        </p:txBody>
+      </p:sp>
+      <p:sp>
+        <p:nvSpPr>
+          <p:cNvPr id="4" name="Slide Number Placeholder 3"/>
+          <p:cNvSpPr>
+            <a:spLocks noGrp="1"/>
+          </p:cNvSpPr>
+          <p:nvPr>
+            <p:ph type="sldNum" idx="5" sz="quarter"/>
+          </p:nvPr>
+        </p:nvSpPr>
+        <p:spPr/>
+      </p:sp>
+    </p:spTree>
+  </p:cSld>
+  <p:clrMapOvr>
+    <a:masterClrMapping/>
+  </p:clrMapOvr>
+</p:notes>
+</file>
+
+<file path=ppt/notesSlides/notesSlide15.xml><?xml version="1.0" encoding="utf-8"?>
+<p:notes xmlns:a="http://schemas.openxmlformats.org/drawingml/2006/main" xmlns:p="http://schemas.openxmlformats.org/presentationml/2006/main" xmlns:r="http://schemas.openxmlformats.org/officeDocument/2006/relationships">
+  <p:cSld>
+    <p:spTree>
+      <p:nvGrpSpPr>
+        <p:cNvPr id="1" name=""/>
+        <p:cNvGrpSpPr/>
+        <p:nvPr/>
+      </p:nvGrpSpPr>
+      <p:grpSpPr>
+        <a:xfrm>
+          <a:off x="0" y="0"/>
+          <a:ext cx="0" cy="0"/>
+          <a:chOff x="0" y="0"/>
+          <a:chExt cx="0" cy="0"/>
+        </a:xfrm>
+      </p:grpSpPr>
+      <p:sp>
+        <p:nvSpPr>
+          <p:cNvPr id="2" name="Slide Image Placeholder 1"/>
+          <p:cNvSpPr>
+            <a:spLocks noGrp="1"/>
+          </p:cNvSpPr>
+          <p:nvPr>
+            <p:ph type="sldImg" idx="2"/>
+          </p:nvPr>
+        </p:nvSpPr>
+        <p:spPr/>
+      </p:sp>
+      <p:sp>
+        <p:nvSpPr>
+          <p:cNvPr id="3" name="Notes Placeholder 2"/>
+          <p:cNvSpPr>
+            <a:spLocks noGrp="1"/>
+          </p:cNvSpPr>
+          <p:nvPr>
+            <p:ph type="body" idx="3" sz="quarter"/>
+          </p:nvPr>
+        </p:nvSpPr>
+        <p:spPr/>
+        <p:txBody>
+          <a:bodyPr/>
+          <a:lstStyle/>
+          <a:p>
+            <a:r>
+              <a:t>QUÉ ES (dilo así): La regla que la clínica necesita y la prueba de que funciona: dos citas vigentes del mismo veterinario a la misma hora ya no pueden existir, y una cancelada no estorba.</a:t>
+            </a:r>
+          </a:p>
+          <a:p/>
+          <a:p>
+            <a:r>
+              <a:t>CÓMO DARLA (≈3 min):</a:t>
+            </a:r>
+          </a:p>
+          <a:p>
+            <a:r>
+              <a:t>  • Líneas 1-4: CREATE UNIQUE INDEX uq_cita_vet_franja ON cita (id_veterinario, fecha_hora) WHERE estado &lt;&gt; 'CANCELADA'. Con los datos limpios por la lámina anterior se crea sin error.</a:t>
+            </a:r>
+          </a:p>
+          <a:p>
+            <a:r>
+              <a:t>  • Líneas 6-8: Una cita CANCELADA en la franja que ya tiene la cita 1 (Firulais, veterinario 1, 2026-09-01 08:00) entra: INSERT 0 1. El índice no mira las canceladas.</a:t>
+            </a:r>
+          </a:p>
+          <a:p>
+            <a:r>
+              <a:t>  • Líneas 10-14: La misma franja, ahora vigente (PROGRAMADA): ERROR: duplicate key value violates unique constraint "uq_cita_vet_franja", con el detalle Key (id_veterinario, fecha_hora)=(1, 2026-09-01 08:00:00) already exists. SQLSTATE 23505.</a:t>
+            </a:r>
+          </a:p>
+          <a:p>
+            <a:r>
+              <a:t>  • Leyenda: BEGIN y COMMIT no bastaban porque las dos leían «libre»; el índice se verifica al escribir, el único momento que no depende de quién leyó primero.</a:t>
+            </a:r>
+          </a:p>
+          <a:p/>
+          <a:p>
+            <a:r>
+              <a:t>EJEMPLO: Para dar el mensaje de negocio: DO $$ BEGIN INSERT … ; EXCEPTION WHEN unique_violation THEN RAISE NOTICE 'Ese horario acaba de ser tomado, elija otro'; END $$; responde con ese NOTICE y la cita no entra.</a:t>
+            </a:r>
+          </a:p>
+          <a:p/>
+          <a:p>
+            <a:r>
+              <a:t>SI PREGUNTAN:</a:t>
+            </a:r>
+          </a:p>
+          <a:p>
+            <a:r>
+              <a:t>  • «¿El error deshace algo más?» → Deshace la sentencia que falló, y la transacción en curso queda abortada hasta su ROLLBACK si no se captura el error.</a:t>
+            </a:r>
+          </a:p>
+          <a:p>
+            <a:r>
+              <a:t>  • «¿Por qué el error dice «unique constraint» si es un índice?» → Porque PostgreSQL informa igual cualquier violación de unicidad, venga de una restricción UNIQUE o de un índice único.</a:t>
+            </a:r>
+          </a:p>
+          <a:p/>
+          <a:p>
+            <a:r>
+              <a:t>CUIDADO: El nombre uq_cita_vet_franja es exacto y se usa una sola vez: si antes se creó una restricción con ese nombre, este CREATE falla con «relation "uq_cita_vet_franja" already exists».</a:t>
+            </a:r>
+          </a:p>
+          <a:p/>
+          <a:p>
+            <a:r>
+              <a:t>PASA A LA SIGUIENTE: Ahora todo esto ejecutado en la demo.</a:t>
+            </a:r>
+          </a:p>
+        </p:txBody>
+      </p:sp>
+      <p:sp>
+        <p:nvSpPr>
+          <p:cNvPr id="4" name="Slide Number Placeholder 3"/>
+          <p:cNvSpPr>
+            <a:spLocks noGrp="1"/>
+          </p:cNvSpPr>
+          <p:nvPr>
+            <p:ph type="sldNum" idx="5" sz="quarter"/>
+          </p:nvPr>
+        </p:nvSpPr>
+        <p:spPr/>
+      </p:sp>
+    </p:spTree>
+  </p:cSld>
+  <p:clrMapOvr>
+    <a:masterClrMapping/>
+  </p:clrMapOvr>
+</p:notes>
+</file>
+
+<file path=ppt/notesSlides/notesSlide16.xml><?xml version="1.0" encoding="utf-8"?>
+<p:notes xmlns:a="http://schemas.openxmlformats.org/drawingml/2006/main" xmlns:p="http://schemas.openxmlformats.org/presentationml/2006/main" xmlns:r="http://schemas.openxmlformats.org/officeDocument/2006/relationships">
+  <p:cSld>
+    <p:spTree>
+      <p:nvGrpSpPr>
+        <p:cNvPr id="1" name=""/>
+        <p:cNvGrpSpPr/>
+        <p:nvPr/>
+      </p:nvGrpSpPr>
+      <p:grpSpPr>
+        <a:xfrm>
+          <a:off x="0" y="0"/>
+          <a:ext cx="0" cy="0"/>
+          <a:chOff x="0" y="0"/>
+          <a:chExt cx="0" cy="0"/>
+        </a:xfrm>
+      </p:grpSpPr>
+      <p:sp>
+        <p:nvSpPr>
+          <p:cNvPr id="2" name="Slide Image Placeholder 1"/>
+          <p:cNvSpPr>
+            <a:spLocks noGrp="1"/>
+          </p:cNvSpPr>
+          <p:nvPr>
+            <p:ph type="sldImg" idx="2"/>
+          </p:nvPr>
+        </p:nvSpPr>
+        <p:spPr/>
+      </p:sp>
+      <p:sp>
+        <p:nvSpPr>
+          <p:cNvPr id="3" name="Notes Placeholder 2"/>
+          <p:cNvSpPr>
+            <a:spLocks noGrp="1"/>
+          </p:cNvSpPr>
+          <p:nvPr>
+            <p:ph type="body" idx="3" sz="quarter"/>
+          </p:nvPr>
+        </p:nvSpPr>
+        <p:spPr/>
+        <p:txBody>
+          <a:bodyPr/>
+          <a:lstStyle/>
+          <a:p>
+            <a:r>
+              <a:t>QUÉ ES (dilo así): La demo ejecuta lo que se proyectó: el dato inválido aceptado, la restricción que lo rechaza y el bloqueo que, en una sola sesión, corre pero no se ve esperar.</a:t>
+            </a:r>
+          </a:p>
+          <a:p/>
+          <a:p>
+            <a:r>
+              <a:t>CÓMO DARLA (≈15 min):</a:t>
+            </a:r>
+          </a:p>
+          <a:p>
+            <a:r>
+              <a:t>  • 1 · Problema: Ejecuta la lámina «La doble reserva, reproducida y detectada»: el INSERT de dos filas (INSERT 0 2), la detección (1 fila: veterinario 2, 2026-09-15 10:00, 2 citas) y el DELETE del duplicado.</a:t>
+            </a:r>
+          </a:p>
+          <a:p>
+            <a:r>
+              <a:t>  • 2 · Solución: Ejecuta la lámina del índice único parcial: el CREATE UNIQUE INDEX, la cancelada que sí entra y el INSERT vigente del veterinario 1 a las 08:00 del 2026-09-01, que sale con duplicate key value violates unique constraint. Muestra el SELECT de cita para que se vea que no entró.</a:t>
+            </a:r>
+          </a:p>
+          <a:p>
+            <a:r>
+              <a:t>  • 3 · Bloqueo: Ejecuta las opciones A y B: A devuelve stock 3 y descuenta; B responde UPDATE 0. Cierra con SELECT stock FROM insumo WHERE id_insumo = 2; → 0.</a:t>
+            </a:r>
+          </a:p>
+          <a:p>
+            <a:r>
+              <a:t>  • 4 · Lo que no se ve: Dibuja en una tabla paso / T1 / T2 / estado de la fila la espera de T2 durante el FOR UPDATE: en una sola sesión nadie más tiene la fila, así que nunca hay espera visible.</a:t>
+            </a:r>
+          </a:p>
+          <a:p/>
+          <a:p>
+            <a:r>
+              <a:t>EJEMPLO: Tiempos sugeridos: problema 4 min, solución 4 min, bloqueo 4 min, línea de tiempo 3 min.</a:t>
+            </a:r>
+          </a:p>
+          <a:p/>
+          <a:p>
+            <a:r>
+              <a:t>SI PREGUNTAN:</a:t>
+            </a:r>
+          </a:p>
+          <a:p>
+            <a:r>
+              <a:t>  • «¿Puedo abrir dos pestañas para simular dos recepcionistas?» → No: cada pestaña levanta su propia base en memoria y no comparten nada. Para ver la espera real hacen falta dos sesiones de psql contra un servidor, y las vistas pg_locks y pg_stat_activity.</a:t>
+            </a:r>
+          </a:p>
+          <a:p/>
+          <a:p>
+            <a:r>
+              <a:t>CUIDADO: Sin el DELETE del duplicado el índice no se crea («could not create unique index … is duplicated») y el INSERT siguiente entra como una cita más: borra el duplicado antes de crear el índice. El script del Kit (Codigo/10_concurrencia_clinica.sql) hace la misma secuencia sobre una tabla propia y termina en el INSERT que falla a propósito.</a:t>
+            </a:r>
+          </a:p>
+          <a:p/>
+          <a:p>
+            <a:r>
+              <a:t>PASA A LA SIGUIENTE: Cierre de la clase.</a:t>
+            </a:r>
+          </a:p>
+        </p:txBody>
+      </p:sp>
+      <p:sp>
+        <p:nvSpPr>
+          <p:cNvPr id="4" name="Slide Number Placeholder 3"/>
+          <p:cNvSpPr>
+            <a:spLocks noGrp="1"/>
+          </p:cNvSpPr>
+          <p:nvPr>
+            <p:ph type="sldNum" idx="5" sz="quarter"/>
+          </p:nvPr>
+        </p:nvSpPr>
+        <p:spPr/>
+      </p:sp>
+    </p:spTree>
+  </p:cSld>
+  <p:clrMapOvr>
+    <a:masterClrMapping/>
+  </p:clrMapOvr>
+</p:notes>
+</file>
+
+<file path=ppt/notesSlides/notesSlide17.xml><?xml version="1.0" encoding="utf-8"?>
+<p:notes xmlns:a="http://schemas.openxmlformats.org/drawingml/2006/main" xmlns:p="http://schemas.openxmlformats.org/presentationml/2006/main" xmlns:r="http://schemas.openxmlformats.org/officeDocument/2006/relationships">
+  <p:cSld>
+    <p:spTree>
+      <p:nvGrpSpPr>
+        <p:cNvPr id="1" name=""/>
+        <p:cNvGrpSpPr/>
+        <p:nvPr/>
+      </p:nvGrpSpPr>
+      <p:grpSpPr>
+        <a:xfrm>
+          <a:off x="0" y="0"/>
+          <a:ext cx="0" cy="0"/>
+          <a:chOff x="0" y="0"/>
+          <a:chExt cx="0" cy="0"/>
+        </a:xfrm>
+      </p:grpSpPr>
+      <p:sp>
+        <p:nvSpPr>
+          <p:cNvPr id="2" name="Slide Image Placeholder 1"/>
+          <p:cNvSpPr>
+            <a:spLocks noGrp="1"/>
+          </p:cNvSpPr>
+          <p:nvPr>
+            <p:ph type="sldImg" idx="2"/>
+          </p:nvPr>
+        </p:nvSpPr>
+        <p:spPr/>
+      </p:sp>
+      <p:sp>
+        <p:nvSpPr>
+          <p:cNvPr id="3" name="Notes Placeholder 2"/>
+          <p:cNvSpPr>
+            <a:spLocks noGrp="1"/>
+          </p:cNvSpPr>
+          <p:nvPr>
+            <p:ph type="body" idx="3" sz="quarter"/>
+          </p:nvPr>
+        </p:nvSpPr>
+        <p:spPr/>
+        <p:txBody>
+          <a:bodyPr/>
+          <a:lstStyle/>
+          <a:p>
+            <a:r>
+              <a:t>QUÉ ES (dilo así): Cierre: el todo o nada protege una transacción, no a dos que se cruzan. Para las que se cruzan hay cuatro herramientas: la restricción declarativa, el nivel de aislamiento, el bloqueo pesimista y la verificación optimista.</a:t>
+            </a:r>
+          </a:p>
+          <a:p/>
+          <a:p>
+            <a:r>
+              <a:t>CÓMO DARLA (≈3 min):</a:t>
+            </a:r>
+          </a:p>
+          <a:p>
+            <a:r>
+              <a:t>  • Al entrar: Pregunta de salida: «dos auxiliares venden la última vacuna al mismo tiempo: ¿qué mecanismo usan y qué recibe la aplicación cuando pierde?». Respuesta esperada: el UPDATE con stock &gt;= cantidad (o FOR UPDATE); la que pierde recibe UPDATE 0 y debe avisar.</a:t>
+            </a:r>
+          </a:p>
+          <a:p>
+            <a:r>
+              <a:t>  • Después: Amarre: la revisión del avance (Clase 11) mira estos escenarios documentados, y el contrato de operaciones (Clase 12) declara qué error devuelve cada operación cuando pierde la carrera.</a:t>
             </a:r>
           </a:p>
         </p:txBody>
@@ -654,57 +1566,62 @@
           <a:lstStyle/>
           <a:p>
             <a:r>
-              <a:t>DESARROLLO (para explicarlo, no se proyecta):</a:t>
-            </a:r>
-          </a:p>
-          <a:p>
-            <a:r>
-              <a:t>Si la clínica tiene ocho recepcionistas y cada agendamiento debe esperar a que termine el anterior, el sistema pasa de atender ocho operaciones simultaneas a una, y el tiempo que el usuario percibe frente a la pantalla se multiplica.</a:t>
-            </a:r>
-          </a:p>
-          <a:p>
-            <a:r>
-              <a:t>Aislamiento, en este contexto, es la propiedad que responde a una pregunta muy concreta: que puede ver mi transaccion de lo que estan haciendo las otras mientras esas otras todavia no terminan.</a:t>
-            </a:r>
-          </a:p>
-          <a:p>
-            <a:r>
-              <a:t>Es la I de ACID (atomicidad, consistencia, aislamiento y durabilidad) y es la unica de las cuatro propiedades que el desarrollador configura deliberadamente; las otras tres el motor las garantiza siempre.</a:t>
-            </a:r>
-          </a:p>
-          <a:p>
-            <a:r>
-              <a:t>Esto amarra directo con la Clase 8, donde se vieron transacciones, COMMIT y ROLLBACK: sin esa base, hablar de aislamiento no tiene donde apoyarse.</a:t>
-            </a:r>
-          </a:p>
-          <a:p>
-            <a:r>
-              <a:t>En PostgreSQL se pide con cuando el motor detecta que dos transacciones no pueden ordenarse, aborta una con un error de serializacion y la aplicacion debe reintentarla.</a:t>
-            </a:r>
-          </a:p>
-          <a:p>
-            <a:r>
-              <a:t>NOTAS:</a:t>
-            </a:r>
-          </a:p>
-          <a:p>
-            <a:r>
-              <a:t>La solucion obvia, que consiste en ejecutar las transacciones estrictamente una tras otra, existe y se llama serializacion, pero tiene un costo que hay que nombrar para que las demas opciones tengan sentido.</a:t>
-            </a:r>
-          </a:p>
-          <a:p>
-            <a:r>
-              <a:t>Por eso el estandar SQL no impone una sola forma de trabajar: ofrece una perilla llamada nivel de aislamiento, que permite negociar cuanta anomalia se tolera a cambio de cuanto rendimiento.</a:t>
-            </a:r>
-          </a:p>
-          <a:p>
-            <a:r>
-              <a:t>CÓDIGO CITADO (referencia):</a:t>
-            </a:r>
-          </a:p>
-          <a:p>
-            <a:r>
-              <a:t>SET TRANSACTION ISOLATION LEVEL SERIALIZABLE</a:t>
+              <a:t>QUÉ ES (dilo así): La solución obvia es no intercalar: ejecutar las transacciones una detrás de otra. Eso se llama serializar, y funciona, pero convierte ocho operaciones simultáneas en una fila de ocho. Por eso el estándar SQL ofrece una perilla, el nivel de aislamiento, para elegir cuánto se protege cada transacción de las demás a cambio de cuánto rendimiento.</a:t>
+            </a:r>
+          </a:p>
+          <a:p/>
+          <a:p>
+            <a:r>
+              <a:t>CÓMO DARLA (≈3 min):</a:t>
+            </a:r>
+          </a:p>
+          <a:p>
+            <a:r>
+              <a:t>  • Al entrar: Ocho agendamientos a la vez terminan juntos: una unidad de tiempo para todos.</a:t>
+            </a:r>
+          </a:p>
+          <a:p>
+            <a:r>
+              <a:t>  • Clic 1: Los mismos ocho en fila: cada uno espera al anterior y el último tarda ocho veces más. En recepción eso se siente como «el sistema está lento».</a:t>
+            </a:r>
+          </a:p>
+          <a:p>
+            <a:r>
+              <a:t>  • Clic 2: La pregunta que define el aislamiento: ¿qué puede ver mi transacción de las otras que todavía no terminan? Es la I de ACID y la única de las cuatro que el desarrollador configura; atomicidad, consistencia y durabilidad las garantiza el motor siempre.</a:t>
+            </a:r>
+          </a:p>
+          <a:p/>
+          <a:p>
+            <a:r>
+              <a:t>EJEMPLO: En PostgreSQL se pide con BEGIN ISOLATION LEVEL SERIALIZABLE. El motor no pone a todas en fila literalmente: las deja correr en paralelo y, si el resultado no equivale a ningún orden de una tras otra, aborta una con un error de serialización que la aplicación debe reintentar.</a:t>
+            </a:r>
+          </a:p>
+          <a:p/>
+          <a:p>
+            <a:r>
+              <a:t>SI PREGUNTAN:</a:t>
+            </a:r>
+          </a:p>
+          <a:p>
+            <a:r>
+              <a:t>  • «¿Entonces siempre conviene SERIALIZABLE?» → No: se paga en transacciones abortadas que hay que reintentar. Se usa donde la anomalía cuesta más que el reintento.</a:t>
+            </a:r>
+          </a:p>
+          <a:p>
+            <a:r>
+              <a:t>  • «¿Qué significa cada letra de ACID?» → Atomicidad (todo o nada), Consistencia (las reglas se cumplen), Aislamiento (qué se ve de las otras) y Durabilidad (lo confirmado sobrevive a una caída).</a:t>
+            </a:r>
+          </a:p>
+          <a:p/>
+          <a:p>
+            <a:r>
+              <a:t>CUIDADO: No presentes SERIALIZABLE como la respuesta universal: el estudiante aprende que el aislamiento es gratis y no reconoce el síntoma opuesto (esperas, reintentos, tiempos de espera agotados).</a:t>
+            </a:r>
+          </a:p>
+          <a:p/>
+          <a:p>
+            <a:r>
+              <a:t>PASA A LA SIGUIENTE: Para elegir el nivel hay que conocer las anomalías que existen: son tres.</a:t>
             </a:r>
           </a:p>
         </p:txBody>
@@ -774,57 +1691,62 @@
           <a:lstStyle/>
           <a:p>
             <a:r>
-              <a:t>DESARROLLO (para explicarlo, no se proyecta):</a:t>
-            </a:r>
-          </a:p>
-          <a:p>
-            <a:r>
-              <a:t>Lectura sucia, o dirty read: la transaccion T1 inserta la cita de las 10:00 y todavia no hace COMMIT</a:t>
-            </a:r>
-          </a:p>
-          <a:p>
-            <a:r>
-              <a:t>T2 consulta la agenda, ve esa cita y le dice al dueno que la franja esta ocupada; despues T1 hace ROLLBACK porque el pago no paso, y esa cita nunca existio.</a:t>
-            </a:r>
-          </a:p>
-          <a:p>
-            <a:r>
-              <a:t>T2 tomo una decision con un dato que jamas fue real.</a:t>
-            </a:r>
-          </a:p>
-          <a:p>
-            <a:r>
-              <a:t>Lectura no repetible, o non-repeatable read: dentro de una misma transaccion de facturacion, el procedimiento lee el stock del insumo 40 y obtiene 5 unidades</a:t>
-            </a:r>
-          </a:p>
-          <a:p>
-            <a:r>
-              <a:t>Hace unos calculos, vuelve a leer el mismo stock y ahora obtiene 2, porque otra transaccion vendio 3 unidades y confirmo en el intervalo.</a:t>
-            </a:r>
-          </a:p>
-          <a:p>
-            <a:r>
-              <a:t>Lectura fantasma, o phantom read: T1 cuenta las citas del veterinario Ruiz para el martes y obtiene 4, decide que puede agendar una quinta, y al volver a contar hay 5 porque T2 inserto una fila nueva que cumple el mismo criterio de busqueda.</a:t>
-            </a:r>
-          </a:p>
-          <a:p>
-            <a:r>
-              <a:t>NOTAS:</a:t>
-            </a:r>
-          </a:p>
-          <a:p>
-            <a:r>
-              <a:t>El estandar define tres fenomenos indeseables, y cada uno se entiende mejor con una escena de la clinica.</a:t>
-            </a:r>
-          </a:p>
-          <a:p>
-            <a:r>
-              <a:t>La misma consulta, en la misma transaccion, devolvio dos valores distintos.</a:t>
-            </a:r>
-          </a:p>
-          <a:p>
-            <a:r>
-              <a:t>La diferencia entre las dos ultimas es fina y conviene decirla de forma explicita, porque es la pregunta de examen mas fallada: en la lectura no repetible cambio una fila que ya existia; en la fantasma aparecio o desaparecio una fila del conjunto que cumple la condicion del WHERE.</a:t>
+              <a:t>QUÉ ES (dilo así): El estándar SQL nombra tres cosas que pueden salir mal cuando una transacción ve el trabajo de otra. Se entienden mejor con una escena de la clínica, y la diferencia entre las dos últimas es la pregunta de examen más fallada.</a:t>
+            </a:r>
+          </a:p>
+          <a:p/>
+          <a:p>
+            <a:r>
+              <a:t>CÓMO DARLA (≈5 min):</a:t>
+            </a:r>
+          </a:p>
+          <a:p>
+            <a:r>
+              <a:t>  • Al entrar: Lectura sucia: T1 inserta la cita de las 10:00 sin hacer COMMIT; T2 la ve y le dice al dueño que la franja está ocupada; luego T1 hace ROLLBACK porque el pago no pasó. T2 decidió con un dato que nunca existió.</a:t>
+            </a:r>
+          </a:p>
+          <a:p>
+            <a:r>
+              <a:t>  • Clic 1: Lectura no repetible: dentro de una facturación, T1 lee el stock del insumo 2 (Vacuna triple felina) y obtiene 3; T2 vende 3 y confirma; T1 relee la misma fila y obtiene 0. Misma consulta, misma transacción, dos valores.</a:t>
+            </a:r>
+          </a:p>
+          <a:p>
+            <a:r>
+              <a:t>  • Clic 2: Fantasma: T1 cuenta las citas del martes y obtiene 4; T2 inserta otra y confirma; T1 vuelve a contar y obtiene 5. Ninguna fila vieja cambió: apareció una nueva que cumple el WHERE.</a:t>
+            </a:r>
+          </a:p>
+          <a:p/>
+          <a:p>
+            <a:r>
+              <a:t>EJEMPLO: La doble reserva del comienzo se parece al fantasma: las dos preguntan «¿hay alguna cita a esa hora?» y la fila que cambiaría la respuesta todavía no existe cuando preguntan.</a:t>
+            </a:r>
+          </a:p>
+          <a:p/>
+          <a:p>
+            <a:r>
+              <a:t>SI PREGUNTAN:</a:t>
+            </a:r>
+          </a:p>
+          <a:p>
+            <a:r>
+              <a:t>  • «¿En PostgreSQL puede pasar la lectura sucia?» → No. Aunque se pida READ UNCOMMITTED, PostgreSQL nunca muestra datos sin confirmar: lo trata como READ COMMITTED.</a:t>
+            </a:r>
+          </a:p>
+          <a:p>
+            <a:r>
+              <a:t>  • «¿Cómo distingo no repetible de fantasma en un ejercicio?» → Pregunta si la fila ya existía. Si existía y cambió su valor, es no repetible; si apareció o desapareció una fila del resultado, es fantasma.</a:t>
+            </a:r>
+          </a:p>
+          <a:p/>
+          <a:p>
+            <a:r>
+              <a:t>CUIDADO: No digas que la lectura sucia es la más común: en PostgreSQL es imposible. Las que sí aparecen con el nivel por omisión son la no repetible y la fantasma.</a:t>
+            </a:r>
+          </a:p>
+          <a:p/>
+          <a:p>
+            <a:r>
+              <a:t>PASA A LA SIGUIENTE: Veamos la doble reserva en dos líneas de tiempo.</a:t>
             </a:r>
           </a:p>
         </p:txBody>
@@ -894,67 +1816,67 @@
           <a:lstStyle/>
           <a:p>
             <a:r>
-              <a:t>DESARROLLO (para explicarlo, no se proyecta):</a:t>
-            </a:r>
-          </a:p>
-          <a:p>
-            <a:r>
-              <a:t>Los cuatro niveles de aislamiento del estandar SQL se definen exactamente por cuales de esos tres fenomenos permiten, y esa es la unica forma sensata de memorizarlos.</a:t>
-            </a:r>
-          </a:p>
-          <a:p>
-            <a:r>
-              <a:t>READ UNCOMMITTED permite los tres: puede leer datos no confirmados.</a:t>
-            </a:r>
-          </a:p>
-          <a:p>
-            <a:r>
-              <a:t>Es el mas rapido, practicamente no se usa en sistemas transaccionales, y Oracle ni siquiera lo implementa.</a:t>
-            </a:r>
-          </a:p>
-          <a:p>
-            <a:r>
-              <a:t>Es el nivel por omision de PostgreSQL, Oracle y SQL Server, y por lo tanto es el nivel en el que corre la enorme mayoria de los sistemas del mundo, incluido cualquier la clínica que el estudiante construya sin tocar nada.</a:t>
-            </a:r>
-          </a:p>
-          <a:p>
-            <a:r>
-              <a:t>REPEATABLE READ impide tambien la lectura no repetible: una fila leida dentro de la transaccion se ve igual hasta el final.</a:t>
-            </a:r>
-          </a:p>
-          <a:p>
-            <a:r>
-              <a:t>Segun el estandar todavia permite fantasmas, pero en la practica el motor InnoDB de MySQL, donde REPEATABLE READ es el nivel por omision, los bloquea usando gap locks; esa es una desviacion util del estandar y conviene aclararla</a:t>
-            </a:r>
-          </a:p>
-          <a:p>
-            <a:r>
-              <a:t>Porque si un estudiante prueba en DB Fiddle con MySQL no va a reproducir el fantasma y va a creer que el material esta mal.</a:t>
-            </a:r>
-          </a:p>
-          <a:p>
-            <a:r>
-              <a:t>La sentencia para cambiarlo es SET TRANSACTION ISOLATION LEVEL SERIALIZABLE</a:t>
-            </a:r>
-          </a:p>
-          <a:p>
-            <a:r>
-              <a:t>Y la regla practica que el estudiante debe recordar es que subir de nivel nunca es gratis: se paga en esperas mas largas o en transacciones abortadas que la aplicacion tiene que reintentar.</a:t>
-            </a:r>
-          </a:p>
-          <a:p>
-            <a:r>
-              <a:t>NOTAS:</a:t>
-            </a:r>
-          </a:p>
-          <a:p>
-            <a:r>
-              <a:t>READ COMMITTED impide la lectura sucia, porque solo se ve lo que ya fue confirmado, pero permite lectura no repetible y fantasma.</a:t>
-            </a:r>
-          </a:p>
-          <a:p>
-            <a:r>
-              <a:t>SERIALIZABLE impide los tres y equivale logicamente a ejecutar las transacciones una tras otra.</a:t>
+              <a:t>QUÉ ES (dilo así): Los cuatro niveles del estándar no se memorizan como lista: se definen por cuáles de los tres fenómenos permiten, y cada uno tapa uno más que el anterior. Subir de nivel nunca es gratis: se paga en esperas o en transacciones abortadas.</a:t>
+            </a:r>
+          </a:p>
+          <a:p/>
+          <a:p>
+            <a:r>
+              <a:t>CÓMO DARLA (≈5 min):</a:t>
+            </a:r>
+          </a:p>
+          <a:p>
+            <a:r>
+              <a:t>  • Al entrar: La tabla tiene las tres anomalías como columnas; rojo significa «puede ocurrir». READ UNCOMMITTED: rojo en las tres. En PostgreSQL se puede pedir, pero se comporta como READ COMMITTED: nunca muestra datos sin confirmar.</a:t>
+            </a:r>
+          </a:p>
+          <a:p>
+            <a:r>
+              <a:t>  • Clic 1: READ COMMITTED: verde en lectura sucia, rojo en las otras dos. Es el nivel por omisión de PostgreSQL (también de Oracle y SQL Server): el que tiene cualquier base que nadie configuró. Cada sentencia ve una foto nueva de lo confirmado.</a:t>
+            </a:r>
+          </a:p>
+          <a:p>
+            <a:r>
+              <a:t>  • Clic 2: REPEATABLE READ: impide también la no repetible, porque toda la transacción trabaja sobre la foto tomada al empezar. El estándar todavía permite fantasmas; PostgreSQL no los deja ver, por esa misma foto.</a:t>
+            </a:r>
+          </a:p>
+          <a:p>
+            <a:r>
+              <a:t>  • Clic 3: SERIALIZABLE: verde en las tres; el resultado equivale a ejecutar una tras otra. Cuando PostgreSQL detecta que eso no se cumple, aborta una con un error de serialización y la aplicación debe reintentarla.</a:t>
+            </a:r>
+          </a:p>
+          <a:p/>
+          <a:p>
+            <a:r>
+              <a:t>EJEMPLO: Pregunta al grupo: con READ COMMITTED, si en una facturación leo dos veces el stock del insumo 2, ¿puedo obtener 3 y luego 0? (Sí: lectura no repetible.) ¿Y con REPEATABLE READ? (No: las dos lecturas ven la misma foto.)</a:t>
+            </a:r>
+          </a:p>
+          <a:p/>
+          <a:p>
+            <a:r>
+              <a:t>SI PREGUNTAN:</a:t>
+            </a:r>
+          </a:p>
+          <a:p>
+            <a:r>
+              <a:t>  • «¿REPEATABLE READ evita la doble reserva?» → No. Cada transacción ve su foto, las dos ven la franja libre e insertan filas distintas. Solo SERIALIZABLE la detecta (abortando una) o una restricción UNIQUE la impide siempre.</a:t>
+            </a:r>
+          </a:p>
+          <a:p>
+            <a:r>
+              <a:t>  • «¿Por qué en MySQL REPEATABLE READ tampoco muestra fantasmas?» → Porque su motor InnoDB usa una foto para las lecturas y candados de rango (gap locks) para las lecturas con bloqueo. Es una desviación del estándar, como la de PostgreSQL.</a:t>
+            </a:r>
+          </a:p>
+          <a:p/>
+          <a:p>
+            <a:r>
+              <a:t>CUIDADO: Rojo en la tabla significa «la anomalía puede ocurrir», no «el nivel está mal». Dilo al entrar: la X confunde.</a:t>
+            </a:r>
+          </a:p>
+          <a:p/>
+          <a:p>
+            <a:r>
+              <a:t>PASA A LA SIGUIENTE: Así se consulta y se cambia el nivel en PostgreSQL.</a:t>
             </a:r>
           </a:p>
         </p:txBody>
@@ -1024,57 +1946,67 @@
           <a:lstStyle/>
           <a:p>
             <a:r>
-              <a:t>DESARROLLO (para explicarlo, no se proyecta):</a:t>
-            </a:r>
-          </a:p>
-          <a:p>
-            <a:r>
-              <a:t>La herramienta concreta es SELECT...</a:t>
-            </a:r>
-          </a:p>
-          <a:p>
-            <a:r>
-              <a:t>FOR UPDATE: al leer la fila con SELECT stock FROM insumo WHERE id_insumo = 40 FOR UPDATE, el motor coloca un bloqueo exclusivo sobre esa fila</a:t>
-            </a:r>
-          </a:p>
-          <a:p>
-            <a:r>
-              <a:t>Y cualquier otra transaccion que intente leerla con la misma clausula queda esperando hasta el COMMIT o el ROLLBACK de la primera.</a:t>
-            </a:r>
-          </a:p>
-          <a:p>
-            <a:r>
-              <a:t>Aplicado a la clínica resuelve limpiamente el doble descuento de stock: la segunda transaccion espera, y cuando por fin entra ya lee 2 y no 5, de modo que su validacion de stock suficiente funciona sobre el dato verdadero.</a:t>
-            </a:r>
-          </a:p>
-          <a:p>
-            <a:r>
-              <a:t>Su costo es la espera, y la espera mal manejada produce un sistema que para el usuario parece caido.</a:t>
-            </a:r>
-          </a:p>
-          <a:p>
-            <a:r>
-              <a:t>La regla de diseno asociada, y la mas importante de toda la clase, es mantener las transacciones cortas: entre el bloqueo y el COMMIT no debe haber una llamada a un servicio externo ni una pantalla esperando que el usuario confirme</a:t>
-            </a:r>
-          </a:p>
-          <a:p>
-            <a:r>
-              <a:t>Porque mientras el usuario piensa o se va a almorzar la fila sigue bloqueada y nadie mas puede facturar ese insumo.</a:t>
-            </a:r>
-          </a:p>
-          <a:p>
-            <a:r>
-              <a:t>NOTAS:</a:t>
-            </a:r>
-          </a:p>
-          <a:p>
-            <a:r>
-              <a:t>El control pesimista asume que el conflicto va a ocurrir, asi que bloquea el recurso antes de tocarlo.</a:t>
-            </a:r>
-          </a:p>
-          <a:p>
-            <a:r>
-              <a:t>Por eso existen variantes que el docente debe conocer: FOR UPDATE NOWAIT falla de inmediato en vez de esperar, y FOR UPDATE WAIT 5 espera cinco segundos y luego falla, lo cual permite devolver un mensaje honesto al usuario en vez de una pantalla congelada.</a:t>
+              <a:t>QUÉ ES (dilo así): El control pesimista parte de que el conflicto va a ocurrir, así que bloquea el recurso antes de usarlo. SELECT … FOR UPDATE lee la fila y la deja tomada hasta el COMMIT o el ROLLBACK: otra transacción que la pida con FOR UPDATE, o que intente modificarla, espera. Cuando la primera termina, la segunda entra y ve el valor ya actualizado.</a:t>
+            </a:r>
+          </a:p>
+          <a:p/>
+          <a:p>
+            <a:r>
+              <a:t>CÓMO DARLA (≈4 min):</a:t>
+            </a:r>
+          </a:p>
+          <a:p>
+            <a:r>
+              <a:t>  • Al entrar: T1 ejecuta SELECT stock FROM insumo WHERE id_insumo = 2 FOR UPDATE: lee stock 3 y la fila queda con bloqueo exclusivo (en rojo). T2 pide la misma fila con FOR UPDATE y queda esperando (el reloj).</a:t>
+            </a:r>
+          </a:p>
+          <a:p>
+            <a:r>
+              <a:t>  • Clic 1: T1 descuenta 3 (UPDATE insumo SET stock = stock - 3) y confirma. El stock queda en 0 y el COMMIT libera la fila.</a:t>
+            </a:r>
+          </a:p>
+          <a:p>
+            <a:r>
+              <a:t>  • Clic 2: T2 por fin entra y lee stock 0, no 3. Su validación «¿alcanza para 3?» dice que no y rechaza la venta. Sin el bloqueo, T2 habría decidido con el 3 que leyó antes y vendido unidades que ya no existen.</a:t>
+            </a:r>
+          </a:p>
+          <a:p>
+            <a:r>
+              <a:t>  • Clic 3: El costo es la espera. Regla de diseño: entre el FOR UPDATE y el COMMIT no va ninguna llamada externa ni una pantalla esperando al usuario. Si no se quiere esperar: NOWAIT falla de inmediato y SKIP LOCKED salta la fila tomada.</a:t>
+            </a:r>
+          </a:p>
+          <a:p/>
+          <a:p>
+            <a:r>
+              <a:t>EJEMPLO: Dos auxiliares facturan la última Vacuna triple felina (stock 3) y las dos piden 3. Con FOR UPDATE solo una la vende; la otra recibe «no alcanza» en vez de vender unidades que no hay.</a:t>
+            </a:r>
+          </a:p>
+          <a:p/>
+          <a:p>
+            <a:r>
+              <a:t>SI PREGUNTAN:</a:t>
+            </a:r>
+          </a:p>
+          <a:p>
+            <a:r>
+              <a:t>  • «¿Un SELECT normal también espera?» → No. En PostgreSQL un SELECT sin FOR UPDATE nunca espera: lee la última versión confirmada (aquí, 3). Solo esperan quienes piden la fila con FOR UPDATE o intentan modificarla.</a:t>
+            </a:r>
+          </a:p>
+          <a:p>
+            <a:r>
+              <a:t>  • «¿Y si T1 nunca confirma?» → T2 espera indefinidamente, salvo que use NOWAIT, SKIP LOCKED o SET lock_timeout = '5s', que hace fallar la espera a los cinco segundos.</a:t>
+            </a:r>
+          </a:p>
+          <a:p/>
+          <a:p>
+            <a:r>
+              <a:t>CUIDADO: FOR UPDATE WAIT 5 es sintaxis de Oracle: en PostgreSQL da error de sintaxis. El equivalente es SET lock_timeout.</a:t>
+            </a:r>
+          </a:p>
+          <a:p/>
+          <a:p>
+            <a:r>
+              <a:t>PASA A LA SIGUIENTE: En código: el bloqueo explícito y una alternativa que no bloquea nada.</a:t>
             </a:r>
           </a:p>
         </p:txBody>
@@ -1144,57 +2076,67 @@
           <a:lstStyle/>
           <a:p>
             <a:r>
-              <a:t>DESARROLLO (para explicarlo, no se proyecta):</a:t>
-            </a:r>
-          </a:p>
-          <a:p>
-            <a:r>
-              <a:t>El control optimista asume lo contrario: que los conflictos son raros, asi que no bloquea nada al leer y verifica unicamente al escribir.</a:t>
-            </a:r>
-          </a:p>
-          <a:p>
-            <a:r>
-              <a:t>Se implementa con una columna adicional, tipicamente llamada version, de tipo entero, o con un timestamp de ultima modificacion.</a:t>
-            </a:r>
-          </a:p>
-          <a:p>
-            <a:r>
-              <a:t>El flujo en la clínica es este: la transaccion lee la cita 812 y obtiene version 7; el usuario edita la hora; al guardar se ejecuta</a:t>
-            </a:r>
-          </a:p>
-          <a:p>
-            <a:r>
-              <a:t>Si otra transaccion ya paso por ahi, la version almacenada es 8 y la sentencia afecta cero filas.</a:t>
-            </a:r>
-          </a:p>
-          <a:p>
-            <a:r>
-              <a:t>El numero de filas afectadas es la senal de conflicto, y con esa senal la aplicacion decide si reintenta o le avisa al usuario que el dato cambio mientras editaba.</a:t>
-            </a:r>
-          </a:p>
-          <a:p>
-            <a:r>
-              <a:t>El criterio para elegir entre los dos enfoques es la frecuencia real del conflicto, no el gusto: si dos personas pelean por la misma fila muchas veces al dia, el optimista reintenta sin parar y conviene el pesimista</a:t>
-            </a:r>
-          </a:p>
-          <a:p>
-            <a:r>
-              <a:t>Si el choque es excepcional, el optimista da mejor rendimiento porque nadie espera nunca.</a:t>
-            </a:r>
-          </a:p>
-          <a:p>
-            <a:r>
-              <a:t>En la clínica, el stock de los insumos mas vendidos es un caso pesimista y la edicion de los datos de contacto de un dueno es un caso claramente optimista.</a:t>
-            </a:r>
-          </a:p>
-          <a:p>
-            <a:r>
-              <a:t>CÓDIGO CITADO (referencia):</a:t>
-            </a:r>
-          </a:p>
-          <a:p>
-            <a:r>
-              <a:t>UPDATE cita SET fecha_hora = ..., version = 8 WHERE id_cita = 812 AND version = 7</a:t>
+              <a:t>QUÉ ES (dilo así): El control optimista hace la apuesta contraria: deja que todos lean sin bloquear y solo comprueba, al escribir, que nadie cambió el dato mientras tanto. Para eso la tabla lleva una columna version (un entero, o una fecha de última modificación) que sube en cada cambio.</a:t>
+            </a:r>
+          </a:p>
+          <a:p/>
+          <a:p>
+            <a:r>
+              <a:t>CÓMO DARLA (≈4 min):</a:t>
+            </a:r>
+          </a:p>
+          <a:p>
+            <a:r>
+              <a:t>  • Al entrar: Se lee la cita 812 con version 7, sin bloquear nada; el usuario cambia la hora en pantalla. Al guardar: UPDATE cita SET fecha_hora = …, version = version + 1 WHERE id_cita = 812 AND version = 7.</a:t>
+            </a:r>
+          </a:p>
+          <a:p>
+            <a:r>
+              <a:t>  • Clic 1: Sin conflicto: nadie tocó la cita, la versión guardada sigue en 7, el UPDATE encuentra la fila (UPDATE 1) y la deja en version 8.</a:t>
+            </a:r>
+          </a:p>
+          <a:p>
+            <a:r>
+              <a:t>  • Clic 2: Con conflicto: otra transacción guardó primero y la dejó en 8. El WHERE version = 7 ya no encuentra nada: UPDATE 0. Cero filas afectadas es la señal; no hay error.</a:t>
+            </a:r>
+          </a:p>
+          <a:p>
+            <a:r>
+              <a:t>  • Clic 3: La aplicación lee ese 0 y decide: reintenta o avisa «la cita cambió mientras la editabas». Criterio: si la misma fila se disputa muchas veces al día (el stock del insumo más vendido), pesimista; si el choque es raro (el teléfono de un dueño), optimista, porque nadie espera.</a:t>
+            </a:r>
+          </a:p>
+          <a:p/>
+          <a:p>
+            <a:r>
+              <a:t>EJEMPLO: La columna no existe en el esquema del curso; se agregaría con ALTER TABLE cita ADD COLUMN version INT NOT NULL DEFAULT 1;</a:t>
+            </a:r>
+          </a:p>
+          <a:p/>
+          <a:p>
+            <a:r>
+              <a:t>SI PREGUNTAN:</a:t>
+            </a:r>
+          </a:p>
+          <a:p>
+            <a:r>
+              <a:t>  • «¿Por qué no comparar todas las columnas en vez de una versión?» → Se puede, pero es largo y frágil. Un entero que sube en cada UPDATE resume «alguien cambió esta fila» en una sola comparación.</a:t>
+            </a:r>
+          </a:p>
+          <a:p>
+            <a:r>
+              <a:t>  • «¿Quién sube la versión?» → El mismo UPDATE que guarda: version = version + 1. Si alguna ruta del código actualiza sin subirla, el mecanismo deja de detectar conflictos.</a:t>
+            </a:r>
+          </a:p>
+          <a:p/>
+          <a:p>
+            <a:r>
+              <a:t>CUIDADO: El optimista no da error cuando hay conflicto: da 0 filas. Si la aplicación no revisa cuántas filas afectó, el cambio del usuario se pierde en silencio.</a:t>
+            </a:r>
+          </a:p>
+          <a:p/>
+          <a:p>
+            <a:r>
+              <a:t>PASA A LA SIGUIENTE: Cuando dos transacciones se bloquean entre sí aparece el último problema: el deadlock.</a:t>
             </a:r>
           </a:p>
         </p:txBody>
@@ -1264,67 +2206,62 @@
           <a:lstStyle/>
           <a:p>
             <a:r>
-              <a:t>DESARROLLO (para explicarlo, no se proyecta):</a:t>
-            </a:r>
-          </a:p>
-          <a:p>
-            <a:r>
-              <a:t>La escena de la clínica es concreta: el procedimiento de facturacion bloquea primero la fila de Factura y luego la de Insumo, mientras el procedimiento de devolucion bloquea primero Insumo y luego Factura.</a:t>
-            </a:r>
-          </a:p>
-          <a:p>
-            <a:r>
-              <a:t>Los motores no dejan eso colgado: mantienen internamente un grafo de esperas y, al detectar un ciclo, eligen una victima y la abortan con un error explicito.</a:t>
-            </a:r>
-          </a:p>
-          <a:p>
-            <a:r>
-              <a:t>En Oracle es ORA-00060, en MySQL el error 1213, en PostgreSQL el codigo 40P01.</a:t>
-            </a:r>
-          </a:p>
-          <a:p>
-            <a:r>
-              <a:t>La consecuencia practica para el estudiante es que la aplicacion debe estar preparada para recibir ese error y reintentar la operacion, porque no es un defecto del sistema sino el mecanismo funcionando como debe.</a:t>
-            </a:r>
-          </a:p>
-          <a:p>
-            <a:r>
-              <a:t>Y la prevencion es sorprendentemente simple y barata: acceder siempre a las tablas en el mismo orden en todos los procedimientos.</a:t>
-            </a:r>
-          </a:p>
-          <a:p>
-            <a:r>
-              <a:t>Si todo el codigo de la clínica toca Factura antes que Insumo, el ciclo no puede formarse nunca.</a:t>
-            </a:r>
-          </a:p>
-          <a:p>
-            <a:r>
-              <a:t>Ese acuerdo de orden canonico se escribe una vez en el documento de diseno, se respeta, y elimina la clase entera de problemas sin costo de rendimiento.</a:t>
-            </a:r>
-          </a:p>
-          <a:p>
-            <a:r>
-              <a:t>PostgreSQL detecta el ciclo, aborta una de las dos transacciones con deadlock detected y deja seguir a la otra; la abortada debe reintentarse completa.</a:t>
-            </a:r>
-          </a:p>
-          <a:p>
-            <a:r>
-              <a:t>NOTAS:</a:t>
-            </a:r>
-          </a:p>
-          <a:p>
-            <a:r>
-              <a:t>Un deadlock, o interbloqueo, ocurre cuando dos transacciones se esperan mutuamente y ninguna puede avanzar.</a:t>
-            </a:r>
-          </a:p>
-          <a:p>
-            <a:r>
-              <a:t>Si los dos arrancan al mismo tiempo, cada uno tiene exactamente lo que el otro necesita, nadie cede y ninguna espera termina sola.</a:t>
-            </a:r>
-          </a:p>
-          <a:p>
-            <a:r>
-              <a:t>La transaccion sobreviviente termina normal.</a:t>
+              <a:t>QUÉ ES (dilo así): Un deadlock, o interbloqueo, es un ciclo de esperas: cada transacción tiene algo que la otra necesita y espera lo que la otra tiene. Ninguna espera termina sola, así que el motor rompe el ciclo abortando una.</a:t>
+            </a:r>
+          </a:p>
+          <a:p/>
+          <a:p>
+            <a:r>
+              <a:t>CÓMO DARLA (≈4 min):</a:t>
+            </a:r>
+          </a:p>
+          <a:p>
+            <a:r>
+              <a:t>  • Al entrar: Facturación toma la fila de factura y luego pide la de insumo; devolución toma la de insumo y luego pide la de factura. Flechas sólidas: lo que tiene; punteadas: lo que espera. Es un ciclo: ninguna avanza.</a:t>
+            </a:r>
+          </a:p>
+          <a:p>
+            <a:r>
+              <a:t>  • Clic 1: PostgreSQL revisa su grafo de esperas (después de un segundo de espera, por omisión), encuentra el ciclo y aborta una con «deadlock detected», código 40P01. Facturación obtiene la fila y termina. La abortada se deshace completa y debe reintentarse.</a:t>
+            </a:r>
+          </a:p>
+          <a:p>
+            <a:r>
+              <a:t>  • Clic 2: Prevención: un orden fijo. Si todos los procedimientos tocan factura antes que insumo, el ciclo no puede formarse. Se escribe una vez en el documento de diseño y no cuesta rendimiento.</a:t>
+            </a:r>
+          </a:p>
+          <a:p/>
+          <a:p>
+            <a:r>
+              <a:t>EJEMPLO: En Oracle el mismo error es ORA-00060 y en MySQL el 1213: cambia el número, no el mecanismo.</a:t>
+            </a:r>
+          </a:p>
+          <a:p/>
+          <a:p>
+            <a:r>
+              <a:t>SI PREGUNTAN:</a:t>
+            </a:r>
+          </a:p>
+          <a:p>
+            <a:r>
+              <a:t>  • «¿Cuál transacción elige como víctima?» → La documentación de PostgreSQL dice que es difícil de predecir y que no hay que depender de eso. Por eso cualquier transacción que participe debe estar lista para reintentar.</a:t>
+            </a:r>
+          </a:p>
+          <a:p>
+            <a:r>
+              <a:t>  • «¿El deadlock deja datos a medias?» → No: la víctima se deshace completa, como cualquier transacción abortada.</a:t>
+            </a:r>
+          </a:p>
+          <a:p/>
+          <a:p>
+            <a:r>
+              <a:t>CUIDADO: No presentes el deadlock como una catástrofe que se evita a toda costa: lo correcto es prevenirlo con un orden fijo y, si igual ocurre, capturar el error y reintentar.</a:t>
+            </a:r>
+          </a:p>
+          <a:p/>
+          <a:p>
+            <a:r>
+              <a:t>PASA A LA SIGUIENTE: Antes de todos estos mecanismos hay una solución de una sola línea para el caso estrella.</a:t>
             </a:r>
           </a:p>
         </p:txBody>
@@ -1394,62 +2331,165 @@
           <a:lstStyle/>
           <a:p>
             <a:r>
-              <a:t>DESARROLLO (para explicarlo, no se proyecta):</a:t>
-            </a:r>
-          </a:p>
-          <a:p>
-            <a:r>
-              <a:t>Antes de complicarse con niveles de aislamiento hay una solucion declarativa que resuelve el caso estrella de la clínica y cuesta una sola linea:.</a:t>
-            </a:r>
-          </a:p>
-          <a:p>
-            <a:r>
-              <a:t>Esto conduce a la limitacion practica del dia y a la pregunta previsible: «como demuestro dos transacciones simultaneas si PostgreSQL en el navegador es una sola sesion?».</a:t>
-            </a:r>
-          </a:p>
-          <a:p>
-            <a:r>
-              <a:t>El informe de hoy se audita en el checkpoint de la Clase 11 y se convierte en clausula del contrato de operaciones de la Clase 12, donde cada procedimiento declara que errores puede lanzar, incluido el de horario ya tomado.</a:t>
-            </a:r>
-          </a:p>
-          <a:p>
-            <a:r>
-              <a:t>NOTAS:</a:t>
-            </a:r>
-          </a:p>
-          <a:p>
-            <a:r>
-              <a:t>Con esa restriccion, cuando las dos recepcionistas insertan, el motor deja pasar la primera y rechaza la segunda con una violacion de unicidad, sin que nadie haya razonado sobre aislamiento; el procedimiento captura esa excepcion y devuelve «ese horario acaba de ser tomado, elija otro».</a:t>
-            </a:r>
-          </a:p>
-          <a:p>
-            <a:r>
-              <a:t>La leccion general que el docente debe transmitir es que una regla que se puede expresar como restriccion declarativa, es decir UNIQUE, CHECK, FOREIGN KEY o NOT NULL, es mas confiable que la misma regla escrita en codigo, porque el motor la aplica siempre: venga la escritura de la aplicacion, de un script de carga masiva o de alguien conectado con un cliente SQL a corregir un dato a mano.</a:t>
-            </a:r>
-          </a:p>
-          <a:p>
-            <a:r>
-              <a:t>La respuesta honesta es que no se puede: los playgrounds gratuitos ejecutan un script en una unica sesion, normalmente con autocommit activo, y no permiten abrir dos conexiones para intercalarlas.</a:t>
-            </a:r>
-          </a:p>
-          <a:p>
-            <a:r>
-              <a:t>Lo que si se demuestra con evidencia ejecutable son tres cosas: la restriccion UNIQUE rechazando el segundo INSERT, el patron optimista completo con la columna version y el UPDATE que afecta cero filas, y la sintaxis de SELECT FOR UPDATE ejecutandose sin error.</a:t>
-            </a:r>
-          </a:p>
-          <a:p>
-            <a:r>
-              <a:t>Lo que no se demuestra se documenta en una tabla de linea de tiempo con columnas T1, T2 y estado de la fila, paso por paso; esa tabla es un artefacto profesional legitimo, no un premio de consolacion, y es exactamente como se comunican estos escenarios en un documento de diseno real.</a:t>
-            </a:r>
-          </a:p>
-          <a:p>
-            <a:r>
-              <a:t>CÓDIGO CITADO (referencia):</a:t>
-            </a:r>
-          </a:p>
-          <a:p>
-            <a:r>
-              <a:t>ALTER TABLE cita ADD CONSTRAINT uq_agenda UNIQUE (id_veterinario, fecha_hora)</a:t>
+              <a:t>QUÉ ES (dilo así): Antes de pensar en niveles o bloqueos, la doble reserva tiene una solución declarativa: decirle al motor que no pueden existir dos citas vigentes del mismo veterinario a la misma hora. Una regla escrita así se cumple siempre, venga la escritura de la aplicación, de un script de carga o de alguien corrigiendo a mano.</a:t>
+            </a:r>
+          </a:p>
+          <a:p/>
+          <a:p>
+            <a:r>
+              <a:t>CÓMO DARLA (≈4 min):</a:t>
+            </a:r>
+          </a:p>
+          <a:p>
+            <a:r>
+              <a:t>  • Al entrar: La regla: CREATE UNIQUE INDEX uq_cita_vet_franja ON cita (id_veterinario, fecha_hora) WHERE estado &lt;&gt; 'CANCELADA'. Una sentencia, y el motor la revisa en cada INSERT y UPDATE.</a:t>
+            </a:r>
+          </a:p>
+          <a:p>
+            <a:r>
+              <a:t>  • Clic 1: Las dos recepciones insertan la misma franja (veterinario 1, 2026-09-01 08:00). La primera entra; la segunda choca: «duplicate key value violates unique constraint "uq_cita_vet_franja"», SQLSTATE 23505. Da igual el orden o la velocidad: alguna llega segunda.</a:t>
+            </a:r>
+          </a:p>
+          <a:p>
+            <a:r>
+              <a:t>  • Clic 2: El procedimiento captura esa excepción (EXCEPTION WHEN unique_violation) y responde «Ese horario acaba de ser tomado, elija otro». Nadie tuvo que razonar sobre aislamiento.</a:t>
+            </a:r>
+          </a:p>
+          <a:p>
+            <a:r>
+              <a:t>  • Clic 3: Por qué es parcial: una cita CANCELADA no ocupa la franja, así que esa sí entra aunque haya una vigente a la misma hora. Un UNIQUE de tabla no admite WHERE: también contaría las canceladas y una franja cancelada no se podría volver a agendar.</a:t>
+            </a:r>
+          </a:p>
+          <a:p/>
+          <a:p>
+            <a:r>
+              <a:t>EJEMPLO: Con dos sesiones simultáneas, la segunda espera un instante a que la primera confirme y solo entonces recibe la violación de unicidad: la regla funciona también en concurrencia, que es lo que un trigger que cuenta citas no logra.</a:t>
+            </a:r>
+          </a:p>
+          <a:p/>
+          <a:p>
+            <a:r>
+              <a:t>SI PREGUNTAN:</a:t>
+            </a:r>
+          </a:p>
+          <a:p>
+            <a:r>
+              <a:t>  • «¿Un índice es una restricción?» → Un índice único hace el mismo trabajo que una restricción UNIQUE (el error incluso dice «unique constraint»), pero admite WHERE. Por eso se usa aquí.</a:t>
+            </a:r>
+          </a:p>
+          <a:p>
+            <a:r>
+              <a:t>  • «¿Y si ya existe un ALTER TABLE … ADD CONSTRAINT uq_cita_vet_franja?» → El nombre es de un solo objeto: el CREATE UNIQUE INDEX responde «relation "uq_cita_vet_franja" already exists». Se borra la restricción (ALTER TABLE cita DROP CONSTRAINT uq_cita_vet_franja) y se crea el índice.</a:t>
+            </a:r>
+          </a:p>
+          <a:p/>
+          <a:p>
+            <a:r>
+              <a:t>CUIDADO: Si la tabla ya tiene duplicados, el índice no se crea («could not create unique index … is duplicated»): primero se detectan y se limpian. Es lo que hace la lámina siguiente.</a:t>
+            </a:r>
+          </a:p>
+          <a:p/>
+          <a:p>
+            <a:r>
+              <a:t>PASA A LA SIGUIENTE: Primero, el problema reproducido y detectado en código.</a:t>
+            </a:r>
+          </a:p>
+        </p:txBody>
+      </p:sp>
+      <p:sp>
+        <p:nvSpPr>
+          <p:cNvPr id="4" name="Slide Number Placeholder 3"/>
+          <p:cNvSpPr>
+            <a:spLocks noGrp="1"/>
+          </p:cNvSpPr>
+          <p:nvPr>
+            <p:ph type="sldNum" idx="5" sz="quarter"/>
+          </p:nvPr>
+        </p:nvSpPr>
+        <p:spPr/>
+      </p:sp>
+    </p:spTree>
+  </p:cSld>
+  <p:clrMapOvr>
+    <a:masterClrMapping/>
+  </p:clrMapOvr>
+</p:notes>
+</file>
+
+<file path=ppt/notesSlides/notesSlide9.xml><?xml version="1.0" encoding="utf-8"?>
+<p:notes xmlns:a="http://schemas.openxmlformats.org/drawingml/2006/main" xmlns:p="http://schemas.openxmlformats.org/presentationml/2006/main" xmlns:r="http://schemas.openxmlformats.org/officeDocument/2006/relationships">
+  <p:cSld>
+    <p:spTree>
+      <p:nvGrpSpPr>
+        <p:cNvPr id="1" name=""/>
+        <p:cNvGrpSpPr/>
+        <p:nvPr/>
+      </p:nvGrpSpPr>
+      <p:grpSpPr>
+        <a:xfrm>
+          <a:off x="0" y="0"/>
+          <a:ext cx="0" cy="0"/>
+          <a:chOff x="0" y="0"/>
+          <a:chExt cx="0" cy="0"/>
+        </a:xfrm>
+      </p:grpSpPr>
+      <p:sp>
+        <p:nvSpPr>
+          <p:cNvPr id="2" name="Slide Image Placeholder 1"/>
+          <p:cNvSpPr>
+            <a:spLocks noGrp="1"/>
+          </p:cNvSpPr>
+          <p:nvPr>
+            <p:ph type="sldImg" idx="2"/>
+          </p:nvPr>
+        </p:nvSpPr>
+        <p:spPr/>
+      </p:sp>
+      <p:sp>
+        <p:nvSpPr>
+          <p:cNvPr id="3" name="Notes Placeholder 2"/>
+          <p:cNvSpPr>
+            <a:spLocks noGrp="1"/>
+          </p:cNvSpPr>
+          <p:nvPr>
+            <p:ph type="body" idx="3" sz="quarter"/>
+          </p:nvPr>
+        </p:nvSpPr>
+        <p:spPr/>
+        <p:txBody>
+          <a:bodyPr/>
+          <a:lstStyle/>
+          <a:p>
+            <a:r>
+              <a:t>QUÉ ES (dilo así): Hoy la pregunta es qué pasa cuando dos personas modifican el mismo dato al mismo tiempo. La base no se daña: cumple las dos órdenes aunque se contradigan. La clase muestra las cuatro formas de decirle que no.</a:t>
+            </a:r>
+          </a:p>
+          <a:p/>
+          <a:p>
+            <a:r>
+              <a:t>CÓMO DARLA (≈4 min):</a:t>
+            </a:r>
+          </a:p>
+          <a:p>
+            <a:r>
+              <a:t>  • Al entrar: Lee el tema y haz la pregunta de arranque: «dos recepcionistas agendan con la misma veterinaria a la misma hora, en el mismo segundo: ¿qué guarda la base?». Toma una o dos respuestas sin corregir todavía.</a:t>
+            </a:r>
+          </a:p>
+          <a:p>
+            <a:r>
+              <a:t>  • Después: Cierra: «al final van a poder nombrar el fenómeno, el nivel de aislamiento que lo tapa y la línea de SQL que lo hace imposible».</a:t>
+            </a:r>
+          </a:p>
+          <a:p/>
+          <a:p>
+            <a:r>
+              <a:t>CUIDADO: Esta clase cae en festivo y es autónoma: si la grabas, este guion es el de la grabación; si no, el estudiante la estudia con las láminas y estas notas, así que cada una tiene que entenderse sola.</a:t>
+            </a:r>
+          </a:p>
+          <a:p/>
+          <a:p>
+            <a:r>
+              <a:t>PASA A LA SIGUIENTE: Empezamos por lo que ya se vio en la Clase 8: la transacción.</a:t>
             </a:r>
           </a:p>
         </p:txBody>
@@ -5095,9 +6135,33 @@
           </a:prstGeom>
         </p:spPr>
       </p:pic>
-      <p:sp>
-        <p:nvSpPr>
-          <p:cNvPr id="13" name="TextBox 12"/>
+      <p:pic>
+        <p:nvPicPr>
+          <p:cNvPr id="9" name="Picture 8" descr="for-update-paso4.png"/>
+          <p:cNvPicPr>
+            <a:picLocks noChangeAspect="1"/>
+          </p:cNvPicPr>
+          <p:nvPr/>
+        </p:nvPicPr>
+        <p:blipFill>
+          <a:blip r:embed="rId5"/>
+          <a:stretch>
+            <a:fillRect/>
+          </a:stretch>
+        </p:blipFill>
+        <p:spPr>
+          <a:xfrm>
+            <a:off x="5876318" y="1261872"/>
+            <a:ext cx="5852160" cy="4681728"/>
+          </a:xfrm>
+          <a:prstGeom prst="rect">
+            <a:avLst/>
+          </a:prstGeom>
+        </p:spPr>
+      </p:pic>
+      <p:sp>
+        <p:nvSpPr>
+          <p:cNvPr id="18" name="TextBox 17"/>
           <p:cNvSpPr txBox="1"/>
           <p:nvPr/>
         </p:nvSpPr>
@@ -5132,7 +6196,7 @@
       </p:sp>
       <p:sp>
         <p:nvSpPr>
-          <p:cNvPr id="14" name="TextBox 13"/>
+          <p:cNvPr id="19" name="TextBox 18"/>
           <p:cNvSpPr txBox="1"/>
           <p:nvPr/>
         </p:nvSpPr>
@@ -5164,7 +6228,25 @@
                 </a:solidFill>
                 <a:latin typeface="Calibri"/>
               </a:rPr>
-              <a:t>–   La herramienta concreta es SELECT...</a:t>
+              <a:t>–   El control </a:t>
+            </a:r>
+            <a:r>
+              <a:rPr sz="2000" b="1" i="0">
+                <a:solidFill>
+                  <a:srgbClr val="333333"/>
+                </a:solidFill>
+                <a:latin typeface="Calibri"/>
+              </a:rPr>
+              <a:t>pesimista</a:t>
+            </a:r>
+            <a:r>
+              <a:rPr sz="2000" b="0" i="0">
+                <a:solidFill>
+                  <a:srgbClr val="333333"/>
+                </a:solidFill>
+                <a:latin typeface="Calibri"/>
+              </a:rPr>
+              <a:t> asume que el choque va a ocurrir y bloquea la fila antes de tocarla.</a:t>
             </a:r>
           </a:p>
           <a:p>
@@ -5180,7 +6262,25 @@
                 </a:solidFill>
                 <a:latin typeface="Calibri"/>
               </a:rPr>
-              <a:t>–   FOR UPDATE: al leer la fila con SELECT stock FROM insumo WHERE id_insumo = 40 FOR UPDATE, el motor coloca un bloqueo exclusivo sobre esa fila</a:t>
+              <a:t>–   </a:t>
+            </a:r>
+            <a:r>
+              <a:rPr sz="2000" b="1" i="0">
+                <a:solidFill>
+                  <a:srgbClr val="333333"/>
+                </a:solidFill>
+                <a:latin typeface="Calibri"/>
+              </a:rPr>
+              <a:t>SELECT … FOR UPDATE</a:t>
+            </a:r>
+            <a:r>
+              <a:rPr sz="2000" b="0" i="0">
+                <a:solidFill>
+                  <a:srgbClr val="333333"/>
+                </a:solidFill>
+                <a:latin typeface="Calibri"/>
+              </a:rPr>
+              <a:t> toma la fila, y otra transacción que la pida así espera hasta el COMMIT.</a:t>
             </a:r>
           </a:p>
           <a:p>
@@ -5196,7 +6296,25 @@
                 </a:solidFill>
                 <a:latin typeface="Calibri"/>
               </a:rPr>
-              <a:t>–   Y cualquier otra transaccion que intente leerla con la misma clausula queda esperando hasta el COMMIT o el ROLLBACK de la primera.</a:t>
+              <a:t>–   Al entrar, la segunda lee el </a:t>
+            </a:r>
+            <a:r>
+              <a:rPr sz="2000" b="1" i="0">
+                <a:solidFill>
+                  <a:srgbClr val="333333"/>
+                </a:solidFill>
+                <a:latin typeface="Calibri"/>
+              </a:rPr>
+              <a:t>dato verdadero</a:t>
+            </a:r>
+            <a:r>
+              <a:rPr sz="2000" b="0" i="0">
+                <a:solidFill>
+                  <a:srgbClr val="333333"/>
+                </a:solidFill>
+                <a:latin typeface="Calibri"/>
+              </a:rPr>
+              <a:t>: stock 0, y rechaza la venta.</a:t>
             </a:r>
           </a:p>
           <a:p>
@@ -5212,14 +6330,32 @@
                 </a:solidFill>
                 <a:latin typeface="Calibri"/>
               </a:rPr>
-              <a:t>–   Aplicado a la clínica resuelve limpiamente el doble descuento de stock.</a:t>
-            </a:r>
-          </a:p>
-        </p:txBody>
-      </p:sp>
-      <p:sp>
-        <p:nvSpPr>
-          <p:cNvPr id="15" name="TextBox 14"/>
+              <a:t>–   Su costo es la </a:t>
+            </a:r>
+            <a:r>
+              <a:rPr sz="2000" b="1" i="0">
+                <a:solidFill>
+                  <a:srgbClr val="333333"/>
+                </a:solidFill>
+                <a:latin typeface="Calibri"/>
+              </a:rPr>
+              <a:t>espera</a:t>
+            </a:r>
+            <a:r>
+              <a:rPr sz="2000" b="0" i="0">
+                <a:solidFill>
+                  <a:srgbClr val="333333"/>
+                </a:solidFill>
+                <a:latin typeface="Calibri"/>
+              </a:rPr>
+              <a:t>: transacciones cortas, o NOWAIT y SKIP LOCKED para no esperar.</a:t>
+            </a:r>
+          </a:p>
+        </p:txBody>
+      </p:sp>
+      <p:sp>
+        <p:nvSpPr>
+          <p:cNvPr id="20" name="TextBox 19"/>
           <p:cNvSpPr txBox="1"/>
           <p:nvPr/>
         </p:nvSpPr>
@@ -5371,6 +6507,59 @@
                       </p:childTnLst>
                     </p:cTn>
                   </p:par>
+                  <p:par>
+                    <p:cTn id="13" fill="hold">
+                      <p:stCondLst>
+                        <p:cond delay="indefinite"/>
+                      </p:stCondLst>
+                      <p:childTnLst>
+                        <p:par>
+                          <p:cTn id="14" fill="hold">
+                            <p:stCondLst>
+                              <p:cond delay="0"/>
+                            </p:stCondLst>
+                            <p:childTnLst>
+                              <p:par>
+                                <p:cTn id="15" presetID="10" presetClass="entr" presetSubtype="0" fill="hold" nodeType="clickEffect">
+                                  <p:stCondLst>
+                                    <p:cond delay="0"/>
+                                  </p:stCondLst>
+                                  <p:childTnLst>
+                                    <p:set>
+                                      <p:cBhvr>
+                                        <p:cTn id="16" dur="1" fill="hold">
+                                          <p:stCondLst>
+                                            <p:cond delay="0"/>
+                                          </p:stCondLst>
+                                        </p:cTn>
+                                        <p:tgtEl>
+                                          <p:spTgt spid="9"/>
+                                        </p:tgtEl>
+                                        <p:attrNameLst>
+                                          <p:attrName>style.visibility</p:attrName>
+                                        </p:attrNameLst>
+                                      </p:cBhvr>
+                                      <p:to>
+                                        <p:strVal val="visible"/>
+                                      </p:to>
+                                    </p:set>
+                                    <p:animEffect transition="in" filter="fade">
+                                      <p:cBhvr>
+                                        <p:cTn id="17" dur="450"/>
+                                        <p:tgtEl>
+                                          <p:spTgt spid="9"/>
+                                        </p:tgtEl>
+                                      </p:cBhvr>
+                                    </p:animEffect>
+                                  </p:childTnLst>
+                                </p:cTn>
+                              </p:par>
+                            </p:childTnLst>
+                          </p:cTn>
+                        </p:par>
+                      </p:childTnLst>
+                    </p:cTn>
+                  </p:par>
                 </p:childTnLst>
               </p:cTn>
               <p:prevCondLst>
@@ -5543,7 +6732,7 @@
         <p:spPr>
           <a:xfrm>
             <a:off x="457200" y="1261872"/>
-            <a:ext cx="11277295" cy="4220725"/>
+            <a:ext cx="11277295" cy="4568884"/>
           </a:xfrm>
           <a:prstGeom prst="roundRect">
             <a:avLst>
@@ -5793,7 +6982,7 @@
         <p:spPr>
           <a:xfrm>
             <a:off x="685800" y="1719072"/>
-            <a:ext cx="502920" cy="3626365"/>
+            <a:ext cx="502920" cy="3974524"/>
           </a:xfrm>
           <a:prstGeom prst="rect">
             <a:avLst/>
@@ -5965,6 +7154,22 @@
               <a:t>10</a:t>
             </a:r>
           </a:p>
+          <a:p>
+            <a:pPr algn="r">
+              <a:spcAft>
+                <a:spcPts val="428"/>
+              </a:spcAft>
+            </a:pPr>
+            <a:r>
+              <a:rPr sz="2000" i="0" b="0">
+                <a:solidFill>
+                  <a:srgbClr val="858585"/>
+                </a:solidFill>
+                <a:latin typeface="Consolas"/>
+              </a:rPr>
+              <a:t>11</a:t>
+            </a:r>
+          </a:p>
         </p:txBody>
       </p:sp>
       <p:sp>
@@ -5976,7 +7181,7 @@
         <p:spPr>
           <a:xfrm>
             <a:off x="1188720" y="1719072"/>
-            <a:ext cx="10271455" cy="3626365"/>
+            <a:ext cx="10271455" cy="3974524"/>
           </a:xfrm>
           <a:prstGeom prst="rect">
             <a:avLst/>
@@ -6150,7 +7355,7 @@
                 </a:solidFill>
                 <a:latin typeface="Consolas"/>
               </a:rPr>
-              <a:t>5</a:t>
+              <a:t>2</a:t>
             </a:r>
             <a:r>
               <a:rPr sz="2000" i="0" b="0">
@@ -6195,7 +7400,16 @@
                 </a:solidFill>
                 <a:latin typeface="Consolas"/>
               </a:rPr>
-              <a:t>;</a:t>
+              <a:t>;   </a:t>
+            </a:r>
+            <a:r>
+              <a:rPr sz="2000" i="1" b="0">
+                <a:solidFill>
+                  <a:srgbClr val="6A9955"/>
+                </a:solidFill>
+                <a:latin typeface="Consolas"/>
+              </a:rPr>
+              <a:t>-- 3</a:t>
             </a:r>
           </a:p>
           <a:p>
@@ -6301,61 +7515,61 @@
                 </a:solidFill>
                 <a:latin typeface="Consolas"/>
               </a:rPr>
+              <a:t>3</a:t>
+            </a:r>
+            <a:r>
+              <a:rPr sz="2000" i="0" b="0">
+                <a:solidFill>
+                  <a:srgbClr val="D4D4D4"/>
+                </a:solidFill>
+                <a:latin typeface="Consolas"/>
+              </a:rPr>
+              <a:t> </a:t>
+            </a:r>
+            <a:r>
+              <a:rPr sz="2000" i="0" b="0">
+                <a:solidFill>
+                  <a:srgbClr val="569CD6"/>
+                </a:solidFill>
+                <a:latin typeface="Consolas"/>
+              </a:rPr>
+              <a:t>WHERE</a:t>
+            </a:r>
+            <a:r>
+              <a:rPr sz="2000" i="0" b="0">
+                <a:solidFill>
+                  <a:srgbClr val="D4D4D4"/>
+                </a:solidFill>
+                <a:latin typeface="Consolas"/>
+              </a:rPr>
+              <a:t> </a:t>
+            </a:r>
+            <a:r>
+              <a:rPr sz="2000" i="0" b="0">
+                <a:solidFill>
+                  <a:srgbClr val="D4D4D4"/>
+                </a:solidFill>
+                <a:latin typeface="Consolas"/>
+              </a:rPr>
+              <a:t>id_insumo</a:t>
+            </a:r>
+            <a:r>
+              <a:rPr sz="2000" i="0" b="0">
+                <a:solidFill>
+                  <a:srgbClr val="D4D4D4"/>
+                </a:solidFill>
+                <a:latin typeface="Consolas"/>
+              </a:rPr>
+              <a:t> = </a:t>
+            </a:r>
+            <a:r>
+              <a:rPr sz="2000" i="0" b="0">
+                <a:solidFill>
+                  <a:srgbClr val="B5CEA8"/>
+                </a:solidFill>
+                <a:latin typeface="Consolas"/>
+              </a:rPr>
               <a:t>2</a:t>
-            </a:r>
-            <a:r>
-              <a:rPr sz="2000" i="0" b="0">
-                <a:solidFill>
-                  <a:srgbClr val="D4D4D4"/>
-                </a:solidFill>
-                <a:latin typeface="Consolas"/>
-              </a:rPr>
-              <a:t> </a:t>
-            </a:r>
-            <a:r>
-              <a:rPr sz="2000" i="0" b="0">
-                <a:solidFill>
-                  <a:srgbClr val="569CD6"/>
-                </a:solidFill>
-                <a:latin typeface="Consolas"/>
-              </a:rPr>
-              <a:t>WHERE</a:t>
-            </a:r>
-            <a:r>
-              <a:rPr sz="2000" i="0" b="0">
-                <a:solidFill>
-                  <a:srgbClr val="D4D4D4"/>
-                </a:solidFill>
-                <a:latin typeface="Consolas"/>
-              </a:rPr>
-              <a:t> </a:t>
-            </a:r>
-            <a:r>
-              <a:rPr sz="2000" i="0" b="0">
-                <a:solidFill>
-                  <a:srgbClr val="D4D4D4"/>
-                </a:solidFill>
-                <a:latin typeface="Consolas"/>
-              </a:rPr>
-              <a:t>id_insumo</a:t>
-            </a:r>
-            <a:r>
-              <a:rPr sz="2000" i="0" b="0">
-                <a:solidFill>
-                  <a:srgbClr val="D4D4D4"/>
-                </a:solidFill>
-                <a:latin typeface="Consolas"/>
-              </a:rPr>
-              <a:t> = </a:t>
-            </a:r>
-            <a:r>
-              <a:rPr sz="2000" i="0" b="0">
-                <a:solidFill>
-                  <a:srgbClr val="B5CEA8"/>
-                </a:solidFill>
-                <a:latin typeface="Consolas"/>
-              </a:rPr>
-              <a:t>5</a:t>
             </a:r>
             <a:r>
               <a:rPr sz="2000" i="0" b="0">
@@ -6421,7 +7635,7 @@
                 </a:solidFill>
                 <a:latin typeface="Consolas"/>
               </a:rPr>
-              <a:t>-- Opcion B: sin bloqueo, poniendo la condicion DENTRO del UPDATE</a:t>
+              <a:t>-- Opcion B: sin bloqueo, la condicion va DENTRO del UPDATE</a:t>
             </a:r>
           </a:p>
           <a:p>
@@ -6527,7 +7741,7 @@
                 </a:solidFill>
                 <a:latin typeface="Consolas"/>
               </a:rPr>
-              <a:t>2</a:t>
+              <a:t>3</a:t>
             </a:r>
           </a:p>
           <a:p>
@@ -6579,7 +7793,7 @@
                 </a:solidFill>
                 <a:latin typeface="Consolas"/>
               </a:rPr>
-              <a:t>5</a:t>
+              <a:t>2</a:t>
             </a:r>
             <a:r>
               <a:rPr sz="2000" i="0" b="0">
@@ -6633,7 +7847,7 @@
                 </a:solidFill>
                 <a:latin typeface="Consolas"/>
               </a:rPr>
-              <a:t>2</a:t>
+              <a:t>3</a:t>
             </a:r>
             <a:r>
               <a:rPr sz="2000" i="0" b="0">
@@ -6658,7 +7872,23 @@
                 </a:solidFill>
                 <a:latin typeface="Consolas"/>
               </a:rPr>
-              <a:t>-- Si devuelve UPDATE 0, otro llego primero. Se comprueba, no se supone.</a:t>
+              <a:t>-- UPDATE 1 si alcanzaba; UPDATE 0 si no (aqui: A ya lo dejo en 0).</a:t>
+            </a:r>
+          </a:p>
+          <a:p>
+            <a:pPr>
+              <a:spcAft>
+                <a:spcPts val="428"/>
+              </a:spcAft>
+            </a:pPr>
+            <a:r>
+              <a:rPr sz="2000" i="1" b="0">
+                <a:solidFill>
+                  <a:srgbClr val="6A9955"/>
+                </a:solidFill>
+                <a:latin typeface="Consolas"/>
+              </a:rPr>
+              <a:t>-- Se comprueba el numero de filas, no se supone.</a:t>
             </a:r>
           </a:p>
         </p:txBody>
@@ -6996,9 +8226,33 @@
           </a:prstGeom>
         </p:spPr>
       </p:pic>
-      <p:sp>
-        <p:nvSpPr>
-          <p:cNvPr id="13" name="TextBox 12"/>
+      <p:pic>
+        <p:nvPicPr>
+          <p:cNvPr id="9" name="Picture 8" descr="version-optimista-paso4.png"/>
+          <p:cNvPicPr>
+            <a:picLocks noChangeAspect="1"/>
+          </p:cNvPicPr>
+          <p:nvPr/>
+        </p:nvPicPr>
+        <p:blipFill>
+          <a:blip r:embed="rId5"/>
+          <a:stretch>
+            <a:fillRect/>
+          </a:stretch>
+        </p:blipFill>
+        <p:spPr>
+          <a:xfrm>
+            <a:off x="5876318" y="1261872"/>
+            <a:ext cx="5852160" cy="4681728"/>
+          </a:xfrm>
+          <a:prstGeom prst="rect">
+            <a:avLst/>
+          </a:prstGeom>
+        </p:spPr>
+      </p:pic>
+      <p:sp>
+        <p:nvSpPr>
+          <p:cNvPr id="18" name="TextBox 17"/>
           <p:cNvSpPr txBox="1"/>
           <p:nvPr/>
         </p:nvSpPr>
@@ -7033,7 +8287,7 @@
       </p:sp>
       <p:sp>
         <p:nvSpPr>
-          <p:cNvPr id="14" name="TextBox 13"/>
+          <p:cNvPr id="19" name="TextBox 18"/>
           <p:cNvSpPr txBox="1"/>
           <p:nvPr/>
         </p:nvSpPr>
@@ -7065,7 +8319,25 @@
                 </a:solidFill>
                 <a:latin typeface="Calibri"/>
               </a:rPr>
-              <a:t>–   El control optimista asume lo contrario: que los conflictos son raros, asi que no bloquea nada al leer y verifica unicamente al escribir.</a:t>
+              <a:t>–   El control </a:t>
+            </a:r>
+            <a:r>
+              <a:rPr sz="2000" b="1" i="0">
+                <a:solidFill>
+                  <a:srgbClr val="333333"/>
+                </a:solidFill>
+                <a:latin typeface="Calibri"/>
+              </a:rPr>
+              <a:t>optimista</a:t>
+            </a:r>
+            <a:r>
+              <a:rPr sz="2000" b="0" i="0">
+                <a:solidFill>
+                  <a:srgbClr val="333333"/>
+                </a:solidFill>
+                <a:latin typeface="Calibri"/>
+              </a:rPr>
+              <a:t> no bloquea al leer: asume que el choque es raro y verifica al escribir.</a:t>
             </a:r>
           </a:p>
           <a:p>
@@ -7081,7 +8353,25 @@
                 </a:solidFill>
                 <a:latin typeface="Calibri"/>
               </a:rPr>
-              <a:t>–   Se implementa con una columna adicional, tipicamente llamada version, de tipo entero, o con un timestamp de ultima modificacion.</a:t>
+              <a:t>–   Se agrega una columna </a:t>
+            </a:r>
+            <a:r>
+              <a:rPr sz="2000" b="1" i="0">
+                <a:solidFill>
+                  <a:srgbClr val="333333"/>
+                </a:solidFill>
+                <a:latin typeface="Calibri"/>
+              </a:rPr>
+              <a:t>version</a:t>
+            </a:r>
+            <a:r>
+              <a:rPr sz="2000" b="0" i="0">
+                <a:solidFill>
+                  <a:srgbClr val="333333"/>
+                </a:solidFill>
+                <a:latin typeface="Calibri"/>
+              </a:rPr>
+              <a:t> y el UPDATE exige en el WHERE la versión que se leyó.</a:t>
             </a:r>
           </a:p>
           <a:p>
@@ -7097,14 +8387,66 @@
                 </a:solidFill>
                 <a:latin typeface="Calibri"/>
               </a:rPr>
-              <a:t>–   El flujo en la clínica es este: la transaccion lee la cita 812 y obtiene version 7; el usuario edita la hora; al guardar se ejecuta</a:t>
-            </a:r>
-          </a:p>
-        </p:txBody>
-      </p:sp>
-      <p:sp>
-        <p:nvSpPr>
-          <p:cNvPr id="15" name="TextBox 14"/>
+              <a:t>–   Si otro guardó antes, la versión ya cambió y el UPDATE afecta </a:t>
+            </a:r>
+            <a:r>
+              <a:rPr sz="2000" b="1" i="0">
+                <a:solidFill>
+                  <a:srgbClr val="333333"/>
+                </a:solidFill>
+                <a:latin typeface="Calibri"/>
+              </a:rPr>
+              <a:t>0 filas</a:t>
+            </a:r>
+            <a:r>
+              <a:rPr sz="2000" b="0" i="0">
+                <a:solidFill>
+                  <a:srgbClr val="333333"/>
+                </a:solidFill>
+                <a:latin typeface="Calibri"/>
+              </a:rPr>
+              <a:t>: esa es la señal de conflicto.</a:t>
+            </a:r>
+          </a:p>
+          <a:p>
+            <a:pPr>
+              <a:spcAft>
+                <a:spcPts val="800"/>
+              </a:spcAft>
+            </a:pPr>
+            <a:r>
+              <a:rPr sz="2000" b="0" i="0">
+                <a:solidFill>
+                  <a:srgbClr val="333333"/>
+                </a:solidFill>
+                <a:latin typeface="Calibri"/>
+              </a:rPr>
+              <a:t>–   Se elige por la </a:t>
+            </a:r>
+            <a:r>
+              <a:rPr sz="2000" b="1" i="0">
+                <a:solidFill>
+                  <a:srgbClr val="333333"/>
+                </a:solidFill>
+                <a:latin typeface="Calibri"/>
+              </a:rPr>
+              <a:t>frecuencia</a:t>
+            </a:r>
+            <a:r>
+              <a:rPr sz="2000" b="0" i="0">
+                <a:solidFill>
+                  <a:srgbClr val="333333"/>
+                </a:solidFill>
+                <a:latin typeface="Calibri"/>
+              </a:rPr>
+              <a:t> del choque: frecuente, pesimista; raro, optimista.</a:t>
+            </a:r>
+          </a:p>
+        </p:txBody>
+      </p:sp>
+      <p:sp>
+        <p:nvSpPr>
+          <p:cNvPr id="20" name="TextBox 19"/>
           <p:cNvSpPr txBox="1"/>
           <p:nvPr/>
         </p:nvSpPr>
@@ -7256,6 +8598,59 @@
                       </p:childTnLst>
                     </p:cTn>
                   </p:par>
+                  <p:par>
+                    <p:cTn id="13" fill="hold">
+                      <p:stCondLst>
+                        <p:cond delay="indefinite"/>
+                      </p:stCondLst>
+                      <p:childTnLst>
+                        <p:par>
+                          <p:cTn id="14" fill="hold">
+                            <p:stCondLst>
+                              <p:cond delay="0"/>
+                            </p:stCondLst>
+                            <p:childTnLst>
+                              <p:par>
+                                <p:cTn id="15" presetID="10" presetClass="entr" presetSubtype="0" fill="hold" nodeType="clickEffect">
+                                  <p:stCondLst>
+                                    <p:cond delay="0"/>
+                                  </p:stCondLst>
+                                  <p:childTnLst>
+                                    <p:set>
+                                      <p:cBhvr>
+                                        <p:cTn id="16" dur="1" fill="hold">
+                                          <p:stCondLst>
+                                            <p:cond delay="0"/>
+                                          </p:stCondLst>
+                                        </p:cTn>
+                                        <p:tgtEl>
+                                          <p:spTgt spid="9"/>
+                                        </p:tgtEl>
+                                        <p:attrNameLst>
+                                          <p:attrName>style.visibility</p:attrName>
+                                        </p:attrNameLst>
+                                      </p:cBhvr>
+                                      <p:to>
+                                        <p:strVal val="visible"/>
+                                      </p:to>
+                                    </p:set>
+                                    <p:animEffect transition="in" filter="fade">
+                                      <p:cBhvr>
+                                        <p:cTn id="17" dur="450"/>
+                                        <p:tgtEl>
+                                          <p:spTgt spid="9"/>
+                                        </p:tgtEl>
+                                      </p:cBhvr>
+                                    </p:animEffect>
+                                  </p:childTnLst>
+                                </p:cTn>
+                              </p:par>
+                            </p:childTnLst>
+                          </p:cTn>
+                        </p:par>
+                      </p:childTnLst>
+                    </p:cTn>
+                  </p:par>
                 </p:childTnLst>
               </p:cTn>
               <p:prevCondLst>
@@ -7605,7 +9000,25 @@
                 </a:solidFill>
                 <a:latin typeface="Calibri"/>
               </a:rPr>
-              <a:t>–   La escena de la clínica es concreta: el procedimiento de facturacion bloquea primero la fila de Factura y luego la de Insumo.</a:t>
+              <a:t>–   Un </a:t>
+            </a:r>
+            <a:r>
+              <a:rPr sz="2000" b="1" i="0">
+                <a:solidFill>
+                  <a:srgbClr val="333333"/>
+                </a:solidFill>
+                <a:latin typeface="Calibri"/>
+              </a:rPr>
+              <a:t>deadlock</a:t>
+            </a:r>
+            <a:r>
+              <a:rPr sz="2000" b="0" i="0">
+                <a:solidFill>
+                  <a:srgbClr val="333333"/>
+                </a:solidFill>
+                <a:latin typeface="Calibri"/>
+              </a:rPr>
+              <a:t> ocurre cuando dos transacciones se esperan mutuamente y ninguna puede avanzar.</a:t>
             </a:r>
           </a:p>
           <a:p>
@@ -7621,7 +9034,25 @@
                 </a:solidFill>
                 <a:latin typeface="Calibri"/>
               </a:rPr>
-              <a:t>–   Los motores no dejan eso colgado: mantienen internamente un grafo de esperas y, al detectar un ciclo, eligen una victima y la abortan con un error…</a:t>
+              <a:t>–   PostgreSQL detecta el ciclo, aborta a una </a:t>
+            </a:r>
+            <a:r>
+              <a:rPr sz="2000" b="1" i="0">
+                <a:solidFill>
+                  <a:srgbClr val="333333"/>
+                </a:solidFill>
+                <a:latin typeface="Calibri"/>
+              </a:rPr>
+              <a:t>víctima</a:t>
+            </a:r>
+            <a:r>
+              <a:rPr sz="2000" b="0" i="0">
+                <a:solidFill>
+                  <a:srgbClr val="333333"/>
+                </a:solidFill>
+                <a:latin typeface="Calibri"/>
+              </a:rPr>
+              <a:t> con el error 40P01 y deja terminar a la otra.</a:t>
             </a:r>
           </a:p>
           <a:p>
@@ -7637,7 +9068,59 @@
                 </a:solidFill>
                 <a:latin typeface="Calibri"/>
               </a:rPr>
-              <a:t>–   En Oracle es ORA-00060, en MySQL el error 1213, en PostgreSQL el codigo 40P01.</a:t>
+              <a:t>–   La aplicación debe </a:t>
+            </a:r>
+            <a:r>
+              <a:rPr sz="2000" b="1" i="0">
+                <a:solidFill>
+                  <a:srgbClr val="333333"/>
+                </a:solidFill>
+                <a:latin typeface="Calibri"/>
+              </a:rPr>
+              <a:t>reintentar</a:t>
+            </a:r>
+            <a:r>
+              <a:rPr sz="2000" b="0" i="0">
+                <a:solidFill>
+                  <a:srgbClr val="333333"/>
+                </a:solidFill>
+                <a:latin typeface="Calibri"/>
+              </a:rPr>
+              <a:t> la abortada: es el mecanismo funcionando, no una falla.</a:t>
+            </a:r>
+          </a:p>
+          <a:p>
+            <a:pPr>
+              <a:spcAft>
+                <a:spcPts val="800"/>
+              </a:spcAft>
+            </a:pPr>
+            <a:r>
+              <a:rPr sz="2000" b="0" i="0">
+                <a:solidFill>
+                  <a:srgbClr val="333333"/>
+                </a:solidFill>
+                <a:latin typeface="Calibri"/>
+              </a:rPr>
+              <a:t>–   Se previene tocando las tablas </a:t>
+            </a:r>
+            <a:r>
+              <a:rPr sz="2000" b="1" i="0">
+                <a:solidFill>
+                  <a:srgbClr val="333333"/>
+                </a:solidFill>
+                <a:latin typeface="Calibri"/>
+              </a:rPr>
+              <a:t>siempre en el mismo orden</a:t>
+            </a:r>
+            <a:r>
+              <a:rPr sz="2000" b="0" i="0">
+                <a:solidFill>
+                  <a:srgbClr val="333333"/>
+                </a:solidFill>
+                <a:latin typeface="Calibri"/>
+              </a:rPr>
+              <a:t> en todos los procedimientos.</a:t>
             </a:r>
           </a:p>
         </p:txBody>
@@ -8076,9 +9559,33 @@
           </a:prstGeom>
         </p:spPr>
       </p:pic>
-      <p:sp>
-        <p:nvSpPr>
-          <p:cNvPr id="13" name="TextBox 12"/>
+      <p:pic>
+        <p:nvPicPr>
+          <p:cNvPr id="9" name="Picture 8" descr="unique-una-linea-paso4.png"/>
+          <p:cNvPicPr>
+            <a:picLocks noChangeAspect="1"/>
+          </p:cNvPicPr>
+          <p:nvPr/>
+        </p:nvPicPr>
+        <p:blipFill>
+          <a:blip r:embed="rId5"/>
+          <a:stretch>
+            <a:fillRect/>
+          </a:stretch>
+        </p:blipFill>
+        <p:spPr>
+          <a:xfrm>
+            <a:off x="5876318" y="1261872"/>
+            <a:ext cx="5852160" cy="4681728"/>
+          </a:xfrm>
+          <a:prstGeom prst="rect">
+            <a:avLst/>
+          </a:prstGeom>
+        </p:spPr>
+      </p:pic>
+      <p:sp>
+        <p:nvSpPr>
+          <p:cNvPr id="18" name="TextBox 17"/>
           <p:cNvSpPr txBox="1"/>
           <p:nvPr/>
         </p:nvSpPr>
@@ -8113,7 +9620,7 @@
       </p:sp>
       <p:sp>
         <p:nvSpPr>
-          <p:cNvPr id="14" name="TextBox 13"/>
+          <p:cNvPr id="19" name="TextBox 18"/>
           <p:cNvSpPr txBox="1"/>
           <p:nvPr/>
         </p:nvSpPr>
@@ -8145,7 +9652,25 @@
                 </a:solidFill>
                 <a:latin typeface="Calibri"/>
               </a:rPr>
-              <a:t>–   Antes de complicarse con niveles de aislamiento hay una solucion declarativa que resuelve el caso estrella de la clínica y cuesta una sola linea:.</a:t>
+              <a:t>–   Un </a:t>
+            </a:r>
+            <a:r>
+              <a:rPr sz="2000" b="1" i="0">
+                <a:solidFill>
+                  <a:srgbClr val="333333"/>
+                </a:solidFill>
+                <a:latin typeface="Calibri"/>
+              </a:rPr>
+              <a:t>índice único</a:t>
+            </a:r>
+            <a:r>
+              <a:rPr sz="2000" b="0" i="0">
+                <a:solidFill>
+                  <a:srgbClr val="333333"/>
+                </a:solidFill>
+                <a:latin typeface="Calibri"/>
+              </a:rPr>
+              <a:t> sobre (id_veterinario, fecha_hora) hace imposible la doble reserva con una sola sentencia.</a:t>
             </a:r>
           </a:p>
           <a:p>
@@ -8161,7 +9686,25 @@
                 </a:solidFill>
                 <a:latin typeface="Calibri"/>
               </a:rPr>
-              <a:t>–   Esto conduce a la limitacion practica del dia y a la pregunta previsible.</a:t>
+              <a:t>–   El motor deja pasar el primer INSERT y rechaza el segundo con </a:t>
+            </a:r>
+            <a:r>
+              <a:rPr sz="2000" b="1" i="0">
+                <a:solidFill>
+                  <a:srgbClr val="333333"/>
+                </a:solidFill>
+                <a:latin typeface="Calibri"/>
+              </a:rPr>
+              <a:t>violación de unicidad</a:t>
+            </a:r>
+            <a:r>
+              <a:rPr sz="2000" b="0" i="0">
+                <a:solidFill>
+                  <a:srgbClr val="333333"/>
+                </a:solidFill>
+                <a:latin typeface="Calibri"/>
+              </a:rPr>
+              <a:t>.</a:t>
             </a:r>
           </a:p>
           <a:p>
@@ -8177,14 +9720,66 @@
                 </a:solidFill>
                 <a:latin typeface="Calibri"/>
               </a:rPr>
-              <a:t>–   El informe de hoy se audita en el checkpoint de la Clase 11 y se convierte en clausula del contrato de operaciones de la Clase 12.</a:t>
-            </a:r>
-          </a:p>
-        </p:txBody>
-      </p:sp>
-      <p:sp>
-        <p:nvSpPr>
-          <p:cNvPr id="15" name="TextBox 14"/>
+              <a:t>–   El procedimiento captura el error y responde en lenguaje de </a:t>
+            </a:r>
+            <a:r>
+              <a:rPr sz="2000" b="1" i="0">
+                <a:solidFill>
+                  <a:srgbClr val="333333"/>
+                </a:solidFill>
+                <a:latin typeface="Calibri"/>
+              </a:rPr>
+              <a:t>negocio</a:t>
+            </a:r>
+            <a:r>
+              <a:rPr sz="2000" b="0" i="0">
+                <a:solidFill>
+                  <a:srgbClr val="333333"/>
+                </a:solidFill>
+                <a:latin typeface="Calibri"/>
+              </a:rPr>
+              <a:t>: «ese horario acaba de ser tomado».</a:t>
+            </a:r>
+          </a:p>
+          <a:p>
+            <a:pPr>
+              <a:spcAft>
+                <a:spcPts val="800"/>
+              </a:spcAft>
+            </a:pPr>
+            <a:r>
+              <a:rPr sz="2000" b="0" i="0">
+                <a:solidFill>
+                  <a:srgbClr val="333333"/>
+                </a:solidFill>
+                <a:latin typeface="Calibri"/>
+              </a:rPr>
+              <a:t>–   Es </a:t>
+            </a:r>
+            <a:r>
+              <a:rPr sz="2000" b="1" i="0">
+                <a:solidFill>
+                  <a:srgbClr val="333333"/>
+                </a:solidFill>
+                <a:latin typeface="Calibri"/>
+              </a:rPr>
+              <a:t>parcial</a:t>
+            </a:r>
+            <a:r>
+              <a:rPr sz="2000" b="0" i="0">
+                <a:solidFill>
+                  <a:srgbClr val="333333"/>
+                </a:solidFill>
+                <a:latin typeface="Calibri"/>
+              </a:rPr>
+              <a:t> (WHERE estado &lt;&gt; 'CANCELADA') porque una cita cancelada no ocupa la franja.</a:t>
+            </a:r>
+          </a:p>
+        </p:txBody>
+      </p:sp>
+      <p:sp>
+        <p:nvSpPr>
+          <p:cNvPr id="20" name="TextBox 19"/>
           <p:cNvSpPr txBox="1"/>
           <p:nvPr/>
         </p:nvSpPr>
@@ -8336,6 +9931,59 @@
                       </p:childTnLst>
                     </p:cTn>
                   </p:par>
+                  <p:par>
+                    <p:cTn id="13" fill="hold">
+                      <p:stCondLst>
+                        <p:cond delay="indefinite"/>
+                      </p:stCondLst>
+                      <p:childTnLst>
+                        <p:par>
+                          <p:cTn id="14" fill="hold">
+                            <p:stCondLst>
+                              <p:cond delay="0"/>
+                            </p:stCondLst>
+                            <p:childTnLst>
+                              <p:par>
+                                <p:cTn id="15" presetID="10" presetClass="entr" presetSubtype="0" fill="hold" nodeType="clickEffect">
+                                  <p:stCondLst>
+                                    <p:cond delay="0"/>
+                                  </p:stCondLst>
+                                  <p:childTnLst>
+                                    <p:set>
+                                      <p:cBhvr>
+                                        <p:cTn id="16" dur="1" fill="hold">
+                                          <p:stCondLst>
+                                            <p:cond delay="0"/>
+                                          </p:stCondLst>
+                                        </p:cTn>
+                                        <p:tgtEl>
+                                          <p:spTgt spid="9"/>
+                                        </p:tgtEl>
+                                        <p:attrNameLst>
+                                          <p:attrName>style.visibility</p:attrName>
+                                        </p:attrNameLst>
+                                      </p:cBhvr>
+                                      <p:to>
+                                        <p:strVal val="visible"/>
+                                      </p:to>
+                                    </p:set>
+                                    <p:animEffect transition="in" filter="fade">
+                                      <p:cBhvr>
+                                        <p:cTn id="17" dur="450"/>
+                                        <p:tgtEl>
+                                          <p:spTgt spid="9"/>
+                                        </p:tgtEl>
+                                      </p:cBhvr>
+                                    </p:animEffect>
+                                  </p:childTnLst>
+                                </p:cTn>
+                              </p:par>
+                            </p:childTnLst>
+                          </p:cTn>
+                        </p:par>
+                      </p:childTnLst>
+                    </p:cTn>
+                  </p:par>
                 </p:childTnLst>
               </p:cTn>
               <p:prevCondLst>
@@ -8494,7 +10142,7 @@
                 </a:solidFill>
                 <a:latin typeface="Calibri"/>
               </a:rPr>
-              <a:t>La doble reserva, y la restriccion que la cierra de raiz</a:t>
+              <a:t>La doble reserva, reproducida y detectada</a:t>
             </a:r>
           </a:p>
         </p:txBody>
@@ -8508,7 +10156,7 @@
         <p:spPr>
           <a:xfrm>
             <a:off x="457200" y="1261872"/>
-            <a:ext cx="11277295" cy="4840843"/>
+            <a:ext cx="11277295" cy="5179278"/>
           </a:xfrm>
           <a:prstGeom prst="roundRect">
             <a:avLst>
@@ -8757,8 +10405,8 @@
         </p:nvSpPr>
         <p:spPr>
           <a:xfrm>
-            <a:off x="1188720" y="1719072"/>
-            <a:ext cx="10271455" cy="4246483"/>
+            <a:off x="685800" y="1719072"/>
+            <a:ext cx="502920" cy="4584918"/>
           </a:xfrm>
           <a:prstGeom prst="rect">
             <a:avLst/>
@@ -8771,288 +10419,472 @@
           </a:bodyPr>
           <a:lstStyle/>
           <a:p>
+            <a:pPr algn="r">
+              <a:spcAft>
+                <a:spcPts val="385"/>
+              </a:spcAft>
+            </a:pPr>
+            <a:r>
+              <a:rPr sz="1800" i="0" b="0">
+                <a:solidFill>
+                  <a:srgbClr val="858585"/>
+                </a:solidFill>
+                <a:latin typeface="Consolas"/>
+              </a:rPr>
+              <a:t>1</a:t>
+            </a:r>
+          </a:p>
+          <a:p>
+            <a:pPr algn="r">
+              <a:spcAft>
+                <a:spcPts val="385"/>
+              </a:spcAft>
+            </a:pPr>
+            <a:r>
+              <a:rPr sz="1800" i="0" b="0">
+                <a:solidFill>
+                  <a:srgbClr val="858585"/>
+                </a:solidFill>
+                <a:latin typeface="Consolas"/>
+              </a:rPr>
+              <a:t>2</a:t>
+            </a:r>
+          </a:p>
+          <a:p>
+            <a:pPr algn="r">
+              <a:spcAft>
+                <a:spcPts val="385"/>
+              </a:spcAft>
+            </a:pPr>
+            <a:r>
+              <a:rPr sz="1800" i="0" b="0">
+                <a:solidFill>
+                  <a:srgbClr val="858585"/>
+                </a:solidFill>
+                <a:latin typeface="Consolas"/>
+              </a:rPr>
+              <a:t>3</a:t>
+            </a:r>
+          </a:p>
+          <a:p>
+            <a:pPr algn="r">
+              <a:spcAft>
+                <a:spcPts val="385"/>
+              </a:spcAft>
+            </a:pPr>
+            <a:r>
+              <a:rPr sz="1800" i="0" b="0">
+                <a:solidFill>
+                  <a:srgbClr val="858585"/>
+                </a:solidFill>
+                <a:latin typeface="Consolas"/>
+              </a:rPr>
+              <a:t>4</a:t>
+            </a:r>
+          </a:p>
+          <a:p>
+            <a:pPr algn="r">
+              <a:spcAft>
+                <a:spcPts val="385"/>
+              </a:spcAft>
+            </a:pPr>
+            <a:r>
+              <a:rPr sz="1800" i="0" b="0">
+                <a:solidFill>
+                  <a:srgbClr val="858585"/>
+                </a:solidFill>
+                <a:latin typeface="Consolas"/>
+              </a:rPr>
+              <a:t>5</a:t>
+            </a:r>
+          </a:p>
+          <a:p>
+            <a:pPr algn="r">
+              <a:spcAft>
+                <a:spcPts val="385"/>
+              </a:spcAft>
+            </a:pPr>
+            <a:r>
+              <a:rPr sz="1800" i="0" b="0">
+                <a:solidFill>
+                  <a:srgbClr val="858585"/>
+                </a:solidFill>
+                <a:latin typeface="Consolas"/>
+              </a:rPr>
+              <a:t>6</a:t>
+            </a:r>
+          </a:p>
+          <a:p>
+            <a:pPr algn="r">
+              <a:spcAft>
+                <a:spcPts val="385"/>
+              </a:spcAft>
+            </a:pPr>
+            <a:r>
+              <a:rPr sz="1800" i="0" b="0">
+                <a:solidFill>
+                  <a:srgbClr val="858585"/>
+                </a:solidFill>
+                <a:latin typeface="Consolas"/>
+              </a:rPr>
+              <a:t>7</a:t>
+            </a:r>
+          </a:p>
+          <a:p>
+            <a:pPr algn="r">
+              <a:spcAft>
+                <a:spcPts val="385"/>
+              </a:spcAft>
+            </a:pPr>
+            <a:r>
+              <a:rPr sz="1800" i="0" b="0">
+                <a:solidFill>
+                  <a:srgbClr val="858585"/>
+                </a:solidFill>
+                <a:latin typeface="Consolas"/>
+              </a:rPr>
+              <a:t>8</a:t>
+            </a:r>
+          </a:p>
+          <a:p>
+            <a:pPr algn="r">
+              <a:spcAft>
+                <a:spcPts val="385"/>
+              </a:spcAft>
+            </a:pPr>
+            <a:r>
+              <a:rPr sz="1800" i="0" b="0">
+                <a:solidFill>
+                  <a:srgbClr val="858585"/>
+                </a:solidFill>
+                <a:latin typeface="Consolas"/>
+              </a:rPr>
+              <a:t>9</a:t>
+            </a:r>
+          </a:p>
+          <a:p>
+            <a:pPr algn="r">
+              <a:spcAft>
+                <a:spcPts val="385"/>
+              </a:spcAft>
+            </a:pPr>
+            <a:r>
+              <a:rPr sz="1800" i="0" b="0">
+                <a:solidFill>
+                  <a:srgbClr val="858585"/>
+                </a:solidFill>
+                <a:latin typeface="Consolas"/>
+              </a:rPr>
+              <a:t>10</a:t>
+            </a:r>
+          </a:p>
+          <a:p>
+            <a:pPr algn="r">
+              <a:spcAft>
+                <a:spcPts val="385"/>
+              </a:spcAft>
+            </a:pPr>
+            <a:r>
+              <a:rPr sz="1800" i="0" b="0">
+                <a:solidFill>
+                  <a:srgbClr val="858585"/>
+                </a:solidFill>
+                <a:latin typeface="Consolas"/>
+              </a:rPr>
+              <a:t>11</a:t>
+            </a:r>
+          </a:p>
+          <a:p>
+            <a:pPr algn="r">
+              <a:spcAft>
+                <a:spcPts val="385"/>
+              </a:spcAft>
+            </a:pPr>
+            <a:r>
+              <a:rPr sz="1800" i="0" b="0">
+                <a:solidFill>
+                  <a:srgbClr val="858585"/>
+                </a:solidFill>
+                <a:latin typeface="Consolas"/>
+              </a:rPr>
+              <a:t>12</a:t>
+            </a:r>
+          </a:p>
+          <a:p>
+            <a:pPr algn="r">
+              <a:spcAft>
+                <a:spcPts val="385"/>
+              </a:spcAft>
+            </a:pPr>
+            <a:r>
+              <a:rPr sz="1800" i="0" b="0">
+                <a:solidFill>
+                  <a:srgbClr val="858585"/>
+                </a:solidFill>
+                <a:latin typeface="Consolas"/>
+              </a:rPr>
+              <a:t>13</a:t>
+            </a:r>
+          </a:p>
+          <a:p>
+            <a:pPr algn="r">
+              <a:spcAft>
+                <a:spcPts val="385"/>
+              </a:spcAft>
+            </a:pPr>
+            <a:r>
+              <a:rPr sz="1800" i="0" b="0">
+                <a:solidFill>
+                  <a:srgbClr val="858585"/>
+                </a:solidFill>
+                <a:latin typeface="Consolas"/>
+              </a:rPr>
+              <a:t>14</a:t>
+            </a:r>
+          </a:p>
+        </p:txBody>
+      </p:sp>
+      <p:sp>
+        <p:nvSpPr>
+          <p:cNvPr id="12" name="TextBox 11"/>
+          <p:cNvSpPr txBox="1"/>
+          <p:nvPr/>
+        </p:nvSpPr>
+        <p:spPr>
+          <a:xfrm>
+            <a:off x="1188720" y="1719072"/>
+            <a:ext cx="10271455" cy="4584918"/>
+          </a:xfrm>
+          <a:prstGeom prst="rect">
+            <a:avLst/>
+          </a:prstGeom>
+          <a:noFill/>
+        </p:spPr>
+        <p:txBody>
+          <a:bodyPr wrap="square">
+            <a:spAutoFit/>
+          </a:bodyPr>
+          <a:lstStyle/>
+          <a:p>
             <a:pPr>
               <a:spcAft>
-                <a:spcPts val="428"/>
+                <a:spcPts val="385"/>
               </a:spcAft>
             </a:pPr>
             <a:r>
-              <a:rPr sz="2000" i="1" b="0">
+              <a:rPr sz="1800" i="1" b="0">
                 <a:solidFill>
                   <a:srgbClr val="6A9955"/>
                 </a:solidFill>
                 <a:latin typeface="Consolas"/>
               </a:rPr>
-              <a:t>-- Dos sesiones agendan la misma franja al mismo veterinario:</a:t>
+              <a:t>-- Sin restriccion, la base ACEPTA dos citas en la misma franja: ningun error</a:t>
             </a:r>
           </a:p>
           <a:p>
             <a:pPr>
               <a:spcAft>
-                <a:spcPts val="428"/>
+                <a:spcPts val="385"/>
               </a:spcAft>
             </a:pPr>
             <a:r>
-              <a:rPr sz="2000" i="0" b="0">
+              <a:rPr sz="1800" i="0" b="0">
+                <a:solidFill>
+                  <a:srgbClr val="569CD6"/>
+                </a:solidFill>
+                <a:latin typeface="Consolas"/>
+              </a:rPr>
+              <a:t>INSERT</a:t>
+            </a:r>
+            <a:r>
+              <a:rPr sz="1800" i="0" b="0">
                 <a:solidFill>
                   <a:srgbClr val="D4D4D4"/>
                 </a:solidFill>
                 <a:latin typeface="Consolas"/>
               </a:rPr>
-              <a:t>-- </a:t>
-            </a:r>
-            <a:r>
-              <a:rPr sz="2000" i="0" b="0">
+              <a:t> </a:t>
+            </a:r>
+            <a:r>
+              <a:rPr sz="1800" i="0" b="0">
+                <a:solidFill>
+                  <a:srgbClr val="569CD6"/>
+                </a:solidFill>
+                <a:latin typeface="Consolas"/>
+              </a:rPr>
+              <a:t>INTO</a:t>
+            </a:r>
+            <a:r>
+              <a:rPr sz="1800" i="0" b="0">
                 <a:solidFill>
                   <a:srgbClr val="D4D4D4"/>
                 </a:solidFill>
                 <a:latin typeface="Consolas"/>
               </a:rPr>
-              <a:t>T1</a:t>
-            </a:r>
-            <a:r>
-              <a:rPr sz="2000" i="0" b="0">
+              <a:t> </a:t>
+            </a:r>
+            <a:r>
+              <a:rPr sz="1800" i="0" b="0">
+                <a:solidFill>
+                  <a:srgbClr val="DCDCAA"/>
+                </a:solidFill>
+                <a:latin typeface="Consolas"/>
+              </a:rPr>
+              <a:t>cita</a:t>
+            </a:r>
+            <a:r>
+              <a:rPr sz="1800" i="0" b="0">
                 <a:solidFill>
                   <a:srgbClr val="D4D4D4"/>
                 </a:solidFill>
                 <a:latin typeface="Consolas"/>
               </a:rPr>
-              <a:t>: </a:t>
-            </a:r>
-            <a:r>
-              <a:rPr sz="2000" i="0" b="0">
+              <a:t> (</a:t>
+            </a:r>
+            <a:r>
+              <a:rPr sz="1800" i="0" b="0">
+                <a:solidFill>
+                  <a:srgbClr val="D4D4D4"/>
+                </a:solidFill>
+                <a:latin typeface="Consolas"/>
+              </a:rPr>
+              <a:t>id_mascota</a:t>
+            </a:r>
+            <a:r>
+              <a:rPr sz="1800" i="0" b="0">
+                <a:solidFill>
+                  <a:srgbClr val="D4D4D4"/>
+                </a:solidFill>
+                <a:latin typeface="Consolas"/>
+              </a:rPr>
+              <a:t>, </a:t>
+            </a:r>
+            <a:r>
+              <a:rPr sz="1800" i="0" b="0">
+                <a:solidFill>
+                  <a:srgbClr val="D4D4D4"/>
+                </a:solidFill>
+                <a:latin typeface="Consolas"/>
+              </a:rPr>
+              <a:t>id_veterinario</a:t>
+            </a:r>
+            <a:r>
+              <a:rPr sz="1800" i="0" b="0">
+                <a:solidFill>
+                  <a:srgbClr val="D4D4D4"/>
+                </a:solidFill>
+                <a:latin typeface="Consolas"/>
+              </a:rPr>
+              <a:t>, </a:t>
+            </a:r>
+            <a:r>
+              <a:rPr sz="1800" i="0" b="0">
+                <a:solidFill>
+                  <a:srgbClr val="D4D4D4"/>
+                </a:solidFill>
+                <a:latin typeface="Consolas"/>
+              </a:rPr>
+              <a:t>fecha_hora</a:t>
+            </a:r>
+            <a:r>
+              <a:rPr sz="1800" i="0" b="0">
+                <a:solidFill>
+                  <a:srgbClr val="D4D4D4"/>
+                </a:solidFill>
+                <a:latin typeface="Consolas"/>
+              </a:rPr>
+              <a:t>, </a:t>
+            </a:r>
+            <a:r>
+              <a:rPr sz="1800" i="0" b="0">
+                <a:solidFill>
+                  <a:srgbClr val="D4D4D4"/>
+                </a:solidFill>
+                <a:latin typeface="Consolas"/>
+              </a:rPr>
+              <a:t>estado</a:t>
+            </a:r>
+            <a:r>
+              <a:rPr sz="1800" i="0" b="0">
+                <a:solidFill>
+                  <a:srgbClr val="D4D4D4"/>
+                </a:solidFill>
+                <a:latin typeface="Consolas"/>
+              </a:rPr>
+              <a:t>) </a:t>
+            </a:r>
+            <a:r>
+              <a:rPr sz="1800" i="0" b="0">
                 <a:solidFill>
                   <a:srgbClr val="569CD6"/>
                 </a:solidFill>
                 <a:latin typeface="Consolas"/>
               </a:rPr>
-              <a:t>SELECT</a:t>
-            </a:r>
-            <a:r>
-              <a:rPr sz="2000" i="0" b="0">
-                <a:solidFill>
-                  <a:srgbClr val="D4D4D4"/>
-                </a:solidFill>
-                <a:latin typeface="Consolas"/>
-              </a:rPr>
-              <a:t> </a:t>
-            </a:r>
-            <a:r>
-              <a:rPr sz="2000" i="0" b="0">
-                <a:solidFill>
-                  <a:srgbClr val="DCDCAA"/>
-                </a:solidFill>
-                <a:latin typeface="Consolas"/>
-              </a:rPr>
-              <a:t>COUNT</a:t>
-            </a:r>
-            <a:r>
-              <a:rPr sz="2000" i="0" b="0">
-                <a:solidFill>
-                  <a:srgbClr val="D4D4D4"/>
-                </a:solidFill>
-                <a:latin typeface="Consolas"/>
-              </a:rPr>
-              <a:t>(*) </a:t>
-            </a:r>
-            <a:r>
-              <a:rPr sz="2000" i="0" b="0">
-                <a:solidFill>
-                  <a:srgbClr val="569CD6"/>
-                </a:solidFill>
-                <a:latin typeface="Consolas"/>
-              </a:rPr>
-              <a:t>FROM</a:t>
-            </a:r>
-            <a:r>
-              <a:rPr sz="2000" i="0" b="0">
-                <a:solidFill>
-                  <a:srgbClr val="D4D4D4"/>
-                </a:solidFill>
-                <a:latin typeface="Consolas"/>
-              </a:rPr>
-              <a:t> </a:t>
-            </a:r>
-            <a:r>
-              <a:rPr sz="2000" i="0" b="0">
-                <a:solidFill>
-                  <a:srgbClr val="D4D4D4"/>
-                </a:solidFill>
-                <a:latin typeface="Consolas"/>
-              </a:rPr>
-              <a:t>cita</a:t>
-            </a:r>
-            <a:r>
-              <a:rPr sz="2000" i="0" b="0">
-                <a:solidFill>
-                  <a:srgbClr val="D4D4D4"/>
-                </a:solidFill>
-                <a:latin typeface="Consolas"/>
-              </a:rPr>
-              <a:t> </a:t>
-            </a:r>
-            <a:r>
-              <a:rPr sz="2000" i="0" b="0">
-                <a:solidFill>
-                  <a:srgbClr val="569CD6"/>
-                </a:solidFill>
-                <a:latin typeface="Consolas"/>
-              </a:rPr>
-              <a:t>WHERE</a:t>
-            </a:r>
-            <a:r>
-              <a:rPr sz="2000" i="0" b="0">
-                <a:solidFill>
-                  <a:srgbClr val="D4D4D4"/>
-                </a:solidFill>
-                <a:latin typeface="Consolas"/>
-              </a:rPr>
-              <a:t> </a:t>
-            </a:r>
-            <a:r>
-              <a:rPr sz="2000" i="0" b="0">
-                <a:solidFill>
-                  <a:srgbClr val="D4D4D4"/>
-                </a:solidFill>
-                <a:latin typeface="Consolas"/>
-              </a:rPr>
-              <a:t>id_veterinario</a:t>
-            </a:r>
-            <a:r>
-              <a:rPr sz="2000" i="0" b="0">
-                <a:solidFill>
-                  <a:srgbClr val="D4D4D4"/>
-                </a:solidFill>
-                <a:latin typeface="Consolas"/>
-              </a:rPr>
-              <a:t>=</a:t>
-            </a:r>
-            <a:r>
-              <a:rPr sz="2000" i="0" b="0">
-                <a:solidFill>
-                  <a:srgbClr val="B5CEA8"/>
-                </a:solidFill>
-                <a:latin typeface="Consolas"/>
-              </a:rPr>
-              <a:t>3</a:t>
-            </a:r>
-            <a:r>
-              <a:rPr sz="2000" i="0" b="0">
-                <a:solidFill>
-                  <a:srgbClr val="D4D4D4"/>
-                </a:solidFill>
-                <a:latin typeface="Consolas"/>
-              </a:rPr>
-              <a:t> </a:t>
-            </a:r>
-            <a:r>
-              <a:rPr sz="2000" i="0" b="0">
-                <a:solidFill>
-                  <a:srgbClr val="569CD6"/>
-                </a:solidFill>
-                <a:latin typeface="Consolas"/>
-              </a:rPr>
-              <a:t>AND</a:t>
-            </a:r>
-            <a:r>
-              <a:rPr sz="2000" i="0" b="0">
-                <a:solidFill>
-                  <a:srgbClr val="D4D4D4"/>
-                </a:solidFill>
-                <a:latin typeface="Consolas"/>
-              </a:rPr>
-              <a:t> </a:t>
-            </a:r>
-            <a:r>
-              <a:rPr sz="2000" i="0" b="0">
-                <a:solidFill>
-                  <a:srgbClr val="D4D4D4"/>
-                </a:solidFill>
-                <a:latin typeface="Consolas"/>
-              </a:rPr>
-              <a:t>fecha_hora</a:t>
-            </a:r>
-            <a:r>
-              <a:rPr sz="2000" i="0" b="0">
-                <a:solidFill>
-                  <a:srgbClr val="D4D4D4"/>
-                </a:solidFill>
-                <a:latin typeface="Consolas"/>
-              </a:rPr>
-              <a:t>=</a:t>
-            </a:r>
-            <a:r>
-              <a:rPr sz="2000" i="0" b="0">
-                <a:solidFill>
-                  <a:srgbClr val="D4D4D4"/>
-                </a:solidFill>
-                <a:latin typeface="Consolas"/>
-              </a:rPr>
-              <a:t>X</a:t>
-            </a:r>
-            <a:r>
-              <a:rPr sz="2000" i="0" b="0">
-                <a:solidFill>
-                  <a:srgbClr val="D4D4D4"/>
-                </a:solidFill>
-                <a:latin typeface="Consolas"/>
-              </a:rPr>
-              <a:t>; -&gt; </a:t>
-            </a:r>
-            <a:r>
-              <a:rPr sz="2000" i="0" b="0">
-                <a:solidFill>
-                  <a:srgbClr val="B5CEA8"/>
-                </a:solidFill>
-                <a:latin typeface="Consolas"/>
-              </a:rPr>
-              <a:t>0</a:t>
+              <a:t>VALUES</a:t>
             </a:r>
           </a:p>
           <a:p>
             <a:pPr>
               <a:spcAft>
-                <a:spcPts val="428"/>
+                <a:spcPts val="385"/>
               </a:spcAft>
             </a:pPr>
             <a:r>
-              <a:rPr sz="2000" i="0" b="0">
+              <a:rPr sz="1800" i="0" b="0">
                 <a:solidFill>
                   <a:srgbClr val="D4D4D4"/>
                 </a:solidFill>
                 <a:latin typeface="Consolas"/>
               </a:rPr>
-              <a:t>-- </a:t>
-            </a:r>
-            <a:r>
-              <a:rPr sz="2000" i="0" b="0">
+              <a:t>  (</a:t>
+            </a:r>
+            <a:r>
+              <a:rPr sz="1800" i="0" b="0">
+                <a:solidFill>
+                  <a:srgbClr val="B5CEA8"/>
+                </a:solidFill>
+                <a:latin typeface="Consolas"/>
+              </a:rPr>
+              <a:t>4</a:t>
+            </a:r>
+            <a:r>
+              <a:rPr sz="1800" i="0" b="0">
                 <a:solidFill>
                   <a:srgbClr val="D4D4D4"/>
                 </a:solidFill>
                 <a:latin typeface="Consolas"/>
               </a:rPr>
-              <a:t>T2</a:t>
-            </a:r>
-            <a:r>
-              <a:rPr sz="2000" i="0" b="0">
+              <a:t>, </a:t>
+            </a:r>
+            <a:r>
+              <a:rPr sz="1800" i="0" b="0">
+                <a:solidFill>
+                  <a:srgbClr val="B5CEA8"/>
+                </a:solidFill>
+                <a:latin typeface="Consolas"/>
+              </a:rPr>
+              <a:t>2</a:t>
+            </a:r>
+            <a:r>
+              <a:rPr sz="1800" i="0" b="0">
                 <a:solidFill>
                   <a:srgbClr val="D4D4D4"/>
                 </a:solidFill>
                 <a:latin typeface="Consolas"/>
               </a:rPr>
-              <a:t>: </a:t>
-            </a:r>
-            <a:r>
-              <a:rPr sz="2000" i="0" b="0">
-                <a:solidFill>
-                  <a:srgbClr val="569CD6"/>
-                </a:solidFill>
-                <a:latin typeface="Consolas"/>
-              </a:rPr>
-              <a:t>SELECT</a:t>
-            </a:r>
-            <a:r>
-              <a:rPr sz="2000" i="0" b="0">
+              <a:t>, </a:t>
+            </a:r>
+            <a:r>
+              <a:rPr sz="1800" i="0" b="0">
+                <a:solidFill>
+                  <a:srgbClr val="4EC9B0"/>
+                </a:solidFill>
+                <a:latin typeface="Consolas"/>
+              </a:rPr>
+              <a:t>TIMESTAMP</a:t>
+            </a:r>
+            <a:r>
+              <a:rPr sz="1800" i="0" b="0">
                 <a:solidFill>
                   <a:srgbClr val="D4D4D4"/>
                 </a:solidFill>
@@ -9061,300 +10893,156 @@
               <a:t> </a:t>
             </a:r>
             <a:r>
-              <a:rPr sz="2000" i="0" b="0">
-                <a:solidFill>
-                  <a:srgbClr val="DCDCAA"/>
-                </a:solidFill>
-                <a:latin typeface="Consolas"/>
-              </a:rPr>
-              <a:t>COUNT</a:t>
-            </a:r>
-            <a:r>
-              <a:rPr sz="2000" i="0" b="0">
+              <a:rPr sz="1800" i="0" b="0">
+                <a:solidFill>
+                  <a:srgbClr val="CE9178"/>
+                </a:solidFill>
+                <a:latin typeface="Consolas"/>
+              </a:rPr>
+              <a:t>'2026-09-15 10:00:00'</a:t>
+            </a:r>
+            <a:r>
+              <a:rPr sz="1800" i="0" b="0">
                 <a:solidFill>
                   <a:srgbClr val="D4D4D4"/>
                 </a:solidFill>
                 <a:latin typeface="Consolas"/>
               </a:rPr>
-              <a:t>(*) ... </a:t>
-            </a:r>
-            <a:r>
-              <a:rPr sz="2000" i="0" b="0">
+              <a:t>, </a:t>
+            </a:r>
+            <a:r>
+              <a:rPr sz="1800" i="0" b="0">
+                <a:solidFill>
+                  <a:srgbClr val="CE9178"/>
+                </a:solidFill>
+                <a:latin typeface="Consolas"/>
+              </a:rPr>
+              <a:t>'PROGRAMADA'</a:t>
+            </a:r>
+            <a:r>
+              <a:rPr sz="1800" i="0" b="0">
                 <a:solidFill>
                   <a:srgbClr val="D4D4D4"/>
                 </a:solidFill>
                 <a:latin typeface="Consolas"/>
               </a:rPr>
-              <a:t>mismo</a:t>
-            </a:r>
-            <a:r>
-              <a:rPr sz="2000" i="0" b="0">
-                <a:solidFill>
-                  <a:srgbClr val="D4D4D4"/>
-                </a:solidFill>
-                <a:latin typeface="Consolas"/>
-              </a:rPr>
-              <a:t> </a:t>
-            </a:r>
-            <a:r>
-              <a:rPr sz="2000" i="0" b="0">
-                <a:solidFill>
-                  <a:srgbClr val="D4D4D4"/>
-                </a:solidFill>
-                <a:latin typeface="Consolas"/>
-              </a:rPr>
-              <a:t>resultado</a:t>
-            </a:r>
-            <a:r>
-              <a:rPr sz="2000" i="0" b="0">
-                <a:solidFill>
-                  <a:srgbClr val="D4D4D4"/>
-                </a:solidFill>
-                <a:latin typeface="Consolas"/>
-              </a:rPr>
-              <a:t> -&gt; </a:t>
-            </a:r>
-            <a:r>
-              <a:rPr sz="2000" i="0" b="0">
-                <a:solidFill>
-                  <a:srgbClr val="B5CEA8"/>
-                </a:solidFill>
-                <a:latin typeface="Consolas"/>
-              </a:rPr>
-              <a:t>0</a:t>
+              <a:t>),</a:t>
             </a:r>
           </a:p>
           <a:p>
             <a:pPr>
               <a:spcAft>
-                <a:spcPts val="428"/>
+                <a:spcPts val="385"/>
               </a:spcAft>
             </a:pPr>
             <a:r>
-              <a:rPr sz="2000" i="0" b="0">
+              <a:rPr sz="1800" i="0" b="0">
                 <a:solidFill>
                   <a:srgbClr val="D4D4D4"/>
                 </a:solidFill>
                 <a:latin typeface="Consolas"/>
               </a:rPr>
-              <a:t>-- </a:t>
-            </a:r>
-            <a:r>
-              <a:rPr sz="2000" i="0" b="0">
+              <a:t>  (</a:t>
+            </a:r>
+            <a:r>
+              <a:rPr sz="1800" i="0" b="0">
+                <a:solidFill>
+                  <a:srgbClr val="B5CEA8"/>
+                </a:solidFill>
+                <a:latin typeface="Consolas"/>
+              </a:rPr>
+              <a:t>5</a:t>
+            </a:r>
+            <a:r>
+              <a:rPr sz="1800" i="0" b="0">
                 <a:solidFill>
                   <a:srgbClr val="D4D4D4"/>
                 </a:solidFill>
                 <a:latin typeface="Consolas"/>
               </a:rPr>
-              <a:t>T1</a:t>
-            </a:r>
-            <a:r>
-              <a:rPr sz="2000" i="0" b="0">
+              <a:t>, </a:t>
+            </a:r>
+            <a:r>
+              <a:rPr sz="1800" i="0" b="0">
+                <a:solidFill>
+                  <a:srgbClr val="B5CEA8"/>
+                </a:solidFill>
+                <a:latin typeface="Consolas"/>
+              </a:rPr>
+              <a:t>2</a:t>
+            </a:r>
+            <a:r>
+              <a:rPr sz="1800" i="0" b="0">
                 <a:solidFill>
                   <a:srgbClr val="D4D4D4"/>
                 </a:solidFill>
                 <a:latin typeface="Consolas"/>
               </a:rPr>
-              <a:t>: </a:t>
-            </a:r>
-            <a:r>
-              <a:rPr sz="2000" i="0" b="0">
-                <a:solidFill>
-                  <a:srgbClr val="569CD6"/>
-                </a:solidFill>
-                <a:latin typeface="Consolas"/>
-              </a:rPr>
-              <a:t>INSERT</a:t>
-            </a:r>
-            <a:r>
-              <a:rPr sz="2000" i="0" b="0">
+              <a:t>, </a:t>
+            </a:r>
+            <a:r>
+              <a:rPr sz="1800" i="0" b="0">
+                <a:solidFill>
+                  <a:srgbClr val="4EC9B0"/>
+                </a:solidFill>
+                <a:latin typeface="Consolas"/>
+              </a:rPr>
+              <a:t>TIMESTAMP</a:t>
+            </a:r>
+            <a:r>
+              <a:rPr sz="1800" i="0" b="0">
                 <a:solidFill>
                   <a:srgbClr val="D4D4D4"/>
                 </a:solidFill>
                 <a:latin typeface="Consolas"/>
               </a:rPr>
-              <a:t> ... </a:t>
-            </a:r>
-            <a:r>
-              <a:rPr sz="2000" i="0" b="0">
+              <a:t> </a:t>
+            </a:r>
+            <a:r>
+              <a:rPr sz="1800" i="0" b="0">
+                <a:solidFill>
+                  <a:srgbClr val="CE9178"/>
+                </a:solidFill>
+                <a:latin typeface="Consolas"/>
+              </a:rPr>
+              <a:t>'2026-09-15 10:00:00'</a:t>
+            </a:r>
+            <a:r>
+              <a:rPr sz="1800" i="0" b="0">
                 <a:solidFill>
                   <a:srgbClr val="D4D4D4"/>
                 </a:solidFill>
                 <a:latin typeface="Consolas"/>
               </a:rPr>
-              <a:t>ok</a:t>
-            </a:r>
-            <a:r>
-              <a:rPr sz="2000" i="0" b="0">
+              <a:t>, </a:t>
+            </a:r>
+            <a:r>
+              <a:rPr sz="1800" i="0" b="0">
+                <a:solidFill>
+                  <a:srgbClr val="CE9178"/>
+                </a:solidFill>
+                <a:latin typeface="Consolas"/>
+              </a:rPr>
+              <a:t>'PROGRAMADA'</a:t>
+            </a:r>
+            <a:r>
+              <a:rPr sz="1800" i="0" b="0">
                 <a:solidFill>
                   <a:srgbClr val="D4D4D4"/>
                 </a:solidFill>
                 <a:latin typeface="Consolas"/>
               </a:rPr>
-              <a:t>      </a:t>
-            </a:r>
-            <a:r>
-              <a:rPr sz="2000" i="0" b="0">
-                <a:solidFill>
-                  <a:srgbClr val="D4D4D4"/>
-                </a:solidFill>
-                <a:latin typeface="Consolas"/>
-              </a:rPr>
-              <a:t>T2</a:t>
-            </a:r>
-            <a:r>
-              <a:rPr sz="2000" i="0" b="0">
-                <a:solidFill>
-                  <a:srgbClr val="D4D4D4"/>
-                </a:solidFill>
-                <a:latin typeface="Consolas"/>
-              </a:rPr>
-              <a:t>: </a:t>
-            </a:r>
-            <a:r>
-              <a:rPr sz="2000" i="0" b="0">
-                <a:solidFill>
-                  <a:srgbClr val="569CD6"/>
-                </a:solidFill>
-                <a:latin typeface="Consolas"/>
-              </a:rPr>
-              <a:t>INSERT</a:t>
-            </a:r>
-            <a:r>
-              <a:rPr sz="2000" i="0" b="0">
-                <a:solidFill>
-                  <a:srgbClr val="D4D4D4"/>
-                </a:solidFill>
-                <a:latin typeface="Consolas"/>
-              </a:rPr>
-              <a:t> ... </a:t>
-            </a:r>
-            <a:r>
-              <a:rPr sz="2000" i="0" b="0">
-                <a:solidFill>
-                  <a:srgbClr val="D4D4D4"/>
-                </a:solidFill>
-                <a:latin typeface="Consolas"/>
-              </a:rPr>
-              <a:t>ok</a:t>
-            </a:r>
-            <a:r>
-              <a:rPr sz="2000" i="0" b="0">
-                <a:solidFill>
-                  <a:srgbClr val="D4D4D4"/>
-                </a:solidFill>
-                <a:latin typeface="Consolas"/>
-              </a:rPr>
-              <a:t>      -&gt; </a:t>
-            </a:r>
-            <a:r>
-              <a:rPr sz="2000" i="0" b="0">
-                <a:solidFill>
-                  <a:srgbClr val="D4D4D4"/>
-                </a:solidFill>
-                <a:latin typeface="Consolas"/>
-              </a:rPr>
-              <a:t>dos</a:t>
-            </a:r>
-            <a:r>
-              <a:rPr sz="2000" i="0" b="0">
-                <a:solidFill>
-                  <a:srgbClr val="D4D4D4"/>
-                </a:solidFill>
-                <a:latin typeface="Consolas"/>
-              </a:rPr>
-              <a:t> </a:t>
-            </a:r>
-            <a:r>
-              <a:rPr sz="2000" i="0" b="0">
-                <a:solidFill>
-                  <a:srgbClr val="D4D4D4"/>
-                </a:solidFill>
-                <a:latin typeface="Consolas"/>
-              </a:rPr>
-              <a:t>citas</a:t>
-            </a:r>
-            <a:r>
-              <a:rPr sz="2000" i="0" b="0">
-                <a:solidFill>
-                  <a:srgbClr val="D4D4D4"/>
-                </a:solidFill>
-                <a:latin typeface="Consolas"/>
-              </a:rPr>
-              <a:t> </a:t>
-            </a:r>
-            <a:r>
-              <a:rPr sz="2000" i="0" b="0">
-                <a:solidFill>
-                  <a:srgbClr val="D4D4D4"/>
-                </a:solidFill>
-                <a:latin typeface="Consolas"/>
-              </a:rPr>
-              <a:t>en</a:t>
-            </a:r>
-            <a:r>
-              <a:rPr sz="2000" i="0" b="0">
-                <a:solidFill>
-                  <a:srgbClr val="D4D4D4"/>
-                </a:solidFill>
-                <a:latin typeface="Consolas"/>
-              </a:rPr>
-              <a:t> </a:t>
-            </a:r>
-            <a:r>
-              <a:rPr sz="2000" i="0" b="0">
-                <a:solidFill>
-                  <a:srgbClr val="D4D4D4"/>
-                </a:solidFill>
-                <a:latin typeface="Consolas"/>
-              </a:rPr>
-              <a:t>la</a:t>
-            </a:r>
-            <a:r>
-              <a:rPr sz="2000" i="0" b="0">
-                <a:solidFill>
-                  <a:srgbClr val="D4D4D4"/>
-                </a:solidFill>
-                <a:latin typeface="Consolas"/>
-              </a:rPr>
-              <a:t> </a:t>
-            </a:r>
-            <a:r>
-              <a:rPr sz="2000" i="0" b="0">
-                <a:solidFill>
-                  <a:srgbClr val="D4D4D4"/>
-                </a:solidFill>
-                <a:latin typeface="Consolas"/>
-              </a:rPr>
-              <a:t>misma</a:t>
-            </a:r>
-            <a:r>
-              <a:rPr sz="2000" i="0" b="0">
-                <a:solidFill>
-                  <a:srgbClr val="D4D4D4"/>
-                </a:solidFill>
-                <a:latin typeface="Consolas"/>
-              </a:rPr>
-              <a:t> </a:t>
-            </a:r>
-            <a:r>
-              <a:rPr sz="2000" i="0" b="0">
-                <a:solidFill>
-                  <a:srgbClr val="D4D4D4"/>
-                </a:solidFill>
-                <a:latin typeface="Consolas"/>
-              </a:rPr>
-              <a:t>franja</a:t>
+              <a:t>);</a:t>
             </a:r>
           </a:p>
           <a:p>
             <a:pPr>
               <a:spcAft>
-                <a:spcPts val="428"/>
+                <a:spcPts val="385"/>
               </a:spcAft>
             </a:pPr>
             <a:r>
-              <a:rPr sz="2000" i="0" b="0">
+              <a:rPr sz="1800" i="0" b="0">
                 <a:solidFill>
                   <a:srgbClr val="D4D4D4"/>
                 </a:solidFill>
@@ -9366,52 +11054,142 @@
           <a:p>
             <a:pPr>
               <a:spcAft>
-                <a:spcPts val="428"/>
+                <a:spcPts val="385"/>
               </a:spcAft>
             </a:pPr>
             <a:r>
-              <a:rPr sz="2000" i="1" b="0">
+              <a:rPr sz="1800" i="1" b="0">
                 <a:solidFill>
                   <a:srgbClr val="6A9955"/>
                 </a:solidFill>
                 <a:latin typeface="Consolas"/>
               </a:rPr>
-              <a:t>-- Validar leyendo NO alcanza: entre el SELECT y el INSERT cabe otra sesion.</a:t>
+              <a:t>-- Deteccion: franjas con mas de una cita vigente</a:t>
             </a:r>
           </a:p>
           <a:p>
             <a:pPr>
               <a:spcAft>
-                <a:spcPts val="428"/>
+                <a:spcPts val="385"/>
               </a:spcAft>
             </a:pPr>
             <a:r>
-              <a:rPr sz="2000" i="1" b="0">
-                <a:solidFill>
-                  <a:srgbClr val="6A9955"/>
-                </a:solidFill>
-                <a:latin typeface="Consolas"/>
-              </a:rPr>
-              <a:t>-- La unica defensa que no depende del tiempo es una restriccion:</a:t>
+              <a:rPr sz="1800" i="0" b="0">
+                <a:solidFill>
+                  <a:srgbClr val="569CD6"/>
+                </a:solidFill>
+                <a:latin typeface="Consolas"/>
+              </a:rPr>
+              <a:t>SELECT</a:t>
+            </a:r>
+            <a:r>
+              <a:rPr sz="1800" i="0" b="0">
+                <a:solidFill>
+                  <a:srgbClr val="D4D4D4"/>
+                </a:solidFill>
+                <a:latin typeface="Consolas"/>
+              </a:rPr>
+              <a:t> </a:t>
+            </a:r>
+            <a:r>
+              <a:rPr sz="1800" i="0" b="0">
+                <a:solidFill>
+                  <a:srgbClr val="D4D4D4"/>
+                </a:solidFill>
+                <a:latin typeface="Consolas"/>
+              </a:rPr>
+              <a:t>id_veterinario</a:t>
+            </a:r>
+            <a:r>
+              <a:rPr sz="1800" i="0" b="0">
+                <a:solidFill>
+                  <a:srgbClr val="D4D4D4"/>
+                </a:solidFill>
+                <a:latin typeface="Consolas"/>
+              </a:rPr>
+              <a:t>, </a:t>
+            </a:r>
+            <a:r>
+              <a:rPr sz="1800" i="0" b="0">
+                <a:solidFill>
+                  <a:srgbClr val="D4D4D4"/>
+                </a:solidFill>
+                <a:latin typeface="Consolas"/>
+              </a:rPr>
+              <a:t>fecha_hora</a:t>
+            </a:r>
+            <a:r>
+              <a:rPr sz="1800" i="0" b="0">
+                <a:solidFill>
+                  <a:srgbClr val="D4D4D4"/>
+                </a:solidFill>
+                <a:latin typeface="Consolas"/>
+              </a:rPr>
+              <a:t>, </a:t>
+            </a:r>
+            <a:r>
+              <a:rPr sz="1800" i="0" b="0">
+                <a:solidFill>
+                  <a:srgbClr val="DCDCAA"/>
+                </a:solidFill>
+                <a:latin typeface="Consolas"/>
+              </a:rPr>
+              <a:t>COUNT</a:t>
+            </a:r>
+            <a:r>
+              <a:rPr sz="1800" i="0" b="0">
+                <a:solidFill>
+                  <a:srgbClr val="D4D4D4"/>
+                </a:solidFill>
+                <a:latin typeface="Consolas"/>
+              </a:rPr>
+              <a:t>(*) </a:t>
+            </a:r>
+            <a:r>
+              <a:rPr sz="1800" i="0" b="0">
+                <a:solidFill>
+                  <a:srgbClr val="569CD6"/>
+                </a:solidFill>
+                <a:latin typeface="Consolas"/>
+              </a:rPr>
+              <a:t>AS</a:t>
+            </a:r>
+            <a:r>
+              <a:rPr sz="1800" i="0" b="0">
+                <a:solidFill>
+                  <a:srgbClr val="D4D4D4"/>
+                </a:solidFill>
+                <a:latin typeface="Consolas"/>
+              </a:rPr>
+              <a:t> </a:t>
+            </a:r>
+            <a:r>
+              <a:rPr sz="1800" i="0" b="0">
+                <a:solidFill>
+                  <a:srgbClr val="D4D4D4"/>
+                </a:solidFill>
+                <a:latin typeface="Consolas"/>
+              </a:rPr>
+              <a:t>citas</a:t>
             </a:r>
           </a:p>
           <a:p>
             <a:pPr>
               <a:spcAft>
-                <a:spcPts val="428"/>
+                <a:spcPts val="385"/>
               </a:spcAft>
             </a:pPr>
             <a:r>
-              <a:rPr sz="2000" i="0" b="0">
+              <a:rPr sz="1800" i="0" b="0">
                 <a:solidFill>
                   <a:srgbClr val="569CD6"/>
                 </a:solidFill>
                 <a:latin typeface="Consolas"/>
               </a:rPr>
-              <a:t>ALTER</a:t>
-            </a:r>
-            <a:r>
-              <a:rPr sz="2000" i="0" b="0">
+              <a:t>FROM</a:t>
+            </a:r>
+            <a:r>
+              <a:rPr sz="1800" i="0" b="0">
                 <a:solidFill>
                   <a:srgbClr val="D4D4D4"/>
                 </a:solidFill>
@@ -9420,25 +11198,7 @@
               <a:t> </a:t>
             </a:r>
             <a:r>
-              <a:rPr sz="2000" i="0" b="0">
-                <a:solidFill>
-                  <a:srgbClr val="569CD6"/>
-                </a:solidFill>
-                <a:latin typeface="Consolas"/>
-              </a:rPr>
-              <a:t>TABLE</a:t>
-            </a:r>
-            <a:r>
-              <a:rPr sz="2000" i="0" b="0">
-                <a:solidFill>
-                  <a:srgbClr val="D4D4D4"/>
-                </a:solidFill>
-                <a:latin typeface="Consolas"/>
-              </a:rPr>
-              <a:t> </a:t>
-            </a:r>
-            <a:r>
-              <a:rPr sz="2000" i="0" b="0">
+              <a:rPr sz="1800" i="0" b="0">
                 <a:solidFill>
                   <a:srgbClr val="D4D4D4"/>
                 </a:solidFill>
@@ -9450,148 +11210,419 @@
           <a:p>
             <a:pPr>
               <a:spcAft>
-                <a:spcPts val="428"/>
+                <a:spcPts val="385"/>
               </a:spcAft>
             </a:pPr>
             <a:r>
-              <a:rPr sz="2000" i="0" b="0">
+              <a:rPr sz="1800" i="0" b="0">
+                <a:solidFill>
+                  <a:srgbClr val="569CD6"/>
+                </a:solidFill>
+                <a:latin typeface="Consolas"/>
+              </a:rPr>
+              <a:t>WHERE</a:t>
+            </a:r>
+            <a:r>
+              <a:rPr sz="1800" i="0" b="0">
                 <a:solidFill>
                   <a:srgbClr val="D4D4D4"/>
                 </a:solidFill>
                 <a:latin typeface="Consolas"/>
               </a:rPr>
-              <a:t>  </a:t>
-            </a:r>
-            <a:r>
-              <a:rPr sz="2000" i="0" b="0">
-                <a:solidFill>
-                  <a:srgbClr val="569CD6"/>
-                </a:solidFill>
-                <a:latin typeface="Consolas"/>
-              </a:rPr>
-              <a:t>ADD</a:t>
-            </a:r>
-            <a:r>
-              <a:rPr sz="2000" i="0" b="0">
+              <a:t> </a:t>
+            </a:r>
+            <a:r>
+              <a:rPr sz="1800" i="0" b="0">
                 <a:solidFill>
                   <a:srgbClr val="D4D4D4"/>
                 </a:solidFill>
                 <a:latin typeface="Consolas"/>
               </a:rPr>
-              <a:t> </a:t>
-            </a:r>
-            <a:r>
-              <a:rPr sz="2000" i="0" b="0">
-                <a:solidFill>
-                  <a:srgbClr val="569CD6"/>
-                </a:solidFill>
-                <a:latin typeface="Consolas"/>
-              </a:rPr>
-              <a:t>CONSTRAINT</a:t>
-            </a:r>
-            <a:r>
-              <a:rPr sz="2000" i="0" b="0">
+              <a:t>estado</a:t>
+            </a:r>
+            <a:r>
+              <a:rPr sz="1800" i="0" b="0">
                 <a:solidFill>
                   <a:srgbClr val="D4D4D4"/>
                 </a:solidFill>
                 <a:latin typeface="Consolas"/>
               </a:rPr>
-              <a:t> </a:t>
-            </a:r>
-            <a:r>
-              <a:rPr sz="2000" i="0" b="0">
-                <a:solidFill>
-                  <a:srgbClr val="D4D4D4"/>
-                </a:solidFill>
-                <a:latin typeface="Consolas"/>
-              </a:rPr>
-              <a:t>uq_cita_vet_franja</a:t>
-            </a:r>
-            <a:r>
-              <a:rPr sz="2000" i="0" b="0">
-                <a:solidFill>
-                  <a:srgbClr val="D4D4D4"/>
-                </a:solidFill>
-                <a:latin typeface="Consolas"/>
-              </a:rPr>
-              <a:t> </a:t>
-            </a:r>
-            <a:r>
-              <a:rPr sz="2000" i="0" b="0">
-                <a:solidFill>
-                  <a:srgbClr val="569CD6"/>
-                </a:solidFill>
-                <a:latin typeface="Consolas"/>
-              </a:rPr>
-              <a:t>UNIQUE</a:t>
-            </a:r>
-            <a:r>
-              <a:rPr sz="2000" i="0" b="0">
-                <a:solidFill>
-                  <a:srgbClr val="D4D4D4"/>
-                </a:solidFill>
-                <a:latin typeface="Consolas"/>
-              </a:rPr>
-              <a:t> (</a:t>
-            </a:r>
-            <a:r>
-              <a:rPr sz="2000" i="0" b="0">
-                <a:solidFill>
-                  <a:srgbClr val="D4D4D4"/>
-                </a:solidFill>
-                <a:latin typeface="Consolas"/>
-              </a:rPr>
-              <a:t>id_veterinario</a:t>
-            </a:r>
-            <a:r>
-              <a:rPr sz="2000" i="0" b="0">
-                <a:solidFill>
-                  <a:srgbClr val="D4D4D4"/>
-                </a:solidFill>
-                <a:latin typeface="Consolas"/>
-              </a:rPr>
-              <a:t>, </a:t>
-            </a:r>
-            <a:r>
-              <a:rPr sz="2000" i="0" b="0">
-                <a:solidFill>
-                  <a:srgbClr val="D4D4D4"/>
-                </a:solidFill>
-                <a:latin typeface="Consolas"/>
-              </a:rPr>
-              <a:t>fecha_hora</a:t>
-            </a:r>
-            <a:r>
-              <a:rPr sz="2000" i="0" b="0">
-                <a:solidFill>
-                  <a:srgbClr val="D4D4D4"/>
-                </a:solidFill>
-                <a:latin typeface="Consolas"/>
-              </a:rPr>
-              <a:t>);</a:t>
+              <a:t> &lt;&gt; </a:t>
+            </a:r>
+            <a:r>
+              <a:rPr sz="1800" i="0" b="0">
+                <a:solidFill>
+                  <a:srgbClr val="CE9178"/>
+                </a:solidFill>
+                <a:latin typeface="Consolas"/>
+              </a:rPr>
+              <a:t>'CANCELADA'</a:t>
             </a:r>
           </a:p>
           <a:p>
             <a:pPr>
               <a:spcAft>
-                <a:spcPts val="428"/>
+                <a:spcPts val="385"/>
               </a:spcAft>
             </a:pPr>
             <a:r>
-              <a:rPr sz="2000" i="1" b="0">
+              <a:rPr sz="1800" i="0" b="0">
+                <a:solidFill>
+                  <a:srgbClr val="569CD6"/>
+                </a:solidFill>
+                <a:latin typeface="Consolas"/>
+              </a:rPr>
+              <a:t>GROUP</a:t>
+            </a:r>
+            <a:r>
+              <a:rPr sz="1800" i="0" b="0">
+                <a:solidFill>
+                  <a:srgbClr val="D4D4D4"/>
+                </a:solidFill>
+                <a:latin typeface="Consolas"/>
+              </a:rPr>
+              <a:t> </a:t>
+            </a:r>
+            <a:r>
+              <a:rPr sz="1800" i="0" b="0">
+                <a:solidFill>
+                  <a:srgbClr val="569CD6"/>
+                </a:solidFill>
+                <a:latin typeface="Consolas"/>
+              </a:rPr>
+              <a:t>BY</a:t>
+            </a:r>
+            <a:r>
+              <a:rPr sz="1800" i="0" b="0">
+                <a:solidFill>
+                  <a:srgbClr val="D4D4D4"/>
+                </a:solidFill>
+                <a:latin typeface="Consolas"/>
+              </a:rPr>
+              <a:t> </a:t>
+            </a:r>
+            <a:r>
+              <a:rPr sz="1800" i="0" b="0">
+                <a:solidFill>
+                  <a:srgbClr val="D4D4D4"/>
+                </a:solidFill>
+                <a:latin typeface="Consolas"/>
+              </a:rPr>
+              <a:t>id_veterinario</a:t>
+            </a:r>
+            <a:r>
+              <a:rPr sz="1800" i="0" b="0">
+                <a:solidFill>
+                  <a:srgbClr val="D4D4D4"/>
+                </a:solidFill>
+                <a:latin typeface="Consolas"/>
+              </a:rPr>
+              <a:t>, </a:t>
+            </a:r>
+            <a:r>
+              <a:rPr sz="1800" i="0" b="0">
+                <a:solidFill>
+                  <a:srgbClr val="D4D4D4"/>
+                </a:solidFill>
+                <a:latin typeface="Consolas"/>
+              </a:rPr>
+              <a:t>fecha_hora</a:t>
+            </a:r>
+          </a:p>
+          <a:p>
+            <a:pPr>
+              <a:spcAft>
+                <a:spcPts val="385"/>
+              </a:spcAft>
+            </a:pPr>
+            <a:r>
+              <a:rPr sz="1800" i="0" b="0">
+                <a:solidFill>
+                  <a:srgbClr val="569CD6"/>
+                </a:solidFill>
+                <a:latin typeface="Consolas"/>
+              </a:rPr>
+              <a:t>HAVING</a:t>
+            </a:r>
+            <a:r>
+              <a:rPr sz="1800" i="0" b="0">
+                <a:solidFill>
+                  <a:srgbClr val="D4D4D4"/>
+                </a:solidFill>
+                <a:latin typeface="Consolas"/>
+              </a:rPr>
+              <a:t> </a:t>
+            </a:r>
+            <a:r>
+              <a:rPr sz="1800" i="0" b="0">
+                <a:solidFill>
+                  <a:srgbClr val="DCDCAA"/>
+                </a:solidFill>
+                <a:latin typeface="Consolas"/>
+              </a:rPr>
+              <a:t>COUNT</a:t>
+            </a:r>
+            <a:r>
+              <a:rPr sz="1800" i="0" b="0">
+                <a:solidFill>
+                  <a:srgbClr val="D4D4D4"/>
+                </a:solidFill>
+                <a:latin typeface="Consolas"/>
+              </a:rPr>
+              <a:t>(*) &gt; </a:t>
+            </a:r>
+            <a:r>
+              <a:rPr sz="1800" i="0" b="0">
+                <a:solidFill>
+                  <a:srgbClr val="B5CEA8"/>
+                </a:solidFill>
+                <a:latin typeface="Consolas"/>
+              </a:rPr>
+              <a:t>1</a:t>
+            </a:r>
+            <a:r>
+              <a:rPr sz="1800" i="0" b="0">
+                <a:solidFill>
+                  <a:srgbClr val="D4D4D4"/>
+                </a:solidFill>
+                <a:latin typeface="Consolas"/>
+              </a:rPr>
+              <a:t>;      </a:t>
+            </a:r>
+            <a:r>
+              <a:rPr sz="1800" i="1" b="0">
                 <a:solidFill>
                   <a:srgbClr val="6A9955"/>
                 </a:solidFill>
                 <a:latin typeface="Consolas"/>
               </a:rPr>
-              <a:t>-- Ahora el segundo INSERT falla, sin importar el orden ni la velocidad.</a:t>
-            </a:r>
-          </a:p>
-        </p:txBody>
-      </p:sp>
-      <p:sp>
-        <p:nvSpPr>
-          <p:cNvPr id="12" name="TextBox 11"/>
+              <a:t>-- 1 fila: veterinario 2, 2026-09-15 10:00, 2 citas</a:t>
+            </a:r>
+          </a:p>
+          <a:p>
+            <a:pPr>
+              <a:spcAft>
+                <a:spcPts val="385"/>
+              </a:spcAft>
+            </a:pPr>
+            <a:r>
+              <a:rPr sz="1800" i="0" b="0">
+                <a:solidFill>
+                  <a:srgbClr val="D4D4D4"/>
+                </a:solidFill>
+                <a:latin typeface="Consolas"/>
+              </a:rPr>
+              <a:t/>
+            </a:r>
+          </a:p>
+          <a:p>
+            <a:pPr>
+              <a:spcAft>
+                <a:spcPts val="385"/>
+              </a:spcAft>
+            </a:pPr>
+            <a:r>
+              <a:rPr sz="1800" i="1" b="0">
+                <a:solidFill>
+                  <a:srgbClr val="6A9955"/>
+                </a:solidFill>
+                <a:latin typeface="Consolas"/>
+              </a:rPr>
+              <a:t>-- Antes de crear el indice unico se borra el duplicado: con el, no se crea</a:t>
+            </a:r>
+          </a:p>
+          <a:p>
+            <a:pPr>
+              <a:spcAft>
+                <a:spcPts val="385"/>
+              </a:spcAft>
+            </a:pPr>
+            <a:r>
+              <a:rPr sz="1800" i="0" b="0">
+                <a:solidFill>
+                  <a:srgbClr val="569CD6"/>
+                </a:solidFill>
+                <a:latin typeface="Consolas"/>
+              </a:rPr>
+              <a:t>DELETE</a:t>
+            </a:r>
+            <a:r>
+              <a:rPr sz="1800" i="0" b="0">
+                <a:solidFill>
+                  <a:srgbClr val="D4D4D4"/>
+                </a:solidFill>
+                <a:latin typeface="Consolas"/>
+              </a:rPr>
+              <a:t> </a:t>
+            </a:r>
+            <a:r>
+              <a:rPr sz="1800" i="0" b="0">
+                <a:solidFill>
+                  <a:srgbClr val="569CD6"/>
+                </a:solidFill>
+                <a:latin typeface="Consolas"/>
+              </a:rPr>
+              <a:t>FROM</a:t>
+            </a:r>
+            <a:r>
+              <a:rPr sz="1800" i="0" b="0">
+                <a:solidFill>
+                  <a:srgbClr val="D4D4D4"/>
+                </a:solidFill>
+                <a:latin typeface="Consolas"/>
+              </a:rPr>
+              <a:t> </a:t>
+            </a:r>
+            <a:r>
+              <a:rPr sz="1800" i="0" b="0">
+                <a:solidFill>
+                  <a:srgbClr val="D4D4D4"/>
+                </a:solidFill>
+                <a:latin typeface="Consolas"/>
+              </a:rPr>
+              <a:t>cita</a:t>
+            </a:r>
+            <a:r>
+              <a:rPr sz="1800" i="0" b="0">
+                <a:solidFill>
+                  <a:srgbClr val="D4D4D4"/>
+                </a:solidFill>
+                <a:latin typeface="Consolas"/>
+              </a:rPr>
+              <a:t> </a:t>
+            </a:r>
+            <a:r>
+              <a:rPr sz="1800" i="0" b="0">
+                <a:solidFill>
+                  <a:srgbClr val="569CD6"/>
+                </a:solidFill>
+                <a:latin typeface="Consolas"/>
+              </a:rPr>
+              <a:t>WHERE</a:t>
+            </a:r>
+            <a:r>
+              <a:rPr sz="1800" i="0" b="0">
+                <a:solidFill>
+                  <a:srgbClr val="D4D4D4"/>
+                </a:solidFill>
+                <a:latin typeface="Consolas"/>
+              </a:rPr>
+              <a:t> </a:t>
+            </a:r>
+            <a:r>
+              <a:rPr sz="1800" i="0" b="0">
+                <a:solidFill>
+                  <a:srgbClr val="D4D4D4"/>
+                </a:solidFill>
+                <a:latin typeface="Consolas"/>
+              </a:rPr>
+              <a:t>id_cita</a:t>
+            </a:r>
+            <a:r>
+              <a:rPr sz="1800" i="0" b="0">
+                <a:solidFill>
+                  <a:srgbClr val="D4D4D4"/>
+                </a:solidFill>
+                <a:latin typeface="Consolas"/>
+              </a:rPr>
+              <a:t> = (</a:t>
+            </a:r>
+            <a:r>
+              <a:rPr sz="1800" i="0" b="0">
+                <a:solidFill>
+                  <a:srgbClr val="569CD6"/>
+                </a:solidFill>
+                <a:latin typeface="Consolas"/>
+              </a:rPr>
+              <a:t>SELECT</a:t>
+            </a:r>
+            <a:r>
+              <a:rPr sz="1800" i="0" b="0">
+                <a:solidFill>
+                  <a:srgbClr val="D4D4D4"/>
+                </a:solidFill>
+                <a:latin typeface="Consolas"/>
+              </a:rPr>
+              <a:t> </a:t>
+            </a:r>
+            <a:r>
+              <a:rPr sz="1800" i="0" b="0">
+                <a:solidFill>
+                  <a:srgbClr val="DCDCAA"/>
+                </a:solidFill>
+                <a:latin typeface="Consolas"/>
+              </a:rPr>
+              <a:t>MAX</a:t>
+            </a:r>
+            <a:r>
+              <a:rPr sz="1800" i="0" b="0">
+                <a:solidFill>
+                  <a:srgbClr val="D4D4D4"/>
+                </a:solidFill>
+                <a:latin typeface="Consolas"/>
+              </a:rPr>
+              <a:t>(</a:t>
+            </a:r>
+            <a:r>
+              <a:rPr sz="1800" i="0" b="0">
+                <a:solidFill>
+                  <a:srgbClr val="D4D4D4"/>
+                </a:solidFill>
+                <a:latin typeface="Consolas"/>
+              </a:rPr>
+              <a:t>id_cita</a:t>
+            </a:r>
+            <a:r>
+              <a:rPr sz="1800" i="0" b="0">
+                <a:solidFill>
+                  <a:srgbClr val="D4D4D4"/>
+                </a:solidFill>
+                <a:latin typeface="Consolas"/>
+              </a:rPr>
+              <a:t>) </a:t>
+            </a:r>
+            <a:r>
+              <a:rPr sz="1800" i="0" b="0">
+                <a:solidFill>
+                  <a:srgbClr val="569CD6"/>
+                </a:solidFill>
+                <a:latin typeface="Consolas"/>
+              </a:rPr>
+              <a:t>FROM</a:t>
+            </a:r>
+            <a:r>
+              <a:rPr sz="1800" i="0" b="0">
+                <a:solidFill>
+                  <a:srgbClr val="D4D4D4"/>
+                </a:solidFill>
+                <a:latin typeface="Consolas"/>
+              </a:rPr>
+              <a:t> </a:t>
+            </a:r>
+            <a:r>
+              <a:rPr sz="1800" i="0" b="0">
+                <a:solidFill>
+                  <a:srgbClr val="D4D4D4"/>
+                </a:solidFill>
+                <a:latin typeface="Consolas"/>
+              </a:rPr>
+              <a:t>cita</a:t>
+            </a:r>
+            <a:r>
+              <a:rPr sz="1800" i="0" b="0">
+                <a:solidFill>
+                  <a:srgbClr val="D4D4D4"/>
+                </a:solidFill>
+                <a:latin typeface="Consolas"/>
+              </a:rPr>
+              <a:t>);</a:t>
+            </a:r>
+          </a:p>
+        </p:txBody>
+      </p:sp>
+      <p:sp>
+        <p:nvSpPr>
+          <p:cNvPr id="13" name="TextBox 12"/>
           <p:cNvSpPr txBox="1"/>
           <p:nvPr/>
         </p:nvSpPr>
@@ -9765,7 +11796,7 @@
                 </a:solidFill>
                 <a:latin typeface="Calibri"/>
               </a:rPr>
-              <a:t>La restriccion que hace imposible la doble reserva</a:t>
+              <a:t>El indice unico parcial que hace imposible la doble reserva</a:t>
             </a:r>
           </a:p>
         </p:txBody>
@@ -9779,7 +11810,7 @@
         <p:spPr>
           <a:xfrm>
             <a:off x="457200" y="1261872"/>
-            <a:ext cx="11277295" cy="3872567"/>
+            <a:ext cx="11277295" cy="4745196"/>
           </a:xfrm>
           <a:prstGeom prst="roundRect">
             <a:avLst>
@@ -10029,7 +12060,7 @@
         <p:spPr>
           <a:xfrm>
             <a:off x="685800" y="1719072"/>
-            <a:ext cx="502920" cy="3278207"/>
+            <a:ext cx="502920" cy="4150836"/>
           </a:xfrm>
           <a:prstGeom prst="rect">
             <a:avLst/>
@@ -10044,11 +12075,11 @@
           <a:p>
             <a:pPr algn="r">
               <a:spcAft>
-                <a:spcPts val="428"/>
+                <a:spcPts val="342"/>
               </a:spcAft>
             </a:pPr>
             <a:r>
-              <a:rPr sz="2000" i="0" b="0">
+              <a:rPr sz="1600" i="0" b="0">
                 <a:solidFill>
                   <a:srgbClr val="858585"/>
                 </a:solidFill>
@@ -10060,11 +12091,11 @@
           <a:p>
             <a:pPr algn="r">
               <a:spcAft>
-                <a:spcPts val="428"/>
+                <a:spcPts val="342"/>
               </a:spcAft>
             </a:pPr>
             <a:r>
-              <a:rPr sz="2000" i="0" b="0">
+              <a:rPr sz="1600" i="0" b="0">
                 <a:solidFill>
                   <a:srgbClr val="858585"/>
                 </a:solidFill>
@@ -10076,11 +12107,11 @@
           <a:p>
             <a:pPr algn="r">
               <a:spcAft>
-                <a:spcPts val="428"/>
+                <a:spcPts val="342"/>
               </a:spcAft>
             </a:pPr>
             <a:r>
-              <a:rPr sz="2000" i="0" b="0">
+              <a:rPr sz="1600" i="0" b="0">
                 <a:solidFill>
                   <a:srgbClr val="858585"/>
                 </a:solidFill>
@@ -10092,11 +12123,11 @@
           <a:p>
             <a:pPr algn="r">
               <a:spcAft>
-                <a:spcPts val="428"/>
+                <a:spcPts val="342"/>
               </a:spcAft>
             </a:pPr>
             <a:r>
-              <a:rPr sz="2000" i="0" b="0">
+              <a:rPr sz="1600" i="0" b="0">
                 <a:solidFill>
                   <a:srgbClr val="858585"/>
                 </a:solidFill>
@@ -10108,11 +12139,11 @@
           <a:p>
             <a:pPr algn="r">
               <a:spcAft>
-                <a:spcPts val="428"/>
+                <a:spcPts val="342"/>
               </a:spcAft>
             </a:pPr>
             <a:r>
-              <a:rPr sz="2000" i="0" b="0">
+              <a:rPr sz="1600" i="0" b="0">
                 <a:solidFill>
                   <a:srgbClr val="858585"/>
                 </a:solidFill>
@@ -10124,11 +12155,11 @@
           <a:p>
             <a:pPr algn="r">
               <a:spcAft>
-                <a:spcPts val="428"/>
+                <a:spcPts val="342"/>
               </a:spcAft>
             </a:pPr>
             <a:r>
-              <a:rPr sz="2000" i="0" b="0">
+              <a:rPr sz="1600" i="0" b="0">
                 <a:solidFill>
                   <a:srgbClr val="858585"/>
                 </a:solidFill>
@@ -10140,11 +12171,11 @@
           <a:p>
             <a:pPr algn="r">
               <a:spcAft>
-                <a:spcPts val="428"/>
+                <a:spcPts val="342"/>
               </a:spcAft>
             </a:pPr>
             <a:r>
-              <a:rPr sz="2000" i="0" b="0">
+              <a:rPr sz="1600" i="0" b="0">
                 <a:solidFill>
                   <a:srgbClr val="858585"/>
                 </a:solidFill>
@@ -10156,11 +12187,11 @@
           <a:p>
             <a:pPr algn="r">
               <a:spcAft>
-                <a:spcPts val="428"/>
+                <a:spcPts val="342"/>
               </a:spcAft>
             </a:pPr>
             <a:r>
-              <a:rPr sz="2000" i="0" b="0">
+              <a:rPr sz="1600" i="0" b="0">
                 <a:solidFill>
                   <a:srgbClr val="858585"/>
                 </a:solidFill>
@@ -10172,17 +12203,97 @@
           <a:p>
             <a:pPr algn="r">
               <a:spcAft>
-                <a:spcPts val="428"/>
+                <a:spcPts val="342"/>
               </a:spcAft>
             </a:pPr>
             <a:r>
-              <a:rPr sz="2000" i="0" b="0">
+              <a:rPr sz="1600" i="0" b="0">
                 <a:solidFill>
                   <a:srgbClr val="858585"/>
                 </a:solidFill>
                 <a:latin typeface="Consolas"/>
               </a:rPr>
               <a:t>9</a:t>
+            </a:r>
+          </a:p>
+          <a:p>
+            <a:pPr algn="r">
+              <a:spcAft>
+                <a:spcPts val="342"/>
+              </a:spcAft>
+            </a:pPr>
+            <a:r>
+              <a:rPr sz="1600" i="0" b="0">
+                <a:solidFill>
+                  <a:srgbClr val="858585"/>
+                </a:solidFill>
+                <a:latin typeface="Consolas"/>
+              </a:rPr>
+              <a:t>10</a:t>
+            </a:r>
+          </a:p>
+          <a:p>
+            <a:pPr algn="r">
+              <a:spcAft>
+                <a:spcPts val="342"/>
+              </a:spcAft>
+            </a:pPr>
+            <a:r>
+              <a:rPr sz="1600" i="0" b="0">
+                <a:solidFill>
+                  <a:srgbClr val="858585"/>
+                </a:solidFill>
+                <a:latin typeface="Consolas"/>
+              </a:rPr>
+              <a:t>11</a:t>
+            </a:r>
+          </a:p>
+          <a:p>
+            <a:pPr algn="r">
+              <a:spcAft>
+                <a:spcPts val="342"/>
+              </a:spcAft>
+            </a:pPr>
+            <a:r>
+              <a:rPr sz="1600" i="0" b="0">
+                <a:solidFill>
+                  <a:srgbClr val="858585"/>
+                </a:solidFill>
+                <a:latin typeface="Consolas"/>
+              </a:rPr>
+              <a:t>12</a:t>
+            </a:r>
+          </a:p>
+          <a:p>
+            <a:pPr algn="r">
+              <a:spcAft>
+                <a:spcPts val="342"/>
+              </a:spcAft>
+            </a:pPr>
+            <a:r>
+              <a:rPr sz="1600" i="0" b="0">
+                <a:solidFill>
+                  <a:srgbClr val="858585"/>
+                </a:solidFill>
+                <a:latin typeface="Consolas"/>
+              </a:rPr>
+              <a:t>13</a:t>
+            </a:r>
+          </a:p>
+          <a:p>
+            <a:pPr algn="r">
+              <a:spcAft>
+                <a:spcPts val="342"/>
+              </a:spcAft>
+            </a:pPr>
+            <a:r>
+              <a:rPr sz="1600" i="0" b="0">
+                <a:solidFill>
+                  <a:srgbClr val="858585"/>
+                </a:solidFill>
+                <a:latin typeface="Consolas"/>
+              </a:rPr>
+              <a:t>14</a:t>
             </a:r>
           </a:p>
         </p:txBody>
@@ -10196,7 +12307,7 @@
         <p:spPr>
           <a:xfrm>
             <a:off x="1188720" y="1719072"/>
-            <a:ext cx="10271455" cy="3278207"/>
+            <a:ext cx="10271455" cy="4150836"/>
           </a:xfrm>
           <a:prstGeom prst="rect">
             <a:avLst/>
@@ -10211,81 +12322,54 @@
           <a:p>
             <a:pPr>
               <a:spcAft>
-                <a:spcPts val="428"/>
+                <a:spcPts val="342"/>
               </a:spcAft>
             </a:pPr>
             <a:r>
-              <a:rPr sz="2000" i="0" b="0">
-                <a:solidFill>
-                  <a:srgbClr val="569CD6"/>
-                </a:solidFill>
-                <a:latin typeface="Consolas"/>
-              </a:rPr>
-              <a:t>ALTER</a:t>
-            </a:r>
-            <a:r>
-              <a:rPr sz="2000" i="0" b="0">
-                <a:solidFill>
-                  <a:srgbClr val="D4D4D4"/>
-                </a:solidFill>
-                <a:latin typeface="Consolas"/>
-              </a:rPr>
-              <a:t> </a:t>
-            </a:r>
-            <a:r>
-              <a:rPr sz="2000" i="0" b="0">
-                <a:solidFill>
-                  <a:srgbClr val="569CD6"/>
-                </a:solidFill>
-                <a:latin typeface="Consolas"/>
-              </a:rPr>
-              <a:t>TABLE</a:t>
-            </a:r>
-            <a:r>
-              <a:rPr sz="2000" i="0" b="0">
-                <a:solidFill>
-                  <a:srgbClr val="D4D4D4"/>
-                </a:solidFill>
-                <a:latin typeface="Consolas"/>
-              </a:rPr>
-              <a:t> </a:t>
-            </a:r>
-            <a:r>
-              <a:rPr sz="2000" i="0" b="0">
-                <a:solidFill>
-                  <a:srgbClr val="D4D4D4"/>
-                </a:solidFill>
-                <a:latin typeface="Consolas"/>
-              </a:rPr>
-              <a:t>cita</a:t>
+              <a:rPr sz="1600" i="1" b="0">
+                <a:solidFill>
+                  <a:srgbClr val="6A9955"/>
+                </a:solidFill>
+                <a:latin typeface="Consolas"/>
+              </a:rPr>
+              <a:t>-- Solo citas vigentes: una CANCELADA libera su franja</a:t>
             </a:r>
           </a:p>
           <a:p>
             <a:pPr>
               <a:spcAft>
-                <a:spcPts val="428"/>
+                <a:spcPts val="342"/>
               </a:spcAft>
             </a:pPr>
             <a:r>
-              <a:rPr sz="2000" i="0" b="0">
+              <a:rPr sz="1600" i="0" b="0">
+                <a:solidFill>
+                  <a:srgbClr val="569CD6"/>
+                </a:solidFill>
+                <a:latin typeface="Consolas"/>
+              </a:rPr>
+              <a:t>CREATE</a:t>
+            </a:r>
+            <a:r>
+              <a:rPr sz="1600" i="0" b="0">
                 <a:solidFill>
                   <a:srgbClr val="D4D4D4"/>
                 </a:solidFill>
                 <a:latin typeface="Consolas"/>
               </a:rPr>
-              <a:t>  </a:t>
-            </a:r>
-            <a:r>
-              <a:rPr sz="2000" i="0" b="0">
+              <a:t> </a:t>
+            </a:r>
+            <a:r>
+              <a:rPr sz="1600" i="0" b="0">
                 <a:solidFill>
                   <a:srgbClr val="569CD6"/>
                 </a:solidFill>
                 <a:latin typeface="Consolas"/>
               </a:rPr>
-              <a:t>ADD</a:t>
-            </a:r>
-            <a:r>
-              <a:rPr sz="2000" i="0" b="0">
+              <a:t>UNIQUE</a:t>
+            </a:r>
+            <a:r>
+              <a:rPr sz="1600" i="0" b="0">
                 <a:solidFill>
                   <a:srgbClr val="D4D4D4"/>
                 </a:solidFill>
@@ -10294,16 +12378,16 @@
               <a:t> </a:t>
             </a:r>
             <a:r>
-              <a:rPr sz="2000" i="0" b="0">
+              <a:rPr sz="1600" i="0" b="0">
                 <a:solidFill>
                   <a:srgbClr val="569CD6"/>
                 </a:solidFill>
                 <a:latin typeface="Consolas"/>
               </a:rPr>
-              <a:t>CONSTRAINT</a:t>
-            </a:r>
-            <a:r>
-              <a:rPr sz="2000" i="0" b="0">
+              <a:t>INDEX</a:t>
+            </a:r>
+            <a:r>
+              <a:rPr sz="1600" i="0" b="0">
                 <a:solidFill>
                   <a:srgbClr val="D4D4D4"/>
                 </a:solidFill>
@@ -10312,7 +12396,7 @@
               <a:t> </a:t>
             </a:r>
             <a:r>
-              <a:rPr sz="2000" i="0" b="0">
+              <a:rPr sz="1600" i="0" b="0">
                 <a:solidFill>
                   <a:srgbClr val="D4D4D4"/>
                 </a:solidFill>
@@ -10324,11 +12408,11 @@
           <a:p>
             <a:pPr>
               <a:spcAft>
-                <a:spcPts val="428"/>
+                <a:spcPts val="342"/>
               </a:spcAft>
             </a:pPr>
             <a:r>
-              <a:rPr sz="2000" i="0" b="0">
+              <a:rPr sz="1600" i="0" b="0">
                 <a:solidFill>
                   <a:srgbClr val="D4D4D4"/>
                 </a:solidFill>
@@ -10337,25 +12421,43 @@
               <a:t>  </a:t>
             </a:r>
             <a:r>
-              <a:rPr sz="2000" i="0" b="0">
+              <a:rPr sz="1600" i="0" b="0">
                 <a:solidFill>
                   <a:srgbClr val="569CD6"/>
                 </a:solidFill>
                 <a:latin typeface="Consolas"/>
               </a:rPr>
-              <a:t>UNIQUE</a:t>
-            </a:r>
-            <a:r>
-              <a:rPr sz="2000" i="0" b="0">
+              <a:t>ON</a:t>
+            </a:r>
+            <a:r>
+              <a:rPr sz="1600" i="0" b="0">
                 <a:solidFill>
                   <a:srgbClr val="D4D4D4"/>
                 </a:solidFill>
                 <a:latin typeface="Consolas"/>
               </a:rPr>
+              <a:t> </a:t>
+            </a:r>
+            <a:r>
+              <a:rPr sz="1600" i="0" b="0">
+                <a:solidFill>
+                  <a:srgbClr val="DCDCAA"/>
+                </a:solidFill>
+                <a:latin typeface="Consolas"/>
+              </a:rPr>
+              <a:t>cita</a:t>
+            </a:r>
+            <a:r>
+              <a:rPr sz="1600" i="0" b="0">
+                <a:solidFill>
+                  <a:srgbClr val="D4D4D4"/>
+                </a:solidFill>
+                <a:latin typeface="Consolas"/>
+              </a:rPr>
               <a:t> (</a:t>
             </a:r>
             <a:r>
-              <a:rPr sz="2000" i="0" b="0">
+              <a:rPr sz="1600" i="0" b="0">
                 <a:solidFill>
                   <a:srgbClr val="D4D4D4"/>
                 </a:solidFill>
@@ -10364,7 +12466,7 @@
               <a:t>id_veterinario</a:t>
             </a:r>
             <a:r>
-              <a:rPr sz="2000" i="0" b="0">
+              <a:rPr sz="1600" i="0" b="0">
                 <a:solidFill>
                   <a:srgbClr val="D4D4D4"/>
                 </a:solidFill>
@@ -10373,7 +12475,7 @@
               <a:t>, </a:t>
             </a:r>
             <a:r>
-              <a:rPr sz="2000" i="0" b="0">
+              <a:rPr sz="1600" i="0" b="0">
                 <a:solidFill>
                   <a:srgbClr val="D4D4D4"/>
                 </a:solidFill>
@@ -10382,269 +12484,224 @@
               <a:t>fecha_hora</a:t>
             </a:r>
             <a:r>
-              <a:rPr sz="2000" i="0" b="0">
+              <a:rPr sz="1600" i="0" b="0">
                 <a:solidFill>
                   <a:srgbClr val="D4D4D4"/>
                 </a:solidFill>
                 <a:latin typeface="Consolas"/>
               </a:rPr>
-              <a:t>);</a:t>
+              <a:t>)</a:t>
             </a:r>
           </a:p>
           <a:p>
             <a:pPr>
               <a:spcAft>
-                <a:spcPts val="428"/>
+                <a:spcPts val="342"/>
               </a:spcAft>
             </a:pPr>
             <a:r>
-              <a:rPr sz="2000" i="0" b="0">
+              <a:rPr sz="1600" i="0" b="0">
                 <a:solidFill>
                   <a:srgbClr val="D4D4D4"/>
                 </a:solidFill>
                 <a:latin typeface="Consolas"/>
               </a:rPr>
-              <a:t/>
+              <a:t>  </a:t>
+            </a:r>
+            <a:r>
+              <a:rPr sz="1600" i="0" b="0">
+                <a:solidFill>
+                  <a:srgbClr val="569CD6"/>
+                </a:solidFill>
+                <a:latin typeface="Consolas"/>
+              </a:rPr>
+              <a:t>WHERE</a:t>
+            </a:r>
+            <a:r>
+              <a:rPr sz="1600" i="0" b="0">
+                <a:solidFill>
+                  <a:srgbClr val="D4D4D4"/>
+                </a:solidFill>
+                <a:latin typeface="Consolas"/>
+              </a:rPr>
+              <a:t> </a:t>
+            </a:r>
+            <a:r>
+              <a:rPr sz="1600" i="0" b="0">
+                <a:solidFill>
+                  <a:srgbClr val="D4D4D4"/>
+                </a:solidFill>
+                <a:latin typeface="Consolas"/>
+              </a:rPr>
+              <a:t>estado</a:t>
+            </a:r>
+            <a:r>
+              <a:rPr sz="1600" i="0" b="0">
+                <a:solidFill>
+                  <a:srgbClr val="D4D4D4"/>
+                </a:solidFill>
+                <a:latin typeface="Consolas"/>
+              </a:rPr>
+              <a:t> &lt;&gt; </a:t>
+            </a:r>
+            <a:r>
+              <a:rPr sz="1600" i="0" b="0">
+                <a:solidFill>
+                  <a:srgbClr val="CE9178"/>
+                </a:solidFill>
+                <a:latin typeface="Consolas"/>
+              </a:rPr>
+              <a:t>'CANCELADA'</a:t>
+            </a:r>
+            <a:r>
+              <a:rPr sz="1600" i="0" b="0">
+                <a:solidFill>
+                  <a:srgbClr val="D4D4D4"/>
+                </a:solidFill>
+                <a:latin typeface="Consolas"/>
+              </a:rPr>
+              <a:t>;</a:t>
             </a:r>
           </a:p>
           <a:p>
             <a:pPr>
               <a:spcAft>
-                <a:spcPts val="428"/>
+                <a:spcPts val="342"/>
               </a:spcAft>
             </a:pPr>
             <a:r>
-              <a:rPr sz="2000" i="1" b="0">
-                <a:solidFill>
-                  <a:srgbClr val="6A9955"/>
-                </a:solidFill>
-                <a:latin typeface="Consolas"/>
-              </a:rPr>
-              <a:t>-- T2 intenta la misma franja que T1:</a:t>
+              <a:rPr sz="1600" i="0" b="0">
+                <a:solidFill>
+                  <a:srgbClr val="D4D4D4"/>
+                </a:solidFill>
+                <a:latin typeface="Consolas"/>
+              </a:rPr>
+              <a:t/>
             </a:r>
           </a:p>
           <a:p>
             <a:pPr>
               <a:spcAft>
-                <a:spcPts val="428"/>
+                <a:spcPts val="342"/>
               </a:spcAft>
             </a:pPr>
             <a:r>
-              <a:rPr sz="2000" i="0" b="0">
-                <a:solidFill>
-                  <a:srgbClr val="569CD6"/>
-                </a:solidFill>
-                <a:latin typeface="Consolas"/>
-              </a:rPr>
-              <a:t>INSERT</a:t>
-            </a:r>
-            <a:r>
-              <a:rPr sz="2000" i="0" b="0">
-                <a:solidFill>
-                  <a:srgbClr val="D4D4D4"/>
-                </a:solidFill>
-                <a:latin typeface="Consolas"/>
-              </a:rPr>
-              <a:t> </a:t>
-            </a:r>
-            <a:r>
-              <a:rPr sz="2000" i="0" b="0">
-                <a:solidFill>
-                  <a:srgbClr val="569CD6"/>
-                </a:solidFill>
-                <a:latin typeface="Consolas"/>
-              </a:rPr>
-              <a:t>INTO</a:t>
-            </a:r>
-            <a:r>
-              <a:rPr sz="2000" i="0" b="0">
-                <a:solidFill>
-                  <a:srgbClr val="D4D4D4"/>
-                </a:solidFill>
-                <a:latin typeface="Consolas"/>
-              </a:rPr>
-              <a:t> </a:t>
-            </a:r>
-            <a:r>
-              <a:rPr sz="2000" i="0" b="0">
-                <a:solidFill>
-                  <a:srgbClr val="DCDCAA"/>
-                </a:solidFill>
-                <a:latin typeface="Consolas"/>
-              </a:rPr>
-              <a:t>cita</a:t>
-            </a:r>
-            <a:r>
-              <a:rPr sz="2000" i="0" b="0">
-                <a:solidFill>
-                  <a:srgbClr val="D4D4D4"/>
-                </a:solidFill>
-                <a:latin typeface="Consolas"/>
-              </a:rPr>
-              <a:t> (</a:t>
-            </a:r>
-            <a:r>
-              <a:rPr sz="2000" i="0" b="0">
-                <a:solidFill>
-                  <a:srgbClr val="D4D4D4"/>
-                </a:solidFill>
-                <a:latin typeface="Consolas"/>
-              </a:rPr>
-              <a:t>id_mascota</a:t>
-            </a:r>
-            <a:r>
-              <a:rPr sz="2000" i="0" b="0">
-                <a:solidFill>
-                  <a:srgbClr val="D4D4D4"/>
-                </a:solidFill>
-                <a:latin typeface="Consolas"/>
-              </a:rPr>
-              <a:t>, </a:t>
-            </a:r>
-            <a:r>
-              <a:rPr sz="2000" i="0" b="0">
-                <a:solidFill>
-                  <a:srgbClr val="D4D4D4"/>
-                </a:solidFill>
-                <a:latin typeface="Consolas"/>
-              </a:rPr>
-              <a:t>id_veterinario</a:t>
-            </a:r>
-            <a:r>
-              <a:rPr sz="2000" i="0" b="0">
-                <a:solidFill>
-                  <a:srgbClr val="D4D4D4"/>
-                </a:solidFill>
-                <a:latin typeface="Consolas"/>
-              </a:rPr>
-              <a:t>, </a:t>
-            </a:r>
-            <a:r>
-              <a:rPr sz="2000" i="0" b="0">
-                <a:solidFill>
-                  <a:srgbClr val="D4D4D4"/>
-                </a:solidFill>
-                <a:latin typeface="Consolas"/>
-              </a:rPr>
-              <a:t>fecha_hora</a:t>
-            </a:r>
-            <a:r>
-              <a:rPr sz="2000" i="0" b="0">
-                <a:solidFill>
-                  <a:srgbClr val="D4D4D4"/>
-                </a:solidFill>
-                <a:latin typeface="Consolas"/>
-              </a:rPr>
-              <a:t>, </a:t>
-            </a:r>
-            <a:r>
-              <a:rPr sz="2000" i="0" b="0">
-                <a:solidFill>
-                  <a:srgbClr val="D4D4D4"/>
-                </a:solidFill>
-                <a:latin typeface="Consolas"/>
-              </a:rPr>
-              <a:t>estado</a:t>
-            </a:r>
-            <a:r>
-              <a:rPr sz="2000" i="0" b="0">
-                <a:solidFill>
-                  <a:srgbClr val="D4D4D4"/>
-                </a:solidFill>
-                <a:latin typeface="Consolas"/>
-              </a:rPr>
-              <a:t>)</a:t>
+              <a:rPr sz="1600" i="1" b="0">
+                <a:solidFill>
+                  <a:srgbClr val="6A9955"/>
+                </a:solidFill>
+                <a:latin typeface="Consolas"/>
+              </a:rPr>
+              <a:t>-- Una cancelada en una franja ocupada entra: el indice no la mira</a:t>
             </a:r>
           </a:p>
           <a:p>
             <a:pPr>
               <a:spcAft>
-                <a:spcPts val="428"/>
+                <a:spcPts val="342"/>
               </a:spcAft>
             </a:pPr>
             <a:r>
-              <a:rPr sz="2000" i="0" b="0">
+              <a:rPr sz="1600" i="0" b="0">
                 <a:solidFill>
                   <a:srgbClr val="569CD6"/>
                 </a:solidFill>
                 <a:latin typeface="Consolas"/>
               </a:rPr>
-              <a:t>VALUES</a:t>
-            </a:r>
-            <a:r>
-              <a:rPr sz="2000" i="0" b="0">
+              <a:t>INSERT</a:t>
+            </a:r>
+            <a:r>
+              <a:rPr sz="1600" i="0" b="0">
                 <a:solidFill>
                   <a:srgbClr val="D4D4D4"/>
                 </a:solidFill>
                 <a:latin typeface="Consolas"/>
               </a:rPr>
+              <a:t> </a:t>
+            </a:r>
+            <a:r>
+              <a:rPr sz="1600" i="0" b="0">
+                <a:solidFill>
+                  <a:srgbClr val="569CD6"/>
+                </a:solidFill>
+                <a:latin typeface="Consolas"/>
+              </a:rPr>
+              <a:t>INTO</a:t>
+            </a:r>
+            <a:r>
+              <a:rPr sz="1600" i="0" b="0">
+                <a:solidFill>
+                  <a:srgbClr val="D4D4D4"/>
+                </a:solidFill>
+                <a:latin typeface="Consolas"/>
+              </a:rPr>
+              <a:t> </a:t>
+            </a:r>
+            <a:r>
+              <a:rPr sz="1600" i="0" b="0">
+                <a:solidFill>
+                  <a:srgbClr val="DCDCAA"/>
+                </a:solidFill>
+                <a:latin typeface="Consolas"/>
+              </a:rPr>
+              <a:t>cita</a:t>
+            </a:r>
+            <a:r>
+              <a:rPr sz="1600" i="0" b="0">
+                <a:solidFill>
+                  <a:srgbClr val="D4D4D4"/>
+                </a:solidFill>
+                <a:latin typeface="Consolas"/>
+              </a:rPr>
               <a:t> (</a:t>
             </a:r>
             <a:r>
-              <a:rPr sz="2000" i="0" b="0">
-                <a:solidFill>
-                  <a:srgbClr val="B5CEA8"/>
-                </a:solidFill>
-                <a:latin typeface="Consolas"/>
-              </a:rPr>
-              <a:t>5</a:t>
-            </a:r>
-            <a:r>
-              <a:rPr sz="2000" i="0" b="0">
+              <a:rPr sz="1600" i="0" b="0">
                 <a:solidFill>
                   <a:srgbClr val="D4D4D4"/>
                 </a:solidFill>
                 <a:latin typeface="Consolas"/>
               </a:rPr>
+              <a:t>id_mascota</a:t>
+            </a:r>
+            <a:r>
+              <a:rPr sz="1600" i="0" b="0">
+                <a:solidFill>
+                  <a:srgbClr val="D4D4D4"/>
+                </a:solidFill>
+                <a:latin typeface="Consolas"/>
+              </a:rPr>
               <a:t>, </a:t>
             </a:r>
             <a:r>
-              <a:rPr sz="2000" i="0" b="0">
-                <a:solidFill>
-                  <a:srgbClr val="B5CEA8"/>
-                </a:solidFill>
-                <a:latin typeface="Consolas"/>
-              </a:rPr>
-              <a:t>1</a:t>
-            </a:r>
-            <a:r>
-              <a:rPr sz="2000" i="0" b="0">
+              <a:rPr sz="1600" i="0" b="0">
                 <a:solidFill>
                   <a:srgbClr val="D4D4D4"/>
                 </a:solidFill>
                 <a:latin typeface="Consolas"/>
               </a:rPr>
+              <a:t>id_veterinario</a:t>
+            </a:r>
+            <a:r>
+              <a:rPr sz="1600" i="0" b="0">
+                <a:solidFill>
+                  <a:srgbClr val="D4D4D4"/>
+                </a:solidFill>
+                <a:latin typeface="Consolas"/>
+              </a:rPr>
               <a:t>, </a:t>
             </a:r>
             <a:r>
-              <a:rPr sz="2000" i="0" b="0">
-                <a:solidFill>
-                  <a:srgbClr val="4EC9B0"/>
-                </a:solidFill>
-                <a:latin typeface="Consolas"/>
-              </a:rPr>
-              <a:t>TIMESTAMP</a:t>
-            </a:r>
-            <a:r>
-              <a:rPr sz="2000" i="0" b="0">
+              <a:rPr sz="1600" i="0" b="0">
                 <a:solidFill>
                   <a:srgbClr val="D4D4D4"/>
                 </a:solidFill>
                 <a:latin typeface="Consolas"/>
               </a:rPr>
-              <a:t> </a:t>
-            </a:r>
-            <a:r>
-              <a:rPr sz="2000" i="0" b="0">
-                <a:solidFill>
-                  <a:srgbClr val="CE9178"/>
-                </a:solidFill>
-                <a:latin typeface="Consolas"/>
-              </a:rPr>
-              <a:t>'2026-09-01 08:00:00'</a:t>
-            </a:r>
-            <a:r>
-              <a:rPr sz="2000" i="0" b="0">
+              <a:t>fecha_hora</a:t>
+            </a:r>
+            <a:r>
+              <a:rPr sz="1600" i="0" b="0">
                 <a:solidFill>
                   <a:srgbClr val="D4D4D4"/>
                 </a:solidFill>
@@ -10653,54 +12710,449 @@
               <a:t>, </a:t>
             </a:r>
             <a:r>
-              <a:rPr sz="2000" i="0" b="0">
-                <a:solidFill>
-                  <a:srgbClr val="CE9178"/>
-                </a:solidFill>
-                <a:latin typeface="Consolas"/>
-              </a:rPr>
-              <a:t>'PROGRAMADA'</a:t>
-            </a:r>
-            <a:r>
-              <a:rPr sz="2000" i="0" b="0">
+              <a:rPr sz="1600" i="0" b="0">
                 <a:solidFill>
                   <a:srgbClr val="D4D4D4"/>
                 </a:solidFill>
                 <a:latin typeface="Consolas"/>
               </a:rPr>
-              <a:t>);</a:t>
+              <a:t>estado</a:t>
+            </a:r>
+            <a:r>
+              <a:rPr sz="1600" i="0" b="0">
+                <a:solidFill>
+                  <a:srgbClr val="D4D4D4"/>
+                </a:solidFill>
+                <a:latin typeface="Consolas"/>
+              </a:rPr>
+              <a:t>)</a:t>
             </a:r>
           </a:p>
           <a:p>
             <a:pPr>
               <a:spcAft>
-                <a:spcPts val="428"/>
+                <a:spcPts val="342"/>
               </a:spcAft>
             </a:pPr>
             <a:r>
-              <a:rPr sz="2000" i="1" b="0">
-                <a:solidFill>
-                  <a:srgbClr val="6A9955"/>
-                </a:solidFill>
-                <a:latin typeface="Consolas"/>
-              </a:rPr>
-              <a:t>-- ERROR:  duplicate key value violates unique constraint</a:t>
+              <a:rPr sz="1600" i="0" b="0">
+                <a:solidFill>
+                  <a:srgbClr val="569CD6"/>
+                </a:solidFill>
+                <a:latin typeface="Consolas"/>
+              </a:rPr>
+              <a:t>VALUES</a:t>
+            </a:r>
+            <a:r>
+              <a:rPr sz="1600" i="0" b="0">
+                <a:solidFill>
+                  <a:srgbClr val="D4D4D4"/>
+                </a:solidFill>
+                <a:latin typeface="Consolas"/>
+              </a:rPr>
+              <a:t> (</a:t>
+            </a:r>
+            <a:r>
+              <a:rPr sz="1600" i="0" b="0">
+                <a:solidFill>
+                  <a:srgbClr val="B5CEA8"/>
+                </a:solidFill>
+                <a:latin typeface="Consolas"/>
+              </a:rPr>
+              <a:t>5</a:t>
+            </a:r>
+            <a:r>
+              <a:rPr sz="1600" i="0" b="0">
+                <a:solidFill>
+                  <a:srgbClr val="D4D4D4"/>
+                </a:solidFill>
+                <a:latin typeface="Consolas"/>
+              </a:rPr>
+              <a:t>, </a:t>
+            </a:r>
+            <a:r>
+              <a:rPr sz="1600" i="0" b="0">
+                <a:solidFill>
+                  <a:srgbClr val="B5CEA8"/>
+                </a:solidFill>
+                <a:latin typeface="Consolas"/>
+              </a:rPr>
+              <a:t>1</a:t>
+            </a:r>
+            <a:r>
+              <a:rPr sz="1600" i="0" b="0">
+                <a:solidFill>
+                  <a:srgbClr val="D4D4D4"/>
+                </a:solidFill>
+                <a:latin typeface="Consolas"/>
+              </a:rPr>
+              <a:t>, </a:t>
+            </a:r>
+            <a:r>
+              <a:rPr sz="1600" i="0" b="0">
+                <a:solidFill>
+                  <a:srgbClr val="4EC9B0"/>
+                </a:solidFill>
+                <a:latin typeface="Consolas"/>
+              </a:rPr>
+              <a:t>TIMESTAMP</a:t>
+            </a:r>
+            <a:r>
+              <a:rPr sz="1600" i="0" b="0">
+                <a:solidFill>
+                  <a:srgbClr val="D4D4D4"/>
+                </a:solidFill>
+                <a:latin typeface="Consolas"/>
+              </a:rPr>
+              <a:t> </a:t>
+            </a:r>
+            <a:r>
+              <a:rPr sz="1600" i="0" b="0">
+                <a:solidFill>
+                  <a:srgbClr val="CE9178"/>
+                </a:solidFill>
+                <a:latin typeface="Consolas"/>
+              </a:rPr>
+              <a:t>'2026-09-01 08:00:00'</a:t>
+            </a:r>
+            <a:r>
+              <a:rPr sz="1600" i="0" b="0">
+                <a:solidFill>
+                  <a:srgbClr val="D4D4D4"/>
+                </a:solidFill>
+                <a:latin typeface="Consolas"/>
+              </a:rPr>
+              <a:t>, </a:t>
+            </a:r>
+            <a:r>
+              <a:rPr sz="1600" i="0" b="0">
+                <a:solidFill>
+                  <a:srgbClr val="CE9178"/>
+                </a:solidFill>
+                <a:latin typeface="Consolas"/>
+              </a:rPr>
+              <a:t>'CANCELADA'</a:t>
+            </a:r>
+            <a:r>
+              <a:rPr sz="1600" i="0" b="0">
+                <a:solidFill>
+                  <a:srgbClr val="D4D4D4"/>
+                </a:solidFill>
+                <a:latin typeface="Consolas"/>
+              </a:rPr>
+              <a:t>);</a:t>
             </a:r>
           </a:p>
           <a:p>
             <a:pPr>
               <a:spcAft>
-                <a:spcPts val="428"/>
+                <a:spcPts val="342"/>
               </a:spcAft>
             </a:pPr>
             <a:r>
-              <a:rPr sz="2000" i="1" b="0">
+              <a:rPr sz="1600" i="0" b="0">
+                <a:solidFill>
+                  <a:srgbClr val="D4D4D4"/>
+                </a:solidFill>
+                <a:latin typeface="Consolas"/>
+              </a:rPr>
+              <a:t/>
+            </a:r>
+          </a:p>
+          <a:p>
+            <a:pPr>
+              <a:spcAft>
+                <a:spcPts val="342"/>
+              </a:spcAft>
+            </a:pPr>
+            <a:r>
+              <a:rPr sz="1600" i="1" b="0">
                 <a:solidFill>
                   <a:srgbClr val="6A9955"/>
                 </a:solidFill>
                 <a:latin typeface="Consolas"/>
               </a:rPr>
-              <a:t>--         "uq_cita_vet_franja"</a:t>
+              <a:t>-- Una vigente en la misma franja, no:</a:t>
+            </a:r>
+          </a:p>
+          <a:p>
+            <a:pPr>
+              <a:spcAft>
+                <a:spcPts val="342"/>
+              </a:spcAft>
+            </a:pPr>
+            <a:r>
+              <a:rPr sz="1600" i="0" b="0">
+                <a:solidFill>
+                  <a:srgbClr val="569CD6"/>
+                </a:solidFill>
+                <a:latin typeface="Consolas"/>
+              </a:rPr>
+              <a:t>INSERT</a:t>
+            </a:r>
+            <a:r>
+              <a:rPr sz="1600" i="0" b="0">
+                <a:solidFill>
+                  <a:srgbClr val="D4D4D4"/>
+                </a:solidFill>
+                <a:latin typeface="Consolas"/>
+              </a:rPr>
+              <a:t> </a:t>
+            </a:r>
+            <a:r>
+              <a:rPr sz="1600" i="0" b="0">
+                <a:solidFill>
+                  <a:srgbClr val="569CD6"/>
+                </a:solidFill>
+                <a:latin typeface="Consolas"/>
+              </a:rPr>
+              <a:t>INTO</a:t>
+            </a:r>
+            <a:r>
+              <a:rPr sz="1600" i="0" b="0">
+                <a:solidFill>
+                  <a:srgbClr val="D4D4D4"/>
+                </a:solidFill>
+                <a:latin typeface="Consolas"/>
+              </a:rPr>
+              <a:t> </a:t>
+            </a:r>
+            <a:r>
+              <a:rPr sz="1600" i="0" b="0">
+                <a:solidFill>
+                  <a:srgbClr val="DCDCAA"/>
+                </a:solidFill>
+                <a:latin typeface="Consolas"/>
+              </a:rPr>
+              <a:t>cita</a:t>
+            </a:r>
+            <a:r>
+              <a:rPr sz="1600" i="0" b="0">
+                <a:solidFill>
+                  <a:srgbClr val="D4D4D4"/>
+                </a:solidFill>
+                <a:latin typeface="Consolas"/>
+              </a:rPr>
+              <a:t> (</a:t>
+            </a:r>
+            <a:r>
+              <a:rPr sz="1600" i="0" b="0">
+                <a:solidFill>
+                  <a:srgbClr val="D4D4D4"/>
+                </a:solidFill>
+                <a:latin typeface="Consolas"/>
+              </a:rPr>
+              <a:t>id_mascota</a:t>
+            </a:r>
+            <a:r>
+              <a:rPr sz="1600" i="0" b="0">
+                <a:solidFill>
+                  <a:srgbClr val="D4D4D4"/>
+                </a:solidFill>
+                <a:latin typeface="Consolas"/>
+              </a:rPr>
+              <a:t>, </a:t>
+            </a:r>
+            <a:r>
+              <a:rPr sz="1600" i="0" b="0">
+                <a:solidFill>
+                  <a:srgbClr val="D4D4D4"/>
+                </a:solidFill>
+                <a:latin typeface="Consolas"/>
+              </a:rPr>
+              <a:t>id_veterinario</a:t>
+            </a:r>
+            <a:r>
+              <a:rPr sz="1600" i="0" b="0">
+                <a:solidFill>
+                  <a:srgbClr val="D4D4D4"/>
+                </a:solidFill>
+                <a:latin typeface="Consolas"/>
+              </a:rPr>
+              <a:t>, </a:t>
+            </a:r>
+            <a:r>
+              <a:rPr sz="1600" i="0" b="0">
+                <a:solidFill>
+                  <a:srgbClr val="D4D4D4"/>
+                </a:solidFill>
+                <a:latin typeface="Consolas"/>
+              </a:rPr>
+              <a:t>fecha_hora</a:t>
+            </a:r>
+            <a:r>
+              <a:rPr sz="1600" i="0" b="0">
+                <a:solidFill>
+                  <a:srgbClr val="D4D4D4"/>
+                </a:solidFill>
+                <a:latin typeface="Consolas"/>
+              </a:rPr>
+              <a:t>, </a:t>
+            </a:r>
+            <a:r>
+              <a:rPr sz="1600" i="0" b="0">
+                <a:solidFill>
+                  <a:srgbClr val="D4D4D4"/>
+                </a:solidFill>
+                <a:latin typeface="Consolas"/>
+              </a:rPr>
+              <a:t>estado</a:t>
+            </a:r>
+            <a:r>
+              <a:rPr sz="1600" i="0" b="0">
+                <a:solidFill>
+                  <a:srgbClr val="D4D4D4"/>
+                </a:solidFill>
+                <a:latin typeface="Consolas"/>
+              </a:rPr>
+              <a:t>)</a:t>
+            </a:r>
+          </a:p>
+          <a:p>
+            <a:pPr>
+              <a:spcAft>
+                <a:spcPts val="342"/>
+              </a:spcAft>
+            </a:pPr>
+            <a:r>
+              <a:rPr sz="1600" i="0" b="0">
+                <a:solidFill>
+                  <a:srgbClr val="569CD6"/>
+                </a:solidFill>
+                <a:latin typeface="Consolas"/>
+              </a:rPr>
+              <a:t>VALUES</a:t>
+            </a:r>
+            <a:r>
+              <a:rPr sz="1600" i="0" b="0">
+                <a:solidFill>
+                  <a:srgbClr val="D4D4D4"/>
+                </a:solidFill>
+                <a:latin typeface="Consolas"/>
+              </a:rPr>
+              <a:t> (</a:t>
+            </a:r>
+            <a:r>
+              <a:rPr sz="1600" i="0" b="0">
+                <a:solidFill>
+                  <a:srgbClr val="B5CEA8"/>
+                </a:solidFill>
+                <a:latin typeface="Consolas"/>
+              </a:rPr>
+              <a:t>5</a:t>
+            </a:r>
+            <a:r>
+              <a:rPr sz="1600" i="0" b="0">
+                <a:solidFill>
+                  <a:srgbClr val="D4D4D4"/>
+                </a:solidFill>
+                <a:latin typeface="Consolas"/>
+              </a:rPr>
+              <a:t>, </a:t>
+            </a:r>
+            <a:r>
+              <a:rPr sz="1600" i="0" b="0">
+                <a:solidFill>
+                  <a:srgbClr val="B5CEA8"/>
+                </a:solidFill>
+                <a:latin typeface="Consolas"/>
+              </a:rPr>
+              <a:t>1</a:t>
+            </a:r>
+            <a:r>
+              <a:rPr sz="1600" i="0" b="0">
+                <a:solidFill>
+                  <a:srgbClr val="D4D4D4"/>
+                </a:solidFill>
+                <a:latin typeface="Consolas"/>
+              </a:rPr>
+              <a:t>, </a:t>
+            </a:r>
+            <a:r>
+              <a:rPr sz="1600" i="0" b="0">
+                <a:solidFill>
+                  <a:srgbClr val="4EC9B0"/>
+                </a:solidFill>
+                <a:latin typeface="Consolas"/>
+              </a:rPr>
+              <a:t>TIMESTAMP</a:t>
+            </a:r>
+            <a:r>
+              <a:rPr sz="1600" i="0" b="0">
+                <a:solidFill>
+                  <a:srgbClr val="D4D4D4"/>
+                </a:solidFill>
+                <a:latin typeface="Consolas"/>
+              </a:rPr>
+              <a:t> </a:t>
+            </a:r>
+            <a:r>
+              <a:rPr sz="1600" i="0" b="0">
+                <a:solidFill>
+                  <a:srgbClr val="CE9178"/>
+                </a:solidFill>
+                <a:latin typeface="Consolas"/>
+              </a:rPr>
+              <a:t>'2026-09-01 08:00:00'</a:t>
+            </a:r>
+            <a:r>
+              <a:rPr sz="1600" i="0" b="0">
+                <a:solidFill>
+                  <a:srgbClr val="D4D4D4"/>
+                </a:solidFill>
+                <a:latin typeface="Consolas"/>
+              </a:rPr>
+              <a:t>, </a:t>
+            </a:r>
+            <a:r>
+              <a:rPr sz="1600" i="0" b="0">
+                <a:solidFill>
+                  <a:srgbClr val="CE9178"/>
+                </a:solidFill>
+                <a:latin typeface="Consolas"/>
+              </a:rPr>
+              <a:t>'PROGRAMADA'</a:t>
+            </a:r>
+            <a:r>
+              <a:rPr sz="1600" i="0" b="0">
+                <a:solidFill>
+                  <a:srgbClr val="D4D4D4"/>
+                </a:solidFill>
+                <a:latin typeface="Consolas"/>
+              </a:rPr>
+              <a:t>);</a:t>
+            </a:r>
+          </a:p>
+          <a:p>
+            <a:pPr>
+              <a:spcAft>
+                <a:spcPts val="342"/>
+              </a:spcAft>
+            </a:pPr>
+            <a:r>
+              <a:rPr sz="1600" i="1" b="0">
+                <a:solidFill>
+                  <a:srgbClr val="6A9955"/>
+                </a:solidFill>
+                <a:latin typeface="Consolas"/>
+              </a:rPr>
+              <a:t>-- ERROR:  duplicate key value violates unique constraint</a:t>
+            </a:r>
+          </a:p>
+          <a:p>
+            <a:pPr>
+              <a:spcAft>
+                <a:spcPts val="342"/>
+              </a:spcAft>
+            </a:pPr>
+            <a:r>
+              <a:rPr sz="1600" i="1" b="0">
+                <a:solidFill>
+                  <a:srgbClr val="6A9955"/>
+                </a:solidFill>
+                <a:latin typeface="Consolas"/>
+              </a:rPr>
+              <a:t>--         "uq_cita_vet_franja"      (SQLSTATE 23505)</a:t>
             </a:r>
           </a:p>
         </p:txBody>
@@ -10735,7 +13187,7 @@
                 </a:solidFill>
                 <a:latin typeface="Calibri"/>
               </a:rPr>
-              <a:t>Poner solo BEGIN/COMMIT no basta: las dos transacciones leen «libre» antes de confirmar. El UNIQUE lo verifica el motor al escribir: la segunda reserva falla.</a:t>
+              <a:t>Poner solo BEGIN/COMMIT no basta: las dos transacciones leen «libre» antes de confirmar. El indice unico se verifica al escribir, y por ser parcial deja que una cita cancelada libere su franja.</a:t>
             </a:r>
           </a:p>
         </p:txBody>
@@ -10923,14 +13375,83 @@
       </p:sp>
       <p:sp>
         <p:nvSpPr>
-          <p:cNvPr id="5" name="TextBox 4"/>
+          <p:cNvPr id="5" name="Rounded Rectangle 4"/>
+          <p:cNvSpPr/>
+          <p:nvPr/>
+        </p:nvSpPr>
+        <p:spPr>
+          <a:xfrm>
+            <a:off x="5797149" y="1343926"/>
+            <a:ext cx="6010497" cy="4837658"/>
+          </a:xfrm>
+          <a:prstGeom prst="roundRect">
+            <a:avLst>
+              <a:gd name="adj" fmla="val 4000"/>
+            </a:avLst>
+          </a:prstGeom>
+          <a:solidFill>
+            <a:srgbClr val="E8EEF4"/>
+          </a:solidFill>
+          <a:ln>
+            <a:noFill/>
+          </a:ln>
+        </p:spPr>
+        <p:style>
+          <a:lnRef idx="1">
+            <a:schemeClr val="accent1"/>
+          </a:lnRef>
+          <a:fillRef idx="3">
+            <a:schemeClr val="accent1"/>
+          </a:fillRef>
+          <a:effectRef idx="2">
+            <a:schemeClr val="accent1"/>
+          </a:effectRef>
+          <a:fontRef idx="minor">
+            <a:schemeClr val="lt1"/>
+          </a:fontRef>
+        </p:style>
+        <p:txBody>
+          <a:bodyPr rtlCol="0" anchor="ctr"/>
+          <a:lstStyle/>
+          <a:p>
+            <a:pPr algn="ctr"/>
+          </a:p>
+        </p:txBody>
+      </p:sp>
+      <p:pic>
+        <p:nvPicPr>
+          <p:cNvPr id="6" name="Picture 5" descr="ilus-demo-paso1.png"/>
+          <p:cNvPicPr>
+            <a:picLocks noChangeAspect="1"/>
+          </p:cNvPicPr>
+          <p:nvPr/>
+        </p:nvPicPr>
+        <p:blipFill>
+          <a:blip r:embed="rId2"/>
+          <a:stretch>
+            <a:fillRect/>
+          </a:stretch>
+        </p:blipFill>
+        <p:spPr>
+          <a:xfrm>
+            <a:off x="5870301" y="1417078"/>
+            <a:ext cx="5864193" cy="4691354"/>
+          </a:xfrm>
+          <a:prstGeom prst="rect">
+            <a:avLst/>
+          </a:prstGeom>
+        </p:spPr>
+      </p:pic>
+      <p:sp>
+        <p:nvSpPr>
+          <p:cNvPr id="7" name="TextBox 6"/>
           <p:cNvSpPr txBox="1"/>
           <p:nvPr/>
         </p:nvSpPr>
         <p:spPr>
           <a:xfrm>
-            <a:off x="457200" y="1170432"/>
-            <a:ext cx="11277295" cy="5230368"/>
+            <a:off x="457200" y="1353312"/>
+            <a:ext cx="5093061" cy="5047488"/>
           </a:xfrm>
           <a:prstGeom prst="rect">
             <a:avLst/>
@@ -10955,7 +13476,7 @@
                 </a:solidFill>
                 <a:latin typeface="Calibri"/>
               </a:rPr>
-              <a:t>–   </a:t>
+              <a:t>–   Sin restricción, dos INSERT de la misma franja </a:t>
             </a:r>
             <a:r>
               <a:rPr sz="2000" b="1" i="0">
@@ -10964,7 +13485,7 @@
                 </a:solidFill>
                 <a:latin typeface="Calibri"/>
               </a:rPr>
-              <a:t>Herramienta:</a:t>
+              <a:t>entran</a:t>
             </a:r>
             <a:r>
               <a:rPr sz="2000" b="0" i="0">
@@ -10973,7 +13494,7 @@
                 </a:solidFill>
                 <a:latin typeface="Calibri"/>
               </a:rPr>
-              <a:t> Google Docs + Live SQL</a:t>
+              <a:t> y la consulta de detección los encuentra.</a:t>
             </a:r>
           </a:p>
           <a:p>
@@ -10989,7 +13510,7 @@
                 </a:solidFill>
                 <a:latin typeface="Calibri"/>
               </a:rPr>
-              <a:t>–   </a:t>
+              <a:t>–   Con el índice único parcial, el segundo INSERT </a:t>
             </a:r>
             <a:r>
               <a:rPr sz="2000" b="1" i="0">
@@ -10998,7 +13519,7 @@
                 </a:solidFill>
                 <a:latin typeface="Calibri"/>
               </a:rPr>
-              <a:t>Demo:</a:t>
+              <a:t>falla</a:t>
             </a:r>
             <a:r>
               <a:rPr sz="2000" b="0" i="0">
@@ -11007,7 +13528,7 @@
                 </a:solidFill>
                 <a:latin typeface="Calibri"/>
               </a:rPr>
-              <a:t> Narrativa paso a paso T1/T2 sobre tabla Cita.</a:t>
+              <a:t> con violación de unicidad (23505).</a:t>
             </a:r>
           </a:p>
           <a:p>
@@ -11023,15 +13544,17 @@
                 </a:solidFill>
                 <a:latin typeface="Calibri"/>
               </a:rPr>
-              <a:t>–   Sigan el mismo dominio de la clínica (no inventen otro caso).</a:t>
-            </a:r>
-          </a:p>
-          <a:p>
-            <a:pPr>
-              <a:spcAft>
-                <a:spcPts val="800"/>
-              </a:spcAft>
-            </a:pPr>
+              <a:t>–   FOR UPDATE corre sin error en </a:t>
+            </a:r>
+            <a:r>
+              <a:rPr sz="2000" b="1" i="0">
+                <a:solidFill>
+                  <a:srgbClr val="333333"/>
+                </a:solidFill>
+                <a:latin typeface="Calibri"/>
+              </a:rPr>
+              <a:t>una sola sesión</a:t>
+            </a:r>
             <a:r>
               <a:rPr sz="2000" b="0" i="0">
                 <a:solidFill>
@@ -11039,66 +13562,14 @@
                 </a:solidFill>
                 <a:latin typeface="Calibri"/>
               </a:rPr>
-              <a:t>–   </a:t>
-            </a:r>
-            <a:r>
-              <a:rPr sz="2000" b="1" i="0">
-                <a:solidFill>
-                  <a:srgbClr val="333333"/>
-                </a:solidFill>
-                <a:latin typeface="Calibri"/>
-              </a:rPr>
-              <a:t>Qué observar:</a:t>
-            </a:r>
-            <a:r>
-              <a:rPr sz="2000" b="0" i="0">
-                <a:solidFill>
-                  <a:srgbClr val="333333"/>
-                </a:solidFill>
-                <a:latin typeface="Calibri"/>
-              </a:rPr>
-              <a:t> la segunda reserva de la misma franja falla por la restriccion UNIQUE en vez de quedar guardada como doble reserva.</a:t>
-            </a:r>
-          </a:p>
-          <a:p>
-            <a:pPr>
-              <a:spcAft>
-                <a:spcPts val="800"/>
-              </a:spcAft>
-            </a:pPr>
-            <a:r>
-              <a:rPr sz="2000" b="0" i="0">
-                <a:solidFill>
-                  <a:srgbClr val="333333"/>
-                </a:solidFill>
-                <a:latin typeface="Calibri"/>
-              </a:rPr>
-              <a:t>–   </a:t>
-            </a:r>
-            <a:r>
-              <a:rPr sz="2000" b="1" i="0">
-                <a:solidFill>
-                  <a:srgbClr val="333333"/>
-                </a:solidFill>
-                <a:latin typeface="Calibri"/>
-              </a:rPr>
-              <a:t>Qué observar:</a:t>
-            </a:r>
-            <a:r>
-              <a:rPr sz="2000" b="0" i="0">
-                <a:solidFill>
-                  <a:srgbClr val="333333"/>
-                </a:solidFill>
-                <a:latin typeface="Calibri"/>
-              </a:rPr>
-              <a:t> con FOR UPDATE la segunda sesion espera a que la primera confirme, en vez de decidir con un dato que ya cambio.</a:t>
-            </a:r>
-          </a:p>
-        </p:txBody>
-      </p:sp>
-      <p:sp>
-        <p:nvSpPr>
-          <p:cNvPr id="6" name="TextBox 5"/>
+              <a:t>: la espera se documenta en una línea de tiempo.</a:t>
+            </a:r>
+          </a:p>
+        </p:txBody>
+      </p:sp>
+      <p:sp>
+        <p:nvSpPr>
+          <p:cNvPr id="8" name="TextBox 7"/>
           <p:cNvSpPr txBox="1"/>
           <p:nvPr/>
         </p:nvSpPr>
@@ -11561,7 +14032,7 @@
                 </a:solidFill>
                 <a:latin typeface="Calibri"/>
               </a:rPr>
-              <a:t> Control de concurrencia · la clínica</a:t>
+              <a:t> control de concurrencia, o qué pasa cuando dos personas tocan el mismo dato al mismo tiempo.</a:t>
             </a:r>
           </a:p>
           <a:p>
@@ -11586,7 +14057,7 @@
                 </a:solidFill>
                 <a:latin typeface="Calibri"/>
               </a:rPr>
-              <a:t>Google Docs + Live SQL</a:t>
+              <a:t>PostgreSQL en el navegador</a:t>
             </a:r>
             <a:r>
               <a:rPr sz="2000" b="0" i="0">
@@ -11620,7 +14091,7 @@
                 </a:solidFill>
                 <a:latin typeface="Calibri"/>
               </a:rPr>
-              <a:t>–   Gratis + navegador · free tier · sin software de pago obligatorio.</a:t>
+              <a:t>–   Gratis + navegador · sin software de pago obligatorio.</a:t>
             </a:r>
           </a:p>
           <a:p>
@@ -11686,7 +14157,7 @@
                 </a:solidFill>
                 <a:latin typeface="Calibri"/>
               </a:rPr>
-              <a:t> La transaccion como unidad de todo o nada · Serializar de verdad existe, y cuesta · Los tres fenomenos indeseables, en escenas de la clinica · Los cuatro niveles de aislamiento se definen por lo que permiten.</a:t>
+              <a:t> transacción y aislamiento · los tres fenómenos · los cuatro niveles · bloqueo pesimista y optimista · deadlock · el índice único parcial.</a:t>
             </a:r>
           </a:p>
         </p:txBody>
@@ -12841,9 +15312,33 @@
           </a:prstGeom>
         </p:spPr>
       </p:pic>
-      <p:sp>
-        <p:nvSpPr>
-          <p:cNvPr id="13" name="TextBox 12"/>
+      <p:pic>
+        <p:nvPicPr>
+          <p:cNvPr id="9" name="Picture 8" descr="intercalado-doble-cita-paso4.png"/>
+          <p:cNvPicPr>
+            <a:picLocks noChangeAspect="1"/>
+          </p:cNvPicPr>
+          <p:nvPr/>
+        </p:nvPicPr>
+        <p:blipFill>
+          <a:blip r:embed="rId5"/>
+          <a:stretch>
+            <a:fillRect/>
+          </a:stretch>
+        </p:blipFill>
+        <p:spPr>
+          <a:xfrm>
+            <a:off x="5876318" y="1261872"/>
+            <a:ext cx="5852160" cy="4681728"/>
+          </a:xfrm>
+          <a:prstGeom prst="rect">
+            <a:avLst/>
+          </a:prstGeom>
+        </p:spPr>
+      </p:pic>
+      <p:sp>
+        <p:nvSpPr>
+          <p:cNvPr id="18" name="TextBox 17"/>
           <p:cNvSpPr txBox="1"/>
           <p:nvPr/>
         </p:nvSpPr>
@@ -12878,7 +15373,7 @@
       </p:sp>
       <p:sp>
         <p:nvSpPr>
-          <p:cNvPr id="14" name="TextBox 13"/>
+          <p:cNvPr id="19" name="TextBox 18"/>
           <p:cNvSpPr txBox="1"/>
           <p:nvPr/>
         </p:nvSpPr>
@@ -12910,7 +15405,25 @@
                 </a:solidFill>
                 <a:latin typeface="Calibri"/>
               </a:rPr>
-              <a:t>–   Una transaccion es un grupo de sentencias SQL que el motor trata como una sola unidad de todo o nada: o se aplican todas o no se aplica ninguna.</a:t>
+              <a:t>–   Una </a:t>
+            </a:r>
+            <a:r>
+              <a:rPr sz="2000" b="1" i="0">
+                <a:solidFill>
+                  <a:srgbClr val="333333"/>
+                </a:solidFill>
+                <a:latin typeface="Calibri"/>
+              </a:rPr>
+              <a:t>transacción</a:t>
+            </a:r>
+            <a:r>
+              <a:rPr sz="2000" b="0" i="0">
+                <a:solidFill>
+                  <a:srgbClr val="333333"/>
+                </a:solidFill>
+                <a:latin typeface="Calibri"/>
+              </a:rPr>
+              <a:t> agrupa las sentencias de un hecho: con COMMIT quedan todas, con ROLLBACK ninguna.</a:t>
             </a:r>
           </a:p>
           <a:p>
@@ -12926,7 +15439,25 @@
                 </a:solidFill>
                 <a:latin typeface="Calibri"/>
               </a:rPr>
-              <a:t>–   El motor no las ejecuta una despues de la otra: intercala sus operaciones para aprovechar disco y CPU.</a:t>
+              <a:t>–   </a:t>
+            </a:r>
+            <a:r>
+              <a:rPr sz="2000" b="1" i="0">
+                <a:solidFill>
+                  <a:srgbClr val="333333"/>
+                </a:solidFill>
+                <a:latin typeface="Calibri"/>
+              </a:rPr>
+              <a:t>Concurrencia</a:t>
+            </a:r>
+            <a:r>
+              <a:rPr sz="2000" b="0" i="0">
+                <a:solidFill>
+                  <a:srgbClr val="333333"/>
+                </a:solidFill>
+                <a:latin typeface="Calibri"/>
+              </a:rPr>
+              <a:t> es tener dos transacciones abiertas a la vez sobre los mismos datos, con sus operaciones intercaladas.</a:t>
             </a:r>
           </a:p>
           <a:p>
@@ -12942,14 +15473,66 @@
                 </a:solidFill>
                 <a:latin typeface="Calibri"/>
               </a:rPr>
-              <a:t>–   El resultado son dos mascotas citadas al mismo minuto con el mismo veterinario, y ninguna de las dos sentencias fallo ni produjo un error.</a:t>
-            </a:r>
-          </a:p>
-        </p:txBody>
-      </p:sp>
-      <p:sp>
-        <p:nvSpPr>
-          <p:cNvPr id="15" name="TextBox 14"/>
+              <a:t>–   Las dos consultan la franja, la ven </a:t>
+            </a:r>
+            <a:r>
+              <a:rPr sz="2000" b="1" i="0">
+                <a:solidFill>
+                  <a:srgbClr val="333333"/>
+                </a:solidFill>
+                <a:latin typeface="Calibri"/>
+              </a:rPr>
+              <a:t>libre</a:t>
+            </a:r>
+            <a:r>
+              <a:rPr sz="2000" b="0" i="0">
+                <a:solidFill>
+                  <a:srgbClr val="333333"/>
+                </a:solidFill>
+                <a:latin typeface="Calibri"/>
+              </a:rPr>
+              <a:t> y las dos insertan: dos citas al mismo minuto.</a:t>
+            </a:r>
+          </a:p>
+          <a:p>
+            <a:pPr>
+              <a:spcAft>
+                <a:spcPts val="800"/>
+              </a:spcAft>
+            </a:pPr>
+            <a:r>
+              <a:rPr sz="2000" b="0" i="0">
+                <a:solidFill>
+                  <a:srgbClr val="333333"/>
+                </a:solidFill>
+                <a:latin typeface="Calibri"/>
+              </a:rPr>
+              <a:t>–   Nada falló: el todo o nada protege </a:t>
+            </a:r>
+            <a:r>
+              <a:rPr sz="2000" b="1" i="0">
+                <a:solidFill>
+                  <a:srgbClr val="333333"/>
+                </a:solidFill>
+                <a:latin typeface="Calibri"/>
+              </a:rPr>
+              <a:t>una</a:t>
+            </a:r>
+            <a:r>
+              <a:rPr sz="2000" b="0" i="0">
+                <a:solidFill>
+                  <a:srgbClr val="333333"/>
+                </a:solidFill>
+                <a:latin typeface="Calibri"/>
+              </a:rPr>
+              <a:t> transacción, no a dos que se cruzan.</a:t>
+            </a:r>
+          </a:p>
+        </p:txBody>
+      </p:sp>
+      <p:sp>
+        <p:nvSpPr>
+          <p:cNvPr id="20" name="TextBox 19"/>
           <p:cNvSpPr txBox="1"/>
           <p:nvPr/>
         </p:nvSpPr>
@@ -13101,6 +15684,59 @@
                       </p:childTnLst>
                     </p:cTn>
                   </p:par>
+                  <p:par>
+                    <p:cTn id="13" fill="hold">
+                      <p:stCondLst>
+                        <p:cond delay="indefinite"/>
+                      </p:stCondLst>
+                      <p:childTnLst>
+                        <p:par>
+                          <p:cTn id="14" fill="hold">
+                            <p:stCondLst>
+                              <p:cond delay="0"/>
+                            </p:stCondLst>
+                            <p:childTnLst>
+                              <p:par>
+                                <p:cTn id="15" presetID="10" presetClass="entr" presetSubtype="0" fill="hold" nodeType="clickEffect">
+                                  <p:stCondLst>
+                                    <p:cond delay="0"/>
+                                  </p:stCondLst>
+                                  <p:childTnLst>
+                                    <p:set>
+                                      <p:cBhvr>
+                                        <p:cTn id="16" dur="1" fill="hold">
+                                          <p:stCondLst>
+                                            <p:cond delay="0"/>
+                                          </p:stCondLst>
+                                        </p:cTn>
+                                        <p:tgtEl>
+                                          <p:spTgt spid="9"/>
+                                        </p:tgtEl>
+                                        <p:attrNameLst>
+                                          <p:attrName>style.visibility</p:attrName>
+                                        </p:attrNameLst>
+                                      </p:cBhvr>
+                                      <p:to>
+                                        <p:strVal val="visible"/>
+                                      </p:to>
+                                    </p:set>
+                                    <p:animEffect transition="in" filter="fade">
+                                      <p:cBhvr>
+                                        <p:cTn id="17" dur="450"/>
+                                        <p:tgtEl>
+                                          <p:spTgt spid="9"/>
+                                        </p:tgtEl>
+                                      </p:cBhvr>
+                                    </p:animEffect>
+                                  </p:childTnLst>
+                                </p:cTn>
+                              </p:par>
+                            </p:childTnLst>
+                          </p:cTn>
+                        </p:par>
+                      </p:childTnLst>
+                    </p:cTn>
+                  </p:par>
                 </p:childTnLst>
               </p:cTn>
               <p:prevCondLst>
@@ -13450,7 +16086,25 @@
                 </a:solidFill>
                 <a:latin typeface="Calibri"/>
               </a:rPr>
-              <a:t>–   Si la clínica tiene ocho recepcionistas y cada agendamiento debe esperar a que termine el anterior, el sistema pasa de atender ocho operaciones…</a:t>
+              <a:t>–   </a:t>
+            </a:r>
+            <a:r>
+              <a:rPr sz="2000" b="1" i="0">
+                <a:solidFill>
+                  <a:srgbClr val="333333"/>
+                </a:solidFill>
+                <a:latin typeface="Calibri"/>
+              </a:rPr>
+              <a:t>Serializar</a:t>
+            </a:r>
+            <a:r>
+              <a:rPr sz="2000" b="0" i="0">
+                <a:solidFill>
+                  <a:srgbClr val="333333"/>
+                </a:solidFill>
+                <a:latin typeface="Calibri"/>
+              </a:rPr>
+              <a:t> es ejecutar las transacciones una tras otra, sin choques, pero cada una espera a la anterior.</a:t>
             </a:r>
           </a:p>
           <a:p>
@@ -13466,7 +16120,25 @@
                 </a:solidFill>
                 <a:latin typeface="Calibri"/>
               </a:rPr>
-              <a:t>–   Aislamiento, en este contexto, es la propiedad que responde a una pregunta muy concreta.</a:t>
+              <a:t>–   Con ocho recepcionistas en fila, el tiempo de espera frente a la pantalla se </a:t>
+            </a:r>
+            <a:r>
+              <a:rPr sz="2000" b="1" i="0">
+                <a:solidFill>
+                  <a:srgbClr val="333333"/>
+                </a:solidFill>
+                <a:latin typeface="Calibri"/>
+              </a:rPr>
+              <a:t>multiplica</a:t>
+            </a:r>
+            <a:r>
+              <a:rPr sz="2000" b="0" i="0">
+                <a:solidFill>
+                  <a:srgbClr val="333333"/>
+                </a:solidFill>
+                <a:latin typeface="Calibri"/>
+              </a:rPr>
+              <a:t>.</a:t>
             </a:r>
           </a:p>
           <a:p>
@@ -13482,7 +16154,59 @@
                 </a:solidFill>
                 <a:latin typeface="Calibri"/>
               </a:rPr>
-              <a:t>–   Es la I de ACID (atomicidad, consistencia, aislamiento y durabilidad) y es la unica de las cuatro propiedades que el desarrollador configura…</a:t>
+              <a:t>–   </a:t>
+            </a:r>
+            <a:r>
+              <a:rPr sz="2000" b="1" i="0">
+                <a:solidFill>
+                  <a:srgbClr val="333333"/>
+                </a:solidFill>
+                <a:latin typeface="Calibri"/>
+              </a:rPr>
+              <a:t>Aislamiento</a:t>
+            </a:r>
+            <a:r>
+              <a:rPr sz="2000" b="0" i="0">
+                <a:solidFill>
+                  <a:srgbClr val="333333"/>
+                </a:solidFill>
+                <a:latin typeface="Calibri"/>
+              </a:rPr>
+              <a:t> es lo que mi transacción puede ver de las otras que aún no terminan.</a:t>
+            </a:r>
+          </a:p>
+          <a:p>
+            <a:pPr>
+              <a:spcAft>
+                <a:spcPts val="800"/>
+              </a:spcAft>
+            </a:pPr>
+            <a:r>
+              <a:rPr sz="2000" b="0" i="0">
+                <a:solidFill>
+                  <a:srgbClr val="333333"/>
+                </a:solidFill>
+                <a:latin typeface="Calibri"/>
+              </a:rPr>
+              <a:t>–   Es la </a:t>
+            </a:r>
+            <a:r>
+              <a:rPr sz="2000" b="1" i="0">
+                <a:solidFill>
+                  <a:srgbClr val="333333"/>
+                </a:solidFill>
+                <a:latin typeface="Calibri"/>
+              </a:rPr>
+              <a:t>I de ACID</a:t>
+            </a:r>
+            <a:r>
+              <a:rPr sz="2000" b="0" i="0">
+                <a:solidFill>
+                  <a:srgbClr val="333333"/>
+                </a:solidFill>
+                <a:latin typeface="Calibri"/>
+              </a:rPr>
+              <a:t> y se configura con el nivel de aislamiento, a cambio de rendimiento.</a:t>
             </a:r>
           </a:p>
         </p:txBody>
@@ -13990,7 +16714,25 @@
                 </a:solidFill>
                 <a:latin typeface="Calibri"/>
               </a:rPr>
-              <a:t>–   Lectura sucia, o dirty read: la transaccion T1 inserta la cita de las 10:00 y todavia no hace COMMIT</a:t>
+              <a:t>–   </a:t>
+            </a:r>
+            <a:r>
+              <a:rPr sz="2000" b="1" i="0">
+                <a:solidFill>
+                  <a:srgbClr val="333333"/>
+                </a:solidFill>
+                <a:latin typeface="Calibri"/>
+              </a:rPr>
+              <a:t>Lectura sucia</a:t>
+            </a:r>
+            <a:r>
+              <a:rPr sz="2000" b="0" i="0">
+                <a:solidFill>
+                  <a:srgbClr val="333333"/>
+                </a:solidFill>
+                <a:latin typeface="Calibri"/>
+              </a:rPr>
+              <a:t> es leer un dato que otra transacción aún no confirma, y que después deshace.</a:t>
             </a:r>
           </a:p>
           <a:p>
@@ -14006,7 +16748,25 @@
                 </a:solidFill>
                 <a:latin typeface="Calibri"/>
               </a:rPr>
-              <a:t>–   T2 consulta la agenda, ve esa cita y le dice al dueno que la franja esta ocupada;</a:t>
+              <a:t>–   </a:t>
+            </a:r>
+            <a:r>
+              <a:rPr sz="2000" b="1" i="0">
+                <a:solidFill>
+                  <a:srgbClr val="333333"/>
+                </a:solidFill>
+                <a:latin typeface="Calibri"/>
+              </a:rPr>
+              <a:t>Lectura no repetible</a:t>
+            </a:r>
+            <a:r>
+              <a:rPr sz="2000" b="0" i="0">
+                <a:solidFill>
+                  <a:srgbClr val="333333"/>
+                </a:solidFill>
+                <a:latin typeface="Calibri"/>
+              </a:rPr>
+              <a:t> es leer dos veces la misma fila en una transacción y obtener dos valores.</a:t>
             </a:r>
           </a:p>
           <a:p>
@@ -14022,7 +16782,77 @@
                 </a:solidFill>
                 <a:latin typeface="Calibri"/>
               </a:rPr>
-              <a:t>–   T2 tomo una decision con un dato que jamas fue real.</a:t>
+              <a:t>–   </a:t>
+            </a:r>
+            <a:r>
+              <a:rPr sz="2000" b="1" i="0">
+                <a:solidFill>
+                  <a:srgbClr val="333333"/>
+                </a:solidFill>
+                <a:latin typeface="Calibri"/>
+              </a:rPr>
+              <a:t>Lectura fantasma</a:t>
+            </a:r>
+            <a:r>
+              <a:rPr sz="2000" b="0" i="0">
+                <a:solidFill>
+                  <a:srgbClr val="333333"/>
+                </a:solidFill>
+                <a:latin typeface="Calibri"/>
+              </a:rPr>
+              <a:t> es repetir un conteo y obtener otro número por una fila nueva que cumple el WHERE.</a:t>
+            </a:r>
+          </a:p>
+          <a:p>
+            <a:pPr>
+              <a:spcAft>
+                <a:spcPts val="800"/>
+              </a:spcAft>
+            </a:pPr>
+            <a:r>
+              <a:rPr sz="2000" b="0" i="0">
+                <a:solidFill>
+                  <a:srgbClr val="333333"/>
+                </a:solidFill>
+                <a:latin typeface="Calibri"/>
+              </a:rPr>
+              <a:t>–   La no repetible </a:t>
+            </a:r>
+            <a:r>
+              <a:rPr sz="2000" b="1" i="0">
+                <a:solidFill>
+                  <a:srgbClr val="333333"/>
+                </a:solidFill>
+                <a:latin typeface="Calibri"/>
+              </a:rPr>
+              <a:t>cambia</a:t>
+            </a:r>
+            <a:r>
+              <a:rPr sz="2000" b="0" i="0">
+                <a:solidFill>
+                  <a:srgbClr val="333333"/>
+                </a:solidFill>
+                <a:latin typeface="Calibri"/>
+              </a:rPr>
+              <a:t> una fila que ya existía; la fantasma </a:t>
+            </a:r>
+            <a:r>
+              <a:rPr sz="2000" b="1" i="0">
+                <a:solidFill>
+                  <a:srgbClr val="333333"/>
+                </a:solidFill>
+                <a:latin typeface="Calibri"/>
+              </a:rPr>
+              <a:t>agrega</a:t>
+            </a:r>
+            <a:r>
+              <a:rPr sz="2000" b="0" i="0">
+                <a:solidFill>
+                  <a:srgbClr val="333333"/>
+                </a:solidFill>
+                <a:latin typeface="Calibri"/>
+              </a:rPr>
+              <a:t> o quita filas.</a:t>
             </a:r>
           </a:p>
         </p:txBody>
@@ -15165,7 +17995,25 @@
                 </a:solidFill>
                 <a:latin typeface="Calibri"/>
               </a:rPr>
-              <a:t>–   Los cuatro niveles de aislamiento del estandar SQL se definen exactamente por cuales de esos tres fenomenos permiten.</a:t>
+              <a:t>–   Cada nivel se define por cuáles de los </a:t>
+            </a:r>
+            <a:r>
+              <a:rPr sz="2000" b="1" i="0">
+                <a:solidFill>
+                  <a:srgbClr val="333333"/>
+                </a:solidFill>
+                <a:latin typeface="Calibri"/>
+              </a:rPr>
+              <a:t>tres fenómenos</a:t>
+            </a:r>
+            <a:r>
+              <a:rPr sz="2000" b="0" i="0">
+                <a:solidFill>
+                  <a:srgbClr val="333333"/>
+                </a:solidFill>
+                <a:latin typeface="Calibri"/>
+              </a:rPr>
+              <a:t> deja pasar, de menos a más aislado.</a:t>
             </a:r>
           </a:p>
           <a:p>
@@ -15181,7 +18029,25 @@
                 </a:solidFill>
                 <a:latin typeface="Calibri"/>
               </a:rPr>
-              <a:t>–   READ UNCOMMITTED permite los tres: puede leer datos no confirmados.</a:t>
+              <a:t>–   </a:t>
+            </a:r>
+            <a:r>
+              <a:rPr sz="2000" b="1" i="0">
+                <a:solidFill>
+                  <a:srgbClr val="333333"/>
+                </a:solidFill>
+                <a:latin typeface="Calibri"/>
+              </a:rPr>
+              <a:t>READ COMMITTED</a:t>
+            </a:r>
+            <a:r>
+              <a:rPr sz="2000" b="0" i="0">
+                <a:solidFill>
+                  <a:srgbClr val="333333"/>
+                </a:solidFill>
+                <a:latin typeface="Calibri"/>
+              </a:rPr>
+              <a:t> es el nivel por omisión de PostgreSQL e impide la lectura sucia, nada más.</a:t>
             </a:r>
           </a:p>
           <a:p>
@@ -15197,7 +18063,25 @@
                 </a:solidFill>
                 <a:latin typeface="Calibri"/>
               </a:rPr>
-              <a:t>–   Es el mas rapido, practicamente no se usa en sistemas transaccionales, y Oracle ni siquiera lo implementa.</a:t>
+              <a:t>–   </a:t>
+            </a:r>
+            <a:r>
+              <a:rPr sz="2000" b="1" i="0">
+                <a:solidFill>
+                  <a:srgbClr val="333333"/>
+                </a:solidFill>
+                <a:latin typeface="Calibri"/>
+              </a:rPr>
+              <a:t>REPEATABLE READ</a:t>
+            </a:r>
+            <a:r>
+              <a:rPr sz="2000" b="0" i="0">
+                <a:solidFill>
+                  <a:srgbClr val="333333"/>
+                </a:solidFill>
+                <a:latin typeface="Calibri"/>
+              </a:rPr>
+              <a:t> impide además la no repetible, y en PostgreSQL tampoco deja ver fantasmas.</a:t>
             </a:r>
           </a:p>
           <a:p>
@@ -15213,7 +18097,25 @@
                 </a:solidFill>
                 <a:latin typeface="Calibri"/>
               </a:rPr>
-              <a:t>–   Es el nivel por omision de PostgreSQL, Oracle y SQL Server.</a:t>
+              <a:t>–   </a:t>
+            </a:r>
+            <a:r>
+              <a:rPr sz="2000" b="1" i="0">
+                <a:solidFill>
+                  <a:srgbClr val="333333"/>
+                </a:solidFill>
+                <a:latin typeface="Calibri"/>
+              </a:rPr>
+              <a:t>SERIALIZABLE</a:t>
+            </a:r>
+            <a:r>
+              <a:rPr sz="2000" b="0" i="0">
+                <a:solidFill>
+                  <a:srgbClr val="333333"/>
+                </a:solidFill>
+                <a:latin typeface="Calibri"/>
+              </a:rPr>
+              <a:t> impide los tres, y a cambio puede abortar transacciones que hay que reintentar.</a:t>
             </a:r>
           </a:p>
         </p:txBody>
